--- a/downloads/presentations/modules/anl-300.pptx
+++ b/downloads/presentations/modules/anl-300.pptx
@@ -615,7 +615,8 @@
               <a:t>Technical Deep Dive
 Metric selection should start with the public health consequence. Sensitivity may be prioritized when missing a true event is dangerous. Specificity may be prioritized when false positives create substantial burden or unnecessary intervention. Precision and positive predictive value matter when staff act on positive flags. Calibration matters when scores are interpreted as probabilities.
 Confusion matrices are useful because they show true positives, false positives, true negatives, and false negatives. Public health teams should translate each cell into operational meaning. A false negative may mean a delayed investigation. A false positive may mean staff time diverted from other work. A true positive may mean earlier action. A true negative may mean confidence to continue routine processing.
-External validation is essential when a model will be used outside its development context. Testing on a new jurisdiction, time period, data source, or population can reveal performance problems that internal validation missed. When external validation is not possible before pilot testing, agencies should begin with limited deployment, close monitoring, and conservative use.</a:t>
+External validation is essential when a model will be used outside its development context. Testing on a new jurisdiction, time period, data source, or population can reveal performance problems that internal validation missed. When external validation is not possible before pilot testing, agencies should begin with limited deployment, close monitoring, and conservative use.
+Application guidance: Identify what could go wrong, who could be affected, what safeguards are needed, and what evidence should be reviewed before use expands.</a:t>
             </a:r>
             <a:endParaRPr lang="en-US" dirty="0"/>
           </a:p>
@@ -705,7 +706,8 @@
               <a:rPr lang="en-US" dirty="0"/>
               <a:t>Technical Deep Dive
 Workflow validation examines whether the AI output is understandable, accessible, timely, actionable, and used as intended. A model can be statistically strong but operationally weak if staff do not trust it, cannot see supporting data, cannot override it, or receive alerts too late. Workflow validation should include usability testing, training, documentation, and feedback loops.
-Post-deployment validation should be planned before launch. Agencies should define monitoring indicators, review frequency, escalation triggers, and authority to pause use. Monitoring should include performance drift, subgroup changes, user override rates, incident reports, data feed changes, and public health outcomes where appropriate.</a:t>
+Post-deployment validation should be planned before launch. Agencies should define monitoring indicators, review frequency, escalation triggers, and authority to pause use. Monitoring should include performance drift, subgroup changes, user override rates, incident reports, data feed changes, and public health outcomes where appropriate.
+Application guidance: Identify what could go wrong, who could be affected, what safeguards are needed, and what evidence should be reviewed before use expands.</a:t>
             </a:r>
             <a:endParaRPr lang="en-US" dirty="0"/>
           </a:p>
@@ -796,7 +798,8 @@
               <a:t>Risks, Failure Modes, and Guardrails
 Misleading aggregate performance. Overall metrics may hide poor subgroup performance. Guardrails include subgroup testing and equity review.
 Metric mismatch. The selected metric may not match the public health consequence. Guardrails include metric selection tied to intended use and error consequences.
-Lack of external validation. Models may fail in new settings. Guardrails include local testing, limited pilots, and monitoring.</a:t>
+Lack of external validation. Models may fail in new settings. Guardrails include local testing, limited pilots, and monitoring.
+Application guidance: Identify what could go wrong, who could be affected, what safeguards are needed, and what evidence should be reviewed before use expands.</a:t>
             </a:r>
             <a:endParaRPr lang="en-US" dirty="0"/>
           </a:p>
@@ -885,7 +888,8 @@
             <a:r>
               <a:rPr lang="en-US" dirty="0"/>
               <a:t>Risks, Failure Modes, and Guardrails
-Workflow failure. A technically accurate model may be unusable or misused. Guardrails include usability testing, training, source visibility, and override documentation.</a:t>
+Workflow failure. A technically accurate model may be unusable or misused. Guardrails include usability testing, training, source visibility, and override documentation.
+Application guidance: Identify what could go wrong, who could be affected, what safeguards are needed, and what evidence should be reviewed before use expands.</a:t>
             </a:r>
             <a:endParaRPr lang="en-US" dirty="0"/>
           </a:p>
@@ -975,7 +979,8 @@
               <a:rPr lang="en-US" dirty="0"/>
               <a:t>Application to AI-Supported Workflows
 Advanced validation applies to predictive models, NLP tools, generative summaries, RAG outputs, and agentic workflows. For generative AI, validation may include factuality, completeness, source grounding, omissions, and harmful output review. For RAG, validation should test retrieval quality and citation accuracy. For agentic workflows, validation should include action safety, permission boundaries, and rollback procedures.
-The evaluation unit should be the AI-supported workflow, not the model alone. Public health agencies should ask whether the full process improves timeliness, quality, equity, safety, and staff experience without creating unacceptable risk.</a:t>
+The evaluation unit should be the AI-supported workflow, not the model alone. Public health agencies should ask whether the full process improves timeliness, quality, equity, safety, and staff experience without creating unacceptable risk.
+Application guidance: Identify what could go wrong, who could be affected, what safeguards are needed, and what evidence should be reviewed before use expands.</a:t>
             </a:r>
             <a:endParaRPr lang="en-US" dirty="0"/>
           </a:p>
@@ -1066,7 +1071,8 @@
               <a:t>Reflection Questions
 What decision or action will the AI output support?
 Which performance metrics match the consequences of error?
-Which subgroups, data sources, or settings require separate review?</a:t>
+Which subgroups, data sources, or settings require separate review?
+Application guidance: Identify what could go wrong, who could be affected, what safeguards are needed, and what evidence should be reviewed before use expands.</a:t>
             </a:r>
             <a:endParaRPr lang="en-US" dirty="0"/>
           </a:p>
@@ -1156,7 +1162,8 @@
               <a:rPr lang="en-US" dirty="0"/>
               <a:t>Reflection Questions
 What would make performance unacceptable for this use case?
-How will the agency monitor performance after deployment?</a:t>
+How will the agency monitor performance after deployment?
+Application guidance: Identify what could go wrong, who could be affected, what safeguards are needed, and what evidence should be reviewed before use expands.</a:t>
             </a:r>
             <a:endParaRPr lang="en-US" dirty="0"/>
           </a:p>
@@ -1246,7 +1253,8 @@
               <a:rPr lang="en-US" dirty="0"/>
               <a:t>Practical Exercise
 Create an advanced validation plan for one AI-supported workflow. Include intended use, validation dataset, comparison standard, performance metrics, subgroup analysis, error review, workflow testing, user feedback, monitoring indicators, escalation triggers, and documentation requirements.
-The plan should clearly explain how validation results will be interpreted and who has authority to approve, limit, pause, or reject the AI use.</a:t>
+The plan should clearly explain how validation results will be interpreted and who has authority to approve, limit, pause, or reject the AI use.
+Application guidance: Use the assignment to test whether you can explain the concept, apply it to a realistic public health situation, and identify what would need review before the work moves forward.</a:t>
             </a:r>
             <a:endParaRPr lang="en-US" dirty="0"/>
           </a:p>
@@ -1337,7 +1345,8 @@
               <a:t>Expected Artifact or Evidence
 Advanced validation plan
 Metric and error-consequence table
-Subgroup performance review plan</a:t>
+Subgroup performance review plan
+Application guidance: Identify what could go wrong, who could be affected, what safeguards are needed, and what evidence should be reviewed before use expands.</a:t>
             </a:r>
             <a:endParaRPr lang="en-US" dirty="0"/>
           </a:p>
@@ -1426,7 +1435,8 @@
             <a:r>
               <a:rPr lang="en-US" dirty="0"/>
               <a:t>Expected Artifact or Evidence
-Post-deployment monitoring schedule</a:t>
+Post-deployment monitoring schedule
+Application guidance: Identify what could go wrong, who could be affected, what safeguards are needed, and what evidence should be reviewed before use expands.</a:t>
             </a:r>
             <a:endParaRPr lang="en-US" dirty="0"/>
           </a:p>
@@ -1610,7 +1620,8 @@
 Advanced validation plan
 Metric and error-consequence table
 Subgroup performance review plan
-Post-deployment monitoring schedule</a:t>
+Post-deployment monitoring schedule
+Application guidance: Use the assignment to test whether you can explain the concept, apply it to a realistic public health situation, and identify what would need review before the work moves forward.</a:t>
             </a:r>
             <a:endParaRPr lang="en-US" dirty="0"/>
           </a:p>
@@ -1703,7 +1714,8 @@
 2. What is workflow validation?
 3. Which metric is especially important when missed true events could cause harm?
 4. What does external validation test?
-5. What should an advanced validation plan include?</a:t>
+5. What should an advanced validation plan include?
+Application guidance: Use the assignment to test whether you can explain the concept, apply it to a realistic public health situation, and identify what would need review before the work moves forward.</a:t>
             </a:r>
             <a:endParaRPr lang="en-US" dirty="0"/>
           </a:p>
@@ -1795,7 +1807,8 @@
 NIST Artificial Intelligence Risk Management Framework: https://www.nist.gov/itl/ai-risk-management-framework
 NIST AI RMF Generative AI Profile: https://www.nist.gov/publications/artificial-intelligence-risk-management-framework-generative-artificial-intelligence
 CDC Evaluation Framework: https://www.cdc.gov/evaluation/
-WHO Guidance on Large Multi-Modal Models: https://www.who.int/publications/i/item/9789240084759</a:t>
+WHO Guidance on Large Multi-Modal Models: https://www.who.int/publications/i/item/9789240084759
+Application guidance: Identify what could go wrong, who could be affected, what safeguards are needed, and what evidence should be reviewed before use expands.</a:t>
             </a:r>
             <a:endParaRPr lang="en-US" dirty="0"/>
           </a:p>
@@ -2074,7 +2087,8 @@
 Interpret sensitivity, specificity, positive predictive value, negative predictive value, precision, recall, F1 score, calibration, and subgroup performance.
 Distinguish internal validation, external validation, and workflow validation.
 Identify when model performance is insufficient for the intended use.
-Design monitoring for drift, degradation, error patterns, and unintended consequences.</a:t>
+Design monitoring for drift, degradation, error patterns, and unintended consequences.
+Application guidance: Use the assignment to test whether you can explain the concept, apply it to a realistic public health situation, and identify what would need review before the work moves forward.</a:t>
             </a:r>
             <a:endParaRPr lang="en-US" dirty="0"/>
           </a:p>
@@ -2163,7 +2177,8 @@
             <a:r>
               <a:rPr lang="en-US" dirty="0"/>
               <a:t>Learning Objectives
-Produce an advanced validation plan for an AI-supported workflow.</a:t>
+Produce an advanced validation plan for an AI-supported workflow.
+Application guidance: Use the assignment to test whether you can explain the concept, apply it to a realistic public health situation, and identify what would need review before the work moves forward.</a:t>
             </a:r>
             <a:endParaRPr lang="en-US" dirty="0"/>
           </a:p>
@@ -2254,7 +2269,8 @@
               <a:t>Module Overview
 Model validation is the process of determining whether an AI tool performs adequately for its intended use, population, setting, data sources, and workflow. Basic validation asks whether the tool works at all. Advanced validation asks whether it works well enough, for whom, under what conditions, with what limitations, and with what monitoring requirements.
 This module extends foundational validation content by focusing on metrics, subgroup performance, calibration, external validation, workflow validation, error review, drift monitoring, and documentation. Public health agencies need this deeper level of validation when AI outputs may influence investigation, outreach, resource allocation, public communication, or operational prioritization.
-Learners will develop a validation plan that connects technical performance to public health consequences. The goal is to evaluate not only the model, but the full AI-supported workflow.</a:t>
+Learners will develop a validation plan that connects technical performance to public health consequences. The goal is to evaluate not only the model, but the full AI-supported workflow.
+Application guidance: Identify what could go wrong, who could be affected, what safeguards are needed, and what evidence should be reviewed before use expands.</a:t>
             </a:r>
             <a:endParaRPr lang="en-US" dirty="0"/>
           </a:p>
@@ -2345,7 +2361,8 @@
               <a:t>Why This Topic Matters for Public Health AI
 Validation matters because public health AI tools can appear credible even when they are not fit for operational use. A polished dashboard, confident generated text, or high overall accuracy score does not prove that the tool is safe, equitable, or useful. Public health staff need to evaluate performance in relation to the specific task and the consequences of error.
 Model performance is context-dependent. A tool that performs well in one health system or state may fail in another because of different data sources, coding practices, populations, workflows, or reporting laws. A tool that performs well during development may degrade when disease patterns change or new providers begin reporting. Validation must therefore include local or context-specific testing whenever possible.
-Advanced validation also requires attention to equity. Overall performance can hide poor performance for small populations, language groups, rural communities, people with unstable housing, or communities with limited healthcare access. Public health validation should examine subgroup performance and data representativeness before AI outputs influence priority setting or resource allocation.</a:t>
+Advanced validation also requires attention to equity. Overall performance can hide poor performance for small populations, language groups, rural communities, people with unstable housing, or communities with limited healthcare access. Public health validation should examine subgroup performance and data representativeness before AI outputs influence priority setting or resource allocation.
+Application guidance: Identify what could go wrong, who could be affected, what safeguards are needed, and what evidence should be reviewed before use expands.</a:t>
             </a:r>
             <a:endParaRPr lang="en-US" dirty="0"/>
           </a:p>
@@ -2435,7 +2452,8 @@
               <a:rPr lang="en-US" dirty="0"/>
               <a:t>Public Health Example
 A public health agency may test a model that identifies incoming case reports likely to require expedited review. Overall accuracy may be high, but that number alone is not enough. Staff need to know whether the model misses rare but severe conditions, whether it performs differently across facilities, whether it over-flags reports from certain communities, and whether users understand how to act on the output.
-The agency should validate the model on recent local data, review errors with epidemiologists, test the workflow with actual users, and monitor override patterns after pilot deployment. If the model performs well technically but creates too many alerts for available staff, the workflow may still fail. Validation must include operational fit.</a:t>
+The agency should validate the model on recent local data, review errors with epidemiologists, test the workflow with actual users, and monitor override patterns after pilot deployment. If the model performs well technically but creates too many alerts for available staff, the workflow may still fail. Validation must include operational fit.
+Application guidance: Identify what could go wrong, who could be affected, what safeguards are needed, and what evidence should be reviewed before use expands.</a:t>
             </a:r>
             <a:endParaRPr lang="en-US" dirty="0"/>
           </a:p>
@@ -3206,8 +3224,8 @@
         </p:nvSpPr>
         <p:spPr>
           <a:xfrm>
-            <a:off x="9966960" y="6537960"/>
-            <a:ext cx="1645920" cy="201168"/>
+            <a:off x="9646920" y="6537960"/>
+            <a:ext cx="1965960" cy="201168"/>
           </a:xfrm>
           <a:prstGeom prst="rect">
             <a:avLst/>
@@ -3231,7 +3249,7 @@
                 <a:ea typeface="Aptos" pitchFamily="34" charset="-122"/>
                 <a:cs typeface="Aptos" pitchFamily="34" charset="-120"/>
               </a:rPr>
-              <a:t>Â© Paula Soper</a:t>
+              <a:t>Copyright Paula Soper</a:t>
             </a:r>
             <a:endParaRPr lang="en-US" sz="800" dirty="0"/>
           </a:p>
@@ -3278,77 +3296,13 @@
       </p:sp>
       <p:sp>
         <p:nvSpPr>
-          <p:cNvPr id="8" name="Shape 6"/>
+          <p:cNvPr id="8" name="Text 6"/>
           <p:cNvSpPr/>
           <p:nvPr/>
         </p:nvSpPr>
         <p:spPr>
           <a:xfrm>
             <a:off x="640080" y="658368"/>
-            <a:ext cx="420624" cy="420624"/>
-          </a:xfrm>
-          <a:prstGeom prst="ellipse">
-            <a:avLst/>
-          </a:prstGeom>
-          <a:solidFill>
-            <a:srgbClr val="0068B7"/>
-          </a:solidFill>
-          <a:ln w="12700">
-            <a:solidFill>
-              <a:srgbClr val="0068B7"/>
-            </a:solidFill>
-            <a:prstDash val="solid"/>
-          </a:ln>
-        </p:spPr>
-      </p:sp>
-      <p:sp>
-        <p:nvSpPr>
-          <p:cNvPr id="9" name="Text 7"/>
-          <p:cNvSpPr/>
-          <p:nvPr/>
-        </p:nvSpPr>
-        <p:spPr>
-          <a:xfrm>
-            <a:off x="640080" y="731520"/>
-            <a:ext cx="420624" cy="164592"/>
-          </a:xfrm>
-          <a:prstGeom prst="rect">
-            <a:avLst/>
-          </a:prstGeom>
-          <a:noFill/>
-          <a:ln/>
-        </p:spPr>
-        <p:txBody>
-          <a:bodyPr wrap="square" lIns="0" tIns="0" rIns="0" bIns="0" rtlCol="0" anchor="ctr"/>
-          <a:lstStyle/>
-          <a:p>
-            <a:pPr algn="ctr" indent="0" marL="0">
-              <a:buNone/>
-            </a:pPr>
-            <a:r>
-              <a:rPr lang="en-US" sz="1100" b="1" dirty="0">
-                <a:solidFill>
-                  <a:srgbClr val="FFFFFF"/>
-                </a:solidFill>
-                <a:latin typeface="Aptos" pitchFamily="34" charset="0"/>
-                <a:ea typeface="Aptos" pitchFamily="34" charset="-122"/>
-                <a:cs typeface="Aptos" pitchFamily="34" charset="-120"/>
-              </a:rPr>
-              <a:t>5</a:t>
-            </a:r>
-            <a:endParaRPr lang="en-US" sz="1100" dirty="0"/>
-          </a:p>
-        </p:txBody>
-      </p:sp>
-      <p:sp>
-        <p:nvSpPr>
-          <p:cNvPr id="10" name="Text 8"/>
-          <p:cNvSpPr/>
-          <p:nvPr/>
-        </p:nvSpPr>
-        <p:spPr>
-          <a:xfrm>
-            <a:off x="640080" y="621792"/>
             <a:ext cx="10881360" cy="713232"/>
           </a:xfrm>
           <a:prstGeom prst="rect">
@@ -3383,14 +3337,14 @@
       </p:sp>
       <p:sp>
         <p:nvSpPr>
-          <p:cNvPr id="11" name="Text 9"/>
+          <p:cNvPr id="9" name="Text 7"/>
           <p:cNvSpPr/>
           <p:nvPr/>
         </p:nvSpPr>
         <p:spPr>
           <a:xfrm>
             <a:off x="868680" y="1508760"/>
-            <a:ext cx="6537960" cy="4160520"/>
+            <a:ext cx="6309360" cy="4160520"/>
           </a:xfrm>
           <a:prstGeom prst="rect">
             <a:avLst/>
@@ -3449,18 +3403,18 @@
       </p:sp>
       <p:sp>
         <p:nvSpPr>
-          <p:cNvPr id="12" name="Shape 10"/>
-          <p:cNvSpPr/>
-          <p:nvPr/>
-        </p:nvSpPr>
-        <p:spPr>
-          <a:xfrm>
-            <a:off x="7909560" y="1417320"/>
-            <a:ext cx="3154680" cy="1828800"/>
+          <p:cNvPr id="10" name="Shape 8"/>
+          <p:cNvSpPr/>
+          <p:nvPr/>
+        </p:nvSpPr>
+        <p:spPr>
+          <a:xfrm>
+            <a:off x="7635240" y="1325880"/>
+            <a:ext cx="3474720" cy="1325880"/>
           </a:xfrm>
           <a:prstGeom prst="roundRect">
             <a:avLst>
-              <a:gd name="adj" fmla="val 6000"/>
+              <a:gd name="adj" fmla="val 8276"/>
             </a:avLst>
           </a:prstGeom>
           <a:solidFill>
@@ -3476,14 +3430,14 @@
       </p:sp>
       <p:sp>
         <p:nvSpPr>
-          <p:cNvPr id="13" name="Text 11"/>
-          <p:cNvSpPr/>
-          <p:nvPr/>
-        </p:nvSpPr>
-        <p:spPr>
-          <a:xfrm>
-            <a:off x="8074152" y="1563624"/>
-            <a:ext cx="2825496" cy="256032"/>
+          <p:cNvPr id="11" name="Text 9"/>
+          <p:cNvSpPr/>
+          <p:nvPr/>
+        </p:nvSpPr>
+        <p:spPr>
+          <a:xfrm>
+            <a:off x="7799832" y="1472184"/>
+            <a:ext cx="3145536" cy="256032"/>
           </a:xfrm>
           <a:prstGeom prst="rect">
             <a:avLst/>
@@ -3507,7 +3461,7 @@
                 <a:ea typeface="Aptos" pitchFamily="34" charset="-122"/>
                 <a:cs typeface="Aptos" pitchFamily="34" charset="-120"/>
               </a:rPr>
-              <a:t>Key idea</a:t>
+              <a:t>Risk check</a:t>
             </a:r>
             <a:endParaRPr lang="en-US" sz="1300" dirty="0"/>
           </a:p>
@@ -3515,14 +3469,14 @@
       </p:sp>
       <p:sp>
         <p:nvSpPr>
-          <p:cNvPr id="14" name="Text 12"/>
-          <p:cNvSpPr/>
-          <p:nvPr/>
-        </p:nvSpPr>
-        <p:spPr>
-          <a:xfrm>
-            <a:off x="8074152" y="1920240"/>
-            <a:ext cx="2825496" cy="1188720"/>
+          <p:cNvPr id="12" name="Text 10"/>
+          <p:cNvSpPr/>
+          <p:nvPr/>
+        </p:nvSpPr>
+        <p:spPr>
+          <a:xfrm>
+            <a:off x="7799832" y="1828800"/>
+            <a:ext cx="3145536" cy="685800"/>
           </a:xfrm>
           <a:prstGeom prst="rect">
             <a:avLst/>
@@ -3556,18 +3510,171 @@
       </p:sp>
       <p:sp>
         <p:nvSpPr>
-          <p:cNvPr id="15" name="Shape 13"/>
-          <p:cNvSpPr/>
-          <p:nvPr/>
-        </p:nvSpPr>
-        <p:spPr>
-          <a:xfrm>
-            <a:off x="7909560" y="3520440"/>
-            <a:ext cx="3154680" cy="1737360"/>
+          <p:cNvPr id="13" name="Shape 11"/>
+          <p:cNvSpPr/>
+          <p:nvPr/>
+        </p:nvSpPr>
+        <p:spPr>
+          <a:xfrm>
+            <a:off x="7635240" y="2788920"/>
+            <a:ext cx="3474720" cy="1536192"/>
           </a:xfrm>
           <a:prstGeom prst="roundRect">
             <a:avLst>
-              <a:gd name="adj" fmla="val 6316"/>
+              <a:gd name="adj" fmla="val 7143"/>
+            </a:avLst>
+          </a:prstGeom>
+          <a:solidFill>
+            <a:srgbClr val="FFFFFF">
+              <a:alpha val="88000"/>
+            </a:srgbClr>
+          </a:solidFill>
+          <a:ln w="12700">
+            <a:solidFill>
+              <a:srgbClr val="D6E8F2"/>
+            </a:solidFill>
+            <a:prstDash val="solid"/>
+          </a:ln>
+        </p:spPr>
+      </p:sp>
+      <p:sp>
+        <p:nvSpPr>
+          <p:cNvPr id="14" name="Shape 12"/>
+          <p:cNvSpPr/>
+          <p:nvPr/>
+        </p:nvSpPr>
+        <p:spPr>
+          <a:xfrm>
+            <a:off x="8046720" y="3108960"/>
+            <a:ext cx="2651760" cy="896112"/>
+          </a:xfrm>
+          <a:prstGeom prst="arc">
+            <a:avLst/>
+          </a:prstGeom>
+          <a:noFill/>
+          <a:ln w="25400">
+            <a:solidFill>
+              <a:srgbClr val="0068B7"/>
+            </a:solidFill>
+            <a:prstDash val="solid"/>
+          </a:ln>
+        </p:spPr>
+      </p:sp>
+      <p:sp>
+        <p:nvSpPr>
+          <p:cNvPr id="15" name="Text 13"/>
+          <p:cNvSpPr/>
+          <p:nvPr/>
+        </p:nvSpPr>
+        <p:spPr>
+          <a:xfrm>
+            <a:off x="7909560" y="3099816"/>
+            <a:ext cx="2926080" cy="256032"/>
+          </a:xfrm>
+          <a:prstGeom prst="rect">
+            <a:avLst/>
+          </a:prstGeom>
+          <a:noFill/>
+          <a:ln/>
+        </p:spPr>
+        <p:txBody>
+          <a:bodyPr wrap="square" lIns="0" tIns="0" rIns="0" bIns="0" rtlCol="0" anchor="ctr"/>
+          <a:lstStyle/>
+          <a:p>
+            <a:pPr algn="ctr" indent="0" marL="0">
+              <a:buNone/>
+            </a:pPr>
+            <a:r>
+              <a:rPr lang="en-US" sz="1500" b="1" dirty="0">
+                <a:solidFill>
+                  <a:srgbClr val="003A63"/>
+                </a:solidFill>
+                <a:latin typeface="Aptos" pitchFamily="34" charset="0"/>
+                <a:ea typeface="Aptos" pitchFamily="34" charset="-122"/>
+                <a:cs typeface="Aptos" pitchFamily="34" charset="-120"/>
+              </a:rPr>
+              <a:t>Risk</a:t>
+            </a:r>
+            <a:endParaRPr lang="en-US" sz="1500" dirty="0"/>
+          </a:p>
+        </p:txBody>
+      </p:sp>
+      <p:sp>
+        <p:nvSpPr>
+          <p:cNvPr id="16" name="Shape 14"/>
+          <p:cNvSpPr/>
+          <p:nvPr/>
+        </p:nvSpPr>
+        <p:spPr>
+          <a:xfrm>
+            <a:off x="8366760" y="3639312"/>
+            <a:ext cx="2011680" cy="0"/>
+          </a:xfrm>
+          <a:prstGeom prst="line">
+            <a:avLst/>
+          </a:prstGeom>
+          <a:noFill/>
+          <a:ln w="63500">
+            <a:solidFill>
+              <a:srgbClr val="2F8A28"/>
+            </a:solidFill>
+            <a:prstDash val="solid"/>
+          </a:ln>
+        </p:spPr>
+      </p:sp>
+      <p:sp>
+        <p:nvSpPr>
+          <p:cNvPr id="17" name="Text 15"/>
+          <p:cNvSpPr/>
+          <p:nvPr/>
+        </p:nvSpPr>
+        <p:spPr>
+          <a:xfrm>
+            <a:off x="7909560" y="3849624"/>
+            <a:ext cx="2926080" cy="164592"/>
+          </a:xfrm>
+          <a:prstGeom prst="rect">
+            <a:avLst/>
+          </a:prstGeom>
+          <a:noFill/>
+          <a:ln/>
+        </p:spPr>
+        <p:txBody>
+          <a:bodyPr wrap="square" lIns="0" tIns="0" rIns="0" bIns="0" rtlCol="0" anchor="ctr"/>
+          <a:lstStyle/>
+          <a:p>
+            <a:pPr algn="ctr" indent="0" marL="0">
+              <a:buNone/>
+            </a:pPr>
+            <a:r>
+              <a:rPr lang="en-US" sz="900" dirty="0">
+                <a:solidFill>
+                  <a:srgbClr val="003A63"/>
+                </a:solidFill>
+                <a:latin typeface="Aptos" pitchFamily="34" charset="0"/>
+                <a:ea typeface="Aptos" pitchFamily="34" charset="-122"/>
+                <a:cs typeface="Aptos" pitchFamily="34" charset="-120"/>
+              </a:rPr>
+              <a:t>Human review</a:t>
+            </a:r>
+            <a:endParaRPr lang="en-US" sz="900" dirty="0"/>
+          </a:p>
+        </p:txBody>
+      </p:sp>
+      <p:sp>
+        <p:nvSpPr>
+          <p:cNvPr id="18" name="Shape 16"/>
+          <p:cNvSpPr/>
+          <p:nvPr/>
+        </p:nvSpPr>
+        <p:spPr>
+          <a:xfrm>
+            <a:off x="7635240" y="4498848"/>
+            <a:ext cx="3474720" cy="1143000"/>
+          </a:xfrm>
+          <a:prstGeom prst="roundRect">
+            <a:avLst>
+              <a:gd name="adj" fmla="val 9600"/>
             </a:avLst>
           </a:prstGeom>
           <a:solidFill>
@@ -3583,14 +3690,14 @@
       </p:sp>
       <p:sp>
         <p:nvSpPr>
-          <p:cNvPr id="16" name="Text 14"/>
-          <p:cNvSpPr/>
-          <p:nvPr/>
-        </p:nvSpPr>
-        <p:spPr>
-          <a:xfrm>
-            <a:off x="8074152" y="3666744"/>
-            <a:ext cx="2825496" cy="256032"/>
+          <p:cNvPr id="19" name="Text 17"/>
+          <p:cNvSpPr/>
+          <p:nvPr/>
+        </p:nvSpPr>
+        <p:spPr>
+          <a:xfrm>
+            <a:off x="7799832" y="4645152"/>
+            <a:ext cx="3145536" cy="256032"/>
           </a:xfrm>
           <a:prstGeom prst="rect">
             <a:avLst/>
@@ -3614,7 +3721,7 @@
                 <a:ea typeface="Aptos" pitchFamily="34" charset="-122"/>
                 <a:cs typeface="Aptos" pitchFamily="34" charset="-120"/>
               </a:rPr>
-              <a:t>Use this for</a:t>
+              <a:t>Safeguard to plan</a:t>
             </a:r>
             <a:endParaRPr lang="en-US" sz="1300" dirty="0"/>
           </a:p>
@@ -3622,14 +3729,14 @@
       </p:sp>
       <p:sp>
         <p:nvSpPr>
-          <p:cNvPr id="17" name="Text 15"/>
-          <p:cNvSpPr/>
-          <p:nvPr/>
-        </p:nvSpPr>
-        <p:spPr>
-          <a:xfrm>
-            <a:off x="8074152" y="4023360"/>
-            <a:ext cx="2825496" cy="1097280"/>
+          <p:cNvPr id="20" name="Text 18"/>
+          <p:cNvSpPr/>
+          <p:nvPr/>
+        </p:nvSpPr>
+        <p:spPr>
+          <a:xfrm>
+            <a:off x="7799832" y="5001768"/>
+            <a:ext cx="3145536" cy="502920"/>
           </a:xfrm>
           <a:prstGeom prst="rect">
             <a:avLst/>
@@ -3655,7 +3762,7 @@
                 <a:ea typeface="Aptos" pitchFamily="34" charset="-122"/>
                 <a:cs typeface="Aptos" pitchFamily="34" charset="-120"/>
               </a:rPr>
-              <a:t>Connect the concept to public health decisions, safeguards, documentation, or implementation work.</a:t>
+              <a:t>Identify what could go wrong, who could be affected, what safeguards are needed, and what evidence should be reviewed before use expands.</a:t>
             </a:r>
             <a:endParaRPr lang="en-US" sz="1550" dirty="0"/>
           </a:p>
@@ -3829,8 +3936,8 @@
         </p:nvSpPr>
         <p:spPr>
           <a:xfrm>
-            <a:off x="9966960" y="6537960"/>
-            <a:ext cx="1645920" cy="201168"/>
+            <a:off x="9646920" y="6537960"/>
+            <a:ext cx="1965960" cy="201168"/>
           </a:xfrm>
           <a:prstGeom prst="rect">
             <a:avLst/>
@@ -3854,7 +3961,7 @@
                 <a:ea typeface="Aptos" pitchFamily="34" charset="-122"/>
                 <a:cs typeface="Aptos" pitchFamily="34" charset="-120"/>
               </a:rPr>
-              <a:t>Â© Paula Soper</a:t>
+              <a:t>Copyright Paula Soper</a:t>
             </a:r>
             <a:endParaRPr lang="en-US" sz="800" dirty="0"/>
           </a:p>
@@ -3949,7 +4056,7 @@
         <p:spPr>
           <a:xfrm>
             <a:off x="868680" y="1508760"/>
-            <a:ext cx="6537960" cy="4160520"/>
+            <a:ext cx="6309360" cy="4160520"/>
           </a:xfrm>
           <a:prstGeom prst="rect">
             <a:avLst/>
@@ -4014,12 +4121,12 @@
         </p:nvSpPr>
         <p:spPr>
           <a:xfrm>
-            <a:off x="7909560" y="1417320"/>
-            <a:ext cx="3154680" cy="1828800"/>
+            <a:off x="7635240" y="1325880"/>
+            <a:ext cx="3474720" cy="1325880"/>
           </a:xfrm>
           <a:prstGeom prst="roundRect">
             <a:avLst>
-              <a:gd name="adj" fmla="val 6000"/>
+              <a:gd name="adj" fmla="val 8276"/>
             </a:avLst>
           </a:prstGeom>
           <a:solidFill>
@@ -4041,8 +4148,8 @@
         </p:nvSpPr>
         <p:spPr>
           <a:xfrm>
-            <a:off x="8074152" y="1563624"/>
-            <a:ext cx="2825496" cy="256032"/>
+            <a:off x="7799832" y="1472184"/>
+            <a:ext cx="3145536" cy="256032"/>
           </a:xfrm>
           <a:prstGeom prst="rect">
             <a:avLst/>
@@ -4066,7 +4173,7 @@
                 <a:ea typeface="Aptos" pitchFamily="34" charset="-122"/>
                 <a:cs typeface="Aptos" pitchFamily="34" charset="-120"/>
               </a:rPr>
-              <a:t>Key idea</a:t>
+              <a:t>Risk check</a:t>
             </a:r>
             <a:endParaRPr lang="en-US" sz="1300" dirty="0"/>
           </a:p>
@@ -4080,8 +4187,8 @@
         </p:nvSpPr>
         <p:spPr>
           <a:xfrm>
-            <a:off x="8074152" y="1920240"/>
-            <a:ext cx="2825496" cy="1188720"/>
+            <a:off x="7799832" y="1828800"/>
+            <a:ext cx="3145536" cy="685800"/>
           </a:xfrm>
           <a:prstGeom prst="rect">
             <a:avLst/>
@@ -4121,12 +4228,165 @@
         </p:nvSpPr>
         <p:spPr>
           <a:xfrm>
-            <a:off x="7909560" y="3520440"/>
-            <a:ext cx="3154680" cy="1737360"/>
+            <a:off x="7635240" y="2788920"/>
+            <a:ext cx="3474720" cy="1536192"/>
           </a:xfrm>
           <a:prstGeom prst="roundRect">
             <a:avLst>
-              <a:gd name="adj" fmla="val 6316"/>
+              <a:gd name="adj" fmla="val 7143"/>
+            </a:avLst>
+          </a:prstGeom>
+          <a:solidFill>
+            <a:srgbClr val="FFFFFF">
+              <a:alpha val="88000"/>
+            </a:srgbClr>
+          </a:solidFill>
+          <a:ln w="12700">
+            <a:solidFill>
+              <a:srgbClr val="D6E8F2"/>
+            </a:solidFill>
+            <a:prstDash val="solid"/>
+          </a:ln>
+        </p:spPr>
+      </p:sp>
+      <p:sp>
+        <p:nvSpPr>
+          <p:cNvPr id="14" name="Shape 12"/>
+          <p:cNvSpPr/>
+          <p:nvPr/>
+        </p:nvSpPr>
+        <p:spPr>
+          <a:xfrm>
+            <a:off x="8046720" y="3108960"/>
+            <a:ext cx="2651760" cy="896112"/>
+          </a:xfrm>
+          <a:prstGeom prst="arc">
+            <a:avLst/>
+          </a:prstGeom>
+          <a:noFill/>
+          <a:ln w="25400">
+            <a:solidFill>
+              <a:srgbClr val="0068B7"/>
+            </a:solidFill>
+            <a:prstDash val="solid"/>
+          </a:ln>
+        </p:spPr>
+      </p:sp>
+      <p:sp>
+        <p:nvSpPr>
+          <p:cNvPr id="15" name="Text 13"/>
+          <p:cNvSpPr/>
+          <p:nvPr/>
+        </p:nvSpPr>
+        <p:spPr>
+          <a:xfrm>
+            <a:off x="7909560" y="3099816"/>
+            <a:ext cx="2926080" cy="256032"/>
+          </a:xfrm>
+          <a:prstGeom prst="rect">
+            <a:avLst/>
+          </a:prstGeom>
+          <a:noFill/>
+          <a:ln/>
+        </p:spPr>
+        <p:txBody>
+          <a:bodyPr wrap="square" lIns="0" tIns="0" rIns="0" bIns="0" rtlCol="0" anchor="ctr"/>
+          <a:lstStyle/>
+          <a:p>
+            <a:pPr algn="ctr" indent="0" marL="0">
+              <a:buNone/>
+            </a:pPr>
+            <a:r>
+              <a:rPr lang="en-US" sz="1500" b="1" dirty="0">
+                <a:solidFill>
+                  <a:srgbClr val="003A63"/>
+                </a:solidFill>
+                <a:latin typeface="Aptos" pitchFamily="34" charset="0"/>
+                <a:ea typeface="Aptos" pitchFamily="34" charset="-122"/>
+                <a:cs typeface="Aptos" pitchFamily="34" charset="-120"/>
+              </a:rPr>
+              <a:t>Risk</a:t>
+            </a:r>
+            <a:endParaRPr lang="en-US" sz="1500" dirty="0"/>
+          </a:p>
+        </p:txBody>
+      </p:sp>
+      <p:sp>
+        <p:nvSpPr>
+          <p:cNvPr id="16" name="Shape 14"/>
+          <p:cNvSpPr/>
+          <p:nvPr/>
+        </p:nvSpPr>
+        <p:spPr>
+          <a:xfrm>
+            <a:off x="8366760" y="3639312"/>
+            <a:ext cx="2011680" cy="0"/>
+          </a:xfrm>
+          <a:prstGeom prst="line">
+            <a:avLst/>
+          </a:prstGeom>
+          <a:noFill/>
+          <a:ln w="63500">
+            <a:solidFill>
+              <a:srgbClr val="2F8A28"/>
+            </a:solidFill>
+            <a:prstDash val="solid"/>
+          </a:ln>
+        </p:spPr>
+      </p:sp>
+      <p:sp>
+        <p:nvSpPr>
+          <p:cNvPr id="17" name="Text 15"/>
+          <p:cNvSpPr/>
+          <p:nvPr/>
+        </p:nvSpPr>
+        <p:spPr>
+          <a:xfrm>
+            <a:off x="7909560" y="3849624"/>
+            <a:ext cx="2926080" cy="164592"/>
+          </a:xfrm>
+          <a:prstGeom prst="rect">
+            <a:avLst/>
+          </a:prstGeom>
+          <a:noFill/>
+          <a:ln/>
+        </p:spPr>
+        <p:txBody>
+          <a:bodyPr wrap="square" lIns="0" tIns="0" rIns="0" bIns="0" rtlCol="0" anchor="ctr"/>
+          <a:lstStyle/>
+          <a:p>
+            <a:pPr algn="ctr" indent="0" marL="0">
+              <a:buNone/>
+            </a:pPr>
+            <a:r>
+              <a:rPr lang="en-US" sz="900" dirty="0">
+                <a:solidFill>
+                  <a:srgbClr val="003A63"/>
+                </a:solidFill>
+                <a:latin typeface="Aptos" pitchFamily="34" charset="0"/>
+                <a:ea typeface="Aptos" pitchFamily="34" charset="-122"/>
+                <a:cs typeface="Aptos" pitchFamily="34" charset="-120"/>
+              </a:rPr>
+              <a:t>Human review</a:t>
+            </a:r>
+            <a:endParaRPr lang="en-US" sz="900" dirty="0"/>
+          </a:p>
+        </p:txBody>
+      </p:sp>
+      <p:sp>
+        <p:nvSpPr>
+          <p:cNvPr id="18" name="Shape 16"/>
+          <p:cNvSpPr/>
+          <p:nvPr/>
+        </p:nvSpPr>
+        <p:spPr>
+          <a:xfrm>
+            <a:off x="7635240" y="4498848"/>
+            <a:ext cx="3474720" cy="1143000"/>
+          </a:xfrm>
+          <a:prstGeom prst="roundRect">
+            <a:avLst>
+              <a:gd name="adj" fmla="val 9600"/>
             </a:avLst>
           </a:prstGeom>
           <a:solidFill>
@@ -4142,14 +4402,14 @@
       </p:sp>
       <p:sp>
         <p:nvSpPr>
-          <p:cNvPr id="14" name="Text 12"/>
-          <p:cNvSpPr/>
-          <p:nvPr/>
-        </p:nvSpPr>
-        <p:spPr>
-          <a:xfrm>
-            <a:off x="8074152" y="3666744"/>
-            <a:ext cx="2825496" cy="256032"/>
+          <p:cNvPr id="19" name="Text 17"/>
+          <p:cNvSpPr/>
+          <p:nvPr/>
+        </p:nvSpPr>
+        <p:spPr>
+          <a:xfrm>
+            <a:off x="7799832" y="4645152"/>
+            <a:ext cx="3145536" cy="256032"/>
           </a:xfrm>
           <a:prstGeom prst="rect">
             <a:avLst/>
@@ -4173,7 +4433,7 @@
                 <a:ea typeface="Aptos" pitchFamily="34" charset="-122"/>
                 <a:cs typeface="Aptos" pitchFamily="34" charset="-120"/>
               </a:rPr>
-              <a:t>Use this for</a:t>
+              <a:t>Safeguard to plan</a:t>
             </a:r>
             <a:endParaRPr lang="en-US" sz="1300" dirty="0"/>
           </a:p>
@@ -4181,14 +4441,14 @@
       </p:sp>
       <p:sp>
         <p:nvSpPr>
-          <p:cNvPr id="15" name="Text 13"/>
-          <p:cNvSpPr/>
-          <p:nvPr/>
-        </p:nvSpPr>
-        <p:spPr>
-          <a:xfrm>
-            <a:off x="8074152" y="4023360"/>
-            <a:ext cx="2825496" cy="1097280"/>
+          <p:cNvPr id="20" name="Text 18"/>
+          <p:cNvSpPr/>
+          <p:nvPr/>
+        </p:nvSpPr>
+        <p:spPr>
+          <a:xfrm>
+            <a:off x="7799832" y="5001768"/>
+            <a:ext cx="3145536" cy="502920"/>
           </a:xfrm>
           <a:prstGeom prst="rect">
             <a:avLst/>
@@ -4214,7 +4474,7 @@
                 <a:ea typeface="Aptos" pitchFamily="34" charset="-122"/>
                 <a:cs typeface="Aptos" pitchFamily="34" charset="-120"/>
               </a:rPr>
-              <a:t>Connect the concept to public health decisions, safeguards, documentation, or implementation work.</a:t>
+              <a:t>Identify what could go wrong, who could be affected, what safeguards are needed, and what evidence should be reviewed before use expands.</a:t>
             </a:r>
             <a:endParaRPr lang="en-US" sz="1550" dirty="0"/>
           </a:p>
@@ -4388,8 +4648,8 @@
         </p:nvSpPr>
         <p:spPr>
           <a:xfrm>
-            <a:off x="9966960" y="6537960"/>
-            <a:ext cx="1645920" cy="201168"/>
+            <a:off x="9646920" y="6537960"/>
+            <a:ext cx="1965960" cy="201168"/>
           </a:xfrm>
           <a:prstGeom prst="rect">
             <a:avLst/>
@@ -4413,7 +4673,7 @@
                 <a:ea typeface="Aptos" pitchFamily="34" charset="-122"/>
                 <a:cs typeface="Aptos" pitchFamily="34" charset="-120"/>
               </a:rPr>
-              <a:t>Â© Paula Soper</a:t>
+              <a:t>Copyright Paula Soper</a:t>
             </a:r>
             <a:endParaRPr lang="en-US" sz="800" dirty="0"/>
           </a:p>
@@ -4460,77 +4720,13 @@
       </p:sp>
       <p:sp>
         <p:nvSpPr>
-          <p:cNvPr id="8" name="Shape 6"/>
+          <p:cNvPr id="8" name="Text 6"/>
           <p:cNvSpPr/>
           <p:nvPr/>
         </p:nvSpPr>
         <p:spPr>
           <a:xfrm>
             <a:off x="640080" y="658368"/>
-            <a:ext cx="420624" cy="420624"/>
-          </a:xfrm>
-          <a:prstGeom prst="ellipse">
-            <a:avLst/>
-          </a:prstGeom>
-          <a:solidFill>
-            <a:srgbClr val="0068B7"/>
-          </a:solidFill>
-          <a:ln w="12700">
-            <a:solidFill>
-              <a:srgbClr val="0068B7"/>
-            </a:solidFill>
-            <a:prstDash val="solid"/>
-          </a:ln>
-        </p:spPr>
-      </p:sp>
-      <p:sp>
-        <p:nvSpPr>
-          <p:cNvPr id="9" name="Text 7"/>
-          <p:cNvSpPr/>
-          <p:nvPr/>
-        </p:nvSpPr>
-        <p:spPr>
-          <a:xfrm>
-            <a:off x="640080" y="731520"/>
-            <a:ext cx="420624" cy="164592"/>
-          </a:xfrm>
-          <a:prstGeom prst="rect">
-            <a:avLst/>
-          </a:prstGeom>
-          <a:noFill/>
-          <a:ln/>
-        </p:spPr>
-        <p:txBody>
-          <a:bodyPr wrap="square" lIns="0" tIns="0" rIns="0" bIns="0" rtlCol="0" anchor="ctr"/>
-          <a:lstStyle/>
-          <a:p>
-            <a:pPr algn="ctr" indent="0" marL="0">
-              <a:buNone/>
-            </a:pPr>
-            <a:r>
-              <a:rPr lang="en-US" sz="1100" b="1" dirty="0">
-                <a:solidFill>
-                  <a:srgbClr val="FFFFFF"/>
-                </a:solidFill>
-                <a:latin typeface="Aptos" pitchFamily="34" charset="0"/>
-                <a:ea typeface="Aptos" pitchFamily="34" charset="-122"/>
-                <a:cs typeface="Aptos" pitchFamily="34" charset="-120"/>
-              </a:rPr>
-              <a:t>6</a:t>
-            </a:r>
-            <a:endParaRPr lang="en-US" sz="1100" dirty="0"/>
-          </a:p>
-        </p:txBody>
-      </p:sp>
-      <p:sp>
-        <p:nvSpPr>
-          <p:cNvPr id="10" name="Text 8"/>
-          <p:cNvSpPr/>
-          <p:nvPr/>
-        </p:nvSpPr>
-        <p:spPr>
-          <a:xfrm>
-            <a:off x="640080" y="621792"/>
             <a:ext cx="10881360" cy="713232"/>
           </a:xfrm>
           <a:prstGeom prst="rect">
@@ -4565,14 +4761,14 @@
       </p:sp>
       <p:sp>
         <p:nvSpPr>
-          <p:cNvPr id="11" name="Text 9"/>
+          <p:cNvPr id="9" name="Text 7"/>
           <p:cNvSpPr/>
           <p:nvPr/>
         </p:nvSpPr>
         <p:spPr>
           <a:xfrm>
             <a:off x="868680" y="1508760"/>
-            <a:ext cx="6537960" cy="4160520"/>
+            <a:ext cx="6309360" cy="4160520"/>
           </a:xfrm>
           <a:prstGeom prst="rect">
             <a:avLst/>
@@ -4631,18 +4827,18 @@
       </p:sp>
       <p:sp>
         <p:nvSpPr>
-          <p:cNvPr id="12" name="Shape 10"/>
-          <p:cNvSpPr/>
-          <p:nvPr/>
-        </p:nvSpPr>
-        <p:spPr>
-          <a:xfrm>
-            <a:off x="7909560" y="1417320"/>
-            <a:ext cx="3154680" cy="1828800"/>
+          <p:cNvPr id="10" name="Shape 8"/>
+          <p:cNvSpPr/>
+          <p:nvPr/>
+        </p:nvSpPr>
+        <p:spPr>
+          <a:xfrm>
+            <a:off x="7635240" y="1325880"/>
+            <a:ext cx="3474720" cy="1325880"/>
           </a:xfrm>
           <a:prstGeom prst="roundRect">
             <a:avLst>
-              <a:gd name="adj" fmla="val 6000"/>
+              <a:gd name="adj" fmla="val 8276"/>
             </a:avLst>
           </a:prstGeom>
           <a:solidFill>
@@ -4658,14 +4854,14 @@
       </p:sp>
       <p:sp>
         <p:nvSpPr>
-          <p:cNvPr id="13" name="Text 11"/>
-          <p:cNvSpPr/>
-          <p:nvPr/>
-        </p:nvSpPr>
-        <p:spPr>
-          <a:xfrm>
-            <a:off x="8074152" y="1563624"/>
-            <a:ext cx="2825496" cy="256032"/>
+          <p:cNvPr id="11" name="Text 9"/>
+          <p:cNvSpPr/>
+          <p:nvPr/>
+        </p:nvSpPr>
+        <p:spPr>
+          <a:xfrm>
+            <a:off x="7799832" y="1472184"/>
+            <a:ext cx="3145536" cy="256032"/>
           </a:xfrm>
           <a:prstGeom prst="rect">
             <a:avLst/>
@@ -4689,7 +4885,7 @@
                 <a:ea typeface="Aptos" pitchFamily="34" charset="-122"/>
                 <a:cs typeface="Aptos" pitchFamily="34" charset="-120"/>
               </a:rPr>
-              <a:t>Key idea</a:t>
+              <a:t>Risk check</a:t>
             </a:r>
             <a:endParaRPr lang="en-US" sz="1300" dirty="0"/>
           </a:p>
@@ -4697,14 +4893,14 @@
       </p:sp>
       <p:sp>
         <p:nvSpPr>
-          <p:cNvPr id="14" name="Text 12"/>
-          <p:cNvSpPr/>
-          <p:nvPr/>
-        </p:nvSpPr>
-        <p:spPr>
-          <a:xfrm>
-            <a:off x="8074152" y="1920240"/>
-            <a:ext cx="2825496" cy="1188720"/>
+          <p:cNvPr id="12" name="Text 10"/>
+          <p:cNvSpPr/>
+          <p:nvPr/>
+        </p:nvSpPr>
+        <p:spPr>
+          <a:xfrm>
+            <a:off x="7799832" y="1828800"/>
+            <a:ext cx="3145536" cy="685800"/>
           </a:xfrm>
           <a:prstGeom prst="rect">
             <a:avLst/>
@@ -4738,18 +4934,171 @@
       </p:sp>
       <p:sp>
         <p:nvSpPr>
-          <p:cNvPr id="15" name="Shape 13"/>
-          <p:cNvSpPr/>
-          <p:nvPr/>
-        </p:nvSpPr>
-        <p:spPr>
-          <a:xfrm>
-            <a:off x="7909560" y="3520440"/>
-            <a:ext cx="3154680" cy="1737360"/>
+          <p:cNvPr id="13" name="Shape 11"/>
+          <p:cNvSpPr/>
+          <p:nvPr/>
+        </p:nvSpPr>
+        <p:spPr>
+          <a:xfrm>
+            <a:off x="7635240" y="2788920"/>
+            <a:ext cx="3474720" cy="1536192"/>
           </a:xfrm>
           <a:prstGeom prst="roundRect">
             <a:avLst>
-              <a:gd name="adj" fmla="val 6316"/>
+              <a:gd name="adj" fmla="val 7143"/>
+            </a:avLst>
+          </a:prstGeom>
+          <a:solidFill>
+            <a:srgbClr val="FFFFFF">
+              <a:alpha val="88000"/>
+            </a:srgbClr>
+          </a:solidFill>
+          <a:ln w="12700">
+            <a:solidFill>
+              <a:srgbClr val="D6E8F2"/>
+            </a:solidFill>
+            <a:prstDash val="solid"/>
+          </a:ln>
+        </p:spPr>
+      </p:sp>
+      <p:sp>
+        <p:nvSpPr>
+          <p:cNvPr id="14" name="Shape 12"/>
+          <p:cNvSpPr/>
+          <p:nvPr/>
+        </p:nvSpPr>
+        <p:spPr>
+          <a:xfrm>
+            <a:off x="8046720" y="3108960"/>
+            <a:ext cx="2651760" cy="896112"/>
+          </a:xfrm>
+          <a:prstGeom prst="arc">
+            <a:avLst/>
+          </a:prstGeom>
+          <a:noFill/>
+          <a:ln w="25400">
+            <a:solidFill>
+              <a:srgbClr val="0068B7"/>
+            </a:solidFill>
+            <a:prstDash val="solid"/>
+          </a:ln>
+        </p:spPr>
+      </p:sp>
+      <p:sp>
+        <p:nvSpPr>
+          <p:cNvPr id="15" name="Text 13"/>
+          <p:cNvSpPr/>
+          <p:nvPr/>
+        </p:nvSpPr>
+        <p:spPr>
+          <a:xfrm>
+            <a:off x="7909560" y="3099816"/>
+            <a:ext cx="2926080" cy="256032"/>
+          </a:xfrm>
+          <a:prstGeom prst="rect">
+            <a:avLst/>
+          </a:prstGeom>
+          <a:noFill/>
+          <a:ln/>
+        </p:spPr>
+        <p:txBody>
+          <a:bodyPr wrap="square" lIns="0" tIns="0" rIns="0" bIns="0" rtlCol="0" anchor="ctr"/>
+          <a:lstStyle/>
+          <a:p>
+            <a:pPr algn="ctr" indent="0" marL="0">
+              <a:buNone/>
+            </a:pPr>
+            <a:r>
+              <a:rPr lang="en-US" sz="1500" b="1" dirty="0">
+                <a:solidFill>
+                  <a:srgbClr val="003A63"/>
+                </a:solidFill>
+                <a:latin typeface="Aptos" pitchFamily="34" charset="0"/>
+                <a:ea typeface="Aptos" pitchFamily="34" charset="-122"/>
+                <a:cs typeface="Aptos" pitchFamily="34" charset="-120"/>
+              </a:rPr>
+              <a:t>Risk</a:t>
+            </a:r>
+            <a:endParaRPr lang="en-US" sz="1500" dirty="0"/>
+          </a:p>
+        </p:txBody>
+      </p:sp>
+      <p:sp>
+        <p:nvSpPr>
+          <p:cNvPr id="16" name="Shape 14"/>
+          <p:cNvSpPr/>
+          <p:nvPr/>
+        </p:nvSpPr>
+        <p:spPr>
+          <a:xfrm>
+            <a:off x="8366760" y="3639312"/>
+            <a:ext cx="2011680" cy="0"/>
+          </a:xfrm>
+          <a:prstGeom prst="line">
+            <a:avLst/>
+          </a:prstGeom>
+          <a:noFill/>
+          <a:ln w="63500">
+            <a:solidFill>
+              <a:srgbClr val="2F8A28"/>
+            </a:solidFill>
+            <a:prstDash val="solid"/>
+          </a:ln>
+        </p:spPr>
+      </p:sp>
+      <p:sp>
+        <p:nvSpPr>
+          <p:cNvPr id="17" name="Text 15"/>
+          <p:cNvSpPr/>
+          <p:nvPr/>
+        </p:nvSpPr>
+        <p:spPr>
+          <a:xfrm>
+            <a:off x="7909560" y="3849624"/>
+            <a:ext cx="2926080" cy="164592"/>
+          </a:xfrm>
+          <a:prstGeom prst="rect">
+            <a:avLst/>
+          </a:prstGeom>
+          <a:noFill/>
+          <a:ln/>
+        </p:spPr>
+        <p:txBody>
+          <a:bodyPr wrap="square" lIns="0" tIns="0" rIns="0" bIns="0" rtlCol="0" anchor="ctr"/>
+          <a:lstStyle/>
+          <a:p>
+            <a:pPr algn="ctr" indent="0" marL="0">
+              <a:buNone/>
+            </a:pPr>
+            <a:r>
+              <a:rPr lang="en-US" sz="900" dirty="0">
+                <a:solidFill>
+                  <a:srgbClr val="003A63"/>
+                </a:solidFill>
+                <a:latin typeface="Aptos" pitchFamily="34" charset="0"/>
+                <a:ea typeface="Aptos" pitchFamily="34" charset="-122"/>
+                <a:cs typeface="Aptos" pitchFamily="34" charset="-120"/>
+              </a:rPr>
+              <a:t>Human review</a:t>
+            </a:r>
+            <a:endParaRPr lang="en-US" sz="900" dirty="0"/>
+          </a:p>
+        </p:txBody>
+      </p:sp>
+      <p:sp>
+        <p:nvSpPr>
+          <p:cNvPr id="18" name="Shape 16"/>
+          <p:cNvSpPr/>
+          <p:nvPr/>
+        </p:nvSpPr>
+        <p:spPr>
+          <a:xfrm>
+            <a:off x="7635240" y="4498848"/>
+            <a:ext cx="3474720" cy="1143000"/>
+          </a:xfrm>
+          <a:prstGeom prst="roundRect">
+            <a:avLst>
+              <a:gd name="adj" fmla="val 9600"/>
             </a:avLst>
           </a:prstGeom>
           <a:solidFill>
@@ -4765,14 +5114,14 @@
       </p:sp>
       <p:sp>
         <p:nvSpPr>
-          <p:cNvPr id="16" name="Text 14"/>
-          <p:cNvSpPr/>
-          <p:nvPr/>
-        </p:nvSpPr>
-        <p:spPr>
-          <a:xfrm>
-            <a:off x="8074152" y="3666744"/>
-            <a:ext cx="2825496" cy="256032"/>
+          <p:cNvPr id="19" name="Text 17"/>
+          <p:cNvSpPr/>
+          <p:nvPr/>
+        </p:nvSpPr>
+        <p:spPr>
+          <a:xfrm>
+            <a:off x="7799832" y="4645152"/>
+            <a:ext cx="3145536" cy="256032"/>
           </a:xfrm>
           <a:prstGeom prst="rect">
             <a:avLst/>
@@ -4796,7 +5145,7 @@
                 <a:ea typeface="Aptos" pitchFamily="34" charset="-122"/>
                 <a:cs typeface="Aptos" pitchFamily="34" charset="-120"/>
               </a:rPr>
-              <a:t>Use this for</a:t>
+              <a:t>Safeguard to plan</a:t>
             </a:r>
             <a:endParaRPr lang="en-US" sz="1300" dirty="0"/>
           </a:p>
@@ -4804,14 +5153,14 @@
       </p:sp>
       <p:sp>
         <p:nvSpPr>
-          <p:cNvPr id="17" name="Text 15"/>
-          <p:cNvSpPr/>
-          <p:nvPr/>
-        </p:nvSpPr>
-        <p:spPr>
-          <a:xfrm>
-            <a:off x="8074152" y="4023360"/>
-            <a:ext cx="2825496" cy="1097280"/>
+          <p:cNvPr id="20" name="Text 18"/>
+          <p:cNvSpPr/>
+          <p:nvPr/>
+        </p:nvSpPr>
+        <p:spPr>
+          <a:xfrm>
+            <a:off x="7799832" y="5001768"/>
+            <a:ext cx="3145536" cy="502920"/>
           </a:xfrm>
           <a:prstGeom prst="rect">
             <a:avLst/>
@@ -4837,7 +5186,7 @@
                 <a:ea typeface="Aptos" pitchFamily="34" charset="-122"/>
                 <a:cs typeface="Aptos" pitchFamily="34" charset="-120"/>
               </a:rPr>
-              <a:t>Connect the concept to public health decisions, safeguards, documentation, or implementation work.</a:t>
+              <a:t>Identify what could go wrong, who could be affected, what safeguards are needed, and what evidence should be reviewed before use expands.</a:t>
             </a:r>
             <a:endParaRPr lang="en-US" sz="1550" dirty="0"/>
           </a:p>
@@ -5011,8 +5360,8 @@
         </p:nvSpPr>
         <p:spPr>
           <a:xfrm>
-            <a:off x="9966960" y="6537960"/>
-            <a:ext cx="1645920" cy="201168"/>
+            <a:off x="9646920" y="6537960"/>
+            <a:ext cx="1965960" cy="201168"/>
           </a:xfrm>
           <a:prstGeom prst="rect">
             <a:avLst/>
@@ -5036,7 +5385,7 @@
                 <a:ea typeface="Aptos" pitchFamily="34" charset="-122"/>
                 <a:cs typeface="Aptos" pitchFamily="34" charset="-120"/>
               </a:rPr>
-              <a:t>Â© Paula Soper</a:t>
+              <a:t>Copyright Paula Soper</a:t>
             </a:r>
             <a:endParaRPr lang="en-US" sz="800" dirty="0"/>
           </a:p>
@@ -5131,7 +5480,7 @@
         <p:spPr>
           <a:xfrm>
             <a:off x="868680" y="1508760"/>
-            <a:ext cx="6537960" cy="4160520"/>
+            <a:ext cx="6309360" cy="4160520"/>
           </a:xfrm>
           <a:prstGeom prst="rect">
             <a:avLst/>
@@ -5196,12 +5545,12 @@
         </p:nvSpPr>
         <p:spPr>
           <a:xfrm>
-            <a:off x="7909560" y="1417320"/>
-            <a:ext cx="3154680" cy="1828800"/>
+            <a:off x="7635240" y="1325880"/>
+            <a:ext cx="3474720" cy="1325880"/>
           </a:xfrm>
           <a:prstGeom prst="roundRect">
             <a:avLst>
-              <a:gd name="adj" fmla="val 6000"/>
+              <a:gd name="adj" fmla="val 8276"/>
             </a:avLst>
           </a:prstGeom>
           <a:solidFill>
@@ -5223,8 +5572,8 @@
         </p:nvSpPr>
         <p:spPr>
           <a:xfrm>
-            <a:off x="8074152" y="1563624"/>
-            <a:ext cx="2825496" cy="256032"/>
+            <a:off x="7799832" y="1472184"/>
+            <a:ext cx="3145536" cy="256032"/>
           </a:xfrm>
           <a:prstGeom prst="rect">
             <a:avLst/>
@@ -5248,7 +5597,7 @@
                 <a:ea typeface="Aptos" pitchFamily="34" charset="-122"/>
                 <a:cs typeface="Aptos" pitchFamily="34" charset="-120"/>
               </a:rPr>
-              <a:t>Key idea</a:t>
+              <a:t>Risk check</a:t>
             </a:r>
             <a:endParaRPr lang="en-US" sz="1300" dirty="0"/>
           </a:p>
@@ -5262,8 +5611,8 @@
         </p:nvSpPr>
         <p:spPr>
           <a:xfrm>
-            <a:off x="8074152" y="1920240"/>
-            <a:ext cx="2825496" cy="1188720"/>
+            <a:off x="7799832" y="1828800"/>
+            <a:ext cx="3145536" cy="685800"/>
           </a:xfrm>
           <a:prstGeom prst="rect">
             <a:avLst/>
@@ -5303,12 +5652,165 @@
         </p:nvSpPr>
         <p:spPr>
           <a:xfrm>
-            <a:off x="7909560" y="3520440"/>
-            <a:ext cx="3154680" cy="1737360"/>
+            <a:off x="7635240" y="2788920"/>
+            <a:ext cx="3474720" cy="1536192"/>
           </a:xfrm>
           <a:prstGeom prst="roundRect">
             <a:avLst>
-              <a:gd name="adj" fmla="val 6316"/>
+              <a:gd name="adj" fmla="val 7143"/>
+            </a:avLst>
+          </a:prstGeom>
+          <a:solidFill>
+            <a:srgbClr val="FFFFFF">
+              <a:alpha val="88000"/>
+            </a:srgbClr>
+          </a:solidFill>
+          <a:ln w="12700">
+            <a:solidFill>
+              <a:srgbClr val="D6E8F2"/>
+            </a:solidFill>
+            <a:prstDash val="solid"/>
+          </a:ln>
+        </p:spPr>
+      </p:sp>
+      <p:sp>
+        <p:nvSpPr>
+          <p:cNvPr id="14" name="Shape 12"/>
+          <p:cNvSpPr/>
+          <p:nvPr/>
+        </p:nvSpPr>
+        <p:spPr>
+          <a:xfrm>
+            <a:off x="8046720" y="3108960"/>
+            <a:ext cx="2651760" cy="896112"/>
+          </a:xfrm>
+          <a:prstGeom prst="arc">
+            <a:avLst/>
+          </a:prstGeom>
+          <a:noFill/>
+          <a:ln w="25400">
+            <a:solidFill>
+              <a:srgbClr val="0068B7"/>
+            </a:solidFill>
+            <a:prstDash val="solid"/>
+          </a:ln>
+        </p:spPr>
+      </p:sp>
+      <p:sp>
+        <p:nvSpPr>
+          <p:cNvPr id="15" name="Text 13"/>
+          <p:cNvSpPr/>
+          <p:nvPr/>
+        </p:nvSpPr>
+        <p:spPr>
+          <a:xfrm>
+            <a:off x="7909560" y="3099816"/>
+            <a:ext cx="2926080" cy="256032"/>
+          </a:xfrm>
+          <a:prstGeom prst="rect">
+            <a:avLst/>
+          </a:prstGeom>
+          <a:noFill/>
+          <a:ln/>
+        </p:spPr>
+        <p:txBody>
+          <a:bodyPr wrap="square" lIns="0" tIns="0" rIns="0" bIns="0" rtlCol="0" anchor="ctr"/>
+          <a:lstStyle/>
+          <a:p>
+            <a:pPr algn="ctr" indent="0" marL="0">
+              <a:buNone/>
+            </a:pPr>
+            <a:r>
+              <a:rPr lang="en-US" sz="1500" b="1" dirty="0">
+                <a:solidFill>
+                  <a:srgbClr val="003A63"/>
+                </a:solidFill>
+                <a:latin typeface="Aptos" pitchFamily="34" charset="0"/>
+                <a:ea typeface="Aptos" pitchFamily="34" charset="-122"/>
+                <a:cs typeface="Aptos" pitchFamily="34" charset="-120"/>
+              </a:rPr>
+              <a:t>Risk</a:t>
+            </a:r>
+            <a:endParaRPr lang="en-US" sz="1500" dirty="0"/>
+          </a:p>
+        </p:txBody>
+      </p:sp>
+      <p:sp>
+        <p:nvSpPr>
+          <p:cNvPr id="16" name="Shape 14"/>
+          <p:cNvSpPr/>
+          <p:nvPr/>
+        </p:nvSpPr>
+        <p:spPr>
+          <a:xfrm>
+            <a:off x="8366760" y="3639312"/>
+            <a:ext cx="2011680" cy="0"/>
+          </a:xfrm>
+          <a:prstGeom prst="line">
+            <a:avLst/>
+          </a:prstGeom>
+          <a:noFill/>
+          <a:ln w="63500">
+            <a:solidFill>
+              <a:srgbClr val="2F8A28"/>
+            </a:solidFill>
+            <a:prstDash val="solid"/>
+          </a:ln>
+        </p:spPr>
+      </p:sp>
+      <p:sp>
+        <p:nvSpPr>
+          <p:cNvPr id="17" name="Text 15"/>
+          <p:cNvSpPr/>
+          <p:nvPr/>
+        </p:nvSpPr>
+        <p:spPr>
+          <a:xfrm>
+            <a:off x="7909560" y="3849624"/>
+            <a:ext cx="2926080" cy="164592"/>
+          </a:xfrm>
+          <a:prstGeom prst="rect">
+            <a:avLst/>
+          </a:prstGeom>
+          <a:noFill/>
+          <a:ln/>
+        </p:spPr>
+        <p:txBody>
+          <a:bodyPr wrap="square" lIns="0" tIns="0" rIns="0" bIns="0" rtlCol="0" anchor="ctr"/>
+          <a:lstStyle/>
+          <a:p>
+            <a:pPr algn="ctr" indent="0" marL="0">
+              <a:buNone/>
+            </a:pPr>
+            <a:r>
+              <a:rPr lang="en-US" sz="900" dirty="0">
+                <a:solidFill>
+                  <a:srgbClr val="003A63"/>
+                </a:solidFill>
+                <a:latin typeface="Aptos" pitchFamily="34" charset="0"/>
+                <a:ea typeface="Aptos" pitchFamily="34" charset="-122"/>
+                <a:cs typeface="Aptos" pitchFamily="34" charset="-120"/>
+              </a:rPr>
+              <a:t>Human review</a:t>
+            </a:r>
+            <a:endParaRPr lang="en-US" sz="900" dirty="0"/>
+          </a:p>
+        </p:txBody>
+      </p:sp>
+      <p:sp>
+        <p:nvSpPr>
+          <p:cNvPr id="18" name="Shape 16"/>
+          <p:cNvSpPr/>
+          <p:nvPr/>
+        </p:nvSpPr>
+        <p:spPr>
+          <a:xfrm>
+            <a:off x="7635240" y="4498848"/>
+            <a:ext cx="3474720" cy="1143000"/>
+          </a:xfrm>
+          <a:prstGeom prst="roundRect">
+            <a:avLst>
+              <a:gd name="adj" fmla="val 9600"/>
             </a:avLst>
           </a:prstGeom>
           <a:solidFill>
@@ -5324,14 +5826,14 @@
       </p:sp>
       <p:sp>
         <p:nvSpPr>
-          <p:cNvPr id="14" name="Text 12"/>
-          <p:cNvSpPr/>
-          <p:nvPr/>
-        </p:nvSpPr>
-        <p:spPr>
-          <a:xfrm>
-            <a:off x="8074152" y="3666744"/>
-            <a:ext cx="2825496" cy="256032"/>
+          <p:cNvPr id="19" name="Text 17"/>
+          <p:cNvSpPr/>
+          <p:nvPr/>
+        </p:nvSpPr>
+        <p:spPr>
+          <a:xfrm>
+            <a:off x="7799832" y="4645152"/>
+            <a:ext cx="3145536" cy="256032"/>
           </a:xfrm>
           <a:prstGeom prst="rect">
             <a:avLst/>
@@ -5355,7 +5857,7 @@
                 <a:ea typeface="Aptos" pitchFamily="34" charset="-122"/>
                 <a:cs typeface="Aptos" pitchFamily="34" charset="-120"/>
               </a:rPr>
-              <a:t>Use this for</a:t>
+              <a:t>Safeguard to plan</a:t>
             </a:r>
             <a:endParaRPr lang="en-US" sz="1300" dirty="0"/>
           </a:p>
@@ -5363,14 +5865,14 @@
       </p:sp>
       <p:sp>
         <p:nvSpPr>
-          <p:cNvPr id="15" name="Text 13"/>
-          <p:cNvSpPr/>
-          <p:nvPr/>
-        </p:nvSpPr>
-        <p:spPr>
-          <a:xfrm>
-            <a:off x="8074152" y="4023360"/>
-            <a:ext cx="2825496" cy="1097280"/>
+          <p:cNvPr id="20" name="Text 18"/>
+          <p:cNvSpPr/>
+          <p:nvPr/>
+        </p:nvSpPr>
+        <p:spPr>
+          <a:xfrm>
+            <a:off x="7799832" y="5001768"/>
+            <a:ext cx="3145536" cy="502920"/>
           </a:xfrm>
           <a:prstGeom prst="rect">
             <a:avLst/>
@@ -5396,7 +5898,7 @@
                 <a:ea typeface="Aptos" pitchFamily="34" charset="-122"/>
                 <a:cs typeface="Aptos" pitchFamily="34" charset="-120"/>
               </a:rPr>
-              <a:t>Connect the concept to public health decisions, safeguards, documentation, or implementation work.</a:t>
+              <a:t>Identify what could go wrong, who could be affected, what safeguards are needed, and what evidence should be reviewed before use expands.</a:t>
             </a:r>
             <a:endParaRPr lang="en-US" sz="1550" dirty="0"/>
           </a:p>
@@ -5570,8 +6072,8 @@
         </p:nvSpPr>
         <p:spPr>
           <a:xfrm>
-            <a:off x="9966960" y="6537960"/>
-            <a:ext cx="1645920" cy="201168"/>
+            <a:off x="9646920" y="6537960"/>
+            <a:ext cx="1965960" cy="201168"/>
           </a:xfrm>
           <a:prstGeom prst="rect">
             <a:avLst/>
@@ -5595,7 +6097,7 @@
                 <a:ea typeface="Aptos" pitchFamily="34" charset="-122"/>
                 <a:cs typeface="Aptos" pitchFamily="34" charset="-120"/>
               </a:rPr>
-              <a:t>Â© Paula Soper</a:t>
+              <a:t>Copyright Paula Soper</a:t>
             </a:r>
             <a:endParaRPr lang="en-US" sz="800" dirty="0"/>
           </a:p>
@@ -5642,77 +6144,13 @@
       </p:sp>
       <p:sp>
         <p:nvSpPr>
-          <p:cNvPr id="8" name="Shape 6"/>
+          <p:cNvPr id="8" name="Text 6"/>
           <p:cNvSpPr/>
           <p:nvPr/>
         </p:nvSpPr>
         <p:spPr>
           <a:xfrm>
             <a:off x="640080" y="658368"/>
-            <a:ext cx="420624" cy="420624"/>
-          </a:xfrm>
-          <a:prstGeom prst="ellipse">
-            <a:avLst/>
-          </a:prstGeom>
-          <a:solidFill>
-            <a:srgbClr val="0068B7"/>
-          </a:solidFill>
-          <a:ln w="12700">
-            <a:solidFill>
-              <a:srgbClr val="0068B7"/>
-            </a:solidFill>
-            <a:prstDash val="solid"/>
-          </a:ln>
-        </p:spPr>
-      </p:sp>
-      <p:sp>
-        <p:nvSpPr>
-          <p:cNvPr id="9" name="Text 7"/>
-          <p:cNvSpPr/>
-          <p:nvPr/>
-        </p:nvSpPr>
-        <p:spPr>
-          <a:xfrm>
-            <a:off x="640080" y="731520"/>
-            <a:ext cx="420624" cy="164592"/>
-          </a:xfrm>
-          <a:prstGeom prst="rect">
-            <a:avLst/>
-          </a:prstGeom>
-          <a:noFill/>
-          <a:ln/>
-        </p:spPr>
-        <p:txBody>
-          <a:bodyPr wrap="square" lIns="0" tIns="0" rIns="0" bIns="0" rtlCol="0" anchor="ctr"/>
-          <a:lstStyle/>
-          <a:p>
-            <a:pPr algn="ctr" indent="0" marL="0">
-              <a:buNone/>
-            </a:pPr>
-            <a:r>
-              <a:rPr lang="en-US" sz="1100" b="1" dirty="0">
-                <a:solidFill>
-                  <a:srgbClr val="FFFFFF"/>
-                </a:solidFill>
-                <a:latin typeface="Aptos" pitchFamily="34" charset="0"/>
-                <a:ea typeface="Aptos" pitchFamily="34" charset="-122"/>
-                <a:cs typeface="Aptos" pitchFamily="34" charset="-120"/>
-              </a:rPr>
-              <a:t>7</a:t>
-            </a:r>
-            <a:endParaRPr lang="en-US" sz="1100" dirty="0"/>
-          </a:p>
-        </p:txBody>
-      </p:sp>
-      <p:sp>
-        <p:nvSpPr>
-          <p:cNvPr id="10" name="Text 8"/>
-          <p:cNvSpPr/>
-          <p:nvPr/>
-        </p:nvSpPr>
-        <p:spPr>
-          <a:xfrm>
-            <a:off x="640080" y="621792"/>
             <a:ext cx="10881360" cy="713232"/>
           </a:xfrm>
           <a:prstGeom prst="rect">
@@ -5747,14 +6185,14 @@
       </p:sp>
       <p:sp>
         <p:nvSpPr>
-          <p:cNvPr id="11" name="Text 9"/>
+          <p:cNvPr id="9" name="Text 7"/>
           <p:cNvSpPr/>
           <p:nvPr/>
         </p:nvSpPr>
         <p:spPr>
           <a:xfrm>
             <a:off x="868680" y="1508760"/>
-            <a:ext cx="6537960" cy="4160520"/>
+            <a:ext cx="6309360" cy="4160520"/>
           </a:xfrm>
           <a:prstGeom prst="rect">
             <a:avLst/>
@@ -5813,18 +6251,18 @@
       </p:sp>
       <p:sp>
         <p:nvSpPr>
-          <p:cNvPr id="12" name="Shape 10"/>
-          <p:cNvSpPr/>
-          <p:nvPr/>
-        </p:nvSpPr>
-        <p:spPr>
-          <a:xfrm>
-            <a:off x="7909560" y="1417320"/>
-            <a:ext cx="3154680" cy="1828800"/>
+          <p:cNvPr id="10" name="Shape 8"/>
+          <p:cNvSpPr/>
+          <p:nvPr/>
+        </p:nvSpPr>
+        <p:spPr>
+          <a:xfrm>
+            <a:off x="7635240" y="1325880"/>
+            <a:ext cx="3474720" cy="1325880"/>
           </a:xfrm>
           <a:prstGeom prst="roundRect">
             <a:avLst>
-              <a:gd name="adj" fmla="val 6000"/>
+              <a:gd name="adj" fmla="val 8276"/>
             </a:avLst>
           </a:prstGeom>
           <a:solidFill>
@@ -5840,14 +6278,14 @@
       </p:sp>
       <p:sp>
         <p:nvSpPr>
-          <p:cNvPr id="13" name="Text 11"/>
-          <p:cNvSpPr/>
-          <p:nvPr/>
-        </p:nvSpPr>
-        <p:spPr>
-          <a:xfrm>
-            <a:off x="8074152" y="1563624"/>
-            <a:ext cx="2825496" cy="256032"/>
+          <p:cNvPr id="11" name="Text 9"/>
+          <p:cNvSpPr/>
+          <p:nvPr/>
+        </p:nvSpPr>
+        <p:spPr>
+          <a:xfrm>
+            <a:off x="7799832" y="1472184"/>
+            <a:ext cx="3145536" cy="256032"/>
           </a:xfrm>
           <a:prstGeom prst="rect">
             <a:avLst/>
@@ -5871,7 +6309,7 @@
                 <a:ea typeface="Aptos" pitchFamily="34" charset="-122"/>
                 <a:cs typeface="Aptos" pitchFamily="34" charset="-120"/>
               </a:rPr>
-              <a:t>Key idea</a:t>
+              <a:t>Risk check</a:t>
             </a:r>
             <a:endParaRPr lang="en-US" sz="1300" dirty="0"/>
           </a:p>
@@ -5879,14 +6317,14 @@
       </p:sp>
       <p:sp>
         <p:nvSpPr>
-          <p:cNvPr id="14" name="Text 12"/>
-          <p:cNvSpPr/>
-          <p:nvPr/>
-        </p:nvSpPr>
-        <p:spPr>
-          <a:xfrm>
-            <a:off x="8074152" y="1920240"/>
-            <a:ext cx="2825496" cy="1188720"/>
+          <p:cNvPr id="12" name="Text 10"/>
+          <p:cNvSpPr/>
+          <p:nvPr/>
+        </p:nvSpPr>
+        <p:spPr>
+          <a:xfrm>
+            <a:off x="7799832" y="1828800"/>
+            <a:ext cx="3145536" cy="685800"/>
           </a:xfrm>
           <a:prstGeom prst="rect">
             <a:avLst/>
@@ -5920,18 +6358,171 @@
       </p:sp>
       <p:sp>
         <p:nvSpPr>
-          <p:cNvPr id="15" name="Shape 13"/>
-          <p:cNvSpPr/>
-          <p:nvPr/>
-        </p:nvSpPr>
-        <p:spPr>
-          <a:xfrm>
-            <a:off x="7909560" y="3520440"/>
-            <a:ext cx="3154680" cy="1737360"/>
+          <p:cNvPr id="13" name="Shape 11"/>
+          <p:cNvSpPr/>
+          <p:nvPr/>
+        </p:nvSpPr>
+        <p:spPr>
+          <a:xfrm>
+            <a:off x="7635240" y="2788920"/>
+            <a:ext cx="3474720" cy="1536192"/>
           </a:xfrm>
           <a:prstGeom prst="roundRect">
             <a:avLst>
-              <a:gd name="adj" fmla="val 6316"/>
+              <a:gd name="adj" fmla="val 7143"/>
+            </a:avLst>
+          </a:prstGeom>
+          <a:solidFill>
+            <a:srgbClr val="FFFFFF">
+              <a:alpha val="88000"/>
+            </a:srgbClr>
+          </a:solidFill>
+          <a:ln w="12700">
+            <a:solidFill>
+              <a:srgbClr val="D6E8F2"/>
+            </a:solidFill>
+            <a:prstDash val="solid"/>
+          </a:ln>
+        </p:spPr>
+      </p:sp>
+      <p:sp>
+        <p:nvSpPr>
+          <p:cNvPr id="14" name="Shape 12"/>
+          <p:cNvSpPr/>
+          <p:nvPr/>
+        </p:nvSpPr>
+        <p:spPr>
+          <a:xfrm>
+            <a:off x="8046720" y="3108960"/>
+            <a:ext cx="2651760" cy="896112"/>
+          </a:xfrm>
+          <a:prstGeom prst="arc">
+            <a:avLst/>
+          </a:prstGeom>
+          <a:noFill/>
+          <a:ln w="25400">
+            <a:solidFill>
+              <a:srgbClr val="0068B7"/>
+            </a:solidFill>
+            <a:prstDash val="solid"/>
+          </a:ln>
+        </p:spPr>
+      </p:sp>
+      <p:sp>
+        <p:nvSpPr>
+          <p:cNvPr id="15" name="Text 13"/>
+          <p:cNvSpPr/>
+          <p:nvPr/>
+        </p:nvSpPr>
+        <p:spPr>
+          <a:xfrm>
+            <a:off x="7909560" y="3099816"/>
+            <a:ext cx="2926080" cy="256032"/>
+          </a:xfrm>
+          <a:prstGeom prst="rect">
+            <a:avLst/>
+          </a:prstGeom>
+          <a:noFill/>
+          <a:ln/>
+        </p:spPr>
+        <p:txBody>
+          <a:bodyPr wrap="square" lIns="0" tIns="0" rIns="0" bIns="0" rtlCol="0" anchor="ctr"/>
+          <a:lstStyle/>
+          <a:p>
+            <a:pPr algn="ctr" indent="0" marL="0">
+              <a:buNone/>
+            </a:pPr>
+            <a:r>
+              <a:rPr lang="en-US" sz="1500" b="1" dirty="0">
+                <a:solidFill>
+                  <a:srgbClr val="003A63"/>
+                </a:solidFill>
+                <a:latin typeface="Aptos" pitchFamily="34" charset="0"/>
+                <a:ea typeface="Aptos" pitchFamily="34" charset="-122"/>
+                <a:cs typeface="Aptos" pitchFamily="34" charset="-120"/>
+              </a:rPr>
+              <a:t>Risk</a:t>
+            </a:r>
+            <a:endParaRPr lang="en-US" sz="1500" dirty="0"/>
+          </a:p>
+        </p:txBody>
+      </p:sp>
+      <p:sp>
+        <p:nvSpPr>
+          <p:cNvPr id="16" name="Shape 14"/>
+          <p:cNvSpPr/>
+          <p:nvPr/>
+        </p:nvSpPr>
+        <p:spPr>
+          <a:xfrm>
+            <a:off x="8366760" y="3639312"/>
+            <a:ext cx="2011680" cy="0"/>
+          </a:xfrm>
+          <a:prstGeom prst="line">
+            <a:avLst/>
+          </a:prstGeom>
+          <a:noFill/>
+          <a:ln w="63500">
+            <a:solidFill>
+              <a:srgbClr val="2F8A28"/>
+            </a:solidFill>
+            <a:prstDash val="solid"/>
+          </a:ln>
+        </p:spPr>
+      </p:sp>
+      <p:sp>
+        <p:nvSpPr>
+          <p:cNvPr id="17" name="Text 15"/>
+          <p:cNvSpPr/>
+          <p:nvPr/>
+        </p:nvSpPr>
+        <p:spPr>
+          <a:xfrm>
+            <a:off x="7909560" y="3849624"/>
+            <a:ext cx="2926080" cy="164592"/>
+          </a:xfrm>
+          <a:prstGeom prst="rect">
+            <a:avLst/>
+          </a:prstGeom>
+          <a:noFill/>
+          <a:ln/>
+        </p:spPr>
+        <p:txBody>
+          <a:bodyPr wrap="square" lIns="0" tIns="0" rIns="0" bIns="0" rtlCol="0" anchor="ctr"/>
+          <a:lstStyle/>
+          <a:p>
+            <a:pPr algn="ctr" indent="0" marL="0">
+              <a:buNone/>
+            </a:pPr>
+            <a:r>
+              <a:rPr lang="en-US" sz="900" dirty="0">
+                <a:solidFill>
+                  <a:srgbClr val="003A63"/>
+                </a:solidFill>
+                <a:latin typeface="Aptos" pitchFamily="34" charset="0"/>
+                <a:ea typeface="Aptos" pitchFamily="34" charset="-122"/>
+                <a:cs typeface="Aptos" pitchFamily="34" charset="-120"/>
+              </a:rPr>
+              <a:t>Human review</a:t>
+            </a:r>
+            <a:endParaRPr lang="en-US" sz="900" dirty="0"/>
+          </a:p>
+        </p:txBody>
+      </p:sp>
+      <p:sp>
+        <p:nvSpPr>
+          <p:cNvPr id="18" name="Shape 16"/>
+          <p:cNvSpPr/>
+          <p:nvPr/>
+        </p:nvSpPr>
+        <p:spPr>
+          <a:xfrm>
+            <a:off x="7635240" y="4498848"/>
+            <a:ext cx="3474720" cy="1143000"/>
+          </a:xfrm>
+          <a:prstGeom prst="roundRect">
+            <a:avLst>
+              <a:gd name="adj" fmla="val 9600"/>
             </a:avLst>
           </a:prstGeom>
           <a:solidFill>
@@ -5947,14 +6538,14 @@
       </p:sp>
       <p:sp>
         <p:nvSpPr>
-          <p:cNvPr id="16" name="Text 14"/>
-          <p:cNvSpPr/>
-          <p:nvPr/>
-        </p:nvSpPr>
-        <p:spPr>
-          <a:xfrm>
-            <a:off x="8074152" y="3666744"/>
-            <a:ext cx="2825496" cy="256032"/>
+          <p:cNvPr id="19" name="Text 17"/>
+          <p:cNvSpPr/>
+          <p:nvPr/>
+        </p:nvSpPr>
+        <p:spPr>
+          <a:xfrm>
+            <a:off x="7799832" y="4645152"/>
+            <a:ext cx="3145536" cy="256032"/>
           </a:xfrm>
           <a:prstGeom prst="rect">
             <a:avLst/>
@@ -5978,7 +6569,7 @@
                 <a:ea typeface="Aptos" pitchFamily="34" charset="-122"/>
                 <a:cs typeface="Aptos" pitchFamily="34" charset="-120"/>
               </a:rPr>
-              <a:t>Use this for</a:t>
+              <a:t>Safeguard to plan</a:t>
             </a:r>
             <a:endParaRPr lang="en-US" sz="1300" dirty="0"/>
           </a:p>
@@ -5986,14 +6577,14 @@
       </p:sp>
       <p:sp>
         <p:nvSpPr>
-          <p:cNvPr id="17" name="Text 15"/>
-          <p:cNvSpPr/>
-          <p:nvPr/>
-        </p:nvSpPr>
-        <p:spPr>
-          <a:xfrm>
-            <a:off x="8074152" y="4023360"/>
-            <a:ext cx="2825496" cy="1097280"/>
+          <p:cNvPr id="20" name="Text 18"/>
+          <p:cNvSpPr/>
+          <p:nvPr/>
+        </p:nvSpPr>
+        <p:spPr>
+          <a:xfrm>
+            <a:off x="7799832" y="5001768"/>
+            <a:ext cx="3145536" cy="502920"/>
           </a:xfrm>
           <a:prstGeom prst="rect">
             <a:avLst/>
@@ -6019,7 +6610,7 @@
                 <a:ea typeface="Aptos" pitchFamily="34" charset="-122"/>
                 <a:cs typeface="Aptos" pitchFamily="34" charset="-120"/>
               </a:rPr>
-              <a:t>Connect the concept to public health decisions, safeguards, documentation, or implementation work.</a:t>
+              <a:t>Identify what could go wrong, who could be affected, what safeguards are needed, and what evidence should be reviewed before use expands.</a:t>
             </a:r>
             <a:endParaRPr lang="en-US" sz="1550" dirty="0"/>
           </a:p>
@@ -6193,8 +6784,8 @@
         </p:nvSpPr>
         <p:spPr>
           <a:xfrm>
-            <a:off x="9966960" y="6537960"/>
-            <a:ext cx="1645920" cy="201168"/>
+            <a:off x="9646920" y="6537960"/>
+            <a:ext cx="1965960" cy="201168"/>
           </a:xfrm>
           <a:prstGeom prst="rect">
             <a:avLst/>
@@ -6218,7 +6809,7 @@
                 <a:ea typeface="Aptos" pitchFamily="34" charset="-122"/>
                 <a:cs typeface="Aptos" pitchFamily="34" charset="-120"/>
               </a:rPr>
-              <a:t>Â© Paula Soper</a:t>
+              <a:t>Copyright Paula Soper</a:t>
             </a:r>
             <a:endParaRPr lang="en-US" sz="800" dirty="0"/>
           </a:p>
@@ -6265,77 +6856,13 @@
       </p:sp>
       <p:sp>
         <p:nvSpPr>
-          <p:cNvPr id="8" name="Shape 6"/>
+          <p:cNvPr id="8" name="Text 6"/>
           <p:cNvSpPr/>
           <p:nvPr/>
         </p:nvSpPr>
         <p:spPr>
           <a:xfrm>
             <a:off x="640080" y="658368"/>
-            <a:ext cx="420624" cy="420624"/>
-          </a:xfrm>
-          <a:prstGeom prst="ellipse">
-            <a:avLst/>
-          </a:prstGeom>
-          <a:solidFill>
-            <a:srgbClr val="0068B7"/>
-          </a:solidFill>
-          <a:ln w="12700">
-            <a:solidFill>
-              <a:srgbClr val="0068B7"/>
-            </a:solidFill>
-            <a:prstDash val="solid"/>
-          </a:ln>
-        </p:spPr>
-      </p:sp>
-      <p:sp>
-        <p:nvSpPr>
-          <p:cNvPr id="9" name="Text 7"/>
-          <p:cNvSpPr/>
-          <p:nvPr/>
-        </p:nvSpPr>
-        <p:spPr>
-          <a:xfrm>
-            <a:off x="640080" y="731520"/>
-            <a:ext cx="420624" cy="164592"/>
-          </a:xfrm>
-          <a:prstGeom prst="rect">
-            <a:avLst/>
-          </a:prstGeom>
-          <a:noFill/>
-          <a:ln/>
-        </p:spPr>
-        <p:txBody>
-          <a:bodyPr wrap="square" lIns="0" tIns="0" rIns="0" bIns="0" rtlCol="0" anchor="ctr"/>
-          <a:lstStyle/>
-          <a:p>
-            <a:pPr algn="ctr" indent="0" marL="0">
-              <a:buNone/>
-            </a:pPr>
-            <a:r>
-              <a:rPr lang="en-US" sz="1100" b="1" dirty="0">
-                <a:solidFill>
-                  <a:srgbClr val="FFFFFF"/>
-                </a:solidFill>
-                <a:latin typeface="Aptos" pitchFamily="34" charset="0"/>
-                <a:ea typeface="Aptos" pitchFamily="34" charset="-122"/>
-                <a:cs typeface="Aptos" pitchFamily="34" charset="-120"/>
-              </a:rPr>
-              <a:t>8</a:t>
-            </a:r>
-            <a:endParaRPr lang="en-US" sz="1100" dirty="0"/>
-          </a:p>
-        </p:txBody>
-      </p:sp>
-      <p:sp>
-        <p:nvSpPr>
-          <p:cNvPr id="10" name="Text 8"/>
-          <p:cNvSpPr/>
-          <p:nvPr/>
-        </p:nvSpPr>
-        <p:spPr>
-          <a:xfrm>
-            <a:off x="640080" y="621792"/>
             <a:ext cx="10881360" cy="713232"/>
           </a:xfrm>
           <a:prstGeom prst="rect">
@@ -6370,14 +6897,14 @@
       </p:sp>
       <p:sp>
         <p:nvSpPr>
-          <p:cNvPr id="11" name="Text 9"/>
+          <p:cNvPr id="9" name="Text 7"/>
           <p:cNvSpPr/>
           <p:nvPr/>
         </p:nvSpPr>
         <p:spPr>
           <a:xfrm>
             <a:off x="868680" y="1508760"/>
-            <a:ext cx="6537960" cy="4160520"/>
+            <a:ext cx="6309360" cy="4160520"/>
           </a:xfrm>
           <a:prstGeom prst="rect">
             <a:avLst/>
@@ -6436,18 +6963,18 @@
       </p:sp>
       <p:sp>
         <p:nvSpPr>
-          <p:cNvPr id="12" name="Shape 10"/>
-          <p:cNvSpPr/>
-          <p:nvPr/>
-        </p:nvSpPr>
-        <p:spPr>
-          <a:xfrm>
-            <a:off x="7909560" y="1417320"/>
-            <a:ext cx="3154680" cy="1828800"/>
+          <p:cNvPr id="10" name="Shape 8"/>
+          <p:cNvSpPr/>
+          <p:nvPr/>
+        </p:nvSpPr>
+        <p:spPr>
+          <a:xfrm>
+            <a:off x="7635240" y="1325880"/>
+            <a:ext cx="3474720" cy="1325880"/>
           </a:xfrm>
           <a:prstGeom prst="roundRect">
             <a:avLst>
-              <a:gd name="adj" fmla="val 6000"/>
+              <a:gd name="adj" fmla="val 8276"/>
             </a:avLst>
           </a:prstGeom>
           <a:solidFill>
@@ -6463,14 +6990,14 @@
       </p:sp>
       <p:sp>
         <p:nvSpPr>
-          <p:cNvPr id="13" name="Text 11"/>
-          <p:cNvSpPr/>
-          <p:nvPr/>
-        </p:nvSpPr>
-        <p:spPr>
-          <a:xfrm>
-            <a:off x="8074152" y="1563624"/>
-            <a:ext cx="2825496" cy="256032"/>
+          <p:cNvPr id="11" name="Text 9"/>
+          <p:cNvSpPr/>
+          <p:nvPr/>
+        </p:nvSpPr>
+        <p:spPr>
+          <a:xfrm>
+            <a:off x="7799832" y="1472184"/>
+            <a:ext cx="3145536" cy="256032"/>
           </a:xfrm>
           <a:prstGeom prst="rect">
             <a:avLst/>
@@ -6494,7 +7021,7 @@
                 <a:ea typeface="Aptos" pitchFamily="34" charset="-122"/>
                 <a:cs typeface="Aptos" pitchFamily="34" charset="-120"/>
               </a:rPr>
-              <a:t>Key idea</a:t>
+              <a:t>Risk check</a:t>
             </a:r>
             <a:endParaRPr lang="en-US" sz="1300" dirty="0"/>
           </a:p>
@@ -6502,14 +7029,14 @@
       </p:sp>
       <p:sp>
         <p:nvSpPr>
-          <p:cNvPr id="14" name="Text 12"/>
-          <p:cNvSpPr/>
-          <p:nvPr/>
-        </p:nvSpPr>
-        <p:spPr>
-          <a:xfrm>
-            <a:off x="8074152" y="1920240"/>
-            <a:ext cx="2825496" cy="1188720"/>
+          <p:cNvPr id="12" name="Text 10"/>
+          <p:cNvSpPr/>
+          <p:nvPr/>
+        </p:nvSpPr>
+        <p:spPr>
+          <a:xfrm>
+            <a:off x="7799832" y="1828800"/>
+            <a:ext cx="3145536" cy="685800"/>
           </a:xfrm>
           <a:prstGeom prst="rect">
             <a:avLst/>
@@ -6543,18 +7070,171 @@
       </p:sp>
       <p:sp>
         <p:nvSpPr>
-          <p:cNvPr id="15" name="Shape 13"/>
-          <p:cNvSpPr/>
-          <p:nvPr/>
-        </p:nvSpPr>
-        <p:spPr>
-          <a:xfrm>
-            <a:off x="7909560" y="3520440"/>
-            <a:ext cx="3154680" cy="1737360"/>
+          <p:cNvPr id="13" name="Shape 11"/>
+          <p:cNvSpPr/>
+          <p:nvPr/>
+        </p:nvSpPr>
+        <p:spPr>
+          <a:xfrm>
+            <a:off x="7635240" y="2788920"/>
+            <a:ext cx="3474720" cy="1536192"/>
           </a:xfrm>
           <a:prstGeom prst="roundRect">
             <a:avLst>
-              <a:gd name="adj" fmla="val 6316"/>
+              <a:gd name="adj" fmla="val 7143"/>
+            </a:avLst>
+          </a:prstGeom>
+          <a:solidFill>
+            <a:srgbClr val="FFFFFF">
+              <a:alpha val="88000"/>
+            </a:srgbClr>
+          </a:solidFill>
+          <a:ln w="12700">
+            <a:solidFill>
+              <a:srgbClr val="D6E8F2"/>
+            </a:solidFill>
+            <a:prstDash val="solid"/>
+          </a:ln>
+        </p:spPr>
+      </p:sp>
+      <p:sp>
+        <p:nvSpPr>
+          <p:cNvPr id="14" name="Shape 12"/>
+          <p:cNvSpPr/>
+          <p:nvPr/>
+        </p:nvSpPr>
+        <p:spPr>
+          <a:xfrm>
+            <a:off x="8046720" y="3108960"/>
+            <a:ext cx="2651760" cy="896112"/>
+          </a:xfrm>
+          <a:prstGeom prst="arc">
+            <a:avLst/>
+          </a:prstGeom>
+          <a:noFill/>
+          <a:ln w="25400">
+            <a:solidFill>
+              <a:srgbClr val="0068B7"/>
+            </a:solidFill>
+            <a:prstDash val="solid"/>
+          </a:ln>
+        </p:spPr>
+      </p:sp>
+      <p:sp>
+        <p:nvSpPr>
+          <p:cNvPr id="15" name="Text 13"/>
+          <p:cNvSpPr/>
+          <p:nvPr/>
+        </p:nvSpPr>
+        <p:spPr>
+          <a:xfrm>
+            <a:off x="7909560" y="3099816"/>
+            <a:ext cx="2926080" cy="256032"/>
+          </a:xfrm>
+          <a:prstGeom prst="rect">
+            <a:avLst/>
+          </a:prstGeom>
+          <a:noFill/>
+          <a:ln/>
+        </p:spPr>
+        <p:txBody>
+          <a:bodyPr wrap="square" lIns="0" tIns="0" rIns="0" bIns="0" rtlCol="0" anchor="ctr"/>
+          <a:lstStyle/>
+          <a:p>
+            <a:pPr algn="ctr" indent="0" marL="0">
+              <a:buNone/>
+            </a:pPr>
+            <a:r>
+              <a:rPr lang="en-US" sz="1500" b="1" dirty="0">
+                <a:solidFill>
+                  <a:srgbClr val="003A63"/>
+                </a:solidFill>
+                <a:latin typeface="Aptos" pitchFamily="34" charset="0"/>
+                <a:ea typeface="Aptos" pitchFamily="34" charset="-122"/>
+                <a:cs typeface="Aptos" pitchFamily="34" charset="-120"/>
+              </a:rPr>
+              <a:t>Risk</a:t>
+            </a:r>
+            <a:endParaRPr lang="en-US" sz="1500" dirty="0"/>
+          </a:p>
+        </p:txBody>
+      </p:sp>
+      <p:sp>
+        <p:nvSpPr>
+          <p:cNvPr id="16" name="Shape 14"/>
+          <p:cNvSpPr/>
+          <p:nvPr/>
+        </p:nvSpPr>
+        <p:spPr>
+          <a:xfrm>
+            <a:off x="8366760" y="3639312"/>
+            <a:ext cx="2011680" cy="0"/>
+          </a:xfrm>
+          <a:prstGeom prst="line">
+            <a:avLst/>
+          </a:prstGeom>
+          <a:noFill/>
+          <a:ln w="63500">
+            <a:solidFill>
+              <a:srgbClr val="2F8A28"/>
+            </a:solidFill>
+            <a:prstDash val="solid"/>
+          </a:ln>
+        </p:spPr>
+      </p:sp>
+      <p:sp>
+        <p:nvSpPr>
+          <p:cNvPr id="17" name="Text 15"/>
+          <p:cNvSpPr/>
+          <p:nvPr/>
+        </p:nvSpPr>
+        <p:spPr>
+          <a:xfrm>
+            <a:off x="7909560" y="3849624"/>
+            <a:ext cx="2926080" cy="164592"/>
+          </a:xfrm>
+          <a:prstGeom prst="rect">
+            <a:avLst/>
+          </a:prstGeom>
+          <a:noFill/>
+          <a:ln/>
+        </p:spPr>
+        <p:txBody>
+          <a:bodyPr wrap="square" lIns="0" tIns="0" rIns="0" bIns="0" rtlCol="0" anchor="ctr"/>
+          <a:lstStyle/>
+          <a:p>
+            <a:pPr algn="ctr" indent="0" marL="0">
+              <a:buNone/>
+            </a:pPr>
+            <a:r>
+              <a:rPr lang="en-US" sz="900" dirty="0">
+                <a:solidFill>
+                  <a:srgbClr val="003A63"/>
+                </a:solidFill>
+                <a:latin typeface="Aptos" pitchFamily="34" charset="0"/>
+                <a:ea typeface="Aptos" pitchFamily="34" charset="-122"/>
+                <a:cs typeface="Aptos" pitchFamily="34" charset="-120"/>
+              </a:rPr>
+              <a:t>Human review</a:t>
+            </a:r>
+            <a:endParaRPr lang="en-US" sz="900" dirty="0"/>
+          </a:p>
+        </p:txBody>
+      </p:sp>
+      <p:sp>
+        <p:nvSpPr>
+          <p:cNvPr id="18" name="Shape 16"/>
+          <p:cNvSpPr/>
+          <p:nvPr/>
+        </p:nvSpPr>
+        <p:spPr>
+          <a:xfrm>
+            <a:off x="7635240" y="4498848"/>
+            <a:ext cx="3474720" cy="1143000"/>
+          </a:xfrm>
+          <a:prstGeom prst="roundRect">
+            <a:avLst>
+              <a:gd name="adj" fmla="val 9600"/>
             </a:avLst>
           </a:prstGeom>
           <a:solidFill>
@@ -6570,14 +7250,14 @@
       </p:sp>
       <p:sp>
         <p:nvSpPr>
-          <p:cNvPr id="16" name="Text 14"/>
-          <p:cNvSpPr/>
-          <p:nvPr/>
-        </p:nvSpPr>
-        <p:spPr>
-          <a:xfrm>
-            <a:off x="8074152" y="3666744"/>
-            <a:ext cx="2825496" cy="256032"/>
+          <p:cNvPr id="19" name="Text 17"/>
+          <p:cNvSpPr/>
+          <p:nvPr/>
+        </p:nvSpPr>
+        <p:spPr>
+          <a:xfrm>
+            <a:off x="7799832" y="4645152"/>
+            <a:ext cx="3145536" cy="256032"/>
           </a:xfrm>
           <a:prstGeom prst="rect">
             <a:avLst/>
@@ -6601,7 +7281,7 @@
                 <a:ea typeface="Aptos" pitchFamily="34" charset="-122"/>
                 <a:cs typeface="Aptos" pitchFamily="34" charset="-120"/>
               </a:rPr>
-              <a:t>Use this for</a:t>
+              <a:t>Safeguard to plan</a:t>
             </a:r>
             <a:endParaRPr lang="en-US" sz="1300" dirty="0"/>
           </a:p>
@@ -6609,14 +7289,14 @@
       </p:sp>
       <p:sp>
         <p:nvSpPr>
-          <p:cNvPr id="17" name="Text 15"/>
-          <p:cNvSpPr/>
-          <p:nvPr/>
-        </p:nvSpPr>
-        <p:spPr>
-          <a:xfrm>
-            <a:off x="8074152" y="4023360"/>
-            <a:ext cx="2825496" cy="1097280"/>
+          <p:cNvPr id="20" name="Text 18"/>
+          <p:cNvSpPr/>
+          <p:nvPr/>
+        </p:nvSpPr>
+        <p:spPr>
+          <a:xfrm>
+            <a:off x="7799832" y="5001768"/>
+            <a:ext cx="3145536" cy="502920"/>
           </a:xfrm>
           <a:prstGeom prst="rect">
             <a:avLst/>
@@ -6642,7 +7322,7 @@
                 <a:ea typeface="Aptos" pitchFamily="34" charset="-122"/>
                 <a:cs typeface="Aptos" pitchFamily="34" charset="-120"/>
               </a:rPr>
-              <a:t>Connect the concept to public health decisions, safeguards, documentation, or implementation work.</a:t>
+              <a:t>Identify what could go wrong, who could be affected, what safeguards are needed, and what evidence should be reviewed before use expands.</a:t>
             </a:r>
             <a:endParaRPr lang="en-US" sz="1550" dirty="0"/>
           </a:p>
@@ -6816,8 +7496,8 @@
         </p:nvSpPr>
         <p:spPr>
           <a:xfrm>
-            <a:off x="9966960" y="6537960"/>
-            <a:ext cx="1645920" cy="201168"/>
+            <a:off x="9646920" y="6537960"/>
+            <a:ext cx="1965960" cy="201168"/>
           </a:xfrm>
           <a:prstGeom prst="rect">
             <a:avLst/>
@@ -6841,7 +7521,7 @@
                 <a:ea typeface="Aptos" pitchFamily="34" charset="-122"/>
                 <a:cs typeface="Aptos" pitchFamily="34" charset="-120"/>
               </a:rPr>
-              <a:t>Â© Paula Soper</a:t>
+              <a:t>Copyright Paula Soper</a:t>
             </a:r>
             <a:endParaRPr lang="en-US" sz="800" dirty="0"/>
           </a:p>
@@ -6936,7 +7616,7 @@
         <p:spPr>
           <a:xfrm>
             <a:off x="868680" y="1508760"/>
-            <a:ext cx="6537960" cy="4160520"/>
+            <a:ext cx="6309360" cy="4160520"/>
           </a:xfrm>
           <a:prstGeom prst="rect">
             <a:avLst/>
@@ -6987,12 +7667,12 @@
         </p:nvSpPr>
         <p:spPr>
           <a:xfrm>
-            <a:off x="7909560" y="1417320"/>
-            <a:ext cx="3154680" cy="1828800"/>
+            <a:off x="7635240" y="1325880"/>
+            <a:ext cx="3474720" cy="1325880"/>
           </a:xfrm>
           <a:prstGeom prst="roundRect">
             <a:avLst>
-              <a:gd name="adj" fmla="val 6000"/>
+              <a:gd name="adj" fmla="val 8276"/>
             </a:avLst>
           </a:prstGeom>
           <a:solidFill>
@@ -7014,8 +7694,8 @@
         </p:nvSpPr>
         <p:spPr>
           <a:xfrm>
-            <a:off x="8074152" y="1563624"/>
-            <a:ext cx="2825496" cy="256032"/>
+            <a:off x="7799832" y="1472184"/>
+            <a:ext cx="3145536" cy="256032"/>
           </a:xfrm>
           <a:prstGeom prst="rect">
             <a:avLst/>
@@ -7039,7 +7719,7 @@
                 <a:ea typeface="Aptos" pitchFamily="34" charset="-122"/>
                 <a:cs typeface="Aptos" pitchFamily="34" charset="-120"/>
               </a:rPr>
-              <a:t>Key idea</a:t>
+              <a:t>Risk check</a:t>
             </a:r>
             <a:endParaRPr lang="en-US" sz="1300" dirty="0"/>
           </a:p>
@@ -7053,8 +7733,8 @@
         </p:nvSpPr>
         <p:spPr>
           <a:xfrm>
-            <a:off x="8074152" y="1920240"/>
-            <a:ext cx="2825496" cy="1188720"/>
+            <a:off x="7799832" y="1828800"/>
+            <a:ext cx="3145536" cy="685800"/>
           </a:xfrm>
           <a:prstGeom prst="rect">
             <a:avLst/>
@@ -7094,12 +7774,165 @@
         </p:nvSpPr>
         <p:spPr>
           <a:xfrm>
-            <a:off x="7909560" y="3520440"/>
-            <a:ext cx="3154680" cy="1737360"/>
+            <a:off x="7635240" y="2788920"/>
+            <a:ext cx="3474720" cy="1536192"/>
           </a:xfrm>
           <a:prstGeom prst="roundRect">
             <a:avLst>
-              <a:gd name="adj" fmla="val 6316"/>
+              <a:gd name="adj" fmla="val 7143"/>
+            </a:avLst>
+          </a:prstGeom>
+          <a:solidFill>
+            <a:srgbClr val="FFFFFF">
+              <a:alpha val="88000"/>
+            </a:srgbClr>
+          </a:solidFill>
+          <a:ln w="12700">
+            <a:solidFill>
+              <a:srgbClr val="D6E8F2"/>
+            </a:solidFill>
+            <a:prstDash val="solid"/>
+          </a:ln>
+        </p:spPr>
+      </p:sp>
+      <p:sp>
+        <p:nvSpPr>
+          <p:cNvPr id="14" name="Shape 12"/>
+          <p:cNvSpPr/>
+          <p:nvPr/>
+        </p:nvSpPr>
+        <p:spPr>
+          <a:xfrm>
+            <a:off x="8046720" y="3108960"/>
+            <a:ext cx="2651760" cy="896112"/>
+          </a:xfrm>
+          <a:prstGeom prst="arc">
+            <a:avLst/>
+          </a:prstGeom>
+          <a:noFill/>
+          <a:ln w="25400">
+            <a:solidFill>
+              <a:srgbClr val="0068B7"/>
+            </a:solidFill>
+            <a:prstDash val="solid"/>
+          </a:ln>
+        </p:spPr>
+      </p:sp>
+      <p:sp>
+        <p:nvSpPr>
+          <p:cNvPr id="15" name="Text 13"/>
+          <p:cNvSpPr/>
+          <p:nvPr/>
+        </p:nvSpPr>
+        <p:spPr>
+          <a:xfrm>
+            <a:off x="7909560" y="3099816"/>
+            <a:ext cx="2926080" cy="256032"/>
+          </a:xfrm>
+          <a:prstGeom prst="rect">
+            <a:avLst/>
+          </a:prstGeom>
+          <a:noFill/>
+          <a:ln/>
+        </p:spPr>
+        <p:txBody>
+          <a:bodyPr wrap="square" lIns="0" tIns="0" rIns="0" bIns="0" rtlCol="0" anchor="ctr"/>
+          <a:lstStyle/>
+          <a:p>
+            <a:pPr algn="ctr" indent="0" marL="0">
+              <a:buNone/>
+            </a:pPr>
+            <a:r>
+              <a:rPr lang="en-US" sz="1500" b="1" dirty="0">
+                <a:solidFill>
+                  <a:srgbClr val="003A63"/>
+                </a:solidFill>
+                <a:latin typeface="Aptos" pitchFamily="34" charset="0"/>
+                <a:ea typeface="Aptos" pitchFamily="34" charset="-122"/>
+                <a:cs typeface="Aptos" pitchFamily="34" charset="-120"/>
+              </a:rPr>
+              <a:t>Risk</a:t>
+            </a:r>
+            <a:endParaRPr lang="en-US" sz="1500" dirty="0"/>
+          </a:p>
+        </p:txBody>
+      </p:sp>
+      <p:sp>
+        <p:nvSpPr>
+          <p:cNvPr id="16" name="Shape 14"/>
+          <p:cNvSpPr/>
+          <p:nvPr/>
+        </p:nvSpPr>
+        <p:spPr>
+          <a:xfrm>
+            <a:off x="8366760" y="3639312"/>
+            <a:ext cx="2011680" cy="0"/>
+          </a:xfrm>
+          <a:prstGeom prst="line">
+            <a:avLst/>
+          </a:prstGeom>
+          <a:noFill/>
+          <a:ln w="63500">
+            <a:solidFill>
+              <a:srgbClr val="2F8A28"/>
+            </a:solidFill>
+            <a:prstDash val="solid"/>
+          </a:ln>
+        </p:spPr>
+      </p:sp>
+      <p:sp>
+        <p:nvSpPr>
+          <p:cNvPr id="17" name="Text 15"/>
+          <p:cNvSpPr/>
+          <p:nvPr/>
+        </p:nvSpPr>
+        <p:spPr>
+          <a:xfrm>
+            <a:off x="7909560" y="3849624"/>
+            <a:ext cx="2926080" cy="164592"/>
+          </a:xfrm>
+          <a:prstGeom prst="rect">
+            <a:avLst/>
+          </a:prstGeom>
+          <a:noFill/>
+          <a:ln/>
+        </p:spPr>
+        <p:txBody>
+          <a:bodyPr wrap="square" lIns="0" tIns="0" rIns="0" bIns="0" rtlCol="0" anchor="ctr"/>
+          <a:lstStyle/>
+          <a:p>
+            <a:pPr algn="ctr" indent="0" marL="0">
+              <a:buNone/>
+            </a:pPr>
+            <a:r>
+              <a:rPr lang="en-US" sz="900" dirty="0">
+                <a:solidFill>
+                  <a:srgbClr val="003A63"/>
+                </a:solidFill>
+                <a:latin typeface="Aptos" pitchFamily="34" charset="0"/>
+                <a:ea typeface="Aptos" pitchFamily="34" charset="-122"/>
+                <a:cs typeface="Aptos" pitchFamily="34" charset="-120"/>
+              </a:rPr>
+              <a:t>Human review</a:t>
+            </a:r>
+            <a:endParaRPr lang="en-US" sz="900" dirty="0"/>
+          </a:p>
+        </p:txBody>
+      </p:sp>
+      <p:sp>
+        <p:nvSpPr>
+          <p:cNvPr id="18" name="Shape 16"/>
+          <p:cNvSpPr/>
+          <p:nvPr/>
+        </p:nvSpPr>
+        <p:spPr>
+          <a:xfrm>
+            <a:off x="7635240" y="4498848"/>
+            <a:ext cx="3474720" cy="1143000"/>
+          </a:xfrm>
+          <a:prstGeom prst="roundRect">
+            <a:avLst>
+              <a:gd name="adj" fmla="val 9600"/>
             </a:avLst>
           </a:prstGeom>
           <a:solidFill>
@@ -7115,14 +7948,14 @@
       </p:sp>
       <p:sp>
         <p:nvSpPr>
-          <p:cNvPr id="14" name="Text 12"/>
-          <p:cNvSpPr/>
-          <p:nvPr/>
-        </p:nvSpPr>
-        <p:spPr>
-          <a:xfrm>
-            <a:off x="8074152" y="3666744"/>
-            <a:ext cx="2825496" cy="256032"/>
+          <p:cNvPr id="19" name="Text 17"/>
+          <p:cNvSpPr/>
+          <p:nvPr/>
+        </p:nvSpPr>
+        <p:spPr>
+          <a:xfrm>
+            <a:off x="7799832" y="4645152"/>
+            <a:ext cx="3145536" cy="256032"/>
           </a:xfrm>
           <a:prstGeom prst="rect">
             <a:avLst/>
@@ -7146,7 +7979,7 @@
                 <a:ea typeface="Aptos" pitchFamily="34" charset="-122"/>
                 <a:cs typeface="Aptos" pitchFamily="34" charset="-120"/>
               </a:rPr>
-              <a:t>Use this for</a:t>
+              <a:t>Safeguard to plan</a:t>
             </a:r>
             <a:endParaRPr lang="en-US" sz="1300" dirty="0"/>
           </a:p>
@@ -7154,14 +7987,14 @@
       </p:sp>
       <p:sp>
         <p:nvSpPr>
-          <p:cNvPr id="15" name="Text 13"/>
-          <p:cNvSpPr/>
-          <p:nvPr/>
-        </p:nvSpPr>
-        <p:spPr>
-          <a:xfrm>
-            <a:off x="8074152" y="4023360"/>
-            <a:ext cx="2825496" cy="1097280"/>
+          <p:cNvPr id="20" name="Text 18"/>
+          <p:cNvSpPr/>
+          <p:nvPr/>
+        </p:nvSpPr>
+        <p:spPr>
+          <a:xfrm>
+            <a:off x="7799832" y="5001768"/>
+            <a:ext cx="3145536" cy="502920"/>
           </a:xfrm>
           <a:prstGeom prst="rect">
             <a:avLst/>
@@ -7187,7 +8020,7 @@
                 <a:ea typeface="Aptos" pitchFamily="34" charset="-122"/>
                 <a:cs typeface="Aptos" pitchFamily="34" charset="-120"/>
               </a:rPr>
-              <a:t>Connect the concept to public health decisions, safeguards, documentation, or implementation work.</a:t>
+              <a:t>Identify what could go wrong, who could be affected, what safeguards are needed, and what evidence should be reviewed before use expands.</a:t>
             </a:r>
             <a:endParaRPr lang="en-US" sz="1550" dirty="0"/>
           </a:p>
@@ -7361,8 +8194,8 @@
         </p:nvSpPr>
         <p:spPr>
           <a:xfrm>
-            <a:off x="9966960" y="6537960"/>
-            <a:ext cx="1645920" cy="201168"/>
+            <a:off x="9646920" y="6537960"/>
+            <a:ext cx="1965960" cy="201168"/>
           </a:xfrm>
           <a:prstGeom prst="rect">
             <a:avLst/>
@@ -7386,7 +8219,7 @@
                 <a:ea typeface="Aptos" pitchFamily="34" charset="-122"/>
                 <a:cs typeface="Aptos" pitchFamily="34" charset="-120"/>
               </a:rPr>
-              <a:t>Â© Paula Soper</a:t>
+              <a:t>Copyright Paula Soper</a:t>
             </a:r>
             <a:endParaRPr lang="en-US" sz="800" dirty="0"/>
           </a:p>
@@ -7433,77 +8266,13 @@
       </p:sp>
       <p:sp>
         <p:nvSpPr>
-          <p:cNvPr id="8" name="Shape 6"/>
+          <p:cNvPr id="8" name="Text 6"/>
           <p:cNvSpPr/>
           <p:nvPr/>
         </p:nvSpPr>
         <p:spPr>
           <a:xfrm>
             <a:off x="640080" y="658368"/>
-            <a:ext cx="420624" cy="420624"/>
-          </a:xfrm>
-          <a:prstGeom prst="ellipse">
-            <a:avLst/>
-          </a:prstGeom>
-          <a:solidFill>
-            <a:srgbClr val="0068B7"/>
-          </a:solidFill>
-          <a:ln w="12700">
-            <a:solidFill>
-              <a:srgbClr val="0068B7"/>
-            </a:solidFill>
-            <a:prstDash val="solid"/>
-          </a:ln>
-        </p:spPr>
-      </p:sp>
-      <p:sp>
-        <p:nvSpPr>
-          <p:cNvPr id="9" name="Text 7"/>
-          <p:cNvSpPr/>
-          <p:nvPr/>
-        </p:nvSpPr>
-        <p:spPr>
-          <a:xfrm>
-            <a:off x="640080" y="731520"/>
-            <a:ext cx="420624" cy="164592"/>
-          </a:xfrm>
-          <a:prstGeom prst="rect">
-            <a:avLst/>
-          </a:prstGeom>
-          <a:noFill/>
-          <a:ln/>
-        </p:spPr>
-        <p:txBody>
-          <a:bodyPr wrap="square" lIns="0" tIns="0" rIns="0" bIns="0" rtlCol="0" anchor="ctr"/>
-          <a:lstStyle/>
-          <a:p>
-            <a:pPr algn="ctr" indent="0" marL="0">
-              <a:buNone/>
-            </a:pPr>
-            <a:r>
-              <a:rPr lang="en-US" sz="1100" b="1" dirty="0">
-                <a:solidFill>
-                  <a:srgbClr val="FFFFFF"/>
-                </a:solidFill>
-                <a:latin typeface="Aptos" pitchFamily="34" charset="0"/>
-                <a:ea typeface="Aptos" pitchFamily="34" charset="-122"/>
-                <a:cs typeface="Aptos" pitchFamily="34" charset="-120"/>
-              </a:rPr>
-              <a:t>9</a:t>
-            </a:r>
-            <a:endParaRPr lang="en-US" sz="1100" dirty="0"/>
-          </a:p>
-        </p:txBody>
-      </p:sp>
-      <p:sp>
-        <p:nvSpPr>
-          <p:cNvPr id="10" name="Text 8"/>
-          <p:cNvSpPr/>
-          <p:nvPr/>
-        </p:nvSpPr>
-        <p:spPr>
-          <a:xfrm>
-            <a:off x="640080" y="621792"/>
             <a:ext cx="10881360" cy="713232"/>
           </a:xfrm>
           <a:prstGeom prst="rect">
@@ -7538,14 +8307,14 @@
       </p:sp>
       <p:sp>
         <p:nvSpPr>
-          <p:cNvPr id="11" name="Text 9"/>
+          <p:cNvPr id="9" name="Text 7"/>
           <p:cNvSpPr/>
           <p:nvPr/>
         </p:nvSpPr>
         <p:spPr>
           <a:xfrm>
             <a:off x="868680" y="1508760"/>
-            <a:ext cx="6537960" cy="4160520"/>
+            <a:ext cx="6309360" cy="4160520"/>
           </a:xfrm>
           <a:prstGeom prst="rect">
             <a:avLst/>
@@ -7604,18 +8373,18 @@
       </p:sp>
       <p:sp>
         <p:nvSpPr>
-          <p:cNvPr id="12" name="Shape 10"/>
-          <p:cNvSpPr/>
-          <p:nvPr/>
-        </p:nvSpPr>
-        <p:spPr>
-          <a:xfrm>
-            <a:off x="7909560" y="1417320"/>
-            <a:ext cx="3154680" cy="1828800"/>
+          <p:cNvPr id="10" name="Shape 8"/>
+          <p:cNvSpPr/>
+          <p:nvPr/>
+        </p:nvSpPr>
+        <p:spPr>
+          <a:xfrm>
+            <a:off x="7635240" y="1325880"/>
+            <a:ext cx="3474720" cy="1325880"/>
           </a:xfrm>
           <a:prstGeom prst="roundRect">
             <a:avLst>
-              <a:gd name="adj" fmla="val 6000"/>
+              <a:gd name="adj" fmla="val 8276"/>
             </a:avLst>
           </a:prstGeom>
           <a:solidFill>
@@ -7631,14 +8400,14 @@
       </p:sp>
       <p:sp>
         <p:nvSpPr>
-          <p:cNvPr id="13" name="Text 11"/>
-          <p:cNvSpPr/>
-          <p:nvPr/>
-        </p:nvSpPr>
-        <p:spPr>
-          <a:xfrm>
-            <a:off x="8074152" y="1563624"/>
-            <a:ext cx="2825496" cy="256032"/>
+          <p:cNvPr id="11" name="Text 9"/>
+          <p:cNvSpPr/>
+          <p:nvPr/>
+        </p:nvSpPr>
+        <p:spPr>
+          <a:xfrm>
+            <a:off x="7799832" y="1472184"/>
+            <a:ext cx="3145536" cy="256032"/>
           </a:xfrm>
           <a:prstGeom prst="rect">
             <a:avLst/>
@@ -7662,7 +8431,7 @@
                 <a:ea typeface="Aptos" pitchFamily="34" charset="-122"/>
                 <a:cs typeface="Aptos" pitchFamily="34" charset="-120"/>
               </a:rPr>
-              <a:t>Key idea</a:t>
+              <a:t>Risk check</a:t>
             </a:r>
             <a:endParaRPr lang="en-US" sz="1300" dirty="0"/>
           </a:p>
@@ -7670,14 +8439,14 @@
       </p:sp>
       <p:sp>
         <p:nvSpPr>
-          <p:cNvPr id="14" name="Text 12"/>
-          <p:cNvSpPr/>
-          <p:nvPr/>
-        </p:nvSpPr>
-        <p:spPr>
-          <a:xfrm>
-            <a:off x="8074152" y="1920240"/>
-            <a:ext cx="2825496" cy="1188720"/>
+          <p:cNvPr id="12" name="Text 10"/>
+          <p:cNvSpPr/>
+          <p:nvPr/>
+        </p:nvSpPr>
+        <p:spPr>
+          <a:xfrm>
+            <a:off x="7799832" y="1828800"/>
+            <a:ext cx="3145536" cy="685800"/>
           </a:xfrm>
           <a:prstGeom prst="rect">
             <a:avLst/>
@@ -7711,18 +8480,171 @@
       </p:sp>
       <p:sp>
         <p:nvSpPr>
-          <p:cNvPr id="15" name="Shape 13"/>
-          <p:cNvSpPr/>
-          <p:nvPr/>
-        </p:nvSpPr>
-        <p:spPr>
-          <a:xfrm>
-            <a:off x="7909560" y="3520440"/>
-            <a:ext cx="3154680" cy="1737360"/>
+          <p:cNvPr id="13" name="Shape 11"/>
+          <p:cNvSpPr/>
+          <p:nvPr/>
+        </p:nvSpPr>
+        <p:spPr>
+          <a:xfrm>
+            <a:off x="7635240" y="2788920"/>
+            <a:ext cx="3474720" cy="1536192"/>
           </a:xfrm>
           <a:prstGeom prst="roundRect">
             <a:avLst>
-              <a:gd name="adj" fmla="val 6316"/>
+              <a:gd name="adj" fmla="val 7143"/>
+            </a:avLst>
+          </a:prstGeom>
+          <a:solidFill>
+            <a:srgbClr val="FFFFFF">
+              <a:alpha val="88000"/>
+            </a:srgbClr>
+          </a:solidFill>
+          <a:ln w="12700">
+            <a:solidFill>
+              <a:srgbClr val="D6E8F2"/>
+            </a:solidFill>
+            <a:prstDash val="solid"/>
+          </a:ln>
+        </p:spPr>
+      </p:sp>
+      <p:sp>
+        <p:nvSpPr>
+          <p:cNvPr id="14" name="Shape 12"/>
+          <p:cNvSpPr/>
+          <p:nvPr/>
+        </p:nvSpPr>
+        <p:spPr>
+          <a:xfrm>
+            <a:off x="8046720" y="3108960"/>
+            <a:ext cx="2651760" cy="896112"/>
+          </a:xfrm>
+          <a:prstGeom prst="arc">
+            <a:avLst/>
+          </a:prstGeom>
+          <a:noFill/>
+          <a:ln w="25400">
+            <a:solidFill>
+              <a:srgbClr val="0068B7"/>
+            </a:solidFill>
+            <a:prstDash val="solid"/>
+          </a:ln>
+        </p:spPr>
+      </p:sp>
+      <p:sp>
+        <p:nvSpPr>
+          <p:cNvPr id="15" name="Text 13"/>
+          <p:cNvSpPr/>
+          <p:nvPr/>
+        </p:nvSpPr>
+        <p:spPr>
+          <a:xfrm>
+            <a:off x="7909560" y="3099816"/>
+            <a:ext cx="2926080" cy="256032"/>
+          </a:xfrm>
+          <a:prstGeom prst="rect">
+            <a:avLst/>
+          </a:prstGeom>
+          <a:noFill/>
+          <a:ln/>
+        </p:spPr>
+        <p:txBody>
+          <a:bodyPr wrap="square" lIns="0" tIns="0" rIns="0" bIns="0" rtlCol="0" anchor="ctr"/>
+          <a:lstStyle/>
+          <a:p>
+            <a:pPr algn="ctr" indent="0" marL="0">
+              <a:buNone/>
+            </a:pPr>
+            <a:r>
+              <a:rPr lang="en-US" sz="1500" b="1" dirty="0">
+                <a:solidFill>
+                  <a:srgbClr val="003A63"/>
+                </a:solidFill>
+                <a:latin typeface="Aptos" pitchFamily="34" charset="0"/>
+                <a:ea typeface="Aptos" pitchFamily="34" charset="-122"/>
+                <a:cs typeface="Aptos" pitchFamily="34" charset="-120"/>
+              </a:rPr>
+              <a:t>Risk</a:t>
+            </a:r>
+            <a:endParaRPr lang="en-US" sz="1500" dirty="0"/>
+          </a:p>
+        </p:txBody>
+      </p:sp>
+      <p:sp>
+        <p:nvSpPr>
+          <p:cNvPr id="16" name="Shape 14"/>
+          <p:cNvSpPr/>
+          <p:nvPr/>
+        </p:nvSpPr>
+        <p:spPr>
+          <a:xfrm>
+            <a:off x="8366760" y="3639312"/>
+            <a:ext cx="2011680" cy="0"/>
+          </a:xfrm>
+          <a:prstGeom prst="line">
+            <a:avLst/>
+          </a:prstGeom>
+          <a:noFill/>
+          <a:ln w="63500">
+            <a:solidFill>
+              <a:srgbClr val="2F8A28"/>
+            </a:solidFill>
+            <a:prstDash val="solid"/>
+          </a:ln>
+        </p:spPr>
+      </p:sp>
+      <p:sp>
+        <p:nvSpPr>
+          <p:cNvPr id="17" name="Text 15"/>
+          <p:cNvSpPr/>
+          <p:nvPr/>
+        </p:nvSpPr>
+        <p:spPr>
+          <a:xfrm>
+            <a:off x="7909560" y="3849624"/>
+            <a:ext cx="2926080" cy="164592"/>
+          </a:xfrm>
+          <a:prstGeom prst="rect">
+            <a:avLst/>
+          </a:prstGeom>
+          <a:noFill/>
+          <a:ln/>
+        </p:spPr>
+        <p:txBody>
+          <a:bodyPr wrap="square" lIns="0" tIns="0" rIns="0" bIns="0" rtlCol="0" anchor="ctr"/>
+          <a:lstStyle/>
+          <a:p>
+            <a:pPr algn="ctr" indent="0" marL="0">
+              <a:buNone/>
+            </a:pPr>
+            <a:r>
+              <a:rPr lang="en-US" sz="900" dirty="0">
+                <a:solidFill>
+                  <a:srgbClr val="003A63"/>
+                </a:solidFill>
+                <a:latin typeface="Aptos" pitchFamily="34" charset="0"/>
+                <a:ea typeface="Aptos" pitchFamily="34" charset="-122"/>
+                <a:cs typeface="Aptos" pitchFamily="34" charset="-120"/>
+              </a:rPr>
+              <a:t>Human review</a:t>
+            </a:r>
+            <a:endParaRPr lang="en-US" sz="900" dirty="0"/>
+          </a:p>
+        </p:txBody>
+      </p:sp>
+      <p:sp>
+        <p:nvSpPr>
+          <p:cNvPr id="18" name="Shape 16"/>
+          <p:cNvSpPr/>
+          <p:nvPr/>
+        </p:nvSpPr>
+        <p:spPr>
+          <a:xfrm>
+            <a:off x="7635240" y="4498848"/>
+            <a:ext cx="3474720" cy="1143000"/>
+          </a:xfrm>
+          <a:prstGeom prst="roundRect">
+            <a:avLst>
+              <a:gd name="adj" fmla="val 9600"/>
             </a:avLst>
           </a:prstGeom>
           <a:solidFill>
@@ -7738,14 +8660,14 @@
       </p:sp>
       <p:sp>
         <p:nvSpPr>
-          <p:cNvPr id="16" name="Text 14"/>
-          <p:cNvSpPr/>
-          <p:nvPr/>
-        </p:nvSpPr>
-        <p:spPr>
-          <a:xfrm>
-            <a:off x="8074152" y="3666744"/>
-            <a:ext cx="2825496" cy="256032"/>
+          <p:cNvPr id="19" name="Text 17"/>
+          <p:cNvSpPr/>
+          <p:nvPr/>
+        </p:nvSpPr>
+        <p:spPr>
+          <a:xfrm>
+            <a:off x="7799832" y="4645152"/>
+            <a:ext cx="3145536" cy="256032"/>
           </a:xfrm>
           <a:prstGeom prst="rect">
             <a:avLst/>
@@ -7769,7 +8691,7 @@
                 <a:ea typeface="Aptos" pitchFamily="34" charset="-122"/>
                 <a:cs typeface="Aptos" pitchFamily="34" charset="-120"/>
               </a:rPr>
-              <a:t>Use this for</a:t>
+              <a:t>Safeguard to plan</a:t>
             </a:r>
             <a:endParaRPr lang="en-US" sz="1300" dirty="0"/>
           </a:p>
@@ -7777,14 +8699,14 @@
       </p:sp>
       <p:sp>
         <p:nvSpPr>
-          <p:cNvPr id="17" name="Text 15"/>
-          <p:cNvSpPr/>
-          <p:nvPr/>
-        </p:nvSpPr>
-        <p:spPr>
-          <a:xfrm>
-            <a:off x="8074152" y="4023360"/>
-            <a:ext cx="2825496" cy="1097280"/>
+          <p:cNvPr id="20" name="Text 18"/>
+          <p:cNvSpPr/>
+          <p:nvPr/>
+        </p:nvSpPr>
+        <p:spPr>
+          <a:xfrm>
+            <a:off x="7799832" y="5001768"/>
+            <a:ext cx="3145536" cy="502920"/>
           </a:xfrm>
           <a:prstGeom prst="rect">
             <a:avLst/>
@@ -7810,7 +8732,7 @@
                 <a:ea typeface="Aptos" pitchFamily="34" charset="-122"/>
                 <a:cs typeface="Aptos" pitchFamily="34" charset="-120"/>
               </a:rPr>
-              <a:t>Connect the concept to public health decisions, safeguards, documentation, or implementation work.</a:t>
+              <a:t>Use the assignment to test whether you can explain the concept, apply it to a realistic public health situation, and identify what would need review before the work moves forward.</a:t>
             </a:r>
             <a:endParaRPr lang="en-US" sz="1550" dirty="0"/>
           </a:p>
@@ -7984,8 +8906,8 @@
         </p:nvSpPr>
         <p:spPr>
           <a:xfrm>
-            <a:off x="9966960" y="6537960"/>
-            <a:ext cx="1645920" cy="201168"/>
+            <a:off x="9646920" y="6537960"/>
+            <a:ext cx="1965960" cy="201168"/>
           </a:xfrm>
           <a:prstGeom prst="rect">
             <a:avLst/>
@@ -8009,7 +8931,7 @@
                 <a:ea typeface="Aptos" pitchFamily="34" charset="-122"/>
                 <a:cs typeface="Aptos" pitchFamily="34" charset="-120"/>
               </a:rPr>
-              <a:t>Â© Paula Soper</a:t>
+              <a:t>Copyright Paula Soper</a:t>
             </a:r>
             <a:endParaRPr lang="en-US" sz="800" dirty="0"/>
           </a:p>
@@ -8056,77 +8978,13 @@
       </p:sp>
       <p:sp>
         <p:nvSpPr>
-          <p:cNvPr id="8" name="Shape 6"/>
+          <p:cNvPr id="8" name="Text 6"/>
           <p:cNvSpPr/>
           <p:nvPr/>
         </p:nvSpPr>
         <p:spPr>
           <a:xfrm>
             <a:off x="640080" y="658368"/>
-            <a:ext cx="420624" cy="420624"/>
-          </a:xfrm>
-          <a:prstGeom prst="ellipse">
-            <a:avLst/>
-          </a:prstGeom>
-          <a:solidFill>
-            <a:srgbClr val="0068B7"/>
-          </a:solidFill>
-          <a:ln w="12700">
-            <a:solidFill>
-              <a:srgbClr val="0068B7"/>
-            </a:solidFill>
-            <a:prstDash val="solid"/>
-          </a:ln>
-        </p:spPr>
-      </p:sp>
-      <p:sp>
-        <p:nvSpPr>
-          <p:cNvPr id="9" name="Text 7"/>
-          <p:cNvSpPr/>
-          <p:nvPr/>
-        </p:nvSpPr>
-        <p:spPr>
-          <a:xfrm>
-            <a:off x="640080" y="731520"/>
-            <a:ext cx="420624" cy="164592"/>
-          </a:xfrm>
-          <a:prstGeom prst="rect">
-            <a:avLst/>
-          </a:prstGeom>
-          <a:noFill/>
-          <a:ln/>
-        </p:spPr>
-        <p:txBody>
-          <a:bodyPr wrap="square" lIns="0" tIns="0" rIns="0" bIns="0" rtlCol="0" anchor="ctr"/>
-          <a:lstStyle/>
-          <a:p>
-            <a:pPr algn="ctr" indent="0" marL="0">
-              <a:buNone/>
-            </a:pPr>
-            <a:r>
-              <a:rPr lang="en-US" sz="1100" b="1" dirty="0">
-                <a:solidFill>
-                  <a:srgbClr val="FFFFFF"/>
-                </a:solidFill>
-                <a:latin typeface="Aptos" pitchFamily="34" charset="0"/>
-                <a:ea typeface="Aptos" pitchFamily="34" charset="-122"/>
-                <a:cs typeface="Aptos" pitchFamily="34" charset="-120"/>
-              </a:rPr>
-              <a:t>10</a:t>
-            </a:r>
-            <a:endParaRPr lang="en-US" sz="1100" dirty="0"/>
-          </a:p>
-        </p:txBody>
-      </p:sp>
-      <p:sp>
-        <p:nvSpPr>
-          <p:cNvPr id="10" name="Text 8"/>
-          <p:cNvSpPr/>
-          <p:nvPr/>
-        </p:nvSpPr>
-        <p:spPr>
-          <a:xfrm>
-            <a:off x="640080" y="621792"/>
             <a:ext cx="10881360" cy="713232"/>
           </a:xfrm>
           <a:prstGeom prst="rect">
@@ -8161,14 +9019,14 @@
       </p:sp>
       <p:sp>
         <p:nvSpPr>
-          <p:cNvPr id="11" name="Text 9"/>
+          <p:cNvPr id="9" name="Text 7"/>
           <p:cNvSpPr/>
           <p:nvPr/>
         </p:nvSpPr>
         <p:spPr>
           <a:xfrm>
             <a:off x="868680" y="1508760"/>
-            <a:ext cx="6537960" cy="4160520"/>
+            <a:ext cx="6309360" cy="4160520"/>
           </a:xfrm>
           <a:prstGeom prst="rect">
             <a:avLst/>
@@ -8227,18 +9085,18 @@
       </p:sp>
       <p:sp>
         <p:nvSpPr>
-          <p:cNvPr id="12" name="Shape 10"/>
-          <p:cNvSpPr/>
-          <p:nvPr/>
-        </p:nvSpPr>
-        <p:spPr>
-          <a:xfrm>
-            <a:off x="7909560" y="1417320"/>
-            <a:ext cx="3154680" cy="1828800"/>
+          <p:cNvPr id="10" name="Shape 8"/>
+          <p:cNvSpPr/>
+          <p:nvPr/>
+        </p:nvSpPr>
+        <p:spPr>
+          <a:xfrm>
+            <a:off x="7635240" y="1325880"/>
+            <a:ext cx="3474720" cy="1325880"/>
           </a:xfrm>
           <a:prstGeom prst="roundRect">
             <a:avLst>
-              <a:gd name="adj" fmla="val 6000"/>
+              <a:gd name="adj" fmla="val 8276"/>
             </a:avLst>
           </a:prstGeom>
           <a:solidFill>
@@ -8254,14 +9112,14 @@
       </p:sp>
       <p:sp>
         <p:nvSpPr>
-          <p:cNvPr id="13" name="Text 11"/>
-          <p:cNvSpPr/>
-          <p:nvPr/>
-        </p:nvSpPr>
-        <p:spPr>
-          <a:xfrm>
-            <a:off x="8074152" y="1563624"/>
-            <a:ext cx="2825496" cy="256032"/>
+          <p:cNvPr id="11" name="Text 9"/>
+          <p:cNvSpPr/>
+          <p:nvPr/>
+        </p:nvSpPr>
+        <p:spPr>
+          <a:xfrm>
+            <a:off x="7799832" y="1472184"/>
+            <a:ext cx="3145536" cy="256032"/>
           </a:xfrm>
           <a:prstGeom prst="rect">
             <a:avLst/>
@@ -8285,7 +9143,7 @@
                 <a:ea typeface="Aptos" pitchFamily="34" charset="-122"/>
                 <a:cs typeface="Aptos" pitchFamily="34" charset="-120"/>
               </a:rPr>
-              <a:t>Key idea</a:t>
+              <a:t>Risk check</a:t>
             </a:r>
             <a:endParaRPr lang="en-US" sz="1300" dirty="0"/>
           </a:p>
@@ -8293,14 +9151,14 @@
       </p:sp>
       <p:sp>
         <p:nvSpPr>
-          <p:cNvPr id="14" name="Text 12"/>
-          <p:cNvSpPr/>
-          <p:nvPr/>
-        </p:nvSpPr>
-        <p:spPr>
-          <a:xfrm>
-            <a:off x="8074152" y="1920240"/>
-            <a:ext cx="2825496" cy="1188720"/>
+          <p:cNvPr id="12" name="Text 10"/>
+          <p:cNvSpPr/>
+          <p:nvPr/>
+        </p:nvSpPr>
+        <p:spPr>
+          <a:xfrm>
+            <a:off x="7799832" y="1828800"/>
+            <a:ext cx="3145536" cy="685800"/>
           </a:xfrm>
           <a:prstGeom prst="rect">
             <a:avLst/>
@@ -8334,18 +9192,171 @@
       </p:sp>
       <p:sp>
         <p:nvSpPr>
-          <p:cNvPr id="15" name="Shape 13"/>
-          <p:cNvSpPr/>
-          <p:nvPr/>
-        </p:nvSpPr>
-        <p:spPr>
-          <a:xfrm>
-            <a:off x="7909560" y="3520440"/>
-            <a:ext cx="3154680" cy="1737360"/>
+          <p:cNvPr id="13" name="Shape 11"/>
+          <p:cNvSpPr/>
+          <p:nvPr/>
+        </p:nvSpPr>
+        <p:spPr>
+          <a:xfrm>
+            <a:off x="7635240" y="2788920"/>
+            <a:ext cx="3474720" cy="1536192"/>
           </a:xfrm>
           <a:prstGeom prst="roundRect">
             <a:avLst>
-              <a:gd name="adj" fmla="val 6316"/>
+              <a:gd name="adj" fmla="val 7143"/>
+            </a:avLst>
+          </a:prstGeom>
+          <a:solidFill>
+            <a:srgbClr val="FFFFFF">
+              <a:alpha val="88000"/>
+            </a:srgbClr>
+          </a:solidFill>
+          <a:ln w="12700">
+            <a:solidFill>
+              <a:srgbClr val="D6E8F2"/>
+            </a:solidFill>
+            <a:prstDash val="solid"/>
+          </a:ln>
+        </p:spPr>
+      </p:sp>
+      <p:sp>
+        <p:nvSpPr>
+          <p:cNvPr id="14" name="Shape 12"/>
+          <p:cNvSpPr/>
+          <p:nvPr/>
+        </p:nvSpPr>
+        <p:spPr>
+          <a:xfrm>
+            <a:off x="8046720" y="3108960"/>
+            <a:ext cx="2651760" cy="896112"/>
+          </a:xfrm>
+          <a:prstGeom prst="arc">
+            <a:avLst/>
+          </a:prstGeom>
+          <a:noFill/>
+          <a:ln w="25400">
+            <a:solidFill>
+              <a:srgbClr val="0068B7"/>
+            </a:solidFill>
+            <a:prstDash val="solid"/>
+          </a:ln>
+        </p:spPr>
+      </p:sp>
+      <p:sp>
+        <p:nvSpPr>
+          <p:cNvPr id="15" name="Text 13"/>
+          <p:cNvSpPr/>
+          <p:nvPr/>
+        </p:nvSpPr>
+        <p:spPr>
+          <a:xfrm>
+            <a:off x="7909560" y="3099816"/>
+            <a:ext cx="2926080" cy="256032"/>
+          </a:xfrm>
+          <a:prstGeom prst="rect">
+            <a:avLst/>
+          </a:prstGeom>
+          <a:noFill/>
+          <a:ln/>
+        </p:spPr>
+        <p:txBody>
+          <a:bodyPr wrap="square" lIns="0" tIns="0" rIns="0" bIns="0" rtlCol="0" anchor="ctr"/>
+          <a:lstStyle/>
+          <a:p>
+            <a:pPr algn="ctr" indent="0" marL="0">
+              <a:buNone/>
+            </a:pPr>
+            <a:r>
+              <a:rPr lang="en-US" sz="1500" b="1" dirty="0">
+                <a:solidFill>
+                  <a:srgbClr val="003A63"/>
+                </a:solidFill>
+                <a:latin typeface="Aptos" pitchFamily="34" charset="0"/>
+                <a:ea typeface="Aptos" pitchFamily="34" charset="-122"/>
+                <a:cs typeface="Aptos" pitchFamily="34" charset="-120"/>
+              </a:rPr>
+              <a:t>Risk</a:t>
+            </a:r>
+            <a:endParaRPr lang="en-US" sz="1500" dirty="0"/>
+          </a:p>
+        </p:txBody>
+      </p:sp>
+      <p:sp>
+        <p:nvSpPr>
+          <p:cNvPr id="16" name="Shape 14"/>
+          <p:cNvSpPr/>
+          <p:nvPr/>
+        </p:nvSpPr>
+        <p:spPr>
+          <a:xfrm>
+            <a:off x="8366760" y="3639312"/>
+            <a:ext cx="2011680" cy="0"/>
+          </a:xfrm>
+          <a:prstGeom prst="line">
+            <a:avLst/>
+          </a:prstGeom>
+          <a:noFill/>
+          <a:ln w="63500">
+            <a:solidFill>
+              <a:srgbClr val="2F8A28"/>
+            </a:solidFill>
+            <a:prstDash val="solid"/>
+          </a:ln>
+        </p:spPr>
+      </p:sp>
+      <p:sp>
+        <p:nvSpPr>
+          <p:cNvPr id="17" name="Text 15"/>
+          <p:cNvSpPr/>
+          <p:nvPr/>
+        </p:nvSpPr>
+        <p:spPr>
+          <a:xfrm>
+            <a:off x="7909560" y="3849624"/>
+            <a:ext cx="2926080" cy="164592"/>
+          </a:xfrm>
+          <a:prstGeom prst="rect">
+            <a:avLst/>
+          </a:prstGeom>
+          <a:noFill/>
+          <a:ln/>
+        </p:spPr>
+        <p:txBody>
+          <a:bodyPr wrap="square" lIns="0" tIns="0" rIns="0" bIns="0" rtlCol="0" anchor="ctr"/>
+          <a:lstStyle/>
+          <a:p>
+            <a:pPr algn="ctr" indent="0" marL="0">
+              <a:buNone/>
+            </a:pPr>
+            <a:r>
+              <a:rPr lang="en-US" sz="900" dirty="0">
+                <a:solidFill>
+                  <a:srgbClr val="003A63"/>
+                </a:solidFill>
+                <a:latin typeface="Aptos" pitchFamily="34" charset="0"/>
+                <a:ea typeface="Aptos" pitchFamily="34" charset="-122"/>
+                <a:cs typeface="Aptos" pitchFamily="34" charset="-120"/>
+              </a:rPr>
+              <a:t>Human review</a:t>
+            </a:r>
+            <a:endParaRPr lang="en-US" sz="900" dirty="0"/>
+          </a:p>
+        </p:txBody>
+      </p:sp>
+      <p:sp>
+        <p:nvSpPr>
+          <p:cNvPr id="18" name="Shape 16"/>
+          <p:cNvSpPr/>
+          <p:nvPr/>
+        </p:nvSpPr>
+        <p:spPr>
+          <a:xfrm>
+            <a:off x="7635240" y="4498848"/>
+            <a:ext cx="3474720" cy="1143000"/>
+          </a:xfrm>
+          <a:prstGeom prst="roundRect">
+            <a:avLst>
+              <a:gd name="adj" fmla="val 9600"/>
             </a:avLst>
           </a:prstGeom>
           <a:solidFill>
@@ -8361,14 +9372,14 @@
       </p:sp>
       <p:sp>
         <p:nvSpPr>
-          <p:cNvPr id="16" name="Text 14"/>
-          <p:cNvSpPr/>
-          <p:nvPr/>
-        </p:nvSpPr>
-        <p:spPr>
-          <a:xfrm>
-            <a:off x="8074152" y="3666744"/>
-            <a:ext cx="2825496" cy="256032"/>
+          <p:cNvPr id="19" name="Text 17"/>
+          <p:cNvSpPr/>
+          <p:nvPr/>
+        </p:nvSpPr>
+        <p:spPr>
+          <a:xfrm>
+            <a:off x="7799832" y="4645152"/>
+            <a:ext cx="3145536" cy="256032"/>
           </a:xfrm>
           <a:prstGeom prst="rect">
             <a:avLst/>
@@ -8392,7 +9403,7 @@
                 <a:ea typeface="Aptos" pitchFamily="34" charset="-122"/>
                 <a:cs typeface="Aptos" pitchFamily="34" charset="-120"/>
               </a:rPr>
-              <a:t>Use this for</a:t>
+              <a:t>Safeguard to plan</a:t>
             </a:r>
             <a:endParaRPr lang="en-US" sz="1300" dirty="0"/>
           </a:p>
@@ -8400,14 +9411,14 @@
       </p:sp>
       <p:sp>
         <p:nvSpPr>
-          <p:cNvPr id="17" name="Text 15"/>
-          <p:cNvSpPr/>
-          <p:nvPr/>
-        </p:nvSpPr>
-        <p:spPr>
-          <a:xfrm>
-            <a:off x="8074152" y="4023360"/>
-            <a:ext cx="2825496" cy="1097280"/>
+          <p:cNvPr id="20" name="Text 18"/>
+          <p:cNvSpPr/>
+          <p:nvPr/>
+        </p:nvSpPr>
+        <p:spPr>
+          <a:xfrm>
+            <a:off x="7799832" y="5001768"/>
+            <a:ext cx="3145536" cy="502920"/>
           </a:xfrm>
           <a:prstGeom prst="rect">
             <a:avLst/>
@@ -8433,7 +9444,7 @@
                 <a:ea typeface="Aptos" pitchFamily="34" charset="-122"/>
                 <a:cs typeface="Aptos" pitchFamily="34" charset="-120"/>
               </a:rPr>
-              <a:t>Connect the concept to public health decisions, safeguards, documentation, or implementation work.</a:t>
+              <a:t>Identify what could go wrong, who could be affected, what safeguards are needed, and what evidence should be reviewed before use expands.</a:t>
             </a:r>
             <a:endParaRPr lang="en-US" sz="1550" dirty="0"/>
           </a:p>
@@ -8607,8 +9618,8 @@
         </p:nvSpPr>
         <p:spPr>
           <a:xfrm>
-            <a:off x="9966960" y="6537960"/>
-            <a:ext cx="1645920" cy="201168"/>
+            <a:off x="9646920" y="6537960"/>
+            <a:ext cx="1965960" cy="201168"/>
           </a:xfrm>
           <a:prstGeom prst="rect">
             <a:avLst/>
@@ -8632,7 +9643,7 @@
                 <a:ea typeface="Aptos" pitchFamily="34" charset="-122"/>
                 <a:cs typeface="Aptos" pitchFamily="34" charset="-120"/>
               </a:rPr>
-              <a:t>Â© Paula Soper</a:t>
+              <a:t>Copyright Paula Soper</a:t>
             </a:r>
             <a:endParaRPr lang="en-US" sz="800" dirty="0"/>
           </a:p>
@@ -8727,7 +9738,7 @@
         <p:spPr>
           <a:xfrm>
             <a:off x="868680" y="1508760"/>
-            <a:ext cx="6537960" cy="4160520"/>
+            <a:ext cx="6309360" cy="4160520"/>
           </a:xfrm>
           <a:prstGeom prst="rect">
             <a:avLst/>
@@ -8764,12 +9775,12 @@
         </p:nvSpPr>
         <p:spPr>
           <a:xfrm>
-            <a:off x="7909560" y="1417320"/>
-            <a:ext cx="3154680" cy="1828800"/>
+            <a:off x="7635240" y="1325880"/>
+            <a:ext cx="3474720" cy="1325880"/>
           </a:xfrm>
           <a:prstGeom prst="roundRect">
             <a:avLst>
-              <a:gd name="adj" fmla="val 6000"/>
+              <a:gd name="adj" fmla="val 8276"/>
             </a:avLst>
           </a:prstGeom>
           <a:solidFill>
@@ -8791,8 +9802,8 @@
         </p:nvSpPr>
         <p:spPr>
           <a:xfrm>
-            <a:off x="8074152" y="1563624"/>
-            <a:ext cx="2825496" cy="256032"/>
+            <a:off x="7799832" y="1472184"/>
+            <a:ext cx="3145536" cy="256032"/>
           </a:xfrm>
           <a:prstGeom prst="rect">
             <a:avLst/>
@@ -8816,7 +9827,7 @@
                 <a:ea typeface="Aptos" pitchFamily="34" charset="-122"/>
                 <a:cs typeface="Aptos" pitchFamily="34" charset="-120"/>
               </a:rPr>
-              <a:t>Key idea</a:t>
+              <a:t>Risk check</a:t>
             </a:r>
             <a:endParaRPr lang="en-US" sz="1300" dirty="0"/>
           </a:p>
@@ -8830,8 +9841,8 @@
         </p:nvSpPr>
         <p:spPr>
           <a:xfrm>
-            <a:off x="8074152" y="1920240"/>
-            <a:ext cx="2825496" cy="1188720"/>
+            <a:off x="7799832" y="1828800"/>
+            <a:ext cx="3145536" cy="685800"/>
           </a:xfrm>
           <a:prstGeom prst="rect">
             <a:avLst/>
@@ -8871,12 +9882,165 @@
         </p:nvSpPr>
         <p:spPr>
           <a:xfrm>
-            <a:off x="7909560" y="3520440"/>
-            <a:ext cx="3154680" cy="1737360"/>
+            <a:off x="7635240" y="2788920"/>
+            <a:ext cx="3474720" cy="1536192"/>
           </a:xfrm>
           <a:prstGeom prst="roundRect">
             <a:avLst>
-              <a:gd name="adj" fmla="val 6316"/>
+              <a:gd name="adj" fmla="val 7143"/>
+            </a:avLst>
+          </a:prstGeom>
+          <a:solidFill>
+            <a:srgbClr val="FFFFFF">
+              <a:alpha val="88000"/>
+            </a:srgbClr>
+          </a:solidFill>
+          <a:ln w="12700">
+            <a:solidFill>
+              <a:srgbClr val="D6E8F2"/>
+            </a:solidFill>
+            <a:prstDash val="solid"/>
+          </a:ln>
+        </p:spPr>
+      </p:sp>
+      <p:sp>
+        <p:nvSpPr>
+          <p:cNvPr id="14" name="Shape 12"/>
+          <p:cNvSpPr/>
+          <p:nvPr/>
+        </p:nvSpPr>
+        <p:spPr>
+          <a:xfrm>
+            <a:off x="8046720" y="3108960"/>
+            <a:ext cx="2651760" cy="896112"/>
+          </a:xfrm>
+          <a:prstGeom prst="arc">
+            <a:avLst/>
+          </a:prstGeom>
+          <a:noFill/>
+          <a:ln w="25400">
+            <a:solidFill>
+              <a:srgbClr val="0068B7"/>
+            </a:solidFill>
+            <a:prstDash val="solid"/>
+          </a:ln>
+        </p:spPr>
+      </p:sp>
+      <p:sp>
+        <p:nvSpPr>
+          <p:cNvPr id="15" name="Text 13"/>
+          <p:cNvSpPr/>
+          <p:nvPr/>
+        </p:nvSpPr>
+        <p:spPr>
+          <a:xfrm>
+            <a:off x="7909560" y="3099816"/>
+            <a:ext cx="2926080" cy="256032"/>
+          </a:xfrm>
+          <a:prstGeom prst="rect">
+            <a:avLst/>
+          </a:prstGeom>
+          <a:noFill/>
+          <a:ln/>
+        </p:spPr>
+        <p:txBody>
+          <a:bodyPr wrap="square" lIns="0" tIns="0" rIns="0" bIns="0" rtlCol="0" anchor="ctr"/>
+          <a:lstStyle/>
+          <a:p>
+            <a:pPr algn="ctr" indent="0" marL="0">
+              <a:buNone/>
+            </a:pPr>
+            <a:r>
+              <a:rPr lang="en-US" sz="1500" b="1" dirty="0">
+                <a:solidFill>
+                  <a:srgbClr val="003A63"/>
+                </a:solidFill>
+                <a:latin typeface="Aptos" pitchFamily="34" charset="0"/>
+                <a:ea typeface="Aptos" pitchFamily="34" charset="-122"/>
+                <a:cs typeface="Aptos" pitchFamily="34" charset="-120"/>
+              </a:rPr>
+              <a:t>Risk</a:t>
+            </a:r>
+            <a:endParaRPr lang="en-US" sz="1500" dirty="0"/>
+          </a:p>
+        </p:txBody>
+      </p:sp>
+      <p:sp>
+        <p:nvSpPr>
+          <p:cNvPr id="16" name="Shape 14"/>
+          <p:cNvSpPr/>
+          <p:nvPr/>
+        </p:nvSpPr>
+        <p:spPr>
+          <a:xfrm>
+            <a:off x="8366760" y="3639312"/>
+            <a:ext cx="2011680" cy="0"/>
+          </a:xfrm>
+          <a:prstGeom prst="line">
+            <a:avLst/>
+          </a:prstGeom>
+          <a:noFill/>
+          <a:ln w="63500">
+            <a:solidFill>
+              <a:srgbClr val="2F8A28"/>
+            </a:solidFill>
+            <a:prstDash val="solid"/>
+          </a:ln>
+        </p:spPr>
+      </p:sp>
+      <p:sp>
+        <p:nvSpPr>
+          <p:cNvPr id="17" name="Text 15"/>
+          <p:cNvSpPr/>
+          <p:nvPr/>
+        </p:nvSpPr>
+        <p:spPr>
+          <a:xfrm>
+            <a:off x="7909560" y="3849624"/>
+            <a:ext cx="2926080" cy="164592"/>
+          </a:xfrm>
+          <a:prstGeom prst="rect">
+            <a:avLst/>
+          </a:prstGeom>
+          <a:noFill/>
+          <a:ln/>
+        </p:spPr>
+        <p:txBody>
+          <a:bodyPr wrap="square" lIns="0" tIns="0" rIns="0" bIns="0" rtlCol="0" anchor="ctr"/>
+          <a:lstStyle/>
+          <a:p>
+            <a:pPr algn="ctr" indent="0" marL="0">
+              <a:buNone/>
+            </a:pPr>
+            <a:r>
+              <a:rPr lang="en-US" sz="900" dirty="0">
+                <a:solidFill>
+                  <a:srgbClr val="003A63"/>
+                </a:solidFill>
+                <a:latin typeface="Aptos" pitchFamily="34" charset="0"/>
+                <a:ea typeface="Aptos" pitchFamily="34" charset="-122"/>
+                <a:cs typeface="Aptos" pitchFamily="34" charset="-120"/>
+              </a:rPr>
+              <a:t>Human review</a:t>
+            </a:r>
+            <a:endParaRPr lang="en-US" sz="900" dirty="0"/>
+          </a:p>
+        </p:txBody>
+      </p:sp>
+      <p:sp>
+        <p:nvSpPr>
+          <p:cNvPr id="18" name="Shape 16"/>
+          <p:cNvSpPr/>
+          <p:nvPr/>
+        </p:nvSpPr>
+        <p:spPr>
+          <a:xfrm>
+            <a:off x="7635240" y="4498848"/>
+            <a:ext cx="3474720" cy="1143000"/>
+          </a:xfrm>
+          <a:prstGeom prst="roundRect">
+            <a:avLst>
+              <a:gd name="adj" fmla="val 9600"/>
             </a:avLst>
           </a:prstGeom>
           <a:solidFill>
@@ -8892,14 +10056,14 @@
       </p:sp>
       <p:sp>
         <p:nvSpPr>
-          <p:cNvPr id="14" name="Text 12"/>
-          <p:cNvSpPr/>
-          <p:nvPr/>
-        </p:nvSpPr>
-        <p:spPr>
-          <a:xfrm>
-            <a:off x="8074152" y="3666744"/>
-            <a:ext cx="2825496" cy="256032"/>
+          <p:cNvPr id="19" name="Text 17"/>
+          <p:cNvSpPr/>
+          <p:nvPr/>
+        </p:nvSpPr>
+        <p:spPr>
+          <a:xfrm>
+            <a:off x="7799832" y="4645152"/>
+            <a:ext cx="3145536" cy="256032"/>
           </a:xfrm>
           <a:prstGeom prst="rect">
             <a:avLst/>
@@ -8923,7 +10087,7 @@
                 <a:ea typeface="Aptos" pitchFamily="34" charset="-122"/>
                 <a:cs typeface="Aptos" pitchFamily="34" charset="-120"/>
               </a:rPr>
-              <a:t>Use this for</a:t>
+              <a:t>Safeguard to plan</a:t>
             </a:r>
             <a:endParaRPr lang="en-US" sz="1300" dirty="0"/>
           </a:p>
@@ -8931,14 +10095,14 @@
       </p:sp>
       <p:sp>
         <p:nvSpPr>
-          <p:cNvPr id="15" name="Text 13"/>
-          <p:cNvSpPr/>
-          <p:nvPr/>
-        </p:nvSpPr>
-        <p:spPr>
-          <a:xfrm>
-            <a:off x="8074152" y="4023360"/>
-            <a:ext cx="2825496" cy="1097280"/>
+          <p:cNvPr id="20" name="Text 18"/>
+          <p:cNvSpPr/>
+          <p:nvPr/>
+        </p:nvSpPr>
+        <p:spPr>
+          <a:xfrm>
+            <a:off x="7799832" y="5001768"/>
+            <a:ext cx="3145536" cy="502920"/>
           </a:xfrm>
           <a:prstGeom prst="rect">
             <a:avLst/>
@@ -8964,7 +10128,7 @@
                 <a:ea typeface="Aptos" pitchFamily="34" charset="-122"/>
                 <a:cs typeface="Aptos" pitchFamily="34" charset="-120"/>
               </a:rPr>
-              <a:t>Connect the concept to public health decisions, safeguards, documentation, or implementation work.</a:t>
+              <a:t>Identify what could go wrong, who could be affected, what safeguards are needed, and what evidence should be reviewed before use expands.</a:t>
             </a:r>
             <a:endParaRPr lang="en-US" sz="1550" dirty="0"/>
           </a:p>
@@ -9138,8 +10302,8 @@
         </p:nvSpPr>
         <p:spPr>
           <a:xfrm>
-            <a:off x="9966960" y="6537960"/>
-            <a:ext cx="1645920" cy="201168"/>
+            <a:off x="9646920" y="6537960"/>
+            <a:ext cx="1965960" cy="201168"/>
           </a:xfrm>
           <a:prstGeom prst="rect">
             <a:avLst/>
@@ -9163,7 +10327,7 @@
                 <a:ea typeface="Aptos" pitchFamily="34" charset="-122"/>
                 <a:cs typeface="Aptos" pitchFamily="34" charset="-120"/>
               </a:rPr>
-              <a:t>Â© Paula Soper</a:t>
+              <a:t>Copyright Paula Soper</a:t>
             </a:r>
             <a:endParaRPr lang="en-US" sz="800" dirty="0"/>
           </a:p>
@@ -9526,46 +10690,7 @@
       </p:sp>
       <p:sp>
         <p:nvSpPr>
-          <p:cNvPr id="15" name="Text 13"/>
-          <p:cNvSpPr/>
-          <p:nvPr/>
-        </p:nvSpPr>
-        <p:spPr>
-          <a:xfrm>
-            <a:off x="8695944" y="3941064"/>
-            <a:ext cx="201168" cy="256032"/>
-          </a:xfrm>
-          <a:prstGeom prst="rect">
-            <a:avLst/>
-          </a:prstGeom>
-          <a:noFill/>
-          <a:ln/>
-        </p:spPr>
-        <p:txBody>
-          <a:bodyPr wrap="square" lIns="0" tIns="0" rIns="0" bIns="0" rtlCol="0" anchor="ctr"/>
-          <a:lstStyle/>
-          <a:p>
-            <a:pPr algn="ctr" indent="0" marL="0">
-              <a:buNone/>
-            </a:pPr>
-            <a:r>
-              <a:rPr lang="en-US" sz="1800" b="1" dirty="0">
-                <a:solidFill>
-                  <a:srgbClr val="0068B7"/>
-                </a:solidFill>
-                <a:latin typeface="Aptos" pitchFamily="34" charset="0"/>
-                <a:ea typeface="Aptos" pitchFamily="34" charset="-122"/>
-                <a:cs typeface="Aptos" pitchFamily="34" charset="-120"/>
-              </a:rPr>
-              <a:t>â†’</a:t>
-            </a:r>
-            <a:endParaRPr lang="en-US" sz="1800" dirty="0"/>
-          </a:p>
-        </p:txBody>
-      </p:sp>
-      <p:sp>
-        <p:nvSpPr>
-          <p:cNvPr id="16" name="Shape 14"/>
+          <p:cNvPr id="15" name="Shape 13"/>
           <p:cNvSpPr/>
           <p:nvPr/>
         </p:nvSpPr>
@@ -9592,7 +10717,7 @@
       </p:sp>
       <p:sp>
         <p:nvSpPr>
-          <p:cNvPr id="17" name="Text 15"/>
+          <p:cNvPr id="16" name="Text 14"/>
           <p:cNvSpPr/>
           <p:nvPr/>
         </p:nvSpPr>
@@ -9633,46 +10758,7 @@
       </p:sp>
       <p:sp>
         <p:nvSpPr>
-          <p:cNvPr id="18" name="Text 16"/>
-          <p:cNvSpPr/>
-          <p:nvPr/>
-        </p:nvSpPr>
-        <p:spPr>
-          <a:xfrm>
-            <a:off x="9985248" y="3941064"/>
-            <a:ext cx="201168" cy="256032"/>
-          </a:xfrm>
-          <a:prstGeom prst="rect">
-            <a:avLst/>
-          </a:prstGeom>
-          <a:noFill/>
-          <a:ln/>
-        </p:spPr>
-        <p:txBody>
-          <a:bodyPr wrap="square" lIns="0" tIns="0" rIns="0" bIns="0" rtlCol="0" anchor="ctr"/>
-          <a:lstStyle/>
-          <a:p>
-            <a:pPr algn="ctr" indent="0" marL="0">
-              <a:buNone/>
-            </a:pPr>
-            <a:r>
-              <a:rPr lang="en-US" sz="1800" b="1" dirty="0">
-                <a:solidFill>
-                  <a:srgbClr val="0068B7"/>
-                </a:solidFill>
-                <a:latin typeface="Aptos" pitchFamily="34" charset="0"/>
-                <a:ea typeface="Aptos" pitchFamily="34" charset="-122"/>
-                <a:cs typeface="Aptos" pitchFamily="34" charset="-120"/>
-              </a:rPr>
-              <a:t>â†’</a:t>
-            </a:r>
-            <a:endParaRPr lang="en-US" sz="1800" dirty="0"/>
-          </a:p>
-        </p:txBody>
-      </p:sp>
-      <p:sp>
-        <p:nvSpPr>
-          <p:cNvPr id="19" name="Shape 17"/>
+          <p:cNvPr id="17" name="Shape 15"/>
           <p:cNvSpPr/>
           <p:nvPr/>
         </p:nvSpPr>
@@ -9699,7 +10785,7 @@
       </p:sp>
       <p:sp>
         <p:nvSpPr>
-          <p:cNvPr id="20" name="Text 18"/>
+          <p:cNvPr id="18" name="Text 16"/>
           <p:cNvSpPr/>
           <p:nvPr/>
         </p:nvSpPr>
@@ -9906,8 +10992,8 @@
         </p:nvSpPr>
         <p:spPr>
           <a:xfrm>
-            <a:off x="9966960" y="6537960"/>
-            <a:ext cx="1645920" cy="201168"/>
+            <a:off x="9646920" y="6537960"/>
+            <a:ext cx="1965960" cy="201168"/>
           </a:xfrm>
           <a:prstGeom prst="rect">
             <a:avLst/>
@@ -9931,7 +11017,7 @@
                 <a:ea typeface="Aptos" pitchFamily="34" charset="-122"/>
                 <a:cs typeface="Aptos" pitchFamily="34" charset="-120"/>
               </a:rPr>
-              <a:t>Â© Paula Soper</a:t>
+              <a:t>Copyright Paula Soper</a:t>
             </a:r>
             <a:endParaRPr lang="en-US" sz="800" dirty="0"/>
           </a:p>
@@ -9978,77 +11064,13 @@
       </p:sp>
       <p:sp>
         <p:nvSpPr>
-          <p:cNvPr id="8" name="Shape 6"/>
+          <p:cNvPr id="8" name="Text 6"/>
           <p:cNvSpPr/>
           <p:nvPr/>
         </p:nvSpPr>
         <p:spPr>
           <a:xfrm>
             <a:off x="640080" y="658368"/>
-            <a:ext cx="420624" cy="420624"/>
-          </a:xfrm>
-          <a:prstGeom prst="ellipse">
-            <a:avLst/>
-          </a:prstGeom>
-          <a:solidFill>
-            <a:srgbClr val="0068B7"/>
-          </a:solidFill>
-          <a:ln w="12700">
-            <a:solidFill>
-              <a:srgbClr val="0068B7"/>
-            </a:solidFill>
-            <a:prstDash val="solid"/>
-          </a:ln>
-        </p:spPr>
-      </p:sp>
-      <p:sp>
-        <p:nvSpPr>
-          <p:cNvPr id="9" name="Text 7"/>
-          <p:cNvSpPr/>
-          <p:nvPr/>
-        </p:nvSpPr>
-        <p:spPr>
-          <a:xfrm>
-            <a:off x="640080" y="731520"/>
-            <a:ext cx="420624" cy="164592"/>
-          </a:xfrm>
-          <a:prstGeom prst="rect">
-            <a:avLst/>
-          </a:prstGeom>
-          <a:noFill/>
-          <a:ln/>
-        </p:spPr>
-        <p:txBody>
-          <a:bodyPr wrap="square" lIns="0" tIns="0" rIns="0" bIns="0" rtlCol="0" anchor="ctr"/>
-          <a:lstStyle/>
-          <a:p>
-            <a:pPr algn="ctr" indent="0" marL="0">
-              <a:buNone/>
-            </a:pPr>
-            <a:r>
-              <a:rPr lang="en-US" sz="1100" b="1" dirty="0">
-                <a:solidFill>
-                  <a:srgbClr val="FFFFFF"/>
-                </a:solidFill>
-                <a:latin typeface="Aptos" pitchFamily="34" charset="0"/>
-                <a:ea typeface="Aptos" pitchFamily="34" charset="-122"/>
-                <a:cs typeface="Aptos" pitchFamily="34" charset="-120"/>
-              </a:rPr>
-              <a:t>11</a:t>
-            </a:r>
-            <a:endParaRPr lang="en-US" sz="1100" dirty="0"/>
-          </a:p>
-        </p:txBody>
-      </p:sp>
-      <p:sp>
-        <p:nvSpPr>
-          <p:cNvPr id="10" name="Text 8"/>
-          <p:cNvSpPr/>
-          <p:nvPr/>
-        </p:nvSpPr>
-        <p:spPr>
-          <a:xfrm>
-            <a:off x="640080" y="621792"/>
             <a:ext cx="10881360" cy="713232"/>
           </a:xfrm>
           <a:prstGeom prst="rect">
@@ -10083,14 +11105,14 @@
       </p:sp>
       <p:sp>
         <p:nvSpPr>
-          <p:cNvPr id="11" name="Text 9"/>
+          <p:cNvPr id="9" name="Text 7"/>
           <p:cNvSpPr/>
           <p:nvPr/>
         </p:nvSpPr>
         <p:spPr>
           <a:xfrm>
             <a:off x="868680" y="1508760"/>
-            <a:ext cx="6537960" cy="4160520"/>
+            <a:ext cx="6309360" cy="4160520"/>
           </a:xfrm>
           <a:prstGeom prst="rect">
             <a:avLst/>
@@ -10149,18 +11171,18 @@
       </p:sp>
       <p:sp>
         <p:nvSpPr>
-          <p:cNvPr id="12" name="Shape 10"/>
-          <p:cNvSpPr/>
-          <p:nvPr/>
-        </p:nvSpPr>
-        <p:spPr>
-          <a:xfrm>
-            <a:off x="7909560" y="1417320"/>
-            <a:ext cx="3154680" cy="1828800"/>
+          <p:cNvPr id="10" name="Shape 8"/>
+          <p:cNvSpPr/>
+          <p:nvPr/>
+        </p:nvSpPr>
+        <p:spPr>
+          <a:xfrm>
+            <a:off x="7635240" y="1325880"/>
+            <a:ext cx="3474720" cy="1325880"/>
           </a:xfrm>
           <a:prstGeom prst="roundRect">
             <a:avLst>
-              <a:gd name="adj" fmla="val 6000"/>
+              <a:gd name="adj" fmla="val 8276"/>
             </a:avLst>
           </a:prstGeom>
           <a:solidFill>
@@ -10176,14 +11198,14 @@
       </p:sp>
       <p:sp>
         <p:nvSpPr>
-          <p:cNvPr id="13" name="Text 11"/>
-          <p:cNvSpPr/>
-          <p:nvPr/>
-        </p:nvSpPr>
-        <p:spPr>
-          <a:xfrm>
-            <a:off x="8074152" y="1563624"/>
-            <a:ext cx="2825496" cy="256032"/>
+          <p:cNvPr id="11" name="Text 9"/>
+          <p:cNvSpPr/>
+          <p:nvPr/>
+        </p:nvSpPr>
+        <p:spPr>
+          <a:xfrm>
+            <a:off x="7799832" y="1472184"/>
+            <a:ext cx="3145536" cy="256032"/>
           </a:xfrm>
           <a:prstGeom prst="rect">
             <a:avLst/>
@@ -10207,7 +11229,7 @@
                 <a:ea typeface="Aptos" pitchFamily="34" charset="-122"/>
                 <a:cs typeface="Aptos" pitchFamily="34" charset="-120"/>
               </a:rPr>
-              <a:t>Key idea</a:t>
+              <a:t>Risk check</a:t>
             </a:r>
             <a:endParaRPr lang="en-US" sz="1300" dirty="0"/>
           </a:p>
@@ -10215,14 +11237,14 @@
       </p:sp>
       <p:sp>
         <p:nvSpPr>
-          <p:cNvPr id="14" name="Text 12"/>
-          <p:cNvSpPr/>
-          <p:nvPr/>
-        </p:nvSpPr>
-        <p:spPr>
-          <a:xfrm>
-            <a:off x="8074152" y="1920240"/>
-            <a:ext cx="2825496" cy="1188720"/>
+          <p:cNvPr id="12" name="Text 10"/>
+          <p:cNvSpPr/>
+          <p:nvPr/>
+        </p:nvSpPr>
+        <p:spPr>
+          <a:xfrm>
+            <a:off x="7799832" y="1828800"/>
+            <a:ext cx="3145536" cy="685800"/>
           </a:xfrm>
           <a:prstGeom prst="rect">
             <a:avLst/>
@@ -10256,18 +11278,171 @@
       </p:sp>
       <p:sp>
         <p:nvSpPr>
-          <p:cNvPr id="15" name="Shape 13"/>
-          <p:cNvSpPr/>
-          <p:nvPr/>
-        </p:nvSpPr>
-        <p:spPr>
-          <a:xfrm>
-            <a:off x="7909560" y="3520440"/>
-            <a:ext cx="3154680" cy="1737360"/>
+          <p:cNvPr id="13" name="Shape 11"/>
+          <p:cNvSpPr/>
+          <p:nvPr/>
+        </p:nvSpPr>
+        <p:spPr>
+          <a:xfrm>
+            <a:off x="7635240" y="2788920"/>
+            <a:ext cx="3474720" cy="1536192"/>
           </a:xfrm>
           <a:prstGeom prst="roundRect">
             <a:avLst>
-              <a:gd name="adj" fmla="val 6316"/>
+              <a:gd name="adj" fmla="val 7143"/>
+            </a:avLst>
+          </a:prstGeom>
+          <a:solidFill>
+            <a:srgbClr val="FFFFFF">
+              <a:alpha val="88000"/>
+            </a:srgbClr>
+          </a:solidFill>
+          <a:ln w="12700">
+            <a:solidFill>
+              <a:srgbClr val="D6E8F2"/>
+            </a:solidFill>
+            <a:prstDash val="solid"/>
+          </a:ln>
+        </p:spPr>
+      </p:sp>
+      <p:sp>
+        <p:nvSpPr>
+          <p:cNvPr id="14" name="Shape 12"/>
+          <p:cNvSpPr/>
+          <p:nvPr/>
+        </p:nvSpPr>
+        <p:spPr>
+          <a:xfrm>
+            <a:off x="8046720" y="3108960"/>
+            <a:ext cx="2651760" cy="896112"/>
+          </a:xfrm>
+          <a:prstGeom prst="arc">
+            <a:avLst/>
+          </a:prstGeom>
+          <a:noFill/>
+          <a:ln w="25400">
+            <a:solidFill>
+              <a:srgbClr val="0068B7"/>
+            </a:solidFill>
+            <a:prstDash val="solid"/>
+          </a:ln>
+        </p:spPr>
+      </p:sp>
+      <p:sp>
+        <p:nvSpPr>
+          <p:cNvPr id="15" name="Text 13"/>
+          <p:cNvSpPr/>
+          <p:nvPr/>
+        </p:nvSpPr>
+        <p:spPr>
+          <a:xfrm>
+            <a:off x="7909560" y="3099816"/>
+            <a:ext cx="2926080" cy="256032"/>
+          </a:xfrm>
+          <a:prstGeom prst="rect">
+            <a:avLst/>
+          </a:prstGeom>
+          <a:noFill/>
+          <a:ln/>
+        </p:spPr>
+        <p:txBody>
+          <a:bodyPr wrap="square" lIns="0" tIns="0" rIns="0" bIns="0" rtlCol="0" anchor="ctr"/>
+          <a:lstStyle/>
+          <a:p>
+            <a:pPr algn="ctr" indent="0" marL="0">
+              <a:buNone/>
+            </a:pPr>
+            <a:r>
+              <a:rPr lang="en-US" sz="1500" b="1" dirty="0">
+                <a:solidFill>
+                  <a:srgbClr val="003A63"/>
+                </a:solidFill>
+                <a:latin typeface="Aptos" pitchFamily="34" charset="0"/>
+                <a:ea typeface="Aptos" pitchFamily="34" charset="-122"/>
+                <a:cs typeface="Aptos" pitchFamily="34" charset="-120"/>
+              </a:rPr>
+              <a:t>Risk</a:t>
+            </a:r>
+            <a:endParaRPr lang="en-US" sz="1500" dirty="0"/>
+          </a:p>
+        </p:txBody>
+      </p:sp>
+      <p:sp>
+        <p:nvSpPr>
+          <p:cNvPr id="16" name="Shape 14"/>
+          <p:cNvSpPr/>
+          <p:nvPr/>
+        </p:nvSpPr>
+        <p:spPr>
+          <a:xfrm>
+            <a:off x="8366760" y="3639312"/>
+            <a:ext cx="2011680" cy="0"/>
+          </a:xfrm>
+          <a:prstGeom prst="line">
+            <a:avLst/>
+          </a:prstGeom>
+          <a:noFill/>
+          <a:ln w="63500">
+            <a:solidFill>
+              <a:srgbClr val="2F8A28"/>
+            </a:solidFill>
+            <a:prstDash val="solid"/>
+          </a:ln>
+        </p:spPr>
+      </p:sp>
+      <p:sp>
+        <p:nvSpPr>
+          <p:cNvPr id="17" name="Text 15"/>
+          <p:cNvSpPr/>
+          <p:nvPr/>
+        </p:nvSpPr>
+        <p:spPr>
+          <a:xfrm>
+            <a:off x="7909560" y="3849624"/>
+            <a:ext cx="2926080" cy="164592"/>
+          </a:xfrm>
+          <a:prstGeom prst="rect">
+            <a:avLst/>
+          </a:prstGeom>
+          <a:noFill/>
+          <a:ln/>
+        </p:spPr>
+        <p:txBody>
+          <a:bodyPr wrap="square" lIns="0" tIns="0" rIns="0" bIns="0" rtlCol="0" anchor="ctr"/>
+          <a:lstStyle/>
+          <a:p>
+            <a:pPr algn="ctr" indent="0" marL="0">
+              <a:buNone/>
+            </a:pPr>
+            <a:r>
+              <a:rPr lang="en-US" sz="900" dirty="0">
+                <a:solidFill>
+                  <a:srgbClr val="003A63"/>
+                </a:solidFill>
+                <a:latin typeface="Aptos" pitchFamily="34" charset="0"/>
+                <a:ea typeface="Aptos" pitchFamily="34" charset="-122"/>
+                <a:cs typeface="Aptos" pitchFamily="34" charset="-120"/>
+              </a:rPr>
+              <a:t>Human review</a:t>
+            </a:r>
+            <a:endParaRPr lang="en-US" sz="900" dirty="0"/>
+          </a:p>
+        </p:txBody>
+      </p:sp>
+      <p:sp>
+        <p:nvSpPr>
+          <p:cNvPr id="18" name="Shape 16"/>
+          <p:cNvSpPr/>
+          <p:nvPr/>
+        </p:nvSpPr>
+        <p:spPr>
+          <a:xfrm>
+            <a:off x="7635240" y="4498848"/>
+            <a:ext cx="3474720" cy="1143000"/>
+          </a:xfrm>
+          <a:prstGeom prst="roundRect">
+            <a:avLst>
+              <a:gd name="adj" fmla="val 9600"/>
             </a:avLst>
           </a:prstGeom>
           <a:solidFill>
@@ -10283,14 +11458,14 @@
       </p:sp>
       <p:sp>
         <p:nvSpPr>
-          <p:cNvPr id="16" name="Text 14"/>
-          <p:cNvSpPr/>
-          <p:nvPr/>
-        </p:nvSpPr>
-        <p:spPr>
-          <a:xfrm>
-            <a:off x="8074152" y="3666744"/>
-            <a:ext cx="2825496" cy="256032"/>
+          <p:cNvPr id="19" name="Text 17"/>
+          <p:cNvSpPr/>
+          <p:nvPr/>
+        </p:nvSpPr>
+        <p:spPr>
+          <a:xfrm>
+            <a:off x="7799832" y="4645152"/>
+            <a:ext cx="3145536" cy="256032"/>
           </a:xfrm>
           <a:prstGeom prst="rect">
             <a:avLst/>
@@ -10314,7 +11489,7 @@
                 <a:ea typeface="Aptos" pitchFamily="34" charset="-122"/>
                 <a:cs typeface="Aptos" pitchFamily="34" charset="-120"/>
               </a:rPr>
-              <a:t>Use this for</a:t>
+              <a:t>Safeguard to plan</a:t>
             </a:r>
             <a:endParaRPr lang="en-US" sz="1300" dirty="0"/>
           </a:p>
@@ -10322,14 +11497,14 @@
       </p:sp>
       <p:sp>
         <p:nvSpPr>
-          <p:cNvPr id="17" name="Text 15"/>
-          <p:cNvSpPr/>
-          <p:nvPr/>
-        </p:nvSpPr>
-        <p:spPr>
-          <a:xfrm>
-            <a:off x="8074152" y="4023360"/>
-            <a:ext cx="2825496" cy="1097280"/>
+          <p:cNvPr id="20" name="Text 18"/>
+          <p:cNvSpPr/>
+          <p:nvPr/>
+        </p:nvSpPr>
+        <p:spPr>
+          <a:xfrm>
+            <a:off x="7799832" y="5001768"/>
+            <a:ext cx="3145536" cy="502920"/>
           </a:xfrm>
           <a:prstGeom prst="rect">
             <a:avLst/>
@@ -10355,7 +11530,7 @@
                 <a:ea typeface="Aptos" pitchFamily="34" charset="-122"/>
                 <a:cs typeface="Aptos" pitchFamily="34" charset="-120"/>
               </a:rPr>
-              <a:t>Connect the concept to public health decisions, safeguards, documentation, or implementation work.</a:t>
+              <a:t>Use the assignment to test whether you can explain the concept, apply it to a realistic public health situation, and identify what would need review before the work moves forward.</a:t>
             </a:r>
             <a:endParaRPr lang="en-US" sz="1550" dirty="0"/>
           </a:p>
@@ -10529,8 +11704,8 @@
         </p:nvSpPr>
         <p:spPr>
           <a:xfrm>
-            <a:off x="9966960" y="6537960"/>
-            <a:ext cx="1645920" cy="201168"/>
+            <a:off x="9646920" y="6537960"/>
+            <a:ext cx="1965960" cy="201168"/>
           </a:xfrm>
           <a:prstGeom prst="rect">
             <a:avLst/>
@@ -10554,7 +11729,7 @@
                 <a:ea typeface="Aptos" pitchFamily="34" charset="-122"/>
                 <a:cs typeface="Aptos" pitchFamily="34" charset="-120"/>
               </a:rPr>
-              <a:t>Â© Paula Soper</a:t>
+              <a:t>Copyright Paula Soper</a:t>
             </a:r>
             <a:endParaRPr lang="en-US" sz="800" dirty="0"/>
           </a:p>
@@ -10601,77 +11776,13 @@
       </p:sp>
       <p:sp>
         <p:nvSpPr>
-          <p:cNvPr id="8" name="Shape 6"/>
+          <p:cNvPr id="8" name="Text 6"/>
           <p:cNvSpPr/>
           <p:nvPr/>
         </p:nvSpPr>
         <p:spPr>
           <a:xfrm>
             <a:off x="640080" y="658368"/>
-            <a:ext cx="420624" cy="420624"/>
-          </a:xfrm>
-          <a:prstGeom prst="ellipse">
-            <a:avLst/>
-          </a:prstGeom>
-          <a:solidFill>
-            <a:srgbClr val="0068B7"/>
-          </a:solidFill>
-          <a:ln w="12700">
-            <a:solidFill>
-              <a:srgbClr val="0068B7"/>
-            </a:solidFill>
-            <a:prstDash val="solid"/>
-          </a:ln>
-        </p:spPr>
-      </p:sp>
-      <p:sp>
-        <p:nvSpPr>
-          <p:cNvPr id="9" name="Text 7"/>
-          <p:cNvSpPr/>
-          <p:nvPr/>
-        </p:nvSpPr>
-        <p:spPr>
-          <a:xfrm>
-            <a:off x="640080" y="731520"/>
-            <a:ext cx="420624" cy="164592"/>
-          </a:xfrm>
-          <a:prstGeom prst="rect">
-            <a:avLst/>
-          </a:prstGeom>
-          <a:noFill/>
-          <a:ln/>
-        </p:spPr>
-        <p:txBody>
-          <a:bodyPr wrap="square" lIns="0" tIns="0" rIns="0" bIns="0" rtlCol="0" anchor="ctr"/>
-          <a:lstStyle/>
-          <a:p>
-            <a:pPr algn="ctr" indent="0" marL="0">
-              <a:buNone/>
-            </a:pPr>
-            <a:r>
-              <a:rPr lang="en-US" sz="1100" b="1" dirty="0">
-                <a:solidFill>
-                  <a:srgbClr val="FFFFFF"/>
-                </a:solidFill>
-                <a:latin typeface="Aptos" pitchFamily="34" charset="0"/>
-                <a:ea typeface="Aptos" pitchFamily="34" charset="-122"/>
-                <a:cs typeface="Aptos" pitchFamily="34" charset="-120"/>
-              </a:rPr>
-              <a:t>12</a:t>
-            </a:r>
-            <a:endParaRPr lang="en-US" sz="1100" dirty="0"/>
-          </a:p>
-        </p:txBody>
-      </p:sp>
-      <p:sp>
-        <p:nvSpPr>
-          <p:cNvPr id="10" name="Text 8"/>
-          <p:cNvSpPr/>
-          <p:nvPr/>
-        </p:nvSpPr>
-        <p:spPr>
-          <a:xfrm>
-            <a:off x="640080" y="621792"/>
             <a:ext cx="10881360" cy="713232"/>
           </a:xfrm>
           <a:prstGeom prst="rect">
@@ -10706,14 +11817,14 @@
       </p:sp>
       <p:sp>
         <p:nvSpPr>
-          <p:cNvPr id="11" name="Text 9"/>
+          <p:cNvPr id="9" name="Text 7"/>
           <p:cNvSpPr/>
           <p:nvPr/>
         </p:nvSpPr>
         <p:spPr>
           <a:xfrm>
             <a:off x="868680" y="1508760"/>
-            <a:ext cx="6537960" cy="4160520"/>
+            <a:ext cx="6309360" cy="4160520"/>
           </a:xfrm>
           <a:prstGeom prst="rect">
             <a:avLst/>
@@ -10772,18 +11883,18 @@
       </p:sp>
       <p:sp>
         <p:nvSpPr>
-          <p:cNvPr id="12" name="Shape 10"/>
-          <p:cNvSpPr/>
-          <p:nvPr/>
-        </p:nvSpPr>
-        <p:spPr>
-          <a:xfrm>
-            <a:off x="7909560" y="1417320"/>
-            <a:ext cx="3154680" cy="1828800"/>
+          <p:cNvPr id="10" name="Shape 8"/>
+          <p:cNvSpPr/>
+          <p:nvPr/>
+        </p:nvSpPr>
+        <p:spPr>
+          <a:xfrm>
+            <a:off x="7635240" y="1325880"/>
+            <a:ext cx="3474720" cy="1325880"/>
           </a:xfrm>
           <a:prstGeom prst="roundRect">
             <a:avLst>
-              <a:gd name="adj" fmla="val 6000"/>
+              <a:gd name="adj" fmla="val 8276"/>
             </a:avLst>
           </a:prstGeom>
           <a:solidFill>
@@ -10799,14 +11910,14 @@
       </p:sp>
       <p:sp>
         <p:nvSpPr>
-          <p:cNvPr id="13" name="Text 11"/>
-          <p:cNvSpPr/>
-          <p:nvPr/>
-        </p:nvSpPr>
-        <p:spPr>
-          <a:xfrm>
-            <a:off x="8074152" y="1563624"/>
-            <a:ext cx="2825496" cy="256032"/>
+          <p:cNvPr id="11" name="Text 9"/>
+          <p:cNvSpPr/>
+          <p:nvPr/>
+        </p:nvSpPr>
+        <p:spPr>
+          <a:xfrm>
+            <a:off x="7799832" y="1472184"/>
+            <a:ext cx="3145536" cy="256032"/>
           </a:xfrm>
           <a:prstGeom prst="rect">
             <a:avLst/>
@@ -10830,7 +11941,7 @@
                 <a:ea typeface="Aptos" pitchFamily="34" charset="-122"/>
                 <a:cs typeface="Aptos" pitchFamily="34" charset="-120"/>
               </a:rPr>
-              <a:t>Key idea</a:t>
+              <a:t>Risk check</a:t>
             </a:r>
             <a:endParaRPr lang="en-US" sz="1300" dirty="0"/>
           </a:p>
@@ -10838,14 +11949,14 @@
       </p:sp>
       <p:sp>
         <p:nvSpPr>
-          <p:cNvPr id="14" name="Text 12"/>
-          <p:cNvSpPr/>
-          <p:nvPr/>
-        </p:nvSpPr>
-        <p:spPr>
-          <a:xfrm>
-            <a:off x="8074152" y="1920240"/>
-            <a:ext cx="2825496" cy="1188720"/>
+          <p:cNvPr id="12" name="Text 10"/>
+          <p:cNvSpPr/>
+          <p:nvPr/>
+        </p:nvSpPr>
+        <p:spPr>
+          <a:xfrm>
+            <a:off x="7799832" y="1828800"/>
+            <a:ext cx="3145536" cy="685800"/>
           </a:xfrm>
           <a:prstGeom prst="rect">
             <a:avLst/>
@@ -10879,18 +11990,171 @@
       </p:sp>
       <p:sp>
         <p:nvSpPr>
-          <p:cNvPr id="15" name="Shape 13"/>
-          <p:cNvSpPr/>
-          <p:nvPr/>
-        </p:nvSpPr>
-        <p:spPr>
-          <a:xfrm>
-            <a:off x="7909560" y="3520440"/>
-            <a:ext cx="3154680" cy="1737360"/>
+          <p:cNvPr id="13" name="Shape 11"/>
+          <p:cNvSpPr/>
+          <p:nvPr/>
+        </p:nvSpPr>
+        <p:spPr>
+          <a:xfrm>
+            <a:off x="7635240" y="2788920"/>
+            <a:ext cx="3474720" cy="1536192"/>
           </a:xfrm>
           <a:prstGeom prst="roundRect">
             <a:avLst>
-              <a:gd name="adj" fmla="val 6316"/>
+              <a:gd name="adj" fmla="val 7143"/>
+            </a:avLst>
+          </a:prstGeom>
+          <a:solidFill>
+            <a:srgbClr val="FFFFFF">
+              <a:alpha val="88000"/>
+            </a:srgbClr>
+          </a:solidFill>
+          <a:ln w="12700">
+            <a:solidFill>
+              <a:srgbClr val="D6E8F2"/>
+            </a:solidFill>
+            <a:prstDash val="solid"/>
+          </a:ln>
+        </p:spPr>
+      </p:sp>
+      <p:sp>
+        <p:nvSpPr>
+          <p:cNvPr id="14" name="Shape 12"/>
+          <p:cNvSpPr/>
+          <p:nvPr/>
+        </p:nvSpPr>
+        <p:spPr>
+          <a:xfrm>
+            <a:off x="8046720" y="3108960"/>
+            <a:ext cx="2651760" cy="896112"/>
+          </a:xfrm>
+          <a:prstGeom prst="arc">
+            <a:avLst/>
+          </a:prstGeom>
+          <a:noFill/>
+          <a:ln w="25400">
+            <a:solidFill>
+              <a:srgbClr val="0068B7"/>
+            </a:solidFill>
+            <a:prstDash val="solid"/>
+          </a:ln>
+        </p:spPr>
+      </p:sp>
+      <p:sp>
+        <p:nvSpPr>
+          <p:cNvPr id="15" name="Text 13"/>
+          <p:cNvSpPr/>
+          <p:nvPr/>
+        </p:nvSpPr>
+        <p:spPr>
+          <a:xfrm>
+            <a:off x="7909560" y="3099816"/>
+            <a:ext cx="2926080" cy="256032"/>
+          </a:xfrm>
+          <a:prstGeom prst="rect">
+            <a:avLst/>
+          </a:prstGeom>
+          <a:noFill/>
+          <a:ln/>
+        </p:spPr>
+        <p:txBody>
+          <a:bodyPr wrap="square" lIns="0" tIns="0" rIns="0" bIns="0" rtlCol="0" anchor="ctr"/>
+          <a:lstStyle/>
+          <a:p>
+            <a:pPr algn="ctr" indent="0" marL="0">
+              <a:buNone/>
+            </a:pPr>
+            <a:r>
+              <a:rPr lang="en-US" sz="1500" b="1" dirty="0">
+                <a:solidFill>
+                  <a:srgbClr val="003A63"/>
+                </a:solidFill>
+                <a:latin typeface="Aptos" pitchFamily="34" charset="0"/>
+                <a:ea typeface="Aptos" pitchFamily="34" charset="-122"/>
+                <a:cs typeface="Aptos" pitchFamily="34" charset="-120"/>
+              </a:rPr>
+              <a:t>Risk</a:t>
+            </a:r>
+            <a:endParaRPr lang="en-US" sz="1500" dirty="0"/>
+          </a:p>
+        </p:txBody>
+      </p:sp>
+      <p:sp>
+        <p:nvSpPr>
+          <p:cNvPr id="16" name="Shape 14"/>
+          <p:cNvSpPr/>
+          <p:nvPr/>
+        </p:nvSpPr>
+        <p:spPr>
+          <a:xfrm>
+            <a:off x="8366760" y="3639312"/>
+            <a:ext cx="2011680" cy="0"/>
+          </a:xfrm>
+          <a:prstGeom prst="line">
+            <a:avLst/>
+          </a:prstGeom>
+          <a:noFill/>
+          <a:ln w="63500">
+            <a:solidFill>
+              <a:srgbClr val="2F8A28"/>
+            </a:solidFill>
+            <a:prstDash val="solid"/>
+          </a:ln>
+        </p:spPr>
+      </p:sp>
+      <p:sp>
+        <p:nvSpPr>
+          <p:cNvPr id="17" name="Text 15"/>
+          <p:cNvSpPr/>
+          <p:nvPr/>
+        </p:nvSpPr>
+        <p:spPr>
+          <a:xfrm>
+            <a:off x="7909560" y="3849624"/>
+            <a:ext cx="2926080" cy="164592"/>
+          </a:xfrm>
+          <a:prstGeom prst="rect">
+            <a:avLst/>
+          </a:prstGeom>
+          <a:noFill/>
+          <a:ln/>
+        </p:spPr>
+        <p:txBody>
+          <a:bodyPr wrap="square" lIns="0" tIns="0" rIns="0" bIns="0" rtlCol="0" anchor="ctr"/>
+          <a:lstStyle/>
+          <a:p>
+            <a:pPr algn="ctr" indent="0" marL="0">
+              <a:buNone/>
+            </a:pPr>
+            <a:r>
+              <a:rPr lang="en-US" sz="900" dirty="0">
+                <a:solidFill>
+                  <a:srgbClr val="003A63"/>
+                </a:solidFill>
+                <a:latin typeface="Aptos" pitchFamily="34" charset="0"/>
+                <a:ea typeface="Aptos" pitchFamily="34" charset="-122"/>
+                <a:cs typeface="Aptos" pitchFamily="34" charset="-120"/>
+              </a:rPr>
+              <a:t>Human review</a:t>
+            </a:r>
+            <a:endParaRPr lang="en-US" sz="900" dirty="0"/>
+          </a:p>
+        </p:txBody>
+      </p:sp>
+      <p:sp>
+        <p:nvSpPr>
+          <p:cNvPr id="18" name="Shape 16"/>
+          <p:cNvSpPr/>
+          <p:nvPr/>
+        </p:nvSpPr>
+        <p:spPr>
+          <a:xfrm>
+            <a:off x="7635240" y="4498848"/>
+            <a:ext cx="3474720" cy="1143000"/>
+          </a:xfrm>
+          <a:prstGeom prst="roundRect">
+            <a:avLst>
+              <a:gd name="adj" fmla="val 9600"/>
             </a:avLst>
           </a:prstGeom>
           <a:solidFill>
@@ -10906,14 +12170,14 @@
       </p:sp>
       <p:sp>
         <p:nvSpPr>
-          <p:cNvPr id="16" name="Text 14"/>
-          <p:cNvSpPr/>
-          <p:nvPr/>
-        </p:nvSpPr>
-        <p:spPr>
-          <a:xfrm>
-            <a:off x="8074152" y="3666744"/>
-            <a:ext cx="2825496" cy="256032"/>
+          <p:cNvPr id="19" name="Text 17"/>
+          <p:cNvSpPr/>
+          <p:nvPr/>
+        </p:nvSpPr>
+        <p:spPr>
+          <a:xfrm>
+            <a:off x="7799832" y="4645152"/>
+            <a:ext cx="3145536" cy="256032"/>
           </a:xfrm>
           <a:prstGeom prst="rect">
             <a:avLst/>
@@ -10937,7 +12201,7 @@
                 <a:ea typeface="Aptos" pitchFamily="34" charset="-122"/>
                 <a:cs typeface="Aptos" pitchFamily="34" charset="-120"/>
               </a:rPr>
-              <a:t>Use this for</a:t>
+              <a:t>Safeguard to plan</a:t>
             </a:r>
             <a:endParaRPr lang="en-US" sz="1300" dirty="0"/>
           </a:p>
@@ -10945,14 +12209,14 @@
       </p:sp>
       <p:sp>
         <p:nvSpPr>
-          <p:cNvPr id="17" name="Text 15"/>
-          <p:cNvSpPr/>
-          <p:nvPr/>
-        </p:nvSpPr>
-        <p:spPr>
-          <a:xfrm>
-            <a:off x="8074152" y="4023360"/>
-            <a:ext cx="2825496" cy="1097280"/>
+          <p:cNvPr id="20" name="Text 18"/>
+          <p:cNvSpPr/>
+          <p:nvPr/>
+        </p:nvSpPr>
+        <p:spPr>
+          <a:xfrm>
+            <a:off x="7799832" y="5001768"/>
+            <a:ext cx="3145536" cy="502920"/>
           </a:xfrm>
           <a:prstGeom prst="rect">
             <a:avLst/>
@@ -10978,7 +12242,7 @@
                 <a:ea typeface="Aptos" pitchFamily="34" charset="-122"/>
                 <a:cs typeface="Aptos" pitchFamily="34" charset="-120"/>
               </a:rPr>
-              <a:t>Connect the concept to public health decisions, safeguards, documentation, or implementation work.</a:t>
+              <a:t>Use the assignment to test whether you can explain the concept, apply it to a realistic public health situation, and identify what would need review before the work moves forward.</a:t>
             </a:r>
             <a:endParaRPr lang="en-US" sz="1550" dirty="0"/>
           </a:p>
@@ -11152,8 +12416,8 @@
         </p:nvSpPr>
         <p:spPr>
           <a:xfrm>
-            <a:off x="9966960" y="6537960"/>
-            <a:ext cx="1645920" cy="201168"/>
+            <a:off x="9646920" y="6537960"/>
+            <a:ext cx="1965960" cy="201168"/>
           </a:xfrm>
           <a:prstGeom prst="rect">
             <a:avLst/>
@@ -11177,7 +12441,7 @@
                 <a:ea typeface="Aptos" pitchFamily="34" charset="-122"/>
                 <a:cs typeface="Aptos" pitchFamily="34" charset="-120"/>
               </a:rPr>
-              <a:t>Â© Paula Soper</a:t>
+              <a:t>Copyright Paula Soper</a:t>
             </a:r>
             <a:endParaRPr lang="en-US" sz="800" dirty="0"/>
           </a:p>
@@ -11224,77 +12488,13 @@
       </p:sp>
       <p:sp>
         <p:nvSpPr>
-          <p:cNvPr id="8" name="Shape 6"/>
+          <p:cNvPr id="8" name="Text 6"/>
           <p:cNvSpPr/>
           <p:nvPr/>
         </p:nvSpPr>
         <p:spPr>
           <a:xfrm>
             <a:off x="640080" y="658368"/>
-            <a:ext cx="420624" cy="420624"/>
-          </a:xfrm>
-          <a:prstGeom prst="ellipse">
-            <a:avLst/>
-          </a:prstGeom>
-          <a:solidFill>
-            <a:srgbClr val="0068B7"/>
-          </a:solidFill>
-          <a:ln w="12700">
-            <a:solidFill>
-              <a:srgbClr val="0068B7"/>
-            </a:solidFill>
-            <a:prstDash val="solid"/>
-          </a:ln>
-        </p:spPr>
-      </p:sp>
-      <p:sp>
-        <p:nvSpPr>
-          <p:cNvPr id="9" name="Text 7"/>
-          <p:cNvSpPr/>
-          <p:nvPr/>
-        </p:nvSpPr>
-        <p:spPr>
-          <a:xfrm>
-            <a:off x="640080" y="731520"/>
-            <a:ext cx="420624" cy="164592"/>
-          </a:xfrm>
-          <a:prstGeom prst="rect">
-            <a:avLst/>
-          </a:prstGeom>
-          <a:noFill/>
-          <a:ln/>
-        </p:spPr>
-        <p:txBody>
-          <a:bodyPr wrap="square" lIns="0" tIns="0" rIns="0" bIns="0" rtlCol="0" anchor="ctr"/>
-          <a:lstStyle/>
-          <a:p>
-            <a:pPr algn="ctr" indent="0" marL="0">
-              <a:buNone/>
-            </a:pPr>
-            <a:r>
-              <a:rPr lang="en-US" sz="1100" b="1" dirty="0">
-                <a:solidFill>
-                  <a:srgbClr val="FFFFFF"/>
-                </a:solidFill>
-                <a:latin typeface="Aptos" pitchFamily="34" charset="0"/>
-                <a:ea typeface="Aptos" pitchFamily="34" charset="-122"/>
-                <a:cs typeface="Aptos" pitchFamily="34" charset="-120"/>
-              </a:rPr>
-              <a:t>13</a:t>
-            </a:r>
-            <a:endParaRPr lang="en-US" sz="1100" dirty="0"/>
-          </a:p>
-        </p:txBody>
-      </p:sp>
-      <p:sp>
-        <p:nvSpPr>
-          <p:cNvPr id="10" name="Text 8"/>
-          <p:cNvSpPr/>
-          <p:nvPr/>
-        </p:nvSpPr>
-        <p:spPr>
-          <a:xfrm>
-            <a:off x="640080" y="621792"/>
             <a:ext cx="10881360" cy="713232"/>
           </a:xfrm>
           <a:prstGeom prst="rect">
@@ -11329,14 +12529,14 @@
       </p:sp>
       <p:sp>
         <p:nvSpPr>
-          <p:cNvPr id="11" name="Text 9"/>
+          <p:cNvPr id="9" name="Text 7"/>
           <p:cNvSpPr/>
           <p:nvPr/>
         </p:nvSpPr>
         <p:spPr>
           <a:xfrm>
             <a:off x="868680" y="1508760"/>
-            <a:ext cx="6537960" cy="4160520"/>
+            <a:ext cx="6309360" cy="4160520"/>
           </a:xfrm>
           <a:prstGeom prst="rect">
             <a:avLst/>
@@ -11395,18 +12595,18 @@
       </p:sp>
       <p:sp>
         <p:nvSpPr>
-          <p:cNvPr id="12" name="Shape 10"/>
-          <p:cNvSpPr/>
-          <p:nvPr/>
-        </p:nvSpPr>
-        <p:spPr>
-          <a:xfrm>
-            <a:off x="7909560" y="1417320"/>
-            <a:ext cx="3154680" cy="1828800"/>
+          <p:cNvPr id="10" name="Shape 8"/>
+          <p:cNvSpPr/>
+          <p:nvPr/>
+        </p:nvSpPr>
+        <p:spPr>
+          <a:xfrm>
+            <a:off x="7635240" y="1325880"/>
+            <a:ext cx="3474720" cy="1325880"/>
           </a:xfrm>
           <a:prstGeom prst="roundRect">
             <a:avLst>
-              <a:gd name="adj" fmla="val 6000"/>
+              <a:gd name="adj" fmla="val 8276"/>
             </a:avLst>
           </a:prstGeom>
           <a:solidFill>
@@ -11422,14 +12622,14 @@
       </p:sp>
       <p:sp>
         <p:nvSpPr>
-          <p:cNvPr id="13" name="Text 11"/>
-          <p:cNvSpPr/>
-          <p:nvPr/>
-        </p:nvSpPr>
-        <p:spPr>
-          <a:xfrm>
-            <a:off x="8074152" y="1563624"/>
-            <a:ext cx="2825496" cy="256032"/>
+          <p:cNvPr id="11" name="Text 9"/>
+          <p:cNvSpPr/>
+          <p:nvPr/>
+        </p:nvSpPr>
+        <p:spPr>
+          <a:xfrm>
+            <a:off x="7799832" y="1472184"/>
+            <a:ext cx="3145536" cy="256032"/>
           </a:xfrm>
           <a:prstGeom prst="rect">
             <a:avLst/>
@@ -11453,7 +12653,7 @@
                 <a:ea typeface="Aptos" pitchFamily="34" charset="-122"/>
                 <a:cs typeface="Aptos" pitchFamily="34" charset="-120"/>
               </a:rPr>
-              <a:t>Key idea</a:t>
+              <a:t>Risk check</a:t>
             </a:r>
             <a:endParaRPr lang="en-US" sz="1300" dirty="0"/>
           </a:p>
@@ -11461,14 +12661,14 @@
       </p:sp>
       <p:sp>
         <p:nvSpPr>
-          <p:cNvPr id="14" name="Text 12"/>
-          <p:cNvSpPr/>
-          <p:nvPr/>
-        </p:nvSpPr>
-        <p:spPr>
-          <a:xfrm>
-            <a:off x="8074152" y="1920240"/>
-            <a:ext cx="2825496" cy="1188720"/>
+          <p:cNvPr id="12" name="Text 10"/>
+          <p:cNvSpPr/>
+          <p:nvPr/>
+        </p:nvSpPr>
+        <p:spPr>
+          <a:xfrm>
+            <a:off x="7799832" y="1828800"/>
+            <a:ext cx="3145536" cy="685800"/>
           </a:xfrm>
           <a:prstGeom prst="rect">
             <a:avLst/>
@@ -11502,18 +12702,171 @@
       </p:sp>
       <p:sp>
         <p:nvSpPr>
-          <p:cNvPr id="15" name="Shape 13"/>
-          <p:cNvSpPr/>
-          <p:nvPr/>
-        </p:nvSpPr>
-        <p:spPr>
-          <a:xfrm>
-            <a:off x="7909560" y="3520440"/>
-            <a:ext cx="3154680" cy="1737360"/>
+          <p:cNvPr id="13" name="Shape 11"/>
+          <p:cNvSpPr/>
+          <p:nvPr/>
+        </p:nvSpPr>
+        <p:spPr>
+          <a:xfrm>
+            <a:off x="7635240" y="2788920"/>
+            <a:ext cx="3474720" cy="1536192"/>
           </a:xfrm>
           <a:prstGeom prst="roundRect">
             <a:avLst>
-              <a:gd name="adj" fmla="val 6316"/>
+              <a:gd name="adj" fmla="val 7143"/>
+            </a:avLst>
+          </a:prstGeom>
+          <a:solidFill>
+            <a:srgbClr val="FFFFFF">
+              <a:alpha val="88000"/>
+            </a:srgbClr>
+          </a:solidFill>
+          <a:ln w="12700">
+            <a:solidFill>
+              <a:srgbClr val="D6E8F2"/>
+            </a:solidFill>
+            <a:prstDash val="solid"/>
+          </a:ln>
+        </p:spPr>
+      </p:sp>
+      <p:sp>
+        <p:nvSpPr>
+          <p:cNvPr id="14" name="Shape 12"/>
+          <p:cNvSpPr/>
+          <p:nvPr/>
+        </p:nvSpPr>
+        <p:spPr>
+          <a:xfrm>
+            <a:off x="8046720" y="3108960"/>
+            <a:ext cx="2651760" cy="896112"/>
+          </a:xfrm>
+          <a:prstGeom prst="arc">
+            <a:avLst/>
+          </a:prstGeom>
+          <a:noFill/>
+          <a:ln w="25400">
+            <a:solidFill>
+              <a:srgbClr val="0068B7"/>
+            </a:solidFill>
+            <a:prstDash val="solid"/>
+          </a:ln>
+        </p:spPr>
+      </p:sp>
+      <p:sp>
+        <p:nvSpPr>
+          <p:cNvPr id="15" name="Text 13"/>
+          <p:cNvSpPr/>
+          <p:nvPr/>
+        </p:nvSpPr>
+        <p:spPr>
+          <a:xfrm>
+            <a:off x="7909560" y="3099816"/>
+            <a:ext cx="2926080" cy="256032"/>
+          </a:xfrm>
+          <a:prstGeom prst="rect">
+            <a:avLst/>
+          </a:prstGeom>
+          <a:noFill/>
+          <a:ln/>
+        </p:spPr>
+        <p:txBody>
+          <a:bodyPr wrap="square" lIns="0" tIns="0" rIns="0" bIns="0" rtlCol="0" anchor="ctr"/>
+          <a:lstStyle/>
+          <a:p>
+            <a:pPr algn="ctr" indent="0" marL="0">
+              <a:buNone/>
+            </a:pPr>
+            <a:r>
+              <a:rPr lang="en-US" sz="1500" b="1" dirty="0">
+                <a:solidFill>
+                  <a:srgbClr val="003A63"/>
+                </a:solidFill>
+                <a:latin typeface="Aptos" pitchFamily="34" charset="0"/>
+                <a:ea typeface="Aptos" pitchFamily="34" charset="-122"/>
+                <a:cs typeface="Aptos" pitchFamily="34" charset="-120"/>
+              </a:rPr>
+              <a:t>Risk</a:t>
+            </a:r>
+            <a:endParaRPr lang="en-US" sz="1500" dirty="0"/>
+          </a:p>
+        </p:txBody>
+      </p:sp>
+      <p:sp>
+        <p:nvSpPr>
+          <p:cNvPr id="16" name="Shape 14"/>
+          <p:cNvSpPr/>
+          <p:nvPr/>
+        </p:nvSpPr>
+        <p:spPr>
+          <a:xfrm>
+            <a:off x="8366760" y="3639312"/>
+            <a:ext cx="2011680" cy="0"/>
+          </a:xfrm>
+          <a:prstGeom prst="line">
+            <a:avLst/>
+          </a:prstGeom>
+          <a:noFill/>
+          <a:ln w="63500">
+            <a:solidFill>
+              <a:srgbClr val="2F8A28"/>
+            </a:solidFill>
+            <a:prstDash val="solid"/>
+          </a:ln>
+        </p:spPr>
+      </p:sp>
+      <p:sp>
+        <p:nvSpPr>
+          <p:cNvPr id="17" name="Text 15"/>
+          <p:cNvSpPr/>
+          <p:nvPr/>
+        </p:nvSpPr>
+        <p:spPr>
+          <a:xfrm>
+            <a:off x="7909560" y="3849624"/>
+            <a:ext cx="2926080" cy="164592"/>
+          </a:xfrm>
+          <a:prstGeom prst="rect">
+            <a:avLst/>
+          </a:prstGeom>
+          <a:noFill/>
+          <a:ln/>
+        </p:spPr>
+        <p:txBody>
+          <a:bodyPr wrap="square" lIns="0" tIns="0" rIns="0" bIns="0" rtlCol="0" anchor="ctr"/>
+          <a:lstStyle/>
+          <a:p>
+            <a:pPr algn="ctr" indent="0" marL="0">
+              <a:buNone/>
+            </a:pPr>
+            <a:r>
+              <a:rPr lang="en-US" sz="900" dirty="0">
+                <a:solidFill>
+                  <a:srgbClr val="003A63"/>
+                </a:solidFill>
+                <a:latin typeface="Aptos" pitchFamily="34" charset="0"/>
+                <a:ea typeface="Aptos" pitchFamily="34" charset="-122"/>
+                <a:cs typeface="Aptos" pitchFamily="34" charset="-120"/>
+              </a:rPr>
+              <a:t>Human review</a:t>
+            </a:r>
+            <a:endParaRPr lang="en-US" sz="900" dirty="0"/>
+          </a:p>
+        </p:txBody>
+      </p:sp>
+      <p:sp>
+        <p:nvSpPr>
+          <p:cNvPr id="18" name="Shape 16"/>
+          <p:cNvSpPr/>
+          <p:nvPr/>
+        </p:nvSpPr>
+        <p:spPr>
+          <a:xfrm>
+            <a:off x="7635240" y="4498848"/>
+            <a:ext cx="3474720" cy="1143000"/>
+          </a:xfrm>
+          <a:prstGeom prst="roundRect">
+            <a:avLst>
+              <a:gd name="adj" fmla="val 9600"/>
             </a:avLst>
           </a:prstGeom>
           <a:solidFill>
@@ -11529,14 +12882,14 @@
       </p:sp>
       <p:sp>
         <p:nvSpPr>
-          <p:cNvPr id="16" name="Text 14"/>
-          <p:cNvSpPr/>
-          <p:nvPr/>
-        </p:nvSpPr>
-        <p:spPr>
-          <a:xfrm>
-            <a:off x="8074152" y="3666744"/>
-            <a:ext cx="2825496" cy="256032"/>
+          <p:cNvPr id="19" name="Text 17"/>
+          <p:cNvSpPr/>
+          <p:nvPr/>
+        </p:nvSpPr>
+        <p:spPr>
+          <a:xfrm>
+            <a:off x="7799832" y="4645152"/>
+            <a:ext cx="3145536" cy="256032"/>
           </a:xfrm>
           <a:prstGeom prst="rect">
             <a:avLst/>
@@ -11560,7 +12913,7 @@
                 <a:ea typeface="Aptos" pitchFamily="34" charset="-122"/>
                 <a:cs typeface="Aptos" pitchFamily="34" charset="-120"/>
               </a:rPr>
-              <a:t>Use this for</a:t>
+              <a:t>Safeguard to plan</a:t>
             </a:r>
             <a:endParaRPr lang="en-US" sz="1300" dirty="0"/>
           </a:p>
@@ -11568,14 +12921,14 @@
       </p:sp>
       <p:sp>
         <p:nvSpPr>
-          <p:cNvPr id="17" name="Text 15"/>
-          <p:cNvSpPr/>
-          <p:nvPr/>
-        </p:nvSpPr>
-        <p:spPr>
-          <a:xfrm>
-            <a:off x="8074152" y="4023360"/>
-            <a:ext cx="2825496" cy="1097280"/>
+          <p:cNvPr id="20" name="Text 18"/>
+          <p:cNvSpPr/>
+          <p:nvPr/>
+        </p:nvSpPr>
+        <p:spPr>
+          <a:xfrm>
+            <a:off x="7799832" y="5001768"/>
+            <a:ext cx="3145536" cy="502920"/>
           </a:xfrm>
           <a:prstGeom prst="rect">
             <a:avLst/>
@@ -11601,7 +12954,7 @@
                 <a:ea typeface="Aptos" pitchFamily="34" charset="-122"/>
                 <a:cs typeface="Aptos" pitchFamily="34" charset="-120"/>
               </a:rPr>
-              <a:t>Connect the concept to public health decisions, safeguards, documentation, or implementation work.</a:t>
+              <a:t>Identify what could go wrong, who could be affected, what safeguards are needed, and what evidence should be reviewed before use expands.</a:t>
             </a:r>
             <a:endParaRPr lang="en-US" sz="1550" dirty="0"/>
           </a:p>
@@ -11775,8 +13128,8 @@
         </p:nvSpPr>
         <p:spPr>
           <a:xfrm>
-            <a:off x="9966960" y="6537960"/>
-            <a:ext cx="1645920" cy="201168"/>
+            <a:off x="9646920" y="6537960"/>
+            <a:ext cx="1965960" cy="201168"/>
           </a:xfrm>
           <a:prstGeom prst="rect">
             <a:avLst/>
@@ -11800,7 +13153,7 @@
                 <a:ea typeface="Aptos" pitchFamily="34" charset="-122"/>
                 <a:cs typeface="Aptos" pitchFamily="34" charset="-120"/>
               </a:rPr>
-              <a:t>Â© Paula Soper</a:t>
+              <a:t>Copyright Paula Soper</a:t>
             </a:r>
             <a:endParaRPr lang="en-US" sz="800" dirty="0"/>
           </a:p>
@@ -12143,46 +13496,7 @@
       </p:sp>
       <p:sp>
         <p:nvSpPr>
-          <p:cNvPr id="15" name="Text 13"/>
-          <p:cNvSpPr/>
-          <p:nvPr/>
-        </p:nvSpPr>
-        <p:spPr>
-          <a:xfrm>
-            <a:off x="8817864" y="4187952"/>
-            <a:ext cx="201168" cy="256032"/>
-          </a:xfrm>
-          <a:prstGeom prst="rect">
-            <a:avLst/>
-          </a:prstGeom>
-          <a:noFill/>
-          <a:ln/>
-        </p:spPr>
-        <p:txBody>
-          <a:bodyPr wrap="square" lIns="0" tIns="0" rIns="0" bIns="0" rtlCol="0" anchor="ctr"/>
-          <a:lstStyle/>
-          <a:p>
-            <a:pPr algn="ctr" indent="0" marL="0">
-              <a:buNone/>
-            </a:pPr>
-            <a:r>
-              <a:rPr lang="en-US" sz="1800" b="1" dirty="0">
-                <a:solidFill>
-                  <a:srgbClr val="0068B7"/>
-                </a:solidFill>
-                <a:latin typeface="Aptos" pitchFamily="34" charset="0"/>
-                <a:ea typeface="Aptos" pitchFamily="34" charset="-122"/>
-                <a:cs typeface="Aptos" pitchFamily="34" charset="-120"/>
-              </a:rPr>
-              <a:t>â†’</a:t>
-            </a:r>
-            <a:endParaRPr lang="en-US" sz="1800" dirty="0"/>
-          </a:p>
-        </p:txBody>
-      </p:sp>
-      <p:sp>
-        <p:nvSpPr>
-          <p:cNvPr id="16" name="Shape 14"/>
+          <p:cNvPr id="15" name="Shape 13"/>
           <p:cNvSpPr/>
           <p:nvPr/>
         </p:nvSpPr>
@@ -12209,7 +13523,7 @@
       </p:sp>
       <p:sp>
         <p:nvSpPr>
-          <p:cNvPr id="17" name="Text 15"/>
+          <p:cNvPr id="16" name="Text 14"/>
           <p:cNvSpPr/>
           <p:nvPr/>
         </p:nvSpPr>
@@ -12250,46 +13564,7 @@
       </p:sp>
       <p:sp>
         <p:nvSpPr>
-          <p:cNvPr id="18" name="Text 16"/>
-          <p:cNvSpPr/>
-          <p:nvPr/>
-        </p:nvSpPr>
-        <p:spPr>
-          <a:xfrm>
-            <a:off x="10046208" y="4187952"/>
-            <a:ext cx="201168" cy="256032"/>
-          </a:xfrm>
-          <a:prstGeom prst="rect">
-            <a:avLst/>
-          </a:prstGeom>
-          <a:noFill/>
-          <a:ln/>
-        </p:spPr>
-        <p:txBody>
-          <a:bodyPr wrap="square" lIns="0" tIns="0" rIns="0" bIns="0" rtlCol="0" anchor="ctr"/>
-          <a:lstStyle/>
-          <a:p>
-            <a:pPr algn="ctr" indent="0" marL="0">
-              <a:buNone/>
-            </a:pPr>
-            <a:r>
-              <a:rPr lang="en-US" sz="1800" b="1" dirty="0">
-                <a:solidFill>
-                  <a:srgbClr val="0068B7"/>
-                </a:solidFill>
-                <a:latin typeface="Aptos" pitchFamily="34" charset="0"/>
-                <a:ea typeface="Aptos" pitchFamily="34" charset="-122"/>
-                <a:cs typeface="Aptos" pitchFamily="34" charset="-120"/>
-              </a:rPr>
-              <a:t>â†’</a:t>
-            </a:r>
-            <a:endParaRPr lang="en-US" sz="1800" dirty="0"/>
-          </a:p>
-        </p:txBody>
-      </p:sp>
-      <p:sp>
-        <p:nvSpPr>
-          <p:cNvPr id="19" name="Shape 17"/>
+          <p:cNvPr id="17" name="Shape 15"/>
           <p:cNvSpPr/>
           <p:nvPr/>
         </p:nvSpPr>
@@ -12316,7 +13591,7 @@
       </p:sp>
       <p:sp>
         <p:nvSpPr>
-          <p:cNvPr id="20" name="Text 18"/>
+          <p:cNvPr id="18" name="Text 16"/>
           <p:cNvSpPr/>
           <p:nvPr/>
         </p:nvSpPr>
@@ -12523,8 +13798,8 @@
         </p:nvSpPr>
         <p:spPr>
           <a:xfrm>
-            <a:off x="9966960" y="6537960"/>
-            <a:ext cx="1645920" cy="201168"/>
+            <a:off x="9646920" y="6537960"/>
+            <a:ext cx="1965960" cy="201168"/>
           </a:xfrm>
           <a:prstGeom prst="rect">
             <a:avLst/>
@@ -12548,7 +13823,7 @@
                 <a:ea typeface="Aptos" pitchFamily="34" charset="-122"/>
                 <a:cs typeface="Aptos" pitchFamily="34" charset="-120"/>
               </a:rPr>
-              <a:t>Â© Paula Soper</a:t>
+              <a:t>Copyright Paula Soper</a:t>
             </a:r>
             <a:endParaRPr lang="en-US" sz="800" dirty="0"/>
           </a:p>
@@ -12891,46 +14166,7 @@
       </p:sp>
       <p:sp>
         <p:nvSpPr>
-          <p:cNvPr id="15" name="Text 13"/>
-          <p:cNvSpPr/>
-          <p:nvPr/>
-        </p:nvSpPr>
-        <p:spPr>
-          <a:xfrm>
-            <a:off x="8817864" y="4187952"/>
-            <a:ext cx="201168" cy="256032"/>
-          </a:xfrm>
-          <a:prstGeom prst="rect">
-            <a:avLst/>
-          </a:prstGeom>
-          <a:noFill/>
-          <a:ln/>
-        </p:spPr>
-        <p:txBody>
-          <a:bodyPr wrap="square" lIns="0" tIns="0" rIns="0" bIns="0" rtlCol="0" anchor="ctr"/>
-          <a:lstStyle/>
-          <a:p>
-            <a:pPr algn="ctr" indent="0" marL="0">
-              <a:buNone/>
-            </a:pPr>
-            <a:r>
-              <a:rPr lang="en-US" sz="1800" b="1" dirty="0">
-                <a:solidFill>
-                  <a:srgbClr val="0068B7"/>
-                </a:solidFill>
-                <a:latin typeface="Aptos" pitchFamily="34" charset="0"/>
-                <a:ea typeface="Aptos" pitchFamily="34" charset="-122"/>
-                <a:cs typeface="Aptos" pitchFamily="34" charset="-120"/>
-              </a:rPr>
-              <a:t>â†’</a:t>
-            </a:r>
-            <a:endParaRPr lang="en-US" sz="1800" dirty="0"/>
-          </a:p>
-        </p:txBody>
-      </p:sp>
-      <p:sp>
-        <p:nvSpPr>
-          <p:cNvPr id="16" name="Shape 14"/>
+          <p:cNvPr id="15" name="Shape 13"/>
           <p:cNvSpPr/>
           <p:nvPr/>
         </p:nvSpPr>
@@ -12957,7 +14193,7 @@
       </p:sp>
       <p:sp>
         <p:nvSpPr>
-          <p:cNvPr id="17" name="Text 15"/>
+          <p:cNvPr id="16" name="Text 14"/>
           <p:cNvSpPr/>
           <p:nvPr/>
         </p:nvSpPr>
@@ -12998,46 +14234,7 @@
       </p:sp>
       <p:sp>
         <p:nvSpPr>
-          <p:cNvPr id="18" name="Text 16"/>
-          <p:cNvSpPr/>
-          <p:nvPr/>
-        </p:nvSpPr>
-        <p:spPr>
-          <a:xfrm>
-            <a:off x="10046208" y="4187952"/>
-            <a:ext cx="201168" cy="256032"/>
-          </a:xfrm>
-          <a:prstGeom prst="rect">
-            <a:avLst/>
-          </a:prstGeom>
-          <a:noFill/>
-          <a:ln/>
-        </p:spPr>
-        <p:txBody>
-          <a:bodyPr wrap="square" lIns="0" tIns="0" rIns="0" bIns="0" rtlCol="0" anchor="ctr"/>
-          <a:lstStyle/>
-          <a:p>
-            <a:pPr algn="ctr" indent="0" marL="0">
-              <a:buNone/>
-            </a:pPr>
-            <a:r>
-              <a:rPr lang="en-US" sz="1800" b="1" dirty="0">
-                <a:solidFill>
-                  <a:srgbClr val="0068B7"/>
-                </a:solidFill>
-                <a:latin typeface="Aptos" pitchFamily="34" charset="0"/>
-                <a:ea typeface="Aptos" pitchFamily="34" charset="-122"/>
-                <a:cs typeface="Aptos" pitchFamily="34" charset="-120"/>
-              </a:rPr>
-              <a:t>â†’</a:t>
-            </a:r>
-            <a:endParaRPr lang="en-US" sz="1800" dirty="0"/>
-          </a:p>
-        </p:txBody>
-      </p:sp>
-      <p:sp>
-        <p:nvSpPr>
-          <p:cNvPr id="19" name="Shape 17"/>
+          <p:cNvPr id="17" name="Shape 15"/>
           <p:cNvSpPr/>
           <p:nvPr/>
         </p:nvSpPr>
@@ -13064,7 +14261,7 @@
       </p:sp>
       <p:sp>
         <p:nvSpPr>
-          <p:cNvPr id="20" name="Text 18"/>
+          <p:cNvPr id="18" name="Text 16"/>
           <p:cNvSpPr/>
           <p:nvPr/>
         </p:nvSpPr>
@@ -13271,8 +14468,8 @@
         </p:nvSpPr>
         <p:spPr>
           <a:xfrm>
-            <a:off x="9966960" y="6537960"/>
-            <a:ext cx="1645920" cy="201168"/>
+            <a:off x="9646920" y="6537960"/>
+            <a:ext cx="1965960" cy="201168"/>
           </a:xfrm>
           <a:prstGeom prst="rect">
             <a:avLst/>
@@ -13296,7 +14493,7 @@
                 <a:ea typeface="Aptos" pitchFamily="34" charset="-122"/>
                 <a:cs typeface="Aptos" pitchFamily="34" charset="-120"/>
               </a:rPr>
-              <a:t>Â© Paula Soper</a:t>
+              <a:t>Copyright Paula Soper</a:t>
             </a:r>
             <a:endParaRPr lang="en-US" sz="800" dirty="0"/>
           </a:p>
@@ -13343,77 +14540,13 @@
       </p:sp>
       <p:sp>
         <p:nvSpPr>
-          <p:cNvPr id="8" name="Shape 6"/>
+          <p:cNvPr id="8" name="Text 6"/>
           <p:cNvSpPr/>
           <p:nvPr/>
         </p:nvSpPr>
         <p:spPr>
           <a:xfrm>
             <a:off x="640080" y="658368"/>
-            <a:ext cx="420624" cy="420624"/>
-          </a:xfrm>
-          <a:prstGeom prst="ellipse">
-            <a:avLst/>
-          </a:prstGeom>
-          <a:solidFill>
-            <a:srgbClr val="0068B7"/>
-          </a:solidFill>
-          <a:ln w="12700">
-            <a:solidFill>
-              <a:srgbClr val="0068B7"/>
-            </a:solidFill>
-            <a:prstDash val="solid"/>
-          </a:ln>
-        </p:spPr>
-      </p:sp>
-      <p:sp>
-        <p:nvSpPr>
-          <p:cNvPr id="9" name="Text 7"/>
-          <p:cNvSpPr/>
-          <p:nvPr/>
-        </p:nvSpPr>
-        <p:spPr>
-          <a:xfrm>
-            <a:off x="640080" y="731520"/>
-            <a:ext cx="420624" cy="164592"/>
-          </a:xfrm>
-          <a:prstGeom prst="rect">
-            <a:avLst/>
-          </a:prstGeom>
-          <a:noFill/>
-          <a:ln/>
-        </p:spPr>
-        <p:txBody>
-          <a:bodyPr wrap="square" lIns="0" tIns="0" rIns="0" bIns="0" rtlCol="0" anchor="ctr"/>
-          <a:lstStyle/>
-          <a:p>
-            <a:pPr algn="ctr" indent="0" marL="0">
-              <a:buNone/>
-            </a:pPr>
-            <a:r>
-              <a:rPr lang="en-US" sz="1100" b="1" dirty="0">
-                <a:solidFill>
-                  <a:srgbClr val="FFFFFF"/>
-                </a:solidFill>
-                <a:latin typeface="Aptos" pitchFamily="34" charset="0"/>
-                <a:ea typeface="Aptos" pitchFamily="34" charset="-122"/>
-                <a:cs typeface="Aptos" pitchFamily="34" charset="-120"/>
-              </a:rPr>
-              <a:t>1</a:t>
-            </a:r>
-            <a:endParaRPr lang="en-US" sz="1100" dirty="0"/>
-          </a:p>
-        </p:txBody>
-      </p:sp>
-      <p:sp>
-        <p:nvSpPr>
-          <p:cNvPr id="10" name="Text 8"/>
-          <p:cNvSpPr/>
-          <p:nvPr/>
-        </p:nvSpPr>
-        <p:spPr>
-          <a:xfrm>
-            <a:off x="640080" y="621792"/>
             <a:ext cx="10881360" cy="713232"/>
           </a:xfrm>
           <a:prstGeom prst="rect">
@@ -13448,14 +14581,14 @@
       </p:sp>
       <p:sp>
         <p:nvSpPr>
-          <p:cNvPr id="11" name="Text 9"/>
+          <p:cNvPr id="9" name="Text 7"/>
           <p:cNvSpPr/>
           <p:nvPr/>
         </p:nvSpPr>
         <p:spPr>
           <a:xfrm>
             <a:off x="868680" y="1508760"/>
-            <a:ext cx="6537960" cy="4160520"/>
+            <a:ext cx="6309360" cy="4160520"/>
           </a:xfrm>
           <a:prstGeom prst="rect">
             <a:avLst/>
@@ -13514,18 +14647,18 @@
       </p:sp>
       <p:sp>
         <p:nvSpPr>
-          <p:cNvPr id="12" name="Shape 10"/>
-          <p:cNvSpPr/>
-          <p:nvPr/>
-        </p:nvSpPr>
-        <p:spPr>
-          <a:xfrm>
-            <a:off x="7909560" y="1417320"/>
-            <a:ext cx="3154680" cy="1828800"/>
+          <p:cNvPr id="10" name="Shape 8"/>
+          <p:cNvSpPr/>
+          <p:nvPr/>
+        </p:nvSpPr>
+        <p:spPr>
+          <a:xfrm>
+            <a:off x="7635240" y="1325880"/>
+            <a:ext cx="3474720" cy="1325880"/>
           </a:xfrm>
           <a:prstGeom prst="roundRect">
             <a:avLst>
-              <a:gd name="adj" fmla="val 6000"/>
+              <a:gd name="adj" fmla="val 8276"/>
             </a:avLst>
           </a:prstGeom>
           <a:solidFill>
@@ -13541,14 +14674,14 @@
       </p:sp>
       <p:sp>
         <p:nvSpPr>
-          <p:cNvPr id="13" name="Text 11"/>
-          <p:cNvSpPr/>
-          <p:nvPr/>
-        </p:nvSpPr>
-        <p:spPr>
-          <a:xfrm>
-            <a:off x="8074152" y="1563624"/>
-            <a:ext cx="2825496" cy="256032"/>
+          <p:cNvPr id="11" name="Text 9"/>
+          <p:cNvSpPr/>
+          <p:nvPr/>
+        </p:nvSpPr>
+        <p:spPr>
+          <a:xfrm>
+            <a:off x="7799832" y="1472184"/>
+            <a:ext cx="3145536" cy="256032"/>
           </a:xfrm>
           <a:prstGeom prst="rect">
             <a:avLst/>
@@ -13572,7 +14705,7 @@
                 <a:ea typeface="Aptos" pitchFamily="34" charset="-122"/>
                 <a:cs typeface="Aptos" pitchFamily="34" charset="-120"/>
               </a:rPr>
-              <a:t>Key idea</a:t>
+              <a:t>Risk check</a:t>
             </a:r>
             <a:endParaRPr lang="en-US" sz="1300" dirty="0"/>
           </a:p>
@@ -13580,14 +14713,14 @@
       </p:sp>
       <p:sp>
         <p:nvSpPr>
-          <p:cNvPr id="14" name="Text 12"/>
-          <p:cNvSpPr/>
-          <p:nvPr/>
-        </p:nvSpPr>
-        <p:spPr>
-          <a:xfrm>
-            <a:off x="8074152" y="1920240"/>
-            <a:ext cx="2825496" cy="1188720"/>
+          <p:cNvPr id="12" name="Text 10"/>
+          <p:cNvSpPr/>
+          <p:nvPr/>
+        </p:nvSpPr>
+        <p:spPr>
+          <a:xfrm>
+            <a:off x="7799832" y="1828800"/>
+            <a:ext cx="3145536" cy="685800"/>
           </a:xfrm>
           <a:prstGeom prst="rect">
             <a:avLst/>
@@ -13621,18 +14754,171 @@
       </p:sp>
       <p:sp>
         <p:nvSpPr>
-          <p:cNvPr id="15" name="Shape 13"/>
-          <p:cNvSpPr/>
-          <p:nvPr/>
-        </p:nvSpPr>
-        <p:spPr>
-          <a:xfrm>
-            <a:off x="7909560" y="3520440"/>
-            <a:ext cx="3154680" cy="1737360"/>
+          <p:cNvPr id="13" name="Shape 11"/>
+          <p:cNvSpPr/>
+          <p:nvPr/>
+        </p:nvSpPr>
+        <p:spPr>
+          <a:xfrm>
+            <a:off x="7635240" y="2788920"/>
+            <a:ext cx="3474720" cy="1536192"/>
           </a:xfrm>
           <a:prstGeom prst="roundRect">
             <a:avLst>
-              <a:gd name="adj" fmla="val 6316"/>
+              <a:gd name="adj" fmla="val 7143"/>
+            </a:avLst>
+          </a:prstGeom>
+          <a:solidFill>
+            <a:srgbClr val="FFFFFF">
+              <a:alpha val="88000"/>
+            </a:srgbClr>
+          </a:solidFill>
+          <a:ln w="12700">
+            <a:solidFill>
+              <a:srgbClr val="D6E8F2"/>
+            </a:solidFill>
+            <a:prstDash val="solid"/>
+          </a:ln>
+        </p:spPr>
+      </p:sp>
+      <p:sp>
+        <p:nvSpPr>
+          <p:cNvPr id="14" name="Shape 12"/>
+          <p:cNvSpPr/>
+          <p:nvPr/>
+        </p:nvSpPr>
+        <p:spPr>
+          <a:xfrm>
+            <a:off x="8046720" y="3108960"/>
+            <a:ext cx="2651760" cy="896112"/>
+          </a:xfrm>
+          <a:prstGeom prst="arc">
+            <a:avLst/>
+          </a:prstGeom>
+          <a:noFill/>
+          <a:ln w="25400">
+            <a:solidFill>
+              <a:srgbClr val="0068B7"/>
+            </a:solidFill>
+            <a:prstDash val="solid"/>
+          </a:ln>
+        </p:spPr>
+      </p:sp>
+      <p:sp>
+        <p:nvSpPr>
+          <p:cNvPr id="15" name="Text 13"/>
+          <p:cNvSpPr/>
+          <p:nvPr/>
+        </p:nvSpPr>
+        <p:spPr>
+          <a:xfrm>
+            <a:off x="7909560" y="3099816"/>
+            <a:ext cx="2926080" cy="256032"/>
+          </a:xfrm>
+          <a:prstGeom prst="rect">
+            <a:avLst/>
+          </a:prstGeom>
+          <a:noFill/>
+          <a:ln/>
+        </p:spPr>
+        <p:txBody>
+          <a:bodyPr wrap="square" lIns="0" tIns="0" rIns="0" bIns="0" rtlCol="0" anchor="ctr"/>
+          <a:lstStyle/>
+          <a:p>
+            <a:pPr algn="ctr" indent="0" marL="0">
+              <a:buNone/>
+            </a:pPr>
+            <a:r>
+              <a:rPr lang="en-US" sz="1500" b="1" dirty="0">
+                <a:solidFill>
+                  <a:srgbClr val="003A63"/>
+                </a:solidFill>
+                <a:latin typeface="Aptos" pitchFamily="34" charset="0"/>
+                <a:ea typeface="Aptos" pitchFamily="34" charset="-122"/>
+                <a:cs typeface="Aptos" pitchFamily="34" charset="-120"/>
+              </a:rPr>
+              <a:t>Risk</a:t>
+            </a:r>
+            <a:endParaRPr lang="en-US" sz="1500" dirty="0"/>
+          </a:p>
+        </p:txBody>
+      </p:sp>
+      <p:sp>
+        <p:nvSpPr>
+          <p:cNvPr id="16" name="Shape 14"/>
+          <p:cNvSpPr/>
+          <p:nvPr/>
+        </p:nvSpPr>
+        <p:spPr>
+          <a:xfrm>
+            <a:off x="8366760" y="3639312"/>
+            <a:ext cx="2011680" cy="0"/>
+          </a:xfrm>
+          <a:prstGeom prst="line">
+            <a:avLst/>
+          </a:prstGeom>
+          <a:noFill/>
+          <a:ln w="63500">
+            <a:solidFill>
+              <a:srgbClr val="2F8A28"/>
+            </a:solidFill>
+            <a:prstDash val="solid"/>
+          </a:ln>
+        </p:spPr>
+      </p:sp>
+      <p:sp>
+        <p:nvSpPr>
+          <p:cNvPr id="17" name="Text 15"/>
+          <p:cNvSpPr/>
+          <p:nvPr/>
+        </p:nvSpPr>
+        <p:spPr>
+          <a:xfrm>
+            <a:off x="7909560" y="3849624"/>
+            <a:ext cx="2926080" cy="164592"/>
+          </a:xfrm>
+          <a:prstGeom prst="rect">
+            <a:avLst/>
+          </a:prstGeom>
+          <a:noFill/>
+          <a:ln/>
+        </p:spPr>
+        <p:txBody>
+          <a:bodyPr wrap="square" lIns="0" tIns="0" rIns="0" bIns="0" rtlCol="0" anchor="ctr"/>
+          <a:lstStyle/>
+          <a:p>
+            <a:pPr algn="ctr" indent="0" marL="0">
+              <a:buNone/>
+            </a:pPr>
+            <a:r>
+              <a:rPr lang="en-US" sz="900" dirty="0">
+                <a:solidFill>
+                  <a:srgbClr val="003A63"/>
+                </a:solidFill>
+                <a:latin typeface="Aptos" pitchFamily="34" charset="0"/>
+                <a:ea typeface="Aptos" pitchFamily="34" charset="-122"/>
+                <a:cs typeface="Aptos" pitchFamily="34" charset="-120"/>
+              </a:rPr>
+              <a:t>Human review</a:t>
+            </a:r>
+            <a:endParaRPr lang="en-US" sz="900" dirty="0"/>
+          </a:p>
+        </p:txBody>
+      </p:sp>
+      <p:sp>
+        <p:nvSpPr>
+          <p:cNvPr id="18" name="Shape 16"/>
+          <p:cNvSpPr/>
+          <p:nvPr/>
+        </p:nvSpPr>
+        <p:spPr>
+          <a:xfrm>
+            <a:off x="7635240" y="4498848"/>
+            <a:ext cx="3474720" cy="1143000"/>
+          </a:xfrm>
+          <a:prstGeom prst="roundRect">
+            <a:avLst>
+              <a:gd name="adj" fmla="val 9600"/>
             </a:avLst>
           </a:prstGeom>
           <a:solidFill>
@@ -13648,14 +14934,14 @@
       </p:sp>
       <p:sp>
         <p:nvSpPr>
-          <p:cNvPr id="16" name="Text 14"/>
-          <p:cNvSpPr/>
-          <p:nvPr/>
-        </p:nvSpPr>
-        <p:spPr>
-          <a:xfrm>
-            <a:off x="8074152" y="3666744"/>
-            <a:ext cx="2825496" cy="256032"/>
+          <p:cNvPr id="19" name="Text 17"/>
+          <p:cNvSpPr/>
+          <p:nvPr/>
+        </p:nvSpPr>
+        <p:spPr>
+          <a:xfrm>
+            <a:off x="7799832" y="4645152"/>
+            <a:ext cx="3145536" cy="256032"/>
           </a:xfrm>
           <a:prstGeom prst="rect">
             <a:avLst/>
@@ -13679,7 +14965,7 @@
                 <a:ea typeface="Aptos" pitchFamily="34" charset="-122"/>
                 <a:cs typeface="Aptos" pitchFamily="34" charset="-120"/>
               </a:rPr>
-              <a:t>Use this for</a:t>
+              <a:t>Safeguard to plan</a:t>
             </a:r>
             <a:endParaRPr lang="en-US" sz="1300" dirty="0"/>
           </a:p>
@@ -13687,14 +14973,14 @@
       </p:sp>
       <p:sp>
         <p:nvSpPr>
-          <p:cNvPr id="17" name="Text 15"/>
-          <p:cNvSpPr/>
-          <p:nvPr/>
-        </p:nvSpPr>
-        <p:spPr>
-          <a:xfrm>
-            <a:off x="8074152" y="4023360"/>
-            <a:ext cx="2825496" cy="1097280"/>
+          <p:cNvPr id="20" name="Text 18"/>
+          <p:cNvSpPr/>
+          <p:nvPr/>
+        </p:nvSpPr>
+        <p:spPr>
+          <a:xfrm>
+            <a:off x="7799832" y="5001768"/>
+            <a:ext cx="3145536" cy="502920"/>
           </a:xfrm>
           <a:prstGeom prst="rect">
             <a:avLst/>
@@ -13720,7 +15006,7 @@
                 <a:ea typeface="Aptos" pitchFamily="34" charset="-122"/>
                 <a:cs typeface="Aptos" pitchFamily="34" charset="-120"/>
               </a:rPr>
-              <a:t>Connect the concept to public health decisions, safeguards, documentation, or implementation work.</a:t>
+              <a:t>Use the assignment to test whether you can explain the concept, apply it to a realistic public health situation, and identify what would need review before the work moves forward.</a:t>
             </a:r>
             <a:endParaRPr lang="en-US" sz="1550" dirty="0"/>
           </a:p>
@@ -13894,8 +15180,8 @@
         </p:nvSpPr>
         <p:spPr>
           <a:xfrm>
-            <a:off x="9966960" y="6537960"/>
-            <a:ext cx="1645920" cy="201168"/>
+            <a:off x="9646920" y="6537960"/>
+            <a:ext cx="1965960" cy="201168"/>
           </a:xfrm>
           <a:prstGeom prst="rect">
             <a:avLst/>
@@ -13919,7 +15205,7 @@
                 <a:ea typeface="Aptos" pitchFamily="34" charset="-122"/>
                 <a:cs typeface="Aptos" pitchFamily="34" charset="-120"/>
               </a:rPr>
-              <a:t>Â© Paula Soper</a:t>
+              <a:t>Copyright Paula Soper</a:t>
             </a:r>
             <a:endParaRPr lang="en-US" sz="800" dirty="0"/>
           </a:p>
@@ -14014,7 +15300,7 @@
         <p:spPr>
           <a:xfrm>
             <a:off x="868680" y="1508760"/>
-            <a:ext cx="6537960" cy="4160520"/>
+            <a:ext cx="6309360" cy="4160520"/>
           </a:xfrm>
           <a:prstGeom prst="rect">
             <a:avLst/>
@@ -14051,12 +15337,12 @@
         </p:nvSpPr>
         <p:spPr>
           <a:xfrm>
-            <a:off x="7909560" y="1417320"/>
-            <a:ext cx="3154680" cy="1828800"/>
+            <a:off x="7635240" y="1325880"/>
+            <a:ext cx="3474720" cy="1325880"/>
           </a:xfrm>
           <a:prstGeom prst="roundRect">
             <a:avLst>
-              <a:gd name="adj" fmla="val 6000"/>
+              <a:gd name="adj" fmla="val 8276"/>
             </a:avLst>
           </a:prstGeom>
           <a:solidFill>
@@ -14078,8 +15364,8 @@
         </p:nvSpPr>
         <p:spPr>
           <a:xfrm>
-            <a:off x="8074152" y="1563624"/>
-            <a:ext cx="2825496" cy="256032"/>
+            <a:off x="7799832" y="1472184"/>
+            <a:ext cx="3145536" cy="256032"/>
           </a:xfrm>
           <a:prstGeom prst="rect">
             <a:avLst/>
@@ -14103,7 +15389,7 @@
                 <a:ea typeface="Aptos" pitchFamily="34" charset="-122"/>
                 <a:cs typeface="Aptos" pitchFamily="34" charset="-120"/>
               </a:rPr>
-              <a:t>Key idea</a:t>
+              <a:t>Risk check</a:t>
             </a:r>
             <a:endParaRPr lang="en-US" sz="1300" dirty="0"/>
           </a:p>
@@ -14117,8 +15403,8 @@
         </p:nvSpPr>
         <p:spPr>
           <a:xfrm>
-            <a:off x="8074152" y="1920240"/>
-            <a:ext cx="2825496" cy="1188720"/>
+            <a:off x="7799832" y="1828800"/>
+            <a:ext cx="3145536" cy="685800"/>
           </a:xfrm>
           <a:prstGeom prst="rect">
             <a:avLst/>
@@ -14158,12 +15444,165 @@
         </p:nvSpPr>
         <p:spPr>
           <a:xfrm>
-            <a:off x="7909560" y="3520440"/>
-            <a:ext cx="3154680" cy="1737360"/>
+            <a:off x="7635240" y="2788920"/>
+            <a:ext cx="3474720" cy="1536192"/>
           </a:xfrm>
           <a:prstGeom prst="roundRect">
             <a:avLst>
-              <a:gd name="adj" fmla="val 6316"/>
+              <a:gd name="adj" fmla="val 7143"/>
+            </a:avLst>
+          </a:prstGeom>
+          <a:solidFill>
+            <a:srgbClr val="FFFFFF">
+              <a:alpha val="88000"/>
+            </a:srgbClr>
+          </a:solidFill>
+          <a:ln w="12700">
+            <a:solidFill>
+              <a:srgbClr val="D6E8F2"/>
+            </a:solidFill>
+            <a:prstDash val="solid"/>
+          </a:ln>
+        </p:spPr>
+      </p:sp>
+      <p:sp>
+        <p:nvSpPr>
+          <p:cNvPr id="14" name="Shape 12"/>
+          <p:cNvSpPr/>
+          <p:nvPr/>
+        </p:nvSpPr>
+        <p:spPr>
+          <a:xfrm>
+            <a:off x="8046720" y="3108960"/>
+            <a:ext cx="2651760" cy="896112"/>
+          </a:xfrm>
+          <a:prstGeom prst="arc">
+            <a:avLst/>
+          </a:prstGeom>
+          <a:noFill/>
+          <a:ln w="25400">
+            <a:solidFill>
+              <a:srgbClr val="0068B7"/>
+            </a:solidFill>
+            <a:prstDash val="solid"/>
+          </a:ln>
+        </p:spPr>
+      </p:sp>
+      <p:sp>
+        <p:nvSpPr>
+          <p:cNvPr id="15" name="Text 13"/>
+          <p:cNvSpPr/>
+          <p:nvPr/>
+        </p:nvSpPr>
+        <p:spPr>
+          <a:xfrm>
+            <a:off x="7909560" y="3099816"/>
+            <a:ext cx="2926080" cy="256032"/>
+          </a:xfrm>
+          <a:prstGeom prst="rect">
+            <a:avLst/>
+          </a:prstGeom>
+          <a:noFill/>
+          <a:ln/>
+        </p:spPr>
+        <p:txBody>
+          <a:bodyPr wrap="square" lIns="0" tIns="0" rIns="0" bIns="0" rtlCol="0" anchor="ctr"/>
+          <a:lstStyle/>
+          <a:p>
+            <a:pPr algn="ctr" indent="0" marL="0">
+              <a:buNone/>
+            </a:pPr>
+            <a:r>
+              <a:rPr lang="en-US" sz="1500" b="1" dirty="0">
+                <a:solidFill>
+                  <a:srgbClr val="003A63"/>
+                </a:solidFill>
+                <a:latin typeface="Aptos" pitchFamily="34" charset="0"/>
+                <a:ea typeface="Aptos" pitchFamily="34" charset="-122"/>
+                <a:cs typeface="Aptos" pitchFamily="34" charset="-120"/>
+              </a:rPr>
+              <a:t>Risk</a:t>
+            </a:r>
+            <a:endParaRPr lang="en-US" sz="1500" dirty="0"/>
+          </a:p>
+        </p:txBody>
+      </p:sp>
+      <p:sp>
+        <p:nvSpPr>
+          <p:cNvPr id="16" name="Shape 14"/>
+          <p:cNvSpPr/>
+          <p:nvPr/>
+        </p:nvSpPr>
+        <p:spPr>
+          <a:xfrm>
+            <a:off x="8366760" y="3639312"/>
+            <a:ext cx="2011680" cy="0"/>
+          </a:xfrm>
+          <a:prstGeom prst="line">
+            <a:avLst/>
+          </a:prstGeom>
+          <a:noFill/>
+          <a:ln w="63500">
+            <a:solidFill>
+              <a:srgbClr val="2F8A28"/>
+            </a:solidFill>
+            <a:prstDash val="solid"/>
+          </a:ln>
+        </p:spPr>
+      </p:sp>
+      <p:sp>
+        <p:nvSpPr>
+          <p:cNvPr id="17" name="Text 15"/>
+          <p:cNvSpPr/>
+          <p:nvPr/>
+        </p:nvSpPr>
+        <p:spPr>
+          <a:xfrm>
+            <a:off x="7909560" y="3849624"/>
+            <a:ext cx="2926080" cy="164592"/>
+          </a:xfrm>
+          <a:prstGeom prst="rect">
+            <a:avLst/>
+          </a:prstGeom>
+          <a:noFill/>
+          <a:ln/>
+        </p:spPr>
+        <p:txBody>
+          <a:bodyPr wrap="square" lIns="0" tIns="0" rIns="0" bIns="0" rtlCol="0" anchor="ctr"/>
+          <a:lstStyle/>
+          <a:p>
+            <a:pPr algn="ctr" indent="0" marL="0">
+              <a:buNone/>
+            </a:pPr>
+            <a:r>
+              <a:rPr lang="en-US" sz="900" dirty="0">
+                <a:solidFill>
+                  <a:srgbClr val="003A63"/>
+                </a:solidFill>
+                <a:latin typeface="Aptos" pitchFamily="34" charset="0"/>
+                <a:ea typeface="Aptos" pitchFamily="34" charset="-122"/>
+                <a:cs typeface="Aptos" pitchFamily="34" charset="-120"/>
+              </a:rPr>
+              <a:t>Human review</a:t>
+            </a:r>
+            <a:endParaRPr lang="en-US" sz="900" dirty="0"/>
+          </a:p>
+        </p:txBody>
+      </p:sp>
+      <p:sp>
+        <p:nvSpPr>
+          <p:cNvPr id="18" name="Shape 16"/>
+          <p:cNvSpPr/>
+          <p:nvPr/>
+        </p:nvSpPr>
+        <p:spPr>
+          <a:xfrm>
+            <a:off x="7635240" y="4498848"/>
+            <a:ext cx="3474720" cy="1143000"/>
+          </a:xfrm>
+          <a:prstGeom prst="roundRect">
+            <a:avLst>
+              <a:gd name="adj" fmla="val 9600"/>
             </a:avLst>
           </a:prstGeom>
           <a:solidFill>
@@ -14179,14 +15618,14 @@
       </p:sp>
       <p:sp>
         <p:nvSpPr>
-          <p:cNvPr id="14" name="Text 12"/>
-          <p:cNvSpPr/>
-          <p:nvPr/>
-        </p:nvSpPr>
-        <p:spPr>
-          <a:xfrm>
-            <a:off x="8074152" y="3666744"/>
-            <a:ext cx="2825496" cy="256032"/>
+          <p:cNvPr id="19" name="Text 17"/>
+          <p:cNvSpPr/>
+          <p:nvPr/>
+        </p:nvSpPr>
+        <p:spPr>
+          <a:xfrm>
+            <a:off x="7799832" y="4645152"/>
+            <a:ext cx="3145536" cy="256032"/>
           </a:xfrm>
           <a:prstGeom prst="rect">
             <a:avLst/>
@@ -14210,7 +15649,7 @@
                 <a:ea typeface="Aptos" pitchFamily="34" charset="-122"/>
                 <a:cs typeface="Aptos" pitchFamily="34" charset="-120"/>
               </a:rPr>
-              <a:t>Use this for</a:t>
+              <a:t>Safeguard to plan</a:t>
             </a:r>
             <a:endParaRPr lang="en-US" sz="1300" dirty="0"/>
           </a:p>
@@ -14218,14 +15657,14 @@
       </p:sp>
       <p:sp>
         <p:nvSpPr>
-          <p:cNvPr id="15" name="Text 13"/>
-          <p:cNvSpPr/>
-          <p:nvPr/>
-        </p:nvSpPr>
-        <p:spPr>
-          <a:xfrm>
-            <a:off x="8074152" y="4023360"/>
-            <a:ext cx="2825496" cy="1097280"/>
+          <p:cNvPr id="20" name="Text 18"/>
+          <p:cNvSpPr/>
+          <p:nvPr/>
+        </p:nvSpPr>
+        <p:spPr>
+          <a:xfrm>
+            <a:off x="7799832" y="5001768"/>
+            <a:ext cx="3145536" cy="502920"/>
           </a:xfrm>
           <a:prstGeom prst="rect">
             <a:avLst/>
@@ -14251,7 +15690,7 @@
                 <a:ea typeface="Aptos" pitchFamily="34" charset="-122"/>
                 <a:cs typeface="Aptos" pitchFamily="34" charset="-120"/>
               </a:rPr>
-              <a:t>Connect the concept to public health decisions, safeguards, documentation, or implementation work.</a:t>
+              <a:t>Use the assignment to test whether you can explain the concept, apply it to a realistic public health situation, and identify what would need review before the work moves forward.</a:t>
             </a:r>
             <a:endParaRPr lang="en-US" sz="1550" dirty="0"/>
           </a:p>
@@ -14425,8 +15864,8 @@
         </p:nvSpPr>
         <p:spPr>
           <a:xfrm>
-            <a:off x="9966960" y="6537960"/>
-            <a:ext cx="1645920" cy="201168"/>
+            <a:off x="9646920" y="6537960"/>
+            <a:ext cx="1965960" cy="201168"/>
           </a:xfrm>
           <a:prstGeom prst="rect">
             <a:avLst/>
@@ -14450,7 +15889,7 @@
                 <a:ea typeface="Aptos" pitchFamily="34" charset="-122"/>
                 <a:cs typeface="Aptos" pitchFamily="34" charset="-120"/>
               </a:rPr>
-              <a:t>Â© Paula Soper</a:t>
+              <a:t>Copyright Paula Soper</a:t>
             </a:r>
             <a:endParaRPr lang="en-US" sz="800" dirty="0"/>
           </a:p>
@@ -14497,77 +15936,13 @@
       </p:sp>
       <p:sp>
         <p:nvSpPr>
-          <p:cNvPr id="8" name="Shape 6"/>
+          <p:cNvPr id="8" name="Text 6"/>
           <p:cNvSpPr/>
           <p:nvPr/>
         </p:nvSpPr>
         <p:spPr>
           <a:xfrm>
             <a:off x="640080" y="658368"/>
-            <a:ext cx="420624" cy="420624"/>
-          </a:xfrm>
-          <a:prstGeom prst="ellipse">
-            <a:avLst/>
-          </a:prstGeom>
-          <a:solidFill>
-            <a:srgbClr val="0068B7"/>
-          </a:solidFill>
-          <a:ln w="12700">
-            <a:solidFill>
-              <a:srgbClr val="0068B7"/>
-            </a:solidFill>
-            <a:prstDash val="solid"/>
-          </a:ln>
-        </p:spPr>
-      </p:sp>
-      <p:sp>
-        <p:nvSpPr>
-          <p:cNvPr id="9" name="Text 7"/>
-          <p:cNvSpPr/>
-          <p:nvPr/>
-        </p:nvSpPr>
-        <p:spPr>
-          <a:xfrm>
-            <a:off x="640080" y="731520"/>
-            <a:ext cx="420624" cy="164592"/>
-          </a:xfrm>
-          <a:prstGeom prst="rect">
-            <a:avLst/>
-          </a:prstGeom>
-          <a:noFill/>
-          <a:ln/>
-        </p:spPr>
-        <p:txBody>
-          <a:bodyPr wrap="square" lIns="0" tIns="0" rIns="0" bIns="0" rtlCol="0" anchor="ctr"/>
-          <a:lstStyle/>
-          <a:p>
-            <a:pPr algn="ctr" indent="0" marL="0">
-              <a:buNone/>
-            </a:pPr>
-            <a:r>
-              <a:rPr lang="en-US" sz="1100" b="1" dirty="0">
-                <a:solidFill>
-                  <a:srgbClr val="FFFFFF"/>
-                </a:solidFill>
-                <a:latin typeface="Aptos" pitchFamily="34" charset="0"/>
-                <a:ea typeface="Aptos" pitchFamily="34" charset="-122"/>
-                <a:cs typeface="Aptos" pitchFamily="34" charset="-120"/>
-              </a:rPr>
-              <a:t>2</a:t>
-            </a:r>
-            <a:endParaRPr lang="en-US" sz="1100" dirty="0"/>
-          </a:p>
-        </p:txBody>
-      </p:sp>
-      <p:sp>
-        <p:nvSpPr>
-          <p:cNvPr id="10" name="Text 8"/>
-          <p:cNvSpPr/>
-          <p:nvPr/>
-        </p:nvSpPr>
-        <p:spPr>
-          <a:xfrm>
-            <a:off x="640080" y="621792"/>
             <a:ext cx="10881360" cy="713232"/>
           </a:xfrm>
           <a:prstGeom prst="rect">
@@ -14602,14 +15977,14 @@
       </p:sp>
       <p:sp>
         <p:nvSpPr>
-          <p:cNvPr id="11" name="Text 9"/>
+          <p:cNvPr id="9" name="Text 7"/>
           <p:cNvSpPr/>
           <p:nvPr/>
         </p:nvSpPr>
         <p:spPr>
           <a:xfrm>
             <a:off x="868680" y="1508760"/>
-            <a:ext cx="6537960" cy="4160520"/>
+            <a:ext cx="6309360" cy="4160520"/>
           </a:xfrm>
           <a:prstGeom prst="rect">
             <a:avLst/>
@@ -14668,18 +16043,18 @@
       </p:sp>
       <p:sp>
         <p:nvSpPr>
-          <p:cNvPr id="12" name="Shape 10"/>
-          <p:cNvSpPr/>
-          <p:nvPr/>
-        </p:nvSpPr>
-        <p:spPr>
-          <a:xfrm>
-            <a:off x="7909560" y="1417320"/>
-            <a:ext cx="3154680" cy="1828800"/>
+          <p:cNvPr id="10" name="Shape 8"/>
+          <p:cNvSpPr/>
+          <p:nvPr/>
+        </p:nvSpPr>
+        <p:spPr>
+          <a:xfrm>
+            <a:off x="7635240" y="1325880"/>
+            <a:ext cx="3474720" cy="1325880"/>
           </a:xfrm>
           <a:prstGeom prst="roundRect">
             <a:avLst>
-              <a:gd name="adj" fmla="val 6000"/>
+              <a:gd name="adj" fmla="val 8276"/>
             </a:avLst>
           </a:prstGeom>
           <a:solidFill>
@@ -14695,14 +16070,14 @@
       </p:sp>
       <p:sp>
         <p:nvSpPr>
-          <p:cNvPr id="13" name="Text 11"/>
-          <p:cNvSpPr/>
-          <p:nvPr/>
-        </p:nvSpPr>
-        <p:spPr>
-          <a:xfrm>
-            <a:off x="8074152" y="1563624"/>
-            <a:ext cx="2825496" cy="256032"/>
+          <p:cNvPr id="11" name="Text 9"/>
+          <p:cNvSpPr/>
+          <p:nvPr/>
+        </p:nvSpPr>
+        <p:spPr>
+          <a:xfrm>
+            <a:off x="7799832" y="1472184"/>
+            <a:ext cx="3145536" cy="256032"/>
           </a:xfrm>
           <a:prstGeom prst="rect">
             <a:avLst/>
@@ -14726,7 +16101,7 @@
                 <a:ea typeface="Aptos" pitchFamily="34" charset="-122"/>
                 <a:cs typeface="Aptos" pitchFamily="34" charset="-120"/>
               </a:rPr>
-              <a:t>Key idea</a:t>
+              <a:t>Risk check</a:t>
             </a:r>
             <a:endParaRPr lang="en-US" sz="1300" dirty="0"/>
           </a:p>
@@ -14734,14 +16109,14 @@
       </p:sp>
       <p:sp>
         <p:nvSpPr>
-          <p:cNvPr id="14" name="Text 12"/>
-          <p:cNvSpPr/>
-          <p:nvPr/>
-        </p:nvSpPr>
-        <p:spPr>
-          <a:xfrm>
-            <a:off x="8074152" y="1920240"/>
-            <a:ext cx="2825496" cy="1188720"/>
+          <p:cNvPr id="12" name="Text 10"/>
+          <p:cNvSpPr/>
+          <p:nvPr/>
+        </p:nvSpPr>
+        <p:spPr>
+          <a:xfrm>
+            <a:off x="7799832" y="1828800"/>
+            <a:ext cx="3145536" cy="685800"/>
           </a:xfrm>
           <a:prstGeom prst="rect">
             <a:avLst/>
@@ -14775,18 +16150,171 @@
       </p:sp>
       <p:sp>
         <p:nvSpPr>
-          <p:cNvPr id="15" name="Shape 13"/>
-          <p:cNvSpPr/>
-          <p:nvPr/>
-        </p:nvSpPr>
-        <p:spPr>
-          <a:xfrm>
-            <a:off x="7909560" y="3520440"/>
-            <a:ext cx="3154680" cy="1737360"/>
+          <p:cNvPr id="13" name="Shape 11"/>
+          <p:cNvSpPr/>
+          <p:nvPr/>
+        </p:nvSpPr>
+        <p:spPr>
+          <a:xfrm>
+            <a:off x="7635240" y="2788920"/>
+            <a:ext cx="3474720" cy="1536192"/>
           </a:xfrm>
           <a:prstGeom prst="roundRect">
             <a:avLst>
-              <a:gd name="adj" fmla="val 6316"/>
+              <a:gd name="adj" fmla="val 7143"/>
+            </a:avLst>
+          </a:prstGeom>
+          <a:solidFill>
+            <a:srgbClr val="FFFFFF">
+              <a:alpha val="88000"/>
+            </a:srgbClr>
+          </a:solidFill>
+          <a:ln w="12700">
+            <a:solidFill>
+              <a:srgbClr val="D6E8F2"/>
+            </a:solidFill>
+            <a:prstDash val="solid"/>
+          </a:ln>
+        </p:spPr>
+      </p:sp>
+      <p:sp>
+        <p:nvSpPr>
+          <p:cNvPr id="14" name="Shape 12"/>
+          <p:cNvSpPr/>
+          <p:nvPr/>
+        </p:nvSpPr>
+        <p:spPr>
+          <a:xfrm>
+            <a:off x="8046720" y="3108960"/>
+            <a:ext cx="2651760" cy="896112"/>
+          </a:xfrm>
+          <a:prstGeom prst="arc">
+            <a:avLst/>
+          </a:prstGeom>
+          <a:noFill/>
+          <a:ln w="25400">
+            <a:solidFill>
+              <a:srgbClr val="0068B7"/>
+            </a:solidFill>
+            <a:prstDash val="solid"/>
+          </a:ln>
+        </p:spPr>
+      </p:sp>
+      <p:sp>
+        <p:nvSpPr>
+          <p:cNvPr id="15" name="Text 13"/>
+          <p:cNvSpPr/>
+          <p:nvPr/>
+        </p:nvSpPr>
+        <p:spPr>
+          <a:xfrm>
+            <a:off x="7909560" y="3099816"/>
+            <a:ext cx="2926080" cy="256032"/>
+          </a:xfrm>
+          <a:prstGeom prst="rect">
+            <a:avLst/>
+          </a:prstGeom>
+          <a:noFill/>
+          <a:ln/>
+        </p:spPr>
+        <p:txBody>
+          <a:bodyPr wrap="square" lIns="0" tIns="0" rIns="0" bIns="0" rtlCol="0" anchor="ctr"/>
+          <a:lstStyle/>
+          <a:p>
+            <a:pPr algn="ctr" indent="0" marL="0">
+              <a:buNone/>
+            </a:pPr>
+            <a:r>
+              <a:rPr lang="en-US" sz="1500" b="1" dirty="0">
+                <a:solidFill>
+                  <a:srgbClr val="003A63"/>
+                </a:solidFill>
+                <a:latin typeface="Aptos" pitchFamily="34" charset="0"/>
+                <a:ea typeface="Aptos" pitchFamily="34" charset="-122"/>
+                <a:cs typeface="Aptos" pitchFamily="34" charset="-120"/>
+              </a:rPr>
+              <a:t>Risk</a:t>
+            </a:r>
+            <a:endParaRPr lang="en-US" sz="1500" dirty="0"/>
+          </a:p>
+        </p:txBody>
+      </p:sp>
+      <p:sp>
+        <p:nvSpPr>
+          <p:cNvPr id="16" name="Shape 14"/>
+          <p:cNvSpPr/>
+          <p:nvPr/>
+        </p:nvSpPr>
+        <p:spPr>
+          <a:xfrm>
+            <a:off x="8366760" y="3639312"/>
+            <a:ext cx="2011680" cy="0"/>
+          </a:xfrm>
+          <a:prstGeom prst="line">
+            <a:avLst/>
+          </a:prstGeom>
+          <a:noFill/>
+          <a:ln w="63500">
+            <a:solidFill>
+              <a:srgbClr val="2F8A28"/>
+            </a:solidFill>
+            <a:prstDash val="solid"/>
+          </a:ln>
+        </p:spPr>
+      </p:sp>
+      <p:sp>
+        <p:nvSpPr>
+          <p:cNvPr id="17" name="Text 15"/>
+          <p:cNvSpPr/>
+          <p:nvPr/>
+        </p:nvSpPr>
+        <p:spPr>
+          <a:xfrm>
+            <a:off x="7909560" y="3849624"/>
+            <a:ext cx="2926080" cy="164592"/>
+          </a:xfrm>
+          <a:prstGeom prst="rect">
+            <a:avLst/>
+          </a:prstGeom>
+          <a:noFill/>
+          <a:ln/>
+        </p:spPr>
+        <p:txBody>
+          <a:bodyPr wrap="square" lIns="0" tIns="0" rIns="0" bIns="0" rtlCol="0" anchor="ctr"/>
+          <a:lstStyle/>
+          <a:p>
+            <a:pPr algn="ctr" indent="0" marL="0">
+              <a:buNone/>
+            </a:pPr>
+            <a:r>
+              <a:rPr lang="en-US" sz="900" dirty="0">
+                <a:solidFill>
+                  <a:srgbClr val="003A63"/>
+                </a:solidFill>
+                <a:latin typeface="Aptos" pitchFamily="34" charset="0"/>
+                <a:ea typeface="Aptos" pitchFamily="34" charset="-122"/>
+                <a:cs typeface="Aptos" pitchFamily="34" charset="-120"/>
+              </a:rPr>
+              <a:t>Human review</a:t>
+            </a:r>
+            <a:endParaRPr lang="en-US" sz="900" dirty="0"/>
+          </a:p>
+        </p:txBody>
+      </p:sp>
+      <p:sp>
+        <p:nvSpPr>
+          <p:cNvPr id="18" name="Shape 16"/>
+          <p:cNvSpPr/>
+          <p:nvPr/>
+        </p:nvSpPr>
+        <p:spPr>
+          <a:xfrm>
+            <a:off x="7635240" y="4498848"/>
+            <a:ext cx="3474720" cy="1143000"/>
+          </a:xfrm>
+          <a:prstGeom prst="roundRect">
+            <a:avLst>
+              <a:gd name="adj" fmla="val 9600"/>
             </a:avLst>
           </a:prstGeom>
           <a:solidFill>
@@ -14802,14 +16330,14 @@
       </p:sp>
       <p:sp>
         <p:nvSpPr>
-          <p:cNvPr id="16" name="Text 14"/>
-          <p:cNvSpPr/>
-          <p:nvPr/>
-        </p:nvSpPr>
-        <p:spPr>
-          <a:xfrm>
-            <a:off x="8074152" y="3666744"/>
-            <a:ext cx="2825496" cy="256032"/>
+          <p:cNvPr id="19" name="Text 17"/>
+          <p:cNvSpPr/>
+          <p:nvPr/>
+        </p:nvSpPr>
+        <p:spPr>
+          <a:xfrm>
+            <a:off x="7799832" y="4645152"/>
+            <a:ext cx="3145536" cy="256032"/>
           </a:xfrm>
           <a:prstGeom prst="rect">
             <a:avLst/>
@@ -14833,7 +16361,7 @@
                 <a:ea typeface="Aptos" pitchFamily="34" charset="-122"/>
                 <a:cs typeface="Aptos" pitchFamily="34" charset="-120"/>
               </a:rPr>
-              <a:t>Use this for</a:t>
+              <a:t>Safeguard to plan</a:t>
             </a:r>
             <a:endParaRPr lang="en-US" sz="1300" dirty="0"/>
           </a:p>
@@ -14841,14 +16369,14 @@
       </p:sp>
       <p:sp>
         <p:nvSpPr>
-          <p:cNvPr id="17" name="Text 15"/>
-          <p:cNvSpPr/>
-          <p:nvPr/>
-        </p:nvSpPr>
-        <p:spPr>
-          <a:xfrm>
-            <a:off x="8074152" y="4023360"/>
-            <a:ext cx="2825496" cy="1097280"/>
+          <p:cNvPr id="20" name="Text 18"/>
+          <p:cNvSpPr/>
+          <p:nvPr/>
+        </p:nvSpPr>
+        <p:spPr>
+          <a:xfrm>
+            <a:off x="7799832" y="5001768"/>
+            <a:ext cx="3145536" cy="502920"/>
           </a:xfrm>
           <a:prstGeom prst="rect">
             <a:avLst/>
@@ -14874,7 +16402,7 @@
                 <a:ea typeface="Aptos" pitchFamily="34" charset="-122"/>
                 <a:cs typeface="Aptos" pitchFamily="34" charset="-120"/>
               </a:rPr>
-              <a:t>Connect the concept to public health decisions, safeguards, documentation, or implementation work.</a:t>
+              <a:t>Identify what could go wrong, who could be affected, what safeguards are needed, and what evidence should be reviewed before use expands.</a:t>
             </a:r>
             <a:endParaRPr lang="en-US" sz="1550" dirty="0"/>
           </a:p>
@@ -15048,8 +16576,8 @@
         </p:nvSpPr>
         <p:spPr>
           <a:xfrm>
-            <a:off x="9966960" y="6537960"/>
-            <a:ext cx="1645920" cy="201168"/>
+            <a:off x="9646920" y="6537960"/>
+            <a:ext cx="1965960" cy="201168"/>
           </a:xfrm>
           <a:prstGeom prst="rect">
             <a:avLst/>
@@ -15073,7 +16601,7 @@
                 <a:ea typeface="Aptos" pitchFamily="34" charset="-122"/>
                 <a:cs typeface="Aptos" pitchFamily="34" charset="-120"/>
               </a:rPr>
-              <a:t>Â© Paula Soper</a:t>
+              <a:t>Copyright Paula Soper</a:t>
             </a:r>
             <a:endParaRPr lang="en-US" sz="800" dirty="0"/>
           </a:p>
@@ -15120,77 +16648,13 @@
       </p:sp>
       <p:sp>
         <p:nvSpPr>
-          <p:cNvPr id="8" name="Shape 6"/>
+          <p:cNvPr id="8" name="Text 6"/>
           <p:cNvSpPr/>
           <p:nvPr/>
         </p:nvSpPr>
         <p:spPr>
           <a:xfrm>
             <a:off x="640080" y="658368"/>
-            <a:ext cx="420624" cy="420624"/>
-          </a:xfrm>
-          <a:prstGeom prst="ellipse">
-            <a:avLst/>
-          </a:prstGeom>
-          <a:solidFill>
-            <a:srgbClr val="0068B7"/>
-          </a:solidFill>
-          <a:ln w="12700">
-            <a:solidFill>
-              <a:srgbClr val="0068B7"/>
-            </a:solidFill>
-            <a:prstDash val="solid"/>
-          </a:ln>
-        </p:spPr>
-      </p:sp>
-      <p:sp>
-        <p:nvSpPr>
-          <p:cNvPr id="9" name="Text 7"/>
-          <p:cNvSpPr/>
-          <p:nvPr/>
-        </p:nvSpPr>
-        <p:spPr>
-          <a:xfrm>
-            <a:off x="640080" y="731520"/>
-            <a:ext cx="420624" cy="164592"/>
-          </a:xfrm>
-          <a:prstGeom prst="rect">
-            <a:avLst/>
-          </a:prstGeom>
-          <a:noFill/>
-          <a:ln/>
-        </p:spPr>
-        <p:txBody>
-          <a:bodyPr wrap="square" lIns="0" tIns="0" rIns="0" bIns="0" rtlCol="0" anchor="ctr"/>
-          <a:lstStyle/>
-          <a:p>
-            <a:pPr algn="ctr" indent="0" marL="0">
-              <a:buNone/>
-            </a:pPr>
-            <a:r>
-              <a:rPr lang="en-US" sz="1100" b="1" dirty="0">
-                <a:solidFill>
-                  <a:srgbClr val="FFFFFF"/>
-                </a:solidFill>
-                <a:latin typeface="Aptos" pitchFamily="34" charset="0"/>
-                <a:ea typeface="Aptos" pitchFamily="34" charset="-122"/>
-                <a:cs typeface="Aptos" pitchFamily="34" charset="-120"/>
-              </a:rPr>
-              <a:t>3</a:t>
-            </a:r>
-            <a:endParaRPr lang="en-US" sz="1100" dirty="0"/>
-          </a:p>
-        </p:txBody>
-      </p:sp>
-      <p:sp>
-        <p:nvSpPr>
-          <p:cNvPr id="10" name="Text 8"/>
-          <p:cNvSpPr/>
-          <p:nvPr/>
-        </p:nvSpPr>
-        <p:spPr>
-          <a:xfrm>
-            <a:off x="640080" y="621792"/>
             <a:ext cx="10881360" cy="713232"/>
           </a:xfrm>
           <a:prstGeom prst="rect">
@@ -15225,14 +16689,14 @@
       </p:sp>
       <p:sp>
         <p:nvSpPr>
-          <p:cNvPr id="11" name="Text 9"/>
+          <p:cNvPr id="9" name="Text 7"/>
           <p:cNvSpPr/>
           <p:nvPr/>
         </p:nvSpPr>
         <p:spPr>
           <a:xfrm>
             <a:off x="868680" y="1508760"/>
-            <a:ext cx="6537960" cy="4160520"/>
+            <a:ext cx="6309360" cy="4160520"/>
           </a:xfrm>
           <a:prstGeom prst="rect">
             <a:avLst/>
@@ -15291,18 +16755,18 @@
       </p:sp>
       <p:sp>
         <p:nvSpPr>
-          <p:cNvPr id="12" name="Shape 10"/>
-          <p:cNvSpPr/>
-          <p:nvPr/>
-        </p:nvSpPr>
-        <p:spPr>
-          <a:xfrm>
-            <a:off x="7909560" y="1417320"/>
-            <a:ext cx="3154680" cy="1828800"/>
+          <p:cNvPr id="10" name="Shape 8"/>
+          <p:cNvSpPr/>
+          <p:nvPr/>
+        </p:nvSpPr>
+        <p:spPr>
+          <a:xfrm>
+            <a:off x="7635240" y="1325880"/>
+            <a:ext cx="3474720" cy="1325880"/>
           </a:xfrm>
           <a:prstGeom prst="roundRect">
             <a:avLst>
-              <a:gd name="adj" fmla="val 6000"/>
+              <a:gd name="adj" fmla="val 8276"/>
             </a:avLst>
           </a:prstGeom>
           <a:solidFill>
@@ -15318,14 +16782,14 @@
       </p:sp>
       <p:sp>
         <p:nvSpPr>
-          <p:cNvPr id="13" name="Text 11"/>
-          <p:cNvSpPr/>
-          <p:nvPr/>
-        </p:nvSpPr>
-        <p:spPr>
-          <a:xfrm>
-            <a:off x="8074152" y="1563624"/>
-            <a:ext cx="2825496" cy="256032"/>
+          <p:cNvPr id="11" name="Text 9"/>
+          <p:cNvSpPr/>
+          <p:nvPr/>
+        </p:nvSpPr>
+        <p:spPr>
+          <a:xfrm>
+            <a:off x="7799832" y="1472184"/>
+            <a:ext cx="3145536" cy="256032"/>
           </a:xfrm>
           <a:prstGeom prst="rect">
             <a:avLst/>
@@ -15349,7 +16813,7 @@
                 <a:ea typeface="Aptos" pitchFamily="34" charset="-122"/>
                 <a:cs typeface="Aptos" pitchFamily="34" charset="-120"/>
               </a:rPr>
-              <a:t>Key idea</a:t>
+              <a:t>Risk check</a:t>
             </a:r>
             <a:endParaRPr lang="en-US" sz="1300" dirty="0"/>
           </a:p>
@@ -15357,14 +16821,14 @@
       </p:sp>
       <p:sp>
         <p:nvSpPr>
-          <p:cNvPr id="14" name="Text 12"/>
-          <p:cNvSpPr/>
-          <p:nvPr/>
-        </p:nvSpPr>
-        <p:spPr>
-          <a:xfrm>
-            <a:off x="8074152" y="1920240"/>
-            <a:ext cx="2825496" cy="1188720"/>
+          <p:cNvPr id="12" name="Text 10"/>
+          <p:cNvSpPr/>
+          <p:nvPr/>
+        </p:nvSpPr>
+        <p:spPr>
+          <a:xfrm>
+            <a:off x="7799832" y="1828800"/>
+            <a:ext cx="3145536" cy="685800"/>
           </a:xfrm>
           <a:prstGeom prst="rect">
             <a:avLst/>
@@ -15398,18 +16862,171 @@
       </p:sp>
       <p:sp>
         <p:nvSpPr>
-          <p:cNvPr id="15" name="Shape 13"/>
-          <p:cNvSpPr/>
-          <p:nvPr/>
-        </p:nvSpPr>
-        <p:spPr>
-          <a:xfrm>
-            <a:off x="7909560" y="3520440"/>
-            <a:ext cx="3154680" cy="1737360"/>
+          <p:cNvPr id="13" name="Shape 11"/>
+          <p:cNvSpPr/>
+          <p:nvPr/>
+        </p:nvSpPr>
+        <p:spPr>
+          <a:xfrm>
+            <a:off x="7635240" y="2788920"/>
+            <a:ext cx="3474720" cy="1536192"/>
           </a:xfrm>
           <a:prstGeom prst="roundRect">
             <a:avLst>
-              <a:gd name="adj" fmla="val 6316"/>
+              <a:gd name="adj" fmla="val 7143"/>
+            </a:avLst>
+          </a:prstGeom>
+          <a:solidFill>
+            <a:srgbClr val="FFFFFF">
+              <a:alpha val="88000"/>
+            </a:srgbClr>
+          </a:solidFill>
+          <a:ln w="12700">
+            <a:solidFill>
+              <a:srgbClr val="D6E8F2"/>
+            </a:solidFill>
+            <a:prstDash val="solid"/>
+          </a:ln>
+        </p:spPr>
+      </p:sp>
+      <p:sp>
+        <p:nvSpPr>
+          <p:cNvPr id="14" name="Shape 12"/>
+          <p:cNvSpPr/>
+          <p:nvPr/>
+        </p:nvSpPr>
+        <p:spPr>
+          <a:xfrm>
+            <a:off x="8046720" y="3108960"/>
+            <a:ext cx="2651760" cy="896112"/>
+          </a:xfrm>
+          <a:prstGeom prst="arc">
+            <a:avLst/>
+          </a:prstGeom>
+          <a:noFill/>
+          <a:ln w="25400">
+            <a:solidFill>
+              <a:srgbClr val="0068B7"/>
+            </a:solidFill>
+            <a:prstDash val="solid"/>
+          </a:ln>
+        </p:spPr>
+      </p:sp>
+      <p:sp>
+        <p:nvSpPr>
+          <p:cNvPr id="15" name="Text 13"/>
+          <p:cNvSpPr/>
+          <p:nvPr/>
+        </p:nvSpPr>
+        <p:spPr>
+          <a:xfrm>
+            <a:off x="7909560" y="3099816"/>
+            <a:ext cx="2926080" cy="256032"/>
+          </a:xfrm>
+          <a:prstGeom prst="rect">
+            <a:avLst/>
+          </a:prstGeom>
+          <a:noFill/>
+          <a:ln/>
+        </p:spPr>
+        <p:txBody>
+          <a:bodyPr wrap="square" lIns="0" tIns="0" rIns="0" bIns="0" rtlCol="0" anchor="ctr"/>
+          <a:lstStyle/>
+          <a:p>
+            <a:pPr algn="ctr" indent="0" marL="0">
+              <a:buNone/>
+            </a:pPr>
+            <a:r>
+              <a:rPr lang="en-US" sz="1500" b="1" dirty="0">
+                <a:solidFill>
+                  <a:srgbClr val="003A63"/>
+                </a:solidFill>
+                <a:latin typeface="Aptos" pitchFamily="34" charset="0"/>
+                <a:ea typeface="Aptos" pitchFamily="34" charset="-122"/>
+                <a:cs typeface="Aptos" pitchFamily="34" charset="-120"/>
+              </a:rPr>
+              <a:t>Risk</a:t>
+            </a:r>
+            <a:endParaRPr lang="en-US" sz="1500" dirty="0"/>
+          </a:p>
+        </p:txBody>
+      </p:sp>
+      <p:sp>
+        <p:nvSpPr>
+          <p:cNvPr id="16" name="Shape 14"/>
+          <p:cNvSpPr/>
+          <p:nvPr/>
+        </p:nvSpPr>
+        <p:spPr>
+          <a:xfrm>
+            <a:off x="8366760" y="3639312"/>
+            <a:ext cx="2011680" cy="0"/>
+          </a:xfrm>
+          <a:prstGeom prst="line">
+            <a:avLst/>
+          </a:prstGeom>
+          <a:noFill/>
+          <a:ln w="63500">
+            <a:solidFill>
+              <a:srgbClr val="2F8A28"/>
+            </a:solidFill>
+            <a:prstDash val="solid"/>
+          </a:ln>
+        </p:spPr>
+      </p:sp>
+      <p:sp>
+        <p:nvSpPr>
+          <p:cNvPr id="17" name="Text 15"/>
+          <p:cNvSpPr/>
+          <p:nvPr/>
+        </p:nvSpPr>
+        <p:spPr>
+          <a:xfrm>
+            <a:off x="7909560" y="3849624"/>
+            <a:ext cx="2926080" cy="164592"/>
+          </a:xfrm>
+          <a:prstGeom prst="rect">
+            <a:avLst/>
+          </a:prstGeom>
+          <a:noFill/>
+          <a:ln/>
+        </p:spPr>
+        <p:txBody>
+          <a:bodyPr wrap="square" lIns="0" tIns="0" rIns="0" bIns="0" rtlCol="0" anchor="ctr"/>
+          <a:lstStyle/>
+          <a:p>
+            <a:pPr algn="ctr" indent="0" marL="0">
+              <a:buNone/>
+            </a:pPr>
+            <a:r>
+              <a:rPr lang="en-US" sz="900" dirty="0">
+                <a:solidFill>
+                  <a:srgbClr val="003A63"/>
+                </a:solidFill>
+                <a:latin typeface="Aptos" pitchFamily="34" charset="0"/>
+                <a:ea typeface="Aptos" pitchFamily="34" charset="-122"/>
+                <a:cs typeface="Aptos" pitchFamily="34" charset="-120"/>
+              </a:rPr>
+              <a:t>Human review</a:t>
+            </a:r>
+            <a:endParaRPr lang="en-US" sz="900" dirty="0"/>
+          </a:p>
+        </p:txBody>
+      </p:sp>
+      <p:sp>
+        <p:nvSpPr>
+          <p:cNvPr id="18" name="Shape 16"/>
+          <p:cNvSpPr/>
+          <p:nvPr/>
+        </p:nvSpPr>
+        <p:spPr>
+          <a:xfrm>
+            <a:off x="7635240" y="4498848"/>
+            <a:ext cx="3474720" cy="1143000"/>
+          </a:xfrm>
+          <a:prstGeom prst="roundRect">
+            <a:avLst>
+              <a:gd name="adj" fmla="val 9600"/>
             </a:avLst>
           </a:prstGeom>
           <a:solidFill>
@@ -15425,14 +17042,14 @@
       </p:sp>
       <p:sp>
         <p:nvSpPr>
-          <p:cNvPr id="16" name="Text 14"/>
-          <p:cNvSpPr/>
-          <p:nvPr/>
-        </p:nvSpPr>
-        <p:spPr>
-          <a:xfrm>
-            <a:off x="8074152" y="3666744"/>
-            <a:ext cx="2825496" cy="256032"/>
+          <p:cNvPr id="19" name="Text 17"/>
+          <p:cNvSpPr/>
+          <p:nvPr/>
+        </p:nvSpPr>
+        <p:spPr>
+          <a:xfrm>
+            <a:off x="7799832" y="4645152"/>
+            <a:ext cx="3145536" cy="256032"/>
           </a:xfrm>
           <a:prstGeom prst="rect">
             <a:avLst/>
@@ -15456,7 +17073,7 @@
                 <a:ea typeface="Aptos" pitchFamily="34" charset="-122"/>
                 <a:cs typeface="Aptos" pitchFamily="34" charset="-120"/>
               </a:rPr>
-              <a:t>Use this for</a:t>
+              <a:t>Safeguard to plan</a:t>
             </a:r>
             <a:endParaRPr lang="en-US" sz="1300" dirty="0"/>
           </a:p>
@@ -15464,14 +17081,14 @@
       </p:sp>
       <p:sp>
         <p:nvSpPr>
-          <p:cNvPr id="17" name="Text 15"/>
-          <p:cNvSpPr/>
-          <p:nvPr/>
-        </p:nvSpPr>
-        <p:spPr>
-          <a:xfrm>
-            <a:off x="8074152" y="4023360"/>
-            <a:ext cx="2825496" cy="1097280"/>
+          <p:cNvPr id="20" name="Text 18"/>
+          <p:cNvSpPr/>
+          <p:nvPr/>
+        </p:nvSpPr>
+        <p:spPr>
+          <a:xfrm>
+            <a:off x="7799832" y="5001768"/>
+            <a:ext cx="3145536" cy="502920"/>
           </a:xfrm>
           <a:prstGeom prst="rect">
             <a:avLst/>
@@ -15497,7 +17114,7 @@
                 <a:ea typeface="Aptos" pitchFamily="34" charset="-122"/>
                 <a:cs typeface="Aptos" pitchFamily="34" charset="-120"/>
               </a:rPr>
-              <a:t>Connect the concept to public health decisions, safeguards, documentation, or implementation work.</a:t>
+              <a:t>Identify what could go wrong, who could be affected, what safeguards are needed, and what evidence should be reviewed before use expands.</a:t>
             </a:r>
             <a:endParaRPr lang="en-US" sz="1550" dirty="0"/>
           </a:p>
@@ -15671,8 +17288,8 @@
         </p:nvSpPr>
         <p:spPr>
           <a:xfrm>
-            <a:off x="9966960" y="6537960"/>
-            <a:ext cx="1645920" cy="201168"/>
+            <a:off x="9646920" y="6537960"/>
+            <a:ext cx="1965960" cy="201168"/>
           </a:xfrm>
           <a:prstGeom prst="rect">
             <a:avLst/>
@@ -15696,7 +17313,7 @@
                 <a:ea typeface="Aptos" pitchFamily="34" charset="-122"/>
                 <a:cs typeface="Aptos" pitchFamily="34" charset="-120"/>
               </a:rPr>
-              <a:t>Â© Paula Soper</a:t>
+              <a:t>Copyright Paula Soper</a:t>
             </a:r>
             <a:endParaRPr lang="en-US" sz="800" dirty="0"/>
           </a:p>
@@ -15743,77 +17360,13 @@
       </p:sp>
       <p:sp>
         <p:nvSpPr>
-          <p:cNvPr id="8" name="Shape 6"/>
+          <p:cNvPr id="8" name="Text 6"/>
           <p:cNvSpPr/>
           <p:nvPr/>
         </p:nvSpPr>
         <p:spPr>
           <a:xfrm>
             <a:off x="640080" y="658368"/>
-            <a:ext cx="420624" cy="420624"/>
-          </a:xfrm>
-          <a:prstGeom prst="ellipse">
-            <a:avLst/>
-          </a:prstGeom>
-          <a:solidFill>
-            <a:srgbClr val="0068B7"/>
-          </a:solidFill>
-          <a:ln w="12700">
-            <a:solidFill>
-              <a:srgbClr val="0068B7"/>
-            </a:solidFill>
-            <a:prstDash val="solid"/>
-          </a:ln>
-        </p:spPr>
-      </p:sp>
-      <p:sp>
-        <p:nvSpPr>
-          <p:cNvPr id="9" name="Text 7"/>
-          <p:cNvSpPr/>
-          <p:nvPr/>
-        </p:nvSpPr>
-        <p:spPr>
-          <a:xfrm>
-            <a:off x="640080" y="731520"/>
-            <a:ext cx="420624" cy="164592"/>
-          </a:xfrm>
-          <a:prstGeom prst="rect">
-            <a:avLst/>
-          </a:prstGeom>
-          <a:noFill/>
-          <a:ln/>
-        </p:spPr>
-        <p:txBody>
-          <a:bodyPr wrap="square" lIns="0" tIns="0" rIns="0" bIns="0" rtlCol="0" anchor="ctr"/>
-          <a:lstStyle/>
-          <a:p>
-            <a:pPr algn="ctr" indent="0" marL="0">
-              <a:buNone/>
-            </a:pPr>
-            <a:r>
-              <a:rPr lang="en-US" sz="1100" b="1" dirty="0">
-                <a:solidFill>
-                  <a:srgbClr val="FFFFFF"/>
-                </a:solidFill>
-                <a:latin typeface="Aptos" pitchFamily="34" charset="0"/>
-                <a:ea typeface="Aptos" pitchFamily="34" charset="-122"/>
-                <a:cs typeface="Aptos" pitchFamily="34" charset="-120"/>
-              </a:rPr>
-              <a:t>4</a:t>
-            </a:r>
-            <a:endParaRPr lang="en-US" sz="1100" dirty="0"/>
-          </a:p>
-        </p:txBody>
-      </p:sp>
-      <p:sp>
-        <p:nvSpPr>
-          <p:cNvPr id="10" name="Text 8"/>
-          <p:cNvSpPr/>
-          <p:nvPr/>
-        </p:nvSpPr>
-        <p:spPr>
-          <a:xfrm>
-            <a:off x="640080" y="621792"/>
             <a:ext cx="10881360" cy="713232"/>
           </a:xfrm>
           <a:prstGeom prst="rect">
@@ -15848,14 +17401,14 @@
       </p:sp>
       <p:sp>
         <p:nvSpPr>
-          <p:cNvPr id="11" name="Text 9"/>
+          <p:cNvPr id="9" name="Text 7"/>
           <p:cNvSpPr/>
           <p:nvPr/>
         </p:nvSpPr>
         <p:spPr>
           <a:xfrm>
             <a:off x="868680" y="1508760"/>
-            <a:ext cx="6537960" cy="4160520"/>
+            <a:ext cx="6309360" cy="4160520"/>
           </a:xfrm>
           <a:prstGeom prst="rect">
             <a:avLst/>
@@ -15914,18 +17467,18 @@
       </p:sp>
       <p:sp>
         <p:nvSpPr>
-          <p:cNvPr id="12" name="Shape 10"/>
-          <p:cNvSpPr/>
-          <p:nvPr/>
-        </p:nvSpPr>
-        <p:spPr>
-          <a:xfrm>
-            <a:off x="7909560" y="1417320"/>
-            <a:ext cx="3154680" cy="1828800"/>
+          <p:cNvPr id="10" name="Shape 8"/>
+          <p:cNvSpPr/>
+          <p:nvPr/>
+        </p:nvSpPr>
+        <p:spPr>
+          <a:xfrm>
+            <a:off x="7635240" y="1325880"/>
+            <a:ext cx="3474720" cy="1325880"/>
           </a:xfrm>
           <a:prstGeom prst="roundRect">
             <a:avLst>
-              <a:gd name="adj" fmla="val 6000"/>
+              <a:gd name="adj" fmla="val 8276"/>
             </a:avLst>
           </a:prstGeom>
           <a:solidFill>
@@ -15941,14 +17494,14 @@
       </p:sp>
       <p:sp>
         <p:nvSpPr>
-          <p:cNvPr id="13" name="Text 11"/>
-          <p:cNvSpPr/>
-          <p:nvPr/>
-        </p:nvSpPr>
-        <p:spPr>
-          <a:xfrm>
-            <a:off x="8074152" y="1563624"/>
-            <a:ext cx="2825496" cy="256032"/>
+          <p:cNvPr id="11" name="Text 9"/>
+          <p:cNvSpPr/>
+          <p:nvPr/>
+        </p:nvSpPr>
+        <p:spPr>
+          <a:xfrm>
+            <a:off x="7799832" y="1472184"/>
+            <a:ext cx="3145536" cy="256032"/>
           </a:xfrm>
           <a:prstGeom prst="rect">
             <a:avLst/>
@@ -15972,7 +17525,7 @@
                 <a:ea typeface="Aptos" pitchFamily="34" charset="-122"/>
                 <a:cs typeface="Aptos" pitchFamily="34" charset="-120"/>
               </a:rPr>
-              <a:t>Key idea</a:t>
+              <a:t>Risk check</a:t>
             </a:r>
             <a:endParaRPr lang="en-US" sz="1300" dirty="0"/>
           </a:p>
@@ -15980,14 +17533,14 @@
       </p:sp>
       <p:sp>
         <p:nvSpPr>
-          <p:cNvPr id="14" name="Text 12"/>
-          <p:cNvSpPr/>
-          <p:nvPr/>
-        </p:nvSpPr>
-        <p:spPr>
-          <a:xfrm>
-            <a:off x="8074152" y="1920240"/>
-            <a:ext cx="2825496" cy="1188720"/>
+          <p:cNvPr id="12" name="Text 10"/>
+          <p:cNvSpPr/>
+          <p:nvPr/>
+        </p:nvSpPr>
+        <p:spPr>
+          <a:xfrm>
+            <a:off x="7799832" y="1828800"/>
+            <a:ext cx="3145536" cy="685800"/>
           </a:xfrm>
           <a:prstGeom prst="rect">
             <a:avLst/>
@@ -16021,18 +17574,171 @@
       </p:sp>
       <p:sp>
         <p:nvSpPr>
-          <p:cNvPr id="15" name="Shape 13"/>
-          <p:cNvSpPr/>
-          <p:nvPr/>
-        </p:nvSpPr>
-        <p:spPr>
-          <a:xfrm>
-            <a:off x="7909560" y="3520440"/>
-            <a:ext cx="3154680" cy="1737360"/>
+          <p:cNvPr id="13" name="Shape 11"/>
+          <p:cNvSpPr/>
+          <p:nvPr/>
+        </p:nvSpPr>
+        <p:spPr>
+          <a:xfrm>
+            <a:off x="7635240" y="2788920"/>
+            <a:ext cx="3474720" cy="1536192"/>
           </a:xfrm>
           <a:prstGeom prst="roundRect">
             <a:avLst>
-              <a:gd name="adj" fmla="val 6316"/>
+              <a:gd name="adj" fmla="val 7143"/>
+            </a:avLst>
+          </a:prstGeom>
+          <a:solidFill>
+            <a:srgbClr val="FFFFFF">
+              <a:alpha val="88000"/>
+            </a:srgbClr>
+          </a:solidFill>
+          <a:ln w="12700">
+            <a:solidFill>
+              <a:srgbClr val="D6E8F2"/>
+            </a:solidFill>
+            <a:prstDash val="solid"/>
+          </a:ln>
+        </p:spPr>
+      </p:sp>
+      <p:sp>
+        <p:nvSpPr>
+          <p:cNvPr id="14" name="Shape 12"/>
+          <p:cNvSpPr/>
+          <p:nvPr/>
+        </p:nvSpPr>
+        <p:spPr>
+          <a:xfrm>
+            <a:off x="8046720" y="3108960"/>
+            <a:ext cx="2651760" cy="896112"/>
+          </a:xfrm>
+          <a:prstGeom prst="arc">
+            <a:avLst/>
+          </a:prstGeom>
+          <a:noFill/>
+          <a:ln w="25400">
+            <a:solidFill>
+              <a:srgbClr val="0068B7"/>
+            </a:solidFill>
+            <a:prstDash val="solid"/>
+          </a:ln>
+        </p:spPr>
+      </p:sp>
+      <p:sp>
+        <p:nvSpPr>
+          <p:cNvPr id="15" name="Text 13"/>
+          <p:cNvSpPr/>
+          <p:nvPr/>
+        </p:nvSpPr>
+        <p:spPr>
+          <a:xfrm>
+            <a:off x="7909560" y="3099816"/>
+            <a:ext cx="2926080" cy="256032"/>
+          </a:xfrm>
+          <a:prstGeom prst="rect">
+            <a:avLst/>
+          </a:prstGeom>
+          <a:noFill/>
+          <a:ln/>
+        </p:spPr>
+        <p:txBody>
+          <a:bodyPr wrap="square" lIns="0" tIns="0" rIns="0" bIns="0" rtlCol="0" anchor="ctr"/>
+          <a:lstStyle/>
+          <a:p>
+            <a:pPr algn="ctr" indent="0" marL="0">
+              <a:buNone/>
+            </a:pPr>
+            <a:r>
+              <a:rPr lang="en-US" sz="1500" b="1" dirty="0">
+                <a:solidFill>
+                  <a:srgbClr val="003A63"/>
+                </a:solidFill>
+                <a:latin typeface="Aptos" pitchFamily="34" charset="0"/>
+                <a:ea typeface="Aptos" pitchFamily="34" charset="-122"/>
+                <a:cs typeface="Aptos" pitchFamily="34" charset="-120"/>
+              </a:rPr>
+              <a:t>Risk</a:t>
+            </a:r>
+            <a:endParaRPr lang="en-US" sz="1500" dirty="0"/>
+          </a:p>
+        </p:txBody>
+      </p:sp>
+      <p:sp>
+        <p:nvSpPr>
+          <p:cNvPr id="16" name="Shape 14"/>
+          <p:cNvSpPr/>
+          <p:nvPr/>
+        </p:nvSpPr>
+        <p:spPr>
+          <a:xfrm>
+            <a:off x="8366760" y="3639312"/>
+            <a:ext cx="2011680" cy="0"/>
+          </a:xfrm>
+          <a:prstGeom prst="line">
+            <a:avLst/>
+          </a:prstGeom>
+          <a:noFill/>
+          <a:ln w="63500">
+            <a:solidFill>
+              <a:srgbClr val="2F8A28"/>
+            </a:solidFill>
+            <a:prstDash val="solid"/>
+          </a:ln>
+        </p:spPr>
+      </p:sp>
+      <p:sp>
+        <p:nvSpPr>
+          <p:cNvPr id="17" name="Text 15"/>
+          <p:cNvSpPr/>
+          <p:nvPr/>
+        </p:nvSpPr>
+        <p:spPr>
+          <a:xfrm>
+            <a:off x="7909560" y="3849624"/>
+            <a:ext cx="2926080" cy="164592"/>
+          </a:xfrm>
+          <a:prstGeom prst="rect">
+            <a:avLst/>
+          </a:prstGeom>
+          <a:noFill/>
+          <a:ln/>
+        </p:spPr>
+        <p:txBody>
+          <a:bodyPr wrap="square" lIns="0" tIns="0" rIns="0" bIns="0" rtlCol="0" anchor="ctr"/>
+          <a:lstStyle/>
+          <a:p>
+            <a:pPr algn="ctr" indent="0" marL="0">
+              <a:buNone/>
+            </a:pPr>
+            <a:r>
+              <a:rPr lang="en-US" sz="900" dirty="0">
+                <a:solidFill>
+                  <a:srgbClr val="003A63"/>
+                </a:solidFill>
+                <a:latin typeface="Aptos" pitchFamily="34" charset="0"/>
+                <a:ea typeface="Aptos" pitchFamily="34" charset="-122"/>
+                <a:cs typeface="Aptos" pitchFamily="34" charset="-120"/>
+              </a:rPr>
+              <a:t>Human review</a:t>
+            </a:r>
+            <a:endParaRPr lang="en-US" sz="900" dirty="0"/>
+          </a:p>
+        </p:txBody>
+      </p:sp>
+      <p:sp>
+        <p:nvSpPr>
+          <p:cNvPr id="18" name="Shape 16"/>
+          <p:cNvSpPr/>
+          <p:nvPr/>
+        </p:nvSpPr>
+        <p:spPr>
+          <a:xfrm>
+            <a:off x="7635240" y="4498848"/>
+            <a:ext cx="3474720" cy="1143000"/>
+          </a:xfrm>
+          <a:prstGeom prst="roundRect">
+            <a:avLst>
+              <a:gd name="adj" fmla="val 9600"/>
             </a:avLst>
           </a:prstGeom>
           <a:solidFill>
@@ -16048,14 +17754,14 @@
       </p:sp>
       <p:sp>
         <p:nvSpPr>
-          <p:cNvPr id="16" name="Text 14"/>
-          <p:cNvSpPr/>
-          <p:nvPr/>
-        </p:nvSpPr>
-        <p:spPr>
-          <a:xfrm>
-            <a:off x="8074152" y="3666744"/>
-            <a:ext cx="2825496" cy="256032"/>
+          <p:cNvPr id="19" name="Text 17"/>
+          <p:cNvSpPr/>
+          <p:nvPr/>
+        </p:nvSpPr>
+        <p:spPr>
+          <a:xfrm>
+            <a:off x="7799832" y="4645152"/>
+            <a:ext cx="3145536" cy="256032"/>
           </a:xfrm>
           <a:prstGeom prst="rect">
             <a:avLst/>
@@ -16079,7 +17785,7 @@
                 <a:ea typeface="Aptos" pitchFamily="34" charset="-122"/>
                 <a:cs typeface="Aptos" pitchFamily="34" charset="-120"/>
               </a:rPr>
-              <a:t>Use this for</a:t>
+              <a:t>Safeguard to plan</a:t>
             </a:r>
             <a:endParaRPr lang="en-US" sz="1300" dirty="0"/>
           </a:p>
@@ -16087,14 +17793,14 @@
       </p:sp>
       <p:sp>
         <p:nvSpPr>
-          <p:cNvPr id="17" name="Text 15"/>
-          <p:cNvSpPr/>
-          <p:nvPr/>
-        </p:nvSpPr>
-        <p:spPr>
-          <a:xfrm>
-            <a:off x="8074152" y="4023360"/>
-            <a:ext cx="2825496" cy="1097280"/>
+          <p:cNvPr id="20" name="Text 18"/>
+          <p:cNvSpPr/>
+          <p:nvPr/>
+        </p:nvSpPr>
+        <p:spPr>
+          <a:xfrm>
+            <a:off x="7799832" y="5001768"/>
+            <a:ext cx="3145536" cy="502920"/>
           </a:xfrm>
           <a:prstGeom prst="rect">
             <a:avLst/>
@@ -16120,7 +17826,7 @@
                 <a:ea typeface="Aptos" pitchFamily="34" charset="-122"/>
                 <a:cs typeface="Aptos" pitchFamily="34" charset="-120"/>
               </a:rPr>
-              <a:t>Connect the concept to public health decisions, safeguards, documentation, or implementation work.</a:t>
+              <a:t>Identify what could go wrong, who could be affected, what safeguards are needed, and what evidence should be reviewed before use expands.</a:t>
             </a:r>
             <a:endParaRPr lang="en-US" sz="1550" dirty="0"/>
           </a:p>

--- a/downloads/presentations/modules/anl-300.pptx
+++ b/downloads/presentations/modules/anl-300.pptx
@@ -3525,13 +3525,11 @@
             </a:avLst>
           </a:prstGeom>
           <a:solidFill>
-            <a:srgbClr val="FFFFFF">
-              <a:alpha val="88000"/>
-            </a:srgbClr>
+            <a:srgbClr val="FFFFFF"/>
           </a:solidFill>
           <a:ln w="12700">
             <a:solidFill>
-              <a:srgbClr val="D6E8F2"/>
+              <a:srgbClr val="B9D7E6"/>
             </a:solidFill>
             <a:prstDash val="solid"/>
           </a:ln>
@@ -3539,26 +3537,42 @@
       </p:sp>
       <p:sp>
         <p:nvSpPr>
-          <p:cNvPr id="14" name="Shape 12"/>
-          <p:cNvSpPr/>
-          <p:nvPr/>
-        </p:nvSpPr>
-        <p:spPr>
-          <a:xfrm>
-            <a:off x="8046720" y="3108960"/>
-            <a:ext cx="2651760" cy="896112"/>
-          </a:xfrm>
-          <a:prstGeom prst="arc">
-            <a:avLst/>
-          </a:prstGeom>
-          <a:noFill/>
-          <a:ln w="25400">
-            <a:solidFill>
-              <a:srgbClr val="0068B7"/>
-            </a:solidFill>
-            <a:prstDash val="solid"/>
-          </a:ln>
-        </p:spPr>
+          <p:cNvPr id="14" name="Text 12"/>
+          <p:cNvSpPr/>
+          <p:nvPr/>
+        </p:nvSpPr>
+        <p:spPr>
+          <a:xfrm>
+            <a:off x="7799832" y="2935224"/>
+            <a:ext cx="3145536" cy="256032"/>
+          </a:xfrm>
+          <a:prstGeom prst="rect">
+            <a:avLst/>
+          </a:prstGeom>
+          <a:noFill/>
+          <a:ln/>
+        </p:spPr>
+        <p:txBody>
+          <a:bodyPr wrap="square" lIns="0" tIns="0" rIns="0" bIns="0" rtlCol="0" anchor="ctr"/>
+          <a:lstStyle/>
+          <a:p>
+            <a:pPr indent="0" marL="0">
+              <a:buNone/>
+            </a:pPr>
+            <a:r>
+              <a:rPr lang="en-US" sz="1300" b="1" dirty="0">
+                <a:solidFill>
+                  <a:srgbClr val="0068B7"/>
+                </a:solidFill>
+                <a:latin typeface="Aptos" pitchFamily="34" charset="0"/>
+                <a:ea typeface="Aptos" pitchFamily="34" charset="-122"/>
+                <a:cs typeface="Aptos" pitchFamily="34" charset="-120"/>
+              </a:rPr>
+              <a:t>Concept checkpoints</a:t>
+            </a:r>
+            <a:endParaRPr lang="en-US" sz="1300" dirty="0"/>
+          </a:p>
+        </p:txBody>
       </p:sp>
       <p:sp>
         <p:nvSpPr>
@@ -3568,102 +3582,67 @@
         </p:nvSpPr>
         <p:spPr>
           <a:xfrm>
-            <a:off x="7909560" y="3099816"/>
-            <a:ext cx="2926080" cy="256032"/>
-          </a:xfrm>
-          <a:prstGeom prst="rect">
-            <a:avLst/>
-          </a:prstGeom>
-          <a:noFill/>
-          <a:ln/>
-        </p:spPr>
-        <p:txBody>
-          <a:bodyPr wrap="square" lIns="0" tIns="0" rIns="0" bIns="0" rtlCol="0" anchor="ctr"/>
-          <a:lstStyle/>
-          <a:p>
-            <a:pPr algn="ctr" indent="0" marL="0">
-              <a:buNone/>
-            </a:pPr>
-            <a:r>
-              <a:rPr lang="en-US" sz="1500" b="1" dirty="0">
-                <a:solidFill>
-                  <a:srgbClr val="003A63"/>
-                </a:solidFill>
-                <a:latin typeface="Aptos" pitchFamily="34" charset="0"/>
-                <a:ea typeface="Aptos" pitchFamily="34" charset="-122"/>
-                <a:cs typeface="Aptos" pitchFamily="34" charset="-120"/>
-              </a:rPr>
-              <a:t>Risk</a:t>
-            </a:r>
-            <a:endParaRPr lang="en-US" sz="1500" dirty="0"/>
+            <a:off x="7818120" y="3300984"/>
+            <a:ext cx="3090672" cy="877824"/>
+          </a:xfrm>
+          <a:prstGeom prst="rect">
+            <a:avLst/>
+          </a:prstGeom>
+          <a:noFill/>
+          <a:ln/>
+        </p:spPr>
+        <p:txBody>
+          <a:bodyPr wrap="square" lIns="254" tIns="254" rIns="254" bIns="254" rtlCol="0" anchor="t">
+            <a:normAutofit/>
+          </a:bodyPr>
+          <a:lstStyle/>
+          <a:p>
+            <a:r>
+              <a:rPr lang="en-US" sz="1380" dirty="0">
+                <a:solidFill>
+                  <a:srgbClr val="17364A"/>
+                </a:solidFill>
+                <a:latin typeface="Aptos" pitchFamily="34" charset="0"/>
+                <a:ea typeface="Aptos" pitchFamily="34" charset="-122"/>
+                <a:cs typeface="Aptos" pitchFamily="34" charset="-120"/>
+              </a:rPr>
+              <a:t>Specificity may be prioritized when false positives create substantial burden or.</a:t>
+            </a:r>
+            <a:endParaRPr lang="en-US" sz="1380" dirty="0"/>
+          </a:p>
+          <a:p>
+            <a:r>
+              <a:rPr lang="en-US" sz="1380" dirty="0">
+                <a:solidFill>
+                  <a:srgbClr val="17364A"/>
+                </a:solidFill>
+                <a:latin typeface="Aptos" pitchFamily="34" charset="0"/>
+                <a:ea typeface="Aptos" pitchFamily="34" charset="-122"/>
+                <a:cs typeface="Aptos" pitchFamily="34" charset="-120"/>
+              </a:rPr>
+              <a:t>Precision and positive predictive value matter when staff act on positive flags.</a:t>
+            </a:r>
+            <a:endParaRPr lang="en-US" sz="1380" dirty="0"/>
+          </a:p>
+          <a:p>
+            <a:r>
+              <a:rPr lang="en-US" sz="1380" dirty="0">
+                <a:solidFill>
+                  <a:srgbClr val="17364A"/>
+                </a:solidFill>
+                <a:latin typeface="Aptos" pitchFamily="34" charset="0"/>
+                <a:ea typeface="Aptos" pitchFamily="34" charset="-122"/>
+                <a:cs typeface="Aptos" pitchFamily="34" charset="-120"/>
+              </a:rPr>
+              <a:t>Calibration matters when scores are interpreted as probabilities.</a:t>
+            </a:r>
+            <a:endParaRPr lang="en-US" sz="1380" dirty="0"/>
           </a:p>
         </p:txBody>
       </p:sp>
       <p:sp>
         <p:nvSpPr>
           <p:cNvPr id="16" name="Shape 14"/>
-          <p:cNvSpPr/>
-          <p:nvPr/>
-        </p:nvSpPr>
-        <p:spPr>
-          <a:xfrm>
-            <a:off x="8366760" y="3639312"/>
-            <a:ext cx="2011680" cy="0"/>
-          </a:xfrm>
-          <a:prstGeom prst="line">
-            <a:avLst/>
-          </a:prstGeom>
-          <a:noFill/>
-          <a:ln w="63500">
-            <a:solidFill>
-              <a:srgbClr val="2F8A28"/>
-            </a:solidFill>
-            <a:prstDash val="solid"/>
-          </a:ln>
-        </p:spPr>
-      </p:sp>
-      <p:sp>
-        <p:nvSpPr>
-          <p:cNvPr id="17" name="Text 15"/>
-          <p:cNvSpPr/>
-          <p:nvPr/>
-        </p:nvSpPr>
-        <p:spPr>
-          <a:xfrm>
-            <a:off x="7909560" y="3849624"/>
-            <a:ext cx="2926080" cy="164592"/>
-          </a:xfrm>
-          <a:prstGeom prst="rect">
-            <a:avLst/>
-          </a:prstGeom>
-          <a:noFill/>
-          <a:ln/>
-        </p:spPr>
-        <p:txBody>
-          <a:bodyPr wrap="square" lIns="0" tIns="0" rIns="0" bIns="0" rtlCol="0" anchor="ctr"/>
-          <a:lstStyle/>
-          <a:p>
-            <a:pPr algn="ctr" indent="0" marL="0">
-              <a:buNone/>
-            </a:pPr>
-            <a:r>
-              <a:rPr lang="en-US" sz="900" dirty="0">
-                <a:solidFill>
-                  <a:srgbClr val="003A63"/>
-                </a:solidFill>
-                <a:latin typeface="Aptos" pitchFamily="34" charset="0"/>
-                <a:ea typeface="Aptos" pitchFamily="34" charset="-122"/>
-                <a:cs typeface="Aptos" pitchFamily="34" charset="-120"/>
-              </a:rPr>
-              <a:t>Human review</a:t>
-            </a:r>
-            <a:endParaRPr lang="en-US" sz="900" dirty="0"/>
-          </a:p>
-        </p:txBody>
-      </p:sp>
-      <p:sp>
-        <p:nvSpPr>
-          <p:cNvPr id="18" name="Shape 16"/>
           <p:cNvSpPr/>
           <p:nvPr/>
         </p:nvSpPr>
@@ -3690,7 +3669,7 @@
       </p:sp>
       <p:sp>
         <p:nvSpPr>
-          <p:cNvPr id="19" name="Text 17"/>
+          <p:cNvPr id="17" name="Text 15"/>
           <p:cNvSpPr/>
           <p:nvPr/>
         </p:nvSpPr>
@@ -3729,7 +3708,7 @@
       </p:sp>
       <p:sp>
         <p:nvSpPr>
-          <p:cNvPr id="20" name="Text 18"/>
+          <p:cNvPr id="18" name="Text 16"/>
           <p:cNvSpPr/>
           <p:nvPr/>
         </p:nvSpPr>
@@ -4237,13 +4216,11 @@
             </a:avLst>
           </a:prstGeom>
           <a:solidFill>
-            <a:srgbClr val="FFFFFF">
-              <a:alpha val="88000"/>
-            </a:srgbClr>
+            <a:srgbClr val="FFFFFF"/>
           </a:solidFill>
           <a:ln w="12700">
             <a:solidFill>
-              <a:srgbClr val="D6E8F2"/>
+              <a:srgbClr val="B9D7E6"/>
             </a:solidFill>
             <a:prstDash val="solid"/>
           </a:ln>
@@ -4251,26 +4228,42 @@
       </p:sp>
       <p:sp>
         <p:nvSpPr>
-          <p:cNvPr id="14" name="Shape 12"/>
-          <p:cNvSpPr/>
-          <p:nvPr/>
-        </p:nvSpPr>
-        <p:spPr>
-          <a:xfrm>
-            <a:off x="8046720" y="3108960"/>
-            <a:ext cx="2651760" cy="896112"/>
-          </a:xfrm>
-          <a:prstGeom prst="arc">
-            <a:avLst/>
-          </a:prstGeom>
-          <a:noFill/>
-          <a:ln w="25400">
-            <a:solidFill>
-              <a:srgbClr val="0068B7"/>
-            </a:solidFill>
-            <a:prstDash val="solid"/>
-          </a:ln>
-        </p:spPr>
+          <p:cNvPr id="14" name="Text 12"/>
+          <p:cNvSpPr/>
+          <p:nvPr/>
+        </p:nvSpPr>
+        <p:spPr>
+          <a:xfrm>
+            <a:off x="7799832" y="2935224"/>
+            <a:ext cx="3145536" cy="256032"/>
+          </a:xfrm>
+          <a:prstGeom prst="rect">
+            <a:avLst/>
+          </a:prstGeom>
+          <a:noFill/>
+          <a:ln/>
+        </p:spPr>
+        <p:txBody>
+          <a:bodyPr wrap="square" lIns="0" tIns="0" rIns="0" bIns="0" rtlCol="0" anchor="ctr"/>
+          <a:lstStyle/>
+          <a:p>
+            <a:pPr indent="0" marL="0">
+              <a:buNone/>
+            </a:pPr>
+            <a:r>
+              <a:rPr lang="en-US" sz="1300" b="1" dirty="0">
+                <a:solidFill>
+                  <a:srgbClr val="0068B7"/>
+                </a:solidFill>
+                <a:latin typeface="Aptos" pitchFamily="34" charset="0"/>
+                <a:ea typeface="Aptos" pitchFamily="34" charset="-122"/>
+                <a:cs typeface="Aptos" pitchFamily="34" charset="-120"/>
+              </a:rPr>
+              <a:t>Concept checkpoints</a:t>
+            </a:r>
+            <a:endParaRPr lang="en-US" sz="1300" dirty="0"/>
+          </a:p>
+        </p:txBody>
       </p:sp>
       <p:sp>
         <p:nvSpPr>
@@ -4280,102 +4273,67 @@
         </p:nvSpPr>
         <p:spPr>
           <a:xfrm>
-            <a:off x="7909560" y="3099816"/>
-            <a:ext cx="2926080" cy="256032"/>
-          </a:xfrm>
-          <a:prstGeom prst="rect">
-            <a:avLst/>
-          </a:prstGeom>
-          <a:noFill/>
-          <a:ln/>
-        </p:spPr>
-        <p:txBody>
-          <a:bodyPr wrap="square" lIns="0" tIns="0" rIns="0" bIns="0" rtlCol="0" anchor="ctr"/>
-          <a:lstStyle/>
-          <a:p>
-            <a:pPr algn="ctr" indent="0" marL="0">
-              <a:buNone/>
-            </a:pPr>
-            <a:r>
-              <a:rPr lang="en-US" sz="1500" b="1" dirty="0">
-                <a:solidFill>
-                  <a:srgbClr val="003A63"/>
-                </a:solidFill>
-                <a:latin typeface="Aptos" pitchFamily="34" charset="0"/>
-                <a:ea typeface="Aptos" pitchFamily="34" charset="-122"/>
-                <a:cs typeface="Aptos" pitchFamily="34" charset="-120"/>
-              </a:rPr>
-              <a:t>Risk</a:t>
-            </a:r>
-            <a:endParaRPr lang="en-US" sz="1500" dirty="0"/>
+            <a:off x="7818120" y="3300984"/>
+            <a:ext cx="3090672" cy="877824"/>
+          </a:xfrm>
+          <a:prstGeom prst="rect">
+            <a:avLst/>
+          </a:prstGeom>
+          <a:noFill/>
+          <a:ln/>
+        </p:spPr>
+        <p:txBody>
+          <a:bodyPr wrap="square" lIns="254" tIns="254" rIns="254" bIns="254" rtlCol="0" anchor="t">
+            <a:normAutofit/>
+          </a:bodyPr>
+          <a:lstStyle/>
+          <a:p>
+            <a:r>
+              <a:rPr lang="en-US" sz="1380" dirty="0">
+                <a:solidFill>
+                  <a:srgbClr val="17364A"/>
+                </a:solidFill>
+                <a:latin typeface="Aptos" pitchFamily="34" charset="0"/>
+                <a:ea typeface="Aptos" pitchFamily="34" charset="-122"/>
+                <a:cs typeface="Aptos" pitchFamily="34" charset="-120"/>
+              </a:rPr>
+              <a:t>Workflow validation examines whether the AI output is understandable, accessible, timely,.</a:t>
+            </a:r>
+            <a:endParaRPr lang="en-US" sz="1380" dirty="0"/>
+          </a:p>
+          <a:p>
+            <a:r>
+              <a:rPr lang="en-US" sz="1380" dirty="0">
+                <a:solidFill>
+                  <a:srgbClr val="17364A"/>
+                </a:solidFill>
+                <a:latin typeface="Aptos" pitchFamily="34" charset="0"/>
+                <a:ea typeface="Aptos" pitchFamily="34" charset="-122"/>
+                <a:cs typeface="Aptos" pitchFamily="34" charset="-120"/>
+              </a:rPr>
+              <a:t>A model can be statistically strong but operationally weak if staff do not trust it,.</a:t>
+            </a:r>
+            <a:endParaRPr lang="en-US" sz="1380" dirty="0"/>
+          </a:p>
+          <a:p>
+            <a:r>
+              <a:rPr lang="en-US" sz="1380" dirty="0">
+                <a:solidFill>
+                  <a:srgbClr val="17364A"/>
+                </a:solidFill>
+                <a:latin typeface="Aptos" pitchFamily="34" charset="0"/>
+                <a:ea typeface="Aptos" pitchFamily="34" charset="-122"/>
+                <a:cs typeface="Aptos" pitchFamily="34" charset="-120"/>
+              </a:rPr>
+              <a:t>Post-deployment validation should be planned before launch.</a:t>
+            </a:r>
+            <a:endParaRPr lang="en-US" sz="1380" dirty="0"/>
           </a:p>
         </p:txBody>
       </p:sp>
       <p:sp>
         <p:nvSpPr>
           <p:cNvPr id="16" name="Shape 14"/>
-          <p:cNvSpPr/>
-          <p:nvPr/>
-        </p:nvSpPr>
-        <p:spPr>
-          <a:xfrm>
-            <a:off x="8366760" y="3639312"/>
-            <a:ext cx="2011680" cy="0"/>
-          </a:xfrm>
-          <a:prstGeom prst="line">
-            <a:avLst/>
-          </a:prstGeom>
-          <a:noFill/>
-          <a:ln w="63500">
-            <a:solidFill>
-              <a:srgbClr val="2F8A28"/>
-            </a:solidFill>
-            <a:prstDash val="solid"/>
-          </a:ln>
-        </p:spPr>
-      </p:sp>
-      <p:sp>
-        <p:nvSpPr>
-          <p:cNvPr id="17" name="Text 15"/>
-          <p:cNvSpPr/>
-          <p:nvPr/>
-        </p:nvSpPr>
-        <p:spPr>
-          <a:xfrm>
-            <a:off x="7909560" y="3849624"/>
-            <a:ext cx="2926080" cy="164592"/>
-          </a:xfrm>
-          <a:prstGeom prst="rect">
-            <a:avLst/>
-          </a:prstGeom>
-          <a:noFill/>
-          <a:ln/>
-        </p:spPr>
-        <p:txBody>
-          <a:bodyPr wrap="square" lIns="0" tIns="0" rIns="0" bIns="0" rtlCol="0" anchor="ctr"/>
-          <a:lstStyle/>
-          <a:p>
-            <a:pPr algn="ctr" indent="0" marL="0">
-              <a:buNone/>
-            </a:pPr>
-            <a:r>
-              <a:rPr lang="en-US" sz="900" dirty="0">
-                <a:solidFill>
-                  <a:srgbClr val="003A63"/>
-                </a:solidFill>
-                <a:latin typeface="Aptos" pitchFamily="34" charset="0"/>
-                <a:ea typeface="Aptos" pitchFamily="34" charset="-122"/>
-                <a:cs typeface="Aptos" pitchFamily="34" charset="-120"/>
-              </a:rPr>
-              <a:t>Human review</a:t>
-            </a:r>
-            <a:endParaRPr lang="en-US" sz="900" dirty="0"/>
-          </a:p>
-        </p:txBody>
-      </p:sp>
-      <p:sp>
-        <p:nvSpPr>
-          <p:cNvPr id="18" name="Shape 16"/>
           <p:cNvSpPr/>
           <p:nvPr/>
         </p:nvSpPr>
@@ -4402,7 +4360,7 @@
       </p:sp>
       <p:sp>
         <p:nvSpPr>
-          <p:cNvPr id="19" name="Text 17"/>
+          <p:cNvPr id="17" name="Text 15"/>
           <p:cNvSpPr/>
           <p:nvPr/>
         </p:nvSpPr>
@@ -4441,7 +4399,7 @@
       </p:sp>
       <p:sp>
         <p:nvSpPr>
-          <p:cNvPr id="20" name="Text 18"/>
+          <p:cNvPr id="18" name="Text 16"/>
           <p:cNvSpPr/>
           <p:nvPr/>
         </p:nvSpPr>
@@ -4949,13 +4907,11 @@
             </a:avLst>
           </a:prstGeom>
           <a:solidFill>
-            <a:srgbClr val="FFFFFF">
-              <a:alpha val="88000"/>
-            </a:srgbClr>
+            <a:srgbClr val="FFFFFF"/>
           </a:solidFill>
           <a:ln w="12700">
             <a:solidFill>
-              <a:srgbClr val="D6E8F2"/>
+              <a:srgbClr val="B9D7E6"/>
             </a:solidFill>
             <a:prstDash val="solid"/>
           </a:ln>
@@ -4963,26 +4919,42 @@
       </p:sp>
       <p:sp>
         <p:nvSpPr>
-          <p:cNvPr id="14" name="Shape 12"/>
-          <p:cNvSpPr/>
-          <p:nvPr/>
-        </p:nvSpPr>
-        <p:spPr>
-          <a:xfrm>
-            <a:off x="8046720" y="3108960"/>
-            <a:ext cx="2651760" cy="896112"/>
-          </a:xfrm>
-          <a:prstGeom prst="arc">
-            <a:avLst/>
-          </a:prstGeom>
-          <a:noFill/>
-          <a:ln w="25400">
-            <a:solidFill>
-              <a:srgbClr val="0068B7"/>
-            </a:solidFill>
-            <a:prstDash val="solid"/>
-          </a:ln>
-        </p:spPr>
+          <p:cNvPr id="14" name="Text 12"/>
+          <p:cNvSpPr/>
+          <p:nvPr/>
+        </p:nvSpPr>
+        <p:spPr>
+          <a:xfrm>
+            <a:off x="7799832" y="2935224"/>
+            <a:ext cx="3145536" cy="256032"/>
+          </a:xfrm>
+          <a:prstGeom prst="rect">
+            <a:avLst/>
+          </a:prstGeom>
+          <a:noFill/>
+          <a:ln/>
+        </p:spPr>
+        <p:txBody>
+          <a:bodyPr wrap="square" lIns="0" tIns="0" rIns="0" bIns="0" rtlCol="0" anchor="ctr"/>
+          <a:lstStyle/>
+          <a:p>
+            <a:pPr indent="0" marL="0">
+              <a:buNone/>
+            </a:pPr>
+            <a:r>
+              <a:rPr lang="en-US" sz="1300" b="1" dirty="0">
+                <a:solidFill>
+                  <a:srgbClr val="0068B7"/>
+                </a:solidFill>
+                <a:latin typeface="Aptos" pitchFamily="34" charset="0"/>
+                <a:ea typeface="Aptos" pitchFamily="34" charset="-122"/>
+                <a:cs typeface="Aptos" pitchFamily="34" charset="-120"/>
+              </a:rPr>
+              <a:t>Concept checkpoints</a:t>
+            </a:r>
+            <a:endParaRPr lang="en-US" sz="1300" dirty="0"/>
+          </a:p>
+        </p:txBody>
       </p:sp>
       <p:sp>
         <p:nvSpPr>
@@ -4992,102 +4964,67 @@
         </p:nvSpPr>
         <p:spPr>
           <a:xfrm>
-            <a:off x="7909560" y="3099816"/>
-            <a:ext cx="2926080" cy="256032"/>
-          </a:xfrm>
-          <a:prstGeom prst="rect">
-            <a:avLst/>
-          </a:prstGeom>
-          <a:noFill/>
-          <a:ln/>
-        </p:spPr>
-        <p:txBody>
-          <a:bodyPr wrap="square" lIns="0" tIns="0" rIns="0" bIns="0" rtlCol="0" anchor="ctr"/>
-          <a:lstStyle/>
-          <a:p>
-            <a:pPr algn="ctr" indent="0" marL="0">
-              <a:buNone/>
-            </a:pPr>
-            <a:r>
-              <a:rPr lang="en-US" sz="1500" b="1" dirty="0">
-                <a:solidFill>
-                  <a:srgbClr val="003A63"/>
-                </a:solidFill>
-                <a:latin typeface="Aptos" pitchFamily="34" charset="0"/>
-                <a:ea typeface="Aptos" pitchFamily="34" charset="-122"/>
-                <a:cs typeface="Aptos" pitchFamily="34" charset="-120"/>
-              </a:rPr>
-              <a:t>Risk</a:t>
-            </a:r>
-            <a:endParaRPr lang="en-US" sz="1500" dirty="0"/>
+            <a:off x="7818120" y="3300984"/>
+            <a:ext cx="3090672" cy="877824"/>
+          </a:xfrm>
+          <a:prstGeom prst="rect">
+            <a:avLst/>
+          </a:prstGeom>
+          <a:noFill/>
+          <a:ln/>
+        </p:spPr>
+        <p:txBody>
+          <a:bodyPr wrap="square" lIns="254" tIns="254" rIns="254" bIns="254" rtlCol="0" anchor="t">
+            <a:normAutofit/>
+          </a:bodyPr>
+          <a:lstStyle/>
+          <a:p>
+            <a:r>
+              <a:rPr lang="en-US" sz="1380" dirty="0">
+                <a:solidFill>
+                  <a:srgbClr val="17364A"/>
+                </a:solidFill>
+                <a:latin typeface="Aptos" pitchFamily="34" charset="0"/>
+                <a:ea typeface="Aptos" pitchFamily="34" charset="-122"/>
+                <a:cs typeface="Aptos" pitchFamily="34" charset="-120"/>
+              </a:rPr>
+              <a:t>Metric mismatch.</a:t>
+            </a:r>
+            <a:endParaRPr lang="en-US" sz="1380" dirty="0"/>
+          </a:p>
+          <a:p>
+            <a:r>
+              <a:rPr lang="en-US" sz="1380" dirty="0">
+                <a:solidFill>
+                  <a:srgbClr val="17364A"/>
+                </a:solidFill>
+                <a:latin typeface="Aptos" pitchFamily="34" charset="0"/>
+                <a:ea typeface="Aptos" pitchFamily="34" charset="-122"/>
+                <a:cs typeface="Aptos" pitchFamily="34" charset="-120"/>
+              </a:rPr>
+              <a:t>The selected metric may not match the public health consequence.</a:t>
+            </a:r>
+            <a:endParaRPr lang="en-US" sz="1380" dirty="0"/>
+          </a:p>
+          <a:p>
+            <a:r>
+              <a:rPr lang="en-US" sz="1380" dirty="0">
+                <a:solidFill>
+                  <a:srgbClr val="17364A"/>
+                </a:solidFill>
+                <a:latin typeface="Aptos" pitchFamily="34" charset="0"/>
+                <a:ea typeface="Aptos" pitchFamily="34" charset="-122"/>
+                <a:cs typeface="Aptos" pitchFamily="34" charset="-120"/>
+              </a:rPr>
+              <a:t>Guardrails include metric selection tied to intended use and error consequences.</a:t>
+            </a:r>
+            <a:endParaRPr lang="en-US" sz="1380" dirty="0"/>
           </a:p>
         </p:txBody>
       </p:sp>
       <p:sp>
         <p:nvSpPr>
           <p:cNvPr id="16" name="Shape 14"/>
-          <p:cNvSpPr/>
-          <p:nvPr/>
-        </p:nvSpPr>
-        <p:spPr>
-          <a:xfrm>
-            <a:off x="8366760" y="3639312"/>
-            <a:ext cx="2011680" cy="0"/>
-          </a:xfrm>
-          <a:prstGeom prst="line">
-            <a:avLst/>
-          </a:prstGeom>
-          <a:noFill/>
-          <a:ln w="63500">
-            <a:solidFill>
-              <a:srgbClr val="2F8A28"/>
-            </a:solidFill>
-            <a:prstDash val="solid"/>
-          </a:ln>
-        </p:spPr>
-      </p:sp>
-      <p:sp>
-        <p:nvSpPr>
-          <p:cNvPr id="17" name="Text 15"/>
-          <p:cNvSpPr/>
-          <p:nvPr/>
-        </p:nvSpPr>
-        <p:spPr>
-          <a:xfrm>
-            <a:off x="7909560" y="3849624"/>
-            <a:ext cx="2926080" cy="164592"/>
-          </a:xfrm>
-          <a:prstGeom prst="rect">
-            <a:avLst/>
-          </a:prstGeom>
-          <a:noFill/>
-          <a:ln/>
-        </p:spPr>
-        <p:txBody>
-          <a:bodyPr wrap="square" lIns="0" tIns="0" rIns="0" bIns="0" rtlCol="0" anchor="ctr"/>
-          <a:lstStyle/>
-          <a:p>
-            <a:pPr algn="ctr" indent="0" marL="0">
-              <a:buNone/>
-            </a:pPr>
-            <a:r>
-              <a:rPr lang="en-US" sz="900" dirty="0">
-                <a:solidFill>
-                  <a:srgbClr val="003A63"/>
-                </a:solidFill>
-                <a:latin typeface="Aptos" pitchFamily="34" charset="0"/>
-                <a:ea typeface="Aptos" pitchFamily="34" charset="-122"/>
-                <a:cs typeface="Aptos" pitchFamily="34" charset="-120"/>
-              </a:rPr>
-              <a:t>Human review</a:t>
-            </a:r>
-            <a:endParaRPr lang="en-US" sz="900" dirty="0"/>
-          </a:p>
-        </p:txBody>
-      </p:sp>
-      <p:sp>
-        <p:nvSpPr>
-          <p:cNvPr id="18" name="Shape 16"/>
           <p:cNvSpPr/>
           <p:nvPr/>
         </p:nvSpPr>
@@ -5114,7 +5051,7 @@
       </p:sp>
       <p:sp>
         <p:nvSpPr>
-          <p:cNvPr id="19" name="Text 17"/>
+          <p:cNvPr id="17" name="Text 15"/>
           <p:cNvSpPr/>
           <p:nvPr/>
         </p:nvSpPr>
@@ -5153,7 +5090,7 @@
       </p:sp>
       <p:sp>
         <p:nvSpPr>
-          <p:cNvPr id="20" name="Text 18"/>
+          <p:cNvPr id="18" name="Text 16"/>
           <p:cNvSpPr/>
           <p:nvPr/>
         </p:nvSpPr>
@@ -5661,13 +5598,11 @@
             </a:avLst>
           </a:prstGeom>
           <a:solidFill>
-            <a:srgbClr val="FFFFFF">
-              <a:alpha val="88000"/>
-            </a:srgbClr>
+            <a:srgbClr val="FFFFFF"/>
           </a:solidFill>
           <a:ln w="12700">
             <a:solidFill>
-              <a:srgbClr val="D6E8F2"/>
+              <a:srgbClr val="B9D7E6"/>
             </a:solidFill>
             <a:prstDash val="solid"/>
           </a:ln>
@@ -5675,26 +5610,42 @@
       </p:sp>
       <p:sp>
         <p:nvSpPr>
-          <p:cNvPr id="14" name="Shape 12"/>
-          <p:cNvSpPr/>
-          <p:nvPr/>
-        </p:nvSpPr>
-        <p:spPr>
-          <a:xfrm>
-            <a:off x="8046720" y="3108960"/>
-            <a:ext cx="2651760" cy="896112"/>
-          </a:xfrm>
-          <a:prstGeom prst="arc">
-            <a:avLst/>
-          </a:prstGeom>
-          <a:noFill/>
-          <a:ln w="25400">
-            <a:solidFill>
-              <a:srgbClr val="0068B7"/>
-            </a:solidFill>
-            <a:prstDash val="solid"/>
-          </a:ln>
-        </p:spPr>
+          <p:cNvPr id="14" name="Text 12"/>
+          <p:cNvSpPr/>
+          <p:nvPr/>
+        </p:nvSpPr>
+        <p:spPr>
+          <a:xfrm>
+            <a:off x="7799832" y="2935224"/>
+            <a:ext cx="3145536" cy="256032"/>
+          </a:xfrm>
+          <a:prstGeom prst="rect">
+            <a:avLst/>
+          </a:prstGeom>
+          <a:noFill/>
+          <a:ln/>
+        </p:spPr>
+        <p:txBody>
+          <a:bodyPr wrap="square" lIns="0" tIns="0" rIns="0" bIns="0" rtlCol="0" anchor="ctr"/>
+          <a:lstStyle/>
+          <a:p>
+            <a:pPr indent="0" marL="0">
+              <a:buNone/>
+            </a:pPr>
+            <a:r>
+              <a:rPr lang="en-US" sz="1300" b="1" dirty="0">
+                <a:solidFill>
+                  <a:srgbClr val="0068B7"/>
+                </a:solidFill>
+                <a:latin typeface="Aptos" pitchFamily="34" charset="0"/>
+                <a:ea typeface="Aptos" pitchFamily="34" charset="-122"/>
+                <a:cs typeface="Aptos" pitchFamily="34" charset="-120"/>
+              </a:rPr>
+              <a:t>Concept checkpoints</a:t>
+            </a:r>
+            <a:endParaRPr lang="en-US" sz="1300" dirty="0"/>
+          </a:p>
+        </p:txBody>
       </p:sp>
       <p:sp>
         <p:nvSpPr>
@@ -5704,102 +5655,67 @@
         </p:nvSpPr>
         <p:spPr>
           <a:xfrm>
-            <a:off x="7909560" y="3099816"/>
-            <a:ext cx="2926080" cy="256032"/>
-          </a:xfrm>
-          <a:prstGeom prst="rect">
-            <a:avLst/>
-          </a:prstGeom>
-          <a:noFill/>
-          <a:ln/>
-        </p:spPr>
-        <p:txBody>
-          <a:bodyPr wrap="square" lIns="0" tIns="0" rIns="0" bIns="0" rtlCol="0" anchor="ctr"/>
-          <a:lstStyle/>
-          <a:p>
-            <a:pPr algn="ctr" indent="0" marL="0">
-              <a:buNone/>
-            </a:pPr>
-            <a:r>
-              <a:rPr lang="en-US" sz="1500" b="1" dirty="0">
-                <a:solidFill>
-                  <a:srgbClr val="003A63"/>
-                </a:solidFill>
-                <a:latin typeface="Aptos" pitchFamily="34" charset="0"/>
-                <a:ea typeface="Aptos" pitchFamily="34" charset="-122"/>
-                <a:cs typeface="Aptos" pitchFamily="34" charset="-120"/>
-              </a:rPr>
-              <a:t>Risk</a:t>
-            </a:r>
-            <a:endParaRPr lang="en-US" sz="1500" dirty="0"/>
+            <a:off x="7818120" y="3300984"/>
+            <a:ext cx="3090672" cy="877824"/>
+          </a:xfrm>
+          <a:prstGeom prst="rect">
+            <a:avLst/>
+          </a:prstGeom>
+          <a:noFill/>
+          <a:ln/>
+        </p:spPr>
+        <p:txBody>
+          <a:bodyPr wrap="square" lIns="254" tIns="254" rIns="254" bIns="254" rtlCol="0" anchor="t">
+            <a:normAutofit/>
+          </a:bodyPr>
+          <a:lstStyle/>
+          <a:p>
+            <a:r>
+              <a:rPr lang="en-US" sz="1380" dirty="0">
+                <a:solidFill>
+                  <a:srgbClr val="17364A"/>
+                </a:solidFill>
+                <a:latin typeface="Aptos" pitchFamily="34" charset="0"/>
+                <a:ea typeface="Aptos" pitchFamily="34" charset="-122"/>
+                <a:cs typeface="Aptos" pitchFamily="34" charset="-120"/>
+              </a:rPr>
+              <a:t>Workflow failure.</a:t>
+            </a:r>
+            <a:endParaRPr lang="en-US" sz="1380" dirty="0"/>
+          </a:p>
+          <a:p>
+            <a:r>
+              <a:rPr lang="en-US" sz="1380" dirty="0">
+                <a:solidFill>
+                  <a:srgbClr val="17364A"/>
+                </a:solidFill>
+                <a:latin typeface="Aptos" pitchFamily="34" charset="0"/>
+                <a:ea typeface="Aptos" pitchFamily="34" charset="-122"/>
+                <a:cs typeface="Aptos" pitchFamily="34" charset="-120"/>
+              </a:rPr>
+              <a:t>A technically accurate model may be unusable or misused.</a:t>
+            </a:r>
+            <a:endParaRPr lang="en-US" sz="1380" dirty="0"/>
+          </a:p>
+          <a:p>
+            <a:r>
+              <a:rPr lang="en-US" sz="1380" dirty="0">
+                <a:solidFill>
+                  <a:srgbClr val="17364A"/>
+                </a:solidFill>
+                <a:latin typeface="Aptos" pitchFamily="34" charset="0"/>
+                <a:ea typeface="Aptos" pitchFamily="34" charset="-122"/>
+                <a:cs typeface="Aptos" pitchFamily="34" charset="-120"/>
+              </a:rPr>
+              <a:t>Guardrails include usability testing, training, source visibility, and override.</a:t>
+            </a:r>
+            <a:endParaRPr lang="en-US" sz="1380" dirty="0"/>
           </a:p>
         </p:txBody>
       </p:sp>
       <p:sp>
         <p:nvSpPr>
           <p:cNvPr id="16" name="Shape 14"/>
-          <p:cNvSpPr/>
-          <p:nvPr/>
-        </p:nvSpPr>
-        <p:spPr>
-          <a:xfrm>
-            <a:off x="8366760" y="3639312"/>
-            <a:ext cx="2011680" cy="0"/>
-          </a:xfrm>
-          <a:prstGeom prst="line">
-            <a:avLst/>
-          </a:prstGeom>
-          <a:noFill/>
-          <a:ln w="63500">
-            <a:solidFill>
-              <a:srgbClr val="2F8A28"/>
-            </a:solidFill>
-            <a:prstDash val="solid"/>
-          </a:ln>
-        </p:spPr>
-      </p:sp>
-      <p:sp>
-        <p:nvSpPr>
-          <p:cNvPr id="17" name="Text 15"/>
-          <p:cNvSpPr/>
-          <p:nvPr/>
-        </p:nvSpPr>
-        <p:spPr>
-          <a:xfrm>
-            <a:off x="7909560" y="3849624"/>
-            <a:ext cx="2926080" cy="164592"/>
-          </a:xfrm>
-          <a:prstGeom prst="rect">
-            <a:avLst/>
-          </a:prstGeom>
-          <a:noFill/>
-          <a:ln/>
-        </p:spPr>
-        <p:txBody>
-          <a:bodyPr wrap="square" lIns="0" tIns="0" rIns="0" bIns="0" rtlCol="0" anchor="ctr"/>
-          <a:lstStyle/>
-          <a:p>
-            <a:pPr algn="ctr" indent="0" marL="0">
-              <a:buNone/>
-            </a:pPr>
-            <a:r>
-              <a:rPr lang="en-US" sz="900" dirty="0">
-                <a:solidFill>
-                  <a:srgbClr val="003A63"/>
-                </a:solidFill>
-                <a:latin typeface="Aptos" pitchFamily="34" charset="0"/>
-                <a:ea typeface="Aptos" pitchFamily="34" charset="-122"/>
-                <a:cs typeface="Aptos" pitchFamily="34" charset="-120"/>
-              </a:rPr>
-              <a:t>Human review</a:t>
-            </a:r>
-            <a:endParaRPr lang="en-US" sz="900" dirty="0"/>
-          </a:p>
-        </p:txBody>
-      </p:sp>
-      <p:sp>
-        <p:nvSpPr>
-          <p:cNvPr id="18" name="Shape 16"/>
           <p:cNvSpPr/>
           <p:nvPr/>
         </p:nvSpPr>
@@ -5826,7 +5742,7 @@
       </p:sp>
       <p:sp>
         <p:nvSpPr>
-          <p:cNvPr id="19" name="Text 17"/>
+          <p:cNvPr id="17" name="Text 15"/>
           <p:cNvSpPr/>
           <p:nvPr/>
         </p:nvSpPr>
@@ -5865,7 +5781,7 @@
       </p:sp>
       <p:sp>
         <p:nvSpPr>
-          <p:cNvPr id="20" name="Text 18"/>
+          <p:cNvPr id="18" name="Text 16"/>
           <p:cNvSpPr/>
           <p:nvPr/>
         </p:nvSpPr>
@@ -6373,13 +6289,11 @@
             </a:avLst>
           </a:prstGeom>
           <a:solidFill>
-            <a:srgbClr val="FFFFFF">
-              <a:alpha val="88000"/>
-            </a:srgbClr>
+            <a:srgbClr val="FFFFFF"/>
           </a:solidFill>
           <a:ln w="12700">
             <a:solidFill>
-              <a:srgbClr val="D6E8F2"/>
+              <a:srgbClr val="B9D7E6"/>
             </a:solidFill>
             <a:prstDash val="solid"/>
           </a:ln>
@@ -6387,26 +6301,42 @@
       </p:sp>
       <p:sp>
         <p:nvSpPr>
-          <p:cNvPr id="14" name="Shape 12"/>
-          <p:cNvSpPr/>
-          <p:nvPr/>
-        </p:nvSpPr>
-        <p:spPr>
-          <a:xfrm>
-            <a:off x="8046720" y="3108960"/>
-            <a:ext cx="2651760" cy="896112"/>
-          </a:xfrm>
-          <a:prstGeom prst="arc">
-            <a:avLst/>
-          </a:prstGeom>
-          <a:noFill/>
-          <a:ln w="25400">
-            <a:solidFill>
-              <a:srgbClr val="0068B7"/>
-            </a:solidFill>
-            <a:prstDash val="solid"/>
-          </a:ln>
-        </p:spPr>
+          <p:cNvPr id="14" name="Text 12"/>
+          <p:cNvSpPr/>
+          <p:nvPr/>
+        </p:nvSpPr>
+        <p:spPr>
+          <a:xfrm>
+            <a:off x="7799832" y="2935224"/>
+            <a:ext cx="3145536" cy="256032"/>
+          </a:xfrm>
+          <a:prstGeom prst="rect">
+            <a:avLst/>
+          </a:prstGeom>
+          <a:noFill/>
+          <a:ln/>
+        </p:spPr>
+        <p:txBody>
+          <a:bodyPr wrap="square" lIns="0" tIns="0" rIns="0" bIns="0" rtlCol="0" anchor="ctr"/>
+          <a:lstStyle/>
+          <a:p>
+            <a:pPr indent="0" marL="0">
+              <a:buNone/>
+            </a:pPr>
+            <a:r>
+              <a:rPr lang="en-US" sz="1300" b="1" dirty="0">
+                <a:solidFill>
+                  <a:srgbClr val="0068B7"/>
+                </a:solidFill>
+                <a:latin typeface="Aptos" pitchFamily="34" charset="0"/>
+                <a:ea typeface="Aptos" pitchFamily="34" charset="-122"/>
+                <a:cs typeface="Aptos" pitchFamily="34" charset="-120"/>
+              </a:rPr>
+              <a:t>Concept checkpoints</a:t>
+            </a:r>
+            <a:endParaRPr lang="en-US" sz="1300" dirty="0"/>
+          </a:p>
+        </p:txBody>
       </p:sp>
       <p:sp>
         <p:nvSpPr>
@@ -6416,102 +6346,67 @@
         </p:nvSpPr>
         <p:spPr>
           <a:xfrm>
-            <a:off x="7909560" y="3099816"/>
-            <a:ext cx="2926080" cy="256032"/>
-          </a:xfrm>
-          <a:prstGeom prst="rect">
-            <a:avLst/>
-          </a:prstGeom>
-          <a:noFill/>
-          <a:ln/>
-        </p:spPr>
-        <p:txBody>
-          <a:bodyPr wrap="square" lIns="0" tIns="0" rIns="0" bIns="0" rtlCol="0" anchor="ctr"/>
-          <a:lstStyle/>
-          <a:p>
-            <a:pPr algn="ctr" indent="0" marL="0">
-              <a:buNone/>
-            </a:pPr>
-            <a:r>
-              <a:rPr lang="en-US" sz="1500" b="1" dirty="0">
-                <a:solidFill>
-                  <a:srgbClr val="003A63"/>
-                </a:solidFill>
-                <a:latin typeface="Aptos" pitchFamily="34" charset="0"/>
-                <a:ea typeface="Aptos" pitchFamily="34" charset="-122"/>
-                <a:cs typeface="Aptos" pitchFamily="34" charset="-120"/>
-              </a:rPr>
-              <a:t>Risk</a:t>
-            </a:r>
-            <a:endParaRPr lang="en-US" sz="1500" dirty="0"/>
+            <a:off x="7818120" y="3300984"/>
+            <a:ext cx="3090672" cy="877824"/>
+          </a:xfrm>
+          <a:prstGeom prst="rect">
+            <a:avLst/>
+          </a:prstGeom>
+          <a:noFill/>
+          <a:ln/>
+        </p:spPr>
+        <p:txBody>
+          <a:bodyPr wrap="square" lIns="254" tIns="254" rIns="254" bIns="254" rtlCol="0" anchor="t">
+            <a:normAutofit/>
+          </a:bodyPr>
+          <a:lstStyle/>
+          <a:p>
+            <a:r>
+              <a:rPr lang="en-US" sz="1380" dirty="0">
+                <a:solidFill>
+                  <a:srgbClr val="17364A"/>
+                </a:solidFill>
+                <a:latin typeface="Aptos" pitchFamily="34" charset="0"/>
+                <a:ea typeface="Aptos" pitchFamily="34" charset="-122"/>
+                <a:cs typeface="Aptos" pitchFamily="34" charset="-120"/>
+              </a:rPr>
+              <a:t>Advanced validation applies to predictive models, NLP tools, generative summaries, RAG.</a:t>
+            </a:r>
+            <a:endParaRPr lang="en-US" sz="1380" dirty="0"/>
+          </a:p>
+          <a:p>
+            <a:r>
+              <a:rPr lang="en-US" sz="1380" dirty="0">
+                <a:solidFill>
+                  <a:srgbClr val="17364A"/>
+                </a:solidFill>
+                <a:latin typeface="Aptos" pitchFamily="34" charset="0"/>
+                <a:ea typeface="Aptos" pitchFamily="34" charset="-122"/>
+                <a:cs typeface="Aptos" pitchFamily="34" charset="-120"/>
+              </a:rPr>
+              <a:t>For generative AI, validation may include factuality, completeness, source grounding,.</a:t>
+            </a:r>
+            <a:endParaRPr lang="en-US" sz="1380" dirty="0"/>
+          </a:p>
+          <a:p>
+            <a:r>
+              <a:rPr lang="en-US" sz="1380" dirty="0">
+                <a:solidFill>
+                  <a:srgbClr val="17364A"/>
+                </a:solidFill>
+                <a:latin typeface="Aptos" pitchFamily="34" charset="0"/>
+                <a:ea typeface="Aptos" pitchFamily="34" charset="-122"/>
+                <a:cs typeface="Aptos" pitchFamily="34" charset="-120"/>
+              </a:rPr>
+              <a:t>For agentic workflows, validation should include action safety, permission boundaries, and.</a:t>
+            </a:r>
+            <a:endParaRPr lang="en-US" sz="1380" dirty="0"/>
           </a:p>
         </p:txBody>
       </p:sp>
       <p:sp>
         <p:nvSpPr>
           <p:cNvPr id="16" name="Shape 14"/>
-          <p:cNvSpPr/>
-          <p:nvPr/>
-        </p:nvSpPr>
-        <p:spPr>
-          <a:xfrm>
-            <a:off x="8366760" y="3639312"/>
-            <a:ext cx="2011680" cy="0"/>
-          </a:xfrm>
-          <a:prstGeom prst="line">
-            <a:avLst/>
-          </a:prstGeom>
-          <a:noFill/>
-          <a:ln w="63500">
-            <a:solidFill>
-              <a:srgbClr val="2F8A28"/>
-            </a:solidFill>
-            <a:prstDash val="solid"/>
-          </a:ln>
-        </p:spPr>
-      </p:sp>
-      <p:sp>
-        <p:nvSpPr>
-          <p:cNvPr id="17" name="Text 15"/>
-          <p:cNvSpPr/>
-          <p:nvPr/>
-        </p:nvSpPr>
-        <p:spPr>
-          <a:xfrm>
-            <a:off x="7909560" y="3849624"/>
-            <a:ext cx="2926080" cy="164592"/>
-          </a:xfrm>
-          <a:prstGeom prst="rect">
-            <a:avLst/>
-          </a:prstGeom>
-          <a:noFill/>
-          <a:ln/>
-        </p:spPr>
-        <p:txBody>
-          <a:bodyPr wrap="square" lIns="0" tIns="0" rIns="0" bIns="0" rtlCol="0" anchor="ctr"/>
-          <a:lstStyle/>
-          <a:p>
-            <a:pPr algn="ctr" indent="0" marL="0">
-              <a:buNone/>
-            </a:pPr>
-            <a:r>
-              <a:rPr lang="en-US" sz="900" dirty="0">
-                <a:solidFill>
-                  <a:srgbClr val="003A63"/>
-                </a:solidFill>
-                <a:latin typeface="Aptos" pitchFamily="34" charset="0"/>
-                <a:ea typeface="Aptos" pitchFamily="34" charset="-122"/>
-                <a:cs typeface="Aptos" pitchFamily="34" charset="-120"/>
-              </a:rPr>
-              <a:t>Human review</a:t>
-            </a:r>
-            <a:endParaRPr lang="en-US" sz="900" dirty="0"/>
-          </a:p>
-        </p:txBody>
-      </p:sp>
-      <p:sp>
-        <p:nvSpPr>
-          <p:cNvPr id="18" name="Shape 16"/>
           <p:cNvSpPr/>
           <p:nvPr/>
         </p:nvSpPr>
@@ -6538,7 +6433,7 @@
       </p:sp>
       <p:sp>
         <p:nvSpPr>
-          <p:cNvPr id="19" name="Text 17"/>
+          <p:cNvPr id="17" name="Text 15"/>
           <p:cNvSpPr/>
           <p:nvPr/>
         </p:nvSpPr>
@@ -6577,7 +6472,7 @@
       </p:sp>
       <p:sp>
         <p:nvSpPr>
-          <p:cNvPr id="20" name="Text 18"/>
+          <p:cNvPr id="18" name="Text 16"/>
           <p:cNvSpPr/>
           <p:nvPr/>
         </p:nvSpPr>
@@ -7085,13 +6980,11 @@
             </a:avLst>
           </a:prstGeom>
           <a:solidFill>
-            <a:srgbClr val="FFFFFF">
-              <a:alpha val="88000"/>
-            </a:srgbClr>
+            <a:srgbClr val="FFFFFF"/>
           </a:solidFill>
           <a:ln w="12700">
             <a:solidFill>
-              <a:srgbClr val="D6E8F2"/>
+              <a:srgbClr val="B9D7E6"/>
             </a:solidFill>
             <a:prstDash val="solid"/>
           </a:ln>
@@ -7099,26 +6992,42 @@
       </p:sp>
       <p:sp>
         <p:nvSpPr>
-          <p:cNvPr id="14" name="Shape 12"/>
-          <p:cNvSpPr/>
-          <p:nvPr/>
-        </p:nvSpPr>
-        <p:spPr>
-          <a:xfrm>
-            <a:off x="8046720" y="3108960"/>
-            <a:ext cx="2651760" cy="896112"/>
-          </a:xfrm>
-          <a:prstGeom prst="arc">
-            <a:avLst/>
-          </a:prstGeom>
-          <a:noFill/>
-          <a:ln w="25400">
-            <a:solidFill>
-              <a:srgbClr val="0068B7"/>
-            </a:solidFill>
-            <a:prstDash val="solid"/>
-          </a:ln>
-        </p:spPr>
+          <p:cNvPr id="14" name="Text 12"/>
+          <p:cNvSpPr/>
+          <p:nvPr/>
+        </p:nvSpPr>
+        <p:spPr>
+          <a:xfrm>
+            <a:off x="7799832" y="2935224"/>
+            <a:ext cx="3145536" cy="256032"/>
+          </a:xfrm>
+          <a:prstGeom prst="rect">
+            <a:avLst/>
+          </a:prstGeom>
+          <a:noFill/>
+          <a:ln/>
+        </p:spPr>
+        <p:txBody>
+          <a:bodyPr wrap="square" lIns="0" tIns="0" rIns="0" bIns="0" rtlCol="0" anchor="ctr"/>
+          <a:lstStyle/>
+          <a:p>
+            <a:pPr indent="0" marL="0">
+              <a:buNone/>
+            </a:pPr>
+            <a:r>
+              <a:rPr lang="en-US" sz="1300" b="1" dirty="0">
+                <a:solidFill>
+                  <a:srgbClr val="0068B7"/>
+                </a:solidFill>
+                <a:latin typeface="Aptos" pitchFamily="34" charset="0"/>
+                <a:ea typeface="Aptos" pitchFamily="34" charset="-122"/>
+                <a:cs typeface="Aptos" pitchFamily="34" charset="-120"/>
+              </a:rPr>
+              <a:t>Concept checkpoints</a:t>
+            </a:r>
+            <a:endParaRPr lang="en-US" sz="1300" dirty="0"/>
+          </a:p>
+        </p:txBody>
       </p:sp>
       <p:sp>
         <p:nvSpPr>
@@ -7128,102 +7037,67 @@
         </p:nvSpPr>
         <p:spPr>
           <a:xfrm>
-            <a:off x="7909560" y="3099816"/>
-            <a:ext cx="2926080" cy="256032"/>
-          </a:xfrm>
-          <a:prstGeom prst="rect">
-            <a:avLst/>
-          </a:prstGeom>
-          <a:noFill/>
-          <a:ln/>
-        </p:spPr>
-        <p:txBody>
-          <a:bodyPr wrap="square" lIns="0" tIns="0" rIns="0" bIns="0" rtlCol="0" anchor="ctr"/>
-          <a:lstStyle/>
-          <a:p>
-            <a:pPr algn="ctr" indent="0" marL="0">
-              <a:buNone/>
-            </a:pPr>
-            <a:r>
-              <a:rPr lang="en-US" sz="1500" b="1" dirty="0">
-                <a:solidFill>
-                  <a:srgbClr val="003A63"/>
-                </a:solidFill>
-                <a:latin typeface="Aptos" pitchFamily="34" charset="0"/>
-                <a:ea typeface="Aptos" pitchFamily="34" charset="-122"/>
-                <a:cs typeface="Aptos" pitchFamily="34" charset="-120"/>
-              </a:rPr>
-              <a:t>Risk</a:t>
-            </a:r>
-            <a:endParaRPr lang="en-US" sz="1500" dirty="0"/>
+            <a:off x="7818120" y="3300984"/>
+            <a:ext cx="3090672" cy="877824"/>
+          </a:xfrm>
+          <a:prstGeom prst="rect">
+            <a:avLst/>
+          </a:prstGeom>
+          <a:noFill/>
+          <a:ln/>
+        </p:spPr>
+        <p:txBody>
+          <a:bodyPr wrap="square" lIns="254" tIns="254" rIns="254" bIns="254" rtlCol="0" anchor="t">
+            <a:normAutofit/>
+          </a:bodyPr>
+          <a:lstStyle/>
+          <a:p>
+            <a:r>
+              <a:rPr lang="en-US" sz="1380" dirty="0">
+                <a:solidFill>
+                  <a:srgbClr val="17364A"/>
+                </a:solidFill>
+                <a:latin typeface="Aptos" pitchFamily="34" charset="0"/>
+                <a:ea typeface="Aptos" pitchFamily="34" charset="-122"/>
+                <a:cs typeface="Aptos" pitchFamily="34" charset="-120"/>
+              </a:rPr>
+              <a:t>What decision or action will the AI output support?</a:t>
+            </a:r>
+            <a:endParaRPr lang="en-US" sz="1380" dirty="0"/>
+          </a:p>
+          <a:p>
+            <a:r>
+              <a:rPr lang="en-US" sz="1380" dirty="0">
+                <a:solidFill>
+                  <a:srgbClr val="17364A"/>
+                </a:solidFill>
+                <a:latin typeface="Aptos" pitchFamily="34" charset="0"/>
+                <a:ea typeface="Aptos" pitchFamily="34" charset="-122"/>
+                <a:cs typeface="Aptos" pitchFamily="34" charset="-120"/>
+              </a:rPr>
+              <a:t>Which performance metrics match the consequences of error?</a:t>
+            </a:r>
+            <a:endParaRPr lang="en-US" sz="1380" dirty="0"/>
+          </a:p>
+          <a:p>
+            <a:r>
+              <a:rPr lang="en-US" sz="1380" dirty="0">
+                <a:solidFill>
+                  <a:srgbClr val="17364A"/>
+                </a:solidFill>
+                <a:latin typeface="Aptos" pitchFamily="34" charset="0"/>
+                <a:ea typeface="Aptos" pitchFamily="34" charset="-122"/>
+                <a:cs typeface="Aptos" pitchFamily="34" charset="-120"/>
+              </a:rPr>
+              <a:t>Which subgroups, data sources, or settings require separate review?</a:t>
+            </a:r>
+            <a:endParaRPr lang="en-US" sz="1380" dirty="0"/>
           </a:p>
         </p:txBody>
       </p:sp>
       <p:sp>
         <p:nvSpPr>
           <p:cNvPr id="16" name="Shape 14"/>
-          <p:cNvSpPr/>
-          <p:nvPr/>
-        </p:nvSpPr>
-        <p:spPr>
-          <a:xfrm>
-            <a:off x="8366760" y="3639312"/>
-            <a:ext cx="2011680" cy="0"/>
-          </a:xfrm>
-          <a:prstGeom prst="line">
-            <a:avLst/>
-          </a:prstGeom>
-          <a:noFill/>
-          <a:ln w="63500">
-            <a:solidFill>
-              <a:srgbClr val="2F8A28"/>
-            </a:solidFill>
-            <a:prstDash val="solid"/>
-          </a:ln>
-        </p:spPr>
-      </p:sp>
-      <p:sp>
-        <p:nvSpPr>
-          <p:cNvPr id="17" name="Text 15"/>
-          <p:cNvSpPr/>
-          <p:nvPr/>
-        </p:nvSpPr>
-        <p:spPr>
-          <a:xfrm>
-            <a:off x="7909560" y="3849624"/>
-            <a:ext cx="2926080" cy="164592"/>
-          </a:xfrm>
-          <a:prstGeom prst="rect">
-            <a:avLst/>
-          </a:prstGeom>
-          <a:noFill/>
-          <a:ln/>
-        </p:spPr>
-        <p:txBody>
-          <a:bodyPr wrap="square" lIns="0" tIns="0" rIns="0" bIns="0" rtlCol="0" anchor="ctr"/>
-          <a:lstStyle/>
-          <a:p>
-            <a:pPr algn="ctr" indent="0" marL="0">
-              <a:buNone/>
-            </a:pPr>
-            <a:r>
-              <a:rPr lang="en-US" sz="900" dirty="0">
-                <a:solidFill>
-                  <a:srgbClr val="003A63"/>
-                </a:solidFill>
-                <a:latin typeface="Aptos" pitchFamily="34" charset="0"/>
-                <a:ea typeface="Aptos" pitchFamily="34" charset="-122"/>
-                <a:cs typeface="Aptos" pitchFamily="34" charset="-120"/>
-              </a:rPr>
-              <a:t>Human review</a:t>
-            </a:r>
-            <a:endParaRPr lang="en-US" sz="900" dirty="0"/>
-          </a:p>
-        </p:txBody>
-      </p:sp>
-      <p:sp>
-        <p:nvSpPr>
-          <p:cNvPr id="18" name="Shape 16"/>
           <p:cNvSpPr/>
           <p:nvPr/>
         </p:nvSpPr>
@@ -7250,7 +7124,7 @@
       </p:sp>
       <p:sp>
         <p:nvSpPr>
-          <p:cNvPr id="19" name="Text 17"/>
+          <p:cNvPr id="17" name="Text 15"/>
           <p:cNvSpPr/>
           <p:nvPr/>
         </p:nvSpPr>
@@ -7289,7 +7163,7 @@
       </p:sp>
       <p:sp>
         <p:nvSpPr>
-          <p:cNvPr id="20" name="Text 18"/>
+          <p:cNvPr id="18" name="Text 16"/>
           <p:cNvSpPr/>
           <p:nvPr/>
         </p:nvSpPr>
@@ -7783,13 +7657,11 @@
             </a:avLst>
           </a:prstGeom>
           <a:solidFill>
-            <a:srgbClr val="FFFFFF">
-              <a:alpha val="88000"/>
-            </a:srgbClr>
+            <a:srgbClr val="FFFFFF"/>
           </a:solidFill>
           <a:ln w="12700">
             <a:solidFill>
-              <a:srgbClr val="D6E8F2"/>
+              <a:srgbClr val="B9D7E6"/>
             </a:solidFill>
             <a:prstDash val="solid"/>
           </a:ln>
@@ -7797,26 +7669,42 @@
       </p:sp>
       <p:sp>
         <p:nvSpPr>
-          <p:cNvPr id="14" name="Shape 12"/>
-          <p:cNvSpPr/>
-          <p:nvPr/>
-        </p:nvSpPr>
-        <p:spPr>
-          <a:xfrm>
-            <a:off x="8046720" y="3108960"/>
-            <a:ext cx="2651760" cy="896112"/>
-          </a:xfrm>
-          <a:prstGeom prst="arc">
-            <a:avLst/>
-          </a:prstGeom>
-          <a:noFill/>
-          <a:ln w="25400">
-            <a:solidFill>
-              <a:srgbClr val="0068B7"/>
-            </a:solidFill>
-            <a:prstDash val="solid"/>
-          </a:ln>
-        </p:spPr>
+          <p:cNvPr id="14" name="Text 12"/>
+          <p:cNvSpPr/>
+          <p:nvPr/>
+        </p:nvSpPr>
+        <p:spPr>
+          <a:xfrm>
+            <a:off x="7799832" y="2935224"/>
+            <a:ext cx="3145536" cy="256032"/>
+          </a:xfrm>
+          <a:prstGeom prst="rect">
+            <a:avLst/>
+          </a:prstGeom>
+          <a:noFill/>
+          <a:ln/>
+        </p:spPr>
+        <p:txBody>
+          <a:bodyPr wrap="square" lIns="0" tIns="0" rIns="0" bIns="0" rtlCol="0" anchor="ctr"/>
+          <a:lstStyle/>
+          <a:p>
+            <a:pPr indent="0" marL="0">
+              <a:buNone/>
+            </a:pPr>
+            <a:r>
+              <a:rPr lang="en-US" sz="1300" b="1" dirty="0">
+                <a:solidFill>
+                  <a:srgbClr val="0068B7"/>
+                </a:solidFill>
+                <a:latin typeface="Aptos" pitchFamily="34" charset="0"/>
+                <a:ea typeface="Aptos" pitchFamily="34" charset="-122"/>
+                <a:cs typeface="Aptos" pitchFamily="34" charset="-120"/>
+              </a:rPr>
+              <a:t>Concept checkpoints</a:t>
+            </a:r>
+            <a:endParaRPr lang="en-US" sz="1300" dirty="0"/>
+          </a:p>
+        </p:txBody>
       </p:sp>
       <p:sp>
         <p:nvSpPr>
@@ -7826,102 +7714,53 @@
         </p:nvSpPr>
         <p:spPr>
           <a:xfrm>
-            <a:off x="7909560" y="3099816"/>
-            <a:ext cx="2926080" cy="256032"/>
-          </a:xfrm>
-          <a:prstGeom prst="rect">
-            <a:avLst/>
-          </a:prstGeom>
-          <a:noFill/>
-          <a:ln/>
-        </p:spPr>
-        <p:txBody>
-          <a:bodyPr wrap="square" lIns="0" tIns="0" rIns="0" bIns="0" rtlCol="0" anchor="ctr"/>
-          <a:lstStyle/>
-          <a:p>
-            <a:pPr algn="ctr" indent="0" marL="0">
-              <a:buNone/>
-            </a:pPr>
-            <a:r>
-              <a:rPr lang="en-US" sz="1500" b="1" dirty="0">
-                <a:solidFill>
-                  <a:srgbClr val="003A63"/>
-                </a:solidFill>
-                <a:latin typeface="Aptos" pitchFamily="34" charset="0"/>
-                <a:ea typeface="Aptos" pitchFamily="34" charset="-122"/>
-                <a:cs typeface="Aptos" pitchFamily="34" charset="-120"/>
-              </a:rPr>
-              <a:t>Risk</a:t>
-            </a:r>
-            <a:endParaRPr lang="en-US" sz="1500" dirty="0"/>
+            <a:off x="7818120" y="3300984"/>
+            <a:ext cx="3090672" cy="877824"/>
+          </a:xfrm>
+          <a:prstGeom prst="rect">
+            <a:avLst/>
+          </a:prstGeom>
+          <a:noFill/>
+          <a:ln/>
+        </p:spPr>
+        <p:txBody>
+          <a:bodyPr wrap="square" lIns="254" tIns="254" rIns="254" bIns="254" rtlCol="0" anchor="t">
+            <a:normAutofit/>
+          </a:bodyPr>
+          <a:lstStyle/>
+          <a:p>
+            <a:r>
+              <a:rPr lang="en-US" sz="1380" dirty="0">
+                <a:solidFill>
+                  <a:srgbClr val="17364A"/>
+                </a:solidFill>
+                <a:latin typeface="Aptos" pitchFamily="34" charset="0"/>
+                <a:ea typeface="Aptos" pitchFamily="34" charset="-122"/>
+                <a:cs typeface="Aptos" pitchFamily="34" charset="-120"/>
+              </a:rPr>
+              <a:t>What would make performance unacceptable for this use case?</a:t>
+            </a:r>
+            <a:endParaRPr lang="en-US" sz="1380" dirty="0"/>
+          </a:p>
+          <a:p>
+            <a:r>
+              <a:rPr lang="en-US" sz="1380" dirty="0">
+                <a:solidFill>
+                  <a:srgbClr val="17364A"/>
+                </a:solidFill>
+                <a:latin typeface="Aptos" pitchFamily="34" charset="0"/>
+                <a:ea typeface="Aptos" pitchFamily="34" charset="-122"/>
+                <a:cs typeface="Aptos" pitchFamily="34" charset="-120"/>
+              </a:rPr>
+              <a:t>How will the agency monitor performance after deployment?</a:t>
+            </a:r>
+            <a:endParaRPr lang="en-US" sz="1380" dirty="0"/>
           </a:p>
         </p:txBody>
       </p:sp>
       <p:sp>
         <p:nvSpPr>
           <p:cNvPr id="16" name="Shape 14"/>
-          <p:cNvSpPr/>
-          <p:nvPr/>
-        </p:nvSpPr>
-        <p:spPr>
-          <a:xfrm>
-            <a:off x="8366760" y="3639312"/>
-            <a:ext cx="2011680" cy="0"/>
-          </a:xfrm>
-          <a:prstGeom prst="line">
-            <a:avLst/>
-          </a:prstGeom>
-          <a:noFill/>
-          <a:ln w="63500">
-            <a:solidFill>
-              <a:srgbClr val="2F8A28"/>
-            </a:solidFill>
-            <a:prstDash val="solid"/>
-          </a:ln>
-        </p:spPr>
-      </p:sp>
-      <p:sp>
-        <p:nvSpPr>
-          <p:cNvPr id="17" name="Text 15"/>
-          <p:cNvSpPr/>
-          <p:nvPr/>
-        </p:nvSpPr>
-        <p:spPr>
-          <a:xfrm>
-            <a:off x="7909560" y="3849624"/>
-            <a:ext cx="2926080" cy="164592"/>
-          </a:xfrm>
-          <a:prstGeom prst="rect">
-            <a:avLst/>
-          </a:prstGeom>
-          <a:noFill/>
-          <a:ln/>
-        </p:spPr>
-        <p:txBody>
-          <a:bodyPr wrap="square" lIns="0" tIns="0" rIns="0" bIns="0" rtlCol="0" anchor="ctr"/>
-          <a:lstStyle/>
-          <a:p>
-            <a:pPr algn="ctr" indent="0" marL="0">
-              <a:buNone/>
-            </a:pPr>
-            <a:r>
-              <a:rPr lang="en-US" sz="900" dirty="0">
-                <a:solidFill>
-                  <a:srgbClr val="003A63"/>
-                </a:solidFill>
-                <a:latin typeface="Aptos" pitchFamily="34" charset="0"/>
-                <a:ea typeface="Aptos" pitchFamily="34" charset="-122"/>
-                <a:cs typeface="Aptos" pitchFamily="34" charset="-120"/>
-              </a:rPr>
-              <a:t>Human review</a:t>
-            </a:r>
-            <a:endParaRPr lang="en-US" sz="900" dirty="0"/>
-          </a:p>
-        </p:txBody>
-      </p:sp>
-      <p:sp>
-        <p:nvSpPr>
-          <p:cNvPr id="18" name="Shape 16"/>
           <p:cNvSpPr/>
           <p:nvPr/>
         </p:nvSpPr>
@@ -7948,7 +7787,7 @@
       </p:sp>
       <p:sp>
         <p:nvSpPr>
-          <p:cNvPr id="19" name="Text 17"/>
+          <p:cNvPr id="17" name="Text 15"/>
           <p:cNvSpPr/>
           <p:nvPr/>
         </p:nvSpPr>
@@ -7987,7 +7826,7 @@
       </p:sp>
       <p:sp>
         <p:nvSpPr>
-          <p:cNvPr id="20" name="Text 18"/>
+          <p:cNvPr id="18" name="Text 16"/>
           <p:cNvSpPr/>
           <p:nvPr/>
         </p:nvSpPr>
@@ -8495,13 +8334,11 @@
             </a:avLst>
           </a:prstGeom>
           <a:solidFill>
-            <a:srgbClr val="FFFFFF">
-              <a:alpha val="88000"/>
-            </a:srgbClr>
+            <a:srgbClr val="FFFFFF"/>
           </a:solidFill>
           <a:ln w="12700">
             <a:solidFill>
-              <a:srgbClr val="D6E8F2"/>
+              <a:srgbClr val="B9D7E6"/>
             </a:solidFill>
             <a:prstDash val="solid"/>
           </a:ln>
@@ -8509,26 +8346,42 @@
       </p:sp>
       <p:sp>
         <p:nvSpPr>
-          <p:cNvPr id="14" name="Shape 12"/>
-          <p:cNvSpPr/>
-          <p:nvPr/>
-        </p:nvSpPr>
-        <p:spPr>
-          <a:xfrm>
-            <a:off x="8046720" y="3108960"/>
-            <a:ext cx="2651760" cy="896112"/>
-          </a:xfrm>
-          <a:prstGeom prst="arc">
-            <a:avLst/>
-          </a:prstGeom>
-          <a:noFill/>
-          <a:ln w="25400">
-            <a:solidFill>
-              <a:srgbClr val="0068B7"/>
-            </a:solidFill>
-            <a:prstDash val="solid"/>
-          </a:ln>
-        </p:spPr>
+          <p:cNvPr id="14" name="Text 12"/>
+          <p:cNvSpPr/>
+          <p:nvPr/>
+        </p:nvSpPr>
+        <p:spPr>
+          <a:xfrm>
+            <a:off x="7799832" y="2935224"/>
+            <a:ext cx="3145536" cy="256032"/>
+          </a:xfrm>
+          <a:prstGeom prst="rect">
+            <a:avLst/>
+          </a:prstGeom>
+          <a:noFill/>
+          <a:ln/>
+        </p:spPr>
+        <p:txBody>
+          <a:bodyPr wrap="square" lIns="0" tIns="0" rIns="0" bIns="0" rtlCol="0" anchor="ctr"/>
+          <a:lstStyle/>
+          <a:p>
+            <a:pPr indent="0" marL="0">
+              <a:buNone/>
+            </a:pPr>
+            <a:r>
+              <a:rPr lang="en-US" sz="1300" b="1" dirty="0">
+                <a:solidFill>
+                  <a:srgbClr val="0068B7"/>
+                </a:solidFill>
+                <a:latin typeface="Aptos" pitchFamily="34" charset="0"/>
+                <a:ea typeface="Aptos" pitchFamily="34" charset="-122"/>
+                <a:cs typeface="Aptos" pitchFamily="34" charset="-120"/>
+              </a:rPr>
+              <a:t>Concept checkpoints</a:t>
+            </a:r>
+            <a:endParaRPr lang="en-US" sz="1300" dirty="0"/>
+          </a:p>
+        </p:txBody>
       </p:sp>
       <p:sp>
         <p:nvSpPr>
@@ -8538,102 +8391,53 @@
         </p:nvSpPr>
         <p:spPr>
           <a:xfrm>
-            <a:off x="7909560" y="3099816"/>
-            <a:ext cx="2926080" cy="256032"/>
-          </a:xfrm>
-          <a:prstGeom prst="rect">
-            <a:avLst/>
-          </a:prstGeom>
-          <a:noFill/>
-          <a:ln/>
-        </p:spPr>
-        <p:txBody>
-          <a:bodyPr wrap="square" lIns="0" tIns="0" rIns="0" bIns="0" rtlCol="0" anchor="ctr"/>
-          <a:lstStyle/>
-          <a:p>
-            <a:pPr algn="ctr" indent="0" marL="0">
-              <a:buNone/>
-            </a:pPr>
-            <a:r>
-              <a:rPr lang="en-US" sz="1500" b="1" dirty="0">
-                <a:solidFill>
-                  <a:srgbClr val="003A63"/>
-                </a:solidFill>
-                <a:latin typeface="Aptos" pitchFamily="34" charset="0"/>
-                <a:ea typeface="Aptos" pitchFamily="34" charset="-122"/>
-                <a:cs typeface="Aptos" pitchFamily="34" charset="-120"/>
-              </a:rPr>
-              <a:t>Risk</a:t>
-            </a:r>
-            <a:endParaRPr lang="en-US" sz="1500" dirty="0"/>
+            <a:off x="7818120" y="3300984"/>
+            <a:ext cx="3090672" cy="877824"/>
+          </a:xfrm>
+          <a:prstGeom prst="rect">
+            <a:avLst/>
+          </a:prstGeom>
+          <a:noFill/>
+          <a:ln/>
+        </p:spPr>
+        <p:txBody>
+          <a:bodyPr wrap="square" lIns="254" tIns="254" rIns="254" bIns="254" rtlCol="0" anchor="t">
+            <a:normAutofit/>
+          </a:bodyPr>
+          <a:lstStyle/>
+          <a:p>
+            <a:r>
+              <a:rPr lang="en-US" sz="1380" dirty="0">
+                <a:solidFill>
+                  <a:srgbClr val="17364A"/>
+                </a:solidFill>
+                <a:latin typeface="Aptos" pitchFamily="34" charset="0"/>
+                <a:ea typeface="Aptos" pitchFamily="34" charset="-122"/>
+                <a:cs typeface="Aptos" pitchFamily="34" charset="-120"/>
+              </a:rPr>
+              <a:t>Include intended use, validation dataset, comparison standard, performance metrics,.</a:t>
+            </a:r>
+            <a:endParaRPr lang="en-US" sz="1380" dirty="0"/>
+          </a:p>
+          <a:p>
+            <a:r>
+              <a:rPr lang="en-US" sz="1380" dirty="0">
+                <a:solidFill>
+                  <a:srgbClr val="17364A"/>
+                </a:solidFill>
+                <a:latin typeface="Aptos" pitchFamily="34" charset="0"/>
+                <a:ea typeface="Aptos" pitchFamily="34" charset="-122"/>
+                <a:cs typeface="Aptos" pitchFamily="34" charset="-120"/>
+              </a:rPr>
+              <a:t>The plan should clearly explain how validation results will be interpreted and who has.</a:t>
+            </a:r>
+            <a:endParaRPr lang="en-US" sz="1380" dirty="0"/>
           </a:p>
         </p:txBody>
       </p:sp>
       <p:sp>
         <p:nvSpPr>
           <p:cNvPr id="16" name="Shape 14"/>
-          <p:cNvSpPr/>
-          <p:nvPr/>
-        </p:nvSpPr>
-        <p:spPr>
-          <a:xfrm>
-            <a:off x="8366760" y="3639312"/>
-            <a:ext cx="2011680" cy="0"/>
-          </a:xfrm>
-          <a:prstGeom prst="line">
-            <a:avLst/>
-          </a:prstGeom>
-          <a:noFill/>
-          <a:ln w="63500">
-            <a:solidFill>
-              <a:srgbClr val="2F8A28"/>
-            </a:solidFill>
-            <a:prstDash val="solid"/>
-          </a:ln>
-        </p:spPr>
-      </p:sp>
-      <p:sp>
-        <p:nvSpPr>
-          <p:cNvPr id="17" name="Text 15"/>
-          <p:cNvSpPr/>
-          <p:nvPr/>
-        </p:nvSpPr>
-        <p:spPr>
-          <a:xfrm>
-            <a:off x="7909560" y="3849624"/>
-            <a:ext cx="2926080" cy="164592"/>
-          </a:xfrm>
-          <a:prstGeom prst="rect">
-            <a:avLst/>
-          </a:prstGeom>
-          <a:noFill/>
-          <a:ln/>
-        </p:spPr>
-        <p:txBody>
-          <a:bodyPr wrap="square" lIns="0" tIns="0" rIns="0" bIns="0" rtlCol="0" anchor="ctr"/>
-          <a:lstStyle/>
-          <a:p>
-            <a:pPr algn="ctr" indent="0" marL="0">
-              <a:buNone/>
-            </a:pPr>
-            <a:r>
-              <a:rPr lang="en-US" sz="900" dirty="0">
-                <a:solidFill>
-                  <a:srgbClr val="003A63"/>
-                </a:solidFill>
-                <a:latin typeface="Aptos" pitchFamily="34" charset="0"/>
-                <a:ea typeface="Aptos" pitchFamily="34" charset="-122"/>
-                <a:cs typeface="Aptos" pitchFamily="34" charset="-120"/>
-              </a:rPr>
-              <a:t>Human review</a:t>
-            </a:r>
-            <a:endParaRPr lang="en-US" sz="900" dirty="0"/>
-          </a:p>
-        </p:txBody>
-      </p:sp>
-      <p:sp>
-        <p:nvSpPr>
-          <p:cNvPr id="18" name="Shape 16"/>
           <p:cNvSpPr/>
           <p:nvPr/>
         </p:nvSpPr>
@@ -8660,7 +8464,7 @@
       </p:sp>
       <p:sp>
         <p:nvSpPr>
-          <p:cNvPr id="19" name="Text 17"/>
+          <p:cNvPr id="17" name="Text 15"/>
           <p:cNvSpPr/>
           <p:nvPr/>
         </p:nvSpPr>
@@ -8699,7 +8503,7 @@
       </p:sp>
       <p:sp>
         <p:nvSpPr>
-          <p:cNvPr id="20" name="Text 18"/>
+          <p:cNvPr id="18" name="Text 16"/>
           <p:cNvSpPr/>
           <p:nvPr/>
         </p:nvSpPr>
@@ -9207,13 +9011,11 @@
             </a:avLst>
           </a:prstGeom>
           <a:solidFill>
-            <a:srgbClr val="FFFFFF">
-              <a:alpha val="88000"/>
-            </a:srgbClr>
+            <a:srgbClr val="FFFFFF"/>
           </a:solidFill>
           <a:ln w="12700">
             <a:solidFill>
-              <a:srgbClr val="D6E8F2"/>
+              <a:srgbClr val="B9D7E6"/>
             </a:solidFill>
             <a:prstDash val="solid"/>
           </a:ln>
@@ -9221,26 +9023,42 @@
       </p:sp>
       <p:sp>
         <p:nvSpPr>
-          <p:cNvPr id="14" name="Shape 12"/>
-          <p:cNvSpPr/>
-          <p:nvPr/>
-        </p:nvSpPr>
-        <p:spPr>
-          <a:xfrm>
-            <a:off x="8046720" y="3108960"/>
-            <a:ext cx="2651760" cy="896112"/>
-          </a:xfrm>
-          <a:prstGeom prst="arc">
-            <a:avLst/>
-          </a:prstGeom>
-          <a:noFill/>
-          <a:ln w="25400">
-            <a:solidFill>
-              <a:srgbClr val="0068B7"/>
-            </a:solidFill>
-            <a:prstDash val="solid"/>
-          </a:ln>
-        </p:spPr>
+          <p:cNvPr id="14" name="Text 12"/>
+          <p:cNvSpPr/>
+          <p:nvPr/>
+        </p:nvSpPr>
+        <p:spPr>
+          <a:xfrm>
+            <a:off x="7799832" y="2935224"/>
+            <a:ext cx="3145536" cy="256032"/>
+          </a:xfrm>
+          <a:prstGeom prst="rect">
+            <a:avLst/>
+          </a:prstGeom>
+          <a:noFill/>
+          <a:ln/>
+        </p:spPr>
+        <p:txBody>
+          <a:bodyPr wrap="square" lIns="0" tIns="0" rIns="0" bIns="0" rtlCol="0" anchor="ctr"/>
+          <a:lstStyle/>
+          <a:p>
+            <a:pPr indent="0" marL="0">
+              <a:buNone/>
+            </a:pPr>
+            <a:r>
+              <a:rPr lang="en-US" sz="1300" b="1" dirty="0">
+                <a:solidFill>
+                  <a:srgbClr val="0068B7"/>
+                </a:solidFill>
+                <a:latin typeface="Aptos" pitchFamily="34" charset="0"/>
+                <a:ea typeface="Aptos" pitchFamily="34" charset="-122"/>
+                <a:cs typeface="Aptos" pitchFamily="34" charset="-120"/>
+              </a:rPr>
+              <a:t>Concept checkpoints</a:t>
+            </a:r>
+            <a:endParaRPr lang="en-US" sz="1300" dirty="0"/>
+          </a:p>
+        </p:txBody>
       </p:sp>
       <p:sp>
         <p:nvSpPr>
@@ -9250,102 +9068,67 @@
         </p:nvSpPr>
         <p:spPr>
           <a:xfrm>
-            <a:off x="7909560" y="3099816"/>
-            <a:ext cx="2926080" cy="256032"/>
-          </a:xfrm>
-          <a:prstGeom prst="rect">
-            <a:avLst/>
-          </a:prstGeom>
-          <a:noFill/>
-          <a:ln/>
-        </p:spPr>
-        <p:txBody>
-          <a:bodyPr wrap="square" lIns="0" tIns="0" rIns="0" bIns="0" rtlCol="0" anchor="ctr"/>
-          <a:lstStyle/>
-          <a:p>
-            <a:pPr algn="ctr" indent="0" marL="0">
-              <a:buNone/>
-            </a:pPr>
-            <a:r>
-              <a:rPr lang="en-US" sz="1500" b="1" dirty="0">
-                <a:solidFill>
-                  <a:srgbClr val="003A63"/>
-                </a:solidFill>
-                <a:latin typeface="Aptos" pitchFamily="34" charset="0"/>
-                <a:ea typeface="Aptos" pitchFamily="34" charset="-122"/>
-                <a:cs typeface="Aptos" pitchFamily="34" charset="-120"/>
-              </a:rPr>
-              <a:t>Risk</a:t>
-            </a:r>
-            <a:endParaRPr lang="en-US" sz="1500" dirty="0"/>
+            <a:off x="7818120" y="3300984"/>
+            <a:ext cx="3090672" cy="877824"/>
+          </a:xfrm>
+          <a:prstGeom prst="rect">
+            <a:avLst/>
+          </a:prstGeom>
+          <a:noFill/>
+          <a:ln/>
+        </p:spPr>
+        <p:txBody>
+          <a:bodyPr wrap="square" lIns="254" tIns="254" rIns="254" bIns="254" rtlCol="0" anchor="t">
+            <a:normAutofit/>
+          </a:bodyPr>
+          <a:lstStyle/>
+          <a:p>
+            <a:r>
+              <a:rPr lang="en-US" sz="1380" dirty="0">
+                <a:solidFill>
+                  <a:srgbClr val="17364A"/>
+                </a:solidFill>
+                <a:latin typeface="Aptos" pitchFamily="34" charset="0"/>
+                <a:ea typeface="Aptos" pitchFamily="34" charset="-122"/>
+                <a:cs typeface="Aptos" pitchFamily="34" charset="-120"/>
+              </a:rPr>
+              <a:t>Advanced validation plan</a:t>
+            </a:r>
+            <a:endParaRPr lang="en-US" sz="1380" dirty="0"/>
+          </a:p>
+          <a:p>
+            <a:r>
+              <a:rPr lang="en-US" sz="1380" dirty="0">
+                <a:solidFill>
+                  <a:srgbClr val="17364A"/>
+                </a:solidFill>
+                <a:latin typeface="Aptos" pitchFamily="34" charset="0"/>
+                <a:ea typeface="Aptos" pitchFamily="34" charset="-122"/>
+                <a:cs typeface="Aptos" pitchFamily="34" charset="-120"/>
+              </a:rPr>
+              <a:t>Metric and error-consequence table</a:t>
+            </a:r>
+            <a:endParaRPr lang="en-US" sz="1380" dirty="0"/>
+          </a:p>
+          <a:p>
+            <a:r>
+              <a:rPr lang="en-US" sz="1380" dirty="0">
+                <a:solidFill>
+                  <a:srgbClr val="17364A"/>
+                </a:solidFill>
+                <a:latin typeface="Aptos" pitchFamily="34" charset="0"/>
+                <a:ea typeface="Aptos" pitchFamily="34" charset="-122"/>
+                <a:cs typeface="Aptos" pitchFamily="34" charset="-120"/>
+              </a:rPr>
+              <a:t>Subgroup performance review plan</a:t>
+            </a:r>
+            <a:endParaRPr lang="en-US" sz="1380" dirty="0"/>
           </a:p>
         </p:txBody>
       </p:sp>
       <p:sp>
         <p:nvSpPr>
           <p:cNvPr id="16" name="Shape 14"/>
-          <p:cNvSpPr/>
-          <p:nvPr/>
-        </p:nvSpPr>
-        <p:spPr>
-          <a:xfrm>
-            <a:off x="8366760" y="3639312"/>
-            <a:ext cx="2011680" cy="0"/>
-          </a:xfrm>
-          <a:prstGeom prst="line">
-            <a:avLst/>
-          </a:prstGeom>
-          <a:noFill/>
-          <a:ln w="63500">
-            <a:solidFill>
-              <a:srgbClr val="2F8A28"/>
-            </a:solidFill>
-            <a:prstDash val="solid"/>
-          </a:ln>
-        </p:spPr>
-      </p:sp>
-      <p:sp>
-        <p:nvSpPr>
-          <p:cNvPr id="17" name="Text 15"/>
-          <p:cNvSpPr/>
-          <p:nvPr/>
-        </p:nvSpPr>
-        <p:spPr>
-          <a:xfrm>
-            <a:off x="7909560" y="3849624"/>
-            <a:ext cx="2926080" cy="164592"/>
-          </a:xfrm>
-          <a:prstGeom prst="rect">
-            <a:avLst/>
-          </a:prstGeom>
-          <a:noFill/>
-          <a:ln/>
-        </p:spPr>
-        <p:txBody>
-          <a:bodyPr wrap="square" lIns="0" tIns="0" rIns="0" bIns="0" rtlCol="0" anchor="ctr"/>
-          <a:lstStyle/>
-          <a:p>
-            <a:pPr algn="ctr" indent="0" marL="0">
-              <a:buNone/>
-            </a:pPr>
-            <a:r>
-              <a:rPr lang="en-US" sz="900" dirty="0">
-                <a:solidFill>
-                  <a:srgbClr val="003A63"/>
-                </a:solidFill>
-                <a:latin typeface="Aptos" pitchFamily="34" charset="0"/>
-                <a:ea typeface="Aptos" pitchFamily="34" charset="-122"/>
-                <a:cs typeface="Aptos" pitchFamily="34" charset="-120"/>
-              </a:rPr>
-              <a:t>Human review</a:t>
-            </a:r>
-            <a:endParaRPr lang="en-US" sz="900" dirty="0"/>
-          </a:p>
-        </p:txBody>
-      </p:sp>
-      <p:sp>
-        <p:nvSpPr>
-          <p:cNvPr id="18" name="Shape 16"/>
           <p:cNvSpPr/>
           <p:nvPr/>
         </p:nvSpPr>
@@ -9372,7 +9155,7 @@
       </p:sp>
       <p:sp>
         <p:nvSpPr>
-          <p:cNvPr id="19" name="Text 17"/>
+          <p:cNvPr id="17" name="Text 15"/>
           <p:cNvSpPr/>
           <p:nvPr/>
         </p:nvSpPr>
@@ -9411,7 +9194,7 @@
       </p:sp>
       <p:sp>
         <p:nvSpPr>
-          <p:cNvPr id="20" name="Text 18"/>
+          <p:cNvPr id="18" name="Text 16"/>
           <p:cNvSpPr/>
           <p:nvPr/>
         </p:nvSpPr>
@@ -9891,13 +9674,11 @@
             </a:avLst>
           </a:prstGeom>
           <a:solidFill>
-            <a:srgbClr val="FFFFFF">
-              <a:alpha val="88000"/>
-            </a:srgbClr>
+            <a:srgbClr val="FFFFFF"/>
           </a:solidFill>
           <a:ln w="12700">
             <a:solidFill>
-              <a:srgbClr val="D6E8F2"/>
+              <a:srgbClr val="B9D7E6"/>
             </a:solidFill>
             <a:prstDash val="solid"/>
           </a:ln>
@@ -9905,26 +9686,42 @@
       </p:sp>
       <p:sp>
         <p:nvSpPr>
-          <p:cNvPr id="14" name="Shape 12"/>
-          <p:cNvSpPr/>
-          <p:nvPr/>
-        </p:nvSpPr>
-        <p:spPr>
-          <a:xfrm>
-            <a:off x="8046720" y="3108960"/>
-            <a:ext cx="2651760" cy="896112"/>
-          </a:xfrm>
-          <a:prstGeom prst="arc">
-            <a:avLst/>
-          </a:prstGeom>
-          <a:noFill/>
-          <a:ln w="25400">
-            <a:solidFill>
-              <a:srgbClr val="0068B7"/>
-            </a:solidFill>
-            <a:prstDash val="solid"/>
-          </a:ln>
-        </p:spPr>
+          <p:cNvPr id="14" name="Text 12"/>
+          <p:cNvSpPr/>
+          <p:nvPr/>
+        </p:nvSpPr>
+        <p:spPr>
+          <a:xfrm>
+            <a:off x="7799832" y="2935224"/>
+            <a:ext cx="3145536" cy="256032"/>
+          </a:xfrm>
+          <a:prstGeom prst="rect">
+            <a:avLst/>
+          </a:prstGeom>
+          <a:noFill/>
+          <a:ln/>
+        </p:spPr>
+        <p:txBody>
+          <a:bodyPr wrap="square" lIns="0" tIns="0" rIns="0" bIns="0" rtlCol="0" anchor="ctr"/>
+          <a:lstStyle/>
+          <a:p>
+            <a:pPr indent="0" marL="0">
+              <a:buNone/>
+            </a:pPr>
+            <a:r>
+              <a:rPr lang="en-US" sz="1300" b="1" dirty="0">
+                <a:solidFill>
+                  <a:srgbClr val="0068B7"/>
+                </a:solidFill>
+                <a:latin typeface="Aptos" pitchFamily="34" charset="0"/>
+                <a:ea typeface="Aptos" pitchFamily="34" charset="-122"/>
+                <a:cs typeface="Aptos" pitchFamily="34" charset="-120"/>
+              </a:rPr>
+              <a:t>Concept checkpoints</a:t>
+            </a:r>
+            <a:endParaRPr lang="en-US" sz="1300" dirty="0"/>
+          </a:p>
+        </p:txBody>
       </p:sp>
       <p:sp>
         <p:nvSpPr>
@@ -9934,102 +9731,39 @@
         </p:nvSpPr>
         <p:spPr>
           <a:xfrm>
-            <a:off x="7909560" y="3099816"/>
-            <a:ext cx="2926080" cy="256032"/>
-          </a:xfrm>
-          <a:prstGeom prst="rect">
-            <a:avLst/>
-          </a:prstGeom>
-          <a:noFill/>
-          <a:ln/>
-        </p:spPr>
-        <p:txBody>
-          <a:bodyPr wrap="square" lIns="0" tIns="0" rIns="0" bIns="0" rtlCol="0" anchor="ctr"/>
-          <a:lstStyle/>
-          <a:p>
-            <a:pPr algn="ctr" indent="0" marL="0">
-              <a:buNone/>
-            </a:pPr>
-            <a:r>
-              <a:rPr lang="en-US" sz="1500" b="1" dirty="0">
-                <a:solidFill>
-                  <a:srgbClr val="003A63"/>
-                </a:solidFill>
-                <a:latin typeface="Aptos" pitchFamily="34" charset="0"/>
-                <a:ea typeface="Aptos" pitchFamily="34" charset="-122"/>
-                <a:cs typeface="Aptos" pitchFamily="34" charset="-120"/>
-              </a:rPr>
-              <a:t>Risk</a:t>
-            </a:r>
-            <a:endParaRPr lang="en-US" sz="1500" dirty="0"/>
+            <a:off x="7818120" y="3300984"/>
+            <a:ext cx="3090672" cy="877824"/>
+          </a:xfrm>
+          <a:prstGeom prst="rect">
+            <a:avLst/>
+          </a:prstGeom>
+          <a:noFill/>
+          <a:ln/>
+        </p:spPr>
+        <p:txBody>
+          <a:bodyPr wrap="square" lIns="254" tIns="254" rIns="254" bIns="254" rtlCol="0" anchor="t">
+            <a:normAutofit/>
+          </a:bodyPr>
+          <a:lstStyle/>
+          <a:p>
+            <a:r>
+              <a:rPr lang="en-US" sz="1380" dirty="0">
+                <a:solidFill>
+                  <a:srgbClr val="17364A"/>
+                </a:solidFill>
+                <a:latin typeface="Aptos" pitchFamily="34" charset="0"/>
+                <a:ea typeface="Aptos" pitchFamily="34" charset="-122"/>
+                <a:cs typeface="Aptos" pitchFamily="34" charset="-120"/>
+              </a:rPr>
+              <a:t>Post-deployment monitoring schedule</a:t>
+            </a:r>
+            <a:endParaRPr lang="en-US" sz="1380" dirty="0"/>
           </a:p>
         </p:txBody>
       </p:sp>
       <p:sp>
         <p:nvSpPr>
           <p:cNvPr id="16" name="Shape 14"/>
-          <p:cNvSpPr/>
-          <p:nvPr/>
-        </p:nvSpPr>
-        <p:spPr>
-          <a:xfrm>
-            <a:off x="8366760" y="3639312"/>
-            <a:ext cx="2011680" cy="0"/>
-          </a:xfrm>
-          <a:prstGeom prst="line">
-            <a:avLst/>
-          </a:prstGeom>
-          <a:noFill/>
-          <a:ln w="63500">
-            <a:solidFill>
-              <a:srgbClr val="2F8A28"/>
-            </a:solidFill>
-            <a:prstDash val="solid"/>
-          </a:ln>
-        </p:spPr>
-      </p:sp>
-      <p:sp>
-        <p:nvSpPr>
-          <p:cNvPr id="17" name="Text 15"/>
-          <p:cNvSpPr/>
-          <p:nvPr/>
-        </p:nvSpPr>
-        <p:spPr>
-          <a:xfrm>
-            <a:off x="7909560" y="3849624"/>
-            <a:ext cx="2926080" cy="164592"/>
-          </a:xfrm>
-          <a:prstGeom prst="rect">
-            <a:avLst/>
-          </a:prstGeom>
-          <a:noFill/>
-          <a:ln/>
-        </p:spPr>
-        <p:txBody>
-          <a:bodyPr wrap="square" lIns="0" tIns="0" rIns="0" bIns="0" rtlCol="0" anchor="ctr"/>
-          <a:lstStyle/>
-          <a:p>
-            <a:pPr algn="ctr" indent="0" marL="0">
-              <a:buNone/>
-            </a:pPr>
-            <a:r>
-              <a:rPr lang="en-US" sz="900" dirty="0">
-                <a:solidFill>
-                  <a:srgbClr val="003A63"/>
-                </a:solidFill>
-                <a:latin typeface="Aptos" pitchFamily="34" charset="0"/>
-                <a:ea typeface="Aptos" pitchFamily="34" charset="-122"/>
-                <a:cs typeface="Aptos" pitchFamily="34" charset="-120"/>
-              </a:rPr>
-              <a:t>Human review</a:t>
-            </a:r>
-            <a:endParaRPr lang="en-US" sz="900" dirty="0"/>
-          </a:p>
-        </p:txBody>
-      </p:sp>
-      <p:sp>
-        <p:nvSpPr>
-          <p:cNvPr id="18" name="Shape 16"/>
           <p:cNvSpPr/>
           <p:nvPr/>
         </p:nvSpPr>
@@ -10056,7 +9790,7 @@
       </p:sp>
       <p:sp>
         <p:nvSpPr>
-          <p:cNvPr id="19" name="Text 17"/>
+          <p:cNvPr id="17" name="Text 15"/>
           <p:cNvSpPr/>
           <p:nvPr/>
         </p:nvSpPr>
@@ -10095,7 +9829,7 @@
       </p:sp>
       <p:sp>
         <p:nvSpPr>
-          <p:cNvPr id="20" name="Text 18"/>
+          <p:cNvPr id="18" name="Text 16"/>
           <p:cNvSpPr/>
           <p:nvPr/>
         </p:nvSpPr>
@@ -10628,20 +10362,20 @@
         </p:nvSpPr>
         <p:spPr>
           <a:xfrm>
-            <a:off x="7635240" y="3730752"/>
-            <a:ext cx="1033272" cy="749808"/>
+            <a:off x="7909560" y="3675888"/>
+            <a:ext cx="3154680" cy="1691640"/>
           </a:xfrm>
           <a:prstGeom prst="roundRect">
             <a:avLst>
-              <a:gd name="adj" fmla="val 14634"/>
+              <a:gd name="adj" fmla="val 6486"/>
             </a:avLst>
           </a:prstGeom>
           <a:solidFill>
-            <a:srgbClr val="0068B7"/>
+            <a:srgbClr val="FFFFFF"/>
           </a:solidFill>
           <a:ln w="12700">
             <a:solidFill>
-              <a:srgbClr val="0068B7"/>
+              <a:srgbClr val="B9D7E6"/>
             </a:solidFill>
             <a:prstDash val="solid"/>
           </a:ln>
@@ -10655,172 +10389,100 @@
         </p:nvSpPr>
         <p:spPr>
           <a:xfrm>
-            <a:off x="7708392" y="3922776"/>
-            <a:ext cx="886968" cy="310896"/>
-          </a:xfrm>
-          <a:prstGeom prst="rect">
-            <a:avLst/>
-          </a:prstGeom>
-          <a:noFill/>
-          <a:ln/>
-        </p:spPr>
-        <p:txBody>
-          <a:bodyPr wrap="square" lIns="0" tIns="0" rIns="0" bIns="0" rtlCol="0" anchor="ctr">
+            <a:off x="8074152" y="3822192"/>
+            <a:ext cx="2825496" cy="256032"/>
+          </a:xfrm>
+          <a:prstGeom prst="rect">
+            <a:avLst/>
+          </a:prstGeom>
+          <a:noFill/>
+          <a:ln/>
+        </p:spPr>
+        <p:txBody>
+          <a:bodyPr wrap="square" lIns="0" tIns="0" rIns="0" bIns="0" rtlCol="0" anchor="ctr"/>
+          <a:lstStyle/>
+          <a:p>
+            <a:pPr indent="0" marL="0">
+              <a:buNone/>
+            </a:pPr>
+            <a:r>
+              <a:rPr lang="en-US" sz="1300" b="1" dirty="0">
+                <a:solidFill>
+                  <a:srgbClr val="0068B7"/>
+                </a:solidFill>
+                <a:latin typeface="Aptos" pitchFamily="34" charset="0"/>
+                <a:ea typeface="Aptos" pitchFamily="34" charset="-122"/>
+                <a:cs typeface="Aptos" pitchFamily="34" charset="-120"/>
+              </a:rPr>
+              <a:t>Learning sequence</a:t>
+            </a:r>
+            <a:endParaRPr lang="en-US" sz="1300" dirty="0"/>
+          </a:p>
+        </p:txBody>
+      </p:sp>
+      <p:sp>
+        <p:nvSpPr>
+          <p:cNvPr id="15" name="Text 13"/>
+          <p:cNvSpPr/>
+          <p:nvPr/>
+        </p:nvSpPr>
+        <p:spPr>
+          <a:xfrm>
+            <a:off x="8092440" y="4187952"/>
+            <a:ext cx="2770632" cy="1033272"/>
+          </a:xfrm>
+          <a:prstGeom prst="rect">
+            <a:avLst/>
+          </a:prstGeom>
+          <a:noFill/>
+          <a:ln/>
+        </p:spPr>
+        <p:txBody>
+          <a:bodyPr wrap="square" lIns="254" tIns="254" rIns="254" bIns="254" rtlCol="0" anchor="t">
             <a:normAutofit/>
           </a:bodyPr>
           <a:lstStyle/>
           <a:p>
-            <a:pPr algn="ctr" indent="0" marL="0">
-              <a:buNone/>
-            </a:pPr>
-            <a:r>
-              <a:rPr lang="en-US" sz="1500" b="1" dirty="0">
-                <a:solidFill>
-                  <a:srgbClr val="FFFFFF"/>
-                </a:solidFill>
-                <a:latin typeface="Aptos" pitchFamily="34" charset="0"/>
-                <a:ea typeface="Aptos" pitchFamily="34" charset="-122"/>
-                <a:cs typeface="Aptos" pitchFamily="34" charset="-120"/>
-              </a:rPr>
-              <a:t>Learn</a:t>
-            </a:r>
-            <a:endParaRPr lang="en-US" sz="1500" dirty="0"/>
-          </a:p>
-        </p:txBody>
-      </p:sp>
-      <p:sp>
-        <p:nvSpPr>
-          <p:cNvPr id="15" name="Shape 13"/>
-          <p:cNvSpPr/>
-          <p:nvPr/>
-        </p:nvSpPr>
-        <p:spPr>
-          <a:xfrm>
-            <a:off x="8924544" y="3730752"/>
-            <a:ext cx="1033272" cy="749808"/>
-          </a:xfrm>
-          <a:prstGeom prst="roundRect">
-            <a:avLst>
-              <a:gd name="adj" fmla="val 14634"/>
-            </a:avLst>
-          </a:prstGeom>
-          <a:solidFill>
-            <a:srgbClr val="2F8A28"/>
-          </a:solidFill>
-          <a:ln w="12700">
-            <a:solidFill>
-              <a:srgbClr val="2F8A28"/>
-            </a:solidFill>
-            <a:prstDash val="solid"/>
-          </a:ln>
-        </p:spPr>
-      </p:sp>
-      <p:sp>
-        <p:nvSpPr>
-          <p:cNvPr id="16" name="Text 14"/>
-          <p:cNvSpPr/>
-          <p:nvPr/>
-        </p:nvSpPr>
-        <p:spPr>
-          <a:xfrm>
-            <a:off x="8997696" y="3922776"/>
-            <a:ext cx="886968" cy="310896"/>
-          </a:xfrm>
-          <a:prstGeom prst="rect">
-            <a:avLst/>
-          </a:prstGeom>
-          <a:noFill/>
-          <a:ln/>
-        </p:spPr>
-        <p:txBody>
-          <a:bodyPr wrap="square" lIns="0" tIns="0" rIns="0" bIns="0" rtlCol="0" anchor="ctr">
-            <a:normAutofit/>
-          </a:bodyPr>
-          <a:lstStyle/>
-          <a:p>
-            <a:pPr algn="ctr" indent="0" marL="0">
-              <a:buNone/>
-            </a:pPr>
-            <a:r>
-              <a:rPr lang="en-US" sz="1500" b="1" dirty="0">
-                <a:solidFill>
-                  <a:srgbClr val="FFFFFF"/>
-                </a:solidFill>
-                <a:latin typeface="Aptos" pitchFamily="34" charset="0"/>
-                <a:ea typeface="Aptos" pitchFamily="34" charset="-122"/>
-                <a:cs typeface="Aptos" pitchFamily="34" charset="-120"/>
-              </a:rPr>
-              <a:t>Apply</a:t>
-            </a:r>
-            <a:endParaRPr lang="en-US" sz="1500" dirty="0"/>
-          </a:p>
-        </p:txBody>
-      </p:sp>
-      <p:sp>
-        <p:nvSpPr>
-          <p:cNvPr id="17" name="Shape 15"/>
-          <p:cNvSpPr/>
-          <p:nvPr/>
-        </p:nvSpPr>
-        <p:spPr>
-          <a:xfrm>
-            <a:off x="10213848" y="3730752"/>
-            <a:ext cx="1033272" cy="749808"/>
-          </a:xfrm>
-          <a:prstGeom prst="roundRect">
-            <a:avLst>
-              <a:gd name="adj" fmla="val 14634"/>
-            </a:avLst>
-          </a:prstGeom>
-          <a:solidFill>
-            <a:srgbClr val="6A4CA3"/>
-          </a:solidFill>
-          <a:ln w="12700">
-            <a:solidFill>
-              <a:srgbClr val="6A4CA3"/>
-            </a:solidFill>
-            <a:prstDash val="solid"/>
-          </a:ln>
-        </p:spPr>
-      </p:sp>
-      <p:sp>
-        <p:nvSpPr>
-          <p:cNvPr id="18" name="Text 16"/>
-          <p:cNvSpPr/>
-          <p:nvPr/>
-        </p:nvSpPr>
-        <p:spPr>
-          <a:xfrm>
-            <a:off x="10287000" y="3922776"/>
-            <a:ext cx="886968" cy="310896"/>
-          </a:xfrm>
-          <a:prstGeom prst="rect">
-            <a:avLst/>
-          </a:prstGeom>
-          <a:noFill/>
-          <a:ln/>
-        </p:spPr>
-        <p:txBody>
-          <a:bodyPr wrap="square" lIns="0" tIns="0" rIns="0" bIns="0" rtlCol="0" anchor="ctr">
-            <a:normAutofit/>
-          </a:bodyPr>
-          <a:lstStyle/>
-          <a:p>
-            <a:pPr algn="ctr" indent="0" marL="0">
-              <a:buNone/>
-            </a:pPr>
-            <a:r>
-              <a:rPr lang="en-US" sz="1500" b="1" dirty="0">
-                <a:solidFill>
-                  <a:srgbClr val="FFFFFF"/>
-                </a:solidFill>
-                <a:latin typeface="Aptos" pitchFamily="34" charset="0"/>
-                <a:ea typeface="Aptos" pitchFamily="34" charset="-122"/>
-                <a:cs typeface="Aptos" pitchFamily="34" charset="-120"/>
-              </a:rPr>
-              <a:t>Document</a:t>
-            </a:r>
-            <a:endParaRPr lang="en-US" sz="1500" dirty="0"/>
+            <a:r>
+              <a:rPr lang="en-US" sz="1380" dirty="0">
+                <a:solidFill>
+                  <a:srgbClr val="17364A"/>
+                </a:solidFill>
+                <a:latin typeface="Aptos" pitchFamily="34" charset="0"/>
+                <a:ea typeface="Aptos" pitchFamily="34" charset="-122"/>
+                <a:cs typeface="Aptos" pitchFamily="34" charset="-120"/>
+              </a:rPr>
+              <a:t>Read the module for shared vocabulary and context.</a:t>
+            </a:r>
+            <a:endParaRPr lang="en-US" sz="1380" dirty="0"/>
+          </a:p>
+          <a:p>
+            <a:r>
+              <a:rPr lang="en-US" sz="1380" dirty="0">
+                <a:solidFill>
+                  <a:srgbClr val="17364A"/>
+                </a:solidFill>
+                <a:latin typeface="Aptos" pitchFamily="34" charset="0"/>
+                <a:ea typeface="Aptos" pitchFamily="34" charset="-122"/>
+                <a:cs typeface="Aptos" pitchFamily="34" charset="-120"/>
+              </a:rPr>
+              <a:t>Complete the practical exercise to apply the concept.</a:t>
+            </a:r>
+            <a:endParaRPr lang="en-US" sz="1380" dirty="0"/>
+          </a:p>
+          <a:p>
+            <a:r>
+              <a:rPr lang="en-US" sz="1380" dirty="0">
+                <a:solidFill>
+                  <a:srgbClr val="17364A"/>
+                </a:solidFill>
+                <a:latin typeface="Aptos" pitchFamily="34" charset="0"/>
+                <a:ea typeface="Aptos" pitchFamily="34" charset="-122"/>
+                <a:cs typeface="Aptos" pitchFamily="34" charset="-120"/>
+              </a:rPr>
+              <a:t>Use the notes and references for deeper review.</a:t>
+            </a:r>
+            <a:endParaRPr lang="en-US" sz="1380" dirty="0"/>
           </a:p>
         </p:txBody>
       </p:sp>
@@ -11293,13 +10955,11 @@
             </a:avLst>
           </a:prstGeom>
           <a:solidFill>
-            <a:srgbClr val="FFFFFF">
-              <a:alpha val="88000"/>
-            </a:srgbClr>
+            <a:srgbClr val="FFFFFF"/>
           </a:solidFill>
           <a:ln w="12700">
             <a:solidFill>
-              <a:srgbClr val="D6E8F2"/>
+              <a:srgbClr val="B9D7E6"/>
             </a:solidFill>
             <a:prstDash val="solid"/>
           </a:ln>
@@ -11307,26 +10967,42 @@
       </p:sp>
       <p:sp>
         <p:nvSpPr>
-          <p:cNvPr id="14" name="Shape 12"/>
-          <p:cNvSpPr/>
-          <p:nvPr/>
-        </p:nvSpPr>
-        <p:spPr>
-          <a:xfrm>
-            <a:off x="8046720" y="3108960"/>
-            <a:ext cx="2651760" cy="896112"/>
-          </a:xfrm>
-          <a:prstGeom prst="arc">
-            <a:avLst/>
-          </a:prstGeom>
-          <a:noFill/>
-          <a:ln w="25400">
-            <a:solidFill>
-              <a:srgbClr val="0068B7"/>
-            </a:solidFill>
-            <a:prstDash val="solid"/>
-          </a:ln>
-        </p:spPr>
+          <p:cNvPr id="14" name="Text 12"/>
+          <p:cNvSpPr/>
+          <p:nvPr/>
+        </p:nvSpPr>
+        <p:spPr>
+          <a:xfrm>
+            <a:off x="7799832" y="2935224"/>
+            <a:ext cx="3145536" cy="256032"/>
+          </a:xfrm>
+          <a:prstGeom prst="rect">
+            <a:avLst/>
+          </a:prstGeom>
+          <a:noFill/>
+          <a:ln/>
+        </p:spPr>
+        <p:txBody>
+          <a:bodyPr wrap="square" lIns="0" tIns="0" rIns="0" bIns="0" rtlCol="0" anchor="ctr"/>
+          <a:lstStyle/>
+          <a:p>
+            <a:pPr indent="0" marL="0">
+              <a:buNone/>
+            </a:pPr>
+            <a:r>
+              <a:rPr lang="en-US" sz="1300" b="1" dirty="0">
+                <a:solidFill>
+                  <a:srgbClr val="0068B7"/>
+                </a:solidFill>
+                <a:latin typeface="Aptos" pitchFamily="34" charset="0"/>
+                <a:ea typeface="Aptos" pitchFamily="34" charset="-122"/>
+                <a:cs typeface="Aptos" pitchFamily="34" charset="-120"/>
+              </a:rPr>
+              <a:t>Concept checkpoints</a:t>
+            </a:r>
+            <a:endParaRPr lang="en-US" sz="1300" dirty="0"/>
+          </a:p>
+        </p:txBody>
       </p:sp>
       <p:sp>
         <p:nvSpPr>
@@ -11336,102 +11012,67 @@
         </p:nvSpPr>
         <p:spPr>
           <a:xfrm>
-            <a:off x="7909560" y="3099816"/>
-            <a:ext cx="2926080" cy="256032"/>
-          </a:xfrm>
-          <a:prstGeom prst="rect">
-            <a:avLst/>
-          </a:prstGeom>
-          <a:noFill/>
-          <a:ln/>
-        </p:spPr>
-        <p:txBody>
-          <a:bodyPr wrap="square" lIns="0" tIns="0" rIns="0" bIns="0" rtlCol="0" anchor="ctr"/>
-          <a:lstStyle/>
-          <a:p>
-            <a:pPr algn="ctr" indent="0" marL="0">
-              <a:buNone/>
-            </a:pPr>
-            <a:r>
-              <a:rPr lang="en-US" sz="1500" b="1" dirty="0">
-                <a:solidFill>
-                  <a:srgbClr val="003A63"/>
-                </a:solidFill>
-                <a:latin typeface="Aptos" pitchFamily="34" charset="0"/>
-                <a:ea typeface="Aptos" pitchFamily="34" charset="-122"/>
-                <a:cs typeface="Aptos" pitchFamily="34" charset="-120"/>
-              </a:rPr>
-              <a:t>Risk</a:t>
-            </a:r>
-            <a:endParaRPr lang="en-US" sz="1500" dirty="0"/>
+            <a:off x="7818120" y="3300984"/>
+            <a:ext cx="3090672" cy="877824"/>
+          </a:xfrm>
+          <a:prstGeom prst="rect">
+            <a:avLst/>
+          </a:prstGeom>
+          <a:noFill/>
+          <a:ln/>
+        </p:spPr>
+        <p:txBody>
+          <a:bodyPr wrap="square" lIns="254" tIns="254" rIns="254" bIns="254" rtlCol="0" anchor="t">
+            <a:normAutofit/>
+          </a:bodyPr>
+          <a:lstStyle/>
+          <a:p>
+            <a:r>
+              <a:rPr lang="en-US" sz="1380" dirty="0">
+                <a:solidFill>
+                  <a:srgbClr val="17364A"/>
+                </a:solidFill>
+                <a:latin typeface="Aptos" pitchFamily="34" charset="0"/>
+                <a:ea typeface="Aptos" pitchFamily="34" charset="-122"/>
+                <a:cs typeface="Aptos" pitchFamily="34" charset="-120"/>
+              </a:rPr>
+              <a:t>Advanced validation plan</a:t>
+            </a:r>
+            <a:endParaRPr lang="en-US" sz="1380" dirty="0"/>
+          </a:p>
+          <a:p>
+            <a:r>
+              <a:rPr lang="en-US" sz="1380" dirty="0">
+                <a:solidFill>
+                  <a:srgbClr val="17364A"/>
+                </a:solidFill>
+                <a:latin typeface="Aptos" pitchFamily="34" charset="0"/>
+                <a:ea typeface="Aptos" pitchFamily="34" charset="-122"/>
+                <a:cs typeface="Aptos" pitchFamily="34" charset="-120"/>
+              </a:rPr>
+              <a:t>Metric and error-consequence table</a:t>
+            </a:r>
+            <a:endParaRPr lang="en-US" sz="1380" dirty="0"/>
+          </a:p>
+          <a:p>
+            <a:r>
+              <a:rPr lang="en-US" sz="1380" dirty="0">
+                <a:solidFill>
+                  <a:srgbClr val="17364A"/>
+                </a:solidFill>
+                <a:latin typeface="Aptos" pitchFamily="34" charset="0"/>
+                <a:ea typeface="Aptos" pitchFamily="34" charset="-122"/>
+                <a:cs typeface="Aptos" pitchFamily="34" charset="-120"/>
+              </a:rPr>
+              <a:t>Subgroup performance review plan</a:t>
+            </a:r>
+            <a:endParaRPr lang="en-US" sz="1380" dirty="0"/>
           </a:p>
         </p:txBody>
       </p:sp>
       <p:sp>
         <p:nvSpPr>
           <p:cNvPr id="16" name="Shape 14"/>
-          <p:cNvSpPr/>
-          <p:nvPr/>
-        </p:nvSpPr>
-        <p:spPr>
-          <a:xfrm>
-            <a:off x="8366760" y="3639312"/>
-            <a:ext cx="2011680" cy="0"/>
-          </a:xfrm>
-          <a:prstGeom prst="line">
-            <a:avLst/>
-          </a:prstGeom>
-          <a:noFill/>
-          <a:ln w="63500">
-            <a:solidFill>
-              <a:srgbClr val="2F8A28"/>
-            </a:solidFill>
-            <a:prstDash val="solid"/>
-          </a:ln>
-        </p:spPr>
-      </p:sp>
-      <p:sp>
-        <p:nvSpPr>
-          <p:cNvPr id="17" name="Text 15"/>
-          <p:cNvSpPr/>
-          <p:nvPr/>
-        </p:nvSpPr>
-        <p:spPr>
-          <a:xfrm>
-            <a:off x="7909560" y="3849624"/>
-            <a:ext cx="2926080" cy="164592"/>
-          </a:xfrm>
-          <a:prstGeom prst="rect">
-            <a:avLst/>
-          </a:prstGeom>
-          <a:noFill/>
-          <a:ln/>
-        </p:spPr>
-        <p:txBody>
-          <a:bodyPr wrap="square" lIns="0" tIns="0" rIns="0" bIns="0" rtlCol="0" anchor="ctr"/>
-          <a:lstStyle/>
-          <a:p>
-            <a:pPr algn="ctr" indent="0" marL="0">
-              <a:buNone/>
-            </a:pPr>
-            <a:r>
-              <a:rPr lang="en-US" sz="900" dirty="0">
-                <a:solidFill>
-                  <a:srgbClr val="003A63"/>
-                </a:solidFill>
-                <a:latin typeface="Aptos" pitchFamily="34" charset="0"/>
-                <a:ea typeface="Aptos" pitchFamily="34" charset="-122"/>
-                <a:cs typeface="Aptos" pitchFamily="34" charset="-120"/>
-              </a:rPr>
-              <a:t>Human review</a:t>
-            </a:r>
-            <a:endParaRPr lang="en-US" sz="900" dirty="0"/>
-          </a:p>
-        </p:txBody>
-      </p:sp>
-      <p:sp>
-        <p:nvSpPr>
-          <p:cNvPr id="18" name="Shape 16"/>
           <p:cNvSpPr/>
           <p:nvPr/>
         </p:nvSpPr>
@@ -11458,7 +11099,7 @@
       </p:sp>
       <p:sp>
         <p:nvSpPr>
-          <p:cNvPr id="19" name="Text 17"/>
+          <p:cNvPr id="17" name="Text 15"/>
           <p:cNvSpPr/>
           <p:nvPr/>
         </p:nvSpPr>
@@ -11497,7 +11138,7 @@
       </p:sp>
       <p:sp>
         <p:nvSpPr>
-          <p:cNvPr id="20" name="Text 18"/>
+          <p:cNvPr id="18" name="Text 16"/>
           <p:cNvSpPr/>
           <p:nvPr/>
         </p:nvSpPr>
@@ -12005,13 +11646,11 @@
             </a:avLst>
           </a:prstGeom>
           <a:solidFill>
-            <a:srgbClr val="FFFFFF">
-              <a:alpha val="88000"/>
-            </a:srgbClr>
+            <a:srgbClr val="FFFFFF"/>
           </a:solidFill>
           <a:ln w="12700">
             <a:solidFill>
-              <a:srgbClr val="D6E8F2"/>
+              <a:srgbClr val="B9D7E6"/>
             </a:solidFill>
             <a:prstDash val="solid"/>
           </a:ln>
@@ -12019,26 +11658,42 @@
       </p:sp>
       <p:sp>
         <p:nvSpPr>
-          <p:cNvPr id="14" name="Shape 12"/>
-          <p:cNvSpPr/>
-          <p:nvPr/>
-        </p:nvSpPr>
-        <p:spPr>
-          <a:xfrm>
-            <a:off x="8046720" y="3108960"/>
-            <a:ext cx="2651760" cy="896112"/>
-          </a:xfrm>
-          <a:prstGeom prst="arc">
-            <a:avLst/>
-          </a:prstGeom>
-          <a:noFill/>
-          <a:ln w="25400">
-            <a:solidFill>
-              <a:srgbClr val="0068B7"/>
-            </a:solidFill>
-            <a:prstDash val="solid"/>
-          </a:ln>
-        </p:spPr>
+          <p:cNvPr id="14" name="Text 12"/>
+          <p:cNvSpPr/>
+          <p:nvPr/>
+        </p:nvSpPr>
+        <p:spPr>
+          <a:xfrm>
+            <a:off x="7799832" y="2935224"/>
+            <a:ext cx="3145536" cy="256032"/>
+          </a:xfrm>
+          <a:prstGeom prst="rect">
+            <a:avLst/>
+          </a:prstGeom>
+          <a:noFill/>
+          <a:ln/>
+        </p:spPr>
+        <p:txBody>
+          <a:bodyPr wrap="square" lIns="0" tIns="0" rIns="0" bIns="0" rtlCol="0" anchor="ctr"/>
+          <a:lstStyle/>
+          <a:p>
+            <a:pPr indent="0" marL="0">
+              <a:buNone/>
+            </a:pPr>
+            <a:r>
+              <a:rPr lang="en-US" sz="1300" b="1" dirty="0">
+                <a:solidFill>
+                  <a:srgbClr val="0068B7"/>
+                </a:solidFill>
+                <a:latin typeface="Aptos" pitchFamily="34" charset="0"/>
+                <a:ea typeface="Aptos" pitchFamily="34" charset="-122"/>
+                <a:cs typeface="Aptos" pitchFamily="34" charset="-120"/>
+              </a:rPr>
+              <a:t>Concept checkpoints</a:t>
+            </a:r>
+            <a:endParaRPr lang="en-US" sz="1300" dirty="0"/>
+          </a:p>
+        </p:txBody>
       </p:sp>
       <p:sp>
         <p:nvSpPr>
@@ -12048,102 +11703,67 @@
         </p:nvSpPr>
         <p:spPr>
           <a:xfrm>
-            <a:off x="7909560" y="3099816"/>
-            <a:ext cx="2926080" cy="256032"/>
-          </a:xfrm>
-          <a:prstGeom prst="rect">
-            <a:avLst/>
-          </a:prstGeom>
-          <a:noFill/>
-          <a:ln/>
-        </p:spPr>
-        <p:txBody>
-          <a:bodyPr wrap="square" lIns="0" tIns="0" rIns="0" bIns="0" rtlCol="0" anchor="ctr"/>
-          <a:lstStyle/>
-          <a:p>
-            <a:pPr algn="ctr" indent="0" marL="0">
-              <a:buNone/>
-            </a:pPr>
-            <a:r>
-              <a:rPr lang="en-US" sz="1500" b="1" dirty="0">
-                <a:solidFill>
-                  <a:srgbClr val="003A63"/>
-                </a:solidFill>
-                <a:latin typeface="Aptos" pitchFamily="34" charset="0"/>
-                <a:ea typeface="Aptos" pitchFamily="34" charset="-122"/>
-                <a:cs typeface="Aptos" pitchFamily="34" charset="-120"/>
-              </a:rPr>
-              <a:t>Risk</a:t>
-            </a:r>
-            <a:endParaRPr lang="en-US" sz="1500" dirty="0"/>
+            <a:off x="7818120" y="3300984"/>
+            <a:ext cx="3090672" cy="877824"/>
+          </a:xfrm>
+          <a:prstGeom prst="rect">
+            <a:avLst/>
+          </a:prstGeom>
+          <a:noFill/>
+          <a:ln/>
+        </p:spPr>
+        <p:txBody>
+          <a:bodyPr wrap="square" lIns="254" tIns="254" rIns="254" bIns="254" rtlCol="0" anchor="t">
+            <a:normAutofit/>
+          </a:bodyPr>
+          <a:lstStyle/>
+          <a:p>
+            <a:r>
+              <a:rPr lang="en-US" sz="1380" dirty="0">
+                <a:solidFill>
+                  <a:srgbClr val="17364A"/>
+                </a:solidFill>
+                <a:latin typeface="Aptos" pitchFamily="34" charset="0"/>
+                <a:ea typeface="Aptos" pitchFamily="34" charset="-122"/>
+                <a:cs typeface="Aptos" pitchFamily="34" charset="-120"/>
+              </a:rPr>
+              <a:t>1.</a:t>
+            </a:r>
+            <a:endParaRPr lang="en-US" sz="1380" dirty="0"/>
+          </a:p>
+          <a:p>
+            <a:r>
+              <a:rPr lang="en-US" sz="1380" dirty="0">
+                <a:solidFill>
+                  <a:srgbClr val="17364A"/>
+                </a:solidFill>
+                <a:latin typeface="Aptos" pitchFamily="34" charset="0"/>
+                <a:ea typeface="Aptos" pitchFamily="34" charset="-122"/>
+                <a:cs typeface="Aptos" pitchFamily="34" charset="-120"/>
+              </a:rPr>
+              <a:t>Why can overall accuracy be misleading?</a:t>
+            </a:r>
+            <a:endParaRPr lang="en-US" sz="1380" dirty="0"/>
+          </a:p>
+          <a:p>
+            <a:r>
+              <a:rPr lang="en-US" sz="1380" dirty="0">
+                <a:solidFill>
+                  <a:srgbClr val="17364A"/>
+                </a:solidFill>
+                <a:latin typeface="Aptos" pitchFamily="34" charset="0"/>
+                <a:ea typeface="Aptos" pitchFamily="34" charset="-122"/>
+                <a:cs typeface="Aptos" pitchFamily="34" charset="-120"/>
+              </a:rPr>
+              <a:t>2.</a:t>
+            </a:r>
+            <a:endParaRPr lang="en-US" sz="1380" dirty="0"/>
           </a:p>
         </p:txBody>
       </p:sp>
       <p:sp>
         <p:nvSpPr>
           <p:cNvPr id="16" name="Shape 14"/>
-          <p:cNvSpPr/>
-          <p:nvPr/>
-        </p:nvSpPr>
-        <p:spPr>
-          <a:xfrm>
-            <a:off x="8366760" y="3639312"/>
-            <a:ext cx="2011680" cy="0"/>
-          </a:xfrm>
-          <a:prstGeom prst="line">
-            <a:avLst/>
-          </a:prstGeom>
-          <a:noFill/>
-          <a:ln w="63500">
-            <a:solidFill>
-              <a:srgbClr val="2F8A28"/>
-            </a:solidFill>
-            <a:prstDash val="solid"/>
-          </a:ln>
-        </p:spPr>
-      </p:sp>
-      <p:sp>
-        <p:nvSpPr>
-          <p:cNvPr id="17" name="Text 15"/>
-          <p:cNvSpPr/>
-          <p:nvPr/>
-        </p:nvSpPr>
-        <p:spPr>
-          <a:xfrm>
-            <a:off x="7909560" y="3849624"/>
-            <a:ext cx="2926080" cy="164592"/>
-          </a:xfrm>
-          <a:prstGeom prst="rect">
-            <a:avLst/>
-          </a:prstGeom>
-          <a:noFill/>
-          <a:ln/>
-        </p:spPr>
-        <p:txBody>
-          <a:bodyPr wrap="square" lIns="0" tIns="0" rIns="0" bIns="0" rtlCol="0" anchor="ctr"/>
-          <a:lstStyle/>
-          <a:p>
-            <a:pPr algn="ctr" indent="0" marL="0">
-              <a:buNone/>
-            </a:pPr>
-            <a:r>
-              <a:rPr lang="en-US" sz="900" dirty="0">
-                <a:solidFill>
-                  <a:srgbClr val="003A63"/>
-                </a:solidFill>
-                <a:latin typeface="Aptos" pitchFamily="34" charset="0"/>
-                <a:ea typeface="Aptos" pitchFamily="34" charset="-122"/>
-                <a:cs typeface="Aptos" pitchFamily="34" charset="-120"/>
-              </a:rPr>
-              <a:t>Human review</a:t>
-            </a:r>
-            <a:endParaRPr lang="en-US" sz="900" dirty="0"/>
-          </a:p>
-        </p:txBody>
-      </p:sp>
-      <p:sp>
-        <p:nvSpPr>
-          <p:cNvPr id="18" name="Shape 16"/>
           <p:cNvSpPr/>
           <p:nvPr/>
         </p:nvSpPr>
@@ -12170,7 +11790,7 @@
       </p:sp>
       <p:sp>
         <p:nvSpPr>
-          <p:cNvPr id="19" name="Text 17"/>
+          <p:cNvPr id="17" name="Text 15"/>
           <p:cNvSpPr/>
           <p:nvPr/>
         </p:nvSpPr>
@@ -12209,7 +11829,7 @@
       </p:sp>
       <p:sp>
         <p:nvSpPr>
-          <p:cNvPr id="20" name="Text 18"/>
+          <p:cNvPr id="18" name="Text 16"/>
           <p:cNvSpPr/>
           <p:nvPr/>
         </p:nvSpPr>
@@ -12717,13 +12337,11 @@
             </a:avLst>
           </a:prstGeom>
           <a:solidFill>
-            <a:srgbClr val="FFFFFF">
-              <a:alpha val="88000"/>
-            </a:srgbClr>
+            <a:srgbClr val="FFFFFF"/>
           </a:solidFill>
           <a:ln w="12700">
             <a:solidFill>
-              <a:srgbClr val="D6E8F2"/>
+              <a:srgbClr val="B9D7E6"/>
             </a:solidFill>
             <a:prstDash val="solid"/>
           </a:ln>
@@ -12731,26 +12349,42 @@
       </p:sp>
       <p:sp>
         <p:nvSpPr>
-          <p:cNvPr id="14" name="Shape 12"/>
-          <p:cNvSpPr/>
-          <p:nvPr/>
-        </p:nvSpPr>
-        <p:spPr>
-          <a:xfrm>
-            <a:off x="8046720" y="3108960"/>
-            <a:ext cx="2651760" cy="896112"/>
-          </a:xfrm>
-          <a:prstGeom prst="arc">
-            <a:avLst/>
-          </a:prstGeom>
-          <a:noFill/>
-          <a:ln w="25400">
-            <a:solidFill>
-              <a:srgbClr val="0068B7"/>
-            </a:solidFill>
-            <a:prstDash val="solid"/>
-          </a:ln>
-        </p:spPr>
+          <p:cNvPr id="14" name="Text 12"/>
+          <p:cNvSpPr/>
+          <p:nvPr/>
+        </p:nvSpPr>
+        <p:spPr>
+          <a:xfrm>
+            <a:off x="7799832" y="2935224"/>
+            <a:ext cx="3145536" cy="256032"/>
+          </a:xfrm>
+          <a:prstGeom prst="rect">
+            <a:avLst/>
+          </a:prstGeom>
+          <a:noFill/>
+          <a:ln/>
+        </p:spPr>
+        <p:txBody>
+          <a:bodyPr wrap="square" lIns="0" tIns="0" rIns="0" bIns="0" rtlCol="0" anchor="ctr"/>
+          <a:lstStyle/>
+          <a:p>
+            <a:pPr indent="0" marL="0">
+              <a:buNone/>
+            </a:pPr>
+            <a:r>
+              <a:rPr lang="en-US" sz="1300" b="1" dirty="0">
+                <a:solidFill>
+                  <a:srgbClr val="0068B7"/>
+                </a:solidFill>
+                <a:latin typeface="Aptos" pitchFamily="34" charset="0"/>
+                <a:ea typeface="Aptos" pitchFamily="34" charset="-122"/>
+                <a:cs typeface="Aptos" pitchFamily="34" charset="-120"/>
+              </a:rPr>
+              <a:t>Concept checkpoints</a:t>
+            </a:r>
+            <a:endParaRPr lang="en-US" sz="1300" dirty="0"/>
+          </a:p>
+        </p:txBody>
       </p:sp>
       <p:sp>
         <p:nvSpPr>
@@ -12760,102 +12394,53 @@
         </p:nvSpPr>
         <p:spPr>
           <a:xfrm>
-            <a:off x="7909560" y="3099816"/>
-            <a:ext cx="2926080" cy="256032"/>
-          </a:xfrm>
-          <a:prstGeom prst="rect">
-            <a:avLst/>
-          </a:prstGeom>
-          <a:noFill/>
-          <a:ln/>
-        </p:spPr>
-        <p:txBody>
-          <a:bodyPr wrap="square" lIns="0" tIns="0" rIns="0" bIns="0" rtlCol="0" anchor="ctr"/>
-          <a:lstStyle/>
-          <a:p>
-            <a:pPr algn="ctr" indent="0" marL="0">
-              <a:buNone/>
-            </a:pPr>
-            <a:r>
-              <a:rPr lang="en-US" sz="1500" b="1" dirty="0">
-                <a:solidFill>
-                  <a:srgbClr val="003A63"/>
-                </a:solidFill>
-                <a:latin typeface="Aptos" pitchFamily="34" charset="0"/>
-                <a:ea typeface="Aptos" pitchFamily="34" charset="-122"/>
-                <a:cs typeface="Aptos" pitchFamily="34" charset="-120"/>
-              </a:rPr>
-              <a:t>Risk</a:t>
-            </a:r>
-            <a:endParaRPr lang="en-US" sz="1500" dirty="0"/>
+            <a:off x="7818120" y="3300984"/>
+            <a:ext cx="3090672" cy="877824"/>
+          </a:xfrm>
+          <a:prstGeom prst="rect">
+            <a:avLst/>
+          </a:prstGeom>
+          <a:noFill/>
+          <a:ln/>
+        </p:spPr>
+        <p:txBody>
+          <a:bodyPr wrap="square" lIns="254" tIns="254" rIns="254" bIns="254" rtlCol="0" anchor="t">
+            <a:normAutofit/>
+          </a:bodyPr>
+          <a:lstStyle/>
+          <a:p>
+            <a:r>
+              <a:rPr lang="en-US" sz="1380" dirty="0">
+                <a:solidFill>
+                  <a:srgbClr val="17364A"/>
+                </a:solidFill>
+                <a:latin typeface="Aptos" pitchFamily="34" charset="0"/>
+                <a:ea typeface="Aptos" pitchFamily="34" charset="-122"/>
+                <a:cs typeface="Aptos" pitchFamily="34" charset="-120"/>
+              </a:rPr>
+              <a:t>NIST Artificial Intelligence Risk Management Framework:.</a:t>
+            </a:r>
+            <a:endParaRPr lang="en-US" sz="1380" dirty="0"/>
+          </a:p>
+          <a:p>
+            <a:r>
+              <a:rPr lang="en-US" sz="1380" dirty="0">
+                <a:solidFill>
+                  <a:srgbClr val="17364A"/>
+                </a:solidFill>
+                <a:latin typeface="Aptos" pitchFamily="34" charset="0"/>
+                <a:ea typeface="Aptos" pitchFamily="34" charset="-122"/>
+                <a:cs typeface="Aptos" pitchFamily="34" charset="-120"/>
+              </a:rPr>
+              <a:t>WHO Guidance on Large Multi-Modal Models:.</a:t>
+            </a:r>
+            <a:endParaRPr lang="en-US" sz="1380" dirty="0"/>
           </a:p>
         </p:txBody>
       </p:sp>
       <p:sp>
         <p:nvSpPr>
           <p:cNvPr id="16" name="Shape 14"/>
-          <p:cNvSpPr/>
-          <p:nvPr/>
-        </p:nvSpPr>
-        <p:spPr>
-          <a:xfrm>
-            <a:off x="8366760" y="3639312"/>
-            <a:ext cx="2011680" cy="0"/>
-          </a:xfrm>
-          <a:prstGeom prst="line">
-            <a:avLst/>
-          </a:prstGeom>
-          <a:noFill/>
-          <a:ln w="63500">
-            <a:solidFill>
-              <a:srgbClr val="2F8A28"/>
-            </a:solidFill>
-            <a:prstDash val="solid"/>
-          </a:ln>
-        </p:spPr>
-      </p:sp>
-      <p:sp>
-        <p:nvSpPr>
-          <p:cNvPr id="17" name="Text 15"/>
-          <p:cNvSpPr/>
-          <p:nvPr/>
-        </p:nvSpPr>
-        <p:spPr>
-          <a:xfrm>
-            <a:off x="7909560" y="3849624"/>
-            <a:ext cx="2926080" cy="164592"/>
-          </a:xfrm>
-          <a:prstGeom prst="rect">
-            <a:avLst/>
-          </a:prstGeom>
-          <a:noFill/>
-          <a:ln/>
-        </p:spPr>
-        <p:txBody>
-          <a:bodyPr wrap="square" lIns="0" tIns="0" rIns="0" bIns="0" rtlCol="0" anchor="ctr"/>
-          <a:lstStyle/>
-          <a:p>
-            <a:pPr algn="ctr" indent="0" marL="0">
-              <a:buNone/>
-            </a:pPr>
-            <a:r>
-              <a:rPr lang="en-US" sz="900" dirty="0">
-                <a:solidFill>
-                  <a:srgbClr val="003A63"/>
-                </a:solidFill>
-                <a:latin typeface="Aptos" pitchFamily="34" charset="0"/>
-                <a:ea typeface="Aptos" pitchFamily="34" charset="-122"/>
-                <a:cs typeface="Aptos" pitchFamily="34" charset="-120"/>
-              </a:rPr>
-              <a:t>Human review</a:t>
-            </a:r>
-            <a:endParaRPr lang="en-US" sz="900" dirty="0"/>
-          </a:p>
-        </p:txBody>
-      </p:sp>
-      <p:sp>
-        <p:nvSpPr>
-          <p:cNvPr id="18" name="Shape 16"/>
           <p:cNvSpPr/>
           <p:nvPr/>
         </p:nvSpPr>
@@ -12882,7 +12467,7 @@
       </p:sp>
       <p:sp>
         <p:nvSpPr>
-          <p:cNvPr id="19" name="Text 17"/>
+          <p:cNvPr id="17" name="Text 15"/>
           <p:cNvSpPr/>
           <p:nvPr/>
         </p:nvSpPr>
@@ -12921,7 +12506,7 @@
       </p:sp>
       <p:sp>
         <p:nvSpPr>
-          <p:cNvPr id="20" name="Text 18"/>
+          <p:cNvPr id="18" name="Text 16"/>
           <p:cNvSpPr/>
           <p:nvPr/>
         </p:nvSpPr>
@@ -13434,20 +13019,20 @@
         </p:nvSpPr>
         <p:spPr>
           <a:xfrm>
-            <a:off x="7818120" y="3977640"/>
-            <a:ext cx="972312" cy="749808"/>
+            <a:off x="8046720" y="3794760"/>
+            <a:ext cx="3063240" cy="1600200"/>
           </a:xfrm>
           <a:prstGeom prst="roundRect">
             <a:avLst>
-              <a:gd name="adj" fmla="val 14634"/>
+              <a:gd name="adj" fmla="val 6857"/>
             </a:avLst>
           </a:prstGeom>
           <a:solidFill>
-            <a:srgbClr val="0068B7"/>
+            <a:srgbClr val="FFFFFF"/>
           </a:solidFill>
           <a:ln w="12700">
             <a:solidFill>
-              <a:srgbClr val="0068B7"/>
+              <a:srgbClr val="B9D7E6"/>
             </a:solidFill>
             <a:prstDash val="solid"/>
           </a:ln>
@@ -13461,172 +13046,100 @@
         </p:nvSpPr>
         <p:spPr>
           <a:xfrm>
-            <a:off x="7891272" y="4169664"/>
-            <a:ext cx="826008" cy="310896"/>
-          </a:xfrm>
-          <a:prstGeom prst="rect">
-            <a:avLst/>
-          </a:prstGeom>
-          <a:noFill/>
-          <a:ln/>
-        </p:spPr>
-        <p:txBody>
-          <a:bodyPr wrap="square" lIns="0" tIns="0" rIns="0" bIns="0" rtlCol="0" anchor="ctr">
+            <a:off x="8211312" y="3941064"/>
+            <a:ext cx="2734056" cy="256032"/>
+          </a:xfrm>
+          <a:prstGeom prst="rect">
+            <a:avLst/>
+          </a:prstGeom>
+          <a:noFill/>
+          <a:ln/>
+        </p:spPr>
+        <p:txBody>
+          <a:bodyPr wrap="square" lIns="0" tIns="0" rIns="0" bIns="0" rtlCol="0" anchor="ctr"/>
+          <a:lstStyle/>
+          <a:p>
+            <a:pPr indent="0" marL="0">
+              <a:buNone/>
+            </a:pPr>
+            <a:r>
+              <a:rPr lang="en-US" sz="1300" b="1" dirty="0">
+                <a:solidFill>
+                  <a:srgbClr val="0068B7"/>
+                </a:solidFill>
+                <a:latin typeface="Aptos" pitchFamily="34" charset="0"/>
+                <a:ea typeface="Aptos" pitchFamily="34" charset="-122"/>
+                <a:cs typeface="Aptos" pitchFamily="34" charset="-120"/>
+              </a:rPr>
+              <a:t>Use the play links to</a:t>
+            </a:r>
+            <a:endParaRPr lang="en-US" sz="1300" dirty="0"/>
+          </a:p>
+        </p:txBody>
+      </p:sp>
+      <p:sp>
+        <p:nvSpPr>
+          <p:cNvPr id="15" name="Text 13"/>
+          <p:cNvSpPr/>
+          <p:nvPr/>
+        </p:nvSpPr>
+        <p:spPr>
+          <a:xfrm>
+            <a:off x="8229600" y="4306824"/>
+            <a:ext cx="2679192" cy="941832"/>
+          </a:xfrm>
+          <a:prstGeom prst="rect">
+            <a:avLst/>
+          </a:prstGeom>
+          <a:noFill/>
+          <a:ln/>
+        </p:spPr>
+        <p:txBody>
+          <a:bodyPr wrap="square" lIns="254" tIns="254" rIns="254" bIns="254" rtlCol="0" anchor="t">
             <a:normAutofit/>
           </a:bodyPr>
           <a:lstStyle/>
           <a:p>
-            <a:pPr algn="ctr" indent="0" marL="0">
-              <a:buNone/>
-            </a:pPr>
-            <a:r>
-              <a:rPr lang="en-US" sz="1500" b="1" dirty="0">
-                <a:solidFill>
-                  <a:srgbClr val="FFFFFF"/>
-                </a:solidFill>
-                <a:latin typeface="Aptos" pitchFamily="34" charset="0"/>
-                <a:ea typeface="Aptos" pitchFamily="34" charset="-122"/>
-                <a:cs typeface="Aptos" pitchFamily="34" charset="-120"/>
-              </a:rPr>
-              <a:t>Lesson</a:t>
-            </a:r>
-            <a:endParaRPr lang="en-US" sz="1500" dirty="0"/>
-          </a:p>
-        </p:txBody>
-      </p:sp>
-      <p:sp>
-        <p:nvSpPr>
-          <p:cNvPr id="15" name="Shape 13"/>
-          <p:cNvSpPr/>
-          <p:nvPr/>
-        </p:nvSpPr>
-        <p:spPr>
-          <a:xfrm>
-            <a:off x="9046464" y="3977640"/>
-            <a:ext cx="972312" cy="749808"/>
-          </a:xfrm>
-          <a:prstGeom prst="roundRect">
-            <a:avLst>
-              <a:gd name="adj" fmla="val 14634"/>
-            </a:avLst>
-          </a:prstGeom>
-          <a:solidFill>
-            <a:srgbClr val="2F8A28"/>
-          </a:solidFill>
-          <a:ln w="12700">
-            <a:solidFill>
-              <a:srgbClr val="2F8A28"/>
-            </a:solidFill>
-            <a:prstDash val="solid"/>
-          </a:ln>
-        </p:spPr>
-      </p:sp>
-      <p:sp>
-        <p:nvSpPr>
-          <p:cNvPr id="16" name="Text 14"/>
-          <p:cNvSpPr/>
-          <p:nvPr/>
-        </p:nvSpPr>
-        <p:spPr>
-          <a:xfrm>
-            <a:off x="9119616" y="4169664"/>
-            <a:ext cx="826008" cy="310896"/>
-          </a:xfrm>
-          <a:prstGeom prst="rect">
-            <a:avLst/>
-          </a:prstGeom>
-          <a:noFill/>
-          <a:ln/>
-        </p:spPr>
-        <p:txBody>
-          <a:bodyPr wrap="square" lIns="0" tIns="0" rIns="0" bIns="0" rtlCol="0" anchor="ctr">
-            <a:normAutofit/>
-          </a:bodyPr>
-          <a:lstStyle/>
-          <a:p>
-            <a:pPr algn="ctr" indent="0" marL="0">
-              <a:buNone/>
-            </a:pPr>
-            <a:r>
-              <a:rPr lang="en-US" sz="1500" b="1" dirty="0">
-                <a:solidFill>
-                  <a:srgbClr val="FFFFFF"/>
-                </a:solidFill>
-                <a:latin typeface="Aptos" pitchFamily="34" charset="0"/>
-                <a:ea typeface="Aptos" pitchFamily="34" charset="-122"/>
-                <a:cs typeface="Aptos" pitchFamily="34" charset="-120"/>
-              </a:rPr>
-              <a:t>Plays</a:t>
-            </a:r>
-            <a:endParaRPr lang="en-US" sz="1500" dirty="0"/>
-          </a:p>
-        </p:txBody>
-      </p:sp>
-      <p:sp>
-        <p:nvSpPr>
-          <p:cNvPr id="17" name="Shape 15"/>
-          <p:cNvSpPr/>
-          <p:nvPr/>
-        </p:nvSpPr>
-        <p:spPr>
-          <a:xfrm>
-            <a:off x="10274808" y="3977640"/>
-            <a:ext cx="972312" cy="749808"/>
-          </a:xfrm>
-          <a:prstGeom prst="roundRect">
-            <a:avLst>
-              <a:gd name="adj" fmla="val 14634"/>
-            </a:avLst>
-          </a:prstGeom>
-          <a:solidFill>
-            <a:srgbClr val="6A4CA3"/>
-          </a:solidFill>
-          <a:ln w="12700">
-            <a:solidFill>
-              <a:srgbClr val="6A4CA3"/>
-            </a:solidFill>
-            <a:prstDash val="solid"/>
-          </a:ln>
-        </p:spPr>
-      </p:sp>
-      <p:sp>
-        <p:nvSpPr>
-          <p:cNvPr id="18" name="Text 16"/>
-          <p:cNvSpPr/>
-          <p:nvPr/>
-        </p:nvSpPr>
-        <p:spPr>
-          <a:xfrm>
-            <a:off x="10347960" y="4169664"/>
-            <a:ext cx="826008" cy="310896"/>
-          </a:xfrm>
-          <a:prstGeom prst="rect">
-            <a:avLst/>
-          </a:prstGeom>
-          <a:noFill/>
-          <a:ln/>
-        </p:spPr>
-        <p:txBody>
-          <a:bodyPr wrap="square" lIns="0" tIns="0" rIns="0" bIns="0" rtlCol="0" anchor="ctr">
-            <a:normAutofit/>
-          </a:bodyPr>
-          <a:lstStyle/>
-          <a:p>
-            <a:pPr algn="ctr" indent="0" marL="0">
-              <a:buNone/>
-            </a:pPr>
-            <a:r>
-              <a:rPr lang="en-US" sz="1500" b="1" dirty="0">
-                <a:solidFill>
-                  <a:srgbClr val="FFFFFF"/>
-                </a:solidFill>
-                <a:latin typeface="Aptos" pitchFamily="34" charset="0"/>
-                <a:ea typeface="Aptos" pitchFamily="34" charset="-122"/>
-                <a:cs typeface="Aptos" pitchFamily="34" charset="-120"/>
-              </a:rPr>
-              <a:t>Action</a:t>
-            </a:r>
-            <a:endParaRPr lang="en-US" sz="1500" dirty="0"/>
+            <a:r>
+              <a:rPr lang="en-US" sz="1380" dirty="0">
+                <a:solidFill>
+                  <a:srgbClr val="17364A"/>
+                </a:solidFill>
+                <a:latin typeface="Aptos" pitchFamily="34" charset="0"/>
+                <a:ea typeface="Aptos" pitchFamily="34" charset="-122"/>
+                <a:cs typeface="Aptos" pitchFamily="34" charset="-120"/>
+              </a:rPr>
+              <a:t>Locate the decision point in the playbook sequence.</a:t>
+            </a:r>
+            <a:endParaRPr lang="en-US" sz="1380" dirty="0"/>
+          </a:p>
+          <a:p>
+            <a:r>
+              <a:rPr lang="en-US" sz="1380" dirty="0">
+                <a:solidFill>
+                  <a:srgbClr val="17364A"/>
+                </a:solidFill>
+                <a:latin typeface="Aptos" pitchFamily="34" charset="0"/>
+                <a:ea typeface="Aptos" pitchFamily="34" charset="-122"/>
+                <a:cs typeface="Aptos" pitchFamily="34" charset="-120"/>
+              </a:rPr>
+              <a:t>Identify who should participate in the work.</a:t>
+            </a:r>
+            <a:endParaRPr lang="en-US" sz="1380" dirty="0"/>
+          </a:p>
+          <a:p>
+            <a:r>
+              <a:rPr lang="en-US" sz="1380" dirty="0">
+                <a:solidFill>
+                  <a:srgbClr val="17364A"/>
+                </a:solidFill>
+                <a:latin typeface="Aptos" pitchFamily="34" charset="0"/>
+                <a:ea typeface="Aptos" pitchFamily="34" charset="-122"/>
+                <a:cs typeface="Aptos" pitchFamily="34" charset="-120"/>
+              </a:rPr>
+              <a:t>Document the review, approval, or implementation step.</a:t>
+            </a:r>
+            <a:endParaRPr lang="en-US" sz="1380" dirty="0"/>
           </a:p>
         </p:txBody>
       </p:sp>
@@ -14104,20 +13617,20 @@
         </p:nvSpPr>
         <p:spPr>
           <a:xfrm>
-            <a:off x="7818120" y="3977640"/>
-            <a:ext cx="972312" cy="749808"/>
+            <a:off x="8046720" y="3794760"/>
+            <a:ext cx="3063240" cy="1600200"/>
           </a:xfrm>
           <a:prstGeom prst="roundRect">
             <a:avLst>
-              <a:gd name="adj" fmla="val 14634"/>
+              <a:gd name="adj" fmla="val 6857"/>
             </a:avLst>
           </a:prstGeom>
           <a:solidFill>
-            <a:srgbClr val="0068B7"/>
+            <a:srgbClr val="FFFFFF"/>
           </a:solidFill>
           <a:ln w="12700">
             <a:solidFill>
-              <a:srgbClr val="0068B7"/>
+              <a:srgbClr val="B9D7E6"/>
             </a:solidFill>
             <a:prstDash val="solid"/>
           </a:ln>
@@ -14131,172 +13644,100 @@
         </p:nvSpPr>
         <p:spPr>
           <a:xfrm>
-            <a:off x="7891272" y="4169664"/>
-            <a:ext cx="826008" cy="310896"/>
-          </a:xfrm>
-          <a:prstGeom prst="rect">
-            <a:avLst/>
-          </a:prstGeom>
-          <a:noFill/>
-          <a:ln/>
-        </p:spPr>
-        <p:txBody>
-          <a:bodyPr wrap="square" lIns="0" tIns="0" rIns="0" bIns="0" rtlCol="0" anchor="ctr">
+            <a:off x="8211312" y="3941064"/>
+            <a:ext cx="2734056" cy="256032"/>
+          </a:xfrm>
+          <a:prstGeom prst="rect">
+            <a:avLst/>
+          </a:prstGeom>
+          <a:noFill/>
+          <a:ln/>
+        </p:spPr>
+        <p:txBody>
+          <a:bodyPr wrap="square" lIns="0" tIns="0" rIns="0" bIns="0" rtlCol="0" anchor="ctr"/>
+          <a:lstStyle/>
+          <a:p>
+            <a:pPr indent="0" marL="0">
+              <a:buNone/>
+            </a:pPr>
+            <a:r>
+              <a:rPr lang="en-US" sz="1300" b="1" dirty="0">
+                <a:solidFill>
+                  <a:srgbClr val="0068B7"/>
+                </a:solidFill>
+                <a:latin typeface="Aptos" pitchFamily="34" charset="0"/>
+                <a:ea typeface="Aptos" pitchFamily="34" charset="-122"/>
+                <a:cs typeface="Aptos" pitchFamily="34" charset="-120"/>
+              </a:rPr>
+              <a:t>Tool selection cues</a:t>
+            </a:r>
+            <a:endParaRPr lang="en-US" sz="1300" dirty="0"/>
+          </a:p>
+        </p:txBody>
+      </p:sp>
+      <p:sp>
+        <p:nvSpPr>
+          <p:cNvPr id="15" name="Text 13"/>
+          <p:cNvSpPr/>
+          <p:nvPr/>
+        </p:nvSpPr>
+        <p:spPr>
+          <a:xfrm>
+            <a:off x="8229600" y="4306824"/>
+            <a:ext cx="2679192" cy="941832"/>
+          </a:xfrm>
+          <a:prstGeom prst="rect">
+            <a:avLst/>
+          </a:prstGeom>
+          <a:noFill/>
+          <a:ln/>
+        </p:spPr>
+        <p:txBody>
+          <a:bodyPr wrap="square" lIns="254" tIns="254" rIns="254" bIns="254" rtlCol="0" anchor="t">
             <a:normAutofit/>
           </a:bodyPr>
           <a:lstStyle/>
           <a:p>
-            <a:pPr algn="ctr" indent="0" marL="0">
-              <a:buNone/>
-            </a:pPr>
-            <a:r>
-              <a:rPr lang="en-US" sz="1500" b="1" dirty="0">
-                <a:solidFill>
-                  <a:srgbClr val="FFFFFF"/>
-                </a:solidFill>
-                <a:latin typeface="Aptos" pitchFamily="34" charset="0"/>
-                <a:ea typeface="Aptos" pitchFamily="34" charset="-122"/>
-                <a:cs typeface="Aptos" pitchFamily="34" charset="-120"/>
-              </a:rPr>
-              <a:t>Concept</a:t>
-            </a:r>
-            <a:endParaRPr lang="en-US" sz="1500" dirty="0"/>
-          </a:p>
-        </p:txBody>
-      </p:sp>
-      <p:sp>
-        <p:nvSpPr>
-          <p:cNvPr id="15" name="Shape 13"/>
-          <p:cNvSpPr/>
-          <p:nvPr/>
-        </p:nvSpPr>
-        <p:spPr>
-          <a:xfrm>
-            <a:off x="9046464" y="3977640"/>
-            <a:ext cx="972312" cy="749808"/>
-          </a:xfrm>
-          <a:prstGeom prst="roundRect">
-            <a:avLst>
-              <a:gd name="adj" fmla="val 14634"/>
-            </a:avLst>
-          </a:prstGeom>
-          <a:solidFill>
-            <a:srgbClr val="2F8A28"/>
-          </a:solidFill>
-          <a:ln w="12700">
-            <a:solidFill>
-              <a:srgbClr val="2F8A28"/>
-            </a:solidFill>
-            <a:prstDash val="solid"/>
-          </a:ln>
-        </p:spPr>
-      </p:sp>
-      <p:sp>
-        <p:nvSpPr>
-          <p:cNvPr id="16" name="Text 14"/>
-          <p:cNvSpPr/>
-          <p:nvPr/>
-        </p:nvSpPr>
-        <p:spPr>
-          <a:xfrm>
-            <a:off x="9119616" y="4169664"/>
-            <a:ext cx="826008" cy="310896"/>
-          </a:xfrm>
-          <a:prstGeom prst="rect">
-            <a:avLst/>
-          </a:prstGeom>
-          <a:noFill/>
-          <a:ln/>
-        </p:spPr>
-        <p:txBody>
-          <a:bodyPr wrap="square" lIns="0" tIns="0" rIns="0" bIns="0" rtlCol="0" anchor="ctr">
-            <a:normAutofit/>
-          </a:bodyPr>
-          <a:lstStyle/>
-          <a:p>
-            <a:pPr algn="ctr" indent="0" marL="0">
-              <a:buNone/>
-            </a:pPr>
-            <a:r>
-              <a:rPr lang="en-US" sz="1500" b="1" dirty="0">
-                <a:solidFill>
-                  <a:srgbClr val="FFFFFF"/>
-                </a:solidFill>
-                <a:latin typeface="Aptos" pitchFamily="34" charset="0"/>
-                <a:ea typeface="Aptos" pitchFamily="34" charset="-122"/>
-                <a:cs typeface="Aptos" pitchFamily="34" charset="-120"/>
-              </a:rPr>
-              <a:t>Tool</a:t>
-            </a:r>
-            <a:endParaRPr lang="en-US" sz="1500" dirty="0"/>
-          </a:p>
-        </p:txBody>
-      </p:sp>
-      <p:sp>
-        <p:nvSpPr>
-          <p:cNvPr id="17" name="Shape 15"/>
-          <p:cNvSpPr/>
-          <p:nvPr/>
-        </p:nvSpPr>
-        <p:spPr>
-          <a:xfrm>
-            <a:off x="10274808" y="3977640"/>
-            <a:ext cx="972312" cy="749808"/>
-          </a:xfrm>
-          <a:prstGeom prst="roundRect">
-            <a:avLst>
-              <a:gd name="adj" fmla="val 14634"/>
-            </a:avLst>
-          </a:prstGeom>
-          <a:solidFill>
-            <a:srgbClr val="D69A2D"/>
-          </a:solidFill>
-          <a:ln w="12700">
-            <a:solidFill>
-              <a:srgbClr val="D69A2D"/>
-            </a:solidFill>
-            <a:prstDash val="solid"/>
-          </a:ln>
-        </p:spPr>
-      </p:sp>
-      <p:sp>
-        <p:nvSpPr>
-          <p:cNvPr id="18" name="Text 16"/>
-          <p:cNvSpPr/>
-          <p:nvPr/>
-        </p:nvSpPr>
-        <p:spPr>
-          <a:xfrm>
-            <a:off x="10347960" y="4169664"/>
-            <a:ext cx="826008" cy="310896"/>
-          </a:xfrm>
-          <a:prstGeom prst="rect">
-            <a:avLst/>
-          </a:prstGeom>
-          <a:noFill/>
-          <a:ln/>
-        </p:spPr>
-        <p:txBody>
-          <a:bodyPr wrap="square" lIns="0" tIns="0" rIns="0" bIns="0" rtlCol="0" anchor="ctr">
-            <a:normAutofit/>
-          </a:bodyPr>
-          <a:lstStyle/>
-          <a:p>
-            <a:pPr algn="ctr" indent="0" marL="0">
-              <a:buNone/>
-            </a:pPr>
-            <a:r>
-              <a:rPr lang="en-US" sz="1500" b="1" dirty="0">
-                <a:solidFill>
-                  <a:srgbClr val="FFFFFF"/>
-                </a:solidFill>
-                <a:latin typeface="Aptos" pitchFamily="34" charset="0"/>
-                <a:ea typeface="Aptos" pitchFamily="34" charset="-122"/>
-                <a:cs typeface="Aptos" pitchFamily="34" charset="-120"/>
-              </a:rPr>
-              <a:t>Artifact</a:t>
-            </a:r>
-            <a:endParaRPr lang="en-US" sz="1500" dirty="0"/>
+            <a:r>
+              <a:rPr lang="en-US" sz="1380" dirty="0">
+                <a:solidFill>
+                  <a:srgbClr val="17364A"/>
+                </a:solidFill>
+                <a:latin typeface="Aptos" pitchFamily="34" charset="0"/>
+                <a:ea typeface="Aptos" pitchFamily="34" charset="-122"/>
+                <a:cs typeface="Aptos" pitchFamily="34" charset="-120"/>
+              </a:rPr>
+              <a:t>Use a tool when no comparable local process exists.</a:t>
+            </a:r>
+            <a:endParaRPr lang="en-US" sz="1380" dirty="0"/>
+          </a:p>
+          <a:p>
+            <a:r>
+              <a:rPr lang="en-US" sz="1380" dirty="0">
+                <a:solidFill>
+                  <a:srgbClr val="17364A"/>
+                </a:solidFill>
+                <a:latin typeface="Aptos" pitchFamily="34" charset="0"/>
+                <a:ea typeface="Aptos" pitchFamily="34" charset="-122"/>
+                <a:cs typeface="Aptos" pitchFamily="34" charset="-120"/>
+              </a:rPr>
+              <a:t>Adapt existing department templates when they already fit the purpose.</a:t>
+            </a:r>
+            <a:endParaRPr lang="en-US" sz="1380" dirty="0"/>
+          </a:p>
+          <a:p>
+            <a:r>
+              <a:rPr lang="en-US" sz="1380" dirty="0">
+                <a:solidFill>
+                  <a:srgbClr val="17364A"/>
+                </a:solidFill>
+                <a:latin typeface="Aptos" pitchFamily="34" charset="0"/>
+                <a:ea typeface="Aptos" pitchFamily="34" charset="-122"/>
+                <a:cs typeface="Aptos" pitchFamily="34" charset="-120"/>
+              </a:rPr>
+              <a:t>Save the completed artifact as evidence of the decision.</a:t>
+            </a:r>
+            <a:endParaRPr lang="en-US" sz="1380" dirty="0"/>
           </a:p>
         </p:txBody>
       </p:sp>
@@ -14769,13 +14210,11 @@
             </a:avLst>
           </a:prstGeom>
           <a:solidFill>
-            <a:srgbClr val="FFFFFF">
-              <a:alpha val="88000"/>
-            </a:srgbClr>
+            <a:srgbClr val="FFFFFF"/>
           </a:solidFill>
           <a:ln w="12700">
             <a:solidFill>
-              <a:srgbClr val="D6E8F2"/>
+              <a:srgbClr val="B9D7E6"/>
             </a:solidFill>
             <a:prstDash val="solid"/>
           </a:ln>
@@ -14783,26 +14222,42 @@
       </p:sp>
       <p:sp>
         <p:nvSpPr>
-          <p:cNvPr id="14" name="Shape 12"/>
-          <p:cNvSpPr/>
-          <p:nvPr/>
-        </p:nvSpPr>
-        <p:spPr>
-          <a:xfrm>
-            <a:off x="8046720" y="3108960"/>
-            <a:ext cx="2651760" cy="896112"/>
-          </a:xfrm>
-          <a:prstGeom prst="arc">
-            <a:avLst/>
-          </a:prstGeom>
-          <a:noFill/>
-          <a:ln w="25400">
-            <a:solidFill>
-              <a:srgbClr val="0068B7"/>
-            </a:solidFill>
-            <a:prstDash val="solid"/>
-          </a:ln>
-        </p:spPr>
+          <p:cNvPr id="14" name="Text 12"/>
+          <p:cNvSpPr/>
+          <p:nvPr/>
+        </p:nvSpPr>
+        <p:spPr>
+          <a:xfrm>
+            <a:off x="7799832" y="2935224"/>
+            <a:ext cx="3145536" cy="256032"/>
+          </a:xfrm>
+          <a:prstGeom prst="rect">
+            <a:avLst/>
+          </a:prstGeom>
+          <a:noFill/>
+          <a:ln/>
+        </p:spPr>
+        <p:txBody>
+          <a:bodyPr wrap="square" lIns="0" tIns="0" rIns="0" bIns="0" rtlCol="0" anchor="ctr"/>
+          <a:lstStyle/>
+          <a:p>
+            <a:pPr indent="0" marL="0">
+              <a:buNone/>
+            </a:pPr>
+            <a:r>
+              <a:rPr lang="en-US" sz="1300" b="1" dirty="0">
+                <a:solidFill>
+                  <a:srgbClr val="0068B7"/>
+                </a:solidFill>
+                <a:latin typeface="Aptos" pitchFamily="34" charset="0"/>
+                <a:ea typeface="Aptos" pitchFamily="34" charset="-122"/>
+                <a:cs typeface="Aptos" pitchFamily="34" charset="-120"/>
+              </a:rPr>
+              <a:t>Concept checkpoints</a:t>
+            </a:r>
+            <a:endParaRPr lang="en-US" sz="1300" dirty="0"/>
+          </a:p>
+        </p:txBody>
       </p:sp>
       <p:sp>
         <p:nvSpPr>
@@ -14812,102 +14267,67 @@
         </p:nvSpPr>
         <p:spPr>
           <a:xfrm>
-            <a:off x="7909560" y="3099816"/>
-            <a:ext cx="2926080" cy="256032"/>
-          </a:xfrm>
-          <a:prstGeom prst="rect">
-            <a:avLst/>
-          </a:prstGeom>
-          <a:noFill/>
-          <a:ln/>
-        </p:spPr>
-        <p:txBody>
-          <a:bodyPr wrap="square" lIns="0" tIns="0" rIns="0" bIns="0" rtlCol="0" anchor="ctr"/>
-          <a:lstStyle/>
-          <a:p>
-            <a:pPr algn="ctr" indent="0" marL="0">
-              <a:buNone/>
-            </a:pPr>
-            <a:r>
-              <a:rPr lang="en-US" sz="1500" b="1" dirty="0">
-                <a:solidFill>
-                  <a:srgbClr val="003A63"/>
-                </a:solidFill>
-                <a:latin typeface="Aptos" pitchFamily="34" charset="0"/>
-                <a:ea typeface="Aptos" pitchFamily="34" charset="-122"/>
-                <a:cs typeface="Aptos" pitchFamily="34" charset="-120"/>
-              </a:rPr>
-              <a:t>Risk</a:t>
-            </a:r>
-            <a:endParaRPr lang="en-US" sz="1500" dirty="0"/>
+            <a:off x="7818120" y="3300984"/>
+            <a:ext cx="3090672" cy="877824"/>
+          </a:xfrm>
+          <a:prstGeom prst="rect">
+            <a:avLst/>
+          </a:prstGeom>
+          <a:noFill/>
+          <a:ln/>
+        </p:spPr>
+        <p:txBody>
+          <a:bodyPr wrap="square" lIns="254" tIns="254" rIns="254" bIns="254" rtlCol="0" anchor="t">
+            <a:normAutofit/>
+          </a:bodyPr>
+          <a:lstStyle/>
+          <a:p>
+            <a:r>
+              <a:rPr lang="en-US" sz="1380" dirty="0">
+                <a:solidFill>
+                  <a:srgbClr val="17364A"/>
+                </a:solidFill>
+                <a:latin typeface="Aptos" pitchFamily="34" charset="0"/>
+                <a:ea typeface="Aptos" pitchFamily="34" charset="-122"/>
+                <a:cs typeface="Aptos" pitchFamily="34" charset="-120"/>
+              </a:rPr>
+              <a:t>Interpret sensitivity, specificity, positive predictive value, negative predictive value,.</a:t>
+            </a:r>
+            <a:endParaRPr lang="en-US" sz="1380" dirty="0"/>
+          </a:p>
+          <a:p>
+            <a:r>
+              <a:rPr lang="en-US" sz="1380" dirty="0">
+                <a:solidFill>
+                  <a:srgbClr val="17364A"/>
+                </a:solidFill>
+                <a:latin typeface="Aptos" pitchFamily="34" charset="0"/>
+                <a:ea typeface="Aptos" pitchFamily="34" charset="-122"/>
+                <a:cs typeface="Aptos" pitchFamily="34" charset="-120"/>
+              </a:rPr>
+              <a:t>Identify when model performance is insufficient for the intended use.</a:t>
+            </a:r>
+            <a:endParaRPr lang="en-US" sz="1380" dirty="0"/>
+          </a:p>
+          <a:p>
+            <a:r>
+              <a:rPr lang="en-US" sz="1380" dirty="0">
+                <a:solidFill>
+                  <a:srgbClr val="17364A"/>
+                </a:solidFill>
+                <a:latin typeface="Aptos" pitchFamily="34" charset="0"/>
+                <a:ea typeface="Aptos" pitchFamily="34" charset="-122"/>
+                <a:cs typeface="Aptos" pitchFamily="34" charset="-120"/>
+              </a:rPr>
+              <a:t>Design monitoring for drift, degradation, error patterns, and unintended consequences.</a:t>
+            </a:r>
+            <a:endParaRPr lang="en-US" sz="1380" dirty="0"/>
           </a:p>
         </p:txBody>
       </p:sp>
       <p:sp>
         <p:nvSpPr>
           <p:cNvPr id="16" name="Shape 14"/>
-          <p:cNvSpPr/>
-          <p:nvPr/>
-        </p:nvSpPr>
-        <p:spPr>
-          <a:xfrm>
-            <a:off x="8366760" y="3639312"/>
-            <a:ext cx="2011680" cy="0"/>
-          </a:xfrm>
-          <a:prstGeom prst="line">
-            <a:avLst/>
-          </a:prstGeom>
-          <a:noFill/>
-          <a:ln w="63500">
-            <a:solidFill>
-              <a:srgbClr val="2F8A28"/>
-            </a:solidFill>
-            <a:prstDash val="solid"/>
-          </a:ln>
-        </p:spPr>
-      </p:sp>
-      <p:sp>
-        <p:nvSpPr>
-          <p:cNvPr id="17" name="Text 15"/>
-          <p:cNvSpPr/>
-          <p:nvPr/>
-        </p:nvSpPr>
-        <p:spPr>
-          <a:xfrm>
-            <a:off x="7909560" y="3849624"/>
-            <a:ext cx="2926080" cy="164592"/>
-          </a:xfrm>
-          <a:prstGeom prst="rect">
-            <a:avLst/>
-          </a:prstGeom>
-          <a:noFill/>
-          <a:ln/>
-        </p:spPr>
-        <p:txBody>
-          <a:bodyPr wrap="square" lIns="0" tIns="0" rIns="0" bIns="0" rtlCol="0" anchor="ctr"/>
-          <a:lstStyle/>
-          <a:p>
-            <a:pPr algn="ctr" indent="0" marL="0">
-              <a:buNone/>
-            </a:pPr>
-            <a:r>
-              <a:rPr lang="en-US" sz="900" dirty="0">
-                <a:solidFill>
-                  <a:srgbClr val="003A63"/>
-                </a:solidFill>
-                <a:latin typeface="Aptos" pitchFamily="34" charset="0"/>
-                <a:ea typeface="Aptos" pitchFamily="34" charset="-122"/>
-                <a:cs typeface="Aptos" pitchFamily="34" charset="-120"/>
-              </a:rPr>
-              <a:t>Human review</a:t>
-            </a:r>
-            <a:endParaRPr lang="en-US" sz="900" dirty="0"/>
-          </a:p>
-        </p:txBody>
-      </p:sp>
-      <p:sp>
-        <p:nvSpPr>
-          <p:cNvPr id="18" name="Shape 16"/>
           <p:cNvSpPr/>
           <p:nvPr/>
         </p:nvSpPr>
@@ -14934,7 +14354,7 @@
       </p:sp>
       <p:sp>
         <p:nvSpPr>
-          <p:cNvPr id="19" name="Text 17"/>
+          <p:cNvPr id="17" name="Text 15"/>
           <p:cNvSpPr/>
           <p:nvPr/>
         </p:nvSpPr>
@@ -14973,7 +14393,7 @@
       </p:sp>
       <p:sp>
         <p:nvSpPr>
-          <p:cNvPr id="20" name="Text 18"/>
+          <p:cNvPr id="18" name="Text 16"/>
           <p:cNvSpPr/>
           <p:nvPr/>
         </p:nvSpPr>
@@ -15453,13 +14873,11 @@
             </a:avLst>
           </a:prstGeom>
           <a:solidFill>
-            <a:srgbClr val="FFFFFF">
-              <a:alpha val="88000"/>
-            </a:srgbClr>
+            <a:srgbClr val="FFFFFF"/>
           </a:solidFill>
           <a:ln w="12700">
             <a:solidFill>
-              <a:srgbClr val="D6E8F2"/>
+              <a:srgbClr val="B9D7E6"/>
             </a:solidFill>
             <a:prstDash val="solid"/>
           </a:ln>
@@ -15467,26 +14885,42 @@
       </p:sp>
       <p:sp>
         <p:nvSpPr>
-          <p:cNvPr id="14" name="Shape 12"/>
-          <p:cNvSpPr/>
-          <p:nvPr/>
-        </p:nvSpPr>
-        <p:spPr>
-          <a:xfrm>
-            <a:off x="8046720" y="3108960"/>
-            <a:ext cx="2651760" cy="896112"/>
-          </a:xfrm>
-          <a:prstGeom prst="arc">
-            <a:avLst/>
-          </a:prstGeom>
-          <a:noFill/>
-          <a:ln w="25400">
-            <a:solidFill>
-              <a:srgbClr val="0068B7"/>
-            </a:solidFill>
-            <a:prstDash val="solid"/>
-          </a:ln>
-        </p:spPr>
+          <p:cNvPr id="14" name="Text 12"/>
+          <p:cNvSpPr/>
+          <p:nvPr/>
+        </p:nvSpPr>
+        <p:spPr>
+          <a:xfrm>
+            <a:off x="7799832" y="2935224"/>
+            <a:ext cx="3145536" cy="256032"/>
+          </a:xfrm>
+          <a:prstGeom prst="rect">
+            <a:avLst/>
+          </a:prstGeom>
+          <a:noFill/>
+          <a:ln/>
+        </p:spPr>
+        <p:txBody>
+          <a:bodyPr wrap="square" lIns="0" tIns="0" rIns="0" bIns="0" rtlCol="0" anchor="ctr"/>
+          <a:lstStyle/>
+          <a:p>
+            <a:pPr indent="0" marL="0">
+              <a:buNone/>
+            </a:pPr>
+            <a:r>
+              <a:rPr lang="en-US" sz="1300" b="1" dirty="0">
+                <a:solidFill>
+                  <a:srgbClr val="0068B7"/>
+                </a:solidFill>
+                <a:latin typeface="Aptos" pitchFamily="34" charset="0"/>
+                <a:ea typeface="Aptos" pitchFamily="34" charset="-122"/>
+                <a:cs typeface="Aptos" pitchFamily="34" charset="-120"/>
+              </a:rPr>
+              <a:t>Concept checkpoints</a:t>
+            </a:r>
+            <a:endParaRPr lang="en-US" sz="1300" dirty="0"/>
+          </a:p>
+        </p:txBody>
       </p:sp>
       <p:sp>
         <p:nvSpPr>
@@ -15496,102 +14930,39 @@
         </p:nvSpPr>
         <p:spPr>
           <a:xfrm>
-            <a:off x="7909560" y="3099816"/>
-            <a:ext cx="2926080" cy="256032"/>
-          </a:xfrm>
-          <a:prstGeom prst="rect">
-            <a:avLst/>
-          </a:prstGeom>
-          <a:noFill/>
-          <a:ln/>
-        </p:spPr>
-        <p:txBody>
-          <a:bodyPr wrap="square" lIns="0" tIns="0" rIns="0" bIns="0" rtlCol="0" anchor="ctr"/>
-          <a:lstStyle/>
-          <a:p>
-            <a:pPr algn="ctr" indent="0" marL="0">
-              <a:buNone/>
-            </a:pPr>
-            <a:r>
-              <a:rPr lang="en-US" sz="1500" b="1" dirty="0">
-                <a:solidFill>
-                  <a:srgbClr val="003A63"/>
-                </a:solidFill>
-                <a:latin typeface="Aptos" pitchFamily="34" charset="0"/>
-                <a:ea typeface="Aptos" pitchFamily="34" charset="-122"/>
-                <a:cs typeface="Aptos" pitchFamily="34" charset="-120"/>
-              </a:rPr>
-              <a:t>Risk</a:t>
-            </a:r>
-            <a:endParaRPr lang="en-US" sz="1500" dirty="0"/>
+            <a:off x="7818120" y="3300984"/>
+            <a:ext cx="3090672" cy="877824"/>
+          </a:xfrm>
+          <a:prstGeom prst="rect">
+            <a:avLst/>
+          </a:prstGeom>
+          <a:noFill/>
+          <a:ln/>
+        </p:spPr>
+        <p:txBody>
+          <a:bodyPr wrap="square" lIns="254" tIns="254" rIns="254" bIns="254" rtlCol="0" anchor="t">
+            <a:normAutofit/>
+          </a:bodyPr>
+          <a:lstStyle/>
+          <a:p>
+            <a:r>
+              <a:rPr lang="en-US" sz="1380" dirty="0">
+                <a:solidFill>
+                  <a:srgbClr val="17364A"/>
+                </a:solidFill>
+                <a:latin typeface="Aptos" pitchFamily="34" charset="0"/>
+                <a:ea typeface="Aptos" pitchFamily="34" charset="-122"/>
+                <a:cs typeface="Aptos" pitchFamily="34" charset="-120"/>
+              </a:rPr>
+              <a:t>Produce an advanced validation plan for an AI-supported workflow.</a:t>
+            </a:r>
+            <a:endParaRPr lang="en-US" sz="1380" dirty="0"/>
           </a:p>
         </p:txBody>
       </p:sp>
       <p:sp>
         <p:nvSpPr>
           <p:cNvPr id="16" name="Shape 14"/>
-          <p:cNvSpPr/>
-          <p:nvPr/>
-        </p:nvSpPr>
-        <p:spPr>
-          <a:xfrm>
-            <a:off x="8366760" y="3639312"/>
-            <a:ext cx="2011680" cy="0"/>
-          </a:xfrm>
-          <a:prstGeom prst="line">
-            <a:avLst/>
-          </a:prstGeom>
-          <a:noFill/>
-          <a:ln w="63500">
-            <a:solidFill>
-              <a:srgbClr val="2F8A28"/>
-            </a:solidFill>
-            <a:prstDash val="solid"/>
-          </a:ln>
-        </p:spPr>
-      </p:sp>
-      <p:sp>
-        <p:nvSpPr>
-          <p:cNvPr id="17" name="Text 15"/>
-          <p:cNvSpPr/>
-          <p:nvPr/>
-        </p:nvSpPr>
-        <p:spPr>
-          <a:xfrm>
-            <a:off x="7909560" y="3849624"/>
-            <a:ext cx="2926080" cy="164592"/>
-          </a:xfrm>
-          <a:prstGeom prst="rect">
-            <a:avLst/>
-          </a:prstGeom>
-          <a:noFill/>
-          <a:ln/>
-        </p:spPr>
-        <p:txBody>
-          <a:bodyPr wrap="square" lIns="0" tIns="0" rIns="0" bIns="0" rtlCol="0" anchor="ctr"/>
-          <a:lstStyle/>
-          <a:p>
-            <a:pPr algn="ctr" indent="0" marL="0">
-              <a:buNone/>
-            </a:pPr>
-            <a:r>
-              <a:rPr lang="en-US" sz="900" dirty="0">
-                <a:solidFill>
-                  <a:srgbClr val="003A63"/>
-                </a:solidFill>
-                <a:latin typeface="Aptos" pitchFamily="34" charset="0"/>
-                <a:ea typeface="Aptos" pitchFamily="34" charset="-122"/>
-                <a:cs typeface="Aptos" pitchFamily="34" charset="-120"/>
-              </a:rPr>
-              <a:t>Human review</a:t>
-            </a:r>
-            <a:endParaRPr lang="en-US" sz="900" dirty="0"/>
-          </a:p>
-        </p:txBody>
-      </p:sp>
-      <p:sp>
-        <p:nvSpPr>
-          <p:cNvPr id="18" name="Shape 16"/>
           <p:cNvSpPr/>
           <p:nvPr/>
         </p:nvSpPr>
@@ -15618,7 +14989,7 @@
       </p:sp>
       <p:sp>
         <p:nvSpPr>
-          <p:cNvPr id="19" name="Text 17"/>
+          <p:cNvPr id="17" name="Text 15"/>
           <p:cNvSpPr/>
           <p:nvPr/>
         </p:nvSpPr>
@@ -15657,7 +15028,7 @@
       </p:sp>
       <p:sp>
         <p:nvSpPr>
-          <p:cNvPr id="20" name="Text 18"/>
+          <p:cNvPr id="18" name="Text 16"/>
           <p:cNvSpPr/>
           <p:nvPr/>
         </p:nvSpPr>
@@ -16165,13 +15536,11 @@
             </a:avLst>
           </a:prstGeom>
           <a:solidFill>
-            <a:srgbClr val="FFFFFF">
-              <a:alpha val="88000"/>
-            </a:srgbClr>
+            <a:srgbClr val="FFFFFF"/>
           </a:solidFill>
           <a:ln w="12700">
             <a:solidFill>
-              <a:srgbClr val="D6E8F2"/>
+              <a:srgbClr val="B9D7E6"/>
             </a:solidFill>
             <a:prstDash val="solid"/>
           </a:ln>
@@ -16179,26 +15548,42 @@
       </p:sp>
       <p:sp>
         <p:nvSpPr>
-          <p:cNvPr id="14" name="Shape 12"/>
-          <p:cNvSpPr/>
-          <p:nvPr/>
-        </p:nvSpPr>
-        <p:spPr>
-          <a:xfrm>
-            <a:off x="8046720" y="3108960"/>
-            <a:ext cx="2651760" cy="896112"/>
-          </a:xfrm>
-          <a:prstGeom prst="arc">
-            <a:avLst/>
-          </a:prstGeom>
-          <a:noFill/>
-          <a:ln w="25400">
-            <a:solidFill>
-              <a:srgbClr val="0068B7"/>
-            </a:solidFill>
-            <a:prstDash val="solid"/>
-          </a:ln>
-        </p:spPr>
+          <p:cNvPr id="14" name="Text 12"/>
+          <p:cNvSpPr/>
+          <p:nvPr/>
+        </p:nvSpPr>
+        <p:spPr>
+          <a:xfrm>
+            <a:off x="7799832" y="2935224"/>
+            <a:ext cx="3145536" cy="256032"/>
+          </a:xfrm>
+          <a:prstGeom prst="rect">
+            <a:avLst/>
+          </a:prstGeom>
+          <a:noFill/>
+          <a:ln/>
+        </p:spPr>
+        <p:txBody>
+          <a:bodyPr wrap="square" lIns="0" tIns="0" rIns="0" bIns="0" rtlCol="0" anchor="ctr"/>
+          <a:lstStyle/>
+          <a:p>
+            <a:pPr indent="0" marL="0">
+              <a:buNone/>
+            </a:pPr>
+            <a:r>
+              <a:rPr lang="en-US" sz="1300" b="1" dirty="0">
+                <a:solidFill>
+                  <a:srgbClr val="0068B7"/>
+                </a:solidFill>
+                <a:latin typeface="Aptos" pitchFamily="34" charset="0"/>
+                <a:ea typeface="Aptos" pitchFamily="34" charset="-122"/>
+                <a:cs typeface="Aptos" pitchFamily="34" charset="-120"/>
+              </a:rPr>
+              <a:t>Concept checkpoints</a:t>
+            </a:r>
+            <a:endParaRPr lang="en-US" sz="1300" dirty="0"/>
+          </a:p>
+        </p:txBody>
       </p:sp>
       <p:sp>
         <p:nvSpPr>
@@ -16208,102 +15593,67 @@
         </p:nvSpPr>
         <p:spPr>
           <a:xfrm>
-            <a:off x="7909560" y="3099816"/>
-            <a:ext cx="2926080" cy="256032"/>
-          </a:xfrm>
-          <a:prstGeom prst="rect">
-            <a:avLst/>
-          </a:prstGeom>
-          <a:noFill/>
-          <a:ln/>
-        </p:spPr>
-        <p:txBody>
-          <a:bodyPr wrap="square" lIns="0" tIns="0" rIns="0" bIns="0" rtlCol="0" anchor="ctr"/>
-          <a:lstStyle/>
-          <a:p>
-            <a:pPr algn="ctr" indent="0" marL="0">
-              <a:buNone/>
-            </a:pPr>
-            <a:r>
-              <a:rPr lang="en-US" sz="1500" b="1" dirty="0">
-                <a:solidFill>
-                  <a:srgbClr val="003A63"/>
-                </a:solidFill>
-                <a:latin typeface="Aptos" pitchFamily="34" charset="0"/>
-                <a:ea typeface="Aptos" pitchFamily="34" charset="-122"/>
-                <a:cs typeface="Aptos" pitchFamily="34" charset="-120"/>
-              </a:rPr>
-              <a:t>Risk</a:t>
-            </a:r>
-            <a:endParaRPr lang="en-US" sz="1500" dirty="0"/>
+            <a:off x="7818120" y="3300984"/>
+            <a:ext cx="3090672" cy="877824"/>
+          </a:xfrm>
+          <a:prstGeom prst="rect">
+            <a:avLst/>
+          </a:prstGeom>
+          <a:noFill/>
+          <a:ln/>
+        </p:spPr>
+        <p:txBody>
+          <a:bodyPr wrap="square" lIns="254" tIns="254" rIns="254" bIns="254" rtlCol="0" anchor="t">
+            <a:normAutofit/>
+          </a:bodyPr>
+          <a:lstStyle/>
+          <a:p>
+            <a:r>
+              <a:rPr lang="en-US" sz="1380" dirty="0">
+                <a:solidFill>
+                  <a:srgbClr val="17364A"/>
+                </a:solidFill>
+                <a:latin typeface="Aptos" pitchFamily="34" charset="0"/>
+                <a:ea typeface="Aptos" pitchFamily="34" charset="-122"/>
+                <a:cs typeface="Aptos" pitchFamily="34" charset="-120"/>
+              </a:rPr>
+              <a:t>Model validation is the process of determining whether an AI tool performs adequately for.</a:t>
+            </a:r>
+            <a:endParaRPr lang="en-US" sz="1380" dirty="0"/>
+          </a:p>
+          <a:p>
+            <a:r>
+              <a:rPr lang="en-US" sz="1380" dirty="0">
+                <a:solidFill>
+                  <a:srgbClr val="17364A"/>
+                </a:solidFill>
+                <a:latin typeface="Aptos" pitchFamily="34" charset="0"/>
+                <a:ea typeface="Aptos" pitchFamily="34" charset="-122"/>
+                <a:cs typeface="Aptos" pitchFamily="34" charset="-120"/>
+              </a:rPr>
+              <a:t>Advanced validation asks whether it works well enough, for whom, under what conditions,.</a:t>
+            </a:r>
+            <a:endParaRPr lang="en-US" sz="1380" dirty="0"/>
+          </a:p>
+          <a:p>
+            <a:r>
+              <a:rPr lang="en-US" sz="1380" dirty="0">
+                <a:solidFill>
+                  <a:srgbClr val="17364A"/>
+                </a:solidFill>
+                <a:latin typeface="Aptos" pitchFamily="34" charset="0"/>
+                <a:ea typeface="Aptos" pitchFamily="34" charset="-122"/>
+                <a:cs typeface="Aptos" pitchFamily="34" charset="-120"/>
+              </a:rPr>
+              <a:t>This module extends foundational validation content by focusing on metrics, subgroup.</a:t>
+            </a:r>
+            <a:endParaRPr lang="en-US" sz="1380" dirty="0"/>
           </a:p>
         </p:txBody>
       </p:sp>
       <p:sp>
         <p:nvSpPr>
           <p:cNvPr id="16" name="Shape 14"/>
-          <p:cNvSpPr/>
-          <p:nvPr/>
-        </p:nvSpPr>
-        <p:spPr>
-          <a:xfrm>
-            <a:off x="8366760" y="3639312"/>
-            <a:ext cx="2011680" cy="0"/>
-          </a:xfrm>
-          <a:prstGeom prst="line">
-            <a:avLst/>
-          </a:prstGeom>
-          <a:noFill/>
-          <a:ln w="63500">
-            <a:solidFill>
-              <a:srgbClr val="2F8A28"/>
-            </a:solidFill>
-            <a:prstDash val="solid"/>
-          </a:ln>
-        </p:spPr>
-      </p:sp>
-      <p:sp>
-        <p:nvSpPr>
-          <p:cNvPr id="17" name="Text 15"/>
-          <p:cNvSpPr/>
-          <p:nvPr/>
-        </p:nvSpPr>
-        <p:spPr>
-          <a:xfrm>
-            <a:off x="7909560" y="3849624"/>
-            <a:ext cx="2926080" cy="164592"/>
-          </a:xfrm>
-          <a:prstGeom prst="rect">
-            <a:avLst/>
-          </a:prstGeom>
-          <a:noFill/>
-          <a:ln/>
-        </p:spPr>
-        <p:txBody>
-          <a:bodyPr wrap="square" lIns="0" tIns="0" rIns="0" bIns="0" rtlCol="0" anchor="ctr"/>
-          <a:lstStyle/>
-          <a:p>
-            <a:pPr algn="ctr" indent="0" marL="0">
-              <a:buNone/>
-            </a:pPr>
-            <a:r>
-              <a:rPr lang="en-US" sz="900" dirty="0">
-                <a:solidFill>
-                  <a:srgbClr val="003A63"/>
-                </a:solidFill>
-                <a:latin typeface="Aptos" pitchFamily="34" charset="0"/>
-                <a:ea typeface="Aptos" pitchFamily="34" charset="-122"/>
-                <a:cs typeface="Aptos" pitchFamily="34" charset="-120"/>
-              </a:rPr>
-              <a:t>Human review</a:t>
-            </a:r>
-            <a:endParaRPr lang="en-US" sz="900" dirty="0"/>
-          </a:p>
-        </p:txBody>
-      </p:sp>
-      <p:sp>
-        <p:nvSpPr>
-          <p:cNvPr id="18" name="Shape 16"/>
           <p:cNvSpPr/>
           <p:nvPr/>
         </p:nvSpPr>
@@ -16330,7 +15680,7 @@
       </p:sp>
       <p:sp>
         <p:nvSpPr>
-          <p:cNvPr id="19" name="Text 17"/>
+          <p:cNvPr id="17" name="Text 15"/>
           <p:cNvSpPr/>
           <p:nvPr/>
         </p:nvSpPr>
@@ -16369,7 +15719,7 @@
       </p:sp>
       <p:sp>
         <p:nvSpPr>
-          <p:cNvPr id="20" name="Text 18"/>
+          <p:cNvPr id="18" name="Text 16"/>
           <p:cNvSpPr/>
           <p:nvPr/>
         </p:nvSpPr>
@@ -16877,13 +16227,11 @@
             </a:avLst>
           </a:prstGeom>
           <a:solidFill>
-            <a:srgbClr val="FFFFFF">
-              <a:alpha val="88000"/>
-            </a:srgbClr>
+            <a:srgbClr val="FFFFFF"/>
           </a:solidFill>
           <a:ln w="12700">
             <a:solidFill>
-              <a:srgbClr val="D6E8F2"/>
+              <a:srgbClr val="B9D7E6"/>
             </a:solidFill>
             <a:prstDash val="solid"/>
           </a:ln>
@@ -16891,26 +16239,42 @@
       </p:sp>
       <p:sp>
         <p:nvSpPr>
-          <p:cNvPr id="14" name="Shape 12"/>
-          <p:cNvSpPr/>
-          <p:nvPr/>
-        </p:nvSpPr>
-        <p:spPr>
-          <a:xfrm>
-            <a:off x="8046720" y="3108960"/>
-            <a:ext cx="2651760" cy="896112"/>
-          </a:xfrm>
-          <a:prstGeom prst="arc">
-            <a:avLst/>
-          </a:prstGeom>
-          <a:noFill/>
-          <a:ln w="25400">
-            <a:solidFill>
-              <a:srgbClr val="0068B7"/>
-            </a:solidFill>
-            <a:prstDash val="solid"/>
-          </a:ln>
-        </p:spPr>
+          <p:cNvPr id="14" name="Text 12"/>
+          <p:cNvSpPr/>
+          <p:nvPr/>
+        </p:nvSpPr>
+        <p:spPr>
+          <a:xfrm>
+            <a:off x="7799832" y="2935224"/>
+            <a:ext cx="3145536" cy="256032"/>
+          </a:xfrm>
+          <a:prstGeom prst="rect">
+            <a:avLst/>
+          </a:prstGeom>
+          <a:noFill/>
+          <a:ln/>
+        </p:spPr>
+        <p:txBody>
+          <a:bodyPr wrap="square" lIns="0" tIns="0" rIns="0" bIns="0" rtlCol="0" anchor="ctr"/>
+          <a:lstStyle/>
+          <a:p>
+            <a:pPr indent="0" marL="0">
+              <a:buNone/>
+            </a:pPr>
+            <a:r>
+              <a:rPr lang="en-US" sz="1300" b="1" dirty="0">
+                <a:solidFill>
+                  <a:srgbClr val="0068B7"/>
+                </a:solidFill>
+                <a:latin typeface="Aptos" pitchFamily="34" charset="0"/>
+                <a:ea typeface="Aptos" pitchFamily="34" charset="-122"/>
+                <a:cs typeface="Aptos" pitchFamily="34" charset="-120"/>
+              </a:rPr>
+              <a:t>Concept checkpoints</a:t>
+            </a:r>
+            <a:endParaRPr lang="en-US" sz="1300" dirty="0"/>
+          </a:p>
+        </p:txBody>
       </p:sp>
       <p:sp>
         <p:nvSpPr>
@@ -16920,102 +16284,67 @@
         </p:nvSpPr>
         <p:spPr>
           <a:xfrm>
-            <a:off x="7909560" y="3099816"/>
-            <a:ext cx="2926080" cy="256032"/>
-          </a:xfrm>
-          <a:prstGeom prst="rect">
-            <a:avLst/>
-          </a:prstGeom>
-          <a:noFill/>
-          <a:ln/>
-        </p:spPr>
-        <p:txBody>
-          <a:bodyPr wrap="square" lIns="0" tIns="0" rIns="0" bIns="0" rtlCol="0" anchor="ctr"/>
-          <a:lstStyle/>
-          <a:p>
-            <a:pPr algn="ctr" indent="0" marL="0">
-              <a:buNone/>
-            </a:pPr>
-            <a:r>
-              <a:rPr lang="en-US" sz="1500" b="1" dirty="0">
-                <a:solidFill>
-                  <a:srgbClr val="003A63"/>
-                </a:solidFill>
-                <a:latin typeface="Aptos" pitchFamily="34" charset="0"/>
-                <a:ea typeface="Aptos" pitchFamily="34" charset="-122"/>
-                <a:cs typeface="Aptos" pitchFamily="34" charset="-120"/>
-              </a:rPr>
-              <a:t>Risk</a:t>
-            </a:r>
-            <a:endParaRPr lang="en-US" sz="1500" dirty="0"/>
+            <a:off x="7818120" y="3300984"/>
+            <a:ext cx="3090672" cy="877824"/>
+          </a:xfrm>
+          <a:prstGeom prst="rect">
+            <a:avLst/>
+          </a:prstGeom>
+          <a:noFill/>
+          <a:ln/>
+        </p:spPr>
+        <p:txBody>
+          <a:bodyPr wrap="square" lIns="254" tIns="254" rIns="254" bIns="254" rtlCol="0" anchor="t">
+            <a:normAutofit/>
+          </a:bodyPr>
+          <a:lstStyle/>
+          <a:p>
+            <a:r>
+              <a:rPr lang="en-US" sz="1380" dirty="0">
+                <a:solidFill>
+                  <a:srgbClr val="17364A"/>
+                </a:solidFill>
+                <a:latin typeface="Aptos" pitchFamily="34" charset="0"/>
+                <a:ea typeface="Aptos" pitchFamily="34" charset="-122"/>
+                <a:cs typeface="Aptos" pitchFamily="34" charset="-120"/>
+              </a:rPr>
+              <a:t>Validation matters because public health AI tools can appear credible even when they are.</a:t>
+            </a:r>
+            <a:endParaRPr lang="en-US" sz="1380" dirty="0"/>
+          </a:p>
+          <a:p>
+            <a:r>
+              <a:rPr lang="en-US" sz="1380" dirty="0">
+                <a:solidFill>
+                  <a:srgbClr val="17364A"/>
+                </a:solidFill>
+                <a:latin typeface="Aptos" pitchFamily="34" charset="0"/>
+                <a:ea typeface="Aptos" pitchFamily="34" charset="-122"/>
+                <a:cs typeface="Aptos" pitchFamily="34" charset="-120"/>
+              </a:rPr>
+              <a:t>A polished dashboard, confident generated text, or high overall accuracy score does not.</a:t>
+            </a:r>
+            <a:endParaRPr lang="en-US" sz="1380" dirty="0"/>
+          </a:p>
+          <a:p>
+            <a:r>
+              <a:rPr lang="en-US" sz="1380" dirty="0">
+                <a:solidFill>
+                  <a:srgbClr val="17364A"/>
+                </a:solidFill>
+                <a:latin typeface="Aptos" pitchFamily="34" charset="0"/>
+                <a:ea typeface="Aptos" pitchFamily="34" charset="-122"/>
+                <a:cs typeface="Aptos" pitchFamily="34" charset="-120"/>
+              </a:rPr>
+              <a:t>Public health staff need to evaluate performance in relation to the specific task and the.</a:t>
+            </a:r>
+            <a:endParaRPr lang="en-US" sz="1380" dirty="0"/>
           </a:p>
         </p:txBody>
       </p:sp>
       <p:sp>
         <p:nvSpPr>
           <p:cNvPr id="16" name="Shape 14"/>
-          <p:cNvSpPr/>
-          <p:nvPr/>
-        </p:nvSpPr>
-        <p:spPr>
-          <a:xfrm>
-            <a:off x="8366760" y="3639312"/>
-            <a:ext cx="2011680" cy="0"/>
-          </a:xfrm>
-          <a:prstGeom prst="line">
-            <a:avLst/>
-          </a:prstGeom>
-          <a:noFill/>
-          <a:ln w="63500">
-            <a:solidFill>
-              <a:srgbClr val="2F8A28"/>
-            </a:solidFill>
-            <a:prstDash val="solid"/>
-          </a:ln>
-        </p:spPr>
-      </p:sp>
-      <p:sp>
-        <p:nvSpPr>
-          <p:cNvPr id="17" name="Text 15"/>
-          <p:cNvSpPr/>
-          <p:nvPr/>
-        </p:nvSpPr>
-        <p:spPr>
-          <a:xfrm>
-            <a:off x="7909560" y="3849624"/>
-            <a:ext cx="2926080" cy="164592"/>
-          </a:xfrm>
-          <a:prstGeom prst="rect">
-            <a:avLst/>
-          </a:prstGeom>
-          <a:noFill/>
-          <a:ln/>
-        </p:spPr>
-        <p:txBody>
-          <a:bodyPr wrap="square" lIns="0" tIns="0" rIns="0" bIns="0" rtlCol="0" anchor="ctr"/>
-          <a:lstStyle/>
-          <a:p>
-            <a:pPr algn="ctr" indent="0" marL="0">
-              <a:buNone/>
-            </a:pPr>
-            <a:r>
-              <a:rPr lang="en-US" sz="900" dirty="0">
-                <a:solidFill>
-                  <a:srgbClr val="003A63"/>
-                </a:solidFill>
-                <a:latin typeface="Aptos" pitchFamily="34" charset="0"/>
-                <a:ea typeface="Aptos" pitchFamily="34" charset="-122"/>
-                <a:cs typeface="Aptos" pitchFamily="34" charset="-120"/>
-              </a:rPr>
-              <a:t>Human review</a:t>
-            </a:r>
-            <a:endParaRPr lang="en-US" sz="900" dirty="0"/>
-          </a:p>
-        </p:txBody>
-      </p:sp>
-      <p:sp>
-        <p:nvSpPr>
-          <p:cNvPr id="18" name="Shape 16"/>
           <p:cNvSpPr/>
           <p:nvPr/>
         </p:nvSpPr>
@@ -17042,7 +16371,7 @@
       </p:sp>
       <p:sp>
         <p:nvSpPr>
-          <p:cNvPr id="19" name="Text 17"/>
+          <p:cNvPr id="17" name="Text 15"/>
           <p:cNvSpPr/>
           <p:nvPr/>
         </p:nvSpPr>
@@ -17081,7 +16410,7 @@
       </p:sp>
       <p:sp>
         <p:nvSpPr>
-          <p:cNvPr id="20" name="Text 18"/>
+          <p:cNvPr id="18" name="Text 16"/>
           <p:cNvSpPr/>
           <p:nvPr/>
         </p:nvSpPr>
@@ -17589,13 +16918,11 @@
             </a:avLst>
           </a:prstGeom>
           <a:solidFill>
-            <a:srgbClr val="FFFFFF">
-              <a:alpha val="88000"/>
-            </a:srgbClr>
+            <a:srgbClr val="FFFFFF"/>
           </a:solidFill>
           <a:ln w="12700">
             <a:solidFill>
-              <a:srgbClr val="D6E8F2"/>
+              <a:srgbClr val="B9D7E6"/>
             </a:solidFill>
             <a:prstDash val="solid"/>
           </a:ln>
@@ -17603,26 +16930,42 @@
       </p:sp>
       <p:sp>
         <p:nvSpPr>
-          <p:cNvPr id="14" name="Shape 12"/>
-          <p:cNvSpPr/>
-          <p:nvPr/>
-        </p:nvSpPr>
-        <p:spPr>
-          <a:xfrm>
-            <a:off x="8046720" y="3108960"/>
-            <a:ext cx="2651760" cy="896112"/>
-          </a:xfrm>
-          <a:prstGeom prst="arc">
-            <a:avLst/>
-          </a:prstGeom>
-          <a:noFill/>
-          <a:ln w="25400">
-            <a:solidFill>
-              <a:srgbClr val="0068B7"/>
-            </a:solidFill>
-            <a:prstDash val="solid"/>
-          </a:ln>
-        </p:spPr>
+          <p:cNvPr id="14" name="Text 12"/>
+          <p:cNvSpPr/>
+          <p:nvPr/>
+        </p:nvSpPr>
+        <p:spPr>
+          <a:xfrm>
+            <a:off x="7799832" y="2935224"/>
+            <a:ext cx="3145536" cy="256032"/>
+          </a:xfrm>
+          <a:prstGeom prst="rect">
+            <a:avLst/>
+          </a:prstGeom>
+          <a:noFill/>
+          <a:ln/>
+        </p:spPr>
+        <p:txBody>
+          <a:bodyPr wrap="square" lIns="0" tIns="0" rIns="0" bIns="0" rtlCol="0" anchor="ctr"/>
+          <a:lstStyle/>
+          <a:p>
+            <a:pPr indent="0" marL="0">
+              <a:buNone/>
+            </a:pPr>
+            <a:r>
+              <a:rPr lang="en-US" sz="1300" b="1" dirty="0">
+                <a:solidFill>
+                  <a:srgbClr val="0068B7"/>
+                </a:solidFill>
+                <a:latin typeface="Aptos" pitchFamily="34" charset="0"/>
+                <a:ea typeface="Aptos" pitchFamily="34" charset="-122"/>
+                <a:cs typeface="Aptos" pitchFamily="34" charset="-120"/>
+              </a:rPr>
+              <a:t>Concept checkpoints</a:t>
+            </a:r>
+            <a:endParaRPr lang="en-US" sz="1300" dirty="0"/>
+          </a:p>
+        </p:txBody>
       </p:sp>
       <p:sp>
         <p:nvSpPr>
@@ -17632,102 +16975,67 @@
         </p:nvSpPr>
         <p:spPr>
           <a:xfrm>
-            <a:off x="7909560" y="3099816"/>
-            <a:ext cx="2926080" cy="256032"/>
-          </a:xfrm>
-          <a:prstGeom prst="rect">
-            <a:avLst/>
-          </a:prstGeom>
-          <a:noFill/>
-          <a:ln/>
-        </p:spPr>
-        <p:txBody>
-          <a:bodyPr wrap="square" lIns="0" tIns="0" rIns="0" bIns="0" rtlCol="0" anchor="ctr"/>
-          <a:lstStyle/>
-          <a:p>
-            <a:pPr algn="ctr" indent="0" marL="0">
-              <a:buNone/>
-            </a:pPr>
-            <a:r>
-              <a:rPr lang="en-US" sz="1500" b="1" dirty="0">
-                <a:solidFill>
-                  <a:srgbClr val="003A63"/>
-                </a:solidFill>
-                <a:latin typeface="Aptos" pitchFamily="34" charset="0"/>
-                <a:ea typeface="Aptos" pitchFamily="34" charset="-122"/>
-                <a:cs typeface="Aptos" pitchFamily="34" charset="-120"/>
-              </a:rPr>
-              <a:t>Risk</a:t>
-            </a:r>
-            <a:endParaRPr lang="en-US" sz="1500" dirty="0"/>
+            <a:off x="7818120" y="3300984"/>
+            <a:ext cx="3090672" cy="877824"/>
+          </a:xfrm>
+          <a:prstGeom prst="rect">
+            <a:avLst/>
+          </a:prstGeom>
+          <a:noFill/>
+          <a:ln/>
+        </p:spPr>
+        <p:txBody>
+          <a:bodyPr wrap="square" lIns="254" tIns="254" rIns="254" bIns="254" rtlCol="0" anchor="t">
+            <a:normAutofit/>
+          </a:bodyPr>
+          <a:lstStyle/>
+          <a:p>
+            <a:r>
+              <a:rPr lang="en-US" sz="1380" dirty="0">
+                <a:solidFill>
+                  <a:srgbClr val="17364A"/>
+                </a:solidFill>
+                <a:latin typeface="Aptos" pitchFamily="34" charset="0"/>
+                <a:ea typeface="Aptos" pitchFamily="34" charset="-122"/>
+                <a:cs typeface="Aptos" pitchFamily="34" charset="-120"/>
+              </a:rPr>
+              <a:t>A public health agency may test a model that identifies incoming case reports likely to.</a:t>
+            </a:r>
+            <a:endParaRPr lang="en-US" sz="1380" dirty="0"/>
+          </a:p>
+          <a:p>
+            <a:r>
+              <a:rPr lang="en-US" sz="1380" dirty="0">
+                <a:solidFill>
+                  <a:srgbClr val="17364A"/>
+                </a:solidFill>
+                <a:latin typeface="Aptos" pitchFamily="34" charset="0"/>
+                <a:ea typeface="Aptos" pitchFamily="34" charset="-122"/>
+                <a:cs typeface="Aptos" pitchFamily="34" charset="-120"/>
+              </a:rPr>
+              <a:t>Staff need to know whether the model misses rare but severe conditions, whether it.</a:t>
+            </a:r>
+            <a:endParaRPr lang="en-US" sz="1380" dirty="0"/>
+          </a:p>
+          <a:p>
+            <a:r>
+              <a:rPr lang="en-US" sz="1380" dirty="0">
+                <a:solidFill>
+                  <a:srgbClr val="17364A"/>
+                </a:solidFill>
+                <a:latin typeface="Aptos" pitchFamily="34" charset="0"/>
+                <a:ea typeface="Aptos" pitchFamily="34" charset="-122"/>
+                <a:cs typeface="Aptos" pitchFamily="34" charset="-120"/>
+              </a:rPr>
+              <a:t>The agency should validate the model on recent local data, review errors with.</a:t>
+            </a:r>
+            <a:endParaRPr lang="en-US" sz="1380" dirty="0"/>
           </a:p>
         </p:txBody>
       </p:sp>
       <p:sp>
         <p:nvSpPr>
           <p:cNvPr id="16" name="Shape 14"/>
-          <p:cNvSpPr/>
-          <p:nvPr/>
-        </p:nvSpPr>
-        <p:spPr>
-          <a:xfrm>
-            <a:off x="8366760" y="3639312"/>
-            <a:ext cx="2011680" cy="0"/>
-          </a:xfrm>
-          <a:prstGeom prst="line">
-            <a:avLst/>
-          </a:prstGeom>
-          <a:noFill/>
-          <a:ln w="63500">
-            <a:solidFill>
-              <a:srgbClr val="2F8A28"/>
-            </a:solidFill>
-            <a:prstDash val="solid"/>
-          </a:ln>
-        </p:spPr>
-      </p:sp>
-      <p:sp>
-        <p:nvSpPr>
-          <p:cNvPr id="17" name="Text 15"/>
-          <p:cNvSpPr/>
-          <p:nvPr/>
-        </p:nvSpPr>
-        <p:spPr>
-          <a:xfrm>
-            <a:off x="7909560" y="3849624"/>
-            <a:ext cx="2926080" cy="164592"/>
-          </a:xfrm>
-          <a:prstGeom prst="rect">
-            <a:avLst/>
-          </a:prstGeom>
-          <a:noFill/>
-          <a:ln/>
-        </p:spPr>
-        <p:txBody>
-          <a:bodyPr wrap="square" lIns="0" tIns="0" rIns="0" bIns="0" rtlCol="0" anchor="ctr"/>
-          <a:lstStyle/>
-          <a:p>
-            <a:pPr algn="ctr" indent="0" marL="0">
-              <a:buNone/>
-            </a:pPr>
-            <a:r>
-              <a:rPr lang="en-US" sz="900" dirty="0">
-                <a:solidFill>
-                  <a:srgbClr val="003A63"/>
-                </a:solidFill>
-                <a:latin typeface="Aptos" pitchFamily="34" charset="0"/>
-                <a:ea typeface="Aptos" pitchFamily="34" charset="-122"/>
-                <a:cs typeface="Aptos" pitchFamily="34" charset="-120"/>
-              </a:rPr>
-              <a:t>Human review</a:t>
-            </a:r>
-            <a:endParaRPr lang="en-US" sz="900" dirty="0"/>
-          </a:p>
-        </p:txBody>
-      </p:sp>
-      <p:sp>
-        <p:nvSpPr>
-          <p:cNvPr id="18" name="Shape 16"/>
           <p:cNvSpPr/>
           <p:nvPr/>
         </p:nvSpPr>
@@ -17754,7 +17062,7 @@
       </p:sp>
       <p:sp>
         <p:nvSpPr>
-          <p:cNvPr id="19" name="Text 17"/>
+          <p:cNvPr id="17" name="Text 15"/>
           <p:cNvSpPr/>
           <p:nvPr/>
         </p:nvSpPr>
@@ -17793,7 +17101,7 @@
       </p:sp>
       <p:sp>
         <p:nvSpPr>
-          <p:cNvPr id="20" name="Text 18"/>
+          <p:cNvPr id="18" name="Text 16"/>
           <p:cNvSpPr/>
           <p:nvPr/>
         </p:nvSpPr>

--- a/downloads/presentations/modules/anl-300.pptx
+++ b/downloads/presentations/modules/anl-300.pptx
@@ -3353,49 +3353,58 @@
           <a:ln/>
         </p:spPr>
         <p:txBody>
-          <a:bodyPr wrap="square" lIns="635" tIns="635" rIns="635" bIns="635" rtlCol="0" anchor="t">
+          <a:bodyPr wrap="square" lIns="1016" tIns="1016" rIns="1016" bIns="1016" rtlCol="0" anchor="t">
             <a:normAutofit/>
           </a:bodyPr>
           <a:lstStyle/>
           <a:p>
+            <a:pPr indent="0" marL="0">
+              <a:buNone/>
+            </a:pPr>
             <a:r>
               <a:rPr lang="en-US" sz="2100" dirty="0">
                 <a:solidFill>
-                  <a:srgbClr val="17364A"/>
-                </a:solidFill>
-                <a:latin typeface="Aptos" pitchFamily="34" charset="0"/>
-                <a:ea typeface="Aptos" pitchFamily="34" charset="-122"/>
-                <a:cs typeface="Aptos" pitchFamily="34" charset="-120"/>
-              </a:rPr>
-              <a:t>Metric selection should start with the public health consequence.</a:t>
+                  <a:srgbClr val="003A63"/>
+                </a:solidFill>
+                <a:latin typeface="Aptos" pitchFamily="34" charset="0"/>
+                <a:ea typeface="Aptos" pitchFamily="34" charset="-122"/>
+                <a:cs typeface="Aptos" pitchFamily="34" charset="-120"/>
+              </a:rPr>
+              <a:t>• Metric selection should start with the public health consequence.</a:t>
             </a:r>
             <a:endParaRPr lang="en-US" sz="2100" dirty="0"/>
           </a:p>
           <a:p>
+            <a:pPr indent="0" marL="0">
+              <a:buNone/>
+            </a:pPr>
             <a:r>
               <a:rPr lang="en-US" sz="2100" dirty="0">
                 <a:solidFill>
-                  <a:srgbClr val="17364A"/>
-                </a:solidFill>
-                <a:latin typeface="Aptos" pitchFamily="34" charset="0"/>
-                <a:ea typeface="Aptos" pitchFamily="34" charset="-122"/>
-                <a:cs typeface="Aptos" pitchFamily="34" charset="-120"/>
-              </a:rPr>
-              <a:t>Sensitivity may be prioritized when missing a true event is dangerous.</a:t>
+                  <a:srgbClr val="003A63"/>
+                </a:solidFill>
+                <a:latin typeface="Aptos" pitchFamily="34" charset="0"/>
+                <a:ea typeface="Aptos" pitchFamily="34" charset="-122"/>
+                <a:cs typeface="Aptos" pitchFamily="34" charset="-120"/>
+              </a:rPr>
+              <a:t>• Sensitivity may be prioritized when missing a true event is dangerous.</a:t>
             </a:r>
             <a:endParaRPr lang="en-US" sz="2100" dirty="0"/>
           </a:p>
           <a:p>
+            <a:pPr indent="0" marL="0">
+              <a:buNone/>
+            </a:pPr>
             <a:r>
               <a:rPr lang="en-US" sz="2100" dirty="0">
                 <a:solidFill>
-                  <a:srgbClr val="17364A"/>
-                </a:solidFill>
-                <a:latin typeface="Aptos" pitchFamily="34" charset="0"/>
-                <a:ea typeface="Aptos" pitchFamily="34" charset="-122"/>
-                <a:cs typeface="Aptos" pitchFamily="34" charset="-120"/>
-              </a:rPr>
-              <a:t>Specificity may be prioritized when false positives create substantial burden or unnecessary.</a:t>
+                  <a:srgbClr val="003A63"/>
+                </a:solidFill>
+                <a:latin typeface="Aptos" pitchFamily="34" charset="0"/>
+                <a:ea typeface="Aptos" pitchFamily="34" charset="-122"/>
+                <a:cs typeface="Aptos" pitchFamily="34" charset="-120"/>
+              </a:rPr>
+              <a:t>• Specificity may be prioritized when false positives create substantial burden or unnecessary.</a:t>
             </a:r>
             <a:endParaRPr lang="en-US" sz="2100" dirty="0"/>
           </a:p>
@@ -3475,17 +3484,17 @@
         </p:nvSpPr>
         <p:spPr>
           <a:xfrm>
-            <a:off x="7799832" y="1828800"/>
-            <a:ext cx="3145536" cy="685800"/>
-          </a:xfrm>
-          <a:prstGeom prst="rect">
-            <a:avLst/>
-          </a:prstGeom>
-          <a:noFill/>
-          <a:ln/>
-        </p:spPr>
-        <p:txBody>
-          <a:bodyPr wrap="square" lIns="0" tIns="0" rIns="0" bIns="0" rtlCol="0" anchor="t">
+            <a:off x="7799832" y="1801368"/>
+            <a:ext cx="3145536" cy="758952"/>
+          </a:xfrm>
+          <a:prstGeom prst="rect">
+            <a:avLst/>
+          </a:prstGeom>
+          <a:noFill/>
+          <a:ln/>
+        </p:spPr>
+        <p:txBody>
+          <a:bodyPr wrap="square" lIns="254" tIns="254" rIns="254" bIns="254" rtlCol="0" anchor="t">
             <a:normAutofit/>
           </a:bodyPr>
           <a:lstStyle/>
@@ -3494,7 +3503,7 @@
               <a:buNone/>
             </a:pPr>
             <a:r>
-              <a:rPr lang="en-US" sz="1550" dirty="0">
+              <a:rPr lang="en-US" sz="1320" dirty="0">
                 <a:solidFill>
                   <a:srgbClr val="17364A"/>
                 </a:solidFill>
@@ -3504,7 +3513,7 @@
               </a:rPr>
               <a:t>Metric selection should start with the public health consequence.</a:t>
             </a:r>
-            <a:endParaRPr lang="en-US" sz="1550" dirty="0"/>
+            <a:endParaRPr lang="en-US" sz="1320" dirty="0"/>
           </a:p>
         </p:txBody>
       </p:sp>
@@ -3592,13 +3601,16 @@
           <a:ln/>
         </p:spPr>
         <p:txBody>
-          <a:bodyPr wrap="square" lIns="254" tIns="254" rIns="254" bIns="254" rtlCol="0" anchor="t">
+          <a:bodyPr wrap="square" lIns="508" tIns="508" rIns="508" bIns="508" rtlCol="0" anchor="t">
             <a:normAutofit/>
           </a:bodyPr>
           <a:lstStyle/>
           <a:p>
-            <a:r>
-              <a:rPr lang="en-US" sz="1380" dirty="0">
+            <a:pPr indent="0" marL="0">
+              <a:buNone/>
+            </a:pPr>
+            <a:r>
+              <a:rPr lang="en-US" sz="1220" dirty="0">
                 <a:solidFill>
                   <a:srgbClr val="17364A"/>
                 </a:solidFill>
@@ -3606,13 +3618,16 @@
                 <a:ea typeface="Aptos" pitchFamily="34" charset="-122"/>
                 <a:cs typeface="Aptos" pitchFamily="34" charset="-120"/>
               </a:rPr>
-              <a:t>Specificity may be prioritized when false positives create substantial burden or.</a:t>
-            </a:r>
-            <a:endParaRPr lang="en-US" sz="1380" dirty="0"/>
-          </a:p>
-          <a:p>
-            <a:r>
-              <a:rPr lang="en-US" sz="1380" dirty="0">
+              <a:t>Specificity may be prioritized when false positives create.</a:t>
+            </a:r>
+            <a:endParaRPr lang="en-US" sz="1220" dirty="0"/>
+          </a:p>
+          <a:p>
+            <a:pPr indent="0" marL="0">
+              <a:buNone/>
+            </a:pPr>
+            <a:r>
+              <a:rPr lang="en-US" sz="1220" dirty="0">
                 <a:solidFill>
                   <a:srgbClr val="17364A"/>
                 </a:solidFill>
@@ -3620,13 +3635,16 @@
                 <a:ea typeface="Aptos" pitchFamily="34" charset="-122"/>
                 <a:cs typeface="Aptos" pitchFamily="34" charset="-120"/>
               </a:rPr>
-              <a:t>Precision and positive predictive value matter when staff act on positive flags.</a:t>
-            </a:r>
-            <a:endParaRPr lang="en-US" sz="1380" dirty="0"/>
-          </a:p>
-          <a:p>
-            <a:r>
-              <a:rPr lang="en-US" sz="1380" dirty="0">
+              <a:t>Precision and positive predictive value matter when staff act on.</a:t>
+            </a:r>
+            <a:endParaRPr lang="en-US" sz="1220" dirty="0"/>
+          </a:p>
+          <a:p>
+            <a:pPr indent="0" marL="0">
+              <a:buNone/>
+            </a:pPr>
+            <a:r>
+              <a:rPr lang="en-US" sz="1220" dirty="0">
                 <a:solidFill>
                   <a:srgbClr val="17364A"/>
                 </a:solidFill>
@@ -3636,7 +3654,7 @@
               </a:rPr>
               <a:t>Calibration matters when scores are interpreted as probabilities.</a:t>
             </a:r>
-            <a:endParaRPr lang="en-US" sz="1380" dirty="0"/>
+            <a:endParaRPr lang="en-US" sz="1220" dirty="0"/>
           </a:p>
         </p:txBody>
       </p:sp>
@@ -3714,17 +3732,17 @@
         </p:nvSpPr>
         <p:spPr>
           <a:xfrm>
-            <a:off x="7799832" y="5001768"/>
-            <a:ext cx="3145536" cy="502920"/>
-          </a:xfrm>
-          <a:prstGeom prst="rect">
-            <a:avLst/>
-          </a:prstGeom>
-          <a:noFill/>
-          <a:ln/>
-        </p:spPr>
-        <p:txBody>
-          <a:bodyPr wrap="square" lIns="0" tIns="0" rIns="0" bIns="0" rtlCol="0" anchor="t">
+            <a:off x="7799832" y="4974336"/>
+            <a:ext cx="3145536" cy="576072"/>
+          </a:xfrm>
+          <a:prstGeom prst="rect">
+            <a:avLst/>
+          </a:prstGeom>
+          <a:noFill/>
+          <a:ln/>
+        </p:spPr>
+        <p:txBody>
+          <a:bodyPr wrap="square" lIns="254" tIns="254" rIns="254" bIns="254" rtlCol="0" anchor="t">
             <a:normAutofit/>
           </a:bodyPr>
           <a:lstStyle/>
@@ -3733,7 +3751,7 @@
               <a:buNone/>
             </a:pPr>
             <a:r>
-              <a:rPr lang="en-US" sz="1550" dirty="0">
+              <a:rPr lang="en-US" sz="1320" dirty="0">
                 <a:solidFill>
                   <a:srgbClr val="17364A"/>
                 </a:solidFill>
@@ -3741,9 +3759,9 @@
                 <a:ea typeface="Aptos" pitchFamily="34" charset="-122"/>
                 <a:cs typeface="Aptos" pitchFamily="34" charset="-120"/>
               </a:rPr>
-              <a:t>Identify what could go wrong, who could be affected, what safeguards are needed, and what evidence should be reviewed before use expands.</a:t>
-            </a:r>
-            <a:endParaRPr lang="en-US" sz="1550" dirty="0"/>
+              <a:t>Identify what could go wrong, who could be affected, what safeguards are needed, and what evidence should be reviewed.</a:t>
+            </a:r>
+            <a:endParaRPr lang="en-US" sz="1320" dirty="0"/>
           </a:p>
         </p:txBody>
       </p:sp>
@@ -4044,49 +4062,58 @@
           <a:ln/>
         </p:spPr>
         <p:txBody>
-          <a:bodyPr wrap="square" lIns="635" tIns="635" rIns="635" bIns="635" rtlCol="0" anchor="t">
+          <a:bodyPr wrap="square" lIns="1016" tIns="1016" rIns="1016" bIns="1016" rtlCol="0" anchor="t">
             <a:normAutofit/>
           </a:bodyPr>
           <a:lstStyle/>
           <a:p>
+            <a:pPr indent="0" marL="0">
+              <a:buNone/>
+            </a:pPr>
             <a:r>
               <a:rPr lang="en-US" sz="2100" dirty="0">
                 <a:solidFill>
-                  <a:srgbClr val="17364A"/>
-                </a:solidFill>
-                <a:latin typeface="Aptos" pitchFamily="34" charset="0"/>
-                <a:ea typeface="Aptos" pitchFamily="34" charset="-122"/>
-                <a:cs typeface="Aptos" pitchFamily="34" charset="-120"/>
-              </a:rPr>
-              <a:t>Workflow validation examines whether the AI output is understandable, accessible, timely, actionable,.</a:t>
+                  <a:srgbClr val="003A63"/>
+                </a:solidFill>
+                <a:latin typeface="Aptos" pitchFamily="34" charset="0"/>
+                <a:ea typeface="Aptos" pitchFamily="34" charset="-122"/>
+                <a:cs typeface="Aptos" pitchFamily="34" charset="-120"/>
+              </a:rPr>
+              <a:t>• Workflow validation examines whether the AI output is understandable, accessible, timely,.</a:t>
             </a:r>
             <a:endParaRPr lang="en-US" sz="2100" dirty="0"/>
           </a:p>
           <a:p>
+            <a:pPr indent="0" marL="0">
+              <a:buNone/>
+            </a:pPr>
             <a:r>
               <a:rPr lang="en-US" sz="2100" dirty="0">
                 <a:solidFill>
-                  <a:srgbClr val="17364A"/>
-                </a:solidFill>
-                <a:latin typeface="Aptos" pitchFamily="34" charset="0"/>
-                <a:ea typeface="Aptos" pitchFamily="34" charset="-122"/>
-                <a:cs typeface="Aptos" pitchFamily="34" charset="-120"/>
-              </a:rPr>
-              <a:t>A model can be statistically strong but operationally weak if staff do not trust it, cannot see.</a:t>
+                  <a:srgbClr val="003A63"/>
+                </a:solidFill>
+                <a:latin typeface="Aptos" pitchFamily="34" charset="0"/>
+                <a:ea typeface="Aptos" pitchFamily="34" charset="-122"/>
+                <a:cs typeface="Aptos" pitchFamily="34" charset="-120"/>
+              </a:rPr>
+              <a:t>• A model can be statistically strong but operationally weak if staff do not trust it, cannot see.</a:t>
             </a:r>
             <a:endParaRPr lang="en-US" sz="2100" dirty="0"/>
           </a:p>
           <a:p>
+            <a:pPr indent="0" marL="0">
+              <a:buNone/>
+            </a:pPr>
             <a:r>
               <a:rPr lang="en-US" sz="2100" dirty="0">
                 <a:solidFill>
-                  <a:srgbClr val="17364A"/>
-                </a:solidFill>
-                <a:latin typeface="Aptos" pitchFamily="34" charset="0"/>
-                <a:ea typeface="Aptos" pitchFamily="34" charset="-122"/>
-                <a:cs typeface="Aptos" pitchFamily="34" charset="-120"/>
-              </a:rPr>
-              <a:t>Workflow validation should include usability testing, training, documentation, and feedback loops.</a:t>
+                  <a:srgbClr val="003A63"/>
+                </a:solidFill>
+                <a:latin typeface="Aptos" pitchFamily="34" charset="0"/>
+                <a:ea typeface="Aptos" pitchFamily="34" charset="-122"/>
+                <a:cs typeface="Aptos" pitchFamily="34" charset="-120"/>
+              </a:rPr>
+              <a:t>• Workflow validation should include usability testing, training, documentation, and feedback.</a:t>
             </a:r>
             <a:endParaRPr lang="en-US" sz="2100" dirty="0"/>
           </a:p>
@@ -4166,17 +4193,17 @@
         </p:nvSpPr>
         <p:spPr>
           <a:xfrm>
-            <a:off x="7799832" y="1828800"/>
-            <a:ext cx="3145536" cy="685800"/>
-          </a:xfrm>
-          <a:prstGeom prst="rect">
-            <a:avLst/>
-          </a:prstGeom>
-          <a:noFill/>
-          <a:ln/>
-        </p:spPr>
-        <p:txBody>
-          <a:bodyPr wrap="square" lIns="0" tIns="0" rIns="0" bIns="0" rtlCol="0" anchor="t">
+            <a:off x="7799832" y="1801368"/>
+            <a:ext cx="3145536" cy="758952"/>
+          </a:xfrm>
+          <a:prstGeom prst="rect">
+            <a:avLst/>
+          </a:prstGeom>
+          <a:noFill/>
+          <a:ln/>
+        </p:spPr>
+        <p:txBody>
+          <a:bodyPr wrap="square" lIns="254" tIns="254" rIns="254" bIns="254" rtlCol="0" anchor="t">
             <a:normAutofit/>
           </a:bodyPr>
           <a:lstStyle/>
@@ -4185,7 +4212,7 @@
               <a:buNone/>
             </a:pPr>
             <a:r>
-              <a:rPr lang="en-US" sz="1550" dirty="0">
+              <a:rPr lang="en-US" sz="1320" dirty="0">
                 <a:solidFill>
                   <a:srgbClr val="17364A"/>
                 </a:solidFill>
@@ -4195,7 +4222,7 @@
               </a:rPr>
               <a:t>Workflow validation examines whether the AI output is understandable, accessible, timely, actionable,.</a:t>
             </a:r>
-            <a:endParaRPr lang="en-US" sz="1550" dirty="0"/>
+            <a:endParaRPr lang="en-US" sz="1320" dirty="0"/>
           </a:p>
         </p:txBody>
       </p:sp>
@@ -4283,13 +4310,16 @@
           <a:ln/>
         </p:spPr>
         <p:txBody>
-          <a:bodyPr wrap="square" lIns="254" tIns="254" rIns="254" bIns="254" rtlCol="0" anchor="t">
+          <a:bodyPr wrap="square" lIns="508" tIns="508" rIns="508" bIns="508" rtlCol="0" anchor="t">
             <a:normAutofit/>
           </a:bodyPr>
           <a:lstStyle/>
           <a:p>
-            <a:r>
-              <a:rPr lang="en-US" sz="1380" dirty="0">
+            <a:pPr indent="0" marL="0">
+              <a:buNone/>
+            </a:pPr>
+            <a:r>
+              <a:rPr lang="en-US" sz="1220" dirty="0">
                 <a:solidFill>
                   <a:srgbClr val="17364A"/>
                 </a:solidFill>
@@ -4297,13 +4327,16 @@
                 <a:ea typeface="Aptos" pitchFamily="34" charset="-122"/>
                 <a:cs typeface="Aptos" pitchFamily="34" charset="-120"/>
               </a:rPr>
-              <a:t>Workflow validation examines whether the AI output is understandable, accessible, timely,.</a:t>
-            </a:r>
-            <a:endParaRPr lang="en-US" sz="1380" dirty="0"/>
-          </a:p>
-          <a:p>
-            <a:r>
-              <a:rPr lang="en-US" sz="1380" dirty="0">
+              <a:t>Workflow validation examines whether the AI output is.</a:t>
+            </a:r>
+            <a:endParaRPr lang="en-US" sz="1220" dirty="0"/>
+          </a:p>
+          <a:p>
+            <a:pPr indent="0" marL="0">
+              <a:buNone/>
+            </a:pPr>
+            <a:r>
+              <a:rPr lang="en-US" sz="1220" dirty="0">
                 <a:solidFill>
                   <a:srgbClr val="17364A"/>
                 </a:solidFill>
@@ -4311,13 +4344,16 @@
                 <a:ea typeface="Aptos" pitchFamily="34" charset="-122"/>
                 <a:cs typeface="Aptos" pitchFamily="34" charset="-120"/>
               </a:rPr>
-              <a:t>A model can be statistically strong but operationally weak if staff do not trust it,.</a:t>
-            </a:r>
-            <a:endParaRPr lang="en-US" sz="1380" dirty="0"/>
-          </a:p>
-          <a:p>
-            <a:r>
-              <a:rPr lang="en-US" sz="1380" dirty="0">
+              <a:t>A model can be statistically strong but operationally weak if.</a:t>
+            </a:r>
+            <a:endParaRPr lang="en-US" sz="1220" dirty="0"/>
+          </a:p>
+          <a:p>
+            <a:pPr indent="0" marL="0">
+              <a:buNone/>
+            </a:pPr>
+            <a:r>
+              <a:rPr lang="en-US" sz="1220" dirty="0">
                 <a:solidFill>
                   <a:srgbClr val="17364A"/>
                 </a:solidFill>
@@ -4327,7 +4363,7 @@
               </a:rPr>
               <a:t>Post-deployment validation should be planned before launch.</a:t>
             </a:r>
-            <a:endParaRPr lang="en-US" sz="1380" dirty="0"/>
+            <a:endParaRPr lang="en-US" sz="1220" dirty="0"/>
           </a:p>
         </p:txBody>
       </p:sp>
@@ -4405,17 +4441,17 @@
         </p:nvSpPr>
         <p:spPr>
           <a:xfrm>
-            <a:off x="7799832" y="5001768"/>
-            <a:ext cx="3145536" cy="502920"/>
-          </a:xfrm>
-          <a:prstGeom prst="rect">
-            <a:avLst/>
-          </a:prstGeom>
-          <a:noFill/>
-          <a:ln/>
-        </p:spPr>
-        <p:txBody>
-          <a:bodyPr wrap="square" lIns="0" tIns="0" rIns="0" bIns="0" rtlCol="0" anchor="t">
+            <a:off x="7799832" y="4974336"/>
+            <a:ext cx="3145536" cy="576072"/>
+          </a:xfrm>
+          <a:prstGeom prst="rect">
+            <a:avLst/>
+          </a:prstGeom>
+          <a:noFill/>
+          <a:ln/>
+        </p:spPr>
+        <p:txBody>
+          <a:bodyPr wrap="square" lIns="254" tIns="254" rIns="254" bIns="254" rtlCol="0" anchor="t">
             <a:normAutofit/>
           </a:bodyPr>
           <a:lstStyle/>
@@ -4424,7 +4460,7 @@
               <a:buNone/>
             </a:pPr>
             <a:r>
-              <a:rPr lang="en-US" sz="1550" dirty="0">
+              <a:rPr lang="en-US" sz="1320" dirty="0">
                 <a:solidFill>
                   <a:srgbClr val="17364A"/>
                 </a:solidFill>
@@ -4432,9 +4468,9 @@
                 <a:ea typeface="Aptos" pitchFamily="34" charset="-122"/>
                 <a:cs typeface="Aptos" pitchFamily="34" charset="-120"/>
               </a:rPr>
-              <a:t>Identify what could go wrong, who could be affected, what safeguards are needed, and what evidence should be reviewed before use expands.</a:t>
-            </a:r>
-            <a:endParaRPr lang="en-US" sz="1550" dirty="0"/>
+              <a:t>Identify what could go wrong, who could be affected, what safeguards are needed, and what evidence should be reviewed.</a:t>
+            </a:r>
+            <a:endParaRPr lang="en-US" sz="1320" dirty="0"/>
           </a:p>
         </p:txBody>
       </p:sp>
@@ -4735,49 +4771,58 @@
           <a:ln/>
         </p:spPr>
         <p:txBody>
-          <a:bodyPr wrap="square" lIns="635" tIns="635" rIns="635" bIns="635" rtlCol="0" anchor="t">
+          <a:bodyPr wrap="square" lIns="1016" tIns="1016" rIns="1016" bIns="1016" rtlCol="0" anchor="t">
             <a:normAutofit/>
           </a:bodyPr>
           <a:lstStyle/>
           <a:p>
+            <a:pPr indent="0" marL="0">
+              <a:buNone/>
+            </a:pPr>
             <a:r>
               <a:rPr lang="en-US" sz="2100" dirty="0">
                 <a:solidFill>
-                  <a:srgbClr val="17364A"/>
-                </a:solidFill>
-                <a:latin typeface="Aptos" pitchFamily="34" charset="0"/>
-                <a:ea typeface="Aptos" pitchFamily="34" charset="-122"/>
-                <a:cs typeface="Aptos" pitchFamily="34" charset="-120"/>
-              </a:rPr>
-              <a:t>Misleading aggregate performance.</a:t>
+                  <a:srgbClr val="003A63"/>
+                </a:solidFill>
+                <a:latin typeface="Aptos" pitchFamily="34" charset="0"/>
+                <a:ea typeface="Aptos" pitchFamily="34" charset="-122"/>
+                <a:cs typeface="Aptos" pitchFamily="34" charset="-120"/>
+              </a:rPr>
+              <a:t>• Misleading aggregate performance.</a:t>
             </a:r>
             <a:endParaRPr lang="en-US" sz="2100" dirty="0"/>
           </a:p>
           <a:p>
+            <a:pPr indent="0" marL="0">
+              <a:buNone/>
+            </a:pPr>
             <a:r>
               <a:rPr lang="en-US" sz="2100" dirty="0">
                 <a:solidFill>
-                  <a:srgbClr val="17364A"/>
-                </a:solidFill>
-                <a:latin typeface="Aptos" pitchFamily="34" charset="0"/>
-                <a:ea typeface="Aptos" pitchFamily="34" charset="-122"/>
-                <a:cs typeface="Aptos" pitchFamily="34" charset="-120"/>
-              </a:rPr>
-              <a:t>Overall metrics may hide poor subgroup performance.</a:t>
+                  <a:srgbClr val="003A63"/>
+                </a:solidFill>
+                <a:latin typeface="Aptos" pitchFamily="34" charset="0"/>
+                <a:ea typeface="Aptos" pitchFamily="34" charset="-122"/>
+                <a:cs typeface="Aptos" pitchFamily="34" charset="-120"/>
+              </a:rPr>
+              <a:t>• Overall metrics may hide poor subgroup performance.</a:t>
             </a:r>
             <a:endParaRPr lang="en-US" sz="2100" dirty="0"/>
           </a:p>
           <a:p>
+            <a:pPr indent="0" marL="0">
+              <a:buNone/>
+            </a:pPr>
             <a:r>
               <a:rPr lang="en-US" sz="2100" dirty="0">
                 <a:solidFill>
-                  <a:srgbClr val="17364A"/>
-                </a:solidFill>
-                <a:latin typeface="Aptos" pitchFamily="34" charset="0"/>
-                <a:ea typeface="Aptos" pitchFamily="34" charset="-122"/>
-                <a:cs typeface="Aptos" pitchFamily="34" charset="-120"/>
-              </a:rPr>
-              <a:t>Guardrails include subgroup testing and equity review.</a:t>
+                  <a:srgbClr val="003A63"/>
+                </a:solidFill>
+                <a:latin typeface="Aptos" pitchFamily="34" charset="0"/>
+                <a:ea typeface="Aptos" pitchFamily="34" charset="-122"/>
+                <a:cs typeface="Aptos" pitchFamily="34" charset="-120"/>
+              </a:rPr>
+              <a:t>• Guardrails include subgroup testing and equity review.</a:t>
             </a:r>
             <a:endParaRPr lang="en-US" sz="2100" dirty="0"/>
           </a:p>
@@ -4857,17 +4902,17 @@
         </p:nvSpPr>
         <p:spPr>
           <a:xfrm>
-            <a:off x="7799832" y="1828800"/>
-            <a:ext cx="3145536" cy="685800"/>
-          </a:xfrm>
-          <a:prstGeom prst="rect">
-            <a:avLst/>
-          </a:prstGeom>
-          <a:noFill/>
-          <a:ln/>
-        </p:spPr>
-        <p:txBody>
-          <a:bodyPr wrap="square" lIns="0" tIns="0" rIns="0" bIns="0" rtlCol="0" anchor="t">
+            <a:off x="7799832" y="1801368"/>
+            <a:ext cx="3145536" cy="758952"/>
+          </a:xfrm>
+          <a:prstGeom prst="rect">
+            <a:avLst/>
+          </a:prstGeom>
+          <a:noFill/>
+          <a:ln/>
+        </p:spPr>
+        <p:txBody>
+          <a:bodyPr wrap="square" lIns="254" tIns="254" rIns="254" bIns="254" rtlCol="0" anchor="t">
             <a:normAutofit/>
           </a:bodyPr>
           <a:lstStyle/>
@@ -4876,7 +4921,7 @@
               <a:buNone/>
             </a:pPr>
             <a:r>
-              <a:rPr lang="en-US" sz="1550" dirty="0">
+              <a:rPr lang="en-US" sz="1320" dirty="0">
                 <a:solidFill>
                   <a:srgbClr val="17364A"/>
                 </a:solidFill>
@@ -4886,7 +4931,7 @@
               </a:rPr>
               <a:t>Misleading aggregate performance.</a:t>
             </a:r>
-            <a:endParaRPr lang="en-US" sz="1550" dirty="0"/>
+            <a:endParaRPr lang="en-US" sz="1320" dirty="0"/>
           </a:p>
         </p:txBody>
       </p:sp>
@@ -4974,13 +5019,16 @@
           <a:ln/>
         </p:spPr>
         <p:txBody>
-          <a:bodyPr wrap="square" lIns="254" tIns="254" rIns="254" bIns="254" rtlCol="0" anchor="t">
+          <a:bodyPr wrap="square" lIns="508" tIns="508" rIns="508" bIns="508" rtlCol="0" anchor="t">
             <a:normAutofit/>
           </a:bodyPr>
           <a:lstStyle/>
           <a:p>
-            <a:r>
-              <a:rPr lang="en-US" sz="1380" dirty="0">
+            <a:pPr indent="0" marL="0">
+              <a:buNone/>
+            </a:pPr>
+            <a:r>
+              <a:rPr lang="en-US" sz="1220" dirty="0">
                 <a:solidFill>
                   <a:srgbClr val="17364A"/>
                 </a:solidFill>
@@ -4990,11 +5038,14 @@
               </a:rPr>
               <a:t>Metric mismatch.</a:t>
             </a:r>
-            <a:endParaRPr lang="en-US" sz="1380" dirty="0"/>
-          </a:p>
-          <a:p>
-            <a:r>
-              <a:rPr lang="en-US" sz="1380" dirty="0">
+            <a:endParaRPr lang="en-US" sz="1220" dirty="0"/>
+          </a:p>
+          <a:p>
+            <a:pPr indent="0" marL="0">
+              <a:buNone/>
+            </a:pPr>
+            <a:r>
+              <a:rPr lang="en-US" sz="1220" dirty="0">
                 <a:solidFill>
                   <a:srgbClr val="17364A"/>
                 </a:solidFill>
@@ -5004,11 +5055,14 @@
               </a:rPr>
               <a:t>The selected metric may not match the public health consequence.</a:t>
             </a:r>
-            <a:endParaRPr lang="en-US" sz="1380" dirty="0"/>
-          </a:p>
-          <a:p>
-            <a:r>
-              <a:rPr lang="en-US" sz="1380" dirty="0">
+            <a:endParaRPr lang="en-US" sz="1220" dirty="0"/>
+          </a:p>
+          <a:p>
+            <a:pPr indent="0" marL="0">
+              <a:buNone/>
+            </a:pPr>
+            <a:r>
+              <a:rPr lang="en-US" sz="1220" dirty="0">
                 <a:solidFill>
                   <a:srgbClr val="17364A"/>
                 </a:solidFill>
@@ -5016,9 +5070,9 @@
                 <a:ea typeface="Aptos" pitchFamily="34" charset="-122"/>
                 <a:cs typeface="Aptos" pitchFamily="34" charset="-120"/>
               </a:rPr>
-              <a:t>Guardrails include metric selection tied to intended use and error consequences.</a:t>
-            </a:r>
-            <a:endParaRPr lang="en-US" sz="1380" dirty="0"/>
+              <a:t>Guardrails include metric selection tied to intended use and error.</a:t>
+            </a:r>
+            <a:endParaRPr lang="en-US" sz="1220" dirty="0"/>
           </a:p>
         </p:txBody>
       </p:sp>
@@ -5096,17 +5150,17 @@
         </p:nvSpPr>
         <p:spPr>
           <a:xfrm>
-            <a:off x="7799832" y="5001768"/>
-            <a:ext cx="3145536" cy="502920"/>
-          </a:xfrm>
-          <a:prstGeom prst="rect">
-            <a:avLst/>
-          </a:prstGeom>
-          <a:noFill/>
-          <a:ln/>
-        </p:spPr>
-        <p:txBody>
-          <a:bodyPr wrap="square" lIns="0" tIns="0" rIns="0" bIns="0" rtlCol="0" anchor="t">
+            <a:off x="7799832" y="4974336"/>
+            <a:ext cx="3145536" cy="576072"/>
+          </a:xfrm>
+          <a:prstGeom prst="rect">
+            <a:avLst/>
+          </a:prstGeom>
+          <a:noFill/>
+          <a:ln/>
+        </p:spPr>
+        <p:txBody>
+          <a:bodyPr wrap="square" lIns="254" tIns="254" rIns="254" bIns="254" rtlCol="0" anchor="t">
             <a:normAutofit/>
           </a:bodyPr>
           <a:lstStyle/>
@@ -5115,7 +5169,7 @@
               <a:buNone/>
             </a:pPr>
             <a:r>
-              <a:rPr lang="en-US" sz="1550" dirty="0">
+              <a:rPr lang="en-US" sz="1320" dirty="0">
                 <a:solidFill>
                   <a:srgbClr val="17364A"/>
                 </a:solidFill>
@@ -5123,9 +5177,9 @@
                 <a:ea typeface="Aptos" pitchFamily="34" charset="-122"/>
                 <a:cs typeface="Aptos" pitchFamily="34" charset="-120"/>
               </a:rPr>
-              <a:t>Identify what could go wrong, who could be affected, what safeguards are needed, and what evidence should be reviewed before use expands.</a:t>
-            </a:r>
-            <a:endParaRPr lang="en-US" sz="1550" dirty="0"/>
+              <a:t>Identify what could go wrong, who could be affected, what safeguards are needed, and what evidence should be reviewed.</a:t>
+            </a:r>
+            <a:endParaRPr lang="en-US" sz="1320" dirty="0"/>
           </a:p>
         </p:txBody>
       </p:sp>
@@ -5426,49 +5480,58 @@
           <a:ln/>
         </p:spPr>
         <p:txBody>
-          <a:bodyPr wrap="square" lIns="635" tIns="635" rIns="635" bIns="635" rtlCol="0" anchor="t">
+          <a:bodyPr wrap="square" lIns="1016" tIns="1016" rIns="1016" bIns="1016" rtlCol="0" anchor="t">
             <a:normAutofit/>
           </a:bodyPr>
           <a:lstStyle/>
           <a:p>
+            <a:pPr indent="0" marL="0">
+              <a:buNone/>
+            </a:pPr>
             <a:r>
               <a:rPr lang="en-US" sz="2100" dirty="0">
                 <a:solidFill>
-                  <a:srgbClr val="17364A"/>
-                </a:solidFill>
-                <a:latin typeface="Aptos" pitchFamily="34" charset="0"/>
-                <a:ea typeface="Aptos" pitchFamily="34" charset="-122"/>
-                <a:cs typeface="Aptos" pitchFamily="34" charset="-120"/>
-              </a:rPr>
-              <a:t>Workflow failure.</a:t>
+                  <a:srgbClr val="003A63"/>
+                </a:solidFill>
+                <a:latin typeface="Aptos" pitchFamily="34" charset="0"/>
+                <a:ea typeface="Aptos" pitchFamily="34" charset="-122"/>
+                <a:cs typeface="Aptos" pitchFamily="34" charset="-120"/>
+              </a:rPr>
+              <a:t>• Workflow failure.</a:t>
             </a:r>
             <a:endParaRPr lang="en-US" sz="2100" dirty="0"/>
           </a:p>
           <a:p>
+            <a:pPr indent="0" marL="0">
+              <a:buNone/>
+            </a:pPr>
             <a:r>
               <a:rPr lang="en-US" sz="2100" dirty="0">
                 <a:solidFill>
-                  <a:srgbClr val="17364A"/>
-                </a:solidFill>
-                <a:latin typeface="Aptos" pitchFamily="34" charset="0"/>
-                <a:ea typeface="Aptos" pitchFamily="34" charset="-122"/>
-                <a:cs typeface="Aptos" pitchFamily="34" charset="-120"/>
-              </a:rPr>
-              <a:t>A technically accurate model may be unusable or misused.</a:t>
+                  <a:srgbClr val="003A63"/>
+                </a:solidFill>
+                <a:latin typeface="Aptos" pitchFamily="34" charset="0"/>
+                <a:ea typeface="Aptos" pitchFamily="34" charset="-122"/>
+                <a:cs typeface="Aptos" pitchFamily="34" charset="-120"/>
+              </a:rPr>
+              <a:t>• A technically accurate model may be unusable or misused.</a:t>
             </a:r>
             <a:endParaRPr lang="en-US" sz="2100" dirty="0"/>
           </a:p>
           <a:p>
+            <a:pPr indent="0" marL="0">
+              <a:buNone/>
+            </a:pPr>
             <a:r>
               <a:rPr lang="en-US" sz="2100" dirty="0">
                 <a:solidFill>
-                  <a:srgbClr val="17364A"/>
-                </a:solidFill>
-                <a:latin typeface="Aptos" pitchFamily="34" charset="0"/>
-                <a:ea typeface="Aptos" pitchFamily="34" charset="-122"/>
-                <a:cs typeface="Aptos" pitchFamily="34" charset="-120"/>
-              </a:rPr>
-              <a:t>Guardrails include usability testing, training, source visibility, and override documentation.</a:t>
+                  <a:srgbClr val="003A63"/>
+                </a:solidFill>
+                <a:latin typeface="Aptos" pitchFamily="34" charset="0"/>
+                <a:ea typeface="Aptos" pitchFamily="34" charset="-122"/>
+                <a:cs typeface="Aptos" pitchFamily="34" charset="-120"/>
+              </a:rPr>
+              <a:t>• Guardrails include usability testing, training, source visibility, and override documentation.</a:t>
             </a:r>
             <a:endParaRPr lang="en-US" sz="2100" dirty="0"/>
           </a:p>
@@ -5548,17 +5611,17 @@
         </p:nvSpPr>
         <p:spPr>
           <a:xfrm>
-            <a:off x="7799832" y="1828800"/>
-            <a:ext cx="3145536" cy="685800"/>
-          </a:xfrm>
-          <a:prstGeom prst="rect">
-            <a:avLst/>
-          </a:prstGeom>
-          <a:noFill/>
-          <a:ln/>
-        </p:spPr>
-        <p:txBody>
-          <a:bodyPr wrap="square" lIns="0" tIns="0" rIns="0" bIns="0" rtlCol="0" anchor="t">
+            <a:off x="7799832" y="1801368"/>
+            <a:ext cx="3145536" cy="758952"/>
+          </a:xfrm>
+          <a:prstGeom prst="rect">
+            <a:avLst/>
+          </a:prstGeom>
+          <a:noFill/>
+          <a:ln/>
+        </p:spPr>
+        <p:txBody>
+          <a:bodyPr wrap="square" lIns="254" tIns="254" rIns="254" bIns="254" rtlCol="0" anchor="t">
             <a:normAutofit/>
           </a:bodyPr>
           <a:lstStyle/>
@@ -5567,7 +5630,7 @@
               <a:buNone/>
             </a:pPr>
             <a:r>
-              <a:rPr lang="en-US" sz="1550" dirty="0">
+              <a:rPr lang="en-US" sz="1320" dirty="0">
                 <a:solidFill>
                   <a:srgbClr val="17364A"/>
                 </a:solidFill>
@@ -5577,7 +5640,7 @@
               </a:rPr>
               <a:t>Workflow failure.</a:t>
             </a:r>
-            <a:endParaRPr lang="en-US" sz="1550" dirty="0"/>
+            <a:endParaRPr lang="en-US" sz="1320" dirty="0"/>
           </a:p>
         </p:txBody>
       </p:sp>
@@ -5665,13 +5728,16 @@
           <a:ln/>
         </p:spPr>
         <p:txBody>
-          <a:bodyPr wrap="square" lIns="254" tIns="254" rIns="254" bIns="254" rtlCol="0" anchor="t">
+          <a:bodyPr wrap="square" lIns="508" tIns="508" rIns="508" bIns="508" rtlCol="0" anchor="t">
             <a:normAutofit/>
           </a:bodyPr>
           <a:lstStyle/>
           <a:p>
-            <a:r>
-              <a:rPr lang="en-US" sz="1380" dirty="0">
+            <a:pPr indent="0" marL="0">
+              <a:buNone/>
+            </a:pPr>
+            <a:r>
+              <a:rPr lang="en-US" sz="1220" dirty="0">
                 <a:solidFill>
                   <a:srgbClr val="17364A"/>
                 </a:solidFill>
@@ -5681,11 +5747,14 @@
               </a:rPr>
               <a:t>Workflow failure.</a:t>
             </a:r>
-            <a:endParaRPr lang="en-US" sz="1380" dirty="0"/>
-          </a:p>
-          <a:p>
-            <a:r>
-              <a:rPr lang="en-US" sz="1380" dirty="0">
+            <a:endParaRPr lang="en-US" sz="1220" dirty="0"/>
+          </a:p>
+          <a:p>
+            <a:pPr indent="0" marL="0">
+              <a:buNone/>
+            </a:pPr>
+            <a:r>
+              <a:rPr lang="en-US" sz="1220" dirty="0">
                 <a:solidFill>
                   <a:srgbClr val="17364A"/>
                 </a:solidFill>
@@ -5695,11 +5764,14 @@
               </a:rPr>
               <a:t>A technically accurate model may be unusable or misused.</a:t>
             </a:r>
-            <a:endParaRPr lang="en-US" sz="1380" dirty="0"/>
-          </a:p>
-          <a:p>
-            <a:r>
-              <a:rPr lang="en-US" sz="1380" dirty="0">
+            <a:endParaRPr lang="en-US" sz="1220" dirty="0"/>
+          </a:p>
+          <a:p>
+            <a:pPr indent="0" marL="0">
+              <a:buNone/>
+            </a:pPr>
+            <a:r>
+              <a:rPr lang="en-US" sz="1220" dirty="0">
                 <a:solidFill>
                   <a:srgbClr val="17364A"/>
                 </a:solidFill>
@@ -5707,9 +5779,9 @@
                 <a:ea typeface="Aptos" pitchFamily="34" charset="-122"/>
                 <a:cs typeface="Aptos" pitchFamily="34" charset="-120"/>
               </a:rPr>
-              <a:t>Guardrails include usability testing, training, source visibility, and override.</a:t>
-            </a:r>
-            <a:endParaRPr lang="en-US" sz="1380" dirty="0"/>
+              <a:t>Guardrails include usability testing, training, source visibility,.</a:t>
+            </a:r>
+            <a:endParaRPr lang="en-US" sz="1220" dirty="0"/>
           </a:p>
         </p:txBody>
       </p:sp>
@@ -5787,17 +5859,17 @@
         </p:nvSpPr>
         <p:spPr>
           <a:xfrm>
-            <a:off x="7799832" y="5001768"/>
-            <a:ext cx="3145536" cy="502920"/>
-          </a:xfrm>
-          <a:prstGeom prst="rect">
-            <a:avLst/>
-          </a:prstGeom>
-          <a:noFill/>
-          <a:ln/>
-        </p:spPr>
-        <p:txBody>
-          <a:bodyPr wrap="square" lIns="0" tIns="0" rIns="0" bIns="0" rtlCol="0" anchor="t">
+            <a:off x="7799832" y="4974336"/>
+            <a:ext cx="3145536" cy="576072"/>
+          </a:xfrm>
+          <a:prstGeom prst="rect">
+            <a:avLst/>
+          </a:prstGeom>
+          <a:noFill/>
+          <a:ln/>
+        </p:spPr>
+        <p:txBody>
+          <a:bodyPr wrap="square" lIns="254" tIns="254" rIns="254" bIns="254" rtlCol="0" anchor="t">
             <a:normAutofit/>
           </a:bodyPr>
           <a:lstStyle/>
@@ -5806,7 +5878,7 @@
               <a:buNone/>
             </a:pPr>
             <a:r>
-              <a:rPr lang="en-US" sz="1550" dirty="0">
+              <a:rPr lang="en-US" sz="1320" dirty="0">
                 <a:solidFill>
                   <a:srgbClr val="17364A"/>
                 </a:solidFill>
@@ -5814,9 +5886,9 @@
                 <a:ea typeface="Aptos" pitchFamily="34" charset="-122"/>
                 <a:cs typeface="Aptos" pitchFamily="34" charset="-120"/>
               </a:rPr>
-              <a:t>Identify what could go wrong, who could be affected, what safeguards are needed, and what evidence should be reviewed before use expands.</a:t>
-            </a:r>
-            <a:endParaRPr lang="en-US" sz="1550" dirty="0"/>
+              <a:t>Identify what could go wrong, who could be affected, what safeguards are needed, and what evidence should be reviewed.</a:t>
+            </a:r>
+            <a:endParaRPr lang="en-US" sz="1320" dirty="0"/>
           </a:p>
         </p:txBody>
       </p:sp>
@@ -6117,49 +6189,58 @@
           <a:ln/>
         </p:spPr>
         <p:txBody>
-          <a:bodyPr wrap="square" lIns="635" tIns="635" rIns="635" bIns="635" rtlCol="0" anchor="t">
+          <a:bodyPr wrap="square" lIns="1016" tIns="1016" rIns="1016" bIns="1016" rtlCol="0" anchor="t">
             <a:normAutofit/>
           </a:bodyPr>
           <a:lstStyle/>
           <a:p>
+            <a:pPr indent="0" marL="0">
+              <a:buNone/>
+            </a:pPr>
             <a:r>
               <a:rPr lang="en-US" sz="2100" dirty="0">
                 <a:solidFill>
-                  <a:srgbClr val="17364A"/>
-                </a:solidFill>
-                <a:latin typeface="Aptos" pitchFamily="34" charset="0"/>
-                <a:ea typeface="Aptos" pitchFamily="34" charset="-122"/>
-                <a:cs typeface="Aptos" pitchFamily="34" charset="-120"/>
-              </a:rPr>
-              <a:t>Advanced validation applies to predictive models, NLP tools, generative summaries, RAG outputs, and.</a:t>
+                  <a:srgbClr val="003A63"/>
+                </a:solidFill>
+                <a:latin typeface="Aptos" pitchFamily="34" charset="0"/>
+                <a:ea typeface="Aptos" pitchFamily="34" charset="-122"/>
+                <a:cs typeface="Aptos" pitchFamily="34" charset="-120"/>
+              </a:rPr>
+              <a:t>• Advanced validation applies to predictive models, NLP tools, generative summaries, RAG.</a:t>
             </a:r>
             <a:endParaRPr lang="en-US" sz="2100" dirty="0"/>
           </a:p>
           <a:p>
+            <a:pPr indent="0" marL="0">
+              <a:buNone/>
+            </a:pPr>
             <a:r>
               <a:rPr lang="en-US" sz="2100" dirty="0">
                 <a:solidFill>
-                  <a:srgbClr val="17364A"/>
-                </a:solidFill>
-                <a:latin typeface="Aptos" pitchFamily="34" charset="0"/>
-                <a:ea typeface="Aptos" pitchFamily="34" charset="-122"/>
-                <a:cs typeface="Aptos" pitchFamily="34" charset="-120"/>
-              </a:rPr>
-              <a:t>For generative AI, validation may include factuality, completeness, source grounding, omissions, and.</a:t>
+                  <a:srgbClr val="003A63"/>
+                </a:solidFill>
+                <a:latin typeface="Aptos" pitchFamily="34" charset="0"/>
+                <a:ea typeface="Aptos" pitchFamily="34" charset="-122"/>
+                <a:cs typeface="Aptos" pitchFamily="34" charset="-120"/>
+              </a:rPr>
+              <a:t>• For generative AI, validation may include factuality, completeness, source grounding,.</a:t>
             </a:r>
             <a:endParaRPr lang="en-US" sz="2100" dirty="0"/>
           </a:p>
           <a:p>
+            <a:pPr indent="0" marL="0">
+              <a:buNone/>
+            </a:pPr>
             <a:r>
               <a:rPr lang="en-US" sz="2100" dirty="0">
                 <a:solidFill>
-                  <a:srgbClr val="17364A"/>
-                </a:solidFill>
-                <a:latin typeface="Aptos" pitchFamily="34" charset="0"/>
-                <a:ea typeface="Aptos" pitchFamily="34" charset="-122"/>
-                <a:cs typeface="Aptos" pitchFamily="34" charset="-120"/>
-              </a:rPr>
-              <a:t>For RAG, validation should test retrieval quality and citation accuracy.</a:t>
+                  <a:srgbClr val="003A63"/>
+                </a:solidFill>
+                <a:latin typeface="Aptos" pitchFamily="34" charset="0"/>
+                <a:ea typeface="Aptos" pitchFamily="34" charset="-122"/>
+                <a:cs typeface="Aptos" pitchFamily="34" charset="-120"/>
+              </a:rPr>
+              <a:t>• For RAG, validation should test retrieval quality and citation accuracy.</a:t>
             </a:r>
             <a:endParaRPr lang="en-US" sz="2100" dirty="0"/>
           </a:p>
@@ -6239,17 +6320,17 @@
         </p:nvSpPr>
         <p:spPr>
           <a:xfrm>
-            <a:off x="7799832" y="1828800"/>
-            <a:ext cx="3145536" cy="685800"/>
-          </a:xfrm>
-          <a:prstGeom prst="rect">
-            <a:avLst/>
-          </a:prstGeom>
-          <a:noFill/>
-          <a:ln/>
-        </p:spPr>
-        <p:txBody>
-          <a:bodyPr wrap="square" lIns="0" tIns="0" rIns="0" bIns="0" rtlCol="0" anchor="t">
+            <a:off x="7799832" y="1801368"/>
+            <a:ext cx="3145536" cy="758952"/>
+          </a:xfrm>
+          <a:prstGeom prst="rect">
+            <a:avLst/>
+          </a:prstGeom>
+          <a:noFill/>
+          <a:ln/>
+        </p:spPr>
+        <p:txBody>
+          <a:bodyPr wrap="square" lIns="254" tIns="254" rIns="254" bIns="254" rtlCol="0" anchor="t">
             <a:normAutofit/>
           </a:bodyPr>
           <a:lstStyle/>
@@ -6258,7 +6339,7 @@
               <a:buNone/>
             </a:pPr>
             <a:r>
-              <a:rPr lang="en-US" sz="1550" dirty="0">
+              <a:rPr lang="en-US" sz="1320" dirty="0">
                 <a:solidFill>
                   <a:srgbClr val="17364A"/>
                 </a:solidFill>
@@ -6268,7 +6349,7 @@
               </a:rPr>
               <a:t>Advanced validation applies to predictive models, NLP tools, generative summaries, RAG outputs, and.</a:t>
             </a:r>
-            <a:endParaRPr lang="en-US" sz="1550" dirty="0"/>
+            <a:endParaRPr lang="en-US" sz="1320" dirty="0"/>
           </a:p>
         </p:txBody>
       </p:sp>
@@ -6356,13 +6437,16 @@
           <a:ln/>
         </p:spPr>
         <p:txBody>
-          <a:bodyPr wrap="square" lIns="254" tIns="254" rIns="254" bIns="254" rtlCol="0" anchor="t">
+          <a:bodyPr wrap="square" lIns="508" tIns="508" rIns="508" bIns="508" rtlCol="0" anchor="t">
             <a:normAutofit/>
           </a:bodyPr>
           <a:lstStyle/>
           <a:p>
-            <a:r>
-              <a:rPr lang="en-US" sz="1380" dirty="0">
+            <a:pPr indent="0" marL="0">
+              <a:buNone/>
+            </a:pPr>
+            <a:r>
+              <a:rPr lang="en-US" sz="1220" dirty="0">
                 <a:solidFill>
                   <a:srgbClr val="17364A"/>
                 </a:solidFill>
@@ -6370,13 +6454,16 @@
                 <a:ea typeface="Aptos" pitchFamily="34" charset="-122"/>
                 <a:cs typeface="Aptos" pitchFamily="34" charset="-120"/>
               </a:rPr>
-              <a:t>Advanced validation applies to predictive models, NLP tools, generative summaries, RAG.</a:t>
-            </a:r>
-            <a:endParaRPr lang="en-US" sz="1380" dirty="0"/>
-          </a:p>
-          <a:p>
-            <a:r>
-              <a:rPr lang="en-US" sz="1380" dirty="0">
+              <a:t>Advanced validation applies to predictive models, NLP tools,.</a:t>
+            </a:r>
+            <a:endParaRPr lang="en-US" sz="1220" dirty="0"/>
+          </a:p>
+          <a:p>
+            <a:pPr indent="0" marL="0">
+              <a:buNone/>
+            </a:pPr>
+            <a:r>
+              <a:rPr lang="en-US" sz="1220" dirty="0">
                 <a:solidFill>
                   <a:srgbClr val="17364A"/>
                 </a:solidFill>
@@ -6384,13 +6471,16 @@
                 <a:ea typeface="Aptos" pitchFamily="34" charset="-122"/>
                 <a:cs typeface="Aptos" pitchFamily="34" charset="-120"/>
               </a:rPr>
-              <a:t>For generative AI, validation may include factuality, completeness, source grounding,.</a:t>
-            </a:r>
-            <a:endParaRPr lang="en-US" sz="1380" dirty="0"/>
-          </a:p>
-          <a:p>
-            <a:r>
-              <a:rPr lang="en-US" sz="1380" dirty="0">
+              <a:t>For generative AI, validation may include factuality,.</a:t>
+            </a:r>
+            <a:endParaRPr lang="en-US" sz="1220" dirty="0"/>
+          </a:p>
+          <a:p>
+            <a:pPr indent="0" marL="0">
+              <a:buNone/>
+            </a:pPr>
+            <a:r>
+              <a:rPr lang="en-US" sz="1220" dirty="0">
                 <a:solidFill>
                   <a:srgbClr val="17364A"/>
                 </a:solidFill>
@@ -6398,9 +6488,9 @@
                 <a:ea typeface="Aptos" pitchFamily="34" charset="-122"/>
                 <a:cs typeface="Aptos" pitchFamily="34" charset="-120"/>
               </a:rPr>
-              <a:t>For agentic workflows, validation should include action safety, permission boundaries, and.</a:t>
-            </a:r>
-            <a:endParaRPr lang="en-US" sz="1380" dirty="0"/>
+              <a:t>For agentic workflows, validation should include action safety,.</a:t>
+            </a:r>
+            <a:endParaRPr lang="en-US" sz="1220" dirty="0"/>
           </a:p>
         </p:txBody>
       </p:sp>
@@ -6478,17 +6568,17 @@
         </p:nvSpPr>
         <p:spPr>
           <a:xfrm>
-            <a:off x="7799832" y="5001768"/>
-            <a:ext cx="3145536" cy="502920"/>
-          </a:xfrm>
-          <a:prstGeom prst="rect">
-            <a:avLst/>
-          </a:prstGeom>
-          <a:noFill/>
-          <a:ln/>
-        </p:spPr>
-        <p:txBody>
-          <a:bodyPr wrap="square" lIns="0" tIns="0" rIns="0" bIns="0" rtlCol="0" anchor="t">
+            <a:off x="7799832" y="4974336"/>
+            <a:ext cx="3145536" cy="576072"/>
+          </a:xfrm>
+          <a:prstGeom prst="rect">
+            <a:avLst/>
+          </a:prstGeom>
+          <a:noFill/>
+          <a:ln/>
+        </p:spPr>
+        <p:txBody>
+          <a:bodyPr wrap="square" lIns="254" tIns="254" rIns="254" bIns="254" rtlCol="0" anchor="t">
             <a:normAutofit/>
           </a:bodyPr>
           <a:lstStyle/>
@@ -6497,7 +6587,7 @@
               <a:buNone/>
             </a:pPr>
             <a:r>
-              <a:rPr lang="en-US" sz="1550" dirty="0">
+              <a:rPr lang="en-US" sz="1320" dirty="0">
                 <a:solidFill>
                   <a:srgbClr val="17364A"/>
                 </a:solidFill>
@@ -6505,9 +6595,9 @@
                 <a:ea typeface="Aptos" pitchFamily="34" charset="-122"/>
                 <a:cs typeface="Aptos" pitchFamily="34" charset="-120"/>
               </a:rPr>
-              <a:t>Identify what could go wrong, who could be affected, what safeguards are needed, and what evidence should be reviewed before use expands.</a:t>
-            </a:r>
-            <a:endParaRPr lang="en-US" sz="1550" dirty="0"/>
+              <a:t>Identify what could go wrong, who could be affected, what safeguards are needed, and what evidence should be reviewed.</a:t>
+            </a:r>
+            <a:endParaRPr lang="en-US" sz="1320" dirty="0"/>
           </a:p>
         </p:txBody>
       </p:sp>
@@ -6808,49 +6898,58 @@
           <a:ln/>
         </p:spPr>
         <p:txBody>
-          <a:bodyPr wrap="square" lIns="635" tIns="635" rIns="635" bIns="635" rtlCol="0" anchor="t">
+          <a:bodyPr wrap="square" lIns="1016" tIns="1016" rIns="1016" bIns="1016" rtlCol="0" anchor="t">
             <a:normAutofit/>
           </a:bodyPr>
           <a:lstStyle/>
           <a:p>
+            <a:pPr indent="0" marL="0">
+              <a:buNone/>
+            </a:pPr>
             <a:r>
               <a:rPr lang="en-US" sz="2100" dirty="0">
                 <a:solidFill>
-                  <a:srgbClr val="17364A"/>
-                </a:solidFill>
-                <a:latin typeface="Aptos" pitchFamily="34" charset="0"/>
-                <a:ea typeface="Aptos" pitchFamily="34" charset="-122"/>
-                <a:cs typeface="Aptos" pitchFamily="34" charset="-120"/>
-              </a:rPr>
-              <a:t>What decision or action will the AI output support?</a:t>
+                  <a:srgbClr val="003A63"/>
+                </a:solidFill>
+                <a:latin typeface="Aptos" pitchFamily="34" charset="0"/>
+                <a:ea typeface="Aptos" pitchFamily="34" charset="-122"/>
+                <a:cs typeface="Aptos" pitchFamily="34" charset="-120"/>
+              </a:rPr>
+              <a:t>• What decision or action will the AI output support?</a:t>
             </a:r>
             <a:endParaRPr lang="en-US" sz="2100" dirty="0"/>
           </a:p>
           <a:p>
+            <a:pPr indent="0" marL="0">
+              <a:buNone/>
+            </a:pPr>
             <a:r>
               <a:rPr lang="en-US" sz="2100" dirty="0">
                 <a:solidFill>
-                  <a:srgbClr val="17364A"/>
-                </a:solidFill>
-                <a:latin typeface="Aptos" pitchFamily="34" charset="0"/>
-                <a:ea typeface="Aptos" pitchFamily="34" charset="-122"/>
-                <a:cs typeface="Aptos" pitchFamily="34" charset="-120"/>
-              </a:rPr>
-              <a:t>Which performance metrics match the consequences of error?</a:t>
+                  <a:srgbClr val="003A63"/>
+                </a:solidFill>
+                <a:latin typeface="Aptos" pitchFamily="34" charset="0"/>
+                <a:ea typeface="Aptos" pitchFamily="34" charset="-122"/>
+                <a:cs typeface="Aptos" pitchFamily="34" charset="-120"/>
+              </a:rPr>
+              <a:t>• Which performance metrics match the consequences of error?</a:t>
             </a:r>
             <a:endParaRPr lang="en-US" sz="2100" dirty="0"/>
           </a:p>
           <a:p>
+            <a:pPr indent="0" marL="0">
+              <a:buNone/>
+            </a:pPr>
             <a:r>
               <a:rPr lang="en-US" sz="2100" dirty="0">
                 <a:solidFill>
-                  <a:srgbClr val="17364A"/>
-                </a:solidFill>
-                <a:latin typeface="Aptos" pitchFamily="34" charset="0"/>
-                <a:ea typeface="Aptos" pitchFamily="34" charset="-122"/>
-                <a:cs typeface="Aptos" pitchFamily="34" charset="-120"/>
-              </a:rPr>
-              <a:t>Which subgroups, data sources, or settings require separate review?</a:t>
+                  <a:srgbClr val="003A63"/>
+                </a:solidFill>
+                <a:latin typeface="Aptos" pitchFamily="34" charset="0"/>
+                <a:ea typeface="Aptos" pitchFamily="34" charset="-122"/>
+                <a:cs typeface="Aptos" pitchFamily="34" charset="-120"/>
+              </a:rPr>
+              <a:t>• Which subgroups, data sources, or settings require separate review?</a:t>
             </a:r>
             <a:endParaRPr lang="en-US" sz="2100" dirty="0"/>
           </a:p>
@@ -6930,17 +7029,17 @@
         </p:nvSpPr>
         <p:spPr>
           <a:xfrm>
-            <a:off x="7799832" y="1828800"/>
-            <a:ext cx="3145536" cy="685800"/>
-          </a:xfrm>
-          <a:prstGeom prst="rect">
-            <a:avLst/>
-          </a:prstGeom>
-          <a:noFill/>
-          <a:ln/>
-        </p:spPr>
-        <p:txBody>
-          <a:bodyPr wrap="square" lIns="0" tIns="0" rIns="0" bIns="0" rtlCol="0" anchor="t">
+            <a:off x="7799832" y="1801368"/>
+            <a:ext cx="3145536" cy="758952"/>
+          </a:xfrm>
+          <a:prstGeom prst="rect">
+            <a:avLst/>
+          </a:prstGeom>
+          <a:noFill/>
+          <a:ln/>
+        </p:spPr>
+        <p:txBody>
+          <a:bodyPr wrap="square" lIns="254" tIns="254" rIns="254" bIns="254" rtlCol="0" anchor="t">
             <a:normAutofit/>
           </a:bodyPr>
           <a:lstStyle/>
@@ -6949,7 +7048,7 @@
               <a:buNone/>
             </a:pPr>
             <a:r>
-              <a:rPr lang="en-US" sz="1550" dirty="0">
+              <a:rPr lang="en-US" sz="1320" dirty="0">
                 <a:solidFill>
                   <a:srgbClr val="17364A"/>
                 </a:solidFill>
@@ -6959,7 +7058,7 @@
               </a:rPr>
               <a:t>What decision or action will the AI output support?</a:t>
             </a:r>
-            <a:endParaRPr lang="en-US" sz="1550" dirty="0"/>
+            <a:endParaRPr lang="en-US" sz="1320" dirty="0"/>
           </a:p>
         </p:txBody>
       </p:sp>
@@ -7047,13 +7146,16 @@
           <a:ln/>
         </p:spPr>
         <p:txBody>
-          <a:bodyPr wrap="square" lIns="254" tIns="254" rIns="254" bIns="254" rtlCol="0" anchor="t">
+          <a:bodyPr wrap="square" lIns="508" tIns="508" rIns="508" bIns="508" rtlCol="0" anchor="t">
             <a:normAutofit/>
           </a:bodyPr>
           <a:lstStyle/>
           <a:p>
-            <a:r>
-              <a:rPr lang="en-US" sz="1380" dirty="0">
+            <a:pPr indent="0" marL="0">
+              <a:buNone/>
+            </a:pPr>
+            <a:r>
+              <a:rPr lang="en-US" sz="1220" dirty="0">
                 <a:solidFill>
                   <a:srgbClr val="17364A"/>
                 </a:solidFill>
@@ -7063,11 +7165,14 @@
               </a:rPr>
               <a:t>What decision or action will the AI output support?</a:t>
             </a:r>
-            <a:endParaRPr lang="en-US" sz="1380" dirty="0"/>
-          </a:p>
-          <a:p>
-            <a:r>
-              <a:rPr lang="en-US" sz="1380" dirty="0">
+            <a:endParaRPr lang="en-US" sz="1220" dirty="0"/>
+          </a:p>
+          <a:p>
+            <a:pPr indent="0" marL="0">
+              <a:buNone/>
+            </a:pPr>
+            <a:r>
+              <a:rPr lang="en-US" sz="1220" dirty="0">
                 <a:solidFill>
                   <a:srgbClr val="17364A"/>
                 </a:solidFill>
@@ -7077,11 +7182,14 @@
               </a:rPr>
               <a:t>Which performance metrics match the consequences of error?</a:t>
             </a:r>
-            <a:endParaRPr lang="en-US" sz="1380" dirty="0"/>
-          </a:p>
-          <a:p>
-            <a:r>
-              <a:rPr lang="en-US" sz="1380" dirty="0">
+            <a:endParaRPr lang="en-US" sz="1220" dirty="0"/>
+          </a:p>
+          <a:p>
+            <a:pPr indent="0" marL="0">
+              <a:buNone/>
+            </a:pPr>
+            <a:r>
+              <a:rPr lang="en-US" sz="1220" dirty="0">
                 <a:solidFill>
                   <a:srgbClr val="17364A"/>
                 </a:solidFill>
@@ -7091,7 +7199,7 @@
               </a:rPr>
               <a:t>Which subgroups, data sources, or settings require separate review?</a:t>
             </a:r>
-            <a:endParaRPr lang="en-US" sz="1380" dirty="0"/>
+            <a:endParaRPr lang="en-US" sz="1220" dirty="0"/>
           </a:p>
         </p:txBody>
       </p:sp>
@@ -7169,17 +7277,17 @@
         </p:nvSpPr>
         <p:spPr>
           <a:xfrm>
-            <a:off x="7799832" y="5001768"/>
-            <a:ext cx="3145536" cy="502920"/>
-          </a:xfrm>
-          <a:prstGeom prst="rect">
-            <a:avLst/>
-          </a:prstGeom>
-          <a:noFill/>
-          <a:ln/>
-        </p:spPr>
-        <p:txBody>
-          <a:bodyPr wrap="square" lIns="0" tIns="0" rIns="0" bIns="0" rtlCol="0" anchor="t">
+            <a:off x="7799832" y="4974336"/>
+            <a:ext cx="3145536" cy="576072"/>
+          </a:xfrm>
+          <a:prstGeom prst="rect">
+            <a:avLst/>
+          </a:prstGeom>
+          <a:noFill/>
+          <a:ln/>
+        </p:spPr>
+        <p:txBody>
+          <a:bodyPr wrap="square" lIns="254" tIns="254" rIns="254" bIns="254" rtlCol="0" anchor="t">
             <a:normAutofit/>
           </a:bodyPr>
           <a:lstStyle/>
@@ -7188,7 +7296,7 @@
               <a:buNone/>
             </a:pPr>
             <a:r>
-              <a:rPr lang="en-US" sz="1550" dirty="0">
+              <a:rPr lang="en-US" sz="1320" dirty="0">
                 <a:solidFill>
                   <a:srgbClr val="17364A"/>
                 </a:solidFill>
@@ -7196,9 +7304,9 @@
                 <a:ea typeface="Aptos" pitchFamily="34" charset="-122"/>
                 <a:cs typeface="Aptos" pitchFamily="34" charset="-120"/>
               </a:rPr>
-              <a:t>Identify what could go wrong, who could be affected, what safeguards are needed, and what evidence should be reviewed before use expands.</a:t>
-            </a:r>
-            <a:endParaRPr lang="en-US" sz="1550" dirty="0"/>
+              <a:t>Identify what could go wrong, who could be affected, what safeguards are needed, and what evidence should be reviewed.</a:t>
+            </a:r>
+            <a:endParaRPr lang="en-US" sz="1320" dirty="0"/>
           </a:p>
         </p:txBody>
       </p:sp>
@@ -7499,35 +7607,41 @@
           <a:ln/>
         </p:spPr>
         <p:txBody>
-          <a:bodyPr wrap="square" lIns="635" tIns="635" rIns="635" bIns="635" rtlCol="0" anchor="t">
+          <a:bodyPr wrap="square" lIns="1016" tIns="1016" rIns="1016" bIns="1016" rtlCol="0" anchor="t">
             <a:normAutofit/>
           </a:bodyPr>
           <a:lstStyle/>
           <a:p>
+            <a:pPr indent="0" marL="0">
+              <a:buNone/>
+            </a:pPr>
             <a:r>
               <a:rPr lang="en-US" sz="2100" dirty="0">
                 <a:solidFill>
-                  <a:srgbClr val="17364A"/>
-                </a:solidFill>
-                <a:latin typeface="Aptos" pitchFamily="34" charset="0"/>
-                <a:ea typeface="Aptos" pitchFamily="34" charset="-122"/>
-                <a:cs typeface="Aptos" pitchFamily="34" charset="-120"/>
-              </a:rPr>
-              <a:t>What would make performance unacceptable for this use case?</a:t>
+                  <a:srgbClr val="003A63"/>
+                </a:solidFill>
+                <a:latin typeface="Aptos" pitchFamily="34" charset="0"/>
+                <a:ea typeface="Aptos" pitchFamily="34" charset="-122"/>
+                <a:cs typeface="Aptos" pitchFamily="34" charset="-120"/>
+              </a:rPr>
+              <a:t>• What would make performance unacceptable for this use case?</a:t>
             </a:r>
             <a:endParaRPr lang="en-US" sz="2100" dirty="0"/>
           </a:p>
           <a:p>
+            <a:pPr indent="0" marL="0">
+              <a:buNone/>
+            </a:pPr>
             <a:r>
               <a:rPr lang="en-US" sz="2100" dirty="0">
                 <a:solidFill>
-                  <a:srgbClr val="17364A"/>
-                </a:solidFill>
-                <a:latin typeface="Aptos" pitchFamily="34" charset="0"/>
-                <a:ea typeface="Aptos" pitchFamily="34" charset="-122"/>
-                <a:cs typeface="Aptos" pitchFamily="34" charset="-120"/>
-              </a:rPr>
-              <a:t>How will the agency monitor performance after deployment?</a:t>
+                  <a:srgbClr val="003A63"/>
+                </a:solidFill>
+                <a:latin typeface="Aptos" pitchFamily="34" charset="0"/>
+                <a:ea typeface="Aptos" pitchFamily="34" charset="-122"/>
+                <a:cs typeface="Aptos" pitchFamily="34" charset="-120"/>
+              </a:rPr>
+              <a:t>• How will the agency monitor performance after deployment?</a:t>
             </a:r>
             <a:endParaRPr lang="en-US" sz="2100" dirty="0"/>
           </a:p>
@@ -7607,17 +7721,17 @@
         </p:nvSpPr>
         <p:spPr>
           <a:xfrm>
-            <a:off x="7799832" y="1828800"/>
-            <a:ext cx="3145536" cy="685800"/>
-          </a:xfrm>
-          <a:prstGeom prst="rect">
-            <a:avLst/>
-          </a:prstGeom>
-          <a:noFill/>
-          <a:ln/>
-        </p:spPr>
-        <p:txBody>
-          <a:bodyPr wrap="square" lIns="0" tIns="0" rIns="0" bIns="0" rtlCol="0" anchor="t">
+            <a:off x="7799832" y="1801368"/>
+            <a:ext cx="3145536" cy="758952"/>
+          </a:xfrm>
+          <a:prstGeom prst="rect">
+            <a:avLst/>
+          </a:prstGeom>
+          <a:noFill/>
+          <a:ln/>
+        </p:spPr>
+        <p:txBody>
+          <a:bodyPr wrap="square" lIns="254" tIns="254" rIns="254" bIns="254" rtlCol="0" anchor="t">
             <a:normAutofit/>
           </a:bodyPr>
           <a:lstStyle/>
@@ -7626,7 +7740,7 @@
               <a:buNone/>
             </a:pPr>
             <a:r>
-              <a:rPr lang="en-US" sz="1550" dirty="0">
+              <a:rPr lang="en-US" sz="1320" dirty="0">
                 <a:solidFill>
                   <a:srgbClr val="17364A"/>
                 </a:solidFill>
@@ -7636,7 +7750,7 @@
               </a:rPr>
               <a:t>What would make performance unacceptable for this use case?</a:t>
             </a:r>
-            <a:endParaRPr lang="en-US" sz="1550" dirty="0"/>
+            <a:endParaRPr lang="en-US" sz="1320" dirty="0"/>
           </a:p>
         </p:txBody>
       </p:sp>
@@ -7724,13 +7838,16 @@
           <a:ln/>
         </p:spPr>
         <p:txBody>
-          <a:bodyPr wrap="square" lIns="254" tIns="254" rIns="254" bIns="254" rtlCol="0" anchor="t">
+          <a:bodyPr wrap="square" lIns="508" tIns="508" rIns="508" bIns="508" rtlCol="0" anchor="t">
             <a:normAutofit/>
           </a:bodyPr>
           <a:lstStyle/>
           <a:p>
-            <a:r>
-              <a:rPr lang="en-US" sz="1380" dirty="0">
+            <a:pPr indent="0" marL="0">
+              <a:buNone/>
+            </a:pPr>
+            <a:r>
+              <a:rPr lang="en-US" sz="1220" dirty="0">
                 <a:solidFill>
                   <a:srgbClr val="17364A"/>
                 </a:solidFill>
@@ -7740,11 +7857,14 @@
               </a:rPr>
               <a:t>What would make performance unacceptable for this use case?</a:t>
             </a:r>
-            <a:endParaRPr lang="en-US" sz="1380" dirty="0"/>
-          </a:p>
-          <a:p>
-            <a:r>
-              <a:rPr lang="en-US" sz="1380" dirty="0">
+            <a:endParaRPr lang="en-US" sz="1220" dirty="0"/>
+          </a:p>
+          <a:p>
+            <a:pPr indent="0" marL="0">
+              <a:buNone/>
+            </a:pPr>
+            <a:r>
+              <a:rPr lang="en-US" sz="1220" dirty="0">
                 <a:solidFill>
                   <a:srgbClr val="17364A"/>
                 </a:solidFill>
@@ -7754,7 +7874,7 @@
               </a:rPr>
               <a:t>How will the agency monitor performance after deployment?</a:t>
             </a:r>
-            <a:endParaRPr lang="en-US" sz="1380" dirty="0"/>
+            <a:endParaRPr lang="en-US" sz="1220" dirty="0"/>
           </a:p>
         </p:txBody>
       </p:sp>
@@ -7832,17 +7952,17 @@
         </p:nvSpPr>
         <p:spPr>
           <a:xfrm>
-            <a:off x="7799832" y="5001768"/>
-            <a:ext cx="3145536" cy="502920"/>
-          </a:xfrm>
-          <a:prstGeom prst="rect">
-            <a:avLst/>
-          </a:prstGeom>
-          <a:noFill/>
-          <a:ln/>
-        </p:spPr>
-        <p:txBody>
-          <a:bodyPr wrap="square" lIns="0" tIns="0" rIns="0" bIns="0" rtlCol="0" anchor="t">
+            <a:off x="7799832" y="4974336"/>
+            <a:ext cx="3145536" cy="576072"/>
+          </a:xfrm>
+          <a:prstGeom prst="rect">
+            <a:avLst/>
+          </a:prstGeom>
+          <a:noFill/>
+          <a:ln/>
+        </p:spPr>
+        <p:txBody>
+          <a:bodyPr wrap="square" lIns="254" tIns="254" rIns="254" bIns="254" rtlCol="0" anchor="t">
             <a:normAutofit/>
           </a:bodyPr>
           <a:lstStyle/>
@@ -7851,7 +7971,7 @@
               <a:buNone/>
             </a:pPr>
             <a:r>
-              <a:rPr lang="en-US" sz="1550" dirty="0">
+              <a:rPr lang="en-US" sz="1320" dirty="0">
                 <a:solidFill>
                   <a:srgbClr val="17364A"/>
                 </a:solidFill>
@@ -7859,9 +7979,9 @@
                 <a:ea typeface="Aptos" pitchFamily="34" charset="-122"/>
                 <a:cs typeface="Aptos" pitchFamily="34" charset="-120"/>
               </a:rPr>
-              <a:t>Identify what could go wrong, who could be affected, what safeguards are needed, and what evidence should be reviewed before use expands.</a:t>
-            </a:r>
-            <a:endParaRPr lang="en-US" sz="1550" dirty="0"/>
+              <a:t>Identify what could go wrong, who could be affected, what safeguards are needed, and what evidence should be reviewed.</a:t>
+            </a:r>
+            <a:endParaRPr lang="en-US" sz="1320" dirty="0"/>
           </a:p>
         </p:txBody>
       </p:sp>
@@ -8162,49 +8282,58 @@
           <a:ln/>
         </p:spPr>
         <p:txBody>
-          <a:bodyPr wrap="square" lIns="635" tIns="635" rIns="635" bIns="635" rtlCol="0" anchor="t">
+          <a:bodyPr wrap="square" lIns="1016" tIns="1016" rIns="1016" bIns="1016" rtlCol="0" anchor="t">
             <a:normAutofit/>
           </a:bodyPr>
           <a:lstStyle/>
           <a:p>
+            <a:pPr indent="0" marL="0">
+              <a:buNone/>
+            </a:pPr>
             <a:r>
               <a:rPr lang="en-US" sz="2100" dirty="0">
                 <a:solidFill>
-                  <a:srgbClr val="17364A"/>
-                </a:solidFill>
-                <a:latin typeface="Aptos" pitchFamily="34" charset="0"/>
-                <a:ea typeface="Aptos" pitchFamily="34" charset="-122"/>
-                <a:cs typeface="Aptos" pitchFamily="34" charset="-120"/>
-              </a:rPr>
-              <a:t>Create an advanced validation plan for one AI-supported workflow.</a:t>
+                  <a:srgbClr val="003A63"/>
+                </a:solidFill>
+                <a:latin typeface="Aptos" pitchFamily="34" charset="0"/>
+                <a:ea typeface="Aptos" pitchFamily="34" charset="-122"/>
+                <a:cs typeface="Aptos" pitchFamily="34" charset="-120"/>
+              </a:rPr>
+              <a:t>• Create an advanced validation plan for one AI-supported workflow.</a:t>
             </a:r>
             <a:endParaRPr lang="en-US" sz="2100" dirty="0"/>
           </a:p>
           <a:p>
+            <a:pPr indent="0" marL="0">
+              <a:buNone/>
+            </a:pPr>
             <a:r>
               <a:rPr lang="en-US" sz="2100" dirty="0">
                 <a:solidFill>
-                  <a:srgbClr val="17364A"/>
-                </a:solidFill>
-                <a:latin typeface="Aptos" pitchFamily="34" charset="0"/>
-                <a:ea typeface="Aptos" pitchFamily="34" charset="-122"/>
-                <a:cs typeface="Aptos" pitchFamily="34" charset="-120"/>
-              </a:rPr>
-              <a:t>Include intended use, validation dataset, comparison standard, performance metrics, subgroup analysis,.</a:t>
+                  <a:srgbClr val="003A63"/>
+                </a:solidFill>
+                <a:latin typeface="Aptos" pitchFamily="34" charset="0"/>
+                <a:ea typeface="Aptos" pitchFamily="34" charset="-122"/>
+                <a:cs typeface="Aptos" pitchFamily="34" charset="-120"/>
+              </a:rPr>
+              <a:t>• Include intended use, validation dataset, comparison standard, performance metrics, subgroup.</a:t>
             </a:r>
             <a:endParaRPr lang="en-US" sz="2100" dirty="0"/>
           </a:p>
           <a:p>
+            <a:pPr indent="0" marL="0">
+              <a:buNone/>
+            </a:pPr>
             <a:r>
               <a:rPr lang="en-US" sz="2100" dirty="0">
                 <a:solidFill>
-                  <a:srgbClr val="17364A"/>
-                </a:solidFill>
-                <a:latin typeface="Aptos" pitchFamily="34" charset="0"/>
-                <a:ea typeface="Aptos" pitchFamily="34" charset="-122"/>
-                <a:cs typeface="Aptos" pitchFamily="34" charset="-120"/>
-              </a:rPr>
-              <a:t>The plan should clearly explain how validation results will be interpreted and who has authority to.</a:t>
+                  <a:srgbClr val="003A63"/>
+                </a:solidFill>
+                <a:latin typeface="Aptos" pitchFamily="34" charset="0"/>
+                <a:ea typeface="Aptos" pitchFamily="34" charset="-122"/>
+                <a:cs typeface="Aptos" pitchFamily="34" charset="-120"/>
+              </a:rPr>
+              <a:t>• The plan should clearly explain how validation results will be interpreted and who has.</a:t>
             </a:r>
             <a:endParaRPr lang="en-US" sz="2100" dirty="0"/>
           </a:p>
@@ -8284,17 +8413,17 @@
         </p:nvSpPr>
         <p:spPr>
           <a:xfrm>
-            <a:off x="7799832" y="1828800"/>
-            <a:ext cx="3145536" cy="685800"/>
-          </a:xfrm>
-          <a:prstGeom prst="rect">
-            <a:avLst/>
-          </a:prstGeom>
-          <a:noFill/>
-          <a:ln/>
-        </p:spPr>
-        <p:txBody>
-          <a:bodyPr wrap="square" lIns="0" tIns="0" rIns="0" bIns="0" rtlCol="0" anchor="t">
+            <a:off x="7799832" y="1801368"/>
+            <a:ext cx="3145536" cy="758952"/>
+          </a:xfrm>
+          <a:prstGeom prst="rect">
+            <a:avLst/>
+          </a:prstGeom>
+          <a:noFill/>
+          <a:ln/>
+        </p:spPr>
+        <p:txBody>
+          <a:bodyPr wrap="square" lIns="254" tIns="254" rIns="254" bIns="254" rtlCol="0" anchor="t">
             <a:normAutofit/>
           </a:bodyPr>
           <a:lstStyle/>
@@ -8303,7 +8432,7 @@
               <a:buNone/>
             </a:pPr>
             <a:r>
-              <a:rPr lang="en-US" sz="1550" dirty="0">
+              <a:rPr lang="en-US" sz="1320" dirty="0">
                 <a:solidFill>
                   <a:srgbClr val="17364A"/>
                 </a:solidFill>
@@ -8313,7 +8442,7 @@
               </a:rPr>
               <a:t>Create an advanced validation plan for one AI-supported workflow.</a:t>
             </a:r>
-            <a:endParaRPr lang="en-US" sz="1550" dirty="0"/>
+            <a:endParaRPr lang="en-US" sz="1320" dirty="0"/>
           </a:p>
         </p:txBody>
       </p:sp>
@@ -8401,13 +8530,16 @@
           <a:ln/>
         </p:spPr>
         <p:txBody>
-          <a:bodyPr wrap="square" lIns="254" tIns="254" rIns="254" bIns="254" rtlCol="0" anchor="t">
+          <a:bodyPr wrap="square" lIns="508" tIns="508" rIns="508" bIns="508" rtlCol="0" anchor="t">
             <a:normAutofit/>
           </a:bodyPr>
           <a:lstStyle/>
           <a:p>
-            <a:r>
-              <a:rPr lang="en-US" sz="1380" dirty="0">
+            <a:pPr indent="0" marL="0">
+              <a:buNone/>
+            </a:pPr>
+            <a:r>
+              <a:rPr lang="en-US" sz="1220" dirty="0">
                 <a:solidFill>
                   <a:srgbClr val="17364A"/>
                 </a:solidFill>
@@ -8415,13 +8547,16 @@
                 <a:ea typeface="Aptos" pitchFamily="34" charset="-122"/>
                 <a:cs typeface="Aptos" pitchFamily="34" charset="-120"/>
               </a:rPr>
-              <a:t>Include intended use, validation dataset, comparison standard, performance metrics,.</a:t>
-            </a:r>
-            <a:endParaRPr lang="en-US" sz="1380" dirty="0"/>
-          </a:p>
-          <a:p>
-            <a:r>
-              <a:rPr lang="en-US" sz="1380" dirty="0">
+              <a:t>Include intended use, validation dataset, comparison standard,.</a:t>
+            </a:r>
+            <a:endParaRPr lang="en-US" sz="1220" dirty="0"/>
+          </a:p>
+          <a:p>
+            <a:pPr indent="0" marL="0">
+              <a:buNone/>
+            </a:pPr>
+            <a:r>
+              <a:rPr lang="en-US" sz="1220" dirty="0">
                 <a:solidFill>
                   <a:srgbClr val="17364A"/>
                 </a:solidFill>
@@ -8429,9 +8564,9 @@
                 <a:ea typeface="Aptos" pitchFamily="34" charset="-122"/>
                 <a:cs typeface="Aptos" pitchFamily="34" charset="-120"/>
               </a:rPr>
-              <a:t>The plan should clearly explain how validation results will be interpreted and who has.</a:t>
-            </a:r>
-            <a:endParaRPr lang="en-US" sz="1380" dirty="0"/>
+              <a:t>The plan should clearly explain how validation results will be.</a:t>
+            </a:r>
+            <a:endParaRPr lang="en-US" sz="1220" dirty="0"/>
           </a:p>
         </p:txBody>
       </p:sp>
@@ -8509,17 +8644,17 @@
         </p:nvSpPr>
         <p:spPr>
           <a:xfrm>
-            <a:off x="7799832" y="5001768"/>
-            <a:ext cx="3145536" cy="502920"/>
-          </a:xfrm>
-          <a:prstGeom prst="rect">
-            <a:avLst/>
-          </a:prstGeom>
-          <a:noFill/>
-          <a:ln/>
-        </p:spPr>
-        <p:txBody>
-          <a:bodyPr wrap="square" lIns="0" tIns="0" rIns="0" bIns="0" rtlCol="0" anchor="t">
+            <a:off x="7799832" y="4974336"/>
+            <a:ext cx="3145536" cy="576072"/>
+          </a:xfrm>
+          <a:prstGeom prst="rect">
+            <a:avLst/>
+          </a:prstGeom>
+          <a:noFill/>
+          <a:ln/>
+        </p:spPr>
+        <p:txBody>
+          <a:bodyPr wrap="square" lIns="254" tIns="254" rIns="254" bIns="254" rtlCol="0" anchor="t">
             <a:normAutofit/>
           </a:bodyPr>
           <a:lstStyle/>
@@ -8528,7 +8663,7 @@
               <a:buNone/>
             </a:pPr>
             <a:r>
-              <a:rPr lang="en-US" sz="1550" dirty="0">
+              <a:rPr lang="en-US" sz="1320" dirty="0">
                 <a:solidFill>
                   <a:srgbClr val="17364A"/>
                 </a:solidFill>
@@ -8536,9 +8671,9 @@
                 <a:ea typeface="Aptos" pitchFamily="34" charset="-122"/>
                 <a:cs typeface="Aptos" pitchFamily="34" charset="-120"/>
               </a:rPr>
-              <a:t>Use the assignment to test whether you can explain the concept, apply it to a realistic public health situation, and identify what would need review before the work moves forward.</a:t>
-            </a:r>
-            <a:endParaRPr lang="en-US" sz="1550" dirty="0"/>
+              <a:t>Use the assignment to test whether you can explain the concept, apply it to a realistic public health situation, and.</a:t>
+            </a:r>
+            <a:endParaRPr lang="en-US" sz="1320" dirty="0"/>
           </a:p>
         </p:txBody>
       </p:sp>
@@ -8839,49 +8974,58 @@
           <a:ln/>
         </p:spPr>
         <p:txBody>
-          <a:bodyPr wrap="square" lIns="635" tIns="635" rIns="635" bIns="635" rtlCol="0" anchor="t">
+          <a:bodyPr wrap="square" lIns="1016" tIns="1016" rIns="1016" bIns="1016" rtlCol="0" anchor="t">
             <a:normAutofit/>
           </a:bodyPr>
           <a:lstStyle/>
           <a:p>
+            <a:pPr indent="0" marL="0">
+              <a:buNone/>
+            </a:pPr>
             <a:r>
               <a:rPr lang="en-US" sz="2100" dirty="0">
                 <a:solidFill>
-                  <a:srgbClr val="17364A"/>
-                </a:solidFill>
-                <a:latin typeface="Aptos" pitchFamily="34" charset="0"/>
-                <a:ea typeface="Aptos" pitchFamily="34" charset="-122"/>
-                <a:cs typeface="Aptos" pitchFamily="34" charset="-120"/>
-              </a:rPr>
-              <a:t>Advanced validation plan</a:t>
+                  <a:srgbClr val="003A63"/>
+                </a:solidFill>
+                <a:latin typeface="Aptos" pitchFamily="34" charset="0"/>
+                <a:ea typeface="Aptos" pitchFamily="34" charset="-122"/>
+                <a:cs typeface="Aptos" pitchFamily="34" charset="-120"/>
+              </a:rPr>
+              <a:t>• Advanced validation plan</a:t>
             </a:r>
             <a:endParaRPr lang="en-US" sz="2100" dirty="0"/>
           </a:p>
           <a:p>
+            <a:pPr indent="0" marL="0">
+              <a:buNone/>
+            </a:pPr>
             <a:r>
               <a:rPr lang="en-US" sz="2100" dirty="0">
                 <a:solidFill>
-                  <a:srgbClr val="17364A"/>
-                </a:solidFill>
-                <a:latin typeface="Aptos" pitchFamily="34" charset="0"/>
-                <a:ea typeface="Aptos" pitchFamily="34" charset="-122"/>
-                <a:cs typeface="Aptos" pitchFamily="34" charset="-120"/>
-              </a:rPr>
-              <a:t>Metric and error-consequence table</a:t>
+                  <a:srgbClr val="003A63"/>
+                </a:solidFill>
+                <a:latin typeface="Aptos" pitchFamily="34" charset="0"/>
+                <a:ea typeface="Aptos" pitchFamily="34" charset="-122"/>
+                <a:cs typeface="Aptos" pitchFamily="34" charset="-120"/>
+              </a:rPr>
+              <a:t>• Metric and error-consequence table</a:t>
             </a:r>
             <a:endParaRPr lang="en-US" sz="2100" dirty="0"/>
           </a:p>
           <a:p>
+            <a:pPr indent="0" marL="0">
+              <a:buNone/>
+            </a:pPr>
             <a:r>
               <a:rPr lang="en-US" sz="2100" dirty="0">
                 <a:solidFill>
-                  <a:srgbClr val="17364A"/>
-                </a:solidFill>
-                <a:latin typeface="Aptos" pitchFamily="34" charset="0"/>
-                <a:ea typeface="Aptos" pitchFamily="34" charset="-122"/>
-                <a:cs typeface="Aptos" pitchFamily="34" charset="-120"/>
-              </a:rPr>
-              <a:t>Subgroup performance review plan</a:t>
+                  <a:srgbClr val="003A63"/>
+                </a:solidFill>
+                <a:latin typeface="Aptos" pitchFamily="34" charset="0"/>
+                <a:ea typeface="Aptos" pitchFamily="34" charset="-122"/>
+                <a:cs typeface="Aptos" pitchFamily="34" charset="-120"/>
+              </a:rPr>
+              <a:t>• Subgroup performance review plan</a:t>
             </a:r>
             <a:endParaRPr lang="en-US" sz="2100" dirty="0"/>
           </a:p>
@@ -8961,17 +9105,17 @@
         </p:nvSpPr>
         <p:spPr>
           <a:xfrm>
-            <a:off x="7799832" y="1828800"/>
-            <a:ext cx="3145536" cy="685800"/>
-          </a:xfrm>
-          <a:prstGeom prst="rect">
-            <a:avLst/>
-          </a:prstGeom>
-          <a:noFill/>
-          <a:ln/>
-        </p:spPr>
-        <p:txBody>
-          <a:bodyPr wrap="square" lIns="0" tIns="0" rIns="0" bIns="0" rtlCol="0" anchor="t">
+            <a:off x="7799832" y="1801368"/>
+            <a:ext cx="3145536" cy="758952"/>
+          </a:xfrm>
+          <a:prstGeom prst="rect">
+            <a:avLst/>
+          </a:prstGeom>
+          <a:noFill/>
+          <a:ln/>
+        </p:spPr>
+        <p:txBody>
+          <a:bodyPr wrap="square" lIns="254" tIns="254" rIns="254" bIns="254" rtlCol="0" anchor="t">
             <a:normAutofit/>
           </a:bodyPr>
           <a:lstStyle/>
@@ -8980,7 +9124,7 @@
               <a:buNone/>
             </a:pPr>
             <a:r>
-              <a:rPr lang="en-US" sz="1550" dirty="0">
+              <a:rPr lang="en-US" sz="1320" dirty="0">
                 <a:solidFill>
                   <a:srgbClr val="17364A"/>
                 </a:solidFill>
@@ -8990,7 +9134,7 @@
               </a:rPr>
               <a:t>Advanced validation plan</a:t>
             </a:r>
-            <a:endParaRPr lang="en-US" sz="1550" dirty="0"/>
+            <a:endParaRPr lang="en-US" sz="1320" dirty="0"/>
           </a:p>
         </p:txBody>
       </p:sp>
@@ -9078,13 +9222,16 @@
           <a:ln/>
         </p:spPr>
         <p:txBody>
-          <a:bodyPr wrap="square" lIns="254" tIns="254" rIns="254" bIns="254" rtlCol="0" anchor="t">
+          <a:bodyPr wrap="square" lIns="508" tIns="508" rIns="508" bIns="508" rtlCol="0" anchor="t">
             <a:normAutofit/>
           </a:bodyPr>
           <a:lstStyle/>
           <a:p>
-            <a:r>
-              <a:rPr lang="en-US" sz="1380" dirty="0">
+            <a:pPr indent="0" marL="0">
+              <a:buNone/>
+            </a:pPr>
+            <a:r>
+              <a:rPr lang="en-US" sz="1220" dirty="0">
                 <a:solidFill>
                   <a:srgbClr val="17364A"/>
                 </a:solidFill>
@@ -9094,11 +9241,14 @@
               </a:rPr>
               <a:t>Advanced validation plan</a:t>
             </a:r>
-            <a:endParaRPr lang="en-US" sz="1380" dirty="0"/>
-          </a:p>
-          <a:p>
-            <a:r>
-              <a:rPr lang="en-US" sz="1380" dirty="0">
+            <a:endParaRPr lang="en-US" sz="1220" dirty="0"/>
+          </a:p>
+          <a:p>
+            <a:pPr indent="0" marL="0">
+              <a:buNone/>
+            </a:pPr>
+            <a:r>
+              <a:rPr lang="en-US" sz="1220" dirty="0">
                 <a:solidFill>
                   <a:srgbClr val="17364A"/>
                 </a:solidFill>
@@ -9108,11 +9258,14 @@
               </a:rPr>
               <a:t>Metric and error-consequence table</a:t>
             </a:r>
-            <a:endParaRPr lang="en-US" sz="1380" dirty="0"/>
-          </a:p>
-          <a:p>
-            <a:r>
-              <a:rPr lang="en-US" sz="1380" dirty="0">
+            <a:endParaRPr lang="en-US" sz="1220" dirty="0"/>
+          </a:p>
+          <a:p>
+            <a:pPr indent="0" marL="0">
+              <a:buNone/>
+            </a:pPr>
+            <a:r>
+              <a:rPr lang="en-US" sz="1220" dirty="0">
                 <a:solidFill>
                   <a:srgbClr val="17364A"/>
                 </a:solidFill>
@@ -9122,7 +9275,7 @@
               </a:rPr>
               <a:t>Subgroup performance review plan</a:t>
             </a:r>
-            <a:endParaRPr lang="en-US" sz="1380" dirty="0"/>
+            <a:endParaRPr lang="en-US" sz="1220" dirty="0"/>
           </a:p>
         </p:txBody>
       </p:sp>
@@ -9200,17 +9353,17 @@
         </p:nvSpPr>
         <p:spPr>
           <a:xfrm>
-            <a:off x="7799832" y="5001768"/>
-            <a:ext cx="3145536" cy="502920"/>
-          </a:xfrm>
-          <a:prstGeom prst="rect">
-            <a:avLst/>
-          </a:prstGeom>
-          <a:noFill/>
-          <a:ln/>
-        </p:spPr>
-        <p:txBody>
-          <a:bodyPr wrap="square" lIns="0" tIns="0" rIns="0" bIns="0" rtlCol="0" anchor="t">
+            <a:off x="7799832" y="4974336"/>
+            <a:ext cx="3145536" cy="576072"/>
+          </a:xfrm>
+          <a:prstGeom prst="rect">
+            <a:avLst/>
+          </a:prstGeom>
+          <a:noFill/>
+          <a:ln/>
+        </p:spPr>
+        <p:txBody>
+          <a:bodyPr wrap="square" lIns="254" tIns="254" rIns="254" bIns="254" rtlCol="0" anchor="t">
             <a:normAutofit/>
           </a:bodyPr>
           <a:lstStyle/>
@@ -9219,7 +9372,7 @@
               <a:buNone/>
             </a:pPr>
             <a:r>
-              <a:rPr lang="en-US" sz="1550" dirty="0">
+              <a:rPr lang="en-US" sz="1320" dirty="0">
                 <a:solidFill>
                   <a:srgbClr val="17364A"/>
                 </a:solidFill>
@@ -9227,9 +9380,9 @@
                 <a:ea typeface="Aptos" pitchFamily="34" charset="-122"/>
                 <a:cs typeface="Aptos" pitchFamily="34" charset="-120"/>
               </a:rPr>
-              <a:t>Identify what could go wrong, who could be affected, what safeguards are needed, and what evidence should be reviewed before use expands.</a:t>
-            </a:r>
-            <a:endParaRPr lang="en-US" sz="1550" dirty="0"/>
+              <a:t>Identify what could go wrong, who could be affected, what safeguards are needed, and what evidence should be reviewed.</a:t>
+            </a:r>
+            <a:endParaRPr lang="en-US" sz="1320" dirty="0"/>
           </a:p>
         </p:txBody>
       </p:sp>
@@ -9530,21 +9683,24 @@
           <a:ln/>
         </p:spPr>
         <p:txBody>
-          <a:bodyPr wrap="square" lIns="635" tIns="635" rIns="635" bIns="635" rtlCol="0" anchor="t">
+          <a:bodyPr wrap="square" lIns="1016" tIns="1016" rIns="1016" bIns="1016" rtlCol="0" anchor="t">
             <a:normAutofit/>
           </a:bodyPr>
           <a:lstStyle/>
           <a:p>
+            <a:pPr indent="0" marL="0">
+              <a:buNone/>
+            </a:pPr>
             <a:r>
               <a:rPr lang="en-US" sz="2100" dirty="0">
                 <a:solidFill>
-                  <a:srgbClr val="17364A"/>
-                </a:solidFill>
-                <a:latin typeface="Aptos" pitchFamily="34" charset="0"/>
-                <a:ea typeface="Aptos" pitchFamily="34" charset="-122"/>
-                <a:cs typeface="Aptos" pitchFamily="34" charset="-120"/>
-              </a:rPr>
-              <a:t>Post-deployment monitoring schedule</a:t>
+                  <a:srgbClr val="003A63"/>
+                </a:solidFill>
+                <a:latin typeface="Aptos" pitchFamily="34" charset="0"/>
+                <a:ea typeface="Aptos" pitchFamily="34" charset="-122"/>
+                <a:cs typeface="Aptos" pitchFamily="34" charset="-120"/>
+              </a:rPr>
+              <a:t>• Post-deployment monitoring schedule</a:t>
             </a:r>
             <a:endParaRPr lang="en-US" sz="2100" dirty="0"/>
           </a:p>
@@ -9624,17 +9780,17 @@
         </p:nvSpPr>
         <p:spPr>
           <a:xfrm>
-            <a:off x="7799832" y="1828800"/>
-            <a:ext cx="3145536" cy="685800"/>
-          </a:xfrm>
-          <a:prstGeom prst="rect">
-            <a:avLst/>
-          </a:prstGeom>
-          <a:noFill/>
-          <a:ln/>
-        </p:spPr>
-        <p:txBody>
-          <a:bodyPr wrap="square" lIns="0" tIns="0" rIns="0" bIns="0" rtlCol="0" anchor="t">
+            <a:off x="7799832" y="1801368"/>
+            <a:ext cx="3145536" cy="758952"/>
+          </a:xfrm>
+          <a:prstGeom prst="rect">
+            <a:avLst/>
+          </a:prstGeom>
+          <a:noFill/>
+          <a:ln/>
+        </p:spPr>
+        <p:txBody>
+          <a:bodyPr wrap="square" lIns="254" tIns="254" rIns="254" bIns="254" rtlCol="0" anchor="t">
             <a:normAutofit/>
           </a:bodyPr>
           <a:lstStyle/>
@@ -9643,7 +9799,7 @@
               <a:buNone/>
             </a:pPr>
             <a:r>
-              <a:rPr lang="en-US" sz="1550" dirty="0">
+              <a:rPr lang="en-US" sz="1320" dirty="0">
                 <a:solidFill>
                   <a:srgbClr val="17364A"/>
                 </a:solidFill>
@@ -9653,7 +9809,7 @@
               </a:rPr>
               <a:t>Post-deployment monitoring schedule</a:t>
             </a:r>
-            <a:endParaRPr lang="en-US" sz="1550" dirty="0"/>
+            <a:endParaRPr lang="en-US" sz="1320" dirty="0"/>
           </a:p>
         </p:txBody>
       </p:sp>
@@ -9741,13 +9897,16 @@
           <a:ln/>
         </p:spPr>
         <p:txBody>
-          <a:bodyPr wrap="square" lIns="254" tIns="254" rIns="254" bIns="254" rtlCol="0" anchor="t">
+          <a:bodyPr wrap="square" lIns="508" tIns="508" rIns="508" bIns="508" rtlCol="0" anchor="t">
             <a:normAutofit/>
           </a:bodyPr>
           <a:lstStyle/>
           <a:p>
-            <a:r>
-              <a:rPr lang="en-US" sz="1380" dirty="0">
+            <a:pPr indent="0" marL="0">
+              <a:buNone/>
+            </a:pPr>
+            <a:r>
+              <a:rPr lang="en-US" sz="1220" dirty="0">
                 <a:solidFill>
                   <a:srgbClr val="17364A"/>
                 </a:solidFill>
@@ -9757,7 +9916,7 @@
               </a:rPr>
               <a:t>Post-deployment monitoring schedule</a:t>
             </a:r>
-            <a:endParaRPr lang="en-US" sz="1380" dirty="0"/>
+            <a:endParaRPr lang="en-US" sz="1220" dirty="0"/>
           </a:p>
         </p:txBody>
       </p:sp>
@@ -9835,17 +9994,17 @@
         </p:nvSpPr>
         <p:spPr>
           <a:xfrm>
-            <a:off x="7799832" y="5001768"/>
-            <a:ext cx="3145536" cy="502920"/>
-          </a:xfrm>
-          <a:prstGeom prst="rect">
-            <a:avLst/>
-          </a:prstGeom>
-          <a:noFill/>
-          <a:ln/>
-        </p:spPr>
-        <p:txBody>
-          <a:bodyPr wrap="square" lIns="0" tIns="0" rIns="0" bIns="0" rtlCol="0" anchor="t">
+            <a:off x="7799832" y="4974336"/>
+            <a:ext cx="3145536" cy="576072"/>
+          </a:xfrm>
+          <a:prstGeom prst="rect">
+            <a:avLst/>
+          </a:prstGeom>
+          <a:noFill/>
+          <a:ln/>
+        </p:spPr>
+        <p:txBody>
+          <a:bodyPr wrap="square" lIns="254" tIns="254" rIns="254" bIns="254" rtlCol="0" anchor="t">
             <a:normAutofit/>
           </a:bodyPr>
           <a:lstStyle/>
@@ -9854,7 +10013,7 @@
               <a:buNone/>
             </a:pPr>
             <a:r>
-              <a:rPr lang="en-US" sz="1550" dirty="0">
+              <a:rPr lang="en-US" sz="1320" dirty="0">
                 <a:solidFill>
                   <a:srgbClr val="17364A"/>
                 </a:solidFill>
@@ -9862,9 +10021,9 @@
                 <a:ea typeface="Aptos" pitchFamily="34" charset="-122"/>
                 <a:cs typeface="Aptos" pitchFamily="34" charset="-120"/>
               </a:rPr>
-              <a:t>Identify what could go wrong, who could be affected, what safeguards are needed, and what evidence should be reviewed before use expands.</a:t>
-            </a:r>
-            <a:endParaRPr lang="en-US" sz="1550" dirty="0"/>
+              <a:t>Identify what could go wrong, who could be affected, what safeguards are needed, and what evidence should be reviewed.</a:t>
+            </a:r>
+            <a:endParaRPr lang="en-US" sz="1320" dirty="0"/>
           </a:p>
         </p:txBody>
       </p:sp>
@@ -10165,49 +10324,58 @@
           <a:ln/>
         </p:spPr>
         <p:txBody>
-          <a:bodyPr wrap="square" lIns="635" tIns="635" rIns="635" bIns="635" rtlCol="0" anchor="t">
+          <a:bodyPr wrap="square" lIns="1016" tIns="1016" rIns="1016" bIns="1016" rtlCol="0" anchor="t">
             <a:normAutofit/>
           </a:bodyPr>
           <a:lstStyle/>
           <a:p>
+            <a:pPr indent="0" marL="0">
+              <a:buNone/>
+            </a:pPr>
             <a:r>
               <a:rPr lang="en-US" sz="2100" dirty="0">
                 <a:solidFill>
-                  <a:srgbClr val="17364A"/>
-                </a:solidFill>
-                <a:latin typeface="Aptos" pitchFamily="34" charset="0"/>
-                <a:ea typeface="Aptos" pitchFamily="34" charset="-122"/>
-                <a:cs typeface="Aptos" pitchFamily="34" charset="-120"/>
-              </a:rPr>
-              <a:t>Model validation is the process of determining whether an AI tool performs adequately for its intended use,.</a:t>
+                  <a:srgbClr val="003A63"/>
+                </a:solidFill>
+                <a:latin typeface="Aptos" pitchFamily="34" charset="0"/>
+                <a:ea typeface="Aptos" pitchFamily="34" charset="-122"/>
+                <a:cs typeface="Aptos" pitchFamily="34" charset="-120"/>
+              </a:rPr>
+              <a:t>• Model validation is the process of determining whether an AI tool performs adequately for its.</a:t>
             </a:r>
             <a:endParaRPr lang="en-US" sz="2100" dirty="0"/>
           </a:p>
           <a:p>
+            <a:pPr indent="0" marL="0">
+              <a:buNone/>
+            </a:pPr>
             <a:r>
               <a:rPr lang="en-US" sz="2100" dirty="0">
                 <a:solidFill>
-                  <a:srgbClr val="17364A"/>
-                </a:solidFill>
-                <a:latin typeface="Aptos" pitchFamily="34" charset="0"/>
-                <a:ea typeface="Aptos" pitchFamily="34" charset="-122"/>
-                <a:cs typeface="Aptos" pitchFamily="34" charset="-120"/>
-              </a:rPr>
-              <a:t>Basic validation asks whether the tool works at all.</a:t>
+                  <a:srgbClr val="003A63"/>
+                </a:solidFill>
+                <a:latin typeface="Aptos" pitchFamily="34" charset="0"/>
+                <a:ea typeface="Aptos" pitchFamily="34" charset="-122"/>
+                <a:cs typeface="Aptos" pitchFamily="34" charset="-120"/>
+              </a:rPr>
+              <a:t>• Basic validation asks whether the tool works at all.</a:t>
             </a:r>
             <a:endParaRPr lang="en-US" sz="2100" dirty="0"/>
           </a:p>
           <a:p>
+            <a:pPr indent="0" marL="0">
+              <a:buNone/>
+            </a:pPr>
             <a:r>
               <a:rPr lang="en-US" sz="2100" dirty="0">
                 <a:solidFill>
-                  <a:srgbClr val="17364A"/>
-                </a:solidFill>
-                <a:latin typeface="Aptos" pitchFamily="34" charset="0"/>
-                <a:ea typeface="Aptos" pitchFamily="34" charset="-122"/>
-                <a:cs typeface="Aptos" pitchFamily="34" charset="-120"/>
-              </a:rPr>
-              <a:t>Advanced validation asks whether it works well enough, for whom, under what conditions, with what limitations,.</a:t>
+                  <a:srgbClr val="003A63"/>
+                </a:solidFill>
+                <a:latin typeface="Aptos" pitchFamily="34" charset="0"/>
+                <a:ea typeface="Aptos" pitchFamily="34" charset="-122"/>
+                <a:cs typeface="Aptos" pitchFamily="34" charset="-120"/>
+              </a:rPr>
+              <a:t>• Advanced validation asks whether it works well enough, for whom, under what conditions, with.</a:t>
             </a:r>
             <a:endParaRPr lang="en-US" sz="2100" dirty="0"/>
           </a:p>
@@ -10287,17 +10455,17 @@
         </p:nvSpPr>
         <p:spPr>
           <a:xfrm>
-            <a:off x="8074152" y="1920240"/>
-            <a:ext cx="2825496" cy="1280160"/>
-          </a:xfrm>
-          <a:prstGeom prst="rect">
-            <a:avLst/>
-          </a:prstGeom>
-          <a:noFill/>
-          <a:ln/>
-        </p:spPr>
-        <p:txBody>
-          <a:bodyPr wrap="square" lIns="0" tIns="0" rIns="0" bIns="0" rtlCol="0" anchor="t">
+            <a:off x="8074152" y="1892808"/>
+            <a:ext cx="2825496" cy="1353312"/>
+          </a:xfrm>
+          <a:prstGeom prst="rect">
+            <a:avLst/>
+          </a:prstGeom>
+          <a:noFill/>
+          <a:ln/>
+        </p:spPr>
+        <p:txBody>
+          <a:bodyPr wrap="square" lIns="254" tIns="254" rIns="254" bIns="254" rtlCol="0" anchor="t">
             <a:normAutofit/>
           </a:bodyPr>
           <a:lstStyle/>
@@ -10306,7 +10474,7 @@
               <a:buNone/>
             </a:pPr>
             <a:r>
-              <a:rPr lang="en-US" sz="1550" dirty="0">
+              <a:rPr lang="en-US" sz="1320" dirty="0">
                 <a:solidFill>
                   <a:srgbClr val="17364A"/>
                 </a:solidFill>
@@ -10314,43 +10482,9 @@
                 <a:ea typeface="Aptos" pitchFamily="34" charset="-122"/>
                 <a:cs typeface="Aptos" pitchFamily="34" charset="-120"/>
               </a:rPr>
-              <a:t>Level: intermediate/practitioner</a:t>
-            </a:r>
-            <a:endParaRPr lang="en-US" sz="1550" dirty="0"/>
-          </a:p>
-          <a:p>
-            <a:pPr indent="0" marL="0">
-              <a:buNone/>
-            </a:pPr>
-            <a:r>
-              <a:rPr lang="en-US" sz="1550" dirty="0">
-                <a:solidFill>
-                  <a:srgbClr val="17364A"/>
-                </a:solidFill>
-                <a:latin typeface="Aptos" pitchFamily="34" charset="0"/>
-                <a:ea typeface="Aptos" pitchFamily="34" charset="-122"/>
-                <a:cs typeface="Aptos" pitchFamily="34" charset="-120"/>
-              </a:rPr>
-              <a:t>Primary track: Analytics and Modeling Track</a:t>
-            </a:r>
-            <a:endParaRPr lang="en-US" sz="1550" dirty="0"/>
-          </a:p>
-          <a:p>
-            <a:pPr indent="0" marL="0">
-              <a:buNone/>
-            </a:pPr>
-            <a:r>
-              <a:rPr lang="en-US" sz="1550" dirty="0">
-                <a:solidFill>
-                  <a:srgbClr val="17364A"/>
-                </a:solidFill>
-                <a:latin typeface="Aptos" pitchFamily="34" charset="0"/>
-                <a:ea typeface="Aptos" pitchFamily="34" charset="-122"/>
-                <a:cs typeface="Aptos" pitchFamily="34" charset="-120"/>
-              </a:rPr>
-              <a:t>Appears in tracks: analytics-modeling</a:t>
-            </a:r>
-            <a:endParaRPr lang="en-US" sz="1550" dirty="0"/>
+              <a:t>Level: intermediate/practitioner Primary track: Analytics and Modeling Track Appears in tracks: analytics-modeling</a:t>
+            </a:r>
+            <a:endParaRPr lang="en-US" sz="1320" dirty="0"/>
           </a:p>
         </p:txBody>
       </p:sp>
@@ -10438,13 +10572,16 @@
           <a:ln/>
         </p:spPr>
         <p:txBody>
-          <a:bodyPr wrap="square" lIns="254" tIns="254" rIns="254" bIns="254" rtlCol="0" anchor="t">
+          <a:bodyPr wrap="square" lIns="508" tIns="508" rIns="508" bIns="508" rtlCol="0" anchor="t">
             <a:normAutofit/>
           </a:bodyPr>
           <a:lstStyle/>
           <a:p>
-            <a:r>
-              <a:rPr lang="en-US" sz="1380" dirty="0">
+            <a:pPr indent="0" marL="0">
+              <a:buNone/>
+            </a:pPr>
+            <a:r>
+              <a:rPr lang="en-US" sz="1220" dirty="0">
                 <a:solidFill>
                   <a:srgbClr val="17364A"/>
                 </a:solidFill>
@@ -10454,11 +10591,14 @@
               </a:rPr>
               <a:t>Read the module for shared vocabulary and context.</a:t>
             </a:r>
-            <a:endParaRPr lang="en-US" sz="1380" dirty="0"/>
-          </a:p>
-          <a:p>
-            <a:r>
-              <a:rPr lang="en-US" sz="1380" dirty="0">
+            <a:endParaRPr lang="en-US" sz="1220" dirty="0"/>
+          </a:p>
+          <a:p>
+            <a:pPr indent="0" marL="0">
+              <a:buNone/>
+            </a:pPr>
+            <a:r>
+              <a:rPr lang="en-US" sz="1220" dirty="0">
                 <a:solidFill>
                   <a:srgbClr val="17364A"/>
                 </a:solidFill>
@@ -10468,11 +10608,14 @@
               </a:rPr>
               <a:t>Complete the practical exercise to apply the concept.</a:t>
             </a:r>
-            <a:endParaRPr lang="en-US" sz="1380" dirty="0"/>
-          </a:p>
-          <a:p>
-            <a:r>
-              <a:rPr lang="en-US" sz="1380" dirty="0">
+            <a:endParaRPr lang="en-US" sz="1220" dirty="0"/>
+          </a:p>
+          <a:p>
+            <a:pPr indent="0" marL="0">
+              <a:buNone/>
+            </a:pPr>
+            <a:r>
+              <a:rPr lang="en-US" sz="1220" dirty="0">
                 <a:solidFill>
                   <a:srgbClr val="17364A"/>
                 </a:solidFill>
@@ -10482,7 +10625,7 @@
               </a:rPr>
               <a:t>Use the notes and references for deeper review.</a:t>
             </a:r>
-            <a:endParaRPr lang="en-US" sz="1380" dirty="0"/>
+            <a:endParaRPr lang="en-US" sz="1220" dirty="0"/>
           </a:p>
         </p:txBody>
       </p:sp>
@@ -10783,49 +10926,58 @@
           <a:ln/>
         </p:spPr>
         <p:txBody>
-          <a:bodyPr wrap="square" lIns="635" tIns="635" rIns="635" bIns="635" rtlCol="0" anchor="t">
+          <a:bodyPr wrap="square" lIns="1016" tIns="1016" rIns="1016" bIns="1016" rtlCol="0" anchor="t">
             <a:normAutofit/>
           </a:bodyPr>
           <a:lstStyle/>
           <a:p>
+            <a:pPr indent="0" marL="0">
+              <a:buNone/>
+            </a:pPr>
             <a:r>
               <a:rPr lang="en-US" sz="2100" dirty="0">
                 <a:solidFill>
-                  <a:srgbClr val="17364A"/>
-                </a:solidFill>
-                <a:latin typeface="Aptos" pitchFamily="34" charset="0"/>
-                <a:ea typeface="Aptos" pitchFamily="34" charset="-122"/>
-                <a:cs typeface="Aptos" pitchFamily="34" charset="-120"/>
-              </a:rPr>
-              <a:t>Advanced validation plan</a:t>
+                  <a:srgbClr val="003A63"/>
+                </a:solidFill>
+                <a:latin typeface="Aptos" pitchFamily="34" charset="0"/>
+                <a:ea typeface="Aptos" pitchFamily="34" charset="-122"/>
+                <a:cs typeface="Aptos" pitchFamily="34" charset="-120"/>
+              </a:rPr>
+              <a:t>• Advanced validation plan</a:t>
             </a:r>
             <a:endParaRPr lang="en-US" sz="2100" dirty="0"/>
           </a:p>
           <a:p>
+            <a:pPr indent="0" marL="0">
+              <a:buNone/>
+            </a:pPr>
             <a:r>
               <a:rPr lang="en-US" sz="2100" dirty="0">
                 <a:solidFill>
-                  <a:srgbClr val="17364A"/>
-                </a:solidFill>
-                <a:latin typeface="Aptos" pitchFamily="34" charset="0"/>
-                <a:ea typeface="Aptos" pitchFamily="34" charset="-122"/>
-                <a:cs typeface="Aptos" pitchFamily="34" charset="-120"/>
-              </a:rPr>
-              <a:t>Metric and error-consequence table</a:t>
+                  <a:srgbClr val="003A63"/>
+                </a:solidFill>
+                <a:latin typeface="Aptos" pitchFamily="34" charset="0"/>
+                <a:ea typeface="Aptos" pitchFamily="34" charset="-122"/>
+                <a:cs typeface="Aptos" pitchFamily="34" charset="-120"/>
+              </a:rPr>
+              <a:t>• Metric and error-consequence table</a:t>
             </a:r>
             <a:endParaRPr lang="en-US" sz="2100" dirty="0"/>
           </a:p>
           <a:p>
+            <a:pPr indent="0" marL="0">
+              <a:buNone/>
+            </a:pPr>
             <a:r>
               <a:rPr lang="en-US" sz="2100" dirty="0">
                 <a:solidFill>
-                  <a:srgbClr val="17364A"/>
-                </a:solidFill>
-                <a:latin typeface="Aptos" pitchFamily="34" charset="0"/>
-                <a:ea typeface="Aptos" pitchFamily="34" charset="-122"/>
-                <a:cs typeface="Aptos" pitchFamily="34" charset="-120"/>
-              </a:rPr>
-              <a:t>Subgroup performance review plan</a:t>
+                  <a:srgbClr val="003A63"/>
+                </a:solidFill>
+                <a:latin typeface="Aptos" pitchFamily="34" charset="0"/>
+                <a:ea typeface="Aptos" pitchFamily="34" charset="-122"/>
+                <a:cs typeface="Aptos" pitchFamily="34" charset="-120"/>
+              </a:rPr>
+              <a:t>• Subgroup performance review plan</a:t>
             </a:r>
             <a:endParaRPr lang="en-US" sz="2100" dirty="0"/>
           </a:p>
@@ -10905,17 +11057,17 @@
         </p:nvSpPr>
         <p:spPr>
           <a:xfrm>
-            <a:off x="7799832" y="1828800"/>
-            <a:ext cx="3145536" cy="685800"/>
-          </a:xfrm>
-          <a:prstGeom prst="rect">
-            <a:avLst/>
-          </a:prstGeom>
-          <a:noFill/>
-          <a:ln/>
-        </p:spPr>
-        <p:txBody>
-          <a:bodyPr wrap="square" lIns="0" tIns="0" rIns="0" bIns="0" rtlCol="0" anchor="t">
+            <a:off x="7799832" y="1801368"/>
+            <a:ext cx="3145536" cy="758952"/>
+          </a:xfrm>
+          <a:prstGeom prst="rect">
+            <a:avLst/>
+          </a:prstGeom>
+          <a:noFill/>
+          <a:ln/>
+        </p:spPr>
+        <p:txBody>
+          <a:bodyPr wrap="square" lIns="254" tIns="254" rIns="254" bIns="254" rtlCol="0" anchor="t">
             <a:normAutofit/>
           </a:bodyPr>
           <a:lstStyle/>
@@ -10924,7 +11076,7 @@
               <a:buNone/>
             </a:pPr>
             <a:r>
-              <a:rPr lang="en-US" sz="1550" dirty="0">
+              <a:rPr lang="en-US" sz="1320" dirty="0">
                 <a:solidFill>
                   <a:srgbClr val="17364A"/>
                 </a:solidFill>
@@ -10934,7 +11086,7 @@
               </a:rPr>
               <a:t>Advanced validation plan</a:t>
             </a:r>
-            <a:endParaRPr lang="en-US" sz="1550" dirty="0"/>
+            <a:endParaRPr lang="en-US" sz="1320" dirty="0"/>
           </a:p>
         </p:txBody>
       </p:sp>
@@ -11022,13 +11174,16 @@
           <a:ln/>
         </p:spPr>
         <p:txBody>
-          <a:bodyPr wrap="square" lIns="254" tIns="254" rIns="254" bIns="254" rtlCol="0" anchor="t">
+          <a:bodyPr wrap="square" lIns="508" tIns="508" rIns="508" bIns="508" rtlCol="0" anchor="t">
             <a:normAutofit/>
           </a:bodyPr>
           <a:lstStyle/>
           <a:p>
-            <a:r>
-              <a:rPr lang="en-US" sz="1380" dirty="0">
+            <a:pPr indent="0" marL="0">
+              <a:buNone/>
+            </a:pPr>
+            <a:r>
+              <a:rPr lang="en-US" sz="1220" dirty="0">
                 <a:solidFill>
                   <a:srgbClr val="17364A"/>
                 </a:solidFill>
@@ -11038,11 +11193,14 @@
               </a:rPr>
               <a:t>Advanced validation plan</a:t>
             </a:r>
-            <a:endParaRPr lang="en-US" sz="1380" dirty="0"/>
-          </a:p>
-          <a:p>
-            <a:r>
-              <a:rPr lang="en-US" sz="1380" dirty="0">
+            <a:endParaRPr lang="en-US" sz="1220" dirty="0"/>
+          </a:p>
+          <a:p>
+            <a:pPr indent="0" marL="0">
+              <a:buNone/>
+            </a:pPr>
+            <a:r>
+              <a:rPr lang="en-US" sz="1220" dirty="0">
                 <a:solidFill>
                   <a:srgbClr val="17364A"/>
                 </a:solidFill>
@@ -11052,11 +11210,14 @@
               </a:rPr>
               <a:t>Metric and error-consequence table</a:t>
             </a:r>
-            <a:endParaRPr lang="en-US" sz="1380" dirty="0"/>
-          </a:p>
-          <a:p>
-            <a:r>
-              <a:rPr lang="en-US" sz="1380" dirty="0">
+            <a:endParaRPr lang="en-US" sz="1220" dirty="0"/>
+          </a:p>
+          <a:p>
+            <a:pPr indent="0" marL="0">
+              <a:buNone/>
+            </a:pPr>
+            <a:r>
+              <a:rPr lang="en-US" sz="1220" dirty="0">
                 <a:solidFill>
                   <a:srgbClr val="17364A"/>
                 </a:solidFill>
@@ -11066,7 +11227,7 @@
               </a:rPr>
               <a:t>Subgroup performance review plan</a:t>
             </a:r>
-            <a:endParaRPr lang="en-US" sz="1380" dirty="0"/>
+            <a:endParaRPr lang="en-US" sz="1220" dirty="0"/>
           </a:p>
         </p:txBody>
       </p:sp>
@@ -11144,17 +11305,17 @@
         </p:nvSpPr>
         <p:spPr>
           <a:xfrm>
-            <a:off x="7799832" y="5001768"/>
-            <a:ext cx="3145536" cy="502920"/>
-          </a:xfrm>
-          <a:prstGeom prst="rect">
-            <a:avLst/>
-          </a:prstGeom>
-          <a:noFill/>
-          <a:ln/>
-        </p:spPr>
-        <p:txBody>
-          <a:bodyPr wrap="square" lIns="0" tIns="0" rIns="0" bIns="0" rtlCol="0" anchor="t">
+            <a:off x="7799832" y="4974336"/>
+            <a:ext cx="3145536" cy="576072"/>
+          </a:xfrm>
+          <a:prstGeom prst="rect">
+            <a:avLst/>
+          </a:prstGeom>
+          <a:noFill/>
+          <a:ln/>
+        </p:spPr>
+        <p:txBody>
+          <a:bodyPr wrap="square" lIns="254" tIns="254" rIns="254" bIns="254" rtlCol="0" anchor="t">
             <a:normAutofit/>
           </a:bodyPr>
           <a:lstStyle/>
@@ -11163,7 +11324,7 @@
               <a:buNone/>
             </a:pPr>
             <a:r>
-              <a:rPr lang="en-US" sz="1550" dirty="0">
+              <a:rPr lang="en-US" sz="1320" dirty="0">
                 <a:solidFill>
                   <a:srgbClr val="17364A"/>
                 </a:solidFill>
@@ -11171,9 +11332,9 @@
                 <a:ea typeface="Aptos" pitchFamily="34" charset="-122"/>
                 <a:cs typeface="Aptos" pitchFamily="34" charset="-120"/>
               </a:rPr>
-              <a:t>Use the assignment to test whether you can explain the concept, apply it to a realistic public health situation, and identify what would need review before the work moves forward.</a:t>
-            </a:r>
-            <a:endParaRPr lang="en-US" sz="1550" dirty="0"/>
+              <a:t>Use the assignment to test whether you can explain the concept, apply it to a realistic public health situation, and.</a:t>
+            </a:r>
+            <a:endParaRPr lang="en-US" sz="1320" dirty="0"/>
           </a:p>
         </p:txBody>
       </p:sp>
@@ -11474,49 +11635,58 @@
           <a:ln/>
         </p:spPr>
         <p:txBody>
-          <a:bodyPr wrap="square" lIns="635" tIns="635" rIns="635" bIns="635" rtlCol="0" anchor="t">
+          <a:bodyPr wrap="square" lIns="1016" tIns="1016" rIns="1016" bIns="1016" rtlCol="0" anchor="t">
             <a:normAutofit/>
           </a:bodyPr>
           <a:lstStyle/>
           <a:p>
+            <a:pPr indent="0" marL="0">
+              <a:buNone/>
+            </a:pPr>
             <a:r>
               <a:rPr lang="en-US" sz="2100" dirty="0">
                 <a:solidFill>
-                  <a:srgbClr val="17364A"/>
-                </a:solidFill>
-                <a:latin typeface="Aptos" pitchFamily="34" charset="0"/>
-                <a:ea typeface="Aptos" pitchFamily="34" charset="-122"/>
-                <a:cs typeface="Aptos" pitchFamily="34" charset="-120"/>
-              </a:rPr>
-              <a:t>1. Why can overall accuracy be misleading?</a:t>
+                  <a:srgbClr val="003A63"/>
+                </a:solidFill>
+                <a:latin typeface="Aptos" pitchFamily="34" charset="0"/>
+                <a:ea typeface="Aptos" pitchFamily="34" charset="-122"/>
+                <a:cs typeface="Aptos" pitchFamily="34" charset="-120"/>
+              </a:rPr>
+              <a:t>• 1. Why can overall accuracy be misleading?</a:t>
             </a:r>
             <a:endParaRPr lang="en-US" sz="2100" dirty="0"/>
           </a:p>
           <a:p>
+            <a:pPr indent="0" marL="0">
+              <a:buNone/>
+            </a:pPr>
             <a:r>
               <a:rPr lang="en-US" sz="2100" dirty="0">
                 <a:solidFill>
-                  <a:srgbClr val="17364A"/>
-                </a:solidFill>
-                <a:latin typeface="Aptos" pitchFamily="34" charset="0"/>
-                <a:ea typeface="Aptos" pitchFamily="34" charset="-122"/>
-                <a:cs typeface="Aptos" pitchFamily="34" charset="-120"/>
-              </a:rPr>
-              <a:t>2. What is workflow validation?</a:t>
+                  <a:srgbClr val="003A63"/>
+                </a:solidFill>
+                <a:latin typeface="Aptos" pitchFamily="34" charset="0"/>
+                <a:ea typeface="Aptos" pitchFamily="34" charset="-122"/>
+                <a:cs typeface="Aptos" pitchFamily="34" charset="-120"/>
+              </a:rPr>
+              <a:t>• 2. What is workflow validation?</a:t>
             </a:r>
             <a:endParaRPr lang="en-US" sz="2100" dirty="0"/>
           </a:p>
           <a:p>
+            <a:pPr indent="0" marL="0">
+              <a:buNone/>
+            </a:pPr>
             <a:r>
               <a:rPr lang="en-US" sz="2100" dirty="0">
                 <a:solidFill>
-                  <a:srgbClr val="17364A"/>
-                </a:solidFill>
-                <a:latin typeface="Aptos" pitchFamily="34" charset="0"/>
-                <a:ea typeface="Aptos" pitchFamily="34" charset="-122"/>
-                <a:cs typeface="Aptos" pitchFamily="34" charset="-120"/>
-              </a:rPr>
-              <a:t>3. Which metric is especially important when missed true events could cause harm?</a:t>
+                  <a:srgbClr val="003A63"/>
+                </a:solidFill>
+                <a:latin typeface="Aptos" pitchFamily="34" charset="0"/>
+                <a:ea typeface="Aptos" pitchFamily="34" charset="-122"/>
+                <a:cs typeface="Aptos" pitchFamily="34" charset="-120"/>
+              </a:rPr>
+              <a:t>• 3. Which metric is especially important when missed true events could cause harm?</a:t>
             </a:r>
             <a:endParaRPr lang="en-US" sz="2100" dirty="0"/>
           </a:p>
@@ -11596,17 +11766,17 @@
         </p:nvSpPr>
         <p:spPr>
           <a:xfrm>
-            <a:off x="7799832" y="1828800"/>
-            <a:ext cx="3145536" cy="685800"/>
-          </a:xfrm>
-          <a:prstGeom prst="rect">
-            <a:avLst/>
-          </a:prstGeom>
-          <a:noFill/>
-          <a:ln/>
-        </p:spPr>
-        <p:txBody>
-          <a:bodyPr wrap="square" lIns="0" tIns="0" rIns="0" bIns="0" rtlCol="0" anchor="t">
+            <a:off x="7799832" y="1801368"/>
+            <a:ext cx="3145536" cy="758952"/>
+          </a:xfrm>
+          <a:prstGeom prst="rect">
+            <a:avLst/>
+          </a:prstGeom>
+          <a:noFill/>
+          <a:ln/>
+        </p:spPr>
+        <p:txBody>
+          <a:bodyPr wrap="square" lIns="254" tIns="254" rIns="254" bIns="254" rtlCol="0" anchor="t">
             <a:normAutofit/>
           </a:bodyPr>
           <a:lstStyle/>
@@ -11615,7 +11785,7 @@
               <a:buNone/>
             </a:pPr>
             <a:r>
-              <a:rPr lang="en-US" sz="1550" dirty="0">
+              <a:rPr lang="en-US" sz="1320" dirty="0">
                 <a:solidFill>
                   <a:srgbClr val="17364A"/>
                 </a:solidFill>
@@ -11625,7 +11795,7 @@
               </a:rPr>
               <a:t>1. Why can overall accuracy be misleading?</a:t>
             </a:r>
-            <a:endParaRPr lang="en-US" sz="1550" dirty="0"/>
+            <a:endParaRPr lang="en-US" sz="1320" dirty="0"/>
           </a:p>
         </p:txBody>
       </p:sp>
@@ -11713,13 +11883,16 @@
           <a:ln/>
         </p:spPr>
         <p:txBody>
-          <a:bodyPr wrap="square" lIns="254" tIns="254" rIns="254" bIns="254" rtlCol="0" anchor="t">
+          <a:bodyPr wrap="square" lIns="508" tIns="508" rIns="508" bIns="508" rtlCol="0" anchor="t">
             <a:normAutofit/>
           </a:bodyPr>
           <a:lstStyle/>
           <a:p>
-            <a:r>
-              <a:rPr lang="en-US" sz="1380" dirty="0">
+            <a:pPr indent="0" marL="0">
+              <a:buNone/>
+            </a:pPr>
+            <a:r>
+              <a:rPr lang="en-US" sz="1220" dirty="0">
                 <a:solidFill>
                   <a:srgbClr val="17364A"/>
                 </a:solidFill>
@@ -11729,11 +11902,14 @@
               </a:rPr>
               <a:t>1.</a:t>
             </a:r>
-            <a:endParaRPr lang="en-US" sz="1380" dirty="0"/>
-          </a:p>
-          <a:p>
-            <a:r>
-              <a:rPr lang="en-US" sz="1380" dirty="0">
+            <a:endParaRPr lang="en-US" sz="1220" dirty="0"/>
+          </a:p>
+          <a:p>
+            <a:pPr indent="0" marL="0">
+              <a:buNone/>
+            </a:pPr>
+            <a:r>
+              <a:rPr lang="en-US" sz="1220" dirty="0">
                 <a:solidFill>
                   <a:srgbClr val="17364A"/>
                 </a:solidFill>
@@ -11743,11 +11919,14 @@
               </a:rPr>
               <a:t>Why can overall accuracy be misleading?</a:t>
             </a:r>
-            <a:endParaRPr lang="en-US" sz="1380" dirty="0"/>
-          </a:p>
-          <a:p>
-            <a:r>
-              <a:rPr lang="en-US" sz="1380" dirty="0">
+            <a:endParaRPr lang="en-US" sz="1220" dirty="0"/>
+          </a:p>
+          <a:p>
+            <a:pPr indent="0" marL="0">
+              <a:buNone/>
+            </a:pPr>
+            <a:r>
+              <a:rPr lang="en-US" sz="1220" dirty="0">
                 <a:solidFill>
                   <a:srgbClr val="17364A"/>
                 </a:solidFill>
@@ -11757,7 +11936,7 @@
               </a:rPr>
               <a:t>2.</a:t>
             </a:r>
-            <a:endParaRPr lang="en-US" sz="1380" dirty="0"/>
+            <a:endParaRPr lang="en-US" sz="1220" dirty="0"/>
           </a:p>
         </p:txBody>
       </p:sp>
@@ -11835,17 +12014,17 @@
         </p:nvSpPr>
         <p:spPr>
           <a:xfrm>
-            <a:off x="7799832" y="5001768"/>
-            <a:ext cx="3145536" cy="502920"/>
-          </a:xfrm>
-          <a:prstGeom prst="rect">
-            <a:avLst/>
-          </a:prstGeom>
-          <a:noFill/>
-          <a:ln/>
-        </p:spPr>
-        <p:txBody>
-          <a:bodyPr wrap="square" lIns="0" tIns="0" rIns="0" bIns="0" rtlCol="0" anchor="t">
+            <a:off x="7799832" y="4974336"/>
+            <a:ext cx="3145536" cy="576072"/>
+          </a:xfrm>
+          <a:prstGeom prst="rect">
+            <a:avLst/>
+          </a:prstGeom>
+          <a:noFill/>
+          <a:ln/>
+        </p:spPr>
+        <p:txBody>
+          <a:bodyPr wrap="square" lIns="254" tIns="254" rIns="254" bIns="254" rtlCol="0" anchor="t">
             <a:normAutofit/>
           </a:bodyPr>
           <a:lstStyle/>
@@ -11854,7 +12033,7 @@
               <a:buNone/>
             </a:pPr>
             <a:r>
-              <a:rPr lang="en-US" sz="1550" dirty="0">
+              <a:rPr lang="en-US" sz="1320" dirty="0">
                 <a:solidFill>
                   <a:srgbClr val="17364A"/>
                 </a:solidFill>
@@ -11862,9 +12041,9 @@
                 <a:ea typeface="Aptos" pitchFamily="34" charset="-122"/>
                 <a:cs typeface="Aptos" pitchFamily="34" charset="-120"/>
               </a:rPr>
-              <a:t>Use the assignment to test whether you can explain the concept, apply it to a realistic public health situation, and identify what would need review before the work moves forward.</a:t>
-            </a:r>
-            <a:endParaRPr lang="en-US" sz="1550" dirty="0"/>
+              <a:t>Use the assignment to test whether you can explain the concept, apply it to a realistic public health situation, and.</a:t>
+            </a:r>
+            <a:endParaRPr lang="en-US" sz="1320" dirty="0"/>
           </a:p>
         </p:txBody>
       </p:sp>
@@ -12165,49 +12344,58 @@
           <a:ln/>
         </p:spPr>
         <p:txBody>
-          <a:bodyPr wrap="square" lIns="635" tIns="635" rIns="635" bIns="635" rtlCol="0" anchor="t">
+          <a:bodyPr wrap="square" lIns="1016" tIns="1016" rIns="1016" bIns="1016" rtlCol="0" anchor="t">
             <a:normAutofit/>
           </a:bodyPr>
           <a:lstStyle/>
           <a:p>
+            <a:pPr indent="0" marL="0">
+              <a:buNone/>
+            </a:pPr>
             <a:r>
               <a:rPr lang="en-US" sz="2100" dirty="0">
                 <a:solidFill>
-                  <a:srgbClr val="17364A"/>
-                </a:solidFill>
-                <a:latin typeface="Aptos" pitchFamily="34" charset="0"/>
-                <a:ea typeface="Aptos" pitchFamily="34" charset="-122"/>
-                <a:cs typeface="Aptos" pitchFamily="34" charset="-120"/>
-              </a:rPr>
-              <a:t>NIST Artificial Intelligence Risk Management Framework:.</a:t>
+                  <a:srgbClr val="003A63"/>
+                </a:solidFill>
+                <a:latin typeface="Aptos" pitchFamily="34" charset="0"/>
+                <a:ea typeface="Aptos" pitchFamily="34" charset="-122"/>
+                <a:cs typeface="Aptos" pitchFamily="34" charset="-120"/>
+              </a:rPr>
+              <a:t>• NIST Artificial Intelligence Risk Management Framework:.</a:t>
             </a:r>
             <a:endParaRPr lang="en-US" sz="2100" dirty="0"/>
           </a:p>
           <a:p>
+            <a:pPr indent="0" marL="0">
+              <a:buNone/>
+            </a:pPr>
             <a:r>
               <a:rPr lang="en-US" sz="2100" dirty="0">
                 <a:solidFill>
-                  <a:srgbClr val="17364A"/>
-                </a:solidFill>
-                <a:latin typeface="Aptos" pitchFamily="34" charset="0"/>
-                <a:ea typeface="Aptos" pitchFamily="34" charset="-122"/>
-                <a:cs typeface="Aptos" pitchFamily="34" charset="-120"/>
-              </a:rPr>
-              <a:t>NIST AI RMF Generative AI Profile:.</a:t>
+                  <a:srgbClr val="003A63"/>
+                </a:solidFill>
+                <a:latin typeface="Aptos" pitchFamily="34" charset="0"/>
+                <a:ea typeface="Aptos" pitchFamily="34" charset="-122"/>
+                <a:cs typeface="Aptos" pitchFamily="34" charset="-120"/>
+              </a:rPr>
+              <a:t>• NIST AI RMF Generative AI Profile:.</a:t>
             </a:r>
             <a:endParaRPr lang="en-US" sz="2100" dirty="0"/>
           </a:p>
           <a:p>
+            <a:pPr indent="0" marL="0">
+              <a:buNone/>
+            </a:pPr>
             <a:r>
               <a:rPr lang="en-US" sz="2100" dirty="0">
                 <a:solidFill>
-                  <a:srgbClr val="17364A"/>
-                </a:solidFill>
-                <a:latin typeface="Aptos" pitchFamily="34" charset="0"/>
-                <a:ea typeface="Aptos" pitchFamily="34" charset="-122"/>
-                <a:cs typeface="Aptos" pitchFamily="34" charset="-120"/>
-              </a:rPr>
-              <a:t>CDC Evaluation Framework: https://www.cdc.gov/evaluation/</a:t>
+                  <a:srgbClr val="003A63"/>
+                </a:solidFill>
+                <a:latin typeface="Aptos" pitchFamily="34" charset="0"/>
+                <a:ea typeface="Aptos" pitchFamily="34" charset="-122"/>
+                <a:cs typeface="Aptos" pitchFamily="34" charset="-120"/>
+              </a:rPr>
+              <a:t>• CDC Evaluation Framework: https://www.cdc.gov/evaluation/</a:t>
             </a:r>
             <a:endParaRPr lang="en-US" sz="2100" dirty="0"/>
           </a:p>
@@ -12287,17 +12475,17 @@
         </p:nvSpPr>
         <p:spPr>
           <a:xfrm>
-            <a:off x="7799832" y="1828800"/>
-            <a:ext cx="3145536" cy="685800"/>
-          </a:xfrm>
-          <a:prstGeom prst="rect">
-            <a:avLst/>
-          </a:prstGeom>
-          <a:noFill/>
-          <a:ln/>
-        </p:spPr>
-        <p:txBody>
-          <a:bodyPr wrap="square" lIns="0" tIns="0" rIns="0" bIns="0" rtlCol="0" anchor="t">
+            <a:off x="7799832" y="1801368"/>
+            <a:ext cx="3145536" cy="758952"/>
+          </a:xfrm>
+          <a:prstGeom prst="rect">
+            <a:avLst/>
+          </a:prstGeom>
+          <a:noFill/>
+          <a:ln/>
+        </p:spPr>
+        <p:txBody>
+          <a:bodyPr wrap="square" lIns="254" tIns="254" rIns="254" bIns="254" rtlCol="0" anchor="t">
             <a:normAutofit/>
           </a:bodyPr>
           <a:lstStyle/>
@@ -12306,7 +12494,7 @@
               <a:buNone/>
             </a:pPr>
             <a:r>
-              <a:rPr lang="en-US" sz="1550" dirty="0">
+              <a:rPr lang="en-US" sz="1320" dirty="0">
                 <a:solidFill>
                   <a:srgbClr val="17364A"/>
                 </a:solidFill>
@@ -12316,7 +12504,7 @@
               </a:rPr>
               <a:t>NIST Artificial Intelligence Risk Management Framework:.</a:t>
             </a:r>
-            <a:endParaRPr lang="en-US" sz="1550" dirty="0"/>
+            <a:endParaRPr lang="en-US" sz="1320" dirty="0"/>
           </a:p>
         </p:txBody>
       </p:sp>
@@ -12404,13 +12592,16 @@
           <a:ln/>
         </p:spPr>
         <p:txBody>
-          <a:bodyPr wrap="square" lIns="254" tIns="254" rIns="254" bIns="254" rtlCol="0" anchor="t">
+          <a:bodyPr wrap="square" lIns="508" tIns="508" rIns="508" bIns="508" rtlCol="0" anchor="t">
             <a:normAutofit/>
           </a:bodyPr>
           <a:lstStyle/>
           <a:p>
-            <a:r>
-              <a:rPr lang="en-US" sz="1380" dirty="0">
+            <a:pPr indent="0" marL="0">
+              <a:buNone/>
+            </a:pPr>
+            <a:r>
+              <a:rPr lang="en-US" sz="1220" dirty="0">
                 <a:solidFill>
                   <a:srgbClr val="17364A"/>
                 </a:solidFill>
@@ -12420,11 +12611,14 @@
               </a:rPr>
               <a:t>NIST Artificial Intelligence Risk Management Framework:.</a:t>
             </a:r>
-            <a:endParaRPr lang="en-US" sz="1380" dirty="0"/>
-          </a:p>
-          <a:p>
-            <a:r>
-              <a:rPr lang="en-US" sz="1380" dirty="0">
+            <a:endParaRPr lang="en-US" sz="1220" dirty="0"/>
+          </a:p>
+          <a:p>
+            <a:pPr indent="0" marL="0">
+              <a:buNone/>
+            </a:pPr>
+            <a:r>
+              <a:rPr lang="en-US" sz="1220" dirty="0">
                 <a:solidFill>
                   <a:srgbClr val="17364A"/>
                 </a:solidFill>
@@ -12434,7 +12628,7 @@
               </a:rPr>
               <a:t>WHO Guidance on Large Multi-Modal Models:.</a:t>
             </a:r>
-            <a:endParaRPr lang="en-US" sz="1380" dirty="0"/>
+            <a:endParaRPr lang="en-US" sz="1220" dirty="0"/>
           </a:p>
         </p:txBody>
       </p:sp>
@@ -12512,17 +12706,17 @@
         </p:nvSpPr>
         <p:spPr>
           <a:xfrm>
-            <a:off x="7799832" y="5001768"/>
-            <a:ext cx="3145536" cy="502920"/>
-          </a:xfrm>
-          <a:prstGeom prst="rect">
-            <a:avLst/>
-          </a:prstGeom>
-          <a:noFill/>
-          <a:ln/>
-        </p:spPr>
-        <p:txBody>
-          <a:bodyPr wrap="square" lIns="0" tIns="0" rIns="0" bIns="0" rtlCol="0" anchor="t">
+            <a:off x="7799832" y="4974336"/>
+            <a:ext cx="3145536" cy="576072"/>
+          </a:xfrm>
+          <a:prstGeom prst="rect">
+            <a:avLst/>
+          </a:prstGeom>
+          <a:noFill/>
+          <a:ln/>
+        </p:spPr>
+        <p:txBody>
+          <a:bodyPr wrap="square" lIns="254" tIns="254" rIns="254" bIns="254" rtlCol="0" anchor="t">
             <a:normAutofit/>
           </a:bodyPr>
           <a:lstStyle/>
@@ -12531,7 +12725,7 @@
               <a:buNone/>
             </a:pPr>
             <a:r>
-              <a:rPr lang="en-US" sz="1550" dirty="0">
+              <a:rPr lang="en-US" sz="1320" dirty="0">
                 <a:solidFill>
                   <a:srgbClr val="17364A"/>
                 </a:solidFill>
@@ -12539,9 +12733,9 @@
                 <a:ea typeface="Aptos" pitchFamily="34" charset="-122"/>
                 <a:cs typeface="Aptos" pitchFamily="34" charset="-120"/>
               </a:rPr>
-              <a:t>Identify what could go wrong, who could be affected, what safeguards are needed, and what evidence should be reviewed before use expands.</a:t>
-            </a:r>
-            <a:endParaRPr lang="en-US" sz="1550" dirty="0"/>
+              <a:t>Identify what could go wrong, who could be affected, what safeguards are needed, and what evidence should be reviewed.</a:t>
+            </a:r>
+            <a:endParaRPr lang="en-US" sz="1320" dirty="0"/>
           </a:p>
         </p:txBody>
       </p:sp>
@@ -12842,63 +13036,75 @@
           <a:ln/>
         </p:spPr>
         <p:txBody>
-          <a:bodyPr wrap="square" lIns="635" tIns="635" rIns="635" bIns="635" rtlCol="0" anchor="t">
+          <a:bodyPr wrap="square" lIns="1016" tIns="1016" rIns="1016" bIns="1016" rtlCol="0" anchor="t">
             <a:normAutofit/>
           </a:bodyPr>
           <a:lstStyle/>
           <a:p>
+            <a:pPr indent="0" marL="0">
+              <a:buNone/>
+            </a:pPr>
             <a:r>
               <a:rPr lang="en-US" sz="1900" dirty="0">
                 <a:solidFill>
-                  <a:srgbClr val="17364A"/>
-                </a:solidFill>
-                <a:latin typeface="Aptos" pitchFamily="34" charset="0"/>
-                <a:ea typeface="Aptos" pitchFamily="34" charset="-122"/>
-                <a:cs typeface="Aptos" pitchFamily="34" charset="-120"/>
-              </a:rPr>
-              <a:t>Play 13: Monitor and Evaluate AI Systems - This lesson informs Play 13 by helping learners connect the.</a:t>
+                  <a:srgbClr val="003A63"/>
+                </a:solidFill>
+                <a:latin typeface="Aptos" pitchFamily="34" charset="0"/>
+                <a:ea typeface="Aptos" pitchFamily="34" charset="-122"/>
+                <a:cs typeface="Aptos" pitchFamily="34" charset="-120"/>
+              </a:rPr>
+              <a:t>• Play 13: Monitor and Evaluate AI Systems - This lesson informs Play 13 by helping learners.</a:t>
             </a:r>
             <a:endParaRPr lang="en-US" sz="1900" dirty="0"/>
           </a:p>
           <a:p>
+            <a:pPr indent="0" marL="0">
+              <a:buNone/>
+            </a:pPr>
             <a:r>
               <a:rPr lang="en-US" sz="1900" dirty="0">
                 <a:solidFill>
-                  <a:srgbClr val="17364A"/>
-                </a:solidFill>
-                <a:latin typeface="Aptos" pitchFamily="34" charset="0"/>
-                <a:ea typeface="Aptos" pitchFamily="34" charset="-122"/>
-                <a:cs typeface="Aptos" pitchFamily="34" charset="-120"/>
-              </a:rPr>
-              <a:t>Play 12: Execute Governance and Oversight - This lesson informs Play 12 by helping learners connect the.</a:t>
+                  <a:srgbClr val="003A63"/>
+                </a:solidFill>
+                <a:latin typeface="Aptos" pitchFamily="34" charset="0"/>
+                <a:ea typeface="Aptos" pitchFamily="34" charset="-122"/>
+                <a:cs typeface="Aptos" pitchFamily="34" charset="-120"/>
+              </a:rPr>
+              <a:t>• Play 12: Execute Governance and Oversight - This lesson informs Play 12 by helping learners.</a:t>
             </a:r>
             <a:endParaRPr lang="en-US" sz="1900" dirty="0"/>
           </a:p>
           <a:p>
+            <a:pPr indent="0" marL="0">
+              <a:buNone/>
+            </a:pPr>
             <a:r>
               <a:rPr lang="en-US" sz="1900" dirty="0">
                 <a:solidFill>
-                  <a:srgbClr val="17364A"/>
-                </a:solidFill>
-                <a:latin typeface="Aptos" pitchFamily="34" charset="0"/>
-                <a:ea typeface="Aptos" pitchFamily="34" charset="-122"/>
-                <a:cs typeface="Aptos" pitchFamily="34" charset="-120"/>
-              </a:rPr>
-              <a:t>Play 11: Build and Deploy AI Solutions - This lesson informs Play 11 by helping learners connect the lesson.</a:t>
+                  <a:srgbClr val="003A63"/>
+                </a:solidFill>
+                <a:latin typeface="Aptos" pitchFamily="34" charset="0"/>
+                <a:ea typeface="Aptos" pitchFamily="34" charset="-122"/>
+                <a:cs typeface="Aptos" pitchFamily="34" charset="-120"/>
+              </a:rPr>
+              <a:t>• Play 11: Build and Deploy AI Solutions - This lesson informs Play 11 by helping learners.</a:t>
             </a:r>
             <a:endParaRPr lang="en-US" sz="1900" dirty="0"/>
           </a:p>
           <a:p>
+            <a:pPr indent="0" marL="0">
+              <a:buNone/>
+            </a:pPr>
             <a:r>
               <a:rPr lang="en-US" sz="1900" dirty="0">
                 <a:solidFill>
-                  <a:srgbClr val="17364A"/>
-                </a:solidFill>
-                <a:latin typeface="Aptos" pitchFamily="34" charset="0"/>
-                <a:ea typeface="Aptos" pitchFamily="34" charset="-122"/>
-                <a:cs typeface="Aptos" pitchFamily="34" charset="-120"/>
-              </a:rPr>
-              <a:t>Play 3: Establish AI Governance - This lesson informs Play 3 by helping learners connect the lesson topic to.</a:t>
+                  <a:srgbClr val="003A63"/>
+                </a:solidFill>
+                <a:latin typeface="Aptos" pitchFamily="34" charset="0"/>
+                <a:ea typeface="Aptos" pitchFamily="34" charset="-122"/>
+                <a:cs typeface="Aptos" pitchFamily="34" charset="-120"/>
+              </a:rPr>
+              <a:t>• Play 3: Establish AI Governance - This lesson informs Play 3 by helping learners connect the.</a:t>
             </a:r>
             <a:endParaRPr lang="en-US" sz="1900" dirty="0"/>
           </a:p>
@@ -12978,17 +13184,17 @@
         </p:nvSpPr>
         <p:spPr>
           <a:xfrm>
-            <a:off x="8211312" y="1920240"/>
-            <a:ext cx="2734056" cy="1463040"/>
-          </a:xfrm>
-          <a:prstGeom prst="rect">
-            <a:avLst/>
-          </a:prstGeom>
-          <a:noFill/>
-          <a:ln/>
-        </p:spPr>
-        <p:txBody>
-          <a:bodyPr wrap="square" lIns="0" tIns="0" rIns="0" bIns="0" rtlCol="0" anchor="t">
+            <a:off x="8211312" y="1892808"/>
+            <a:ext cx="2734056" cy="1536192"/>
+          </a:xfrm>
+          <a:prstGeom prst="rect">
+            <a:avLst/>
+          </a:prstGeom>
+          <a:noFill/>
+          <a:ln/>
+        </p:spPr>
+        <p:txBody>
+          <a:bodyPr wrap="square" lIns="254" tIns="254" rIns="254" bIns="254" rtlCol="0" anchor="t">
             <a:normAutofit/>
           </a:bodyPr>
           <a:lstStyle/>
@@ -12997,7 +13203,7 @@
               <a:buNone/>
             </a:pPr>
             <a:r>
-              <a:rPr lang="en-US" sz="1550" dirty="0">
+              <a:rPr lang="en-US" sz="1320" dirty="0">
                 <a:solidFill>
                   <a:srgbClr val="17364A"/>
                 </a:solidFill>
@@ -13005,9 +13211,9 @@
                 <a:ea typeface="Aptos" pitchFamily="34" charset="-122"/>
                 <a:cs typeface="Aptos" pitchFamily="34" charset="-120"/>
               </a:rPr>
-              <a:t>Use the related plays to identify decisions, participants, timing, approvals, and documentation needed for responsible implementation.</a:t>
-            </a:r>
-            <a:endParaRPr lang="en-US" sz="1550" dirty="0"/>
+              <a:t>Use the related plays to identify decisions, participants, timing, approvals, and documentation needed for responsible.</a:t>
+            </a:r>
+            <a:endParaRPr lang="en-US" sz="1320" dirty="0"/>
           </a:p>
         </p:txBody>
       </p:sp>
@@ -13095,13 +13301,16 @@
           <a:ln/>
         </p:spPr>
         <p:txBody>
-          <a:bodyPr wrap="square" lIns="254" tIns="254" rIns="254" bIns="254" rtlCol="0" anchor="t">
+          <a:bodyPr wrap="square" lIns="508" tIns="508" rIns="508" bIns="508" rtlCol="0" anchor="t">
             <a:normAutofit/>
           </a:bodyPr>
           <a:lstStyle/>
           <a:p>
-            <a:r>
-              <a:rPr lang="en-US" sz="1380" dirty="0">
+            <a:pPr indent="0" marL="0">
+              <a:buNone/>
+            </a:pPr>
+            <a:r>
+              <a:rPr lang="en-US" sz="1220" dirty="0">
                 <a:solidFill>
                   <a:srgbClr val="17364A"/>
                 </a:solidFill>
@@ -13111,11 +13320,14 @@
               </a:rPr>
               <a:t>Locate the decision point in the playbook sequence.</a:t>
             </a:r>
-            <a:endParaRPr lang="en-US" sz="1380" dirty="0"/>
-          </a:p>
-          <a:p>
-            <a:r>
-              <a:rPr lang="en-US" sz="1380" dirty="0">
+            <a:endParaRPr lang="en-US" sz="1220" dirty="0"/>
+          </a:p>
+          <a:p>
+            <a:pPr indent="0" marL="0">
+              <a:buNone/>
+            </a:pPr>
+            <a:r>
+              <a:rPr lang="en-US" sz="1220" dirty="0">
                 <a:solidFill>
                   <a:srgbClr val="17364A"/>
                 </a:solidFill>
@@ -13125,11 +13337,14 @@
               </a:rPr>
               <a:t>Identify who should participate in the work.</a:t>
             </a:r>
-            <a:endParaRPr lang="en-US" sz="1380" dirty="0"/>
-          </a:p>
-          <a:p>
-            <a:r>
-              <a:rPr lang="en-US" sz="1380" dirty="0">
+            <a:endParaRPr lang="en-US" sz="1220" dirty="0"/>
+          </a:p>
+          <a:p>
+            <a:pPr indent="0" marL="0">
+              <a:buNone/>
+            </a:pPr>
+            <a:r>
+              <a:rPr lang="en-US" sz="1220" dirty="0">
                 <a:solidFill>
                   <a:srgbClr val="17364A"/>
                 </a:solidFill>
@@ -13139,7 +13354,7 @@
               </a:rPr>
               <a:t>Document the review, approval, or implementation step.</a:t>
             </a:r>
-            <a:endParaRPr lang="en-US" sz="1380" dirty="0"/>
+            <a:endParaRPr lang="en-US" sz="1220" dirty="0"/>
           </a:p>
         </p:txBody>
       </p:sp>
@@ -13440,63 +13655,75 @@
           <a:ln/>
         </p:spPr>
         <p:txBody>
-          <a:bodyPr wrap="square" lIns="635" tIns="635" rIns="635" bIns="635" rtlCol="0" anchor="t">
+          <a:bodyPr wrap="square" lIns="1016" tIns="1016" rIns="1016" bIns="1016" rtlCol="0" anchor="t">
             <a:normAutofit/>
           </a:bodyPr>
           <a:lstStyle/>
           <a:p>
+            <a:pPr indent="0" marL="0">
+              <a:buNone/>
+            </a:pPr>
             <a:r>
               <a:rPr lang="en-US" sz="1850" dirty="0">
                 <a:solidFill>
-                  <a:srgbClr val="17364A"/>
-                </a:solidFill>
-                <a:latin typeface="Aptos" pitchFamily="34" charset="0"/>
-                <a:ea typeface="Aptos" pitchFamily="34" charset="-122"/>
-                <a:cs typeface="Aptos" pitchFamily="34" charset="-120"/>
-              </a:rPr>
-              <a:t>Tool 44: Performance Monitoring Dashboard (Dashboard) - Use this tool to complete or strengthen the.</a:t>
+                  <a:srgbClr val="003A63"/>
+                </a:solidFill>
+                <a:latin typeface="Aptos" pitchFamily="34" charset="0"/>
+                <a:ea typeface="Aptos" pitchFamily="34" charset="-122"/>
+                <a:cs typeface="Aptos" pitchFamily="34" charset="-120"/>
+              </a:rPr>
+              <a:t>• Tool 44: Performance Monitoring Dashboard (Dashboard) - Use this tool to complete or.</a:t>
             </a:r>
             <a:endParaRPr lang="en-US" sz="1850" dirty="0"/>
           </a:p>
           <a:p>
+            <a:pPr indent="0" marL="0">
+              <a:buNone/>
+            </a:pPr>
             <a:r>
               <a:rPr lang="en-US" sz="1850" dirty="0">
                 <a:solidFill>
-                  <a:srgbClr val="17364A"/>
-                </a:solidFill>
-                <a:latin typeface="Aptos" pitchFamily="34" charset="0"/>
-                <a:ea typeface="Aptos" pitchFamily="34" charset="-122"/>
-                <a:cs typeface="Aptos" pitchFamily="34" charset="-120"/>
-              </a:rPr>
-              <a:t>Tool 45: Continuous Improvement Log (Log) - Use Continuous Improvement Log to translate this lesson into a.</a:t>
+                  <a:srgbClr val="003A63"/>
+                </a:solidFill>
+                <a:latin typeface="Aptos" pitchFamily="34" charset="0"/>
+                <a:ea typeface="Aptos" pitchFamily="34" charset="-122"/>
+                <a:cs typeface="Aptos" pitchFamily="34" charset="-120"/>
+              </a:rPr>
+              <a:t>• Tool 45: Continuous Improvement Log (Log) - Use Continuous Improvement Log to translate this.</a:t>
             </a:r>
             <a:endParaRPr lang="en-US" sz="1850" dirty="0"/>
           </a:p>
           <a:p>
+            <a:pPr indent="0" marL="0">
+              <a:buNone/>
+            </a:pPr>
             <a:r>
               <a:rPr lang="en-US" sz="1850" dirty="0">
                 <a:solidFill>
-                  <a:srgbClr val="17364A"/>
-                </a:solidFill>
-                <a:latin typeface="Aptos" pitchFamily="34" charset="0"/>
-                <a:ea typeface="Aptos" pitchFamily="34" charset="-122"/>
-                <a:cs typeface="Aptos" pitchFamily="34" charset="-120"/>
-              </a:rPr>
-              <a:t>Tool 48: AI Evaluation &amp; Outcomes Reporting (Template) - Use this tool to complete or strengthen the.</a:t>
+                  <a:srgbClr val="003A63"/>
+                </a:solidFill>
+                <a:latin typeface="Aptos" pitchFamily="34" charset="0"/>
+                <a:ea typeface="Aptos" pitchFamily="34" charset="-122"/>
+                <a:cs typeface="Aptos" pitchFamily="34" charset="-120"/>
+              </a:rPr>
+              <a:t>• Tool 48: AI Evaluation &amp; Outcomes Reporting (Template) - Use this tool to complete or.</a:t>
             </a:r>
             <a:endParaRPr lang="en-US" sz="1850" dirty="0"/>
           </a:p>
           <a:p>
+            <a:pPr indent="0" marL="0">
+              <a:buNone/>
+            </a:pPr>
             <a:r>
               <a:rPr lang="en-US" sz="1850" dirty="0">
                 <a:solidFill>
-                  <a:srgbClr val="17364A"/>
-                </a:solidFill>
-                <a:latin typeface="Aptos" pitchFamily="34" charset="0"/>
-                <a:ea typeface="Aptos" pitchFamily="34" charset="-122"/>
-                <a:cs typeface="Aptos" pitchFamily="34" charset="-120"/>
-              </a:rPr>
-              <a:t>Tool 13: AI Use Case Intake, Risk Review, and System Inventory Template (Template) - Use AI Use Case Intake,.</a:t>
+                  <a:srgbClr val="003A63"/>
+                </a:solidFill>
+                <a:latin typeface="Aptos" pitchFamily="34" charset="0"/>
+                <a:ea typeface="Aptos" pitchFamily="34" charset="-122"/>
+                <a:cs typeface="Aptos" pitchFamily="34" charset="-120"/>
+              </a:rPr>
+              <a:t>• Tool 13: AI Use Case Intake, Risk Review, and System Inventory Template (Template) - Use AI.</a:t>
             </a:r>
             <a:endParaRPr lang="en-US" sz="1850" dirty="0"/>
           </a:p>
@@ -13576,17 +13803,17 @@
         </p:nvSpPr>
         <p:spPr>
           <a:xfrm>
-            <a:off x="8211312" y="1920240"/>
-            <a:ext cx="2734056" cy="1463040"/>
-          </a:xfrm>
-          <a:prstGeom prst="rect">
-            <a:avLst/>
-          </a:prstGeom>
-          <a:noFill/>
-          <a:ln/>
-        </p:spPr>
-        <p:txBody>
-          <a:bodyPr wrap="square" lIns="0" tIns="0" rIns="0" bIns="0" rtlCol="0" anchor="t">
+            <a:off x="8211312" y="1892808"/>
+            <a:ext cx="2734056" cy="1536192"/>
+          </a:xfrm>
+          <a:prstGeom prst="rect">
+            <a:avLst/>
+          </a:prstGeom>
+          <a:noFill/>
+          <a:ln/>
+        </p:spPr>
+        <p:txBody>
+          <a:bodyPr wrap="square" lIns="254" tIns="254" rIns="254" bIns="254" rtlCol="0" anchor="t">
             <a:normAutofit/>
           </a:bodyPr>
           <a:lstStyle/>
@@ -13595,7 +13822,7 @@
               <a:buNone/>
             </a:pPr>
             <a:r>
-              <a:rPr lang="en-US" sz="1550" dirty="0">
+              <a:rPr lang="en-US" sz="1320" dirty="0">
                 <a:solidFill>
                   <a:srgbClr val="17364A"/>
                 </a:solidFill>
@@ -13603,9 +13830,9 @@
                 <a:ea typeface="Aptos" pitchFamily="34" charset="-122"/>
                 <a:cs typeface="Aptos" pitchFamily="34" charset="-120"/>
               </a:rPr>
-              <a:t>Use linked tools when your department needs a structured worksheet, template, checklist, review process, or documentation artifact.</a:t>
-            </a:r>
-            <a:endParaRPr lang="en-US" sz="1550" dirty="0"/>
+              <a:t>Use linked tools when your department needs a structured worksheet, template, checklist, review process, or.</a:t>
+            </a:r>
+            <a:endParaRPr lang="en-US" sz="1320" dirty="0"/>
           </a:p>
         </p:txBody>
       </p:sp>
@@ -13693,13 +13920,16 @@
           <a:ln/>
         </p:spPr>
         <p:txBody>
-          <a:bodyPr wrap="square" lIns="254" tIns="254" rIns="254" bIns="254" rtlCol="0" anchor="t">
+          <a:bodyPr wrap="square" lIns="508" tIns="508" rIns="508" bIns="508" rtlCol="0" anchor="t">
             <a:normAutofit/>
           </a:bodyPr>
           <a:lstStyle/>
           <a:p>
-            <a:r>
-              <a:rPr lang="en-US" sz="1380" dirty="0">
+            <a:pPr indent="0" marL="0">
+              <a:buNone/>
+            </a:pPr>
+            <a:r>
+              <a:rPr lang="en-US" sz="1220" dirty="0">
                 <a:solidFill>
                   <a:srgbClr val="17364A"/>
                 </a:solidFill>
@@ -13709,11 +13939,14 @@
               </a:rPr>
               <a:t>Use a tool when no comparable local process exists.</a:t>
             </a:r>
-            <a:endParaRPr lang="en-US" sz="1380" dirty="0"/>
-          </a:p>
-          <a:p>
-            <a:r>
-              <a:rPr lang="en-US" sz="1380" dirty="0">
+            <a:endParaRPr lang="en-US" sz="1220" dirty="0"/>
+          </a:p>
+          <a:p>
+            <a:pPr indent="0" marL="0">
+              <a:buNone/>
+            </a:pPr>
+            <a:r>
+              <a:rPr lang="en-US" sz="1220" dirty="0">
                 <a:solidFill>
                   <a:srgbClr val="17364A"/>
                 </a:solidFill>
@@ -13721,13 +13954,16 @@
                 <a:ea typeface="Aptos" pitchFamily="34" charset="-122"/>
                 <a:cs typeface="Aptos" pitchFamily="34" charset="-120"/>
               </a:rPr>
-              <a:t>Adapt existing department templates when they already fit the purpose.</a:t>
-            </a:r>
-            <a:endParaRPr lang="en-US" sz="1380" dirty="0"/>
-          </a:p>
-          <a:p>
-            <a:r>
-              <a:rPr lang="en-US" sz="1380" dirty="0">
+              <a:t>Adapt existing department templates when they already fit the.</a:t>
+            </a:r>
+            <a:endParaRPr lang="en-US" sz="1220" dirty="0"/>
+          </a:p>
+          <a:p>
+            <a:pPr indent="0" marL="0">
+              <a:buNone/>
+            </a:pPr>
+            <a:r>
+              <a:rPr lang="en-US" sz="1220" dirty="0">
                 <a:solidFill>
                   <a:srgbClr val="17364A"/>
                 </a:solidFill>
@@ -13737,7 +13973,7 @@
               </a:rPr>
               <a:t>Save the completed artifact as evidence of the decision.</a:t>
             </a:r>
-            <a:endParaRPr lang="en-US" sz="1380" dirty="0"/>
+            <a:endParaRPr lang="en-US" sz="1220" dirty="0"/>
           </a:p>
         </p:txBody>
       </p:sp>
@@ -14038,49 +14274,58 @@
           <a:ln/>
         </p:spPr>
         <p:txBody>
-          <a:bodyPr wrap="square" lIns="635" tIns="635" rIns="635" bIns="635" rtlCol="0" anchor="t">
+          <a:bodyPr wrap="square" lIns="1016" tIns="1016" rIns="1016" bIns="1016" rtlCol="0" anchor="t">
             <a:normAutofit/>
           </a:bodyPr>
           <a:lstStyle/>
           <a:p>
+            <a:pPr indent="0" marL="0">
+              <a:buNone/>
+            </a:pPr>
             <a:r>
               <a:rPr lang="en-US" sz="2100" dirty="0">
                 <a:solidFill>
-                  <a:srgbClr val="17364A"/>
-                </a:solidFill>
-                <a:latin typeface="Aptos" pitchFamily="34" charset="0"/>
-                <a:ea typeface="Aptos" pitchFamily="34" charset="-122"/>
-                <a:cs typeface="Aptos" pitchFamily="34" charset="-120"/>
-              </a:rPr>
-              <a:t>Describe the purpose of advanced model validation in public health AI.</a:t>
+                  <a:srgbClr val="003A63"/>
+                </a:solidFill>
+                <a:latin typeface="Aptos" pitchFamily="34" charset="0"/>
+                <a:ea typeface="Aptos" pitchFamily="34" charset="-122"/>
+                <a:cs typeface="Aptos" pitchFamily="34" charset="-120"/>
+              </a:rPr>
+              <a:t>• Describe the purpose of advanced model validation in public health AI.</a:t>
             </a:r>
             <a:endParaRPr lang="en-US" sz="2100" dirty="0"/>
           </a:p>
           <a:p>
+            <a:pPr indent="0" marL="0">
+              <a:buNone/>
+            </a:pPr>
             <a:r>
               <a:rPr lang="en-US" sz="2100" dirty="0">
                 <a:solidFill>
-                  <a:srgbClr val="17364A"/>
-                </a:solidFill>
-                <a:latin typeface="Aptos" pitchFamily="34" charset="0"/>
-                <a:ea typeface="Aptos" pitchFamily="34" charset="-122"/>
-                <a:cs typeface="Aptos" pitchFamily="34" charset="-120"/>
-              </a:rPr>
-              <a:t>Interpret sensitivity, specificity, positive predictive value, negative predictive value, precision,.</a:t>
+                  <a:srgbClr val="003A63"/>
+                </a:solidFill>
+                <a:latin typeface="Aptos" pitchFamily="34" charset="0"/>
+                <a:ea typeface="Aptos" pitchFamily="34" charset="-122"/>
+                <a:cs typeface="Aptos" pitchFamily="34" charset="-120"/>
+              </a:rPr>
+              <a:t>• Interpret sensitivity, specificity, positive predictive value, negative predictive value,.</a:t>
             </a:r>
             <a:endParaRPr lang="en-US" sz="2100" dirty="0"/>
           </a:p>
           <a:p>
+            <a:pPr indent="0" marL="0">
+              <a:buNone/>
+            </a:pPr>
             <a:r>
               <a:rPr lang="en-US" sz="2100" dirty="0">
                 <a:solidFill>
-                  <a:srgbClr val="17364A"/>
-                </a:solidFill>
-                <a:latin typeface="Aptos" pitchFamily="34" charset="0"/>
-                <a:ea typeface="Aptos" pitchFamily="34" charset="-122"/>
-                <a:cs typeface="Aptos" pitchFamily="34" charset="-120"/>
-              </a:rPr>
-              <a:t>Distinguish internal validation, external validation, and workflow validation.</a:t>
+                  <a:srgbClr val="003A63"/>
+                </a:solidFill>
+                <a:latin typeface="Aptos" pitchFamily="34" charset="0"/>
+                <a:ea typeface="Aptos" pitchFamily="34" charset="-122"/>
+                <a:cs typeface="Aptos" pitchFamily="34" charset="-120"/>
+              </a:rPr>
+              <a:t>• Distinguish internal validation, external validation, and workflow validation.</a:t>
             </a:r>
             <a:endParaRPr lang="en-US" sz="2100" dirty="0"/>
           </a:p>
@@ -14160,17 +14405,17 @@
         </p:nvSpPr>
         <p:spPr>
           <a:xfrm>
-            <a:off x="7799832" y="1828800"/>
-            <a:ext cx="3145536" cy="685800"/>
-          </a:xfrm>
-          <a:prstGeom prst="rect">
-            <a:avLst/>
-          </a:prstGeom>
-          <a:noFill/>
-          <a:ln/>
-        </p:spPr>
-        <p:txBody>
-          <a:bodyPr wrap="square" lIns="0" tIns="0" rIns="0" bIns="0" rtlCol="0" anchor="t">
+            <a:off x="7799832" y="1801368"/>
+            <a:ext cx="3145536" cy="758952"/>
+          </a:xfrm>
+          <a:prstGeom prst="rect">
+            <a:avLst/>
+          </a:prstGeom>
+          <a:noFill/>
+          <a:ln/>
+        </p:spPr>
+        <p:txBody>
+          <a:bodyPr wrap="square" lIns="254" tIns="254" rIns="254" bIns="254" rtlCol="0" anchor="t">
             <a:normAutofit/>
           </a:bodyPr>
           <a:lstStyle/>
@@ -14179,7 +14424,7 @@
               <a:buNone/>
             </a:pPr>
             <a:r>
-              <a:rPr lang="en-US" sz="1550" dirty="0">
+              <a:rPr lang="en-US" sz="1320" dirty="0">
                 <a:solidFill>
                   <a:srgbClr val="17364A"/>
                 </a:solidFill>
@@ -14189,7 +14434,7 @@
               </a:rPr>
               <a:t>Describe the purpose of advanced model validation in public health AI.</a:t>
             </a:r>
-            <a:endParaRPr lang="en-US" sz="1550" dirty="0"/>
+            <a:endParaRPr lang="en-US" sz="1320" dirty="0"/>
           </a:p>
         </p:txBody>
       </p:sp>
@@ -14277,13 +14522,16 @@
           <a:ln/>
         </p:spPr>
         <p:txBody>
-          <a:bodyPr wrap="square" lIns="254" tIns="254" rIns="254" bIns="254" rtlCol="0" anchor="t">
+          <a:bodyPr wrap="square" lIns="508" tIns="508" rIns="508" bIns="508" rtlCol="0" anchor="t">
             <a:normAutofit/>
           </a:bodyPr>
           <a:lstStyle/>
           <a:p>
-            <a:r>
-              <a:rPr lang="en-US" sz="1380" dirty="0">
+            <a:pPr indent="0" marL="0">
+              <a:buNone/>
+            </a:pPr>
+            <a:r>
+              <a:rPr lang="en-US" sz="1220" dirty="0">
                 <a:solidFill>
                   <a:srgbClr val="17364A"/>
                 </a:solidFill>
@@ -14291,13 +14539,16 @@
                 <a:ea typeface="Aptos" pitchFamily="34" charset="-122"/>
                 <a:cs typeface="Aptos" pitchFamily="34" charset="-120"/>
               </a:rPr>
-              <a:t>Interpret sensitivity, specificity, positive predictive value, negative predictive value,.</a:t>
-            </a:r>
-            <a:endParaRPr lang="en-US" sz="1380" dirty="0"/>
-          </a:p>
-          <a:p>
-            <a:r>
-              <a:rPr lang="en-US" sz="1380" dirty="0">
+              <a:t>Interpret sensitivity, specificity, positive predictive value,.</a:t>
+            </a:r>
+            <a:endParaRPr lang="en-US" sz="1220" dirty="0"/>
+          </a:p>
+          <a:p>
+            <a:pPr indent="0" marL="0">
+              <a:buNone/>
+            </a:pPr>
+            <a:r>
+              <a:rPr lang="en-US" sz="1220" dirty="0">
                 <a:solidFill>
                   <a:srgbClr val="17364A"/>
                 </a:solidFill>
@@ -14305,13 +14556,16 @@
                 <a:ea typeface="Aptos" pitchFamily="34" charset="-122"/>
                 <a:cs typeface="Aptos" pitchFamily="34" charset="-120"/>
               </a:rPr>
-              <a:t>Identify when model performance is insufficient for the intended use.</a:t>
-            </a:r>
-            <a:endParaRPr lang="en-US" sz="1380" dirty="0"/>
-          </a:p>
-          <a:p>
-            <a:r>
-              <a:rPr lang="en-US" sz="1380" dirty="0">
+              <a:t>Identify when model performance is insufficient for the intended.</a:t>
+            </a:r>
+            <a:endParaRPr lang="en-US" sz="1220" dirty="0"/>
+          </a:p>
+          <a:p>
+            <a:pPr indent="0" marL="0">
+              <a:buNone/>
+            </a:pPr>
+            <a:r>
+              <a:rPr lang="en-US" sz="1220" dirty="0">
                 <a:solidFill>
                   <a:srgbClr val="17364A"/>
                 </a:solidFill>
@@ -14319,9 +14573,9 @@
                 <a:ea typeface="Aptos" pitchFamily="34" charset="-122"/>
                 <a:cs typeface="Aptos" pitchFamily="34" charset="-120"/>
               </a:rPr>
-              <a:t>Design monitoring for drift, degradation, error patterns, and unintended consequences.</a:t>
-            </a:r>
-            <a:endParaRPr lang="en-US" sz="1380" dirty="0"/>
+              <a:t>Design monitoring for drift, degradation, error patterns, and.</a:t>
+            </a:r>
+            <a:endParaRPr lang="en-US" sz="1220" dirty="0"/>
           </a:p>
         </p:txBody>
       </p:sp>
@@ -14399,17 +14653,17 @@
         </p:nvSpPr>
         <p:spPr>
           <a:xfrm>
-            <a:off x="7799832" y="5001768"/>
-            <a:ext cx="3145536" cy="502920"/>
-          </a:xfrm>
-          <a:prstGeom prst="rect">
-            <a:avLst/>
-          </a:prstGeom>
-          <a:noFill/>
-          <a:ln/>
-        </p:spPr>
-        <p:txBody>
-          <a:bodyPr wrap="square" lIns="0" tIns="0" rIns="0" bIns="0" rtlCol="0" anchor="t">
+            <a:off x="7799832" y="4974336"/>
+            <a:ext cx="3145536" cy="576072"/>
+          </a:xfrm>
+          <a:prstGeom prst="rect">
+            <a:avLst/>
+          </a:prstGeom>
+          <a:noFill/>
+          <a:ln/>
+        </p:spPr>
+        <p:txBody>
+          <a:bodyPr wrap="square" lIns="254" tIns="254" rIns="254" bIns="254" rtlCol="0" anchor="t">
             <a:normAutofit/>
           </a:bodyPr>
           <a:lstStyle/>
@@ -14418,7 +14672,7 @@
               <a:buNone/>
             </a:pPr>
             <a:r>
-              <a:rPr lang="en-US" sz="1550" dirty="0">
+              <a:rPr lang="en-US" sz="1320" dirty="0">
                 <a:solidFill>
                   <a:srgbClr val="17364A"/>
                 </a:solidFill>
@@ -14426,9 +14680,9 @@
                 <a:ea typeface="Aptos" pitchFamily="34" charset="-122"/>
                 <a:cs typeface="Aptos" pitchFamily="34" charset="-120"/>
               </a:rPr>
-              <a:t>Use the assignment to test whether you can explain the concept, apply it to a realistic public health situation, and identify what would need review before the work moves forward.</a:t>
-            </a:r>
-            <a:endParaRPr lang="en-US" sz="1550" dirty="0"/>
+              <a:t>Use the assignment to test whether you can explain the concept, apply it to a realistic public health situation, and.</a:t>
+            </a:r>
+            <a:endParaRPr lang="en-US" sz="1320" dirty="0"/>
           </a:p>
         </p:txBody>
       </p:sp>
@@ -14729,21 +14983,24 @@
           <a:ln/>
         </p:spPr>
         <p:txBody>
-          <a:bodyPr wrap="square" lIns="635" tIns="635" rIns="635" bIns="635" rtlCol="0" anchor="t">
+          <a:bodyPr wrap="square" lIns="1016" tIns="1016" rIns="1016" bIns="1016" rtlCol="0" anchor="t">
             <a:normAutofit/>
           </a:bodyPr>
           <a:lstStyle/>
           <a:p>
+            <a:pPr indent="0" marL="0">
+              <a:buNone/>
+            </a:pPr>
             <a:r>
               <a:rPr lang="en-US" sz="2100" dirty="0">
                 <a:solidFill>
-                  <a:srgbClr val="17364A"/>
-                </a:solidFill>
-                <a:latin typeface="Aptos" pitchFamily="34" charset="0"/>
-                <a:ea typeface="Aptos" pitchFamily="34" charset="-122"/>
-                <a:cs typeface="Aptos" pitchFamily="34" charset="-120"/>
-              </a:rPr>
-              <a:t>Produce an advanced validation plan for an AI-supported workflow.</a:t>
+                  <a:srgbClr val="003A63"/>
+                </a:solidFill>
+                <a:latin typeface="Aptos" pitchFamily="34" charset="0"/>
+                <a:ea typeface="Aptos" pitchFamily="34" charset="-122"/>
+                <a:cs typeface="Aptos" pitchFamily="34" charset="-120"/>
+              </a:rPr>
+              <a:t>• Produce an advanced validation plan for an AI-supported workflow.</a:t>
             </a:r>
             <a:endParaRPr lang="en-US" sz="2100" dirty="0"/>
           </a:p>
@@ -14823,17 +15080,17 @@
         </p:nvSpPr>
         <p:spPr>
           <a:xfrm>
-            <a:off x="7799832" y="1828800"/>
-            <a:ext cx="3145536" cy="685800"/>
-          </a:xfrm>
-          <a:prstGeom prst="rect">
-            <a:avLst/>
-          </a:prstGeom>
-          <a:noFill/>
-          <a:ln/>
-        </p:spPr>
-        <p:txBody>
-          <a:bodyPr wrap="square" lIns="0" tIns="0" rIns="0" bIns="0" rtlCol="0" anchor="t">
+            <a:off x="7799832" y="1801368"/>
+            <a:ext cx="3145536" cy="758952"/>
+          </a:xfrm>
+          <a:prstGeom prst="rect">
+            <a:avLst/>
+          </a:prstGeom>
+          <a:noFill/>
+          <a:ln/>
+        </p:spPr>
+        <p:txBody>
+          <a:bodyPr wrap="square" lIns="254" tIns="254" rIns="254" bIns="254" rtlCol="0" anchor="t">
             <a:normAutofit/>
           </a:bodyPr>
           <a:lstStyle/>
@@ -14842,7 +15099,7 @@
               <a:buNone/>
             </a:pPr>
             <a:r>
-              <a:rPr lang="en-US" sz="1550" dirty="0">
+              <a:rPr lang="en-US" sz="1320" dirty="0">
                 <a:solidFill>
                   <a:srgbClr val="17364A"/>
                 </a:solidFill>
@@ -14852,7 +15109,7 @@
               </a:rPr>
               <a:t>Produce an advanced validation plan for an AI-supported workflow.</a:t>
             </a:r>
-            <a:endParaRPr lang="en-US" sz="1550" dirty="0"/>
+            <a:endParaRPr lang="en-US" sz="1320" dirty="0"/>
           </a:p>
         </p:txBody>
       </p:sp>
@@ -14940,13 +15197,16 @@
           <a:ln/>
         </p:spPr>
         <p:txBody>
-          <a:bodyPr wrap="square" lIns="254" tIns="254" rIns="254" bIns="254" rtlCol="0" anchor="t">
+          <a:bodyPr wrap="square" lIns="508" tIns="508" rIns="508" bIns="508" rtlCol="0" anchor="t">
             <a:normAutofit/>
           </a:bodyPr>
           <a:lstStyle/>
           <a:p>
-            <a:r>
-              <a:rPr lang="en-US" sz="1380" dirty="0">
+            <a:pPr indent="0" marL="0">
+              <a:buNone/>
+            </a:pPr>
+            <a:r>
+              <a:rPr lang="en-US" sz="1220" dirty="0">
                 <a:solidFill>
                   <a:srgbClr val="17364A"/>
                 </a:solidFill>
@@ -14956,7 +15216,7 @@
               </a:rPr>
               <a:t>Produce an advanced validation plan for an AI-supported workflow.</a:t>
             </a:r>
-            <a:endParaRPr lang="en-US" sz="1380" dirty="0"/>
+            <a:endParaRPr lang="en-US" sz="1220" dirty="0"/>
           </a:p>
         </p:txBody>
       </p:sp>
@@ -15034,17 +15294,17 @@
         </p:nvSpPr>
         <p:spPr>
           <a:xfrm>
-            <a:off x="7799832" y="5001768"/>
-            <a:ext cx="3145536" cy="502920"/>
-          </a:xfrm>
-          <a:prstGeom prst="rect">
-            <a:avLst/>
-          </a:prstGeom>
-          <a:noFill/>
-          <a:ln/>
-        </p:spPr>
-        <p:txBody>
-          <a:bodyPr wrap="square" lIns="0" tIns="0" rIns="0" bIns="0" rtlCol="0" anchor="t">
+            <a:off x="7799832" y="4974336"/>
+            <a:ext cx="3145536" cy="576072"/>
+          </a:xfrm>
+          <a:prstGeom prst="rect">
+            <a:avLst/>
+          </a:prstGeom>
+          <a:noFill/>
+          <a:ln/>
+        </p:spPr>
+        <p:txBody>
+          <a:bodyPr wrap="square" lIns="254" tIns="254" rIns="254" bIns="254" rtlCol="0" anchor="t">
             <a:normAutofit/>
           </a:bodyPr>
           <a:lstStyle/>
@@ -15053,7 +15313,7 @@
               <a:buNone/>
             </a:pPr>
             <a:r>
-              <a:rPr lang="en-US" sz="1550" dirty="0">
+              <a:rPr lang="en-US" sz="1320" dirty="0">
                 <a:solidFill>
                   <a:srgbClr val="17364A"/>
                 </a:solidFill>
@@ -15061,9 +15321,9 @@
                 <a:ea typeface="Aptos" pitchFamily="34" charset="-122"/>
                 <a:cs typeface="Aptos" pitchFamily="34" charset="-120"/>
               </a:rPr>
-              <a:t>Use the assignment to test whether you can explain the concept, apply it to a realistic public health situation, and identify what would need review before the work moves forward.</a:t>
-            </a:r>
-            <a:endParaRPr lang="en-US" sz="1550" dirty="0"/>
+              <a:t>Use the assignment to test whether you can explain the concept, apply it to a realistic public health situation, and.</a:t>
+            </a:r>
+            <a:endParaRPr lang="en-US" sz="1320" dirty="0"/>
           </a:p>
         </p:txBody>
       </p:sp>
@@ -15364,49 +15624,58 @@
           <a:ln/>
         </p:spPr>
         <p:txBody>
-          <a:bodyPr wrap="square" lIns="635" tIns="635" rIns="635" bIns="635" rtlCol="0" anchor="t">
+          <a:bodyPr wrap="square" lIns="1016" tIns="1016" rIns="1016" bIns="1016" rtlCol="0" anchor="t">
             <a:normAutofit/>
           </a:bodyPr>
           <a:lstStyle/>
           <a:p>
+            <a:pPr indent="0" marL="0">
+              <a:buNone/>
+            </a:pPr>
             <a:r>
               <a:rPr lang="en-US" sz="2100" dirty="0">
                 <a:solidFill>
-                  <a:srgbClr val="17364A"/>
-                </a:solidFill>
-                <a:latin typeface="Aptos" pitchFamily="34" charset="0"/>
-                <a:ea typeface="Aptos" pitchFamily="34" charset="-122"/>
-                <a:cs typeface="Aptos" pitchFamily="34" charset="-120"/>
-              </a:rPr>
-              <a:t>Model validation is the process of determining whether an AI tool performs adequately for its intended.</a:t>
+                  <a:srgbClr val="003A63"/>
+                </a:solidFill>
+                <a:latin typeface="Aptos" pitchFamily="34" charset="0"/>
+                <a:ea typeface="Aptos" pitchFamily="34" charset="-122"/>
+                <a:cs typeface="Aptos" pitchFamily="34" charset="-120"/>
+              </a:rPr>
+              <a:t>• Model validation is the process of determining whether an AI tool performs adequately for its.</a:t>
             </a:r>
             <a:endParaRPr lang="en-US" sz="2100" dirty="0"/>
           </a:p>
           <a:p>
+            <a:pPr indent="0" marL="0">
+              <a:buNone/>
+            </a:pPr>
             <a:r>
               <a:rPr lang="en-US" sz="2100" dirty="0">
                 <a:solidFill>
-                  <a:srgbClr val="17364A"/>
-                </a:solidFill>
-                <a:latin typeface="Aptos" pitchFamily="34" charset="0"/>
-                <a:ea typeface="Aptos" pitchFamily="34" charset="-122"/>
-                <a:cs typeface="Aptos" pitchFamily="34" charset="-120"/>
-              </a:rPr>
-              <a:t>Basic validation asks whether the tool works at all.</a:t>
+                  <a:srgbClr val="003A63"/>
+                </a:solidFill>
+                <a:latin typeface="Aptos" pitchFamily="34" charset="0"/>
+                <a:ea typeface="Aptos" pitchFamily="34" charset="-122"/>
+                <a:cs typeface="Aptos" pitchFamily="34" charset="-120"/>
+              </a:rPr>
+              <a:t>• Basic validation asks whether the tool works at all.</a:t>
             </a:r>
             <a:endParaRPr lang="en-US" sz="2100" dirty="0"/>
           </a:p>
           <a:p>
+            <a:pPr indent="0" marL="0">
+              <a:buNone/>
+            </a:pPr>
             <a:r>
               <a:rPr lang="en-US" sz="2100" dirty="0">
                 <a:solidFill>
-                  <a:srgbClr val="17364A"/>
-                </a:solidFill>
-                <a:latin typeface="Aptos" pitchFamily="34" charset="0"/>
-                <a:ea typeface="Aptos" pitchFamily="34" charset="-122"/>
-                <a:cs typeface="Aptos" pitchFamily="34" charset="-120"/>
-              </a:rPr>
-              <a:t>Advanced validation asks whether it works well enough, for whom, under what conditions, with what.</a:t>
+                  <a:srgbClr val="003A63"/>
+                </a:solidFill>
+                <a:latin typeface="Aptos" pitchFamily="34" charset="0"/>
+                <a:ea typeface="Aptos" pitchFamily="34" charset="-122"/>
+                <a:cs typeface="Aptos" pitchFamily="34" charset="-120"/>
+              </a:rPr>
+              <a:t>• Advanced validation asks whether it works well enough, for whom, under what conditions, with.</a:t>
             </a:r>
             <a:endParaRPr lang="en-US" sz="2100" dirty="0"/>
           </a:p>
@@ -15486,17 +15755,17 @@
         </p:nvSpPr>
         <p:spPr>
           <a:xfrm>
-            <a:off x="7799832" y="1828800"/>
-            <a:ext cx="3145536" cy="685800"/>
-          </a:xfrm>
-          <a:prstGeom prst="rect">
-            <a:avLst/>
-          </a:prstGeom>
-          <a:noFill/>
-          <a:ln/>
-        </p:spPr>
-        <p:txBody>
-          <a:bodyPr wrap="square" lIns="0" tIns="0" rIns="0" bIns="0" rtlCol="0" anchor="t">
+            <a:off x="7799832" y="1801368"/>
+            <a:ext cx="3145536" cy="758952"/>
+          </a:xfrm>
+          <a:prstGeom prst="rect">
+            <a:avLst/>
+          </a:prstGeom>
+          <a:noFill/>
+          <a:ln/>
+        </p:spPr>
+        <p:txBody>
+          <a:bodyPr wrap="square" lIns="254" tIns="254" rIns="254" bIns="254" rtlCol="0" anchor="t">
             <a:normAutofit/>
           </a:bodyPr>
           <a:lstStyle/>
@@ -15505,7 +15774,7 @@
               <a:buNone/>
             </a:pPr>
             <a:r>
-              <a:rPr lang="en-US" sz="1550" dirty="0">
+              <a:rPr lang="en-US" sz="1320" dirty="0">
                 <a:solidFill>
                   <a:srgbClr val="17364A"/>
                 </a:solidFill>
@@ -15515,7 +15784,7 @@
               </a:rPr>
               <a:t>Model validation is the process of determining whether an AI tool performs adequately for its intended.</a:t>
             </a:r>
-            <a:endParaRPr lang="en-US" sz="1550" dirty="0"/>
+            <a:endParaRPr lang="en-US" sz="1320" dirty="0"/>
           </a:p>
         </p:txBody>
       </p:sp>
@@ -15603,13 +15872,16 @@
           <a:ln/>
         </p:spPr>
         <p:txBody>
-          <a:bodyPr wrap="square" lIns="254" tIns="254" rIns="254" bIns="254" rtlCol="0" anchor="t">
+          <a:bodyPr wrap="square" lIns="508" tIns="508" rIns="508" bIns="508" rtlCol="0" anchor="t">
             <a:normAutofit/>
           </a:bodyPr>
           <a:lstStyle/>
           <a:p>
-            <a:r>
-              <a:rPr lang="en-US" sz="1380" dirty="0">
+            <a:pPr indent="0" marL="0">
+              <a:buNone/>
+            </a:pPr>
+            <a:r>
+              <a:rPr lang="en-US" sz="1220" dirty="0">
                 <a:solidFill>
                   <a:srgbClr val="17364A"/>
                 </a:solidFill>
@@ -15617,13 +15889,16 @@
                 <a:ea typeface="Aptos" pitchFamily="34" charset="-122"/>
                 <a:cs typeface="Aptos" pitchFamily="34" charset="-120"/>
               </a:rPr>
-              <a:t>Model validation is the process of determining whether an AI tool performs adequately for.</a:t>
-            </a:r>
-            <a:endParaRPr lang="en-US" sz="1380" dirty="0"/>
-          </a:p>
-          <a:p>
-            <a:r>
-              <a:rPr lang="en-US" sz="1380" dirty="0">
+              <a:t>Model validation is the process of determining whether an AI tool.</a:t>
+            </a:r>
+            <a:endParaRPr lang="en-US" sz="1220" dirty="0"/>
+          </a:p>
+          <a:p>
+            <a:pPr indent="0" marL="0">
+              <a:buNone/>
+            </a:pPr>
+            <a:r>
+              <a:rPr lang="en-US" sz="1220" dirty="0">
                 <a:solidFill>
                   <a:srgbClr val="17364A"/>
                 </a:solidFill>
@@ -15631,13 +15906,16 @@
                 <a:ea typeface="Aptos" pitchFamily="34" charset="-122"/>
                 <a:cs typeface="Aptos" pitchFamily="34" charset="-120"/>
               </a:rPr>
-              <a:t>Advanced validation asks whether it works well enough, for whom, under what conditions,.</a:t>
-            </a:r>
-            <a:endParaRPr lang="en-US" sz="1380" dirty="0"/>
-          </a:p>
-          <a:p>
-            <a:r>
-              <a:rPr lang="en-US" sz="1380" dirty="0">
+              <a:t>Advanced validation asks whether it works well enough, for whom,.</a:t>
+            </a:r>
+            <a:endParaRPr lang="en-US" sz="1220" dirty="0"/>
+          </a:p>
+          <a:p>
+            <a:pPr indent="0" marL="0">
+              <a:buNone/>
+            </a:pPr>
+            <a:r>
+              <a:rPr lang="en-US" sz="1220" dirty="0">
                 <a:solidFill>
                   <a:srgbClr val="17364A"/>
                 </a:solidFill>
@@ -15645,9 +15923,9 @@
                 <a:ea typeface="Aptos" pitchFamily="34" charset="-122"/>
                 <a:cs typeface="Aptos" pitchFamily="34" charset="-120"/>
               </a:rPr>
-              <a:t>This module extends foundational validation content by focusing on metrics, subgroup.</a:t>
-            </a:r>
-            <a:endParaRPr lang="en-US" sz="1380" dirty="0"/>
+              <a:t>This module extends foundational validation content by focusing on.</a:t>
+            </a:r>
+            <a:endParaRPr lang="en-US" sz="1220" dirty="0"/>
           </a:p>
         </p:txBody>
       </p:sp>
@@ -15725,17 +16003,17 @@
         </p:nvSpPr>
         <p:spPr>
           <a:xfrm>
-            <a:off x="7799832" y="5001768"/>
-            <a:ext cx="3145536" cy="502920"/>
-          </a:xfrm>
-          <a:prstGeom prst="rect">
-            <a:avLst/>
-          </a:prstGeom>
-          <a:noFill/>
-          <a:ln/>
-        </p:spPr>
-        <p:txBody>
-          <a:bodyPr wrap="square" lIns="0" tIns="0" rIns="0" bIns="0" rtlCol="0" anchor="t">
+            <a:off x="7799832" y="4974336"/>
+            <a:ext cx="3145536" cy="576072"/>
+          </a:xfrm>
+          <a:prstGeom prst="rect">
+            <a:avLst/>
+          </a:prstGeom>
+          <a:noFill/>
+          <a:ln/>
+        </p:spPr>
+        <p:txBody>
+          <a:bodyPr wrap="square" lIns="254" tIns="254" rIns="254" bIns="254" rtlCol="0" anchor="t">
             <a:normAutofit/>
           </a:bodyPr>
           <a:lstStyle/>
@@ -15744,7 +16022,7 @@
               <a:buNone/>
             </a:pPr>
             <a:r>
-              <a:rPr lang="en-US" sz="1550" dirty="0">
+              <a:rPr lang="en-US" sz="1320" dirty="0">
                 <a:solidFill>
                   <a:srgbClr val="17364A"/>
                 </a:solidFill>
@@ -15752,9 +16030,9 @@
                 <a:ea typeface="Aptos" pitchFamily="34" charset="-122"/>
                 <a:cs typeface="Aptos" pitchFamily="34" charset="-120"/>
               </a:rPr>
-              <a:t>Identify what could go wrong, who could be affected, what safeguards are needed, and what evidence should be reviewed before use expands.</a:t>
-            </a:r>
-            <a:endParaRPr lang="en-US" sz="1550" dirty="0"/>
+              <a:t>Identify what could go wrong, who could be affected, what safeguards are needed, and what evidence should be reviewed.</a:t>
+            </a:r>
+            <a:endParaRPr lang="en-US" sz="1320" dirty="0"/>
           </a:p>
         </p:txBody>
       </p:sp>
@@ -16055,49 +16333,58 @@
           <a:ln/>
         </p:spPr>
         <p:txBody>
-          <a:bodyPr wrap="square" lIns="635" tIns="635" rIns="635" bIns="635" rtlCol="0" anchor="t">
+          <a:bodyPr wrap="square" lIns="1016" tIns="1016" rIns="1016" bIns="1016" rtlCol="0" anchor="t">
             <a:normAutofit/>
           </a:bodyPr>
           <a:lstStyle/>
           <a:p>
+            <a:pPr indent="0" marL="0">
+              <a:buNone/>
+            </a:pPr>
             <a:r>
               <a:rPr lang="en-US" sz="2100" dirty="0">
                 <a:solidFill>
-                  <a:srgbClr val="17364A"/>
-                </a:solidFill>
-                <a:latin typeface="Aptos" pitchFamily="34" charset="0"/>
-                <a:ea typeface="Aptos" pitchFamily="34" charset="-122"/>
-                <a:cs typeface="Aptos" pitchFamily="34" charset="-120"/>
-              </a:rPr>
-              <a:t>Validation matters because public health AI tools can appear credible even when they are not fit for.</a:t>
+                  <a:srgbClr val="003A63"/>
+                </a:solidFill>
+                <a:latin typeface="Aptos" pitchFamily="34" charset="0"/>
+                <a:ea typeface="Aptos" pitchFamily="34" charset="-122"/>
+                <a:cs typeface="Aptos" pitchFamily="34" charset="-120"/>
+              </a:rPr>
+              <a:t>• Validation matters because public health AI tools can appear credible even when they are not.</a:t>
             </a:r>
             <a:endParaRPr lang="en-US" sz="2100" dirty="0"/>
           </a:p>
           <a:p>
+            <a:pPr indent="0" marL="0">
+              <a:buNone/>
+            </a:pPr>
             <a:r>
               <a:rPr lang="en-US" sz="2100" dirty="0">
                 <a:solidFill>
-                  <a:srgbClr val="17364A"/>
-                </a:solidFill>
-                <a:latin typeface="Aptos" pitchFamily="34" charset="0"/>
-                <a:ea typeface="Aptos" pitchFamily="34" charset="-122"/>
-                <a:cs typeface="Aptos" pitchFamily="34" charset="-120"/>
-              </a:rPr>
-              <a:t>A polished dashboard, confident generated text, or high overall accuracy score does not prove that the.</a:t>
+                  <a:srgbClr val="003A63"/>
+                </a:solidFill>
+                <a:latin typeface="Aptos" pitchFamily="34" charset="0"/>
+                <a:ea typeface="Aptos" pitchFamily="34" charset="-122"/>
+                <a:cs typeface="Aptos" pitchFamily="34" charset="-120"/>
+              </a:rPr>
+              <a:t>• A polished dashboard, confident generated text, or high overall accuracy score does not prove.</a:t>
             </a:r>
             <a:endParaRPr lang="en-US" sz="2100" dirty="0"/>
           </a:p>
           <a:p>
+            <a:pPr indent="0" marL="0">
+              <a:buNone/>
+            </a:pPr>
             <a:r>
               <a:rPr lang="en-US" sz="2100" dirty="0">
                 <a:solidFill>
-                  <a:srgbClr val="17364A"/>
-                </a:solidFill>
-                <a:latin typeface="Aptos" pitchFamily="34" charset="0"/>
-                <a:ea typeface="Aptos" pitchFamily="34" charset="-122"/>
-                <a:cs typeface="Aptos" pitchFamily="34" charset="-120"/>
-              </a:rPr>
-              <a:t>Public health staff need to evaluate performance in relation to the specific task and the consequences.</a:t>
+                  <a:srgbClr val="003A63"/>
+                </a:solidFill>
+                <a:latin typeface="Aptos" pitchFamily="34" charset="0"/>
+                <a:ea typeface="Aptos" pitchFamily="34" charset="-122"/>
+                <a:cs typeface="Aptos" pitchFamily="34" charset="-120"/>
+              </a:rPr>
+              <a:t>• Public health staff need to evaluate performance in relation to the specific task and the.</a:t>
             </a:r>
             <a:endParaRPr lang="en-US" sz="2100" dirty="0"/>
           </a:p>
@@ -16177,17 +16464,17 @@
         </p:nvSpPr>
         <p:spPr>
           <a:xfrm>
-            <a:off x="7799832" y="1828800"/>
-            <a:ext cx="3145536" cy="685800"/>
-          </a:xfrm>
-          <a:prstGeom prst="rect">
-            <a:avLst/>
-          </a:prstGeom>
-          <a:noFill/>
-          <a:ln/>
-        </p:spPr>
-        <p:txBody>
-          <a:bodyPr wrap="square" lIns="0" tIns="0" rIns="0" bIns="0" rtlCol="0" anchor="t">
+            <a:off x="7799832" y="1801368"/>
+            <a:ext cx="3145536" cy="758952"/>
+          </a:xfrm>
+          <a:prstGeom prst="rect">
+            <a:avLst/>
+          </a:prstGeom>
+          <a:noFill/>
+          <a:ln/>
+        </p:spPr>
+        <p:txBody>
+          <a:bodyPr wrap="square" lIns="254" tIns="254" rIns="254" bIns="254" rtlCol="0" anchor="t">
             <a:normAutofit/>
           </a:bodyPr>
           <a:lstStyle/>
@@ -16196,7 +16483,7 @@
               <a:buNone/>
             </a:pPr>
             <a:r>
-              <a:rPr lang="en-US" sz="1550" dirty="0">
+              <a:rPr lang="en-US" sz="1320" dirty="0">
                 <a:solidFill>
                   <a:srgbClr val="17364A"/>
                 </a:solidFill>
@@ -16206,7 +16493,7 @@
               </a:rPr>
               <a:t>Validation matters because public health AI tools can appear credible even when they are not fit for.</a:t>
             </a:r>
-            <a:endParaRPr lang="en-US" sz="1550" dirty="0"/>
+            <a:endParaRPr lang="en-US" sz="1320" dirty="0"/>
           </a:p>
         </p:txBody>
       </p:sp>
@@ -16294,13 +16581,16 @@
           <a:ln/>
         </p:spPr>
         <p:txBody>
-          <a:bodyPr wrap="square" lIns="254" tIns="254" rIns="254" bIns="254" rtlCol="0" anchor="t">
+          <a:bodyPr wrap="square" lIns="508" tIns="508" rIns="508" bIns="508" rtlCol="0" anchor="t">
             <a:normAutofit/>
           </a:bodyPr>
           <a:lstStyle/>
           <a:p>
-            <a:r>
-              <a:rPr lang="en-US" sz="1380" dirty="0">
+            <a:pPr indent="0" marL="0">
+              <a:buNone/>
+            </a:pPr>
+            <a:r>
+              <a:rPr lang="en-US" sz="1220" dirty="0">
                 <a:solidFill>
                   <a:srgbClr val="17364A"/>
                 </a:solidFill>
@@ -16308,13 +16598,16 @@
                 <a:ea typeface="Aptos" pitchFamily="34" charset="-122"/>
                 <a:cs typeface="Aptos" pitchFamily="34" charset="-120"/>
               </a:rPr>
-              <a:t>Validation matters because public health AI tools can appear credible even when they are.</a:t>
-            </a:r>
-            <a:endParaRPr lang="en-US" sz="1380" dirty="0"/>
-          </a:p>
-          <a:p>
-            <a:r>
-              <a:rPr lang="en-US" sz="1380" dirty="0">
+              <a:t>Validation matters because public health AI tools can appear.</a:t>
+            </a:r>
+            <a:endParaRPr lang="en-US" sz="1220" dirty="0"/>
+          </a:p>
+          <a:p>
+            <a:pPr indent="0" marL="0">
+              <a:buNone/>
+            </a:pPr>
+            <a:r>
+              <a:rPr lang="en-US" sz="1220" dirty="0">
                 <a:solidFill>
                   <a:srgbClr val="17364A"/>
                 </a:solidFill>
@@ -16322,13 +16615,16 @@
                 <a:ea typeface="Aptos" pitchFamily="34" charset="-122"/>
                 <a:cs typeface="Aptos" pitchFamily="34" charset="-120"/>
               </a:rPr>
-              <a:t>A polished dashboard, confident generated text, or high overall accuracy score does not.</a:t>
-            </a:r>
-            <a:endParaRPr lang="en-US" sz="1380" dirty="0"/>
-          </a:p>
-          <a:p>
-            <a:r>
-              <a:rPr lang="en-US" sz="1380" dirty="0">
+              <a:t>A polished dashboard, confident generated text, or high overall.</a:t>
+            </a:r>
+            <a:endParaRPr lang="en-US" sz="1220" dirty="0"/>
+          </a:p>
+          <a:p>
+            <a:pPr indent="0" marL="0">
+              <a:buNone/>
+            </a:pPr>
+            <a:r>
+              <a:rPr lang="en-US" sz="1220" dirty="0">
                 <a:solidFill>
                   <a:srgbClr val="17364A"/>
                 </a:solidFill>
@@ -16336,9 +16632,9 @@
                 <a:ea typeface="Aptos" pitchFamily="34" charset="-122"/>
                 <a:cs typeface="Aptos" pitchFamily="34" charset="-120"/>
               </a:rPr>
-              <a:t>Public health staff need to evaluate performance in relation to the specific task and the.</a:t>
-            </a:r>
-            <a:endParaRPr lang="en-US" sz="1380" dirty="0"/>
+              <a:t>Public health staff need to evaluate performance in relation to.</a:t>
+            </a:r>
+            <a:endParaRPr lang="en-US" sz="1220" dirty="0"/>
           </a:p>
         </p:txBody>
       </p:sp>
@@ -16416,17 +16712,17 @@
         </p:nvSpPr>
         <p:spPr>
           <a:xfrm>
-            <a:off x="7799832" y="5001768"/>
-            <a:ext cx="3145536" cy="502920"/>
-          </a:xfrm>
-          <a:prstGeom prst="rect">
-            <a:avLst/>
-          </a:prstGeom>
-          <a:noFill/>
-          <a:ln/>
-        </p:spPr>
-        <p:txBody>
-          <a:bodyPr wrap="square" lIns="0" tIns="0" rIns="0" bIns="0" rtlCol="0" anchor="t">
+            <a:off x="7799832" y="4974336"/>
+            <a:ext cx="3145536" cy="576072"/>
+          </a:xfrm>
+          <a:prstGeom prst="rect">
+            <a:avLst/>
+          </a:prstGeom>
+          <a:noFill/>
+          <a:ln/>
+        </p:spPr>
+        <p:txBody>
+          <a:bodyPr wrap="square" lIns="254" tIns="254" rIns="254" bIns="254" rtlCol="0" anchor="t">
             <a:normAutofit/>
           </a:bodyPr>
           <a:lstStyle/>
@@ -16435,7 +16731,7 @@
               <a:buNone/>
             </a:pPr>
             <a:r>
-              <a:rPr lang="en-US" sz="1550" dirty="0">
+              <a:rPr lang="en-US" sz="1320" dirty="0">
                 <a:solidFill>
                   <a:srgbClr val="17364A"/>
                 </a:solidFill>
@@ -16443,9 +16739,9 @@
                 <a:ea typeface="Aptos" pitchFamily="34" charset="-122"/>
                 <a:cs typeface="Aptos" pitchFamily="34" charset="-120"/>
               </a:rPr>
-              <a:t>Identify what could go wrong, who could be affected, what safeguards are needed, and what evidence should be reviewed before use expands.</a:t>
-            </a:r>
-            <a:endParaRPr lang="en-US" sz="1550" dirty="0"/>
+              <a:t>Identify what could go wrong, who could be affected, what safeguards are needed, and what evidence should be reviewed.</a:t>
+            </a:r>
+            <a:endParaRPr lang="en-US" sz="1320" dirty="0"/>
           </a:p>
         </p:txBody>
       </p:sp>
@@ -16746,49 +17042,58 @@
           <a:ln/>
         </p:spPr>
         <p:txBody>
-          <a:bodyPr wrap="square" lIns="635" tIns="635" rIns="635" bIns="635" rtlCol="0" anchor="t">
+          <a:bodyPr wrap="square" lIns="1016" tIns="1016" rIns="1016" bIns="1016" rtlCol="0" anchor="t">
             <a:normAutofit/>
           </a:bodyPr>
           <a:lstStyle/>
           <a:p>
+            <a:pPr indent="0" marL="0">
+              <a:buNone/>
+            </a:pPr>
             <a:r>
               <a:rPr lang="en-US" sz="2100" dirty="0">
                 <a:solidFill>
-                  <a:srgbClr val="17364A"/>
-                </a:solidFill>
-                <a:latin typeface="Aptos" pitchFamily="34" charset="0"/>
-                <a:ea typeface="Aptos" pitchFamily="34" charset="-122"/>
-                <a:cs typeface="Aptos" pitchFamily="34" charset="-120"/>
-              </a:rPr>
-              <a:t>A public health agency may test a model that identifies incoming case reports likely to require.</a:t>
+                  <a:srgbClr val="003A63"/>
+                </a:solidFill>
+                <a:latin typeface="Aptos" pitchFamily="34" charset="0"/>
+                <a:ea typeface="Aptos" pitchFamily="34" charset="-122"/>
+                <a:cs typeface="Aptos" pitchFamily="34" charset="-120"/>
+              </a:rPr>
+              <a:t>• A public health agency may test a model that identifies incoming case reports likely to require.</a:t>
             </a:r>
             <a:endParaRPr lang="en-US" sz="2100" dirty="0"/>
           </a:p>
           <a:p>
+            <a:pPr indent="0" marL="0">
+              <a:buNone/>
+            </a:pPr>
             <a:r>
               <a:rPr lang="en-US" sz="2100" dirty="0">
                 <a:solidFill>
-                  <a:srgbClr val="17364A"/>
-                </a:solidFill>
-                <a:latin typeface="Aptos" pitchFamily="34" charset="0"/>
-                <a:ea typeface="Aptos" pitchFamily="34" charset="-122"/>
-                <a:cs typeface="Aptos" pitchFamily="34" charset="-120"/>
-              </a:rPr>
-              <a:t>Overall accuracy may be high, but that number alone is not enough.</a:t>
+                  <a:srgbClr val="003A63"/>
+                </a:solidFill>
+                <a:latin typeface="Aptos" pitchFamily="34" charset="0"/>
+                <a:ea typeface="Aptos" pitchFamily="34" charset="-122"/>
+                <a:cs typeface="Aptos" pitchFamily="34" charset="-120"/>
+              </a:rPr>
+              <a:t>• Overall accuracy may be high, but that number alone is not enough.</a:t>
             </a:r>
             <a:endParaRPr lang="en-US" sz="2100" dirty="0"/>
           </a:p>
           <a:p>
+            <a:pPr indent="0" marL="0">
+              <a:buNone/>
+            </a:pPr>
             <a:r>
               <a:rPr lang="en-US" sz="2100" dirty="0">
                 <a:solidFill>
-                  <a:srgbClr val="17364A"/>
-                </a:solidFill>
-                <a:latin typeface="Aptos" pitchFamily="34" charset="0"/>
-                <a:ea typeface="Aptos" pitchFamily="34" charset="-122"/>
-                <a:cs typeface="Aptos" pitchFamily="34" charset="-120"/>
-              </a:rPr>
-              <a:t>Staff need to know whether the model misses rare but severe conditions, whether it performs differently.</a:t>
+                  <a:srgbClr val="003A63"/>
+                </a:solidFill>
+                <a:latin typeface="Aptos" pitchFamily="34" charset="0"/>
+                <a:ea typeface="Aptos" pitchFamily="34" charset="-122"/>
+                <a:cs typeface="Aptos" pitchFamily="34" charset="-120"/>
+              </a:rPr>
+              <a:t>• Staff need to know whether the model misses rare but severe conditions, whether it performs.</a:t>
             </a:r>
             <a:endParaRPr lang="en-US" sz="2100" dirty="0"/>
           </a:p>
@@ -16868,17 +17173,17 @@
         </p:nvSpPr>
         <p:spPr>
           <a:xfrm>
-            <a:off x="7799832" y="1828800"/>
-            <a:ext cx="3145536" cy="685800"/>
-          </a:xfrm>
-          <a:prstGeom prst="rect">
-            <a:avLst/>
-          </a:prstGeom>
-          <a:noFill/>
-          <a:ln/>
-        </p:spPr>
-        <p:txBody>
-          <a:bodyPr wrap="square" lIns="0" tIns="0" rIns="0" bIns="0" rtlCol="0" anchor="t">
+            <a:off x="7799832" y="1801368"/>
+            <a:ext cx="3145536" cy="758952"/>
+          </a:xfrm>
+          <a:prstGeom prst="rect">
+            <a:avLst/>
+          </a:prstGeom>
+          <a:noFill/>
+          <a:ln/>
+        </p:spPr>
+        <p:txBody>
+          <a:bodyPr wrap="square" lIns="254" tIns="254" rIns="254" bIns="254" rtlCol="0" anchor="t">
             <a:normAutofit/>
           </a:bodyPr>
           <a:lstStyle/>
@@ -16887,7 +17192,7 @@
               <a:buNone/>
             </a:pPr>
             <a:r>
-              <a:rPr lang="en-US" sz="1550" dirty="0">
+              <a:rPr lang="en-US" sz="1320" dirty="0">
                 <a:solidFill>
                   <a:srgbClr val="17364A"/>
                 </a:solidFill>
@@ -16897,7 +17202,7 @@
               </a:rPr>
               <a:t>A public health agency may test a model that identifies incoming case reports likely to require.</a:t>
             </a:r>
-            <a:endParaRPr lang="en-US" sz="1550" dirty="0"/>
+            <a:endParaRPr lang="en-US" sz="1320" dirty="0"/>
           </a:p>
         </p:txBody>
       </p:sp>
@@ -16985,13 +17290,16 @@
           <a:ln/>
         </p:spPr>
         <p:txBody>
-          <a:bodyPr wrap="square" lIns="254" tIns="254" rIns="254" bIns="254" rtlCol="0" anchor="t">
+          <a:bodyPr wrap="square" lIns="508" tIns="508" rIns="508" bIns="508" rtlCol="0" anchor="t">
             <a:normAutofit/>
           </a:bodyPr>
           <a:lstStyle/>
           <a:p>
-            <a:r>
-              <a:rPr lang="en-US" sz="1380" dirty="0">
+            <a:pPr indent="0" marL="0">
+              <a:buNone/>
+            </a:pPr>
+            <a:r>
+              <a:rPr lang="en-US" sz="1220" dirty="0">
                 <a:solidFill>
                   <a:srgbClr val="17364A"/>
                 </a:solidFill>
@@ -16999,13 +17307,16 @@
                 <a:ea typeface="Aptos" pitchFamily="34" charset="-122"/>
                 <a:cs typeface="Aptos" pitchFamily="34" charset="-120"/>
               </a:rPr>
-              <a:t>A public health agency may test a model that identifies incoming case reports likely to.</a:t>
-            </a:r>
-            <a:endParaRPr lang="en-US" sz="1380" dirty="0"/>
-          </a:p>
-          <a:p>
-            <a:r>
-              <a:rPr lang="en-US" sz="1380" dirty="0">
+              <a:t>A public health agency may test a model that identifies incoming.</a:t>
+            </a:r>
+            <a:endParaRPr lang="en-US" sz="1220" dirty="0"/>
+          </a:p>
+          <a:p>
+            <a:pPr indent="0" marL="0">
+              <a:buNone/>
+            </a:pPr>
+            <a:r>
+              <a:rPr lang="en-US" sz="1220" dirty="0">
                 <a:solidFill>
                   <a:srgbClr val="17364A"/>
                 </a:solidFill>
@@ -17013,13 +17324,16 @@
                 <a:ea typeface="Aptos" pitchFamily="34" charset="-122"/>
                 <a:cs typeface="Aptos" pitchFamily="34" charset="-120"/>
               </a:rPr>
-              <a:t>Staff need to know whether the model misses rare but severe conditions, whether it.</a:t>
-            </a:r>
-            <a:endParaRPr lang="en-US" sz="1380" dirty="0"/>
-          </a:p>
-          <a:p>
-            <a:r>
-              <a:rPr lang="en-US" sz="1380" dirty="0">
+              <a:t>Staff need to know whether the model misses rare but severe.</a:t>
+            </a:r>
+            <a:endParaRPr lang="en-US" sz="1220" dirty="0"/>
+          </a:p>
+          <a:p>
+            <a:pPr indent="0" marL="0">
+              <a:buNone/>
+            </a:pPr>
+            <a:r>
+              <a:rPr lang="en-US" sz="1220" dirty="0">
                 <a:solidFill>
                   <a:srgbClr val="17364A"/>
                 </a:solidFill>
@@ -17027,9 +17341,9 @@
                 <a:ea typeface="Aptos" pitchFamily="34" charset="-122"/>
                 <a:cs typeface="Aptos" pitchFamily="34" charset="-120"/>
               </a:rPr>
-              <a:t>The agency should validate the model on recent local data, review errors with.</a:t>
-            </a:r>
-            <a:endParaRPr lang="en-US" sz="1380" dirty="0"/>
+              <a:t>The agency should validate the model on recent local data, review.</a:t>
+            </a:r>
+            <a:endParaRPr lang="en-US" sz="1220" dirty="0"/>
           </a:p>
         </p:txBody>
       </p:sp>
@@ -17107,17 +17421,17 @@
         </p:nvSpPr>
         <p:spPr>
           <a:xfrm>
-            <a:off x="7799832" y="5001768"/>
-            <a:ext cx="3145536" cy="502920"/>
-          </a:xfrm>
-          <a:prstGeom prst="rect">
-            <a:avLst/>
-          </a:prstGeom>
-          <a:noFill/>
-          <a:ln/>
-        </p:spPr>
-        <p:txBody>
-          <a:bodyPr wrap="square" lIns="0" tIns="0" rIns="0" bIns="0" rtlCol="0" anchor="t">
+            <a:off x="7799832" y="4974336"/>
+            <a:ext cx="3145536" cy="576072"/>
+          </a:xfrm>
+          <a:prstGeom prst="rect">
+            <a:avLst/>
+          </a:prstGeom>
+          <a:noFill/>
+          <a:ln/>
+        </p:spPr>
+        <p:txBody>
+          <a:bodyPr wrap="square" lIns="254" tIns="254" rIns="254" bIns="254" rtlCol="0" anchor="t">
             <a:normAutofit/>
           </a:bodyPr>
           <a:lstStyle/>
@@ -17126,7 +17440,7 @@
               <a:buNone/>
             </a:pPr>
             <a:r>
-              <a:rPr lang="en-US" sz="1550" dirty="0">
+              <a:rPr lang="en-US" sz="1320" dirty="0">
                 <a:solidFill>
                   <a:srgbClr val="17364A"/>
                 </a:solidFill>
@@ -17134,9 +17448,9 @@
                 <a:ea typeface="Aptos" pitchFamily="34" charset="-122"/>
                 <a:cs typeface="Aptos" pitchFamily="34" charset="-120"/>
               </a:rPr>
-              <a:t>Identify what could go wrong, who could be affected, what safeguards are needed, and what evidence should be reviewed before use expands.</a:t>
-            </a:r>
-            <a:endParaRPr lang="en-US" sz="1550" dirty="0"/>
+              <a:t>Identify what could go wrong, who could be affected, what safeguards are needed, and what evidence should be reviewed.</a:t>
+            </a:r>
+            <a:endParaRPr lang="en-US" sz="1320" dirty="0"/>
           </a:p>
         </p:txBody>
       </p:sp>

--- a/downloads/presentations/modules/anl-300.pptx
+++ b/downloads/presentations/modules/anl-300.pptx
@@ -3419,11 +3419,11 @@
         <p:spPr>
           <a:xfrm>
             <a:off x="7635240" y="1325880"/>
-            <a:ext cx="3474720" cy="1325880"/>
+            <a:ext cx="3474720" cy="1207008"/>
           </a:xfrm>
           <a:prstGeom prst="roundRect">
             <a:avLst>
-              <a:gd name="adj" fmla="val 8276"/>
+              <a:gd name="adj" fmla="val 9091"/>
             </a:avLst>
           </a:prstGeom>
           <a:solidFill>
@@ -3485,7 +3485,7 @@
         <p:spPr>
           <a:xfrm>
             <a:off x="7799832" y="1801368"/>
-            <a:ext cx="3145536" cy="758952"/>
+            <a:ext cx="3145536" cy="640080"/>
           </a:xfrm>
           <a:prstGeom prst="rect">
             <a:avLst/>
@@ -3525,7 +3525,7 @@
         </p:nvSpPr>
         <p:spPr>
           <a:xfrm>
-            <a:off x="7635240" y="2788920"/>
+            <a:off x="7635240" y="2670048"/>
             <a:ext cx="3474720" cy="1536192"/>
           </a:xfrm>
           <a:prstGeom prst="roundRect">
@@ -3552,8 +3552,8 @@
         </p:nvSpPr>
         <p:spPr>
           <a:xfrm>
-            <a:off x="7799832" y="2935224"/>
-            <a:ext cx="3145536" cy="256032"/>
+            <a:off x="7799832" y="2798064"/>
+            <a:ext cx="3145536" cy="237744"/>
           </a:xfrm>
           <a:prstGeom prst="rect">
             <a:avLst/>
@@ -3569,7 +3569,7 @@
               <a:buNone/>
             </a:pPr>
             <a:r>
-              <a:rPr lang="en-US" sz="1300" b="1" dirty="0">
+              <a:rPr lang="en-US" sz="1250" b="1" dirty="0">
                 <a:solidFill>
                   <a:srgbClr val="0068B7"/>
                 </a:solidFill>
@@ -3577,101 +3577,317 @@
                 <a:ea typeface="Aptos" pitchFamily="34" charset="-122"/>
                 <a:cs typeface="Aptos" pitchFamily="34" charset="-120"/>
               </a:rPr>
-              <a:t>Concept checkpoints</a:t>
-            </a:r>
-            <a:endParaRPr lang="en-US" sz="1300" dirty="0"/>
-          </a:p>
-        </p:txBody>
-      </p:sp>
-      <p:sp>
-        <p:nvSpPr>
-          <p:cNvPr id="15" name="Text 13"/>
-          <p:cNvSpPr/>
-          <p:nvPr/>
-        </p:nvSpPr>
-        <p:spPr>
-          <a:xfrm>
-            <a:off x="7818120" y="3300984"/>
-            <a:ext cx="3090672" cy="877824"/>
-          </a:xfrm>
-          <a:prstGeom prst="rect">
-            <a:avLst/>
-          </a:prstGeom>
-          <a:noFill/>
-          <a:ln/>
-        </p:spPr>
-        <p:txBody>
-          <a:bodyPr wrap="square" lIns="508" tIns="508" rIns="508" bIns="508" rtlCol="0" anchor="t">
+              <a:t>Risk control loop</a:t>
+            </a:r>
+            <a:endParaRPr lang="en-US" sz="1250" dirty="0"/>
+          </a:p>
+        </p:txBody>
+      </p:sp>
+      <p:sp>
+        <p:nvSpPr>
+          <p:cNvPr id="15" name="Shape 13"/>
+          <p:cNvSpPr/>
+          <p:nvPr/>
+        </p:nvSpPr>
+        <p:spPr>
+          <a:xfrm>
+            <a:off x="8763000" y="3351276"/>
+            <a:ext cx="164592" cy="0"/>
+          </a:xfrm>
+          <a:prstGeom prst="line">
+            <a:avLst/>
+          </a:prstGeom>
+          <a:noFill/>
+          <a:ln w="15240">
+            <a:solidFill>
+              <a:srgbClr val="8ABBD8"/>
+            </a:solidFill>
+            <a:prstDash val="solid"/>
+          </a:ln>
+        </p:spPr>
+      </p:sp>
+      <p:sp>
+        <p:nvSpPr>
+          <p:cNvPr id="16" name="Shape 14"/>
+          <p:cNvSpPr/>
+          <p:nvPr/>
+        </p:nvSpPr>
+        <p:spPr>
+          <a:xfrm>
+            <a:off x="7872984" y="3200400"/>
+            <a:ext cx="890016" cy="301752"/>
+          </a:xfrm>
+          <a:prstGeom prst="roundRect">
+            <a:avLst>
+              <a:gd name="adj" fmla="val 24242"/>
+            </a:avLst>
+          </a:prstGeom>
+          <a:solidFill>
+            <a:srgbClr val="0068B7"/>
+          </a:solidFill>
+          <a:ln w="12700">
+            <a:solidFill>
+              <a:srgbClr val="0068B7"/>
+            </a:solidFill>
+            <a:prstDash val="solid"/>
+          </a:ln>
+        </p:spPr>
+      </p:sp>
+      <p:sp>
+        <p:nvSpPr>
+          <p:cNvPr id="17" name="Text 15"/>
+          <p:cNvSpPr/>
+          <p:nvPr/>
+        </p:nvSpPr>
+        <p:spPr>
+          <a:xfrm>
+            <a:off x="7909560" y="3273552"/>
+            <a:ext cx="816864" cy="146304"/>
+          </a:xfrm>
+          <a:prstGeom prst="rect">
+            <a:avLst/>
+          </a:prstGeom>
+          <a:noFill/>
+          <a:ln/>
+        </p:spPr>
+        <p:txBody>
+          <a:bodyPr wrap="square" lIns="0" tIns="0" rIns="0" bIns="0" rtlCol="0" anchor="ctr">
             <a:normAutofit/>
           </a:bodyPr>
           <a:lstStyle/>
           <a:p>
-            <a:pPr indent="0" marL="0">
-              <a:buNone/>
-            </a:pPr>
-            <a:r>
-              <a:rPr lang="en-US" sz="1220" dirty="0">
-                <a:solidFill>
-                  <a:srgbClr val="17364A"/>
-                </a:solidFill>
-                <a:latin typeface="Aptos" pitchFamily="34" charset="0"/>
-                <a:ea typeface="Aptos" pitchFamily="34" charset="-122"/>
-                <a:cs typeface="Aptos" pitchFamily="34" charset="-120"/>
-              </a:rPr>
-              <a:t>Specificity may be prioritized when false positives create.</a:t>
-            </a:r>
-            <a:endParaRPr lang="en-US" sz="1220" dirty="0"/>
-          </a:p>
-          <a:p>
-            <a:pPr indent="0" marL="0">
-              <a:buNone/>
-            </a:pPr>
-            <a:r>
-              <a:rPr lang="en-US" sz="1220" dirty="0">
-                <a:solidFill>
-                  <a:srgbClr val="17364A"/>
-                </a:solidFill>
-                <a:latin typeface="Aptos" pitchFamily="34" charset="0"/>
-                <a:ea typeface="Aptos" pitchFamily="34" charset="-122"/>
-                <a:cs typeface="Aptos" pitchFamily="34" charset="-120"/>
-              </a:rPr>
-              <a:t>Precision and positive predictive value matter when staff act on.</a:t>
-            </a:r>
-            <a:endParaRPr lang="en-US" sz="1220" dirty="0"/>
-          </a:p>
-          <a:p>
-            <a:pPr indent="0" marL="0">
-              <a:buNone/>
-            </a:pPr>
-            <a:r>
-              <a:rPr lang="en-US" sz="1220" dirty="0">
-                <a:solidFill>
-                  <a:srgbClr val="17364A"/>
-                </a:solidFill>
-                <a:latin typeface="Aptos" pitchFamily="34" charset="0"/>
-                <a:ea typeface="Aptos" pitchFamily="34" charset="-122"/>
-                <a:cs typeface="Aptos" pitchFamily="34" charset="-120"/>
-              </a:rPr>
-              <a:t>Calibration matters when scores are interpreted as probabilities.</a:t>
-            </a:r>
-            <a:endParaRPr lang="en-US" sz="1220" dirty="0"/>
-          </a:p>
-        </p:txBody>
-      </p:sp>
-      <p:sp>
-        <p:nvSpPr>
-          <p:cNvPr id="16" name="Shape 14"/>
-          <p:cNvSpPr/>
-          <p:nvPr/>
-        </p:nvSpPr>
-        <p:spPr>
-          <a:xfrm>
-            <a:off x="7635240" y="4498848"/>
-            <a:ext cx="3474720" cy="1143000"/>
+            <a:pPr algn="ctr" indent="0" marL="0">
+              <a:buNone/>
+            </a:pPr>
+            <a:r>
+              <a:rPr lang="en-US" sz="880" b="1" dirty="0">
+                <a:solidFill>
+                  <a:srgbClr val="FFFFFF"/>
+                </a:solidFill>
+                <a:latin typeface="Aptos" pitchFamily="34" charset="0"/>
+                <a:ea typeface="Aptos" pitchFamily="34" charset="-122"/>
+                <a:cs typeface="Aptos" pitchFamily="34" charset="-120"/>
+              </a:rPr>
+              <a:t>Identify</a:t>
+            </a:r>
+            <a:endParaRPr lang="en-US" sz="880" dirty="0"/>
+          </a:p>
+        </p:txBody>
+      </p:sp>
+      <p:sp>
+        <p:nvSpPr>
+          <p:cNvPr id="18" name="Shape 16"/>
+          <p:cNvSpPr/>
+          <p:nvPr/>
+        </p:nvSpPr>
+        <p:spPr>
+          <a:xfrm>
+            <a:off x="9817608" y="3351276"/>
+            <a:ext cx="164592" cy="0"/>
+          </a:xfrm>
+          <a:prstGeom prst="line">
+            <a:avLst/>
+          </a:prstGeom>
+          <a:noFill/>
+          <a:ln w="15240">
+            <a:solidFill>
+              <a:srgbClr val="8ABBD8"/>
+            </a:solidFill>
+            <a:prstDash val="solid"/>
+          </a:ln>
+        </p:spPr>
+      </p:sp>
+      <p:sp>
+        <p:nvSpPr>
+          <p:cNvPr id="19" name="Shape 17"/>
+          <p:cNvSpPr/>
+          <p:nvPr/>
+        </p:nvSpPr>
+        <p:spPr>
+          <a:xfrm>
+            <a:off x="8927592" y="3200400"/>
+            <a:ext cx="890016" cy="301752"/>
           </a:xfrm>
           <a:prstGeom prst="roundRect">
             <a:avLst>
-              <a:gd name="adj" fmla="val 9600"/>
+              <a:gd name="adj" fmla="val 24242"/>
+            </a:avLst>
+          </a:prstGeom>
+          <a:solidFill>
+            <a:srgbClr val="2F8A28"/>
+          </a:solidFill>
+          <a:ln w="12700">
+            <a:solidFill>
+              <a:srgbClr val="2F8A28"/>
+            </a:solidFill>
+            <a:prstDash val="solid"/>
+          </a:ln>
+        </p:spPr>
+      </p:sp>
+      <p:sp>
+        <p:nvSpPr>
+          <p:cNvPr id="20" name="Text 18"/>
+          <p:cNvSpPr/>
+          <p:nvPr/>
+        </p:nvSpPr>
+        <p:spPr>
+          <a:xfrm>
+            <a:off x="8964168" y="3273552"/>
+            <a:ext cx="816864" cy="146304"/>
+          </a:xfrm>
+          <a:prstGeom prst="rect">
+            <a:avLst/>
+          </a:prstGeom>
+          <a:noFill/>
+          <a:ln/>
+        </p:spPr>
+        <p:txBody>
+          <a:bodyPr wrap="square" lIns="0" tIns="0" rIns="0" bIns="0" rtlCol="0" anchor="ctr">
+            <a:normAutofit/>
+          </a:bodyPr>
+          <a:lstStyle/>
+          <a:p>
+            <a:pPr algn="ctr" indent="0" marL="0">
+              <a:buNone/>
+            </a:pPr>
+            <a:r>
+              <a:rPr lang="en-US" sz="880" b="1" dirty="0">
+                <a:solidFill>
+                  <a:srgbClr val="FFFFFF"/>
+                </a:solidFill>
+                <a:latin typeface="Aptos" pitchFamily="34" charset="0"/>
+                <a:ea typeface="Aptos" pitchFamily="34" charset="-122"/>
+                <a:cs typeface="Aptos" pitchFamily="34" charset="-120"/>
+              </a:rPr>
+              <a:t>Control</a:t>
+            </a:r>
+            <a:endParaRPr lang="en-US" sz="880" dirty="0"/>
+          </a:p>
+        </p:txBody>
+      </p:sp>
+      <p:sp>
+        <p:nvSpPr>
+          <p:cNvPr id="21" name="Shape 19"/>
+          <p:cNvSpPr/>
+          <p:nvPr/>
+        </p:nvSpPr>
+        <p:spPr>
+          <a:xfrm>
+            <a:off x="9982200" y="3200400"/>
+            <a:ext cx="890016" cy="301752"/>
+          </a:xfrm>
+          <a:prstGeom prst="roundRect">
+            <a:avLst>
+              <a:gd name="adj" fmla="val 24242"/>
+            </a:avLst>
+          </a:prstGeom>
+          <a:solidFill>
+            <a:srgbClr val="6A4CA3"/>
+          </a:solidFill>
+          <a:ln w="12700">
+            <a:solidFill>
+              <a:srgbClr val="6A4CA3"/>
+            </a:solidFill>
+            <a:prstDash val="solid"/>
+          </a:ln>
+        </p:spPr>
+      </p:sp>
+      <p:sp>
+        <p:nvSpPr>
+          <p:cNvPr id="22" name="Text 20"/>
+          <p:cNvSpPr/>
+          <p:nvPr/>
+        </p:nvSpPr>
+        <p:spPr>
+          <a:xfrm>
+            <a:off x="10018776" y="3273552"/>
+            <a:ext cx="816864" cy="146304"/>
+          </a:xfrm>
+          <a:prstGeom prst="rect">
+            <a:avLst/>
+          </a:prstGeom>
+          <a:noFill/>
+          <a:ln/>
+        </p:spPr>
+        <p:txBody>
+          <a:bodyPr wrap="square" lIns="0" tIns="0" rIns="0" bIns="0" rtlCol="0" anchor="ctr">
+            <a:normAutofit/>
+          </a:bodyPr>
+          <a:lstStyle/>
+          <a:p>
+            <a:pPr algn="ctr" indent="0" marL="0">
+              <a:buNone/>
+            </a:pPr>
+            <a:r>
+              <a:rPr lang="en-US" sz="880" b="1" dirty="0">
+                <a:solidFill>
+                  <a:srgbClr val="FFFFFF"/>
+                </a:solidFill>
+                <a:latin typeface="Aptos" pitchFamily="34" charset="0"/>
+                <a:ea typeface="Aptos" pitchFamily="34" charset="-122"/>
+                <a:cs typeface="Aptos" pitchFamily="34" charset="-120"/>
+              </a:rPr>
+              <a:t>Monitor</a:t>
+            </a:r>
+            <a:endParaRPr lang="en-US" sz="880" dirty="0"/>
+          </a:p>
+        </p:txBody>
+      </p:sp>
+      <p:sp>
+        <p:nvSpPr>
+          <p:cNvPr id="23" name="Text 21"/>
+          <p:cNvSpPr/>
+          <p:nvPr/>
+        </p:nvSpPr>
+        <p:spPr>
+          <a:xfrm>
+            <a:off x="7854696" y="3694176"/>
+            <a:ext cx="3035808" cy="365760"/>
+          </a:xfrm>
+          <a:prstGeom prst="rect">
+            <a:avLst/>
+          </a:prstGeom>
+          <a:noFill/>
+          <a:ln/>
+        </p:spPr>
+        <p:txBody>
+          <a:bodyPr wrap="square" lIns="254" tIns="254" rIns="254" bIns="254" rtlCol="0" anchor="t">
+            <a:normAutofit/>
+          </a:bodyPr>
+          <a:lstStyle/>
+          <a:p>
+            <a:pPr indent="0" marL="0">
+              <a:buNone/>
+            </a:pPr>
+            <a:r>
+              <a:rPr lang="en-US" sz="1120" dirty="0">
+                <a:solidFill>
+                  <a:srgbClr val="17364A"/>
+                </a:solidFill>
+                <a:latin typeface="Aptos" pitchFamily="34" charset="0"/>
+                <a:ea typeface="Aptos" pitchFamily="34" charset="-122"/>
+                <a:cs typeface="Aptos" pitchFamily="34" charset="-120"/>
+              </a:rPr>
+              <a:t>Responsible use depends on finding risks early, applying safeguards, and watching for drift or harm over time.</a:t>
+            </a:r>
+            <a:endParaRPr lang="en-US" sz="1120" dirty="0"/>
+          </a:p>
+        </p:txBody>
+      </p:sp>
+      <p:sp>
+        <p:nvSpPr>
+          <p:cNvPr id="24" name="Shape 22"/>
+          <p:cNvSpPr/>
+          <p:nvPr/>
+        </p:nvSpPr>
+        <p:spPr>
+          <a:xfrm>
+            <a:off x="7635240" y="4343400"/>
+            <a:ext cx="3474720" cy="1255471"/>
+          </a:xfrm>
+          <a:prstGeom prst="roundRect">
+            <a:avLst>
+              <a:gd name="adj" fmla="val 8740"/>
             </a:avLst>
           </a:prstGeom>
           <a:solidFill>
@@ -3687,13 +3903,13 @@
       </p:sp>
       <p:sp>
         <p:nvSpPr>
-          <p:cNvPr id="17" name="Text 15"/>
-          <p:cNvSpPr/>
-          <p:nvPr/>
-        </p:nvSpPr>
-        <p:spPr>
-          <a:xfrm>
-            <a:off x="7799832" y="4645152"/>
+          <p:cNvPr id="25" name="Text 23"/>
+          <p:cNvSpPr/>
+          <p:nvPr/>
+        </p:nvSpPr>
+        <p:spPr>
+          <a:xfrm>
+            <a:off x="7799832" y="4489704"/>
             <a:ext cx="3145536" cy="256032"/>
           </a:xfrm>
           <a:prstGeom prst="rect">
@@ -3726,14 +3942,14 @@
       </p:sp>
       <p:sp>
         <p:nvSpPr>
-          <p:cNvPr id="18" name="Text 16"/>
-          <p:cNvSpPr/>
-          <p:nvPr/>
-        </p:nvSpPr>
-        <p:spPr>
-          <a:xfrm>
-            <a:off x="7799832" y="4974336"/>
-            <a:ext cx="3145536" cy="576072"/>
+          <p:cNvPr id="26" name="Text 24"/>
+          <p:cNvSpPr/>
+          <p:nvPr/>
+        </p:nvSpPr>
+        <p:spPr>
+          <a:xfrm>
+            <a:off x="7799832" y="4818888"/>
+            <a:ext cx="3145536" cy="688543"/>
           </a:xfrm>
           <a:prstGeom prst="rect">
             <a:avLst/>
@@ -3759,7 +3975,7 @@
                 <a:ea typeface="Aptos" pitchFamily="34" charset="-122"/>
                 <a:cs typeface="Aptos" pitchFamily="34" charset="-120"/>
               </a:rPr>
-              <a:t>Identify what could go wrong, who could be affected, what safeguards are needed, and what evidence should be reviewed.</a:t>
+              <a:t>Identify what could go wrong, who could be affected, what safeguards are needed, and what evidence should be reviewed before use.</a:t>
             </a:r>
             <a:endParaRPr lang="en-US" sz="1320" dirty="0"/>
           </a:p>
@@ -4128,11 +4344,11 @@
         <p:spPr>
           <a:xfrm>
             <a:off x="7635240" y="1325880"/>
-            <a:ext cx="3474720" cy="1325880"/>
+            <a:ext cx="3474720" cy="1255471"/>
           </a:xfrm>
           <a:prstGeom prst="roundRect">
             <a:avLst>
-              <a:gd name="adj" fmla="val 8276"/>
+              <a:gd name="adj" fmla="val 8740"/>
             </a:avLst>
           </a:prstGeom>
           <a:solidFill>
@@ -4194,7 +4410,7 @@
         <p:spPr>
           <a:xfrm>
             <a:off x="7799832" y="1801368"/>
-            <a:ext cx="3145536" cy="758952"/>
+            <a:ext cx="3145536" cy="688543"/>
           </a:xfrm>
           <a:prstGeom prst="rect">
             <a:avLst/>
@@ -4234,7 +4450,7 @@
         </p:nvSpPr>
         <p:spPr>
           <a:xfrm>
-            <a:off x="7635240" y="2788920"/>
+            <a:off x="7635240" y="2718511"/>
             <a:ext cx="3474720" cy="1536192"/>
           </a:xfrm>
           <a:prstGeom prst="roundRect">
@@ -4261,7 +4477,7 @@
         </p:nvSpPr>
         <p:spPr>
           <a:xfrm>
-            <a:off x="7799832" y="2935224"/>
+            <a:off x="7799832" y="2864815"/>
             <a:ext cx="3145536" cy="256032"/>
           </a:xfrm>
           <a:prstGeom prst="rect">
@@ -4300,7 +4516,7 @@
         </p:nvSpPr>
         <p:spPr>
           <a:xfrm>
-            <a:off x="7818120" y="3300984"/>
+            <a:off x="7818120" y="3230575"/>
             <a:ext cx="3090672" cy="877824"/>
           </a:xfrm>
           <a:prstGeom prst="rect">
@@ -4375,12 +4591,12 @@
         </p:nvSpPr>
         <p:spPr>
           <a:xfrm>
-            <a:off x="7635240" y="4498848"/>
-            <a:ext cx="3474720" cy="1143000"/>
+            <a:off x="7635240" y="4391863"/>
+            <a:ext cx="3474720" cy="1255471"/>
           </a:xfrm>
           <a:prstGeom prst="roundRect">
             <a:avLst>
-              <a:gd name="adj" fmla="val 9600"/>
+              <a:gd name="adj" fmla="val 8740"/>
             </a:avLst>
           </a:prstGeom>
           <a:solidFill>
@@ -4402,7 +4618,7 @@
         </p:nvSpPr>
         <p:spPr>
           <a:xfrm>
-            <a:off x="7799832" y="4645152"/>
+            <a:off x="7799832" y="4538167"/>
             <a:ext cx="3145536" cy="256032"/>
           </a:xfrm>
           <a:prstGeom prst="rect">
@@ -4441,8 +4657,8 @@
         </p:nvSpPr>
         <p:spPr>
           <a:xfrm>
-            <a:off x="7799832" y="4974336"/>
-            <a:ext cx="3145536" cy="576072"/>
+            <a:off x="7799832" y="4867351"/>
+            <a:ext cx="3145536" cy="688543"/>
           </a:xfrm>
           <a:prstGeom prst="rect">
             <a:avLst/>
@@ -4468,7 +4684,7 @@
                 <a:ea typeface="Aptos" pitchFamily="34" charset="-122"/>
                 <a:cs typeface="Aptos" pitchFamily="34" charset="-120"/>
               </a:rPr>
-              <a:t>Identify what could go wrong, who could be affected, what safeguards are needed, and what evidence should be reviewed.</a:t>
+              <a:t>Identify what could go wrong, who could be affected, what safeguards are needed, and what evidence should be reviewed before use.</a:t>
             </a:r>
             <a:endParaRPr lang="en-US" sz="1320" dirty="0"/>
           </a:p>
@@ -4837,11 +5053,11 @@
         <p:spPr>
           <a:xfrm>
             <a:off x="7635240" y="1325880"/>
-            <a:ext cx="3474720" cy="1325880"/>
+            <a:ext cx="3474720" cy="1207008"/>
           </a:xfrm>
           <a:prstGeom prst="roundRect">
             <a:avLst>
-              <a:gd name="adj" fmla="val 8276"/>
+              <a:gd name="adj" fmla="val 9091"/>
             </a:avLst>
           </a:prstGeom>
           <a:solidFill>
@@ -4903,7 +5119,7 @@
         <p:spPr>
           <a:xfrm>
             <a:off x="7799832" y="1801368"/>
-            <a:ext cx="3145536" cy="758952"/>
+            <a:ext cx="3145536" cy="640080"/>
           </a:xfrm>
           <a:prstGeom prst="rect">
             <a:avLst/>
@@ -4943,7 +5159,7 @@
         </p:nvSpPr>
         <p:spPr>
           <a:xfrm>
-            <a:off x="7635240" y="2788920"/>
+            <a:off x="7635240" y="2670048"/>
             <a:ext cx="3474720" cy="1536192"/>
           </a:xfrm>
           <a:prstGeom prst="roundRect">
@@ -4970,7 +5186,7 @@
         </p:nvSpPr>
         <p:spPr>
           <a:xfrm>
-            <a:off x="7799832" y="2935224"/>
+            <a:off x="7799832" y="2816352"/>
             <a:ext cx="3145536" cy="256032"/>
           </a:xfrm>
           <a:prstGeom prst="rect">
@@ -5009,7 +5225,7 @@
         </p:nvSpPr>
         <p:spPr>
           <a:xfrm>
-            <a:off x="7818120" y="3300984"/>
+            <a:off x="7818120" y="3182112"/>
             <a:ext cx="3090672" cy="877824"/>
           </a:xfrm>
           <a:prstGeom prst="rect">
@@ -5084,12 +5300,12 @@
         </p:nvSpPr>
         <p:spPr>
           <a:xfrm>
-            <a:off x="7635240" y="4498848"/>
-            <a:ext cx="3474720" cy="1143000"/>
+            <a:off x="7635240" y="4343400"/>
+            <a:ext cx="3474720" cy="1255471"/>
           </a:xfrm>
           <a:prstGeom prst="roundRect">
             <a:avLst>
-              <a:gd name="adj" fmla="val 9600"/>
+              <a:gd name="adj" fmla="val 8740"/>
             </a:avLst>
           </a:prstGeom>
           <a:solidFill>
@@ -5111,7 +5327,7 @@
         </p:nvSpPr>
         <p:spPr>
           <a:xfrm>
-            <a:off x="7799832" y="4645152"/>
+            <a:off x="7799832" y="4489704"/>
             <a:ext cx="3145536" cy="256032"/>
           </a:xfrm>
           <a:prstGeom prst="rect">
@@ -5150,8 +5366,8 @@
         </p:nvSpPr>
         <p:spPr>
           <a:xfrm>
-            <a:off x="7799832" y="4974336"/>
-            <a:ext cx="3145536" cy="576072"/>
+            <a:off x="7799832" y="4818888"/>
+            <a:ext cx="3145536" cy="688543"/>
           </a:xfrm>
           <a:prstGeom prst="rect">
             <a:avLst/>
@@ -5177,7 +5393,7 @@
                 <a:ea typeface="Aptos" pitchFamily="34" charset="-122"/>
                 <a:cs typeface="Aptos" pitchFamily="34" charset="-120"/>
               </a:rPr>
-              <a:t>Identify what could go wrong, who could be affected, what safeguards are needed, and what evidence should be reviewed.</a:t>
+              <a:t>Identify what could go wrong, who could be affected, what safeguards are needed, and what evidence should be reviewed before use.</a:t>
             </a:r>
             <a:endParaRPr lang="en-US" sz="1320" dirty="0"/>
           </a:p>
@@ -5546,11 +5762,11 @@
         <p:spPr>
           <a:xfrm>
             <a:off x="7635240" y="1325880"/>
-            <a:ext cx="3474720" cy="1325880"/>
+            <a:ext cx="3474720" cy="1207008"/>
           </a:xfrm>
           <a:prstGeom prst="roundRect">
             <a:avLst>
-              <a:gd name="adj" fmla="val 8276"/>
+              <a:gd name="adj" fmla="val 9091"/>
             </a:avLst>
           </a:prstGeom>
           <a:solidFill>
@@ -5612,7 +5828,7 @@
         <p:spPr>
           <a:xfrm>
             <a:off x="7799832" y="1801368"/>
-            <a:ext cx="3145536" cy="758952"/>
+            <a:ext cx="3145536" cy="640080"/>
           </a:xfrm>
           <a:prstGeom prst="rect">
             <a:avLst/>
@@ -5652,7 +5868,7 @@
         </p:nvSpPr>
         <p:spPr>
           <a:xfrm>
-            <a:off x="7635240" y="2788920"/>
+            <a:off x="7635240" y="2670048"/>
             <a:ext cx="3474720" cy="1536192"/>
           </a:xfrm>
           <a:prstGeom prst="roundRect">
@@ -5679,7 +5895,7 @@
         </p:nvSpPr>
         <p:spPr>
           <a:xfrm>
-            <a:off x="7799832" y="2935224"/>
+            <a:off x="7799832" y="2816352"/>
             <a:ext cx="3145536" cy="256032"/>
           </a:xfrm>
           <a:prstGeom prst="rect">
@@ -5718,7 +5934,7 @@
         </p:nvSpPr>
         <p:spPr>
           <a:xfrm>
-            <a:off x="7818120" y="3300984"/>
+            <a:off x="7818120" y="3182112"/>
             <a:ext cx="3090672" cy="877824"/>
           </a:xfrm>
           <a:prstGeom prst="rect">
@@ -5793,12 +6009,12 @@
         </p:nvSpPr>
         <p:spPr>
           <a:xfrm>
-            <a:off x="7635240" y="4498848"/>
-            <a:ext cx="3474720" cy="1143000"/>
+            <a:off x="7635240" y="4343400"/>
+            <a:ext cx="3474720" cy="1255471"/>
           </a:xfrm>
           <a:prstGeom prst="roundRect">
             <a:avLst>
-              <a:gd name="adj" fmla="val 9600"/>
+              <a:gd name="adj" fmla="val 8740"/>
             </a:avLst>
           </a:prstGeom>
           <a:solidFill>
@@ -5820,7 +6036,7 @@
         </p:nvSpPr>
         <p:spPr>
           <a:xfrm>
-            <a:off x="7799832" y="4645152"/>
+            <a:off x="7799832" y="4489704"/>
             <a:ext cx="3145536" cy="256032"/>
           </a:xfrm>
           <a:prstGeom prst="rect">
@@ -5859,8 +6075,8 @@
         </p:nvSpPr>
         <p:spPr>
           <a:xfrm>
-            <a:off x="7799832" y="4974336"/>
-            <a:ext cx="3145536" cy="576072"/>
+            <a:off x="7799832" y="4818888"/>
+            <a:ext cx="3145536" cy="688543"/>
           </a:xfrm>
           <a:prstGeom prst="rect">
             <a:avLst/>
@@ -5886,7 +6102,7 @@
                 <a:ea typeface="Aptos" pitchFamily="34" charset="-122"/>
                 <a:cs typeface="Aptos" pitchFamily="34" charset="-120"/>
               </a:rPr>
-              <a:t>Identify what could go wrong, who could be affected, what safeguards are needed, and what evidence should be reviewed.</a:t>
+              <a:t>Identify what could go wrong, who could be affected, what safeguards are needed, and what evidence should be reviewed before use.</a:t>
             </a:r>
             <a:endParaRPr lang="en-US" sz="1320" dirty="0"/>
           </a:p>
@@ -6255,11 +6471,11 @@
         <p:spPr>
           <a:xfrm>
             <a:off x="7635240" y="1325880"/>
-            <a:ext cx="3474720" cy="1325880"/>
+            <a:ext cx="3474720" cy="1255471"/>
           </a:xfrm>
           <a:prstGeom prst="roundRect">
             <a:avLst>
-              <a:gd name="adj" fmla="val 8276"/>
+              <a:gd name="adj" fmla="val 8740"/>
             </a:avLst>
           </a:prstGeom>
           <a:solidFill>
@@ -6321,7 +6537,7 @@
         <p:spPr>
           <a:xfrm>
             <a:off x="7799832" y="1801368"/>
-            <a:ext cx="3145536" cy="758952"/>
+            <a:ext cx="3145536" cy="688543"/>
           </a:xfrm>
           <a:prstGeom prst="rect">
             <a:avLst/>
@@ -6361,7 +6577,7 @@
         </p:nvSpPr>
         <p:spPr>
           <a:xfrm>
-            <a:off x="7635240" y="2788920"/>
+            <a:off x="7635240" y="2718511"/>
             <a:ext cx="3474720" cy="1536192"/>
           </a:xfrm>
           <a:prstGeom prst="roundRect">
@@ -6388,7 +6604,7 @@
         </p:nvSpPr>
         <p:spPr>
           <a:xfrm>
-            <a:off x="7799832" y="2935224"/>
+            <a:off x="7799832" y="2864815"/>
             <a:ext cx="3145536" cy="256032"/>
           </a:xfrm>
           <a:prstGeom prst="rect">
@@ -6427,7 +6643,7 @@
         </p:nvSpPr>
         <p:spPr>
           <a:xfrm>
-            <a:off x="7818120" y="3300984"/>
+            <a:off x="7818120" y="3230575"/>
             <a:ext cx="3090672" cy="877824"/>
           </a:xfrm>
           <a:prstGeom prst="rect">
@@ -6502,12 +6718,12 @@
         </p:nvSpPr>
         <p:spPr>
           <a:xfrm>
-            <a:off x="7635240" y="4498848"/>
-            <a:ext cx="3474720" cy="1143000"/>
+            <a:off x="7635240" y="4391863"/>
+            <a:ext cx="3474720" cy="1255471"/>
           </a:xfrm>
           <a:prstGeom prst="roundRect">
             <a:avLst>
-              <a:gd name="adj" fmla="val 9600"/>
+              <a:gd name="adj" fmla="val 8740"/>
             </a:avLst>
           </a:prstGeom>
           <a:solidFill>
@@ -6529,7 +6745,7 @@
         </p:nvSpPr>
         <p:spPr>
           <a:xfrm>
-            <a:off x="7799832" y="4645152"/>
+            <a:off x="7799832" y="4538167"/>
             <a:ext cx="3145536" cy="256032"/>
           </a:xfrm>
           <a:prstGeom prst="rect">
@@ -6568,8 +6784,8 @@
         </p:nvSpPr>
         <p:spPr>
           <a:xfrm>
-            <a:off x="7799832" y="4974336"/>
-            <a:ext cx="3145536" cy="576072"/>
+            <a:off x="7799832" y="4867351"/>
+            <a:ext cx="3145536" cy="688543"/>
           </a:xfrm>
           <a:prstGeom prst="rect">
             <a:avLst/>
@@ -6595,7 +6811,7 @@
                 <a:ea typeface="Aptos" pitchFamily="34" charset="-122"/>
                 <a:cs typeface="Aptos" pitchFamily="34" charset="-120"/>
               </a:rPr>
-              <a:t>Identify what could go wrong, who could be affected, what safeguards are needed, and what evidence should be reviewed.</a:t>
+              <a:t>Identify what could go wrong, who could be affected, what safeguards are needed, and what evidence should be reviewed before use.</a:t>
             </a:r>
             <a:endParaRPr lang="en-US" sz="1320" dirty="0"/>
           </a:p>
@@ -6964,11 +7180,11 @@
         <p:spPr>
           <a:xfrm>
             <a:off x="7635240" y="1325880"/>
-            <a:ext cx="3474720" cy="1325880"/>
+            <a:ext cx="3474720" cy="1207008"/>
           </a:xfrm>
           <a:prstGeom prst="roundRect">
             <a:avLst>
-              <a:gd name="adj" fmla="val 8276"/>
+              <a:gd name="adj" fmla="val 9091"/>
             </a:avLst>
           </a:prstGeom>
           <a:solidFill>
@@ -7030,7 +7246,7 @@
         <p:spPr>
           <a:xfrm>
             <a:off x="7799832" y="1801368"/>
-            <a:ext cx="3145536" cy="758952"/>
+            <a:ext cx="3145536" cy="640080"/>
           </a:xfrm>
           <a:prstGeom prst="rect">
             <a:avLst/>
@@ -7070,7 +7286,7 @@
         </p:nvSpPr>
         <p:spPr>
           <a:xfrm>
-            <a:off x="7635240" y="2788920"/>
+            <a:off x="7635240" y="2670048"/>
             <a:ext cx="3474720" cy="1536192"/>
           </a:xfrm>
           <a:prstGeom prst="roundRect">
@@ -7097,7 +7313,7 @@
         </p:nvSpPr>
         <p:spPr>
           <a:xfrm>
-            <a:off x="7799832" y="2935224"/>
+            <a:off x="7799832" y="2816352"/>
             <a:ext cx="3145536" cy="256032"/>
           </a:xfrm>
           <a:prstGeom prst="rect">
@@ -7136,7 +7352,7 @@
         </p:nvSpPr>
         <p:spPr>
           <a:xfrm>
-            <a:off x="7818120" y="3300984"/>
+            <a:off x="7818120" y="3182112"/>
             <a:ext cx="3090672" cy="877824"/>
           </a:xfrm>
           <a:prstGeom prst="rect">
@@ -7211,12 +7427,12 @@
         </p:nvSpPr>
         <p:spPr>
           <a:xfrm>
-            <a:off x="7635240" y="4498848"/>
-            <a:ext cx="3474720" cy="1143000"/>
+            <a:off x="7635240" y="4343400"/>
+            <a:ext cx="3474720" cy="1255471"/>
           </a:xfrm>
           <a:prstGeom prst="roundRect">
             <a:avLst>
-              <a:gd name="adj" fmla="val 9600"/>
+              <a:gd name="adj" fmla="val 8740"/>
             </a:avLst>
           </a:prstGeom>
           <a:solidFill>
@@ -7238,7 +7454,7 @@
         </p:nvSpPr>
         <p:spPr>
           <a:xfrm>
-            <a:off x="7799832" y="4645152"/>
+            <a:off x="7799832" y="4489704"/>
             <a:ext cx="3145536" cy="256032"/>
           </a:xfrm>
           <a:prstGeom prst="rect">
@@ -7277,8 +7493,8 @@
         </p:nvSpPr>
         <p:spPr>
           <a:xfrm>
-            <a:off x="7799832" y="4974336"/>
-            <a:ext cx="3145536" cy="576072"/>
+            <a:off x="7799832" y="4818888"/>
+            <a:ext cx="3145536" cy="688543"/>
           </a:xfrm>
           <a:prstGeom prst="rect">
             <a:avLst/>
@@ -7304,7 +7520,7 @@
                 <a:ea typeface="Aptos" pitchFamily="34" charset="-122"/>
                 <a:cs typeface="Aptos" pitchFamily="34" charset="-120"/>
               </a:rPr>
-              <a:t>Identify what could go wrong, who could be affected, what safeguards are needed, and what evidence should be reviewed.</a:t>
+              <a:t>Identify what could go wrong, who could be affected, what safeguards are needed, and what evidence should be reviewed before use.</a:t>
             </a:r>
             <a:endParaRPr lang="en-US" sz="1320" dirty="0"/>
           </a:p>
@@ -7656,11 +7872,11 @@
         <p:spPr>
           <a:xfrm>
             <a:off x="7635240" y="1325880"/>
-            <a:ext cx="3474720" cy="1325880"/>
+            <a:ext cx="3474720" cy="1207008"/>
           </a:xfrm>
           <a:prstGeom prst="roundRect">
             <a:avLst>
-              <a:gd name="adj" fmla="val 8276"/>
+              <a:gd name="adj" fmla="val 9091"/>
             </a:avLst>
           </a:prstGeom>
           <a:solidFill>
@@ -7722,7 +7938,7 @@
         <p:spPr>
           <a:xfrm>
             <a:off x="7799832" y="1801368"/>
-            <a:ext cx="3145536" cy="758952"/>
+            <a:ext cx="3145536" cy="640080"/>
           </a:xfrm>
           <a:prstGeom prst="rect">
             <a:avLst/>
@@ -7762,7 +7978,7 @@
         </p:nvSpPr>
         <p:spPr>
           <a:xfrm>
-            <a:off x="7635240" y="2788920"/>
+            <a:off x="7635240" y="2670048"/>
             <a:ext cx="3474720" cy="1536192"/>
           </a:xfrm>
           <a:prstGeom prst="roundRect">
@@ -7789,7 +8005,7 @@
         </p:nvSpPr>
         <p:spPr>
           <a:xfrm>
-            <a:off x="7799832" y="2935224"/>
+            <a:off x="7799832" y="2816352"/>
             <a:ext cx="3145536" cy="256032"/>
           </a:xfrm>
           <a:prstGeom prst="rect">
@@ -7828,7 +8044,7 @@
         </p:nvSpPr>
         <p:spPr>
           <a:xfrm>
-            <a:off x="7818120" y="3300984"/>
+            <a:off x="7818120" y="3182112"/>
             <a:ext cx="3090672" cy="877824"/>
           </a:xfrm>
           <a:prstGeom prst="rect">
@@ -7886,12 +8102,12 @@
         </p:nvSpPr>
         <p:spPr>
           <a:xfrm>
-            <a:off x="7635240" y="4498848"/>
-            <a:ext cx="3474720" cy="1143000"/>
+            <a:off x="7635240" y="4343400"/>
+            <a:ext cx="3474720" cy="1255471"/>
           </a:xfrm>
           <a:prstGeom prst="roundRect">
             <a:avLst>
-              <a:gd name="adj" fmla="val 9600"/>
+              <a:gd name="adj" fmla="val 8740"/>
             </a:avLst>
           </a:prstGeom>
           <a:solidFill>
@@ -7913,7 +8129,7 @@
         </p:nvSpPr>
         <p:spPr>
           <a:xfrm>
-            <a:off x="7799832" y="4645152"/>
+            <a:off x="7799832" y="4489704"/>
             <a:ext cx="3145536" cy="256032"/>
           </a:xfrm>
           <a:prstGeom prst="rect">
@@ -7952,8 +8168,8 @@
         </p:nvSpPr>
         <p:spPr>
           <a:xfrm>
-            <a:off x="7799832" y="4974336"/>
-            <a:ext cx="3145536" cy="576072"/>
+            <a:off x="7799832" y="4818888"/>
+            <a:ext cx="3145536" cy="688543"/>
           </a:xfrm>
           <a:prstGeom prst="rect">
             <a:avLst/>
@@ -7979,7 +8195,7 @@
                 <a:ea typeface="Aptos" pitchFamily="34" charset="-122"/>
                 <a:cs typeface="Aptos" pitchFamily="34" charset="-120"/>
               </a:rPr>
-              <a:t>Identify what could go wrong, who could be affected, what safeguards are needed, and what evidence should be reviewed.</a:t>
+              <a:t>Identify what could go wrong, who could be affected, what safeguards are needed, and what evidence should be reviewed before use.</a:t>
             </a:r>
             <a:endParaRPr lang="en-US" sz="1320" dirty="0"/>
           </a:p>
@@ -8348,11 +8564,11 @@
         <p:spPr>
           <a:xfrm>
             <a:off x="7635240" y="1325880"/>
-            <a:ext cx="3474720" cy="1325880"/>
+            <a:ext cx="3474720" cy="1207008"/>
           </a:xfrm>
           <a:prstGeom prst="roundRect">
             <a:avLst>
-              <a:gd name="adj" fmla="val 8276"/>
+              <a:gd name="adj" fmla="val 9091"/>
             </a:avLst>
           </a:prstGeom>
           <a:solidFill>
@@ -8414,7 +8630,7 @@
         <p:spPr>
           <a:xfrm>
             <a:off x="7799832" y="1801368"/>
-            <a:ext cx="3145536" cy="758952"/>
+            <a:ext cx="3145536" cy="640080"/>
           </a:xfrm>
           <a:prstGeom prst="rect">
             <a:avLst/>
@@ -8454,12 +8670,12 @@
         </p:nvSpPr>
         <p:spPr>
           <a:xfrm>
-            <a:off x="7635240" y="2788920"/>
-            <a:ext cx="3474720" cy="1536192"/>
+            <a:off x="7635240" y="2670048"/>
+            <a:ext cx="3474720" cy="1377086"/>
           </a:xfrm>
           <a:prstGeom prst="roundRect">
             <a:avLst>
-              <a:gd name="adj" fmla="val 7143"/>
+              <a:gd name="adj" fmla="val 7968"/>
             </a:avLst>
           </a:prstGeom>
           <a:solidFill>
@@ -8481,7 +8697,7 @@
         </p:nvSpPr>
         <p:spPr>
           <a:xfrm>
-            <a:off x="7799832" y="2935224"/>
+            <a:off x="7799832" y="2816352"/>
             <a:ext cx="3145536" cy="256032"/>
           </a:xfrm>
           <a:prstGeom prst="rect">
@@ -8520,8 +8736,8 @@
         </p:nvSpPr>
         <p:spPr>
           <a:xfrm>
-            <a:off x="7818120" y="3300984"/>
-            <a:ext cx="3090672" cy="877824"/>
+            <a:off x="7818120" y="3182112"/>
+            <a:ext cx="3090672" cy="718718"/>
           </a:xfrm>
           <a:prstGeom prst="rect">
             <a:avLst/>
@@ -8578,12 +8794,12 @@
         </p:nvSpPr>
         <p:spPr>
           <a:xfrm>
-            <a:off x="7635240" y="4498848"/>
-            <a:ext cx="3474720" cy="1143000"/>
+            <a:off x="7635240" y="4184294"/>
+            <a:ext cx="3474720" cy="1466698"/>
           </a:xfrm>
           <a:prstGeom prst="roundRect">
             <a:avLst>
-              <a:gd name="adj" fmla="val 9600"/>
+              <a:gd name="adj" fmla="val 7481"/>
             </a:avLst>
           </a:prstGeom>
           <a:solidFill>
@@ -8605,7 +8821,7 @@
         </p:nvSpPr>
         <p:spPr>
           <a:xfrm>
-            <a:off x="7799832" y="4645152"/>
+            <a:off x="7799832" y="4330598"/>
             <a:ext cx="3145536" cy="256032"/>
           </a:xfrm>
           <a:prstGeom prst="rect">
@@ -8644,8 +8860,8 @@
         </p:nvSpPr>
         <p:spPr>
           <a:xfrm>
-            <a:off x="7799832" y="4974336"/>
-            <a:ext cx="3145536" cy="576072"/>
+            <a:off x="7799832" y="4659782"/>
+            <a:ext cx="3145536" cy="899770"/>
           </a:xfrm>
           <a:prstGeom prst="rect">
             <a:avLst/>
@@ -8671,7 +8887,7 @@
                 <a:ea typeface="Aptos" pitchFamily="34" charset="-122"/>
                 <a:cs typeface="Aptos" pitchFamily="34" charset="-120"/>
               </a:rPr>
-              <a:t>Use the assignment to test whether you can explain the concept, apply it to a realistic public health situation, and.</a:t>
+              <a:t>Use the assignment to test whether you can explain the concept, apply it to a realistic public health situation, and identify what would need review before the work moves forward.</a:t>
             </a:r>
             <a:endParaRPr lang="en-US" sz="1320" dirty="0"/>
           </a:p>
@@ -9040,11 +9256,11 @@
         <p:spPr>
           <a:xfrm>
             <a:off x="7635240" y="1325880"/>
-            <a:ext cx="3474720" cy="1325880"/>
+            <a:ext cx="3474720" cy="1207008"/>
           </a:xfrm>
           <a:prstGeom prst="roundRect">
             <a:avLst>
-              <a:gd name="adj" fmla="val 8276"/>
+              <a:gd name="adj" fmla="val 9091"/>
             </a:avLst>
           </a:prstGeom>
           <a:solidFill>
@@ -9106,7 +9322,7 @@
         <p:spPr>
           <a:xfrm>
             <a:off x="7799832" y="1801368"/>
-            <a:ext cx="3145536" cy="758952"/>
+            <a:ext cx="3145536" cy="640080"/>
           </a:xfrm>
           <a:prstGeom prst="rect">
             <a:avLst/>
@@ -9146,7 +9362,7 @@
         </p:nvSpPr>
         <p:spPr>
           <a:xfrm>
-            <a:off x="7635240" y="2788920"/>
+            <a:off x="7635240" y="2670048"/>
             <a:ext cx="3474720" cy="1536192"/>
           </a:xfrm>
           <a:prstGeom prst="roundRect">
@@ -9173,7 +9389,7 @@
         </p:nvSpPr>
         <p:spPr>
           <a:xfrm>
-            <a:off x="7799832" y="2935224"/>
+            <a:off x="7799832" y="2816352"/>
             <a:ext cx="3145536" cy="256032"/>
           </a:xfrm>
           <a:prstGeom prst="rect">
@@ -9212,7 +9428,7 @@
         </p:nvSpPr>
         <p:spPr>
           <a:xfrm>
-            <a:off x="7818120" y="3300984"/>
+            <a:off x="7818120" y="3182112"/>
             <a:ext cx="3090672" cy="877824"/>
           </a:xfrm>
           <a:prstGeom prst="rect">
@@ -9287,12 +9503,12 @@
         </p:nvSpPr>
         <p:spPr>
           <a:xfrm>
-            <a:off x="7635240" y="4498848"/>
-            <a:ext cx="3474720" cy="1143000"/>
+            <a:off x="7635240" y="4343400"/>
+            <a:ext cx="3474720" cy="1255471"/>
           </a:xfrm>
           <a:prstGeom prst="roundRect">
             <a:avLst>
-              <a:gd name="adj" fmla="val 9600"/>
+              <a:gd name="adj" fmla="val 8740"/>
             </a:avLst>
           </a:prstGeom>
           <a:solidFill>
@@ -9314,7 +9530,7 @@
         </p:nvSpPr>
         <p:spPr>
           <a:xfrm>
-            <a:off x="7799832" y="4645152"/>
+            <a:off x="7799832" y="4489704"/>
             <a:ext cx="3145536" cy="256032"/>
           </a:xfrm>
           <a:prstGeom prst="rect">
@@ -9353,8 +9569,8 @@
         </p:nvSpPr>
         <p:spPr>
           <a:xfrm>
-            <a:off x="7799832" y="4974336"/>
-            <a:ext cx="3145536" cy="576072"/>
+            <a:off x="7799832" y="4818888"/>
+            <a:ext cx="3145536" cy="688543"/>
           </a:xfrm>
           <a:prstGeom prst="rect">
             <a:avLst/>
@@ -9380,7 +9596,7 @@
                 <a:ea typeface="Aptos" pitchFamily="34" charset="-122"/>
                 <a:cs typeface="Aptos" pitchFamily="34" charset="-120"/>
               </a:rPr>
-              <a:t>Identify what could go wrong, who could be affected, what safeguards are needed, and what evidence should be reviewed.</a:t>
+              <a:t>Identify what could go wrong, who could be affected, what safeguards are needed, and what evidence should be reviewed before use.</a:t>
             </a:r>
             <a:endParaRPr lang="en-US" sz="1320" dirty="0"/>
           </a:p>
@@ -9715,11 +9931,11 @@
         <p:spPr>
           <a:xfrm>
             <a:off x="7635240" y="1325880"/>
-            <a:ext cx="3474720" cy="1325880"/>
+            <a:ext cx="3474720" cy="1207008"/>
           </a:xfrm>
           <a:prstGeom prst="roundRect">
             <a:avLst>
-              <a:gd name="adj" fmla="val 8276"/>
+              <a:gd name="adj" fmla="val 9091"/>
             </a:avLst>
           </a:prstGeom>
           <a:solidFill>
@@ -9781,7 +9997,7 @@
         <p:spPr>
           <a:xfrm>
             <a:off x="7799832" y="1801368"/>
-            <a:ext cx="3145536" cy="758952"/>
+            <a:ext cx="3145536" cy="640080"/>
           </a:xfrm>
           <a:prstGeom prst="rect">
             <a:avLst/>
@@ -9821,7 +10037,7 @@
         </p:nvSpPr>
         <p:spPr>
           <a:xfrm>
-            <a:off x="7635240" y="2788920"/>
+            <a:off x="7635240" y="2670048"/>
             <a:ext cx="3474720" cy="1536192"/>
           </a:xfrm>
           <a:prstGeom prst="roundRect">
@@ -9848,7 +10064,7 @@
         </p:nvSpPr>
         <p:spPr>
           <a:xfrm>
-            <a:off x="7799832" y="2935224"/>
+            <a:off x="7799832" y="2816352"/>
             <a:ext cx="3145536" cy="256032"/>
           </a:xfrm>
           <a:prstGeom prst="rect">
@@ -9887,7 +10103,7 @@
         </p:nvSpPr>
         <p:spPr>
           <a:xfrm>
-            <a:off x="7818120" y="3300984"/>
+            <a:off x="7818120" y="3182112"/>
             <a:ext cx="3090672" cy="877824"/>
           </a:xfrm>
           <a:prstGeom prst="rect">
@@ -9928,12 +10144,12 @@
         </p:nvSpPr>
         <p:spPr>
           <a:xfrm>
-            <a:off x="7635240" y="4498848"/>
-            <a:ext cx="3474720" cy="1143000"/>
+            <a:off x="7635240" y="4343400"/>
+            <a:ext cx="3474720" cy="1255471"/>
           </a:xfrm>
           <a:prstGeom prst="roundRect">
             <a:avLst>
-              <a:gd name="adj" fmla="val 9600"/>
+              <a:gd name="adj" fmla="val 8740"/>
             </a:avLst>
           </a:prstGeom>
           <a:solidFill>
@@ -9955,7 +10171,7 @@
         </p:nvSpPr>
         <p:spPr>
           <a:xfrm>
-            <a:off x="7799832" y="4645152"/>
+            <a:off x="7799832" y="4489704"/>
             <a:ext cx="3145536" cy="256032"/>
           </a:xfrm>
           <a:prstGeom prst="rect">
@@ -9994,8 +10210,8 @@
         </p:nvSpPr>
         <p:spPr>
           <a:xfrm>
-            <a:off x="7799832" y="4974336"/>
-            <a:ext cx="3145536" cy="576072"/>
+            <a:off x="7799832" y="4818888"/>
+            <a:ext cx="3145536" cy="688543"/>
           </a:xfrm>
           <a:prstGeom prst="rect">
             <a:avLst/>
@@ -10021,7 +10237,7 @@
                 <a:ea typeface="Aptos" pitchFamily="34" charset="-122"/>
                 <a:cs typeface="Aptos" pitchFamily="34" charset="-120"/>
               </a:rPr>
-              <a:t>Identify what could go wrong, who could be affected, what safeguards are needed, and what evidence should be reviewed.</a:t>
+              <a:t>Identify what could go wrong, who could be affected, what safeguards are needed, and what evidence should be reviewed before use.</a:t>
             </a:r>
             <a:endParaRPr lang="en-US" sz="1320" dirty="0"/>
           </a:p>
@@ -10992,11 +11208,11 @@
         <p:spPr>
           <a:xfrm>
             <a:off x="7635240" y="1325880"/>
-            <a:ext cx="3474720" cy="1325880"/>
+            <a:ext cx="3474720" cy="1207008"/>
           </a:xfrm>
           <a:prstGeom prst="roundRect">
             <a:avLst>
-              <a:gd name="adj" fmla="val 8276"/>
+              <a:gd name="adj" fmla="val 9091"/>
             </a:avLst>
           </a:prstGeom>
           <a:solidFill>
@@ -11058,7 +11274,7 @@
         <p:spPr>
           <a:xfrm>
             <a:off x="7799832" y="1801368"/>
-            <a:ext cx="3145536" cy="758952"/>
+            <a:ext cx="3145536" cy="640080"/>
           </a:xfrm>
           <a:prstGeom prst="rect">
             <a:avLst/>
@@ -11098,12 +11314,12 @@
         </p:nvSpPr>
         <p:spPr>
           <a:xfrm>
-            <a:off x="7635240" y="2788920"/>
-            <a:ext cx="3474720" cy="1536192"/>
+            <a:off x="7635240" y="2670048"/>
+            <a:ext cx="3474720" cy="1377086"/>
           </a:xfrm>
           <a:prstGeom prst="roundRect">
             <a:avLst>
-              <a:gd name="adj" fmla="val 7143"/>
+              <a:gd name="adj" fmla="val 7968"/>
             </a:avLst>
           </a:prstGeom>
           <a:solidFill>
@@ -11125,7 +11341,7 @@
         </p:nvSpPr>
         <p:spPr>
           <a:xfrm>
-            <a:off x="7799832" y="2935224"/>
+            <a:off x="7799832" y="2816352"/>
             <a:ext cx="3145536" cy="256032"/>
           </a:xfrm>
           <a:prstGeom prst="rect">
@@ -11164,8 +11380,8 @@
         </p:nvSpPr>
         <p:spPr>
           <a:xfrm>
-            <a:off x="7818120" y="3300984"/>
-            <a:ext cx="3090672" cy="877824"/>
+            <a:off x="7818120" y="3182112"/>
+            <a:ext cx="3090672" cy="718718"/>
           </a:xfrm>
           <a:prstGeom prst="rect">
             <a:avLst/>
@@ -11239,12 +11455,12 @@
         </p:nvSpPr>
         <p:spPr>
           <a:xfrm>
-            <a:off x="7635240" y="4498848"/>
-            <a:ext cx="3474720" cy="1143000"/>
+            <a:off x="7635240" y="4184294"/>
+            <a:ext cx="3474720" cy="1466698"/>
           </a:xfrm>
           <a:prstGeom prst="roundRect">
             <a:avLst>
-              <a:gd name="adj" fmla="val 9600"/>
+              <a:gd name="adj" fmla="val 7481"/>
             </a:avLst>
           </a:prstGeom>
           <a:solidFill>
@@ -11266,7 +11482,7 @@
         </p:nvSpPr>
         <p:spPr>
           <a:xfrm>
-            <a:off x="7799832" y="4645152"/>
+            <a:off x="7799832" y="4330598"/>
             <a:ext cx="3145536" cy="256032"/>
           </a:xfrm>
           <a:prstGeom prst="rect">
@@ -11305,8 +11521,8 @@
         </p:nvSpPr>
         <p:spPr>
           <a:xfrm>
-            <a:off x="7799832" y="4974336"/>
-            <a:ext cx="3145536" cy="576072"/>
+            <a:off x="7799832" y="4659782"/>
+            <a:ext cx="3145536" cy="899770"/>
           </a:xfrm>
           <a:prstGeom prst="rect">
             <a:avLst/>
@@ -11332,7 +11548,7 @@
                 <a:ea typeface="Aptos" pitchFamily="34" charset="-122"/>
                 <a:cs typeface="Aptos" pitchFamily="34" charset="-120"/>
               </a:rPr>
-              <a:t>Use the assignment to test whether you can explain the concept, apply it to a realistic public health situation, and.</a:t>
+              <a:t>Use the assignment to test whether you can explain the concept, apply it to a realistic public health situation, and identify what would need review before the work moves forward.</a:t>
             </a:r>
             <a:endParaRPr lang="en-US" sz="1320" dirty="0"/>
           </a:p>
@@ -11701,11 +11917,11 @@
         <p:spPr>
           <a:xfrm>
             <a:off x="7635240" y="1325880"/>
-            <a:ext cx="3474720" cy="1325880"/>
+            <a:ext cx="3474720" cy="1207008"/>
           </a:xfrm>
           <a:prstGeom prst="roundRect">
             <a:avLst>
-              <a:gd name="adj" fmla="val 8276"/>
+              <a:gd name="adj" fmla="val 9091"/>
             </a:avLst>
           </a:prstGeom>
           <a:solidFill>
@@ -11767,7 +11983,7 @@
         <p:spPr>
           <a:xfrm>
             <a:off x="7799832" y="1801368"/>
-            <a:ext cx="3145536" cy="758952"/>
+            <a:ext cx="3145536" cy="640080"/>
           </a:xfrm>
           <a:prstGeom prst="rect">
             <a:avLst/>
@@ -11807,12 +12023,12 @@
         </p:nvSpPr>
         <p:spPr>
           <a:xfrm>
-            <a:off x="7635240" y="2788920"/>
-            <a:ext cx="3474720" cy="1536192"/>
+            <a:off x="7635240" y="2670048"/>
+            <a:ext cx="3474720" cy="1377086"/>
           </a:xfrm>
           <a:prstGeom prst="roundRect">
             <a:avLst>
-              <a:gd name="adj" fmla="val 7143"/>
+              <a:gd name="adj" fmla="val 7968"/>
             </a:avLst>
           </a:prstGeom>
           <a:solidFill>
@@ -11834,7 +12050,7 @@
         </p:nvSpPr>
         <p:spPr>
           <a:xfrm>
-            <a:off x="7799832" y="2935224"/>
+            <a:off x="7799832" y="2816352"/>
             <a:ext cx="3145536" cy="256032"/>
           </a:xfrm>
           <a:prstGeom prst="rect">
@@ -11873,8 +12089,8 @@
         </p:nvSpPr>
         <p:spPr>
           <a:xfrm>
-            <a:off x="7818120" y="3300984"/>
-            <a:ext cx="3090672" cy="877824"/>
+            <a:off x="7818120" y="3182112"/>
+            <a:ext cx="3090672" cy="718718"/>
           </a:xfrm>
           <a:prstGeom prst="rect">
             <a:avLst/>
@@ -11948,12 +12164,12 @@
         </p:nvSpPr>
         <p:spPr>
           <a:xfrm>
-            <a:off x="7635240" y="4498848"/>
-            <a:ext cx="3474720" cy="1143000"/>
+            <a:off x="7635240" y="4184294"/>
+            <a:ext cx="3474720" cy="1466698"/>
           </a:xfrm>
           <a:prstGeom prst="roundRect">
             <a:avLst>
-              <a:gd name="adj" fmla="val 9600"/>
+              <a:gd name="adj" fmla="val 7481"/>
             </a:avLst>
           </a:prstGeom>
           <a:solidFill>
@@ -11975,7 +12191,7 @@
         </p:nvSpPr>
         <p:spPr>
           <a:xfrm>
-            <a:off x="7799832" y="4645152"/>
+            <a:off x="7799832" y="4330598"/>
             <a:ext cx="3145536" cy="256032"/>
           </a:xfrm>
           <a:prstGeom prst="rect">
@@ -12014,8 +12230,8 @@
         </p:nvSpPr>
         <p:spPr>
           <a:xfrm>
-            <a:off x="7799832" y="4974336"/>
-            <a:ext cx="3145536" cy="576072"/>
+            <a:off x="7799832" y="4659782"/>
+            <a:ext cx="3145536" cy="899770"/>
           </a:xfrm>
           <a:prstGeom prst="rect">
             <a:avLst/>
@@ -12041,7 +12257,7 @@
                 <a:ea typeface="Aptos" pitchFamily="34" charset="-122"/>
                 <a:cs typeface="Aptos" pitchFamily="34" charset="-120"/>
               </a:rPr>
-              <a:t>Use the assignment to test whether you can explain the concept, apply it to a realistic public health situation, and.</a:t>
+              <a:t>Use the assignment to test whether you can explain the concept, apply it to a realistic public health situation, and identify what would need review before the work moves forward.</a:t>
             </a:r>
             <a:endParaRPr lang="en-US" sz="1320" dirty="0"/>
           </a:p>
@@ -12410,11 +12626,11 @@
         <p:spPr>
           <a:xfrm>
             <a:off x="7635240" y="1325880"/>
-            <a:ext cx="3474720" cy="1325880"/>
+            <a:ext cx="3474720" cy="1207008"/>
           </a:xfrm>
           <a:prstGeom prst="roundRect">
             <a:avLst>
-              <a:gd name="adj" fmla="val 8276"/>
+              <a:gd name="adj" fmla="val 9091"/>
             </a:avLst>
           </a:prstGeom>
           <a:solidFill>
@@ -12476,7 +12692,7 @@
         <p:spPr>
           <a:xfrm>
             <a:off x="7799832" y="1801368"/>
-            <a:ext cx="3145536" cy="758952"/>
+            <a:ext cx="3145536" cy="640080"/>
           </a:xfrm>
           <a:prstGeom prst="rect">
             <a:avLst/>
@@ -12516,7 +12732,7 @@
         </p:nvSpPr>
         <p:spPr>
           <a:xfrm>
-            <a:off x="7635240" y="2788920"/>
+            <a:off x="7635240" y="2670048"/>
             <a:ext cx="3474720" cy="1536192"/>
           </a:xfrm>
           <a:prstGeom prst="roundRect">
@@ -12543,7 +12759,7 @@
         </p:nvSpPr>
         <p:spPr>
           <a:xfrm>
-            <a:off x="7799832" y="2935224"/>
+            <a:off x="7799832" y="2816352"/>
             <a:ext cx="3145536" cy="256032"/>
           </a:xfrm>
           <a:prstGeom prst="rect">
@@ -12582,7 +12798,7 @@
         </p:nvSpPr>
         <p:spPr>
           <a:xfrm>
-            <a:off x="7818120" y="3300984"/>
+            <a:off x="7818120" y="3182112"/>
             <a:ext cx="3090672" cy="877824"/>
           </a:xfrm>
           <a:prstGeom prst="rect">
@@ -12640,12 +12856,12 @@
         </p:nvSpPr>
         <p:spPr>
           <a:xfrm>
-            <a:off x="7635240" y="4498848"/>
-            <a:ext cx="3474720" cy="1143000"/>
+            <a:off x="7635240" y="4343400"/>
+            <a:ext cx="3474720" cy="1255471"/>
           </a:xfrm>
           <a:prstGeom prst="roundRect">
             <a:avLst>
-              <a:gd name="adj" fmla="val 9600"/>
+              <a:gd name="adj" fmla="val 8740"/>
             </a:avLst>
           </a:prstGeom>
           <a:solidFill>
@@ -12667,7 +12883,7 @@
         </p:nvSpPr>
         <p:spPr>
           <a:xfrm>
-            <a:off x="7799832" y="4645152"/>
+            <a:off x="7799832" y="4489704"/>
             <a:ext cx="3145536" cy="256032"/>
           </a:xfrm>
           <a:prstGeom prst="rect">
@@ -12706,8 +12922,8 @@
         </p:nvSpPr>
         <p:spPr>
           <a:xfrm>
-            <a:off x="7799832" y="4974336"/>
-            <a:ext cx="3145536" cy="576072"/>
+            <a:off x="7799832" y="4818888"/>
+            <a:ext cx="3145536" cy="688543"/>
           </a:xfrm>
           <a:prstGeom prst="rect">
             <a:avLst/>
@@ -12733,7 +12949,7 @@
                 <a:ea typeface="Aptos" pitchFamily="34" charset="-122"/>
                 <a:cs typeface="Aptos" pitchFamily="34" charset="-120"/>
               </a:rPr>
-              <a:t>Identify what could go wrong, who could be affected, what safeguards are needed, and what evidence should be reviewed.</a:t>
+              <a:t>Identify what could go wrong, who could be affected, what safeguards are needed, and what evidence should be reviewed before use.</a:t>
             </a:r>
             <a:endParaRPr lang="en-US" sz="1320" dirty="0"/>
           </a:p>
@@ -13211,7 +13427,7 @@
                 <a:ea typeface="Aptos" pitchFamily="34" charset="-122"/>
                 <a:cs typeface="Aptos" pitchFamily="34" charset="-120"/>
               </a:rPr>
-              <a:t>Use the related plays to identify decisions, participants, timing, approvals, and documentation needed for responsible.</a:t>
+              <a:t>Use the related plays to identify decisions, participants, timing, approvals, and documentation needed for responsible implementation.</a:t>
             </a:r>
             <a:endParaRPr lang="en-US" sz="1320" dirty="0"/>
           </a:p>
@@ -13830,7 +14046,7 @@
                 <a:ea typeface="Aptos" pitchFamily="34" charset="-122"/>
                 <a:cs typeface="Aptos" pitchFamily="34" charset="-120"/>
               </a:rPr>
-              <a:t>Use linked tools when your department needs a structured worksheet, template, checklist, review process, or.</a:t>
+              <a:t>Use linked tools when your department needs a structured worksheet, template, checklist, review process, or documentation artifact.</a:t>
             </a:r>
             <a:endParaRPr lang="en-US" sz="1320" dirty="0"/>
           </a:p>
@@ -14340,11 +14556,11 @@
         <p:spPr>
           <a:xfrm>
             <a:off x="7635240" y="1325880"/>
-            <a:ext cx="3474720" cy="1325880"/>
+            <a:ext cx="3474720" cy="1207008"/>
           </a:xfrm>
           <a:prstGeom prst="roundRect">
             <a:avLst>
-              <a:gd name="adj" fmla="val 8276"/>
+              <a:gd name="adj" fmla="val 9091"/>
             </a:avLst>
           </a:prstGeom>
           <a:solidFill>
@@ -14406,7 +14622,7 @@
         <p:spPr>
           <a:xfrm>
             <a:off x="7799832" y="1801368"/>
-            <a:ext cx="3145536" cy="758952"/>
+            <a:ext cx="3145536" cy="640080"/>
           </a:xfrm>
           <a:prstGeom prst="rect">
             <a:avLst/>
@@ -14446,12 +14662,12 @@
         </p:nvSpPr>
         <p:spPr>
           <a:xfrm>
-            <a:off x="7635240" y="2788920"/>
-            <a:ext cx="3474720" cy="1536192"/>
+            <a:off x="7635240" y="2670048"/>
+            <a:ext cx="3474720" cy="1377086"/>
           </a:xfrm>
           <a:prstGeom prst="roundRect">
             <a:avLst>
-              <a:gd name="adj" fmla="val 7143"/>
+              <a:gd name="adj" fmla="val 7968"/>
             </a:avLst>
           </a:prstGeom>
           <a:solidFill>
@@ -14473,7 +14689,7 @@
         </p:nvSpPr>
         <p:spPr>
           <a:xfrm>
-            <a:off x="7799832" y="2935224"/>
+            <a:off x="7799832" y="2816352"/>
             <a:ext cx="3145536" cy="256032"/>
           </a:xfrm>
           <a:prstGeom prst="rect">
@@ -14512,8 +14728,8 @@
         </p:nvSpPr>
         <p:spPr>
           <a:xfrm>
-            <a:off x="7818120" y="3300984"/>
-            <a:ext cx="3090672" cy="877824"/>
+            <a:off x="7818120" y="3182112"/>
+            <a:ext cx="3090672" cy="718718"/>
           </a:xfrm>
           <a:prstGeom prst="rect">
             <a:avLst/>
@@ -14587,12 +14803,12 @@
         </p:nvSpPr>
         <p:spPr>
           <a:xfrm>
-            <a:off x="7635240" y="4498848"/>
-            <a:ext cx="3474720" cy="1143000"/>
+            <a:off x="7635240" y="4184294"/>
+            <a:ext cx="3474720" cy="1466698"/>
           </a:xfrm>
           <a:prstGeom prst="roundRect">
             <a:avLst>
-              <a:gd name="adj" fmla="val 9600"/>
+              <a:gd name="adj" fmla="val 7481"/>
             </a:avLst>
           </a:prstGeom>
           <a:solidFill>
@@ -14614,7 +14830,7 @@
         </p:nvSpPr>
         <p:spPr>
           <a:xfrm>
-            <a:off x="7799832" y="4645152"/>
+            <a:off x="7799832" y="4330598"/>
             <a:ext cx="3145536" cy="256032"/>
           </a:xfrm>
           <a:prstGeom prst="rect">
@@ -14653,8 +14869,8 @@
         </p:nvSpPr>
         <p:spPr>
           <a:xfrm>
-            <a:off x="7799832" y="4974336"/>
-            <a:ext cx="3145536" cy="576072"/>
+            <a:off x="7799832" y="4659782"/>
+            <a:ext cx="3145536" cy="899770"/>
           </a:xfrm>
           <a:prstGeom prst="rect">
             <a:avLst/>
@@ -14680,7 +14896,7 @@
                 <a:ea typeface="Aptos" pitchFamily="34" charset="-122"/>
                 <a:cs typeface="Aptos" pitchFamily="34" charset="-120"/>
               </a:rPr>
-              <a:t>Use the assignment to test whether you can explain the concept, apply it to a realistic public health situation, and.</a:t>
+              <a:t>Use the assignment to test whether you can explain the concept, apply it to a realistic public health situation, and identify what would need review before the work moves forward.</a:t>
             </a:r>
             <a:endParaRPr lang="en-US" sz="1320" dirty="0"/>
           </a:p>
@@ -15015,11 +15231,11 @@
         <p:spPr>
           <a:xfrm>
             <a:off x="7635240" y="1325880"/>
-            <a:ext cx="3474720" cy="1325880"/>
+            <a:ext cx="3474720" cy="1207008"/>
           </a:xfrm>
           <a:prstGeom prst="roundRect">
             <a:avLst>
-              <a:gd name="adj" fmla="val 8276"/>
+              <a:gd name="adj" fmla="val 9091"/>
             </a:avLst>
           </a:prstGeom>
           <a:solidFill>
@@ -15081,7 +15297,7 @@
         <p:spPr>
           <a:xfrm>
             <a:off x="7799832" y="1801368"/>
-            <a:ext cx="3145536" cy="758952"/>
+            <a:ext cx="3145536" cy="640080"/>
           </a:xfrm>
           <a:prstGeom prst="rect">
             <a:avLst/>
@@ -15121,12 +15337,12 @@
         </p:nvSpPr>
         <p:spPr>
           <a:xfrm>
-            <a:off x="7635240" y="2788920"/>
-            <a:ext cx="3474720" cy="1536192"/>
+            <a:off x="7635240" y="2670048"/>
+            <a:ext cx="3474720" cy="1377086"/>
           </a:xfrm>
           <a:prstGeom prst="roundRect">
             <a:avLst>
-              <a:gd name="adj" fmla="val 7143"/>
+              <a:gd name="adj" fmla="val 7968"/>
             </a:avLst>
           </a:prstGeom>
           <a:solidFill>
@@ -15148,7 +15364,7 @@
         </p:nvSpPr>
         <p:spPr>
           <a:xfrm>
-            <a:off x="7799832" y="2935224"/>
+            <a:off x="7799832" y="2816352"/>
             <a:ext cx="3145536" cy="256032"/>
           </a:xfrm>
           <a:prstGeom prst="rect">
@@ -15187,8 +15403,8 @@
         </p:nvSpPr>
         <p:spPr>
           <a:xfrm>
-            <a:off x="7818120" y="3300984"/>
-            <a:ext cx="3090672" cy="877824"/>
+            <a:off x="7818120" y="3182112"/>
+            <a:ext cx="3090672" cy="718718"/>
           </a:xfrm>
           <a:prstGeom prst="rect">
             <a:avLst/>
@@ -15228,12 +15444,12 @@
         </p:nvSpPr>
         <p:spPr>
           <a:xfrm>
-            <a:off x="7635240" y="4498848"/>
-            <a:ext cx="3474720" cy="1143000"/>
+            <a:off x="7635240" y="4184294"/>
+            <a:ext cx="3474720" cy="1466698"/>
           </a:xfrm>
           <a:prstGeom prst="roundRect">
             <a:avLst>
-              <a:gd name="adj" fmla="val 9600"/>
+              <a:gd name="adj" fmla="val 7481"/>
             </a:avLst>
           </a:prstGeom>
           <a:solidFill>
@@ -15255,7 +15471,7 @@
         </p:nvSpPr>
         <p:spPr>
           <a:xfrm>
-            <a:off x="7799832" y="4645152"/>
+            <a:off x="7799832" y="4330598"/>
             <a:ext cx="3145536" cy="256032"/>
           </a:xfrm>
           <a:prstGeom prst="rect">
@@ -15294,8 +15510,8 @@
         </p:nvSpPr>
         <p:spPr>
           <a:xfrm>
-            <a:off x="7799832" y="4974336"/>
-            <a:ext cx="3145536" cy="576072"/>
+            <a:off x="7799832" y="4659782"/>
+            <a:ext cx="3145536" cy="899770"/>
           </a:xfrm>
           <a:prstGeom prst="rect">
             <a:avLst/>
@@ -15321,7 +15537,7 @@
                 <a:ea typeface="Aptos" pitchFamily="34" charset="-122"/>
                 <a:cs typeface="Aptos" pitchFamily="34" charset="-120"/>
               </a:rPr>
-              <a:t>Use the assignment to test whether you can explain the concept, apply it to a realistic public health situation, and.</a:t>
+              <a:t>Use the assignment to test whether you can explain the concept, apply it to a realistic public health situation, and identify what would need review before the work moves forward.</a:t>
             </a:r>
             <a:endParaRPr lang="en-US" sz="1320" dirty="0"/>
           </a:p>
@@ -15690,11 +15906,11 @@
         <p:spPr>
           <a:xfrm>
             <a:off x="7635240" y="1325880"/>
-            <a:ext cx="3474720" cy="1325880"/>
+            <a:ext cx="3474720" cy="1255471"/>
           </a:xfrm>
           <a:prstGeom prst="roundRect">
             <a:avLst>
-              <a:gd name="adj" fmla="val 8276"/>
+              <a:gd name="adj" fmla="val 8740"/>
             </a:avLst>
           </a:prstGeom>
           <a:solidFill>
@@ -15756,7 +15972,7 @@
         <p:spPr>
           <a:xfrm>
             <a:off x="7799832" y="1801368"/>
-            <a:ext cx="3145536" cy="758952"/>
+            <a:ext cx="3145536" cy="688543"/>
           </a:xfrm>
           <a:prstGeom prst="rect">
             <a:avLst/>
@@ -15796,7 +16012,7 @@
         </p:nvSpPr>
         <p:spPr>
           <a:xfrm>
-            <a:off x="7635240" y="2788920"/>
+            <a:off x="7635240" y="2718511"/>
             <a:ext cx="3474720" cy="1536192"/>
           </a:xfrm>
           <a:prstGeom prst="roundRect">
@@ -15823,8 +16039,8 @@
         </p:nvSpPr>
         <p:spPr>
           <a:xfrm>
-            <a:off x="7799832" y="2935224"/>
-            <a:ext cx="3145536" cy="256032"/>
+            <a:off x="7799832" y="2846527"/>
+            <a:ext cx="3145536" cy="237744"/>
           </a:xfrm>
           <a:prstGeom prst="rect">
             <a:avLst/>
@@ -15840,7 +16056,7 @@
               <a:buNone/>
             </a:pPr>
             <a:r>
-              <a:rPr lang="en-US" sz="1300" b="1" dirty="0">
+              <a:rPr lang="en-US" sz="1250" b="1" dirty="0">
                 <a:solidFill>
                   <a:srgbClr val="0068B7"/>
                 </a:solidFill>
@@ -15848,101 +16064,317 @@
                 <a:ea typeface="Aptos" pitchFamily="34" charset="-122"/>
                 <a:cs typeface="Aptos" pitchFamily="34" charset="-120"/>
               </a:rPr>
-              <a:t>Concept checkpoints</a:t>
-            </a:r>
-            <a:endParaRPr lang="en-US" sz="1300" dirty="0"/>
-          </a:p>
-        </p:txBody>
-      </p:sp>
-      <p:sp>
-        <p:nvSpPr>
-          <p:cNvPr id="15" name="Text 13"/>
-          <p:cNvSpPr/>
-          <p:nvPr/>
-        </p:nvSpPr>
-        <p:spPr>
-          <a:xfrm>
-            <a:off x="7818120" y="3300984"/>
-            <a:ext cx="3090672" cy="877824"/>
-          </a:xfrm>
-          <a:prstGeom prst="rect">
-            <a:avLst/>
-          </a:prstGeom>
-          <a:noFill/>
-          <a:ln/>
-        </p:spPr>
-        <p:txBody>
-          <a:bodyPr wrap="square" lIns="508" tIns="508" rIns="508" bIns="508" rtlCol="0" anchor="t">
+              <a:t>Risk control loop</a:t>
+            </a:r>
+            <a:endParaRPr lang="en-US" sz="1250" dirty="0"/>
+          </a:p>
+        </p:txBody>
+      </p:sp>
+      <p:sp>
+        <p:nvSpPr>
+          <p:cNvPr id="15" name="Shape 13"/>
+          <p:cNvSpPr/>
+          <p:nvPr/>
+        </p:nvSpPr>
+        <p:spPr>
+          <a:xfrm>
+            <a:off x="8763000" y="3399739"/>
+            <a:ext cx="164592" cy="0"/>
+          </a:xfrm>
+          <a:prstGeom prst="line">
+            <a:avLst/>
+          </a:prstGeom>
+          <a:noFill/>
+          <a:ln w="15240">
+            <a:solidFill>
+              <a:srgbClr val="8ABBD8"/>
+            </a:solidFill>
+            <a:prstDash val="solid"/>
+          </a:ln>
+        </p:spPr>
+      </p:sp>
+      <p:sp>
+        <p:nvSpPr>
+          <p:cNvPr id="16" name="Shape 14"/>
+          <p:cNvSpPr/>
+          <p:nvPr/>
+        </p:nvSpPr>
+        <p:spPr>
+          <a:xfrm>
+            <a:off x="7872984" y="3248863"/>
+            <a:ext cx="890016" cy="301752"/>
+          </a:xfrm>
+          <a:prstGeom prst="roundRect">
+            <a:avLst>
+              <a:gd name="adj" fmla="val 24242"/>
+            </a:avLst>
+          </a:prstGeom>
+          <a:solidFill>
+            <a:srgbClr val="0068B7"/>
+          </a:solidFill>
+          <a:ln w="12700">
+            <a:solidFill>
+              <a:srgbClr val="0068B7"/>
+            </a:solidFill>
+            <a:prstDash val="solid"/>
+          </a:ln>
+        </p:spPr>
+      </p:sp>
+      <p:sp>
+        <p:nvSpPr>
+          <p:cNvPr id="17" name="Text 15"/>
+          <p:cNvSpPr/>
+          <p:nvPr/>
+        </p:nvSpPr>
+        <p:spPr>
+          <a:xfrm>
+            <a:off x="7909560" y="3322015"/>
+            <a:ext cx="816864" cy="146304"/>
+          </a:xfrm>
+          <a:prstGeom prst="rect">
+            <a:avLst/>
+          </a:prstGeom>
+          <a:noFill/>
+          <a:ln/>
+        </p:spPr>
+        <p:txBody>
+          <a:bodyPr wrap="square" lIns="0" tIns="0" rIns="0" bIns="0" rtlCol="0" anchor="ctr">
             <a:normAutofit/>
           </a:bodyPr>
           <a:lstStyle/>
           <a:p>
-            <a:pPr indent="0" marL="0">
-              <a:buNone/>
-            </a:pPr>
-            <a:r>
-              <a:rPr lang="en-US" sz="1220" dirty="0">
-                <a:solidFill>
-                  <a:srgbClr val="17364A"/>
-                </a:solidFill>
-                <a:latin typeface="Aptos" pitchFamily="34" charset="0"/>
-                <a:ea typeface="Aptos" pitchFamily="34" charset="-122"/>
-                <a:cs typeface="Aptos" pitchFamily="34" charset="-120"/>
-              </a:rPr>
-              <a:t>Model validation is the process of determining whether an AI tool.</a:t>
-            </a:r>
-            <a:endParaRPr lang="en-US" sz="1220" dirty="0"/>
-          </a:p>
-          <a:p>
-            <a:pPr indent="0" marL="0">
-              <a:buNone/>
-            </a:pPr>
-            <a:r>
-              <a:rPr lang="en-US" sz="1220" dirty="0">
-                <a:solidFill>
-                  <a:srgbClr val="17364A"/>
-                </a:solidFill>
-                <a:latin typeface="Aptos" pitchFamily="34" charset="0"/>
-                <a:ea typeface="Aptos" pitchFamily="34" charset="-122"/>
-                <a:cs typeface="Aptos" pitchFamily="34" charset="-120"/>
-              </a:rPr>
-              <a:t>Advanced validation asks whether it works well enough, for whom,.</a:t>
-            </a:r>
-            <a:endParaRPr lang="en-US" sz="1220" dirty="0"/>
-          </a:p>
-          <a:p>
-            <a:pPr indent="0" marL="0">
-              <a:buNone/>
-            </a:pPr>
-            <a:r>
-              <a:rPr lang="en-US" sz="1220" dirty="0">
-                <a:solidFill>
-                  <a:srgbClr val="17364A"/>
-                </a:solidFill>
-                <a:latin typeface="Aptos" pitchFamily="34" charset="0"/>
-                <a:ea typeface="Aptos" pitchFamily="34" charset="-122"/>
-                <a:cs typeface="Aptos" pitchFamily="34" charset="-120"/>
-              </a:rPr>
-              <a:t>This module extends foundational validation content by focusing on.</a:t>
-            </a:r>
-            <a:endParaRPr lang="en-US" sz="1220" dirty="0"/>
-          </a:p>
-        </p:txBody>
-      </p:sp>
-      <p:sp>
-        <p:nvSpPr>
-          <p:cNvPr id="16" name="Shape 14"/>
-          <p:cNvSpPr/>
-          <p:nvPr/>
-        </p:nvSpPr>
-        <p:spPr>
-          <a:xfrm>
-            <a:off x="7635240" y="4498848"/>
-            <a:ext cx="3474720" cy="1143000"/>
+            <a:pPr algn="ctr" indent="0" marL="0">
+              <a:buNone/>
+            </a:pPr>
+            <a:r>
+              <a:rPr lang="en-US" sz="880" b="1" dirty="0">
+                <a:solidFill>
+                  <a:srgbClr val="FFFFFF"/>
+                </a:solidFill>
+                <a:latin typeface="Aptos" pitchFamily="34" charset="0"/>
+                <a:ea typeface="Aptos" pitchFamily="34" charset="-122"/>
+                <a:cs typeface="Aptos" pitchFamily="34" charset="-120"/>
+              </a:rPr>
+              <a:t>Identify</a:t>
+            </a:r>
+            <a:endParaRPr lang="en-US" sz="880" dirty="0"/>
+          </a:p>
+        </p:txBody>
+      </p:sp>
+      <p:sp>
+        <p:nvSpPr>
+          <p:cNvPr id="18" name="Shape 16"/>
+          <p:cNvSpPr/>
+          <p:nvPr/>
+        </p:nvSpPr>
+        <p:spPr>
+          <a:xfrm>
+            <a:off x="9817608" y="3399739"/>
+            <a:ext cx="164592" cy="0"/>
+          </a:xfrm>
+          <a:prstGeom prst="line">
+            <a:avLst/>
+          </a:prstGeom>
+          <a:noFill/>
+          <a:ln w="15240">
+            <a:solidFill>
+              <a:srgbClr val="8ABBD8"/>
+            </a:solidFill>
+            <a:prstDash val="solid"/>
+          </a:ln>
+        </p:spPr>
+      </p:sp>
+      <p:sp>
+        <p:nvSpPr>
+          <p:cNvPr id="19" name="Shape 17"/>
+          <p:cNvSpPr/>
+          <p:nvPr/>
+        </p:nvSpPr>
+        <p:spPr>
+          <a:xfrm>
+            <a:off x="8927592" y="3248863"/>
+            <a:ext cx="890016" cy="301752"/>
           </a:xfrm>
           <a:prstGeom prst="roundRect">
             <a:avLst>
-              <a:gd name="adj" fmla="val 9600"/>
+              <a:gd name="adj" fmla="val 24242"/>
+            </a:avLst>
+          </a:prstGeom>
+          <a:solidFill>
+            <a:srgbClr val="2F8A28"/>
+          </a:solidFill>
+          <a:ln w="12700">
+            <a:solidFill>
+              <a:srgbClr val="2F8A28"/>
+            </a:solidFill>
+            <a:prstDash val="solid"/>
+          </a:ln>
+        </p:spPr>
+      </p:sp>
+      <p:sp>
+        <p:nvSpPr>
+          <p:cNvPr id="20" name="Text 18"/>
+          <p:cNvSpPr/>
+          <p:nvPr/>
+        </p:nvSpPr>
+        <p:spPr>
+          <a:xfrm>
+            <a:off x="8964168" y="3322015"/>
+            <a:ext cx="816864" cy="146304"/>
+          </a:xfrm>
+          <a:prstGeom prst="rect">
+            <a:avLst/>
+          </a:prstGeom>
+          <a:noFill/>
+          <a:ln/>
+        </p:spPr>
+        <p:txBody>
+          <a:bodyPr wrap="square" lIns="0" tIns="0" rIns="0" bIns="0" rtlCol="0" anchor="ctr">
+            <a:normAutofit/>
+          </a:bodyPr>
+          <a:lstStyle/>
+          <a:p>
+            <a:pPr algn="ctr" indent="0" marL="0">
+              <a:buNone/>
+            </a:pPr>
+            <a:r>
+              <a:rPr lang="en-US" sz="880" b="1" dirty="0">
+                <a:solidFill>
+                  <a:srgbClr val="FFFFFF"/>
+                </a:solidFill>
+                <a:latin typeface="Aptos" pitchFamily="34" charset="0"/>
+                <a:ea typeface="Aptos" pitchFamily="34" charset="-122"/>
+                <a:cs typeface="Aptos" pitchFamily="34" charset="-120"/>
+              </a:rPr>
+              <a:t>Control</a:t>
+            </a:r>
+            <a:endParaRPr lang="en-US" sz="880" dirty="0"/>
+          </a:p>
+        </p:txBody>
+      </p:sp>
+      <p:sp>
+        <p:nvSpPr>
+          <p:cNvPr id="21" name="Shape 19"/>
+          <p:cNvSpPr/>
+          <p:nvPr/>
+        </p:nvSpPr>
+        <p:spPr>
+          <a:xfrm>
+            <a:off x="9982200" y="3248863"/>
+            <a:ext cx="890016" cy="301752"/>
+          </a:xfrm>
+          <a:prstGeom prst="roundRect">
+            <a:avLst>
+              <a:gd name="adj" fmla="val 24242"/>
+            </a:avLst>
+          </a:prstGeom>
+          <a:solidFill>
+            <a:srgbClr val="6A4CA3"/>
+          </a:solidFill>
+          <a:ln w="12700">
+            <a:solidFill>
+              <a:srgbClr val="6A4CA3"/>
+            </a:solidFill>
+            <a:prstDash val="solid"/>
+          </a:ln>
+        </p:spPr>
+      </p:sp>
+      <p:sp>
+        <p:nvSpPr>
+          <p:cNvPr id="22" name="Text 20"/>
+          <p:cNvSpPr/>
+          <p:nvPr/>
+        </p:nvSpPr>
+        <p:spPr>
+          <a:xfrm>
+            <a:off x="10018776" y="3322015"/>
+            <a:ext cx="816864" cy="146304"/>
+          </a:xfrm>
+          <a:prstGeom prst="rect">
+            <a:avLst/>
+          </a:prstGeom>
+          <a:noFill/>
+          <a:ln/>
+        </p:spPr>
+        <p:txBody>
+          <a:bodyPr wrap="square" lIns="0" tIns="0" rIns="0" bIns="0" rtlCol="0" anchor="ctr">
+            <a:normAutofit/>
+          </a:bodyPr>
+          <a:lstStyle/>
+          <a:p>
+            <a:pPr algn="ctr" indent="0" marL="0">
+              <a:buNone/>
+            </a:pPr>
+            <a:r>
+              <a:rPr lang="en-US" sz="880" b="1" dirty="0">
+                <a:solidFill>
+                  <a:srgbClr val="FFFFFF"/>
+                </a:solidFill>
+                <a:latin typeface="Aptos" pitchFamily="34" charset="0"/>
+                <a:ea typeface="Aptos" pitchFamily="34" charset="-122"/>
+                <a:cs typeface="Aptos" pitchFamily="34" charset="-120"/>
+              </a:rPr>
+              <a:t>Monitor</a:t>
+            </a:r>
+            <a:endParaRPr lang="en-US" sz="880" dirty="0"/>
+          </a:p>
+        </p:txBody>
+      </p:sp>
+      <p:sp>
+        <p:nvSpPr>
+          <p:cNvPr id="23" name="Text 21"/>
+          <p:cNvSpPr/>
+          <p:nvPr/>
+        </p:nvSpPr>
+        <p:spPr>
+          <a:xfrm>
+            <a:off x="7854696" y="3742639"/>
+            <a:ext cx="3035808" cy="365760"/>
+          </a:xfrm>
+          <a:prstGeom prst="rect">
+            <a:avLst/>
+          </a:prstGeom>
+          <a:noFill/>
+          <a:ln/>
+        </p:spPr>
+        <p:txBody>
+          <a:bodyPr wrap="square" lIns="254" tIns="254" rIns="254" bIns="254" rtlCol="0" anchor="t">
+            <a:normAutofit/>
+          </a:bodyPr>
+          <a:lstStyle/>
+          <a:p>
+            <a:pPr indent="0" marL="0">
+              <a:buNone/>
+            </a:pPr>
+            <a:r>
+              <a:rPr lang="en-US" sz="1120" dirty="0">
+                <a:solidFill>
+                  <a:srgbClr val="17364A"/>
+                </a:solidFill>
+                <a:latin typeface="Aptos" pitchFamily="34" charset="0"/>
+                <a:ea typeface="Aptos" pitchFamily="34" charset="-122"/>
+                <a:cs typeface="Aptos" pitchFamily="34" charset="-120"/>
+              </a:rPr>
+              <a:t>Responsible use depends on finding risks early, applying safeguards, and watching for drift or harm over time.</a:t>
+            </a:r>
+            <a:endParaRPr lang="en-US" sz="1120" dirty="0"/>
+          </a:p>
+        </p:txBody>
+      </p:sp>
+      <p:sp>
+        <p:nvSpPr>
+          <p:cNvPr id="24" name="Shape 22"/>
+          <p:cNvSpPr/>
+          <p:nvPr/>
+        </p:nvSpPr>
+        <p:spPr>
+          <a:xfrm>
+            <a:off x="7635240" y="4391863"/>
+            <a:ext cx="3474720" cy="1255471"/>
+          </a:xfrm>
+          <a:prstGeom prst="roundRect">
+            <a:avLst>
+              <a:gd name="adj" fmla="val 8740"/>
             </a:avLst>
           </a:prstGeom>
           <a:solidFill>
@@ -15958,13 +16390,13 @@
       </p:sp>
       <p:sp>
         <p:nvSpPr>
-          <p:cNvPr id="17" name="Text 15"/>
-          <p:cNvSpPr/>
-          <p:nvPr/>
-        </p:nvSpPr>
-        <p:spPr>
-          <a:xfrm>
-            <a:off x="7799832" y="4645152"/>
+          <p:cNvPr id="25" name="Text 23"/>
+          <p:cNvSpPr/>
+          <p:nvPr/>
+        </p:nvSpPr>
+        <p:spPr>
+          <a:xfrm>
+            <a:off x="7799832" y="4538167"/>
             <a:ext cx="3145536" cy="256032"/>
           </a:xfrm>
           <a:prstGeom prst="rect">
@@ -15997,14 +16429,14 @@
       </p:sp>
       <p:sp>
         <p:nvSpPr>
-          <p:cNvPr id="18" name="Text 16"/>
-          <p:cNvSpPr/>
-          <p:nvPr/>
-        </p:nvSpPr>
-        <p:spPr>
-          <a:xfrm>
-            <a:off x="7799832" y="4974336"/>
-            <a:ext cx="3145536" cy="576072"/>
+          <p:cNvPr id="26" name="Text 24"/>
+          <p:cNvSpPr/>
+          <p:nvPr/>
+        </p:nvSpPr>
+        <p:spPr>
+          <a:xfrm>
+            <a:off x="7799832" y="4867351"/>
+            <a:ext cx="3145536" cy="688543"/>
           </a:xfrm>
           <a:prstGeom prst="rect">
             <a:avLst/>
@@ -16030,7 +16462,7 @@
                 <a:ea typeface="Aptos" pitchFamily="34" charset="-122"/>
                 <a:cs typeface="Aptos" pitchFamily="34" charset="-120"/>
               </a:rPr>
-              <a:t>Identify what could go wrong, who could be affected, what safeguards are needed, and what evidence should be reviewed.</a:t>
+              <a:t>Identify what could go wrong, who could be affected, what safeguards are needed, and what evidence should be reviewed before use.</a:t>
             </a:r>
             <a:endParaRPr lang="en-US" sz="1320" dirty="0"/>
           </a:p>
@@ -16399,11 +16831,11 @@
         <p:spPr>
           <a:xfrm>
             <a:off x="7635240" y="1325880"/>
-            <a:ext cx="3474720" cy="1325880"/>
+            <a:ext cx="3474720" cy="1255471"/>
           </a:xfrm>
           <a:prstGeom prst="roundRect">
             <a:avLst>
-              <a:gd name="adj" fmla="val 8276"/>
+              <a:gd name="adj" fmla="val 8740"/>
             </a:avLst>
           </a:prstGeom>
           <a:solidFill>
@@ -16465,7 +16897,7 @@
         <p:spPr>
           <a:xfrm>
             <a:off x="7799832" y="1801368"/>
-            <a:ext cx="3145536" cy="758952"/>
+            <a:ext cx="3145536" cy="688543"/>
           </a:xfrm>
           <a:prstGeom prst="rect">
             <a:avLst/>
@@ -16505,7 +16937,7 @@
         </p:nvSpPr>
         <p:spPr>
           <a:xfrm>
-            <a:off x="7635240" y="2788920"/>
+            <a:off x="7635240" y="2718511"/>
             <a:ext cx="3474720" cy="1536192"/>
           </a:xfrm>
           <a:prstGeom prst="roundRect">
@@ -16532,8 +16964,8 @@
         </p:nvSpPr>
         <p:spPr>
           <a:xfrm>
-            <a:off x="7799832" y="2935224"/>
-            <a:ext cx="3145536" cy="256032"/>
+            <a:off x="7799832" y="2846527"/>
+            <a:ext cx="3145536" cy="237744"/>
           </a:xfrm>
           <a:prstGeom prst="rect">
             <a:avLst/>
@@ -16549,7 +16981,7 @@
               <a:buNone/>
             </a:pPr>
             <a:r>
-              <a:rPr lang="en-US" sz="1300" b="1" dirty="0">
+              <a:rPr lang="en-US" sz="1250" b="1" dirty="0">
                 <a:solidFill>
                   <a:srgbClr val="0068B7"/>
                 </a:solidFill>
@@ -16557,101 +16989,317 @@
                 <a:ea typeface="Aptos" pitchFamily="34" charset="-122"/>
                 <a:cs typeface="Aptos" pitchFamily="34" charset="-120"/>
               </a:rPr>
-              <a:t>Concept checkpoints</a:t>
-            </a:r>
-            <a:endParaRPr lang="en-US" sz="1300" dirty="0"/>
-          </a:p>
-        </p:txBody>
-      </p:sp>
-      <p:sp>
-        <p:nvSpPr>
-          <p:cNvPr id="15" name="Text 13"/>
-          <p:cNvSpPr/>
-          <p:nvPr/>
-        </p:nvSpPr>
-        <p:spPr>
-          <a:xfrm>
-            <a:off x="7818120" y="3300984"/>
-            <a:ext cx="3090672" cy="877824"/>
-          </a:xfrm>
-          <a:prstGeom prst="rect">
-            <a:avLst/>
-          </a:prstGeom>
-          <a:noFill/>
-          <a:ln/>
-        </p:spPr>
-        <p:txBody>
-          <a:bodyPr wrap="square" lIns="508" tIns="508" rIns="508" bIns="508" rtlCol="0" anchor="t">
+              <a:t>Risk control loop</a:t>
+            </a:r>
+            <a:endParaRPr lang="en-US" sz="1250" dirty="0"/>
+          </a:p>
+        </p:txBody>
+      </p:sp>
+      <p:sp>
+        <p:nvSpPr>
+          <p:cNvPr id="15" name="Shape 13"/>
+          <p:cNvSpPr/>
+          <p:nvPr/>
+        </p:nvSpPr>
+        <p:spPr>
+          <a:xfrm>
+            <a:off x="8763000" y="3399739"/>
+            <a:ext cx="164592" cy="0"/>
+          </a:xfrm>
+          <a:prstGeom prst="line">
+            <a:avLst/>
+          </a:prstGeom>
+          <a:noFill/>
+          <a:ln w="15240">
+            <a:solidFill>
+              <a:srgbClr val="8ABBD8"/>
+            </a:solidFill>
+            <a:prstDash val="solid"/>
+          </a:ln>
+        </p:spPr>
+      </p:sp>
+      <p:sp>
+        <p:nvSpPr>
+          <p:cNvPr id="16" name="Shape 14"/>
+          <p:cNvSpPr/>
+          <p:nvPr/>
+        </p:nvSpPr>
+        <p:spPr>
+          <a:xfrm>
+            <a:off x="7872984" y="3248863"/>
+            <a:ext cx="890016" cy="301752"/>
+          </a:xfrm>
+          <a:prstGeom prst="roundRect">
+            <a:avLst>
+              <a:gd name="adj" fmla="val 24242"/>
+            </a:avLst>
+          </a:prstGeom>
+          <a:solidFill>
+            <a:srgbClr val="0068B7"/>
+          </a:solidFill>
+          <a:ln w="12700">
+            <a:solidFill>
+              <a:srgbClr val="0068B7"/>
+            </a:solidFill>
+            <a:prstDash val="solid"/>
+          </a:ln>
+        </p:spPr>
+      </p:sp>
+      <p:sp>
+        <p:nvSpPr>
+          <p:cNvPr id="17" name="Text 15"/>
+          <p:cNvSpPr/>
+          <p:nvPr/>
+        </p:nvSpPr>
+        <p:spPr>
+          <a:xfrm>
+            <a:off x="7909560" y="3322015"/>
+            <a:ext cx="816864" cy="146304"/>
+          </a:xfrm>
+          <a:prstGeom prst="rect">
+            <a:avLst/>
+          </a:prstGeom>
+          <a:noFill/>
+          <a:ln/>
+        </p:spPr>
+        <p:txBody>
+          <a:bodyPr wrap="square" lIns="0" tIns="0" rIns="0" bIns="0" rtlCol="0" anchor="ctr">
             <a:normAutofit/>
           </a:bodyPr>
           <a:lstStyle/>
           <a:p>
-            <a:pPr indent="0" marL="0">
-              <a:buNone/>
-            </a:pPr>
-            <a:r>
-              <a:rPr lang="en-US" sz="1220" dirty="0">
-                <a:solidFill>
-                  <a:srgbClr val="17364A"/>
-                </a:solidFill>
-                <a:latin typeface="Aptos" pitchFamily="34" charset="0"/>
-                <a:ea typeface="Aptos" pitchFamily="34" charset="-122"/>
-                <a:cs typeface="Aptos" pitchFamily="34" charset="-120"/>
-              </a:rPr>
-              <a:t>Validation matters because public health AI tools can appear.</a:t>
-            </a:r>
-            <a:endParaRPr lang="en-US" sz="1220" dirty="0"/>
-          </a:p>
-          <a:p>
-            <a:pPr indent="0" marL="0">
-              <a:buNone/>
-            </a:pPr>
-            <a:r>
-              <a:rPr lang="en-US" sz="1220" dirty="0">
-                <a:solidFill>
-                  <a:srgbClr val="17364A"/>
-                </a:solidFill>
-                <a:latin typeface="Aptos" pitchFamily="34" charset="0"/>
-                <a:ea typeface="Aptos" pitchFamily="34" charset="-122"/>
-                <a:cs typeface="Aptos" pitchFamily="34" charset="-120"/>
-              </a:rPr>
-              <a:t>A polished dashboard, confident generated text, or high overall.</a:t>
-            </a:r>
-            <a:endParaRPr lang="en-US" sz="1220" dirty="0"/>
-          </a:p>
-          <a:p>
-            <a:pPr indent="0" marL="0">
-              <a:buNone/>
-            </a:pPr>
-            <a:r>
-              <a:rPr lang="en-US" sz="1220" dirty="0">
-                <a:solidFill>
-                  <a:srgbClr val="17364A"/>
-                </a:solidFill>
-                <a:latin typeface="Aptos" pitchFamily="34" charset="0"/>
-                <a:ea typeface="Aptos" pitchFamily="34" charset="-122"/>
-                <a:cs typeface="Aptos" pitchFamily="34" charset="-120"/>
-              </a:rPr>
-              <a:t>Public health staff need to evaluate performance in relation to.</a:t>
-            </a:r>
-            <a:endParaRPr lang="en-US" sz="1220" dirty="0"/>
-          </a:p>
-        </p:txBody>
-      </p:sp>
-      <p:sp>
-        <p:nvSpPr>
-          <p:cNvPr id="16" name="Shape 14"/>
-          <p:cNvSpPr/>
-          <p:nvPr/>
-        </p:nvSpPr>
-        <p:spPr>
-          <a:xfrm>
-            <a:off x="7635240" y="4498848"/>
-            <a:ext cx="3474720" cy="1143000"/>
+            <a:pPr algn="ctr" indent="0" marL="0">
+              <a:buNone/>
+            </a:pPr>
+            <a:r>
+              <a:rPr lang="en-US" sz="880" b="1" dirty="0">
+                <a:solidFill>
+                  <a:srgbClr val="FFFFFF"/>
+                </a:solidFill>
+                <a:latin typeface="Aptos" pitchFamily="34" charset="0"/>
+                <a:ea typeface="Aptos" pitchFamily="34" charset="-122"/>
+                <a:cs typeface="Aptos" pitchFamily="34" charset="-120"/>
+              </a:rPr>
+              <a:t>Identify</a:t>
+            </a:r>
+            <a:endParaRPr lang="en-US" sz="880" dirty="0"/>
+          </a:p>
+        </p:txBody>
+      </p:sp>
+      <p:sp>
+        <p:nvSpPr>
+          <p:cNvPr id="18" name="Shape 16"/>
+          <p:cNvSpPr/>
+          <p:nvPr/>
+        </p:nvSpPr>
+        <p:spPr>
+          <a:xfrm>
+            <a:off x="9817608" y="3399739"/>
+            <a:ext cx="164592" cy="0"/>
+          </a:xfrm>
+          <a:prstGeom prst="line">
+            <a:avLst/>
+          </a:prstGeom>
+          <a:noFill/>
+          <a:ln w="15240">
+            <a:solidFill>
+              <a:srgbClr val="8ABBD8"/>
+            </a:solidFill>
+            <a:prstDash val="solid"/>
+          </a:ln>
+        </p:spPr>
+      </p:sp>
+      <p:sp>
+        <p:nvSpPr>
+          <p:cNvPr id="19" name="Shape 17"/>
+          <p:cNvSpPr/>
+          <p:nvPr/>
+        </p:nvSpPr>
+        <p:spPr>
+          <a:xfrm>
+            <a:off x="8927592" y="3248863"/>
+            <a:ext cx="890016" cy="301752"/>
           </a:xfrm>
           <a:prstGeom prst="roundRect">
             <a:avLst>
-              <a:gd name="adj" fmla="val 9600"/>
+              <a:gd name="adj" fmla="val 24242"/>
+            </a:avLst>
+          </a:prstGeom>
+          <a:solidFill>
+            <a:srgbClr val="2F8A28"/>
+          </a:solidFill>
+          <a:ln w="12700">
+            <a:solidFill>
+              <a:srgbClr val="2F8A28"/>
+            </a:solidFill>
+            <a:prstDash val="solid"/>
+          </a:ln>
+        </p:spPr>
+      </p:sp>
+      <p:sp>
+        <p:nvSpPr>
+          <p:cNvPr id="20" name="Text 18"/>
+          <p:cNvSpPr/>
+          <p:nvPr/>
+        </p:nvSpPr>
+        <p:spPr>
+          <a:xfrm>
+            <a:off x="8964168" y="3322015"/>
+            <a:ext cx="816864" cy="146304"/>
+          </a:xfrm>
+          <a:prstGeom prst="rect">
+            <a:avLst/>
+          </a:prstGeom>
+          <a:noFill/>
+          <a:ln/>
+        </p:spPr>
+        <p:txBody>
+          <a:bodyPr wrap="square" lIns="0" tIns="0" rIns="0" bIns="0" rtlCol="0" anchor="ctr">
+            <a:normAutofit/>
+          </a:bodyPr>
+          <a:lstStyle/>
+          <a:p>
+            <a:pPr algn="ctr" indent="0" marL="0">
+              <a:buNone/>
+            </a:pPr>
+            <a:r>
+              <a:rPr lang="en-US" sz="880" b="1" dirty="0">
+                <a:solidFill>
+                  <a:srgbClr val="FFFFFF"/>
+                </a:solidFill>
+                <a:latin typeface="Aptos" pitchFamily="34" charset="0"/>
+                <a:ea typeface="Aptos" pitchFamily="34" charset="-122"/>
+                <a:cs typeface="Aptos" pitchFamily="34" charset="-120"/>
+              </a:rPr>
+              <a:t>Control</a:t>
+            </a:r>
+            <a:endParaRPr lang="en-US" sz="880" dirty="0"/>
+          </a:p>
+        </p:txBody>
+      </p:sp>
+      <p:sp>
+        <p:nvSpPr>
+          <p:cNvPr id="21" name="Shape 19"/>
+          <p:cNvSpPr/>
+          <p:nvPr/>
+        </p:nvSpPr>
+        <p:spPr>
+          <a:xfrm>
+            <a:off x="9982200" y="3248863"/>
+            <a:ext cx="890016" cy="301752"/>
+          </a:xfrm>
+          <a:prstGeom prst="roundRect">
+            <a:avLst>
+              <a:gd name="adj" fmla="val 24242"/>
+            </a:avLst>
+          </a:prstGeom>
+          <a:solidFill>
+            <a:srgbClr val="6A4CA3"/>
+          </a:solidFill>
+          <a:ln w="12700">
+            <a:solidFill>
+              <a:srgbClr val="6A4CA3"/>
+            </a:solidFill>
+            <a:prstDash val="solid"/>
+          </a:ln>
+        </p:spPr>
+      </p:sp>
+      <p:sp>
+        <p:nvSpPr>
+          <p:cNvPr id="22" name="Text 20"/>
+          <p:cNvSpPr/>
+          <p:nvPr/>
+        </p:nvSpPr>
+        <p:spPr>
+          <a:xfrm>
+            <a:off x="10018776" y="3322015"/>
+            <a:ext cx="816864" cy="146304"/>
+          </a:xfrm>
+          <a:prstGeom prst="rect">
+            <a:avLst/>
+          </a:prstGeom>
+          <a:noFill/>
+          <a:ln/>
+        </p:spPr>
+        <p:txBody>
+          <a:bodyPr wrap="square" lIns="0" tIns="0" rIns="0" bIns="0" rtlCol="0" anchor="ctr">
+            <a:normAutofit/>
+          </a:bodyPr>
+          <a:lstStyle/>
+          <a:p>
+            <a:pPr algn="ctr" indent="0" marL="0">
+              <a:buNone/>
+            </a:pPr>
+            <a:r>
+              <a:rPr lang="en-US" sz="880" b="1" dirty="0">
+                <a:solidFill>
+                  <a:srgbClr val="FFFFFF"/>
+                </a:solidFill>
+                <a:latin typeface="Aptos" pitchFamily="34" charset="0"/>
+                <a:ea typeface="Aptos" pitchFamily="34" charset="-122"/>
+                <a:cs typeface="Aptos" pitchFamily="34" charset="-120"/>
+              </a:rPr>
+              <a:t>Monitor</a:t>
+            </a:r>
+            <a:endParaRPr lang="en-US" sz="880" dirty="0"/>
+          </a:p>
+        </p:txBody>
+      </p:sp>
+      <p:sp>
+        <p:nvSpPr>
+          <p:cNvPr id="23" name="Text 21"/>
+          <p:cNvSpPr/>
+          <p:nvPr/>
+        </p:nvSpPr>
+        <p:spPr>
+          <a:xfrm>
+            <a:off x="7854696" y="3742639"/>
+            <a:ext cx="3035808" cy="365760"/>
+          </a:xfrm>
+          <a:prstGeom prst="rect">
+            <a:avLst/>
+          </a:prstGeom>
+          <a:noFill/>
+          <a:ln/>
+        </p:spPr>
+        <p:txBody>
+          <a:bodyPr wrap="square" lIns="254" tIns="254" rIns="254" bIns="254" rtlCol="0" anchor="t">
+            <a:normAutofit/>
+          </a:bodyPr>
+          <a:lstStyle/>
+          <a:p>
+            <a:pPr indent="0" marL="0">
+              <a:buNone/>
+            </a:pPr>
+            <a:r>
+              <a:rPr lang="en-US" sz="1120" dirty="0">
+                <a:solidFill>
+                  <a:srgbClr val="17364A"/>
+                </a:solidFill>
+                <a:latin typeface="Aptos" pitchFamily="34" charset="0"/>
+                <a:ea typeface="Aptos" pitchFamily="34" charset="-122"/>
+                <a:cs typeface="Aptos" pitchFamily="34" charset="-120"/>
+              </a:rPr>
+              <a:t>Responsible use depends on finding risks early, applying safeguards, and watching for drift or harm over time.</a:t>
+            </a:r>
+            <a:endParaRPr lang="en-US" sz="1120" dirty="0"/>
+          </a:p>
+        </p:txBody>
+      </p:sp>
+      <p:sp>
+        <p:nvSpPr>
+          <p:cNvPr id="24" name="Shape 22"/>
+          <p:cNvSpPr/>
+          <p:nvPr/>
+        </p:nvSpPr>
+        <p:spPr>
+          <a:xfrm>
+            <a:off x="7635240" y="4391863"/>
+            <a:ext cx="3474720" cy="1255471"/>
+          </a:xfrm>
+          <a:prstGeom prst="roundRect">
+            <a:avLst>
+              <a:gd name="adj" fmla="val 8740"/>
             </a:avLst>
           </a:prstGeom>
           <a:solidFill>
@@ -16667,13 +17315,13 @@
       </p:sp>
       <p:sp>
         <p:nvSpPr>
-          <p:cNvPr id="17" name="Text 15"/>
-          <p:cNvSpPr/>
-          <p:nvPr/>
-        </p:nvSpPr>
-        <p:spPr>
-          <a:xfrm>
-            <a:off x="7799832" y="4645152"/>
+          <p:cNvPr id="25" name="Text 23"/>
+          <p:cNvSpPr/>
+          <p:nvPr/>
+        </p:nvSpPr>
+        <p:spPr>
+          <a:xfrm>
+            <a:off x="7799832" y="4538167"/>
             <a:ext cx="3145536" cy="256032"/>
           </a:xfrm>
           <a:prstGeom prst="rect">
@@ -16706,14 +17354,14 @@
       </p:sp>
       <p:sp>
         <p:nvSpPr>
-          <p:cNvPr id="18" name="Text 16"/>
-          <p:cNvSpPr/>
-          <p:nvPr/>
-        </p:nvSpPr>
-        <p:spPr>
-          <a:xfrm>
-            <a:off x="7799832" y="4974336"/>
-            <a:ext cx="3145536" cy="576072"/>
+          <p:cNvPr id="26" name="Text 24"/>
+          <p:cNvSpPr/>
+          <p:nvPr/>
+        </p:nvSpPr>
+        <p:spPr>
+          <a:xfrm>
+            <a:off x="7799832" y="4867351"/>
+            <a:ext cx="3145536" cy="688543"/>
           </a:xfrm>
           <a:prstGeom prst="rect">
             <a:avLst/>
@@ -16739,7 +17387,7 @@
                 <a:ea typeface="Aptos" pitchFamily="34" charset="-122"/>
                 <a:cs typeface="Aptos" pitchFamily="34" charset="-120"/>
               </a:rPr>
-              <a:t>Identify what could go wrong, who could be affected, what safeguards are needed, and what evidence should be reviewed.</a:t>
+              <a:t>Identify what could go wrong, who could be affected, what safeguards are needed, and what evidence should be reviewed before use.</a:t>
             </a:r>
             <a:endParaRPr lang="en-US" sz="1320" dirty="0"/>
           </a:p>
@@ -17108,11 +17756,11 @@
         <p:spPr>
           <a:xfrm>
             <a:off x="7635240" y="1325880"/>
-            <a:ext cx="3474720" cy="1325880"/>
+            <a:ext cx="3474720" cy="1255471"/>
           </a:xfrm>
           <a:prstGeom prst="roundRect">
             <a:avLst>
-              <a:gd name="adj" fmla="val 8276"/>
+              <a:gd name="adj" fmla="val 8740"/>
             </a:avLst>
           </a:prstGeom>
           <a:solidFill>
@@ -17174,7 +17822,7 @@
         <p:spPr>
           <a:xfrm>
             <a:off x="7799832" y="1801368"/>
-            <a:ext cx="3145536" cy="758952"/>
+            <a:ext cx="3145536" cy="688543"/>
           </a:xfrm>
           <a:prstGeom prst="rect">
             <a:avLst/>
@@ -17214,7 +17862,7 @@
         </p:nvSpPr>
         <p:spPr>
           <a:xfrm>
-            <a:off x="7635240" y="2788920"/>
+            <a:off x="7635240" y="2718511"/>
             <a:ext cx="3474720" cy="1536192"/>
           </a:xfrm>
           <a:prstGeom prst="roundRect">
@@ -17241,7 +17889,7 @@
         </p:nvSpPr>
         <p:spPr>
           <a:xfrm>
-            <a:off x="7799832" y="2935224"/>
+            <a:off x="7799832" y="2864815"/>
             <a:ext cx="3145536" cy="256032"/>
           </a:xfrm>
           <a:prstGeom prst="rect">
@@ -17280,7 +17928,7 @@
         </p:nvSpPr>
         <p:spPr>
           <a:xfrm>
-            <a:off x="7818120" y="3300984"/>
+            <a:off x="7818120" y="3230575"/>
             <a:ext cx="3090672" cy="877824"/>
           </a:xfrm>
           <a:prstGeom prst="rect">
@@ -17355,12 +18003,12 @@
         </p:nvSpPr>
         <p:spPr>
           <a:xfrm>
-            <a:off x="7635240" y="4498848"/>
-            <a:ext cx="3474720" cy="1143000"/>
+            <a:off x="7635240" y="4391863"/>
+            <a:ext cx="3474720" cy="1255471"/>
           </a:xfrm>
           <a:prstGeom prst="roundRect">
             <a:avLst>
-              <a:gd name="adj" fmla="val 9600"/>
+              <a:gd name="adj" fmla="val 8740"/>
             </a:avLst>
           </a:prstGeom>
           <a:solidFill>
@@ -17382,7 +18030,7 @@
         </p:nvSpPr>
         <p:spPr>
           <a:xfrm>
-            <a:off x="7799832" y="4645152"/>
+            <a:off x="7799832" y="4538167"/>
             <a:ext cx="3145536" cy="256032"/>
           </a:xfrm>
           <a:prstGeom prst="rect">
@@ -17421,8 +18069,8 @@
         </p:nvSpPr>
         <p:spPr>
           <a:xfrm>
-            <a:off x="7799832" y="4974336"/>
-            <a:ext cx="3145536" cy="576072"/>
+            <a:off x="7799832" y="4867351"/>
+            <a:ext cx="3145536" cy="688543"/>
           </a:xfrm>
           <a:prstGeom prst="rect">
             <a:avLst/>
@@ -17448,7 +18096,7 @@
                 <a:ea typeface="Aptos" pitchFamily="34" charset="-122"/>
                 <a:cs typeface="Aptos" pitchFamily="34" charset="-120"/>
               </a:rPr>
-              <a:t>Identify what could go wrong, who could be affected, what safeguards are needed, and what evidence should be reviewed.</a:t>
+              <a:t>Identify what could go wrong, who could be affected, what safeguards are needed, and what evidence should be reviewed before use.</a:t>
             </a:r>
             <a:endParaRPr lang="en-US" sz="1320" dirty="0"/>
           </a:p>

--- a/downloads/presentations/modules/anl-300.pptx
+++ b/downloads/presentations/modules/anl-300.pptx
@@ -3343,8 +3343,8 @@
         </p:nvSpPr>
         <p:spPr>
           <a:xfrm>
-            <a:off x="868680" y="1508760"/>
-            <a:ext cx="6309360" cy="4160520"/>
+            <a:off x="822960" y="1463040"/>
+            <a:ext cx="6565392" cy="4343400"/>
           </a:xfrm>
           <a:prstGeom prst="rect">
             <a:avLst/>
@@ -3362,7 +3362,7 @@
               <a:buNone/>
             </a:pPr>
             <a:r>
-              <a:rPr lang="en-US" sz="2100" dirty="0">
+              <a:rPr lang="en-US" sz="1920" dirty="0">
                 <a:solidFill>
                   <a:srgbClr val="003A63"/>
                 </a:solidFill>
@@ -3372,14 +3372,14 @@
               </a:rPr>
               <a:t>• Metric selection should start with the public health consequence.</a:t>
             </a:r>
-            <a:endParaRPr lang="en-US" sz="2100" dirty="0"/>
-          </a:p>
-          <a:p>
-            <a:pPr indent="0" marL="0">
-              <a:buNone/>
-            </a:pPr>
-            <a:r>
-              <a:rPr lang="en-US" sz="2100" dirty="0">
+            <a:endParaRPr lang="en-US" sz="1920" dirty="0"/>
+          </a:p>
+          <a:p>
+            <a:pPr indent="0" marL="0">
+              <a:buNone/>
+            </a:pPr>
+            <a:r>
+              <a:rPr lang="en-US" sz="1920" dirty="0">
                 <a:solidFill>
                   <a:srgbClr val="003A63"/>
                 </a:solidFill>
@@ -3389,14 +3389,14 @@
               </a:rPr>
               <a:t>• Sensitivity may be prioritized when missing a true event is dangerous.</a:t>
             </a:r>
-            <a:endParaRPr lang="en-US" sz="2100" dirty="0"/>
-          </a:p>
-          <a:p>
-            <a:pPr indent="0" marL="0">
-              <a:buNone/>
-            </a:pPr>
-            <a:r>
-              <a:rPr lang="en-US" sz="2100" dirty="0">
+            <a:endParaRPr lang="en-US" sz="1920" dirty="0"/>
+          </a:p>
+          <a:p>
+            <a:pPr indent="0" marL="0">
+              <a:buNone/>
+            </a:pPr>
+            <a:r>
+              <a:rPr lang="en-US" sz="1920" dirty="0">
                 <a:solidFill>
                   <a:srgbClr val="003A63"/>
                 </a:solidFill>
@@ -3404,9 +3404,9 @@
                 <a:ea typeface="Aptos" pitchFamily="34" charset="-122"/>
                 <a:cs typeface="Aptos" pitchFamily="34" charset="-120"/>
               </a:rPr>
-              <a:t>• Specificity may be prioritized when false positives create substantial burden or unnecessary.</a:t>
-            </a:r>
-            <a:endParaRPr lang="en-US" sz="2100" dirty="0"/>
+              <a:t>• Specificity may be prioritized when false positives create substantial.</a:t>
+            </a:r>
+            <a:endParaRPr lang="en-US" sz="1920" dirty="0"/>
           </a:p>
         </p:txBody>
       </p:sp>
@@ -3418,12 +3418,12 @@
         </p:nvSpPr>
         <p:spPr>
           <a:xfrm>
-            <a:off x="7635240" y="1325880"/>
-            <a:ext cx="3474720" cy="1207008"/>
+            <a:off x="7543800" y="1325880"/>
+            <a:ext cx="3611880" cy="1261872"/>
           </a:xfrm>
           <a:prstGeom prst="roundRect">
             <a:avLst>
-              <a:gd name="adj" fmla="val 9091"/>
+              <a:gd name="adj" fmla="val 8696"/>
             </a:avLst>
           </a:prstGeom>
           <a:solidFill>
@@ -3445,8 +3445,8 @@
         </p:nvSpPr>
         <p:spPr>
           <a:xfrm>
-            <a:off x="7799832" y="1472184"/>
-            <a:ext cx="3145536" cy="256032"/>
+            <a:off x="7708392" y="1453896"/>
+            <a:ext cx="3282696" cy="228600"/>
           </a:xfrm>
           <a:prstGeom prst="rect">
             <a:avLst/>
@@ -3462,7 +3462,7 @@
               <a:buNone/>
             </a:pPr>
             <a:r>
-              <a:rPr lang="en-US" sz="1300" b="1" dirty="0">
+              <a:rPr lang="en-US" sz="1220" b="1" dirty="0">
                 <a:solidFill>
                   <a:srgbClr val="0068B7"/>
                 </a:solidFill>
@@ -3472,7 +3472,7 @@
               </a:rPr>
               <a:t>Risk check</a:t>
             </a:r>
-            <a:endParaRPr lang="en-US" sz="1300" dirty="0"/>
+            <a:endParaRPr lang="en-US" sz="1220" dirty="0"/>
           </a:p>
         </p:txBody>
       </p:sp>
@@ -3484,8 +3484,8 @@
         </p:nvSpPr>
         <p:spPr>
           <a:xfrm>
-            <a:off x="7799832" y="1801368"/>
-            <a:ext cx="3145536" cy="640080"/>
+            <a:off x="7708392" y="1764792"/>
+            <a:ext cx="3282696" cy="749808"/>
           </a:xfrm>
           <a:prstGeom prst="rect">
             <a:avLst/>
@@ -3503,7 +3503,7 @@
               <a:buNone/>
             </a:pPr>
             <a:r>
-              <a:rPr lang="en-US" sz="1320" dirty="0">
+              <a:rPr lang="en-US" sz="1220" dirty="0">
                 <a:solidFill>
                   <a:srgbClr val="17364A"/>
                 </a:solidFill>
@@ -3513,7 +3513,7 @@
               </a:rPr>
               <a:t>Metric selection should start with the public health consequence.</a:t>
             </a:r>
-            <a:endParaRPr lang="en-US" sz="1320" dirty="0"/>
+            <a:endParaRPr lang="en-US" sz="1220" dirty="0"/>
           </a:p>
         </p:txBody>
       </p:sp>
@@ -3525,12 +3525,12 @@
         </p:nvSpPr>
         <p:spPr>
           <a:xfrm>
-            <a:off x="7635240" y="2670048"/>
-            <a:ext cx="3474720" cy="1536192"/>
+            <a:off x="7543800" y="2724912"/>
+            <a:ext cx="3611880" cy="1527048"/>
           </a:xfrm>
           <a:prstGeom prst="roundRect">
             <a:avLst>
-              <a:gd name="adj" fmla="val 7143"/>
+              <a:gd name="adj" fmla="val 7186"/>
             </a:avLst>
           </a:prstGeom>
           <a:solidFill>
@@ -3552,24 +3552,26 @@
         </p:nvSpPr>
         <p:spPr>
           <a:xfrm>
-            <a:off x="7799832" y="2798064"/>
-            <a:ext cx="3145536" cy="237744"/>
-          </a:xfrm>
-          <a:prstGeom prst="rect">
-            <a:avLst/>
-          </a:prstGeom>
-          <a:noFill/>
-          <a:ln/>
-        </p:spPr>
-        <p:txBody>
-          <a:bodyPr wrap="square" lIns="0" tIns="0" rIns="0" bIns="0" rtlCol="0" anchor="ctr"/>
-          <a:lstStyle/>
-          <a:p>
-            <a:pPr indent="0" marL="0">
-              <a:buNone/>
-            </a:pPr>
-            <a:r>
-              <a:rPr lang="en-US" sz="1250" b="1" dirty="0">
+            <a:off x="7708392" y="2852928"/>
+            <a:ext cx="3282696" cy="219456"/>
+          </a:xfrm>
+          <a:prstGeom prst="rect">
+            <a:avLst/>
+          </a:prstGeom>
+          <a:noFill/>
+          <a:ln/>
+        </p:spPr>
+        <p:txBody>
+          <a:bodyPr wrap="square" lIns="0" tIns="0" rIns="0" bIns="0" rtlCol="0" anchor="ctr">
+            <a:normAutofit/>
+          </a:bodyPr>
+          <a:lstStyle/>
+          <a:p>
+            <a:pPr indent="0" marL="0">
+              <a:buNone/>
+            </a:pPr>
+            <a:r>
+              <a:rPr lang="en-US" sz="1160" b="1" dirty="0">
                 <a:solidFill>
                   <a:srgbClr val="0068B7"/>
                 </a:solidFill>
@@ -3579,7 +3581,7 @@
               </a:rPr>
               <a:t>Risk control loop</a:t>
             </a:r>
-            <a:endParaRPr lang="en-US" sz="1250" dirty="0"/>
+            <a:endParaRPr lang="en-US" sz="1160" dirty="0"/>
           </a:p>
         </p:txBody>
       </p:sp>
@@ -3591,7 +3593,7 @@
         </p:nvSpPr>
         <p:spPr>
           <a:xfrm>
-            <a:off x="8763000" y="3351276"/>
+            <a:off x="8717280" y="3406140"/>
             <a:ext cx="164592" cy="0"/>
           </a:xfrm>
           <a:prstGeom prst="line">
@@ -3614,8 +3616,8 @@
         </p:nvSpPr>
         <p:spPr>
           <a:xfrm>
-            <a:off x="7872984" y="3200400"/>
-            <a:ext cx="890016" cy="301752"/>
+            <a:off x="7781544" y="3255264"/>
+            <a:ext cx="935736" cy="301752"/>
           </a:xfrm>
           <a:prstGeom prst="roundRect">
             <a:avLst>
@@ -3641,8 +3643,8 @@
         </p:nvSpPr>
         <p:spPr>
           <a:xfrm>
-            <a:off x="7909560" y="3273552"/>
-            <a:ext cx="816864" cy="146304"/>
+            <a:off x="7818120" y="3328416"/>
+            <a:ext cx="862584" cy="146304"/>
           </a:xfrm>
           <a:prstGeom prst="rect">
             <a:avLst/>
@@ -3682,7 +3684,7 @@
         </p:nvSpPr>
         <p:spPr>
           <a:xfrm>
-            <a:off x="9817608" y="3351276"/>
+            <a:off x="9817608" y="3406140"/>
             <a:ext cx="164592" cy="0"/>
           </a:xfrm>
           <a:prstGeom prst="line">
@@ -3705,8 +3707,8 @@
         </p:nvSpPr>
         <p:spPr>
           <a:xfrm>
-            <a:off x="8927592" y="3200400"/>
-            <a:ext cx="890016" cy="301752"/>
+            <a:off x="8881872" y="3255264"/>
+            <a:ext cx="935736" cy="301752"/>
           </a:xfrm>
           <a:prstGeom prst="roundRect">
             <a:avLst>
@@ -3732,8 +3734,8 @@
         </p:nvSpPr>
         <p:spPr>
           <a:xfrm>
-            <a:off x="8964168" y="3273552"/>
-            <a:ext cx="816864" cy="146304"/>
+            <a:off x="8918448" y="3328416"/>
+            <a:ext cx="862584" cy="146304"/>
           </a:xfrm>
           <a:prstGeom prst="rect">
             <a:avLst/>
@@ -3773,8 +3775,8 @@
         </p:nvSpPr>
         <p:spPr>
           <a:xfrm>
-            <a:off x="9982200" y="3200400"/>
-            <a:ext cx="890016" cy="301752"/>
+            <a:off x="9982200" y="3255264"/>
+            <a:ext cx="935736" cy="301752"/>
           </a:xfrm>
           <a:prstGeom prst="roundRect">
             <a:avLst>
@@ -3800,8 +3802,8 @@
         </p:nvSpPr>
         <p:spPr>
           <a:xfrm>
-            <a:off x="10018776" y="3273552"/>
-            <a:ext cx="816864" cy="146304"/>
+            <a:off x="10018776" y="3328416"/>
+            <a:ext cx="862584" cy="146304"/>
           </a:xfrm>
           <a:prstGeom prst="rect">
             <a:avLst/>
@@ -3841,8 +3843,8 @@
         </p:nvSpPr>
         <p:spPr>
           <a:xfrm>
-            <a:off x="7854696" y="3694176"/>
-            <a:ext cx="3035808" cy="365760"/>
+            <a:off x="7763256" y="3749040"/>
+            <a:ext cx="3172968" cy="356616"/>
           </a:xfrm>
           <a:prstGeom prst="rect">
             <a:avLst/>
@@ -3860,7 +3862,7 @@
               <a:buNone/>
             </a:pPr>
             <a:r>
-              <a:rPr lang="en-US" sz="1120" dirty="0">
+              <a:rPr lang="en-US" sz="1040" dirty="0">
                 <a:solidFill>
                   <a:srgbClr val="17364A"/>
                 </a:solidFill>
@@ -3868,9 +3870,9 @@
                 <a:ea typeface="Aptos" pitchFamily="34" charset="-122"/>
                 <a:cs typeface="Aptos" pitchFamily="34" charset="-120"/>
               </a:rPr>
-              <a:t>Responsible use depends on finding risks early, applying safeguards, and watching for drift or harm over time.</a:t>
-            </a:r>
-            <a:endParaRPr lang="en-US" sz="1120" dirty="0"/>
+              <a:t>Responsible use depends on finding risks early, applying safeguards,.</a:t>
+            </a:r>
+            <a:endParaRPr lang="en-US" sz="1040" dirty="0"/>
           </a:p>
         </p:txBody>
       </p:sp>
@@ -3882,12 +3884,12 @@
         </p:nvSpPr>
         <p:spPr>
           <a:xfrm>
-            <a:off x="7635240" y="4343400"/>
-            <a:ext cx="3474720" cy="1255471"/>
+            <a:off x="7543800" y="4389120"/>
+            <a:ext cx="3611880" cy="1261872"/>
           </a:xfrm>
           <a:prstGeom prst="roundRect">
             <a:avLst>
-              <a:gd name="adj" fmla="val 8740"/>
+              <a:gd name="adj" fmla="val 8696"/>
             </a:avLst>
           </a:prstGeom>
           <a:solidFill>
@@ -3909,8 +3911,8 @@
         </p:nvSpPr>
         <p:spPr>
           <a:xfrm>
-            <a:off x="7799832" y="4489704"/>
-            <a:ext cx="3145536" cy="256032"/>
+            <a:off x="7708392" y="4517136"/>
+            <a:ext cx="3282696" cy="228600"/>
           </a:xfrm>
           <a:prstGeom prst="rect">
             <a:avLst/>
@@ -3926,7 +3928,7 @@
               <a:buNone/>
             </a:pPr>
             <a:r>
-              <a:rPr lang="en-US" sz="1300" b="1" dirty="0">
+              <a:rPr lang="en-US" sz="1220" b="1" dirty="0">
                 <a:solidFill>
                   <a:srgbClr val="0068B7"/>
                 </a:solidFill>
@@ -3936,7 +3938,7 @@
               </a:rPr>
               <a:t>Safeguard to plan</a:t>
             </a:r>
-            <a:endParaRPr lang="en-US" sz="1300" dirty="0"/>
+            <a:endParaRPr lang="en-US" sz="1220" dirty="0"/>
           </a:p>
         </p:txBody>
       </p:sp>
@@ -3948,8 +3950,8 @@
         </p:nvSpPr>
         <p:spPr>
           <a:xfrm>
-            <a:off x="7799832" y="4818888"/>
-            <a:ext cx="3145536" cy="688543"/>
+            <a:off x="7708392" y="4828032"/>
+            <a:ext cx="3282696" cy="749808"/>
           </a:xfrm>
           <a:prstGeom prst="rect">
             <a:avLst/>
@@ -3967,7 +3969,7 @@
               <a:buNone/>
             </a:pPr>
             <a:r>
-              <a:rPr lang="en-US" sz="1320" dirty="0">
+              <a:rPr lang="en-US" sz="1220" dirty="0">
                 <a:solidFill>
                   <a:srgbClr val="17364A"/>
                 </a:solidFill>
@@ -3975,9 +3977,9 @@
                 <a:ea typeface="Aptos" pitchFamily="34" charset="-122"/>
                 <a:cs typeface="Aptos" pitchFamily="34" charset="-120"/>
               </a:rPr>
-              <a:t>Identify what could go wrong, who could be affected, what safeguards are needed, and what evidence should be reviewed before use.</a:t>
-            </a:r>
-            <a:endParaRPr lang="en-US" sz="1320" dirty="0"/>
+              <a:t>Identify what could go wrong, who could be affected, what safeguards are needed,.</a:t>
+            </a:r>
+            <a:endParaRPr lang="en-US" sz="1220" dirty="0"/>
           </a:p>
         </p:txBody>
       </p:sp>
@@ -4268,8 +4270,8 @@
         </p:nvSpPr>
         <p:spPr>
           <a:xfrm>
-            <a:off x="868680" y="1508760"/>
-            <a:ext cx="6309360" cy="4160520"/>
+            <a:off x="822960" y="1463040"/>
+            <a:ext cx="6565392" cy="4343400"/>
           </a:xfrm>
           <a:prstGeom prst="rect">
             <a:avLst/>
@@ -4287,7 +4289,7 @@
               <a:buNone/>
             </a:pPr>
             <a:r>
-              <a:rPr lang="en-US" sz="2100" dirty="0">
+              <a:rPr lang="en-US" sz="1920" dirty="0">
                 <a:solidFill>
                   <a:srgbClr val="003A63"/>
                 </a:solidFill>
@@ -4295,16 +4297,16 @@
                 <a:ea typeface="Aptos" pitchFamily="34" charset="-122"/>
                 <a:cs typeface="Aptos" pitchFamily="34" charset="-120"/>
               </a:rPr>
-              <a:t>• Workflow validation examines whether the AI output is understandable, accessible, timely,.</a:t>
-            </a:r>
-            <a:endParaRPr lang="en-US" sz="2100" dirty="0"/>
-          </a:p>
-          <a:p>
-            <a:pPr indent="0" marL="0">
-              <a:buNone/>
-            </a:pPr>
-            <a:r>
-              <a:rPr lang="en-US" sz="2100" dirty="0">
+              <a:t>• Workflow validation examines whether the AI output is understandable,.</a:t>
+            </a:r>
+            <a:endParaRPr lang="en-US" sz="1920" dirty="0"/>
+          </a:p>
+          <a:p>
+            <a:pPr indent="0" marL="0">
+              <a:buNone/>
+            </a:pPr>
+            <a:r>
+              <a:rPr lang="en-US" sz="1920" dirty="0">
                 <a:solidFill>
                   <a:srgbClr val="003A63"/>
                 </a:solidFill>
@@ -4312,16 +4314,16 @@
                 <a:ea typeface="Aptos" pitchFamily="34" charset="-122"/>
                 <a:cs typeface="Aptos" pitchFamily="34" charset="-120"/>
               </a:rPr>
-              <a:t>• A model can be statistically strong but operationally weak if staff do not trust it, cannot see.</a:t>
-            </a:r>
-            <a:endParaRPr lang="en-US" sz="2100" dirty="0"/>
-          </a:p>
-          <a:p>
-            <a:pPr indent="0" marL="0">
-              <a:buNone/>
-            </a:pPr>
-            <a:r>
-              <a:rPr lang="en-US" sz="2100" dirty="0">
+              <a:t>• A model can be statistically strong but operationally weak if staff do not.</a:t>
+            </a:r>
+            <a:endParaRPr lang="en-US" sz="1920" dirty="0"/>
+          </a:p>
+          <a:p>
+            <a:pPr indent="0" marL="0">
+              <a:buNone/>
+            </a:pPr>
+            <a:r>
+              <a:rPr lang="en-US" sz="1920" dirty="0">
                 <a:solidFill>
                   <a:srgbClr val="003A63"/>
                 </a:solidFill>
@@ -4329,9 +4331,9 @@
                 <a:ea typeface="Aptos" pitchFamily="34" charset="-122"/>
                 <a:cs typeface="Aptos" pitchFamily="34" charset="-120"/>
               </a:rPr>
-              <a:t>• Workflow validation should include usability testing, training, documentation, and feedback.</a:t>
-            </a:r>
-            <a:endParaRPr lang="en-US" sz="2100" dirty="0"/>
+              <a:t>• Workflow validation should include usability testing, training,.</a:t>
+            </a:r>
+            <a:endParaRPr lang="en-US" sz="1920" dirty="0"/>
           </a:p>
         </p:txBody>
       </p:sp>
@@ -4343,12 +4345,12 @@
         </p:nvSpPr>
         <p:spPr>
           <a:xfrm>
-            <a:off x="7635240" y="1325880"/>
-            <a:ext cx="3474720" cy="1255471"/>
+            <a:off x="7543800" y="1325880"/>
+            <a:ext cx="3611880" cy="1261872"/>
           </a:xfrm>
           <a:prstGeom prst="roundRect">
             <a:avLst>
-              <a:gd name="adj" fmla="val 8740"/>
+              <a:gd name="adj" fmla="val 8696"/>
             </a:avLst>
           </a:prstGeom>
           <a:solidFill>
@@ -4370,8 +4372,8 @@
         </p:nvSpPr>
         <p:spPr>
           <a:xfrm>
-            <a:off x="7799832" y="1472184"/>
-            <a:ext cx="3145536" cy="256032"/>
+            <a:off x="7708392" y="1453896"/>
+            <a:ext cx="3282696" cy="228600"/>
           </a:xfrm>
           <a:prstGeom prst="rect">
             <a:avLst/>
@@ -4387,7 +4389,7 @@
               <a:buNone/>
             </a:pPr>
             <a:r>
-              <a:rPr lang="en-US" sz="1300" b="1" dirty="0">
+              <a:rPr lang="en-US" sz="1220" b="1" dirty="0">
                 <a:solidFill>
                   <a:srgbClr val="0068B7"/>
                 </a:solidFill>
@@ -4397,7 +4399,7 @@
               </a:rPr>
               <a:t>Risk check</a:t>
             </a:r>
-            <a:endParaRPr lang="en-US" sz="1300" dirty="0"/>
+            <a:endParaRPr lang="en-US" sz="1220" dirty="0"/>
           </a:p>
         </p:txBody>
       </p:sp>
@@ -4409,8 +4411,8 @@
         </p:nvSpPr>
         <p:spPr>
           <a:xfrm>
-            <a:off x="7799832" y="1801368"/>
-            <a:ext cx="3145536" cy="688543"/>
+            <a:off x="7708392" y="1764792"/>
+            <a:ext cx="3282696" cy="749808"/>
           </a:xfrm>
           <a:prstGeom prst="rect">
             <a:avLst/>
@@ -4428,7 +4430,7 @@
               <a:buNone/>
             </a:pPr>
             <a:r>
-              <a:rPr lang="en-US" sz="1320" dirty="0">
+              <a:rPr lang="en-US" sz="1220" dirty="0">
                 <a:solidFill>
                   <a:srgbClr val="17364A"/>
                 </a:solidFill>
@@ -4436,9 +4438,9 @@
                 <a:ea typeface="Aptos" pitchFamily="34" charset="-122"/>
                 <a:cs typeface="Aptos" pitchFamily="34" charset="-120"/>
               </a:rPr>
-              <a:t>Workflow validation examines whether the AI output is understandable, accessible, timely, actionable,.</a:t>
-            </a:r>
-            <a:endParaRPr lang="en-US" sz="1320" dirty="0"/>
+              <a:t>Workflow validation examines whether the AI output is understandable,.</a:t>
+            </a:r>
+            <a:endParaRPr lang="en-US" sz="1220" dirty="0"/>
           </a:p>
         </p:txBody>
       </p:sp>
@@ -4450,12 +4452,12 @@
         </p:nvSpPr>
         <p:spPr>
           <a:xfrm>
-            <a:off x="7635240" y="2718511"/>
-            <a:ext cx="3474720" cy="1536192"/>
+            <a:off x="7543800" y="2724912"/>
+            <a:ext cx="3611880" cy="1527048"/>
           </a:xfrm>
           <a:prstGeom prst="roundRect">
             <a:avLst>
-              <a:gd name="adj" fmla="val 7143"/>
+              <a:gd name="adj" fmla="val 7186"/>
             </a:avLst>
           </a:prstGeom>
           <a:solidFill>
@@ -4477,8 +4479,8 @@
         </p:nvSpPr>
         <p:spPr>
           <a:xfrm>
-            <a:off x="7799832" y="2864815"/>
-            <a:ext cx="3145536" cy="256032"/>
+            <a:off x="7708392" y="2852928"/>
+            <a:ext cx="3282696" cy="228600"/>
           </a:xfrm>
           <a:prstGeom prst="rect">
             <a:avLst/>
@@ -4494,7 +4496,7 @@
               <a:buNone/>
             </a:pPr>
             <a:r>
-              <a:rPr lang="en-US" sz="1300" b="1" dirty="0">
+              <a:rPr lang="en-US" sz="1220" b="1" dirty="0">
                 <a:solidFill>
                   <a:srgbClr val="0068B7"/>
                 </a:solidFill>
@@ -4504,7 +4506,7 @@
               </a:rPr>
               <a:t>Concept checkpoints</a:t>
             </a:r>
-            <a:endParaRPr lang="en-US" sz="1300" dirty="0"/>
+            <a:endParaRPr lang="en-US" sz="1220" dirty="0"/>
           </a:p>
         </p:txBody>
       </p:sp>
@@ -4516,8 +4518,8 @@
         </p:nvSpPr>
         <p:spPr>
           <a:xfrm>
-            <a:off x="7818120" y="3230575"/>
-            <a:ext cx="3090672" cy="877824"/>
+            <a:off x="7726680" y="3182112"/>
+            <a:ext cx="3227832" cy="960120"/>
           </a:xfrm>
           <a:prstGeom prst="rect">
             <a:avLst/>
@@ -4535,7 +4537,7 @@
               <a:buNone/>
             </a:pPr>
             <a:r>
-              <a:rPr lang="en-US" sz="1220" dirty="0">
+              <a:rPr lang="en-US" sz="1140" dirty="0">
                 <a:solidFill>
                   <a:srgbClr val="17364A"/>
                 </a:solidFill>
@@ -4543,16 +4545,16 @@
                 <a:ea typeface="Aptos" pitchFamily="34" charset="-122"/>
                 <a:cs typeface="Aptos" pitchFamily="34" charset="-120"/>
               </a:rPr>
-              <a:t>Workflow validation examines whether the AI output is.</a:t>
-            </a:r>
-            <a:endParaRPr lang="en-US" sz="1220" dirty="0"/>
-          </a:p>
-          <a:p>
-            <a:pPr indent="0" marL="0">
-              <a:buNone/>
-            </a:pPr>
-            <a:r>
-              <a:rPr lang="en-US" sz="1220" dirty="0">
+              <a:t>Workflow validation examines whether the AI output.</a:t>
+            </a:r>
+            <a:endParaRPr lang="en-US" sz="1140" dirty="0"/>
+          </a:p>
+          <a:p>
+            <a:pPr indent="0" marL="0">
+              <a:buNone/>
+            </a:pPr>
+            <a:r>
+              <a:rPr lang="en-US" sz="1140" dirty="0">
                 <a:solidFill>
                   <a:srgbClr val="17364A"/>
                 </a:solidFill>
@@ -4560,16 +4562,16 @@
                 <a:ea typeface="Aptos" pitchFamily="34" charset="-122"/>
                 <a:cs typeface="Aptos" pitchFamily="34" charset="-120"/>
               </a:rPr>
-              <a:t>A model can be statistically strong but operationally weak if.</a:t>
-            </a:r>
-            <a:endParaRPr lang="en-US" sz="1220" dirty="0"/>
-          </a:p>
-          <a:p>
-            <a:pPr indent="0" marL="0">
-              <a:buNone/>
-            </a:pPr>
-            <a:r>
-              <a:rPr lang="en-US" sz="1220" dirty="0">
+              <a:t>A model can be statistically strong but.</a:t>
+            </a:r>
+            <a:endParaRPr lang="en-US" sz="1140" dirty="0"/>
+          </a:p>
+          <a:p>
+            <a:pPr indent="0" marL="0">
+              <a:buNone/>
+            </a:pPr>
+            <a:r>
+              <a:rPr lang="en-US" sz="1140" dirty="0">
                 <a:solidFill>
                   <a:srgbClr val="17364A"/>
                 </a:solidFill>
@@ -4577,9 +4579,9 @@
                 <a:ea typeface="Aptos" pitchFamily="34" charset="-122"/>
                 <a:cs typeface="Aptos" pitchFamily="34" charset="-120"/>
               </a:rPr>
-              <a:t>Post-deployment validation should be planned before launch.</a:t>
-            </a:r>
-            <a:endParaRPr lang="en-US" sz="1220" dirty="0"/>
+              <a:t>Post-deployment validation should be planned.</a:t>
+            </a:r>
+            <a:endParaRPr lang="en-US" sz="1140" dirty="0"/>
           </a:p>
         </p:txBody>
       </p:sp>
@@ -4591,12 +4593,12 @@
         </p:nvSpPr>
         <p:spPr>
           <a:xfrm>
-            <a:off x="7635240" y="4391863"/>
-            <a:ext cx="3474720" cy="1255471"/>
+            <a:off x="7543800" y="4389120"/>
+            <a:ext cx="3611880" cy="1261872"/>
           </a:xfrm>
           <a:prstGeom prst="roundRect">
             <a:avLst>
-              <a:gd name="adj" fmla="val 8740"/>
+              <a:gd name="adj" fmla="val 8696"/>
             </a:avLst>
           </a:prstGeom>
           <a:solidFill>
@@ -4618,8 +4620,8 @@
         </p:nvSpPr>
         <p:spPr>
           <a:xfrm>
-            <a:off x="7799832" y="4538167"/>
-            <a:ext cx="3145536" cy="256032"/>
+            <a:off x="7708392" y="4517136"/>
+            <a:ext cx="3282696" cy="228600"/>
           </a:xfrm>
           <a:prstGeom prst="rect">
             <a:avLst/>
@@ -4635,7 +4637,7 @@
               <a:buNone/>
             </a:pPr>
             <a:r>
-              <a:rPr lang="en-US" sz="1300" b="1" dirty="0">
+              <a:rPr lang="en-US" sz="1220" b="1" dirty="0">
                 <a:solidFill>
                   <a:srgbClr val="0068B7"/>
                 </a:solidFill>
@@ -4645,7 +4647,7 @@
               </a:rPr>
               <a:t>Safeguard to plan</a:t>
             </a:r>
-            <a:endParaRPr lang="en-US" sz="1300" dirty="0"/>
+            <a:endParaRPr lang="en-US" sz="1220" dirty="0"/>
           </a:p>
         </p:txBody>
       </p:sp>
@@ -4657,8 +4659,8 @@
         </p:nvSpPr>
         <p:spPr>
           <a:xfrm>
-            <a:off x="7799832" y="4867351"/>
-            <a:ext cx="3145536" cy="688543"/>
+            <a:off x="7708392" y="4828032"/>
+            <a:ext cx="3282696" cy="749808"/>
           </a:xfrm>
           <a:prstGeom prst="rect">
             <a:avLst/>
@@ -4676,7 +4678,7 @@
               <a:buNone/>
             </a:pPr>
             <a:r>
-              <a:rPr lang="en-US" sz="1320" dirty="0">
+              <a:rPr lang="en-US" sz="1220" dirty="0">
                 <a:solidFill>
                   <a:srgbClr val="17364A"/>
                 </a:solidFill>
@@ -4684,9 +4686,9 @@
                 <a:ea typeface="Aptos" pitchFamily="34" charset="-122"/>
                 <a:cs typeface="Aptos" pitchFamily="34" charset="-120"/>
               </a:rPr>
-              <a:t>Identify what could go wrong, who could be affected, what safeguards are needed, and what evidence should be reviewed before use.</a:t>
-            </a:r>
-            <a:endParaRPr lang="en-US" sz="1320" dirty="0"/>
+              <a:t>Identify what could go wrong, who could be affected, what safeguards are needed,.</a:t>
+            </a:r>
+            <a:endParaRPr lang="en-US" sz="1220" dirty="0"/>
           </a:p>
         </p:txBody>
       </p:sp>
@@ -4977,8 +4979,8 @@
         </p:nvSpPr>
         <p:spPr>
           <a:xfrm>
-            <a:off x="868680" y="1508760"/>
-            <a:ext cx="6309360" cy="4160520"/>
+            <a:off x="822960" y="1463040"/>
+            <a:ext cx="6565392" cy="4343400"/>
           </a:xfrm>
           <a:prstGeom prst="rect">
             <a:avLst/>
@@ -4996,7 +4998,7 @@
               <a:buNone/>
             </a:pPr>
             <a:r>
-              <a:rPr lang="en-US" sz="2100" dirty="0">
+              <a:rPr lang="en-US" sz="1920" dirty="0">
                 <a:solidFill>
                   <a:srgbClr val="003A63"/>
                 </a:solidFill>
@@ -5006,14 +5008,14 @@
               </a:rPr>
               <a:t>• Misleading aggregate performance.</a:t>
             </a:r>
-            <a:endParaRPr lang="en-US" sz="2100" dirty="0"/>
-          </a:p>
-          <a:p>
-            <a:pPr indent="0" marL="0">
-              <a:buNone/>
-            </a:pPr>
-            <a:r>
-              <a:rPr lang="en-US" sz="2100" dirty="0">
+            <a:endParaRPr lang="en-US" sz="1920" dirty="0"/>
+          </a:p>
+          <a:p>
+            <a:pPr indent="0" marL="0">
+              <a:buNone/>
+            </a:pPr>
+            <a:r>
+              <a:rPr lang="en-US" sz="1920" dirty="0">
                 <a:solidFill>
                   <a:srgbClr val="003A63"/>
                 </a:solidFill>
@@ -5023,14 +5025,14 @@
               </a:rPr>
               <a:t>• Overall metrics may hide poor subgroup performance.</a:t>
             </a:r>
-            <a:endParaRPr lang="en-US" sz="2100" dirty="0"/>
-          </a:p>
-          <a:p>
-            <a:pPr indent="0" marL="0">
-              <a:buNone/>
-            </a:pPr>
-            <a:r>
-              <a:rPr lang="en-US" sz="2100" dirty="0">
+            <a:endParaRPr lang="en-US" sz="1920" dirty="0"/>
+          </a:p>
+          <a:p>
+            <a:pPr indent="0" marL="0">
+              <a:buNone/>
+            </a:pPr>
+            <a:r>
+              <a:rPr lang="en-US" sz="1920" dirty="0">
                 <a:solidFill>
                   <a:srgbClr val="003A63"/>
                 </a:solidFill>
@@ -5040,7 +5042,7 @@
               </a:rPr>
               <a:t>• Guardrails include subgroup testing and equity review.</a:t>
             </a:r>
-            <a:endParaRPr lang="en-US" sz="2100" dirty="0"/>
+            <a:endParaRPr lang="en-US" sz="1920" dirty="0"/>
           </a:p>
         </p:txBody>
       </p:sp>
@@ -5052,12 +5054,12 @@
         </p:nvSpPr>
         <p:spPr>
           <a:xfrm>
-            <a:off x="7635240" y="1325880"/>
-            <a:ext cx="3474720" cy="1207008"/>
+            <a:off x="7543800" y="1325880"/>
+            <a:ext cx="3611880" cy="1261872"/>
           </a:xfrm>
           <a:prstGeom prst="roundRect">
             <a:avLst>
-              <a:gd name="adj" fmla="val 9091"/>
+              <a:gd name="adj" fmla="val 8696"/>
             </a:avLst>
           </a:prstGeom>
           <a:solidFill>
@@ -5079,8 +5081,8 @@
         </p:nvSpPr>
         <p:spPr>
           <a:xfrm>
-            <a:off x="7799832" y="1472184"/>
-            <a:ext cx="3145536" cy="256032"/>
+            <a:off x="7708392" y="1453896"/>
+            <a:ext cx="3282696" cy="228600"/>
           </a:xfrm>
           <a:prstGeom prst="rect">
             <a:avLst/>
@@ -5096,7 +5098,7 @@
               <a:buNone/>
             </a:pPr>
             <a:r>
-              <a:rPr lang="en-US" sz="1300" b="1" dirty="0">
+              <a:rPr lang="en-US" sz="1220" b="1" dirty="0">
                 <a:solidFill>
                   <a:srgbClr val="0068B7"/>
                 </a:solidFill>
@@ -5106,7 +5108,7 @@
               </a:rPr>
               <a:t>Risk check</a:t>
             </a:r>
-            <a:endParaRPr lang="en-US" sz="1300" dirty="0"/>
+            <a:endParaRPr lang="en-US" sz="1220" dirty="0"/>
           </a:p>
         </p:txBody>
       </p:sp>
@@ -5118,8 +5120,8 @@
         </p:nvSpPr>
         <p:spPr>
           <a:xfrm>
-            <a:off x="7799832" y="1801368"/>
-            <a:ext cx="3145536" cy="640080"/>
+            <a:off x="7708392" y="1764792"/>
+            <a:ext cx="3282696" cy="749808"/>
           </a:xfrm>
           <a:prstGeom prst="rect">
             <a:avLst/>
@@ -5137,7 +5139,7 @@
               <a:buNone/>
             </a:pPr>
             <a:r>
-              <a:rPr lang="en-US" sz="1320" dirty="0">
+              <a:rPr lang="en-US" sz="1220" dirty="0">
                 <a:solidFill>
                   <a:srgbClr val="17364A"/>
                 </a:solidFill>
@@ -5147,7 +5149,7 @@
               </a:rPr>
               <a:t>Misleading aggregate performance.</a:t>
             </a:r>
-            <a:endParaRPr lang="en-US" sz="1320" dirty="0"/>
+            <a:endParaRPr lang="en-US" sz="1220" dirty="0"/>
           </a:p>
         </p:txBody>
       </p:sp>
@@ -5159,12 +5161,12 @@
         </p:nvSpPr>
         <p:spPr>
           <a:xfrm>
-            <a:off x="7635240" y="2670048"/>
-            <a:ext cx="3474720" cy="1536192"/>
+            <a:off x="7543800" y="2724912"/>
+            <a:ext cx="3611880" cy="1527048"/>
           </a:xfrm>
           <a:prstGeom prst="roundRect">
             <a:avLst>
-              <a:gd name="adj" fmla="val 7143"/>
+              <a:gd name="adj" fmla="val 7186"/>
             </a:avLst>
           </a:prstGeom>
           <a:solidFill>
@@ -5186,8 +5188,8 @@
         </p:nvSpPr>
         <p:spPr>
           <a:xfrm>
-            <a:off x="7799832" y="2816352"/>
-            <a:ext cx="3145536" cy="256032"/>
+            <a:off x="7708392" y="2852928"/>
+            <a:ext cx="3282696" cy="228600"/>
           </a:xfrm>
           <a:prstGeom prst="rect">
             <a:avLst/>
@@ -5203,7 +5205,7 @@
               <a:buNone/>
             </a:pPr>
             <a:r>
-              <a:rPr lang="en-US" sz="1300" b="1" dirty="0">
+              <a:rPr lang="en-US" sz="1220" b="1" dirty="0">
                 <a:solidFill>
                   <a:srgbClr val="0068B7"/>
                 </a:solidFill>
@@ -5213,7 +5215,7 @@
               </a:rPr>
               <a:t>Concept checkpoints</a:t>
             </a:r>
-            <a:endParaRPr lang="en-US" sz="1300" dirty="0"/>
+            <a:endParaRPr lang="en-US" sz="1220" dirty="0"/>
           </a:p>
         </p:txBody>
       </p:sp>
@@ -5225,8 +5227,8 @@
         </p:nvSpPr>
         <p:spPr>
           <a:xfrm>
-            <a:off x="7818120" y="3182112"/>
-            <a:ext cx="3090672" cy="877824"/>
+            <a:off x="7726680" y="3182112"/>
+            <a:ext cx="3227832" cy="960120"/>
           </a:xfrm>
           <a:prstGeom prst="rect">
             <a:avLst/>
@@ -5244,7 +5246,7 @@
               <a:buNone/>
             </a:pPr>
             <a:r>
-              <a:rPr lang="en-US" sz="1220" dirty="0">
+              <a:rPr lang="en-US" sz="1140" dirty="0">
                 <a:solidFill>
                   <a:srgbClr val="17364A"/>
                 </a:solidFill>
@@ -5254,14 +5256,14 @@
               </a:rPr>
               <a:t>Metric mismatch.</a:t>
             </a:r>
-            <a:endParaRPr lang="en-US" sz="1220" dirty="0"/>
-          </a:p>
-          <a:p>
-            <a:pPr indent="0" marL="0">
-              <a:buNone/>
-            </a:pPr>
-            <a:r>
-              <a:rPr lang="en-US" sz="1220" dirty="0">
+            <a:endParaRPr lang="en-US" sz="1140" dirty="0"/>
+          </a:p>
+          <a:p>
+            <a:pPr indent="0" marL="0">
+              <a:buNone/>
+            </a:pPr>
+            <a:r>
+              <a:rPr lang="en-US" sz="1140" dirty="0">
                 <a:solidFill>
                   <a:srgbClr val="17364A"/>
                 </a:solidFill>
@@ -5269,16 +5271,16 @@
                 <a:ea typeface="Aptos" pitchFamily="34" charset="-122"/>
                 <a:cs typeface="Aptos" pitchFamily="34" charset="-120"/>
               </a:rPr>
-              <a:t>The selected metric may not match the public health consequence.</a:t>
-            </a:r>
-            <a:endParaRPr lang="en-US" sz="1220" dirty="0"/>
-          </a:p>
-          <a:p>
-            <a:pPr indent="0" marL="0">
-              <a:buNone/>
-            </a:pPr>
-            <a:r>
-              <a:rPr lang="en-US" sz="1220" dirty="0">
+              <a:t>The selected metric may not match the public.</a:t>
+            </a:r>
+            <a:endParaRPr lang="en-US" sz="1140" dirty="0"/>
+          </a:p>
+          <a:p>
+            <a:pPr indent="0" marL="0">
+              <a:buNone/>
+            </a:pPr>
+            <a:r>
+              <a:rPr lang="en-US" sz="1140" dirty="0">
                 <a:solidFill>
                   <a:srgbClr val="17364A"/>
                 </a:solidFill>
@@ -5286,9 +5288,9 @@
                 <a:ea typeface="Aptos" pitchFamily="34" charset="-122"/>
                 <a:cs typeface="Aptos" pitchFamily="34" charset="-120"/>
               </a:rPr>
-              <a:t>Guardrails include metric selection tied to intended use and error.</a:t>
-            </a:r>
-            <a:endParaRPr lang="en-US" sz="1220" dirty="0"/>
+              <a:t>Guardrails include metric selection tied to.</a:t>
+            </a:r>
+            <a:endParaRPr lang="en-US" sz="1140" dirty="0"/>
           </a:p>
         </p:txBody>
       </p:sp>
@@ -5300,12 +5302,12 @@
         </p:nvSpPr>
         <p:spPr>
           <a:xfrm>
-            <a:off x="7635240" y="4343400"/>
-            <a:ext cx="3474720" cy="1255471"/>
+            <a:off x="7543800" y="4389120"/>
+            <a:ext cx="3611880" cy="1261872"/>
           </a:xfrm>
           <a:prstGeom prst="roundRect">
             <a:avLst>
-              <a:gd name="adj" fmla="val 8740"/>
+              <a:gd name="adj" fmla="val 8696"/>
             </a:avLst>
           </a:prstGeom>
           <a:solidFill>
@@ -5327,8 +5329,8 @@
         </p:nvSpPr>
         <p:spPr>
           <a:xfrm>
-            <a:off x="7799832" y="4489704"/>
-            <a:ext cx="3145536" cy="256032"/>
+            <a:off x="7708392" y="4517136"/>
+            <a:ext cx="3282696" cy="228600"/>
           </a:xfrm>
           <a:prstGeom prst="rect">
             <a:avLst/>
@@ -5344,7 +5346,7 @@
               <a:buNone/>
             </a:pPr>
             <a:r>
-              <a:rPr lang="en-US" sz="1300" b="1" dirty="0">
+              <a:rPr lang="en-US" sz="1220" b="1" dirty="0">
                 <a:solidFill>
                   <a:srgbClr val="0068B7"/>
                 </a:solidFill>
@@ -5354,7 +5356,7 @@
               </a:rPr>
               <a:t>Safeguard to plan</a:t>
             </a:r>
-            <a:endParaRPr lang="en-US" sz="1300" dirty="0"/>
+            <a:endParaRPr lang="en-US" sz="1220" dirty="0"/>
           </a:p>
         </p:txBody>
       </p:sp>
@@ -5366,8 +5368,8 @@
         </p:nvSpPr>
         <p:spPr>
           <a:xfrm>
-            <a:off x="7799832" y="4818888"/>
-            <a:ext cx="3145536" cy="688543"/>
+            <a:off x="7708392" y="4828032"/>
+            <a:ext cx="3282696" cy="749808"/>
           </a:xfrm>
           <a:prstGeom prst="rect">
             <a:avLst/>
@@ -5385,7 +5387,7 @@
               <a:buNone/>
             </a:pPr>
             <a:r>
-              <a:rPr lang="en-US" sz="1320" dirty="0">
+              <a:rPr lang="en-US" sz="1220" dirty="0">
                 <a:solidFill>
                   <a:srgbClr val="17364A"/>
                 </a:solidFill>
@@ -5393,9 +5395,9 @@
                 <a:ea typeface="Aptos" pitchFamily="34" charset="-122"/>
                 <a:cs typeface="Aptos" pitchFamily="34" charset="-120"/>
               </a:rPr>
-              <a:t>Identify what could go wrong, who could be affected, what safeguards are needed, and what evidence should be reviewed before use.</a:t>
-            </a:r>
-            <a:endParaRPr lang="en-US" sz="1320" dirty="0"/>
+              <a:t>Identify what could go wrong, who could be affected, what safeguards are needed,.</a:t>
+            </a:r>
+            <a:endParaRPr lang="en-US" sz="1220" dirty="0"/>
           </a:p>
         </p:txBody>
       </p:sp>
@@ -5686,8 +5688,8 @@
         </p:nvSpPr>
         <p:spPr>
           <a:xfrm>
-            <a:off x="868680" y="1508760"/>
-            <a:ext cx="6309360" cy="4160520"/>
+            <a:off x="822960" y="1463040"/>
+            <a:ext cx="6565392" cy="4343400"/>
           </a:xfrm>
           <a:prstGeom prst="rect">
             <a:avLst/>
@@ -5705,7 +5707,7 @@
               <a:buNone/>
             </a:pPr>
             <a:r>
-              <a:rPr lang="en-US" sz="2100" dirty="0">
+              <a:rPr lang="en-US" sz="1920" dirty="0">
                 <a:solidFill>
                   <a:srgbClr val="003A63"/>
                 </a:solidFill>
@@ -5715,14 +5717,14 @@
               </a:rPr>
               <a:t>• Workflow failure.</a:t>
             </a:r>
-            <a:endParaRPr lang="en-US" sz="2100" dirty="0"/>
-          </a:p>
-          <a:p>
-            <a:pPr indent="0" marL="0">
-              <a:buNone/>
-            </a:pPr>
-            <a:r>
-              <a:rPr lang="en-US" sz="2100" dirty="0">
+            <a:endParaRPr lang="en-US" sz="1920" dirty="0"/>
+          </a:p>
+          <a:p>
+            <a:pPr indent="0" marL="0">
+              <a:buNone/>
+            </a:pPr>
+            <a:r>
+              <a:rPr lang="en-US" sz="1920" dirty="0">
                 <a:solidFill>
                   <a:srgbClr val="003A63"/>
                 </a:solidFill>
@@ -5732,14 +5734,14 @@
               </a:rPr>
               <a:t>• A technically accurate model may be unusable or misused.</a:t>
             </a:r>
-            <a:endParaRPr lang="en-US" sz="2100" dirty="0"/>
-          </a:p>
-          <a:p>
-            <a:pPr indent="0" marL="0">
-              <a:buNone/>
-            </a:pPr>
-            <a:r>
-              <a:rPr lang="en-US" sz="2100" dirty="0">
+            <a:endParaRPr lang="en-US" sz="1920" dirty="0"/>
+          </a:p>
+          <a:p>
+            <a:pPr indent="0" marL="0">
+              <a:buNone/>
+            </a:pPr>
+            <a:r>
+              <a:rPr lang="en-US" sz="1920" dirty="0">
                 <a:solidFill>
                   <a:srgbClr val="003A63"/>
                 </a:solidFill>
@@ -5747,9 +5749,9 @@
                 <a:ea typeface="Aptos" pitchFamily="34" charset="-122"/>
                 <a:cs typeface="Aptos" pitchFamily="34" charset="-120"/>
               </a:rPr>
-              <a:t>• Guardrails include usability testing, training, source visibility, and override documentation.</a:t>
-            </a:r>
-            <a:endParaRPr lang="en-US" sz="2100" dirty="0"/>
+              <a:t>• Guardrails include usability testing, training, source visibility, and.</a:t>
+            </a:r>
+            <a:endParaRPr lang="en-US" sz="1920" dirty="0"/>
           </a:p>
         </p:txBody>
       </p:sp>
@@ -5761,12 +5763,12 @@
         </p:nvSpPr>
         <p:spPr>
           <a:xfrm>
-            <a:off x="7635240" y="1325880"/>
-            <a:ext cx="3474720" cy="1207008"/>
+            <a:off x="7543800" y="1325880"/>
+            <a:ext cx="3611880" cy="1261872"/>
           </a:xfrm>
           <a:prstGeom prst="roundRect">
             <a:avLst>
-              <a:gd name="adj" fmla="val 9091"/>
+              <a:gd name="adj" fmla="val 8696"/>
             </a:avLst>
           </a:prstGeom>
           <a:solidFill>
@@ -5788,8 +5790,8 @@
         </p:nvSpPr>
         <p:spPr>
           <a:xfrm>
-            <a:off x="7799832" y="1472184"/>
-            <a:ext cx="3145536" cy="256032"/>
+            <a:off x="7708392" y="1453896"/>
+            <a:ext cx="3282696" cy="228600"/>
           </a:xfrm>
           <a:prstGeom prst="rect">
             <a:avLst/>
@@ -5805,7 +5807,7 @@
               <a:buNone/>
             </a:pPr>
             <a:r>
-              <a:rPr lang="en-US" sz="1300" b="1" dirty="0">
+              <a:rPr lang="en-US" sz="1220" b="1" dirty="0">
                 <a:solidFill>
                   <a:srgbClr val="0068B7"/>
                 </a:solidFill>
@@ -5815,7 +5817,7 @@
               </a:rPr>
               <a:t>Risk check</a:t>
             </a:r>
-            <a:endParaRPr lang="en-US" sz="1300" dirty="0"/>
+            <a:endParaRPr lang="en-US" sz="1220" dirty="0"/>
           </a:p>
         </p:txBody>
       </p:sp>
@@ -5827,8 +5829,8 @@
         </p:nvSpPr>
         <p:spPr>
           <a:xfrm>
-            <a:off x="7799832" y="1801368"/>
-            <a:ext cx="3145536" cy="640080"/>
+            <a:off x="7708392" y="1764792"/>
+            <a:ext cx="3282696" cy="749808"/>
           </a:xfrm>
           <a:prstGeom prst="rect">
             <a:avLst/>
@@ -5846,7 +5848,7 @@
               <a:buNone/>
             </a:pPr>
             <a:r>
-              <a:rPr lang="en-US" sz="1320" dirty="0">
+              <a:rPr lang="en-US" sz="1220" dirty="0">
                 <a:solidFill>
                   <a:srgbClr val="17364A"/>
                 </a:solidFill>
@@ -5856,7 +5858,7 @@
               </a:rPr>
               <a:t>Workflow failure.</a:t>
             </a:r>
-            <a:endParaRPr lang="en-US" sz="1320" dirty="0"/>
+            <a:endParaRPr lang="en-US" sz="1220" dirty="0"/>
           </a:p>
         </p:txBody>
       </p:sp>
@@ -5868,12 +5870,12 @@
         </p:nvSpPr>
         <p:spPr>
           <a:xfrm>
-            <a:off x="7635240" y="2670048"/>
-            <a:ext cx="3474720" cy="1536192"/>
+            <a:off x="7543800" y="2724912"/>
+            <a:ext cx="3611880" cy="1527048"/>
           </a:xfrm>
           <a:prstGeom prst="roundRect">
             <a:avLst>
-              <a:gd name="adj" fmla="val 7143"/>
+              <a:gd name="adj" fmla="val 7186"/>
             </a:avLst>
           </a:prstGeom>
           <a:solidFill>
@@ -5895,8 +5897,8 @@
         </p:nvSpPr>
         <p:spPr>
           <a:xfrm>
-            <a:off x="7799832" y="2816352"/>
-            <a:ext cx="3145536" cy="256032"/>
+            <a:off x="7708392" y="2852928"/>
+            <a:ext cx="3282696" cy="228600"/>
           </a:xfrm>
           <a:prstGeom prst="rect">
             <a:avLst/>
@@ -5912,7 +5914,7 @@
               <a:buNone/>
             </a:pPr>
             <a:r>
-              <a:rPr lang="en-US" sz="1300" b="1" dirty="0">
+              <a:rPr lang="en-US" sz="1220" b="1" dirty="0">
                 <a:solidFill>
                   <a:srgbClr val="0068B7"/>
                 </a:solidFill>
@@ -5922,7 +5924,7 @@
               </a:rPr>
               <a:t>Concept checkpoints</a:t>
             </a:r>
-            <a:endParaRPr lang="en-US" sz="1300" dirty="0"/>
+            <a:endParaRPr lang="en-US" sz="1220" dirty="0"/>
           </a:p>
         </p:txBody>
       </p:sp>
@@ -5934,8 +5936,8 @@
         </p:nvSpPr>
         <p:spPr>
           <a:xfrm>
-            <a:off x="7818120" y="3182112"/>
-            <a:ext cx="3090672" cy="877824"/>
+            <a:off x="7726680" y="3182112"/>
+            <a:ext cx="3227832" cy="960120"/>
           </a:xfrm>
           <a:prstGeom prst="rect">
             <a:avLst/>
@@ -5953,7 +5955,7 @@
               <a:buNone/>
             </a:pPr>
             <a:r>
-              <a:rPr lang="en-US" sz="1220" dirty="0">
+              <a:rPr lang="en-US" sz="1140" dirty="0">
                 <a:solidFill>
                   <a:srgbClr val="17364A"/>
                 </a:solidFill>
@@ -5963,14 +5965,14 @@
               </a:rPr>
               <a:t>Workflow failure.</a:t>
             </a:r>
-            <a:endParaRPr lang="en-US" sz="1220" dirty="0"/>
-          </a:p>
-          <a:p>
-            <a:pPr indent="0" marL="0">
-              <a:buNone/>
-            </a:pPr>
-            <a:r>
-              <a:rPr lang="en-US" sz="1220" dirty="0">
+            <a:endParaRPr lang="en-US" sz="1140" dirty="0"/>
+          </a:p>
+          <a:p>
+            <a:pPr indent="0" marL="0">
+              <a:buNone/>
+            </a:pPr>
+            <a:r>
+              <a:rPr lang="en-US" sz="1140" dirty="0">
                 <a:solidFill>
                   <a:srgbClr val="17364A"/>
                 </a:solidFill>
@@ -5978,16 +5980,16 @@
                 <a:ea typeface="Aptos" pitchFamily="34" charset="-122"/>
                 <a:cs typeface="Aptos" pitchFamily="34" charset="-120"/>
               </a:rPr>
-              <a:t>A technically accurate model may be unusable or misused.</a:t>
-            </a:r>
-            <a:endParaRPr lang="en-US" sz="1220" dirty="0"/>
-          </a:p>
-          <a:p>
-            <a:pPr indent="0" marL="0">
-              <a:buNone/>
-            </a:pPr>
-            <a:r>
-              <a:rPr lang="en-US" sz="1220" dirty="0">
+              <a:t>A technically accurate model may be unusable or.</a:t>
+            </a:r>
+            <a:endParaRPr lang="en-US" sz="1140" dirty="0"/>
+          </a:p>
+          <a:p>
+            <a:pPr indent="0" marL="0">
+              <a:buNone/>
+            </a:pPr>
+            <a:r>
+              <a:rPr lang="en-US" sz="1140" dirty="0">
                 <a:solidFill>
                   <a:srgbClr val="17364A"/>
                 </a:solidFill>
@@ -5995,9 +5997,9 @@
                 <a:ea typeface="Aptos" pitchFamily="34" charset="-122"/>
                 <a:cs typeface="Aptos" pitchFamily="34" charset="-120"/>
               </a:rPr>
-              <a:t>Guardrails include usability testing, training, source visibility,.</a:t>
-            </a:r>
-            <a:endParaRPr lang="en-US" sz="1220" dirty="0"/>
+              <a:t>Guardrails include usability testing, training,.</a:t>
+            </a:r>
+            <a:endParaRPr lang="en-US" sz="1140" dirty="0"/>
           </a:p>
         </p:txBody>
       </p:sp>
@@ -6009,12 +6011,12 @@
         </p:nvSpPr>
         <p:spPr>
           <a:xfrm>
-            <a:off x="7635240" y="4343400"/>
-            <a:ext cx="3474720" cy="1255471"/>
+            <a:off x="7543800" y="4389120"/>
+            <a:ext cx="3611880" cy="1261872"/>
           </a:xfrm>
           <a:prstGeom prst="roundRect">
             <a:avLst>
-              <a:gd name="adj" fmla="val 8740"/>
+              <a:gd name="adj" fmla="val 8696"/>
             </a:avLst>
           </a:prstGeom>
           <a:solidFill>
@@ -6036,8 +6038,8 @@
         </p:nvSpPr>
         <p:spPr>
           <a:xfrm>
-            <a:off x="7799832" y="4489704"/>
-            <a:ext cx="3145536" cy="256032"/>
+            <a:off x="7708392" y="4517136"/>
+            <a:ext cx="3282696" cy="228600"/>
           </a:xfrm>
           <a:prstGeom prst="rect">
             <a:avLst/>
@@ -6053,7 +6055,7 @@
               <a:buNone/>
             </a:pPr>
             <a:r>
-              <a:rPr lang="en-US" sz="1300" b="1" dirty="0">
+              <a:rPr lang="en-US" sz="1220" b="1" dirty="0">
                 <a:solidFill>
                   <a:srgbClr val="0068B7"/>
                 </a:solidFill>
@@ -6063,7 +6065,7 @@
               </a:rPr>
               <a:t>Safeguard to plan</a:t>
             </a:r>
-            <a:endParaRPr lang="en-US" sz="1300" dirty="0"/>
+            <a:endParaRPr lang="en-US" sz="1220" dirty="0"/>
           </a:p>
         </p:txBody>
       </p:sp>
@@ -6075,8 +6077,8 @@
         </p:nvSpPr>
         <p:spPr>
           <a:xfrm>
-            <a:off x="7799832" y="4818888"/>
-            <a:ext cx="3145536" cy="688543"/>
+            <a:off x="7708392" y="4828032"/>
+            <a:ext cx="3282696" cy="749808"/>
           </a:xfrm>
           <a:prstGeom prst="rect">
             <a:avLst/>
@@ -6094,7 +6096,7 @@
               <a:buNone/>
             </a:pPr>
             <a:r>
-              <a:rPr lang="en-US" sz="1320" dirty="0">
+              <a:rPr lang="en-US" sz="1220" dirty="0">
                 <a:solidFill>
                   <a:srgbClr val="17364A"/>
                 </a:solidFill>
@@ -6102,9 +6104,9 @@
                 <a:ea typeface="Aptos" pitchFamily="34" charset="-122"/>
                 <a:cs typeface="Aptos" pitchFamily="34" charset="-120"/>
               </a:rPr>
-              <a:t>Identify what could go wrong, who could be affected, what safeguards are needed, and what evidence should be reviewed before use.</a:t>
-            </a:r>
-            <a:endParaRPr lang="en-US" sz="1320" dirty="0"/>
+              <a:t>Identify what could go wrong, who could be affected, what safeguards are needed,.</a:t>
+            </a:r>
+            <a:endParaRPr lang="en-US" sz="1220" dirty="0"/>
           </a:p>
         </p:txBody>
       </p:sp>
@@ -6395,8 +6397,8 @@
         </p:nvSpPr>
         <p:spPr>
           <a:xfrm>
-            <a:off x="868680" y="1508760"/>
-            <a:ext cx="6309360" cy="4160520"/>
+            <a:off x="822960" y="1463040"/>
+            <a:ext cx="6565392" cy="4343400"/>
           </a:xfrm>
           <a:prstGeom prst="rect">
             <a:avLst/>
@@ -6414,7 +6416,7 @@
               <a:buNone/>
             </a:pPr>
             <a:r>
-              <a:rPr lang="en-US" sz="2100" dirty="0">
+              <a:rPr lang="en-US" sz="1920" dirty="0">
                 <a:solidFill>
                   <a:srgbClr val="003A63"/>
                 </a:solidFill>
@@ -6422,16 +6424,16 @@
                 <a:ea typeface="Aptos" pitchFamily="34" charset="-122"/>
                 <a:cs typeface="Aptos" pitchFamily="34" charset="-120"/>
               </a:rPr>
-              <a:t>• Advanced validation applies to predictive models, NLP tools, generative summaries, RAG.</a:t>
-            </a:r>
-            <a:endParaRPr lang="en-US" sz="2100" dirty="0"/>
-          </a:p>
-          <a:p>
-            <a:pPr indent="0" marL="0">
-              <a:buNone/>
-            </a:pPr>
-            <a:r>
-              <a:rPr lang="en-US" sz="2100" dirty="0">
+              <a:t>• Advanced validation applies to predictive models, NLP tools, generative.</a:t>
+            </a:r>
+            <a:endParaRPr lang="en-US" sz="1920" dirty="0"/>
+          </a:p>
+          <a:p>
+            <a:pPr indent="0" marL="0">
+              <a:buNone/>
+            </a:pPr>
+            <a:r>
+              <a:rPr lang="en-US" sz="1920" dirty="0">
                 <a:solidFill>
                   <a:srgbClr val="003A63"/>
                 </a:solidFill>
@@ -6439,16 +6441,16 @@
                 <a:ea typeface="Aptos" pitchFamily="34" charset="-122"/>
                 <a:cs typeface="Aptos" pitchFamily="34" charset="-120"/>
               </a:rPr>
-              <a:t>• For generative AI, validation may include factuality, completeness, source grounding,.</a:t>
-            </a:r>
-            <a:endParaRPr lang="en-US" sz="2100" dirty="0"/>
-          </a:p>
-          <a:p>
-            <a:pPr indent="0" marL="0">
-              <a:buNone/>
-            </a:pPr>
-            <a:r>
-              <a:rPr lang="en-US" sz="2100" dirty="0">
+              <a:t>• For generative AI, validation may include factuality, completeness, source.</a:t>
+            </a:r>
+            <a:endParaRPr lang="en-US" sz="1920" dirty="0"/>
+          </a:p>
+          <a:p>
+            <a:pPr indent="0" marL="0">
+              <a:buNone/>
+            </a:pPr>
+            <a:r>
+              <a:rPr lang="en-US" sz="1920" dirty="0">
                 <a:solidFill>
                   <a:srgbClr val="003A63"/>
                 </a:solidFill>
@@ -6458,7 +6460,7 @@
               </a:rPr>
               <a:t>• For RAG, validation should test retrieval quality and citation accuracy.</a:t>
             </a:r>
-            <a:endParaRPr lang="en-US" sz="2100" dirty="0"/>
+            <a:endParaRPr lang="en-US" sz="1920" dirty="0"/>
           </a:p>
         </p:txBody>
       </p:sp>
@@ -6470,12 +6472,12 @@
         </p:nvSpPr>
         <p:spPr>
           <a:xfrm>
-            <a:off x="7635240" y="1325880"/>
-            <a:ext cx="3474720" cy="1255471"/>
+            <a:off x="7543800" y="1325880"/>
+            <a:ext cx="3611880" cy="1261872"/>
           </a:xfrm>
           <a:prstGeom prst="roundRect">
             <a:avLst>
-              <a:gd name="adj" fmla="val 8740"/>
+              <a:gd name="adj" fmla="val 8696"/>
             </a:avLst>
           </a:prstGeom>
           <a:solidFill>
@@ -6497,8 +6499,8 @@
         </p:nvSpPr>
         <p:spPr>
           <a:xfrm>
-            <a:off x="7799832" y="1472184"/>
-            <a:ext cx="3145536" cy="256032"/>
+            <a:off x="7708392" y="1453896"/>
+            <a:ext cx="3282696" cy="228600"/>
           </a:xfrm>
           <a:prstGeom prst="rect">
             <a:avLst/>
@@ -6514,7 +6516,7 @@
               <a:buNone/>
             </a:pPr>
             <a:r>
-              <a:rPr lang="en-US" sz="1300" b="1" dirty="0">
+              <a:rPr lang="en-US" sz="1220" b="1" dirty="0">
                 <a:solidFill>
                   <a:srgbClr val="0068B7"/>
                 </a:solidFill>
@@ -6524,7 +6526,7 @@
               </a:rPr>
               <a:t>Risk check</a:t>
             </a:r>
-            <a:endParaRPr lang="en-US" sz="1300" dirty="0"/>
+            <a:endParaRPr lang="en-US" sz="1220" dirty="0"/>
           </a:p>
         </p:txBody>
       </p:sp>
@@ -6536,8 +6538,8 @@
         </p:nvSpPr>
         <p:spPr>
           <a:xfrm>
-            <a:off x="7799832" y="1801368"/>
-            <a:ext cx="3145536" cy="688543"/>
+            <a:off x="7708392" y="1764792"/>
+            <a:ext cx="3282696" cy="749808"/>
           </a:xfrm>
           <a:prstGeom prst="rect">
             <a:avLst/>
@@ -6555,7 +6557,7 @@
               <a:buNone/>
             </a:pPr>
             <a:r>
-              <a:rPr lang="en-US" sz="1320" dirty="0">
+              <a:rPr lang="en-US" sz="1220" dirty="0">
                 <a:solidFill>
                   <a:srgbClr val="17364A"/>
                 </a:solidFill>
@@ -6563,9 +6565,9 @@
                 <a:ea typeface="Aptos" pitchFamily="34" charset="-122"/>
                 <a:cs typeface="Aptos" pitchFamily="34" charset="-120"/>
               </a:rPr>
-              <a:t>Advanced validation applies to predictive models, NLP tools, generative summaries, RAG outputs, and.</a:t>
-            </a:r>
-            <a:endParaRPr lang="en-US" sz="1320" dirty="0"/>
+              <a:t>Advanced validation applies to predictive models, NLP tools, generative.</a:t>
+            </a:r>
+            <a:endParaRPr lang="en-US" sz="1220" dirty="0"/>
           </a:p>
         </p:txBody>
       </p:sp>
@@ -6577,12 +6579,12 @@
         </p:nvSpPr>
         <p:spPr>
           <a:xfrm>
-            <a:off x="7635240" y="2718511"/>
-            <a:ext cx="3474720" cy="1536192"/>
+            <a:off x="7543800" y="2724912"/>
+            <a:ext cx="3611880" cy="1527048"/>
           </a:xfrm>
           <a:prstGeom prst="roundRect">
             <a:avLst>
-              <a:gd name="adj" fmla="val 7143"/>
+              <a:gd name="adj" fmla="val 7186"/>
             </a:avLst>
           </a:prstGeom>
           <a:solidFill>
@@ -6604,8 +6606,8 @@
         </p:nvSpPr>
         <p:spPr>
           <a:xfrm>
-            <a:off x="7799832" y="2864815"/>
-            <a:ext cx="3145536" cy="256032"/>
+            <a:off x="7708392" y="2852928"/>
+            <a:ext cx="3282696" cy="228600"/>
           </a:xfrm>
           <a:prstGeom prst="rect">
             <a:avLst/>
@@ -6621,7 +6623,7 @@
               <a:buNone/>
             </a:pPr>
             <a:r>
-              <a:rPr lang="en-US" sz="1300" b="1" dirty="0">
+              <a:rPr lang="en-US" sz="1220" b="1" dirty="0">
                 <a:solidFill>
                   <a:srgbClr val="0068B7"/>
                 </a:solidFill>
@@ -6631,7 +6633,7 @@
               </a:rPr>
               <a:t>Concept checkpoints</a:t>
             </a:r>
-            <a:endParaRPr lang="en-US" sz="1300" dirty="0"/>
+            <a:endParaRPr lang="en-US" sz="1220" dirty="0"/>
           </a:p>
         </p:txBody>
       </p:sp>
@@ -6643,8 +6645,8 @@
         </p:nvSpPr>
         <p:spPr>
           <a:xfrm>
-            <a:off x="7818120" y="3230575"/>
-            <a:ext cx="3090672" cy="877824"/>
+            <a:off x="7726680" y="3182112"/>
+            <a:ext cx="3227832" cy="960120"/>
           </a:xfrm>
           <a:prstGeom prst="rect">
             <a:avLst/>
@@ -6662,7 +6664,7 @@
               <a:buNone/>
             </a:pPr>
             <a:r>
-              <a:rPr lang="en-US" sz="1220" dirty="0">
+              <a:rPr lang="en-US" sz="1140" dirty="0">
                 <a:solidFill>
                   <a:srgbClr val="17364A"/>
                 </a:solidFill>
@@ -6670,16 +6672,16 @@
                 <a:ea typeface="Aptos" pitchFamily="34" charset="-122"/>
                 <a:cs typeface="Aptos" pitchFamily="34" charset="-120"/>
               </a:rPr>
-              <a:t>Advanced validation applies to predictive models, NLP tools,.</a:t>
-            </a:r>
-            <a:endParaRPr lang="en-US" sz="1220" dirty="0"/>
-          </a:p>
-          <a:p>
-            <a:pPr indent="0" marL="0">
-              <a:buNone/>
-            </a:pPr>
-            <a:r>
-              <a:rPr lang="en-US" sz="1220" dirty="0">
+              <a:t>Advanced validation applies to predictive models,.</a:t>
+            </a:r>
+            <a:endParaRPr lang="en-US" sz="1140" dirty="0"/>
+          </a:p>
+          <a:p>
+            <a:pPr indent="0" marL="0">
+              <a:buNone/>
+            </a:pPr>
+            <a:r>
+              <a:rPr lang="en-US" sz="1140" dirty="0">
                 <a:solidFill>
                   <a:srgbClr val="17364A"/>
                 </a:solidFill>
@@ -6687,16 +6689,16 @@
                 <a:ea typeface="Aptos" pitchFamily="34" charset="-122"/>
                 <a:cs typeface="Aptos" pitchFamily="34" charset="-120"/>
               </a:rPr>
-              <a:t>For generative AI, validation may include factuality,.</a:t>
-            </a:r>
-            <a:endParaRPr lang="en-US" sz="1220" dirty="0"/>
-          </a:p>
-          <a:p>
-            <a:pPr indent="0" marL="0">
-              <a:buNone/>
-            </a:pPr>
-            <a:r>
-              <a:rPr lang="en-US" sz="1220" dirty="0">
+              <a:t>For generative AI, validation may include.</a:t>
+            </a:r>
+            <a:endParaRPr lang="en-US" sz="1140" dirty="0"/>
+          </a:p>
+          <a:p>
+            <a:pPr indent="0" marL="0">
+              <a:buNone/>
+            </a:pPr>
+            <a:r>
+              <a:rPr lang="en-US" sz="1140" dirty="0">
                 <a:solidFill>
                   <a:srgbClr val="17364A"/>
                 </a:solidFill>
@@ -6704,9 +6706,9 @@
                 <a:ea typeface="Aptos" pitchFamily="34" charset="-122"/>
                 <a:cs typeface="Aptos" pitchFamily="34" charset="-120"/>
               </a:rPr>
-              <a:t>For agentic workflows, validation should include action safety,.</a:t>
-            </a:r>
-            <a:endParaRPr lang="en-US" sz="1220" dirty="0"/>
+              <a:t>For agentic workflows, validation should include.</a:t>
+            </a:r>
+            <a:endParaRPr lang="en-US" sz="1140" dirty="0"/>
           </a:p>
         </p:txBody>
       </p:sp>
@@ -6718,12 +6720,12 @@
         </p:nvSpPr>
         <p:spPr>
           <a:xfrm>
-            <a:off x="7635240" y="4391863"/>
-            <a:ext cx="3474720" cy="1255471"/>
+            <a:off x="7543800" y="4389120"/>
+            <a:ext cx="3611880" cy="1261872"/>
           </a:xfrm>
           <a:prstGeom prst="roundRect">
             <a:avLst>
-              <a:gd name="adj" fmla="val 8740"/>
+              <a:gd name="adj" fmla="val 8696"/>
             </a:avLst>
           </a:prstGeom>
           <a:solidFill>
@@ -6745,8 +6747,8 @@
         </p:nvSpPr>
         <p:spPr>
           <a:xfrm>
-            <a:off x="7799832" y="4538167"/>
-            <a:ext cx="3145536" cy="256032"/>
+            <a:off x="7708392" y="4517136"/>
+            <a:ext cx="3282696" cy="228600"/>
           </a:xfrm>
           <a:prstGeom prst="rect">
             <a:avLst/>
@@ -6762,7 +6764,7 @@
               <a:buNone/>
             </a:pPr>
             <a:r>
-              <a:rPr lang="en-US" sz="1300" b="1" dirty="0">
+              <a:rPr lang="en-US" sz="1220" b="1" dirty="0">
                 <a:solidFill>
                   <a:srgbClr val="0068B7"/>
                 </a:solidFill>
@@ -6772,7 +6774,7 @@
               </a:rPr>
               <a:t>Safeguard to plan</a:t>
             </a:r>
-            <a:endParaRPr lang="en-US" sz="1300" dirty="0"/>
+            <a:endParaRPr lang="en-US" sz="1220" dirty="0"/>
           </a:p>
         </p:txBody>
       </p:sp>
@@ -6784,8 +6786,8 @@
         </p:nvSpPr>
         <p:spPr>
           <a:xfrm>
-            <a:off x="7799832" y="4867351"/>
-            <a:ext cx="3145536" cy="688543"/>
+            <a:off x="7708392" y="4828032"/>
+            <a:ext cx="3282696" cy="749808"/>
           </a:xfrm>
           <a:prstGeom prst="rect">
             <a:avLst/>
@@ -6803,7 +6805,7 @@
               <a:buNone/>
             </a:pPr>
             <a:r>
-              <a:rPr lang="en-US" sz="1320" dirty="0">
+              <a:rPr lang="en-US" sz="1220" dirty="0">
                 <a:solidFill>
                   <a:srgbClr val="17364A"/>
                 </a:solidFill>
@@ -6811,9 +6813,9 @@
                 <a:ea typeface="Aptos" pitchFamily="34" charset="-122"/>
                 <a:cs typeface="Aptos" pitchFamily="34" charset="-120"/>
               </a:rPr>
-              <a:t>Identify what could go wrong, who could be affected, what safeguards are needed, and what evidence should be reviewed before use.</a:t>
-            </a:r>
-            <a:endParaRPr lang="en-US" sz="1320" dirty="0"/>
+              <a:t>Identify what could go wrong, who could be affected, what safeguards are needed,.</a:t>
+            </a:r>
+            <a:endParaRPr lang="en-US" sz="1220" dirty="0"/>
           </a:p>
         </p:txBody>
       </p:sp>
@@ -7104,8 +7106,8 @@
         </p:nvSpPr>
         <p:spPr>
           <a:xfrm>
-            <a:off x="868680" y="1508760"/>
-            <a:ext cx="6309360" cy="4160520"/>
+            <a:off x="822960" y="1463040"/>
+            <a:ext cx="6565392" cy="4343400"/>
           </a:xfrm>
           <a:prstGeom prst="rect">
             <a:avLst/>
@@ -7123,7 +7125,7 @@
               <a:buNone/>
             </a:pPr>
             <a:r>
-              <a:rPr lang="en-US" sz="2100" dirty="0">
+              <a:rPr lang="en-US" sz="1920" dirty="0">
                 <a:solidFill>
                   <a:srgbClr val="003A63"/>
                 </a:solidFill>
@@ -7133,14 +7135,14 @@
               </a:rPr>
               <a:t>• What decision or action will the AI output support?</a:t>
             </a:r>
-            <a:endParaRPr lang="en-US" sz="2100" dirty="0"/>
-          </a:p>
-          <a:p>
-            <a:pPr indent="0" marL="0">
-              <a:buNone/>
-            </a:pPr>
-            <a:r>
-              <a:rPr lang="en-US" sz="2100" dirty="0">
+            <a:endParaRPr lang="en-US" sz="1920" dirty="0"/>
+          </a:p>
+          <a:p>
+            <a:pPr indent="0" marL="0">
+              <a:buNone/>
+            </a:pPr>
+            <a:r>
+              <a:rPr lang="en-US" sz="1920" dirty="0">
                 <a:solidFill>
                   <a:srgbClr val="003A63"/>
                 </a:solidFill>
@@ -7150,14 +7152,14 @@
               </a:rPr>
               <a:t>• Which performance metrics match the consequences of error?</a:t>
             </a:r>
-            <a:endParaRPr lang="en-US" sz="2100" dirty="0"/>
-          </a:p>
-          <a:p>
-            <a:pPr indent="0" marL="0">
-              <a:buNone/>
-            </a:pPr>
-            <a:r>
-              <a:rPr lang="en-US" sz="2100" dirty="0">
+            <a:endParaRPr lang="en-US" sz="1920" dirty="0"/>
+          </a:p>
+          <a:p>
+            <a:pPr indent="0" marL="0">
+              <a:buNone/>
+            </a:pPr>
+            <a:r>
+              <a:rPr lang="en-US" sz="1920" dirty="0">
                 <a:solidFill>
                   <a:srgbClr val="003A63"/>
                 </a:solidFill>
@@ -7167,7 +7169,7 @@
               </a:rPr>
               <a:t>• Which subgroups, data sources, or settings require separate review?</a:t>
             </a:r>
-            <a:endParaRPr lang="en-US" sz="2100" dirty="0"/>
+            <a:endParaRPr lang="en-US" sz="1920" dirty="0"/>
           </a:p>
         </p:txBody>
       </p:sp>
@@ -7179,12 +7181,12 @@
         </p:nvSpPr>
         <p:spPr>
           <a:xfrm>
-            <a:off x="7635240" y="1325880"/>
-            <a:ext cx="3474720" cy="1207008"/>
+            <a:off x="7543800" y="1325880"/>
+            <a:ext cx="3611880" cy="1261872"/>
           </a:xfrm>
           <a:prstGeom prst="roundRect">
             <a:avLst>
-              <a:gd name="adj" fmla="val 9091"/>
+              <a:gd name="adj" fmla="val 8696"/>
             </a:avLst>
           </a:prstGeom>
           <a:solidFill>
@@ -7206,8 +7208,8 @@
         </p:nvSpPr>
         <p:spPr>
           <a:xfrm>
-            <a:off x="7799832" y="1472184"/>
-            <a:ext cx="3145536" cy="256032"/>
+            <a:off x="7708392" y="1453896"/>
+            <a:ext cx="3282696" cy="228600"/>
           </a:xfrm>
           <a:prstGeom prst="rect">
             <a:avLst/>
@@ -7223,7 +7225,7 @@
               <a:buNone/>
             </a:pPr>
             <a:r>
-              <a:rPr lang="en-US" sz="1300" b="1" dirty="0">
+              <a:rPr lang="en-US" sz="1220" b="1" dirty="0">
                 <a:solidFill>
                   <a:srgbClr val="0068B7"/>
                 </a:solidFill>
@@ -7233,7 +7235,7 @@
               </a:rPr>
               <a:t>Risk check</a:t>
             </a:r>
-            <a:endParaRPr lang="en-US" sz="1300" dirty="0"/>
+            <a:endParaRPr lang="en-US" sz="1220" dirty="0"/>
           </a:p>
         </p:txBody>
       </p:sp>
@@ -7245,8 +7247,8 @@
         </p:nvSpPr>
         <p:spPr>
           <a:xfrm>
-            <a:off x="7799832" y="1801368"/>
-            <a:ext cx="3145536" cy="640080"/>
+            <a:off x="7708392" y="1764792"/>
+            <a:ext cx="3282696" cy="749808"/>
           </a:xfrm>
           <a:prstGeom prst="rect">
             <a:avLst/>
@@ -7264,7 +7266,7 @@
               <a:buNone/>
             </a:pPr>
             <a:r>
-              <a:rPr lang="en-US" sz="1320" dirty="0">
+              <a:rPr lang="en-US" sz="1220" dirty="0">
                 <a:solidFill>
                   <a:srgbClr val="17364A"/>
                 </a:solidFill>
@@ -7274,7 +7276,7 @@
               </a:rPr>
               <a:t>What decision or action will the AI output support?</a:t>
             </a:r>
-            <a:endParaRPr lang="en-US" sz="1320" dirty="0"/>
+            <a:endParaRPr lang="en-US" sz="1220" dirty="0"/>
           </a:p>
         </p:txBody>
       </p:sp>
@@ -7286,12 +7288,12 @@
         </p:nvSpPr>
         <p:spPr>
           <a:xfrm>
-            <a:off x="7635240" y="2670048"/>
-            <a:ext cx="3474720" cy="1536192"/>
+            <a:off x="7543800" y="2724912"/>
+            <a:ext cx="3611880" cy="1527048"/>
           </a:xfrm>
           <a:prstGeom prst="roundRect">
             <a:avLst>
-              <a:gd name="adj" fmla="val 7143"/>
+              <a:gd name="adj" fmla="val 7186"/>
             </a:avLst>
           </a:prstGeom>
           <a:solidFill>
@@ -7313,8 +7315,8 @@
         </p:nvSpPr>
         <p:spPr>
           <a:xfrm>
-            <a:off x="7799832" y="2816352"/>
-            <a:ext cx="3145536" cy="256032"/>
+            <a:off x="7708392" y="2852928"/>
+            <a:ext cx="3282696" cy="228600"/>
           </a:xfrm>
           <a:prstGeom prst="rect">
             <a:avLst/>
@@ -7330,7 +7332,7 @@
               <a:buNone/>
             </a:pPr>
             <a:r>
-              <a:rPr lang="en-US" sz="1300" b="1" dirty="0">
+              <a:rPr lang="en-US" sz="1220" b="1" dirty="0">
                 <a:solidFill>
                   <a:srgbClr val="0068B7"/>
                 </a:solidFill>
@@ -7340,7 +7342,7 @@
               </a:rPr>
               <a:t>Concept checkpoints</a:t>
             </a:r>
-            <a:endParaRPr lang="en-US" sz="1300" dirty="0"/>
+            <a:endParaRPr lang="en-US" sz="1220" dirty="0"/>
           </a:p>
         </p:txBody>
       </p:sp>
@@ -7352,8 +7354,8 @@
         </p:nvSpPr>
         <p:spPr>
           <a:xfrm>
-            <a:off x="7818120" y="3182112"/>
-            <a:ext cx="3090672" cy="877824"/>
+            <a:off x="7726680" y="3182112"/>
+            <a:ext cx="3227832" cy="960120"/>
           </a:xfrm>
           <a:prstGeom prst="rect">
             <a:avLst/>
@@ -7371,7 +7373,7 @@
               <a:buNone/>
             </a:pPr>
             <a:r>
-              <a:rPr lang="en-US" sz="1220" dirty="0">
+              <a:rPr lang="en-US" sz="1140" dirty="0">
                 <a:solidFill>
                   <a:srgbClr val="17364A"/>
                 </a:solidFill>
@@ -7381,14 +7383,14 @@
               </a:rPr>
               <a:t>What decision or action will the AI output support?</a:t>
             </a:r>
-            <a:endParaRPr lang="en-US" sz="1220" dirty="0"/>
-          </a:p>
-          <a:p>
-            <a:pPr indent="0" marL="0">
-              <a:buNone/>
-            </a:pPr>
-            <a:r>
-              <a:rPr lang="en-US" sz="1220" dirty="0">
+            <a:endParaRPr lang="en-US" sz="1140" dirty="0"/>
+          </a:p>
+          <a:p>
+            <a:pPr indent="0" marL="0">
+              <a:buNone/>
+            </a:pPr>
+            <a:r>
+              <a:rPr lang="en-US" sz="1140" dirty="0">
                 <a:solidFill>
                   <a:srgbClr val="17364A"/>
                 </a:solidFill>
@@ -7396,16 +7398,16 @@
                 <a:ea typeface="Aptos" pitchFamily="34" charset="-122"/>
                 <a:cs typeface="Aptos" pitchFamily="34" charset="-120"/>
               </a:rPr>
-              <a:t>Which performance metrics match the consequences of error?</a:t>
-            </a:r>
-            <a:endParaRPr lang="en-US" sz="1220" dirty="0"/>
-          </a:p>
-          <a:p>
-            <a:pPr indent="0" marL="0">
-              <a:buNone/>
-            </a:pPr>
-            <a:r>
-              <a:rPr lang="en-US" sz="1220" dirty="0">
+              <a:t>Which performance metrics match the consequences.</a:t>
+            </a:r>
+            <a:endParaRPr lang="en-US" sz="1140" dirty="0"/>
+          </a:p>
+          <a:p>
+            <a:pPr indent="0" marL="0">
+              <a:buNone/>
+            </a:pPr>
+            <a:r>
+              <a:rPr lang="en-US" sz="1140" dirty="0">
                 <a:solidFill>
                   <a:srgbClr val="17364A"/>
                 </a:solidFill>
@@ -7413,9 +7415,9 @@
                 <a:ea typeface="Aptos" pitchFamily="34" charset="-122"/>
                 <a:cs typeface="Aptos" pitchFamily="34" charset="-120"/>
               </a:rPr>
-              <a:t>Which subgroups, data sources, or settings require separate review?</a:t>
-            </a:r>
-            <a:endParaRPr lang="en-US" sz="1220" dirty="0"/>
+              <a:t>Which subgroups, data sources, or settings require.</a:t>
+            </a:r>
+            <a:endParaRPr lang="en-US" sz="1140" dirty="0"/>
           </a:p>
         </p:txBody>
       </p:sp>
@@ -7427,12 +7429,12 @@
         </p:nvSpPr>
         <p:spPr>
           <a:xfrm>
-            <a:off x="7635240" y="4343400"/>
-            <a:ext cx="3474720" cy="1255471"/>
+            <a:off x="7543800" y="4389120"/>
+            <a:ext cx="3611880" cy="1261872"/>
           </a:xfrm>
           <a:prstGeom prst="roundRect">
             <a:avLst>
-              <a:gd name="adj" fmla="val 8740"/>
+              <a:gd name="adj" fmla="val 8696"/>
             </a:avLst>
           </a:prstGeom>
           <a:solidFill>
@@ -7454,8 +7456,8 @@
         </p:nvSpPr>
         <p:spPr>
           <a:xfrm>
-            <a:off x="7799832" y="4489704"/>
-            <a:ext cx="3145536" cy="256032"/>
+            <a:off x="7708392" y="4517136"/>
+            <a:ext cx="3282696" cy="228600"/>
           </a:xfrm>
           <a:prstGeom prst="rect">
             <a:avLst/>
@@ -7471,7 +7473,7 @@
               <a:buNone/>
             </a:pPr>
             <a:r>
-              <a:rPr lang="en-US" sz="1300" b="1" dirty="0">
+              <a:rPr lang="en-US" sz="1220" b="1" dirty="0">
                 <a:solidFill>
                   <a:srgbClr val="0068B7"/>
                 </a:solidFill>
@@ -7481,7 +7483,7 @@
               </a:rPr>
               <a:t>Safeguard to plan</a:t>
             </a:r>
-            <a:endParaRPr lang="en-US" sz="1300" dirty="0"/>
+            <a:endParaRPr lang="en-US" sz="1220" dirty="0"/>
           </a:p>
         </p:txBody>
       </p:sp>
@@ -7493,8 +7495,8 @@
         </p:nvSpPr>
         <p:spPr>
           <a:xfrm>
-            <a:off x="7799832" y="4818888"/>
-            <a:ext cx="3145536" cy="688543"/>
+            <a:off x="7708392" y="4828032"/>
+            <a:ext cx="3282696" cy="749808"/>
           </a:xfrm>
           <a:prstGeom prst="rect">
             <a:avLst/>
@@ -7512,7 +7514,7 @@
               <a:buNone/>
             </a:pPr>
             <a:r>
-              <a:rPr lang="en-US" sz="1320" dirty="0">
+              <a:rPr lang="en-US" sz="1220" dirty="0">
                 <a:solidFill>
                   <a:srgbClr val="17364A"/>
                 </a:solidFill>
@@ -7520,9 +7522,9 @@
                 <a:ea typeface="Aptos" pitchFamily="34" charset="-122"/>
                 <a:cs typeface="Aptos" pitchFamily="34" charset="-120"/>
               </a:rPr>
-              <a:t>Identify what could go wrong, who could be affected, what safeguards are needed, and what evidence should be reviewed before use.</a:t>
-            </a:r>
-            <a:endParaRPr lang="en-US" sz="1320" dirty="0"/>
+              <a:t>Identify what could go wrong, who could be affected, what safeguards are needed,.</a:t>
+            </a:r>
+            <a:endParaRPr lang="en-US" sz="1220" dirty="0"/>
           </a:p>
         </p:txBody>
       </p:sp>
@@ -7813,8 +7815,8 @@
         </p:nvSpPr>
         <p:spPr>
           <a:xfrm>
-            <a:off x="868680" y="1508760"/>
-            <a:ext cx="6309360" cy="4160520"/>
+            <a:off x="822960" y="1463040"/>
+            <a:ext cx="6565392" cy="4343400"/>
           </a:xfrm>
           <a:prstGeom prst="rect">
             <a:avLst/>
@@ -7832,7 +7834,7 @@
               <a:buNone/>
             </a:pPr>
             <a:r>
-              <a:rPr lang="en-US" sz="2100" dirty="0">
+              <a:rPr lang="en-US" sz="1920" dirty="0">
                 <a:solidFill>
                   <a:srgbClr val="003A63"/>
                 </a:solidFill>
@@ -7842,14 +7844,14 @@
               </a:rPr>
               <a:t>• What would make performance unacceptable for this use case?</a:t>
             </a:r>
-            <a:endParaRPr lang="en-US" sz="2100" dirty="0"/>
-          </a:p>
-          <a:p>
-            <a:pPr indent="0" marL="0">
-              <a:buNone/>
-            </a:pPr>
-            <a:r>
-              <a:rPr lang="en-US" sz="2100" dirty="0">
+            <a:endParaRPr lang="en-US" sz="1920" dirty="0"/>
+          </a:p>
+          <a:p>
+            <a:pPr indent="0" marL="0">
+              <a:buNone/>
+            </a:pPr>
+            <a:r>
+              <a:rPr lang="en-US" sz="1920" dirty="0">
                 <a:solidFill>
                   <a:srgbClr val="003A63"/>
                 </a:solidFill>
@@ -7859,7 +7861,7 @@
               </a:rPr>
               <a:t>• How will the agency monitor performance after deployment?</a:t>
             </a:r>
-            <a:endParaRPr lang="en-US" sz="2100" dirty="0"/>
+            <a:endParaRPr lang="en-US" sz="1920" dirty="0"/>
           </a:p>
         </p:txBody>
       </p:sp>
@@ -7871,12 +7873,12 @@
         </p:nvSpPr>
         <p:spPr>
           <a:xfrm>
-            <a:off x="7635240" y="1325880"/>
-            <a:ext cx="3474720" cy="1207008"/>
+            <a:off x="7543800" y="1325880"/>
+            <a:ext cx="3611880" cy="1261872"/>
           </a:xfrm>
           <a:prstGeom prst="roundRect">
             <a:avLst>
-              <a:gd name="adj" fmla="val 9091"/>
+              <a:gd name="adj" fmla="val 8696"/>
             </a:avLst>
           </a:prstGeom>
           <a:solidFill>
@@ -7898,8 +7900,8 @@
         </p:nvSpPr>
         <p:spPr>
           <a:xfrm>
-            <a:off x="7799832" y="1472184"/>
-            <a:ext cx="3145536" cy="256032"/>
+            <a:off x="7708392" y="1453896"/>
+            <a:ext cx="3282696" cy="228600"/>
           </a:xfrm>
           <a:prstGeom prst="rect">
             <a:avLst/>
@@ -7915,7 +7917,7 @@
               <a:buNone/>
             </a:pPr>
             <a:r>
-              <a:rPr lang="en-US" sz="1300" b="1" dirty="0">
+              <a:rPr lang="en-US" sz="1220" b="1" dirty="0">
                 <a:solidFill>
                   <a:srgbClr val="0068B7"/>
                 </a:solidFill>
@@ -7925,7 +7927,7 @@
               </a:rPr>
               <a:t>Risk check</a:t>
             </a:r>
-            <a:endParaRPr lang="en-US" sz="1300" dirty="0"/>
+            <a:endParaRPr lang="en-US" sz="1220" dirty="0"/>
           </a:p>
         </p:txBody>
       </p:sp>
@@ -7937,8 +7939,8 @@
         </p:nvSpPr>
         <p:spPr>
           <a:xfrm>
-            <a:off x="7799832" y="1801368"/>
-            <a:ext cx="3145536" cy="640080"/>
+            <a:off x="7708392" y="1764792"/>
+            <a:ext cx="3282696" cy="749808"/>
           </a:xfrm>
           <a:prstGeom prst="rect">
             <a:avLst/>
@@ -7956,7 +7958,7 @@
               <a:buNone/>
             </a:pPr>
             <a:r>
-              <a:rPr lang="en-US" sz="1320" dirty="0">
+              <a:rPr lang="en-US" sz="1220" dirty="0">
                 <a:solidFill>
                   <a:srgbClr val="17364A"/>
                 </a:solidFill>
@@ -7966,7 +7968,7 @@
               </a:rPr>
               <a:t>What would make performance unacceptable for this use case?</a:t>
             </a:r>
-            <a:endParaRPr lang="en-US" sz="1320" dirty="0"/>
+            <a:endParaRPr lang="en-US" sz="1220" dirty="0"/>
           </a:p>
         </p:txBody>
       </p:sp>
@@ -7978,12 +7980,12 @@
         </p:nvSpPr>
         <p:spPr>
           <a:xfrm>
-            <a:off x="7635240" y="2670048"/>
-            <a:ext cx="3474720" cy="1536192"/>
+            <a:off x="7543800" y="2724912"/>
+            <a:ext cx="3611880" cy="1527048"/>
           </a:xfrm>
           <a:prstGeom prst="roundRect">
             <a:avLst>
-              <a:gd name="adj" fmla="val 7143"/>
+              <a:gd name="adj" fmla="val 7186"/>
             </a:avLst>
           </a:prstGeom>
           <a:solidFill>
@@ -8005,8 +8007,8 @@
         </p:nvSpPr>
         <p:spPr>
           <a:xfrm>
-            <a:off x="7799832" y="2816352"/>
-            <a:ext cx="3145536" cy="256032"/>
+            <a:off x="7708392" y="2852928"/>
+            <a:ext cx="3282696" cy="228600"/>
           </a:xfrm>
           <a:prstGeom prst="rect">
             <a:avLst/>
@@ -8022,7 +8024,7 @@
               <a:buNone/>
             </a:pPr>
             <a:r>
-              <a:rPr lang="en-US" sz="1300" b="1" dirty="0">
+              <a:rPr lang="en-US" sz="1220" b="1" dirty="0">
                 <a:solidFill>
                   <a:srgbClr val="0068B7"/>
                 </a:solidFill>
@@ -8032,7 +8034,7 @@
               </a:rPr>
               <a:t>Concept checkpoints</a:t>
             </a:r>
-            <a:endParaRPr lang="en-US" sz="1300" dirty="0"/>
+            <a:endParaRPr lang="en-US" sz="1220" dirty="0"/>
           </a:p>
         </p:txBody>
       </p:sp>
@@ -8044,8 +8046,8 @@
         </p:nvSpPr>
         <p:spPr>
           <a:xfrm>
-            <a:off x="7818120" y="3182112"/>
-            <a:ext cx="3090672" cy="877824"/>
+            <a:off x="7726680" y="3182112"/>
+            <a:ext cx="3227832" cy="960120"/>
           </a:xfrm>
           <a:prstGeom prst="rect">
             <a:avLst/>
@@ -8063,7 +8065,7 @@
               <a:buNone/>
             </a:pPr>
             <a:r>
-              <a:rPr lang="en-US" sz="1220" dirty="0">
+              <a:rPr lang="en-US" sz="1140" dirty="0">
                 <a:solidFill>
                   <a:srgbClr val="17364A"/>
                 </a:solidFill>
@@ -8071,16 +8073,16 @@
                 <a:ea typeface="Aptos" pitchFamily="34" charset="-122"/>
                 <a:cs typeface="Aptos" pitchFamily="34" charset="-120"/>
               </a:rPr>
-              <a:t>What would make performance unacceptable for this use case?</a:t>
-            </a:r>
-            <a:endParaRPr lang="en-US" sz="1220" dirty="0"/>
-          </a:p>
-          <a:p>
-            <a:pPr indent="0" marL="0">
-              <a:buNone/>
-            </a:pPr>
-            <a:r>
-              <a:rPr lang="en-US" sz="1220" dirty="0">
+              <a:t>What would make performance unacceptable for this.</a:t>
+            </a:r>
+            <a:endParaRPr lang="en-US" sz="1140" dirty="0"/>
+          </a:p>
+          <a:p>
+            <a:pPr indent="0" marL="0">
+              <a:buNone/>
+            </a:pPr>
+            <a:r>
+              <a:rPr lang="en-US" sz="1140" dirty="0">
                 <a:solidFill>
                   <a:srgbClr val="17364A"/>
                 </a:solidFill>
@@ -8088,9 +8090,9 @@
                 <a:ea typeface="Aptos" pitchFamily="34" charset="-122"/>
                 <a:cs typeface="Aptos" pitchFamily="34" charset="-120"/>
               </a:rPr>
-              <a:t>How will the agency monitor performance after deployment?</a:t>
-            </a:r>
-            <a:endParaRPr lang="en-US" sz="1220" dirty="0"/>
+              <a:t>How will the agency monitor performance after.</a:t>
+            </a:r>
+            <a:endParaRPr lang="en-US" sz="1140" dirty="0"/>
           </a:p>
         </p:txBody>
       </p:sp>
@@ -8102,12 +8104,12 @@
         </p:nvSpPr>
         <p:spPr>
           <a:xfrm>
-            <a:off x="7635240" y="4343400"/>
-            <a:ext cx="3474720" cy="1255471"/>
+            <a:off x="7543800" y="4389120"/>
+            <a:ext cx="3611880" cy="1261872"/>
           </a:xfrm>
           <a:prstGeom prst="roundRect">
             <a:avLst>
-              <a:gd name="adj" fmla="val 8740"/>
+              <a:gd name="adj" fmla="val 8696"/>
             </a:avLst>
           </a:prstGeom>
           <a:solidFill>
@@ -8129,8 +8131,8 @@
         </p:nvSpPr>
         <p:spPr>
           <a:xfrm>
-            <a:off x="7799832" y="4489704"/>
-            <a:ext cx="3145536" cy="256032"/>
+            <a:off x="7708392" y="4517136"/>
+            <a:ext cx="3282696" cy="228600"/>
           </a:xfrm>
           <a:prstGeom prst="rect">
             <a:avLst/>
@@ -8146,7 +8148,7 @@
               <a:buNone/>
             </a:pPr>
             <a:r>
-              <a:rPr lang="en-US" sz="1300" b="1" dirty="0">
+              <a:rPr lang="en-US" sz="1220" b="1" dirty="0">
                 <a:solidFill>
                   <a:srgbClr val="0068B7"/>
                 </a:solidFill>
@@ -8156,7 +8158,7 @@
               </a:rPr>
               <a:t>Safeguard to plan</a:t>
             </a:r>
-            <a:endParaRPr lang="en-US" sz="1300" dirty="0"/>
+            <a:endParaRPr lang="en-US" sz="1220" dirty="0"/>
           </a:p>
         </p:txBody>
       </p:sp>
@@ -8168,8 +8170,8 @@
         </p:nvSpPr>
         <p:spPr>
           <a:xfrm>
-            <a:off x="7799832" y="4818888"/>
-            <a:ext cx="3145536" cy="688543"/>
+            <a:off x="7708392" y="4828032"/>
+            <a:ext cx="3282696" cy="749808"/>
           </a:xfrm>
           <a:prstGeom prst="rect">
             <a:avLst/>
@@ -8187,7 +8189,7 @@
               <a:buNone/>
             </a:pPr>
             <a:r>
-              <a:rPr lang="en-US" sz="1320" dirty="0">
+              <a:rPr lang="en-US" sz="1220" dirty="0">
                 <a:solidFill>
                   <a:srgbClr val="17364A"/>
                 </a:solidFill>
@@ -8195,9 +8197,9 @@
                 <a:ea typeface="Aptos" pitchFamily="34" charset="-122"/>
                 <a:cs typeface="Aptos" pitchFamily="34" charset="-120"/>
               </a:rPr>
-              <a:t>Identify what could go wrong, who could be affected, what safeguards are needed, and what evidence should be reviewed before use.</a:t>
-            </a:r>
-            <a:endParaRPr lang="en-US" sz="1320" dirty="0"/>
+              <a:t>Identify what could go wrong, who could be affected, what safeguards are needed,.</a:t>
+            </a:r>
+            <a:endParaRPr lang="en-US" sz="1220" dirty="0"/>
           </a:p>
         </p:txBody>
       </p:sp>
@@ -8488,8 +8490,8 @@
         </p:nvSpPr>
         <p:spPr>
           <a:xfrm>
-            <a:off x="868680" y="1508760"/>
-            <a:ext cx="6309360" cy="4160520"/>
+            <a:off x="822960" y="1463040"/>
+            <a:ext cx="6565392" cy="4343400"/>
           </a:xfrm>
           <a:prstGeom prst="rect">
             <a:avLst/>
@@ -8507,7 +8509,7 @@
               <a:buNone/>
             </a:pPr>
             <a:r>
-              <a:rPr lang="en-US" sz="2100" dirty="0">
+              <a:rPr lang="en-US" sz="1920" dirty="0">
                 <a:solidFill>
                   <a:srgbClr val="003A63"/>
                 </a:solidFill>
@@ -8517,14 +8519,14 @@
               </a:rPr>
               <a:t>• Create an advanced validation plan for one AI-supported workflow.</a:t>
             </a:r>
-            <a:endParaRPr lang="en-US" sz="2100" dirty="0"/>
-          </a:p>
-          <a:p>
-            <a:pPr indent="0" marL="0">
-              <a:buNone/>
-            </a:pPr>
-            <a:r>
-              <a:rPr lang="en-US" sz="2100" dirty="0">
+            <a:endParaRPr lang="en-US" sz="1920" dirty="0"/>
+          </a:p>
+          <a:p>
+            <a:pPr indent="0" marL="0">
+              <a:buNone/>
+            </a:pPr>
+            <a:r>
+              <a:rPr lang="en-US" sz="1920" dirty="0">
                 <a:solidFill>
                   <a:srgbClr val="003A63"/>
                 </a:solidFill>
@@ -8532,16 +8534,16 @@
                 <a:ea typeface="Aptos" pitchFamily="34" charset="-122"/>
                 <a:cs typeface="Aptos" pitchFamily="34" charset="-120"/>
               </a:rPr>
-              <a:t>• Include intended use, validation dataset, comparison standard, performance metrics, subgroup.</a:t>
-            </a:r>
-            <a:endParaRPr lang="en-US" sz="2100" dirty="0"/>
-          </a:p>
-          <a:p>
-            <a:pPr indent="0" marL="0">
-              <a:buNone/>
-            </a:pPr>
-            <a:r>
-              <a:rPr lang="en-US" sz="2100" dirty="0">
+              <a:t>• Include intended use, validation dataset, comparison standard, performance.</a:t>
+            </a:r>
+            <a:endParaRPr lang="en-US" sz="1920" dirty="0"/>
+          </a:p>
+          <a:p>
+            <a:pPr indent="0" marL="0">
+              <a:buNone/>
+            </a:pPr>
+            <a:r>
+              <a:rPr lang="en-US" sz="1920" dirty="0">
                 <a:solidFill>
                   <a:srgbClr val="003A63"/>
                 </a:solidFill>
@@ -8549,9 +8551,9 @@
                 <a:ea typeface="Aptos" pitchFamily="34" charset="-122"/>
                 <a:cs typeface="Aptos" pitchFamily="34" charset="-120"/>
               </a:rPr>
-              <a:t>• The plan should clearly explain how validation results will be interpreted and who has.</a:t>
-            </a:r>
-            <a:endParaRPr lang="en-US" sz="2100" dirty="0"/>
+              <a:t>• The plan should clearly explain how validation results will be interpreted.</a:t>
+            </a:r>
+            <a:endParaRPr lang="en-US" sz="1920" dirty="0"/>
           </a:p>
         </p:txBody>
       </p:sp>
@@ -8563,12 +8565,12 @@
         </p:nvSpPr>
         <p:spPr>
           <a:xfrm>
-            <a:off x="7635240" y="1325880"/>
-            <a:ext cx="3474720" cy="1207008"/>
+            <a:off x="7543800" y="1325880"/>
+            <a:ext cx="3611880" cy="1261872"/>
           </a:xfrm>
           <a:prstGeom prst="roundRect">
             <a:avLst>
-              <a:gd name="adj" fmla="val 9091"/>
+              <a:gd name="adj" fmla="val 8696"/>
             </a:avLst>
           </a:prstGeom>
           <a:solidFill>
@@ -8590,8 +8592,8 @@
         </p:nvSpPr>
         <p:spPr>
           <a:xfrm>
-            <a:off x="7799832" y="1472184"/>
-            <a:ext cx="3145536" cy="256032"/>
+            <a:off x="7708392" y="1453896"/>
+            <a:ext cx="3282696" cy="228600"/>
           </a:xfrm>
           <a:prstGeom prst="rect">
             <a:avLst/>
@@ -8607,7 +8609,7 @@
               <a:buNone/>
             </a:pPr>
             <a:r>
-              <a:rPr lang="en-US" sz="1300" b="1" dirty="0">
+              <a:rPr lang="en-US" sz="1220" b="1" dirty="0">
                 <a:solidFill>
                   <a:srgbClr val="0068B7"/>
                 </a:solidFill>
@@ -8617,7 +8619,7 @@
               </a:rPr>
               <a:t>Risk check</a:t>
             </a:r>
-            <a:endParaRPr lang="en-US" sz="1300" dirty="0"/>
+            <a:endParaRPr lang="en-US" sz="1220" dirty="0"/>
           </a:p>
         </p:txBody>
       </p:sp>
@@ -8629,8 +8631,8 @@
         </p:nvSpPr>
         <p:spPr>
           <a:xfrm>
-            <a:off x="7799832" y="1801368"/>
-            <a:ext cx="3145536" cy="640080"/>
+            <a:off x="7708392" y="1764792"/>
+            <a:ext cx="3282696" cy="749808"/>
           </a:xfrm>
           <a:prstGeom prst="rect">
             <a:avLst/>
@@ -8648,7 +8650,7 @@
               <a:buNone/>
             </a:pPr>
             <a:r>
-              <a:rPr lang="en-US" sz="1320" dirty="0">
+              <a:rPr lang="en-US" sz="1220" dirty="0">
                 <a:solidFill>
                   <a:srgbClr val="17364A"/>
                 </a:solidFill>
@@ -8658,7 +8660,7 @@
               </a:rPr>
               <a:t>Create an advanced validation plan for one AI-supported workflow.</a:t>
             </a:r>
-            <a:endParaRPr lang="en-US" sz="1320" dirty="0"/>
+            <a:endParaRPr lang="en-US" sz="1220" dirty="0"/>
           </a:p>
         </p:txBody>
       </p:sp>
@@ -8670,12 +8672,12 @@
         </p:nvSpPr>
         <p:spPr>
           <a:xfrm>
-            <a:off x="7635240" y="2670048"/>
-            <a:ext cx="3474720" cy="1377086"/>
+            <a:off x="7543800" y="2724912"/>
+            <a:ext cx="3611880" cy="1527048"/>
           </a:xfrm>
           <a:prstGeom prst="roundRect">
             <a:avLst>
-              <a:gd name="adj" fmla="val 7968"/>
+              <a:gd name="adj" fmla="val 7186"/>
             </a:avLst>
           </a:prstGeom>
           <a:solidFill>
@@ -8697,8 +8699,8 @@
         </p:nvSpPr>
         <p:spPr>
           <a:xfrm>
-            <a:off x="7799832" y="2816352"/>
-            <a:ext cx="3145536" cy="256032"/>
+            <a:off x="7708392" y="2852928"/>
+            <a:ext cx="3282696" cy="228600"/>
           </a:xfrm>
           <a:prstGeom prst="rect">
             <a:avLst/>
@@ -8714,7 +8716,7 @@
               <a:buNone/>
             </a:pPr>
             <a:r>
-              <a:rPr lang="en-US" sz="1300" b="1" dirty="0">
+              <a:rPr lang="en-US" sz="1220" b="1" dirty="0">
                 <a:solidFill>
                   <a:srgbClr val="0068B7"/>
                 </a:solidFill>
@@ -8724,7 +8726,7 @@
               </a:rPr>
               <a:t>Concept checkpoints</a:t>
             </a:r>
-            <a:endParaRPr lang="en-US" sz="1300" dirty="0"/>
+            <a:endParaRPr lang="en-US" sz="1220" dirty="0"/>
           </a:p>
         </p:txBody>
       </p:sp>
@@ -8736,8 +8738,8 @@
         </p:nvSpPr>
         <p:spPr>
           <a:xfrm>
-            <a:off x="7818120" y="3182112"/>
-            <a:ext cx="3090672" cy="718718"/>
+            <a:off x="7726680" y="3182112"/>
+            <a:ext cx="3227832" cy="960120"/>
           </a:xfrm>
           <a:prstGeom prst="rect">
             <a:avLst/>
@@ -8755,7 +8757,7 @@
               <a:buNone/>
             </a:pPr>
             <a:r>
-              <a:rPr lang="en-US" sz="1220" dirty="0">
+              <a:rPr lang="en-US" sz="1140" dirty="0">
                 <a:solidFill>
                   <a:srgbClr val="17364A"/>
                 </a:solidFill>
@@ -8763,16 +8765,16 @@
                 <a:ea typeface="Aptos" pitchFamily="34" charset="-122"/>
                 <a:cs typeface="Aptos" pitchFamily="34" charset="-120"/>
               </a:rPr>
-              <a:t>Include intended use, validation dataset, comparison standard,.</a:t>
-            </a:r>
-            <a:endParaRPr lang="en-US" sz="1220" dirty="0"/>
-          </a:p>
-          <a:p>
-            <a:pPr indent="0" marL="0">
-              <a:buNone/>
-            </a:pPr>
-            <a:r>
-              <a:rPr lang="en-US" sz="1220" dirty="0">
+              <a:t>Include intended use, validation dataset,.</a:t>
+            </a:r>
+            <a:endParaRPr lang="en-US" sz="1140" dirty="0"/>
+          </a:p>
+          <a:p>
+            <a:pPr indent="0" marL="0">
+              <a:buNone/>
+            </a:pPr>
+            <a:r>
+              <a:rPr lang="en-US" sz="1140" dirty="0">
                 <a:solidFill>
                   <a:srgbClr val="17364A"/>
                 </a:solidFill>
@@ -8780,9 +8782,9 @@
                 <a:ea typeface="Aptos" pitchFamily="34" charset="-122"/>
                 <a:cs typeface="Aptos" pitchFamily="34" charset="-120"/>
               </a:rPr>
-              <a:t>The plan should clearly explain how validation results will be.</a:t>
-            </a:r>
-            <a:endParaRPr lang="en-US" sz="1220" dirty="0"/>
+              <a:t>The plan should clearly explain how validation.</a:t>
+            </a:r>
+            <a:endParaRPr lang="en-US" sz="1140" dirty="0"/>
           </a:p>
         </p:txBody>
       </p:sp>
@@ -8794,12 +8796,12 @@
         </p:nvSpPr>
         <p:spPr>
           <a:xfrm>
-            <a:off x="7635240" y="4184294"/>
-            <a:ext cx="3474720" cy="1466698"/>
+            <a:off x="7543800" y="4389120"/>
+            <a:ext cx="3611880" cy="1261872"/>
           </a:xfrm>
           <a:prstGeom prst="roundRect">
             <a:avLst>
-              <a:gd name="adj" fmla="val 7481"/>
+              <a:gd name="adj" fmla="val 8696"/>
             </a:avLst>
           </a:prstGeom>
           <a:solidFill>
@@ -8821,8 +8823,8 @@
         </p:nvSpPr>
         <p:spPr>
           <a:xfrm>
-            <a:off x="7799832" y="4330598"/>
-            <a:ext cx="3145536" cy="256032"/>
+            <a:off x="7708392" y="4517136"/>
+            <a:ext cx="3282696" cy="228600"/>
           </a:xfrm>
           <a:prstGeom prst="rect">
             <a:avLst/>
@@ -8838,7 +8840,7 @@
               <a:buNone/>
             </a:pPr>
             <a:r>
-              <a:rPr lang="en-US" sz="1300" b="1" dirty="0">
+              <a:rPr lang="en-US" sz="1220" b="1" dirty="0">
                 <a:solidFill>
                   <a:srgbClr val="0068B7"/>
                 </a:solidFill>
@@ -8848,7 +8850,7 @@
               </a:rPr>
               <a:t>Safeguard to plan</a:t>
             </a:r>
-            <a:endParaRPr lang="en-US" sz="1300" dirty="0"/>
+            <a:endParaRPr lang="en-US" sz="1220" dirty="0"/>
           </a:p>
         </p:txBody>
       </p:sp>
@@ -8860,8 +8862,8 @@
         </p:nvSpPr>
         <p:spPr>
           <a:xfrm>
-            <a:off x="7799832" y="4659782"/>
-            <a:ext cx="3145536" cy="899770"/>
+            <a:off x="7708392" y="4828032"/>
+            <a:ext cx="3282696" cy="749808"/>
           </a:xfrm>
           <a:prstGeom prst="rect">
             <a:avLst/>
@@ -8879,7 +8881,7 @@
               <a:buNone/>
             </a:pPr>
             <a:r>
-              <a:rPr lang="en-US" sz="1320" dirty="0">
+              <a:rPr lang="en-US" sz="1220" dirty="0">
                 <a:solidFill>
                   <a:srgbClr val="17364A"/>
                 </a:solidFill>
@@ -8887,9 +8889,9 @@
                 <a:ea typeface="Aptos" pitchFamily="34" charset="-122"/>
                 <a:cs typeface="Aptos" pitchFamily="34" charset="-120"/>
               </a:rPr>
-              <a:t>Use the assignment to test whether you can explain the concept, apply it to a realistic public health situation, and identify what would need review before the work moves forward.</a:t>
-            </a:r>
-            <a:endParaRPr lang="en-US" sz="1320" dirty="0"/>
+              <a:t>Use the assignment to test whether you can explain the concept, apply it to a.</a:t>
+            </a:r>
+            <a:endParaRPr lang="en-US" sz="1220" dirty="0"/>
           </a:p>
         </p:txBody>
       </p:sp>
@@ -9180,8 +9182,8 @@
         </p:nvSpPr>
         <p:spPr>
           <a:xfrm>
-            <a:off x="868680" y="1508760"/>
-            <a:ext cx="6309360" cy="4160520"/>
+            <a:off x="822960" y="1463040"/>
+            <a:ext cx="6565392" cy="4343400"/>
           </a:xfrm>
           <a:prstGeom prst="rect">
             <a:avLst/>
@@ -9199,7 +9201,7 @@
               <a:buNone/>
             </a:pPr>
             <a:r>
-              <a:rPr lang="en-US" sz="2100" dirty="0">
+              <a:rPr lang="en-US" sz="1920" dirty="0">
                 <a:solidFill>
                   <a:srgbClr val="003A63"/>
                 </a:solidFill>
@@ -9209,14 +9211,14 @@
               </a:rPr>
               <a:t>• Advanced validation plan</a:t>
             </a:r>
-            <a:endParaRPr lang="en-US" sz="2100" dirty="0"/>
-          </a:p>
-          <a:p>
-            <a:pPr indent="0" marL="0">
-              <a:buNone/>
-            </a:pPr>
-            <a:r>
-              <a:rPr lang="en-US" sz="2100" dirty="0">
+            <a:endParaRPr lang="en-US" sz="1920" dirty="0"/>
+          </a:p>
+          <a:p>
+            <a:pPr indent="0" marL="0">
+              <a:buNone/>
+            </a:pPr>
+            <a:r>
+              <a:rPr lang="en-US" sz="1920" dirty="0">
                 <a:solidFill>
                   <a:srgbClr val="003A63"/>
                 </a:solidFill>
@@ -9226,14 +9228,14 @@
               </a:rPr>
               <a:t>• Metric and error-consequence table</a:t>
             </a:r>
-            <a:endParaRPr lang="en-US" sz="2100" dirty="0"/>
-          </a:p>
-          <a:p>
-            <a:pPr indent="0" marL="0">
-              <a:buNone/>
-            </a:pPr>
-            <a:r>
-              <a:rPr lang="en-US" sz="2100" dirty="0">
+            <a:endParaRPr lang="en-US" sz="1920" dirty="0"/>
+          </a:p>
+          <a:p>
+            <a:pPr indent="0" marL="0">
+              <a:buNone/>
+            </a:pPr>
+            <a:r>
+              <a:rPr lang="en-US" sz="1920" dirty="0">
                 <a:solidFill>
                   <a:srgbClr val="003A63"/>
                 </a:solidFill>
@@ -9243,7 +9245,7 @@
               </a:rPr>
               <a:t>• Subgroup performance review plan</a:t>
             </a:r>
-            <a:endParaRPr lang="en-US" sz="2100" dirty="0"/>
+            <a:endParaRPr lang="en-US" sz="1920" dirty="0"/>
           </a:p>
         </p:txBody>
       </p:sp>
@@ -9255,12 +9257,12 @@
         </p:nvSpPr>
         <p:spPr>
           <a:xfrm>
-            <a:off x="7635240" y="1325880"/>
-            <a:ext cx="3474720" cy="1207008"/>
+            <a:off x="7543800" y="1325880"/>
+            <a:ext cx="3611880" cy="1261872"/>
           </a:xfrm>
           <a:prstGeom prst="roundRect">
             <a:avLst>
-              <a:gd name="adj" fmla="val 9091"/>
+              <a:gd name="adj" fmla="val 8696"/>
             </a:avLst>
           </a:prstGeom>
           <a:solidFill>
@@ -9282,8 +9284,8 @@
         </p:nvSpPr>
         <p:spPr>
           <a:xfrm>
-            <a:off x="7799832" y="1472184"/>
-            <a:ext cx="3145536" cy="256032"/>
+            <a:off x="7708392" y="1453896"/>
+            <a:ext cx="3282696" cy="228600"/>
           </a:xfrm>
           <a:prstGeom prst="rect">
             <a:avLst/>
@@ -9299,7 +9301,7 @@
               <a:buNone/>
             </a:pPr>
             <a:r>
-              <a:rPr lang="en-US" sz="1300" b="1" dirty="0">
+              <a:rPr lang="en-US" sz="1220" b="1" dirty="0">
                 <a:solidFill>
                   <a:srgbClr val="0068B7"/>
                 </a:solidFill>
@@ -9309,7 +9311,7 @@
               </a:rPr>
               <a:t>Risk check</a:t>
             </a:r>
-            <a:endParaRPr lang="en-US" sz="1300" dirty="0"/>
+            <a:endParaRPr lang="en-US" sz="1220" dirty="0"/>
           </a:p>
         </p:txBody>
       </p:sp>
@@ -9321,8 +9323,8 @@
         </p:nvSpPr>
         <p:spPr>
           <a:xfrm>
-            <a:off x="7799832" y="1801368"/>
-            <a:ext cx="3145536" cy="640080"/>
+            <a:off x="7708392" y="1764792"/>
+            <a:ext cx="3282696" cy="749808"/>
           </a:xfrm>
           <a:prstGeom prst="rect">
             <a:avLst/>
@@ -9340,7 +9342,7 @@
               <a:buNone/>
             </a:pPr>
             <a:r>
-              <a:rPr lang="en-US" sz="1320" dirty="0">
+              <a:rPr lang="en-US" sz="1220" dirty="0">
                 <a:solidFill>
                   <a:srgbClr val="17364A"/>
                 </a:solidFill>
@@ -9350,7 +9352,7 @@
               </a:rPr>
               <a:t>Advanced validation plan</a:t>
             </a:r>
-            <a:endParaRPr lang="en-US" sz="1320" dirty="0"/>
+            <a:endParaRPr lang="en-US" sz="1220" dirty="0"/>
           </a:p>
         </p:txBody>
       </p:sp>
@@ -9362,12 +9364,12 @@
         </p:nvSpPr>
         <p:spPr>
           <a:xfrm>
-            <a:off x="7635240" y="2670048"/>
-            <a:ext cx="3474720" cy="1536192"/>
+            <a:off x="7543800" y="2724912"/>
+            <a:ext cx="3611880" cy="1527048"/>
           </a:xfrm>
           <a:prstGeom prst="roundRect">
             <a:avLst>
-              <a:gd name="adj" fmla="val 7143"/>
+              <a:gd name="adj" fmla="val 7186"/>
             </a:avLst>
           </a:prstGeom>
           <a:solidFill>
@@ -9389,8 +9391,8 @@
         </p:nvSpPr>
         <p:spPr>
           <a:xfrm>
-            <a:off x="7799832" y="2816352"/>
-            <a:ext cx="3145536" cy="256032"/>
+            <a:off x="7708392" y="2852928"/>
+            <a:ext cx="3282696" cy="228600"/>
           </a:xfrm>
           <a:prstGeom prst="rect">
             <a:avLst/>
@@ -9406,7 +9408,7 @@
               <a:buNone/>
             </a:pPr>
             <a:r>
-              <a:rPr lang="en-US" sz="1300" b="1" dirty="0">
+              <a:rPr lang="en-US" sz="1220" b="1" dirty="0">
                 <a:solidFill>
                   <a:srgbClr val="0068B7"/>
                 </a:solidFill>
@@ -9416,7 +9418,7 @@
               </a:rPr>
               <a:t>Concept checkpoints</a:t>
             </a:r>
-            <a:endParaRPr lang="en-US" sz="1300" dirty="0"/>
+            <a:endParaRPr lang="en-US" sz="1220" dirty="0"/>
           </a:p>
         </p:txBody>
       </p:sp>
@@ -9428,8 +9430,8 @@
         </p:nvSpPr>
         <p:spPr>
           <a:xfrm>
-            <a:off x="7818120" y="3182112"/>
-            <a:ext cx="3090672" cy="877824"/>
+            <a:off x="7726680" y="3182112"/>
+            <a:ext cx="3227832" cy="960120"/>
           </a:xfrm>
           <a:prstGeom prst="rect">
             <a:avLst/>
@@ -9447,7 +9449,7 @@
               <a:buNone/>
             </a:pPr>
             <a:r>
-              <a:rPr lang="en-US" sz="1220" dirty="0">
+              <a:rPr lang="en-US" sz="1140" dirty="0">
                 <a:solidFill>
                   <a:srgbClr val="17364A"/>
                 </a:solidFill>
@@ -9457,14 +9459,14 @@
               </a:rPr>
               <a:t>Advanced validation plan</a:t>
             </a:r>
-            <a:endParaRPr lang="en-US" sz="1220" dirty="0"/>
-          </a:p>
-          <a:p>
-            <a:pPr indent="0" marL="0">
-              <a:buNone/>
-            </a:pPr>
-            <a:r>
-              <a:rPr lang="en-US" sz="1220" dirty="0">
+            <a:endParaRPr lang="en-US" sz="1140" dirty="0"/>
+          </a:p>
+          <a:p>
+            <a:pPr indent="0" marL="0">
+              <a:buNone/>
+            </a:pPr>
+            <a:r>
+              <a:rPr lang="en-US" sz="1140" dirty="0">
                 <a:solidFill>
                   <a:srgbClr val="17364A"/>
                 </a:solidFill>
@@ -9474,14 +9476,14 @@
               </a:rPr>
               <a:t>Metric and error-consequence table</a:t>
             </a:r>
-            <a:endParaRPr lang="en-US" sz="1220" dirty="0"/>
-          </a:p>
-          <a:p>
-            <a:pPr indent="0" marL="0">
-              <a:buNone/>
-            </a:pPr>
-            <a:r>
-              <a:rPr lang="en-US" sz="1220" dirty="0">
+            <a:endParaRPr lang="en-US" sz="1140" dirty="0"/>
+          </a:p>
+          <a:p>
+            <a:pPr indent="0" marL="0">
+              <a:buNone/>
+            </a:pPr>
+            <a:r>
+              <a:rPr lang="en-US" sz="1140" dirty="0">
                 <a:solidFill>
                   <a:srgbClr val="17364A"/>
                 </a:solidFill>
@@ -9491,7 +9493,7 @@
               </a:rPr>
               <a:t>Subgroup performance review plan</a:t>
             </a:r>
-            <a:endParaRPr lang="en-US" sz="1220" dirty="0"/>
+            <a:endParaRPr lang="en-US" sz="1140" dirty="0"/>
           </a:p>
         </p:txBody>
       </p:sp>
@@ -9503,12 +9505,12 @@
         </p:nvSpPr>
         <p:spPr>
           <a:xfrm>
-            <a:off x="7635240" y="4343400"/>
-            <a:ext cx="3474720" cy="1255471"/>
+            <a:off x="7543800" y="4389120"/>
+            <a:ext cx="3611880" cy="1261872"/>
           </a:xfrm>
           <a:prstGeom prst="roundRect">
             <a:avLst>
-              <a:gd name="adj" fmla="val 8740"/>
+              <a:gd name="adj" fmla="val 8696"/>
             </a:avLst>
           </a:prstGeom>
           <a:solidFill>
@@ -9530,8 +9532,8 @@
         </p:nvSpPr>
         <p:spPr>
           <a:xfrm>
-            <a:off x="7799832" y="4489704"/>
-            <a:ext cx="3145536" cy="256032"/>
+            <a:off x="7708392" y="4517136"/>
+            <a:ext cx="3282696" cy="228600"/>
           </a:xfrm>
           <a:prstGeom prst="rect">
             <a:avLst/>
@@ -9547,7 +9549,7 @@
               <a:buNone/>
             </a:pPr>
             <a:r>
-              <a:rPr lang="en-US" sz="1300" b="1" dirty="0">
+              <a:rPr lang="en-US" sz="1220" b="1" dirty="0">
                 <a:solidFill>
                   <a:srgbClr val="0068B7"/>
                 </a:solidFill>
@@ -9557,7 +9559,7 @@
               </a:rPr>
               <a:t>Safeguard to plan</a:t>
             </a:r>
-            <a:endParaRPr lang="en-US" sz="1300" dirty="0"/>
+            <a:endParaRPr lang="en-US" sz="1220" dirty="0"/>
           </a:p>
         </p:txBody>
       </p:sp>
@@ -9569,8 +9571,8 @@
         </p:nvSpPr>
         <p:spPr>
           <a:xfrm>
-            <a:off x="7799832" y="4818888"/>
-            <a:ext cx="3145536" cy="688543"/>
+            <a:off x="7708392" y="4828032"/>
+            <a:ext cx="3282696" cy="749808"/>
           </a:xfrm>
           <a:prstGeom prst="rect">
             <a:avLst/>
@@ -9588,7 +9590,7 @@
               <a:buNone/>
             </a:pPr>
             <a:r>
-              <a:rPr lang="en-US" sz="1320" dirty="0">
+              <a:rPr lang="en-US" sz="1220" dirty="0">
                 <a:solidFill>
                   <a:srgbClr val="17364A"/>
                 </a:solidFill>
@@ -9596,9 +9598,9 @@
                 <a:ea typeface="Aptos" pitchFamily="34" charset="-122"/>
                 <a:cs typeface="Aptos" pitchFamily="34" charset="-120"/>
               </a:rPr>
-              <a:t>Identify what could go wrong, who could be affected, what safeguards are needed, and what evidence should be reviewed before use.</a:t>
-            </a:r>
-            <a:endParaRPr lang="en-US" sz="1320" dirty="0"/>
+              <a:t>Identify what could go wrong, who could be affected, what safeguards are needed,.</a:t>
+            </a:r>
+            <a:endParaRPr lang="en-US" sz="1220" dirty="0"/>
           </a:p>
         </p:txBody>
       </p:sp>
@@ -9889,8 +9891,8 @@
         </p:nvSpPr>
         <p:spPr>
           <a:xfrm>
-            <a:off x="868680" y="1508760"/>
-            <a:ext cx="6309360" cy="4160520"/>
+            <a:off x="822960" y="1463040"/>
+            <a:ext cx="6565392" cy="4343400"/>
           </a:xfrm>
           <a:prstGeom prst="rect">
             <a:avLst/>
@@ -9908,7 +9910,7 @@
               <a:buNone/>
             </a:pPr>
             <a:r>
-              <a:rPr lang="en-US" sz="2100" dirty="0">
+              <a:rPr lang="en-US" sz="1920" dirty="0">
                 <a:solidFill>
                   <a:srgbClr val="003A63"/>
                 </a:solidFill>
@@ -9918,7 +9920,7 @@
               </a:rPr>
               <a:t>• Post-deployment monitoring schedule</a:t>
             </a:r>
-            <a:endParaRPr lang="en-US" sz="2100" dirty="0"/>
+            <a:endParaRPr lang="en-US" sz="1920" dirty="0"/>
           </a:p>
         </p:txBody>
       </p:sp>
@@ -9930,12 +9932,12 @@
         </p:nvSpPr>
         <p:spPr>
           <a:xfrm>
-            <a:off x="7635240" y="1325880"/>
-            <a:ext cx="3474720" cy="1207008"/>
+            <a:off x="7543800" y="1325880"/>
+            <a:ext cx="3611880" cy="1261872"/>
           </a:xfrm>
           <a:prstGeom prst="roundRect">
             <a:avLst>
-              <a:gd name="adj" fmla="val 9091"/>
+              <a:gd name="adj" fmla="val 8696"/>
             </a:avLst>
           </a:prstGeom>
           <a:solidFill>
@@ -9957,8 +9959,8 @@
         </p:nvSpPr>
         <p:spPr>
           <a:xfrm>
-            <a:off x="7799832" y="1472184"/>
-            <a:ext cx="3145536" cy="256032"/>
+            <a:off x="7708392" y="1453896"/>
+            <a:ext cx="3282696" cy="228600"/>
           </a:xfrm>
           <a:prstGeom prst="rect">
             <a:avLst/>
@@ -9974,7 +9976,7 @@
               <a:buNone/>
             </a:pPr>
             <a:r>
-              <a:rPr lang="en-US" sz="1300" b="1" dirty="0">
+              <a:rPr lang="en-US" sz="1220" b="1" dirty="0">
                 <a:solidFill>
                   <a:srgbClr val="0068B7"/>
                 </a:solidFill>
@@ -9984,7 +9986,7 @@
               </a:rPr>
               <a:t>Risk check</a:t>
             </a:r>
-            <a:endParaRPr lang="en-US" sz="1300" dirty="0"/>
+            <a:endParaRPr lang="en-US" sz="1220" dirty="0"/>
           </a:p>
         </p:txBody>
       </p:sp>
@@ -9996,8 +9998,8 @@
         </p:nvSpPr>
         <p:spPr>
           <a:xfrm>
-            <a:off x="7799832" y="1801368"/>
-            <a:ext cx="3145536" cy="640080"/>
+            <a:off x="7708392" y="1764792"/>
+            <a:ext cx="3282696" cy="749808"/>
           </a:xfrm>
           <a:prstGeom prst="rect">
             <a:avLst/>
@@ -10015,7 +10017,7 @@
               <a:buNone/>
             </a:pPr>
             <a:r>
-              <a:rPr lang="en-US" sz="1320" dirty="0">
+              <a:rPr lang="en-US" sz="1220" dirty="0">
                 <a:solidFill>
                   <a:srgbClr val="17364A"/>
                 </a:solidFill>
@@ -10025,7 +10027,7 @@
               </a:rPr>
               <a:t>Post-deployment monitoring schedule</a:t>
             </a:r>
-            <a:endParaRPr lang="en-US" sz="1320" dirty="0"/>
+            <a:endParaRPr lang="en-US" sz="1220" dirty="0"/>
           </a:p>
         </p:txBody>
       </p:sp>
@@ -10037,12 +10039,12 @@
         </p:nvSpPr>
         <p:spPr>
           <a:xfrm>
-            <a:off x="7635240" y="2670048"/>
-            <a:ext cx="3474720" cy="1536192"/>
+            <a:off x="7543800" y="2724912"/>
+            <a:ext cx="3611880" cy="1527048"/>
           </a:xfrm>
           <a:prstGeom prst="roundRect">
             <a:avLst>
-              <a:gd name="adj" fmla="val 7143"/>
+              <a:gd name="adj" fmla="val 7186"/>
             </a:avLst>
           </a:prstGeom>
           <a:solidFill>
@@ -10064,8 +10066,8 @@
         </p:nvSpPr>
         <p:spPr>
           <a:xfrm>
-            <a:off x="7799832" y="2816352"/>
-            <a:ext cx="3145536" cy="256032"/>
+            <a:off x="7708392" y="2852928"/>
+            <a:ext cx="3282696" cy="228600"/>
           </a:xfrm>
           <a:prstGeom prst="rect">
             <a:avLst/>
@@ -10081,7 +10083,7 @@
               <a:buNone/>
             </a:pPr>
             <a:r>
-              <a:rPr lang="en-US" sz="1300" b="1" dirty="0">
+              <a:rPr lang="en-US" sz="1220" b="1" dirty="0">
                 <a:solidFill>
                   <a:srgbClr val="0068B7"/>
                 </a:solidFill>
@@ -10091,7 +10093,7 @@
               </a:rPr>
               <a:t>Concept checkpoints</a:t>
             </a:r>
-            <a:endParaRPr lang="en-US" sz="1300" dirty="0"/>
+            <a:endParaRPr lang="en-US" sz="1220" dirty="0"/>
           </a:p>
         </p:txBody>
       </p:sp>
@@ -10103,8 +10105,8 @@
         </p:nvSpPr>
         <p:spPr>
           <a:xfrm>
-            <a:off x="7818120" y="3182112"/>
-            <a:ext cx="3090672" cy="877824"/>
+            <a:off x="7726680" y="3182112"/>
+            <a:ext cx="3227832" cy="960120"/>
           </a:xfrm>
           <a:prstGeom prst="rect">
             <a:avLst/>
@@ -10122,7 +10124,7 @@
               <a:buNone/>
             </a:pPr>
             <a:r>
-              <a:rPr lang="en-US" sz="1220" dirty="0">
+              <a:rPr lang="en-US" sz="1140" dirty="0">
                 <a:solidFill>
                   <a:srgbClr val="17364A"/>
                 </a:solidFill>
@@ -10132,7 +10134,7 @@
               </a:rPr>
               <a:t>Post-deployment monitoring schedule</a:t>
             </a:r>
-            <a:endParaRPr lang="en-US" sz="1220" dirty="0"/>
+            <a:endParaRPr lang="en-US" sz="1140" dirty="0"/>
           </a:p>
         </p:txBody>
       </p:sp>
@@ -10144,12 +10146,12 @@
         </p:nvSpPr>
         <p:spPr>
           <a:xfrm>
-            <a:off x="7635240" y="4343400"/>
-            <a:ext cx="3474720" cy="1255471"/>
+            <a:off x="7543800" y="4389120"/>
+            <a:ext cx="3611880" cy="1261872"/>
           </a:xfrm>
           <a:prstGeom prst="roundRect">
             <a:avLst>
-              <a:gd name="adj" fmla="val 8740"/>
+              <a:gd name="adj" fmla="val 8696"/>
             </a:avLst>
           </a:prstGeom>
           <a:solidFill>
@@ -10171,8 +10173,8 @@
         </p:nvSpPr>
         <p:spPr>
           <a:xfrm>
-            <a:off x="7799832" y="4489704"/>
-            <a:ext cx="3145536" cy="256032"/>
+            <a:off x="7708392" y="4517136"/>
+            <a:ext cx="3282696" cy="228600"/>
           </a:xfrm>
           <a:prstGeom prst="rect">
             <a:avLst/>
@@ -10188,7 +10190,7 @@
               <a:buNone/>
             </a:pPr>
             <a:r>
-              <a:rPr lang="en-US" sz="1300" b="1" dirty="0">
+              <a:rPr lang="en-US" sz="1220" b="1" dirty="0">
                 <a:solidFill>
                   <a:srgbClr val="0068B7"/>
                 </a:solidFill>
@@ -10198,7 +10200,7 @@
               </a:rPr>
               <a:t>Safeguard to plan</a:t>
             </a:r>
-            <a:endParaRPr lang="en-US" sz="1300" dirty="0"/>
+            <a:endParaRPr lang="en-US" sz="1220" dirty="0"/>
           </a:p>
         </p:txBody>
       </p:sp>
@@ -10210,8 +10212,8 @@
         </p:nvSpPr>
         <p:spPr>
           <a:xfrm>
-            <a:off x="7799832" y="4818888"/>
-            <a:ext cx="3145536" cy="688543"/>
+            <a:off x="7708392" y="4828032"/>
+            <a:ext cx="3282696" cy="749808"/>
           </a:xfrm>
           <a:prstGeom prst="rect">
             <a:avLst/>
@@ -10229,7 +10231,7 @@
               <a:buNone/>
             </a:pPr>
             <a:r>
-              <a:rPr lang="en-US" sz="1320" dirty="0">
+              <a:rPr lang="en-US" sz="1220" dirty="0">
                 <a:solidFill>
                   <a:srgbClr val="17364A"/>
                 </a:solidFill>
@@ -10237,9 +10239,9 @@
                 <a:ea typeface="Aptos" pitchFamily="34" charset="-122"/>
                 <a:cs typeface="Aptos" pitchFamily="34" charset="-120"/>
               </a:rPr>
-              <a:t>Identify what could go wrong, who could be affected, what safeguards are needed, and what evidence should be reviewed before use.</a:t>
-            </a:r>
-            <a:endParaRPr lang="en-US" sz="1320" dirty="0"/>
+              <a:t>Identify what could go wrong, who could be affected, what safeguards are needed,.</a:t>
+            </a:r>
+            <a:endParaRPr lang="en-US" sz="1220" dirty="0"/>
           </a:p>
         </p:txBody>
       </p:sp>
@@ -10557,7 +10559,7 @@
                 <a:ea typeface="Aptos" pitchFamily="34" charset="-122"/>
                 <a:cs typeface="Aptos" pitchFamily="34" charset="-120"/>
               </a:rPr>
-              <a:t>• Model validation is the process of determining whether an AI tool performs adequately for its.</a:t>
+              <a:t>• Model validation is the process of determining whether an AI tool performs.</a:t>
             </a:r>
             <a:endParaRPr lang="en-US" sz="2100" dirty="0"/>
           </a:p>
@@ -10591,7 +10593,7 @@
                 <a:ea typeface="Aptos" pitchFamily="34" charset="-122"/>
                 <a:cs typeface="Aptos" pitchFamily="34" charset="-120"/>
               </a:rPr>
-              <a:t>• Advanced validation asks whether it works well enough, for whom, under what conditions, with.</a:t>
+              <a:t>• Advanced validation asks whether it works well enough, for whom, under what.</a:t>
             </a:r>
             <a:endParaRPr lang="en-US" sz="2100" dirty="0"/>
           </a:p>
@@ -10632,8 +10634,8 @@
         </p:nvSpPr>
         <p:spPr>
           <a:xfrm>
-            <a:off x="8074152" y="1563624"/>
-            <a:ext cx="2825496" cy="256032"/>
+            <a:off x="8074152" y="1545336"/>
+            <a:ext cx="2825496" cy="228600"/>
           </a:xfrm>
           <a:prstGeom prst="rect">
             <a:avLst/>
@@ -10649,7 +10651,7 @@
               <a:buNone/>
             </a:pPr>
             <a:r>
-              <a:rPr lang="en-US" sz="1300" b="1" dirty="0">
+              <a:rPr lang="en-US" sz="1220" b="1" dirty="0">
                 <a:solidFill>
                   <a:srgbClr val="0068B7"/>
                 </a:solidFill>
@@ -10659,7 +10661,7 @@
               </a:rPr>
               <a:t>Module details</a:t>
             </a:r>
-            <a:endParaRPr lang="en-US" sz="1300" dirty="0"/>
+            <a:endParaRPr lang="en-US" sz="1220" dirty="0"/>
           </a:p>
         </p:txBody>
       </p:sp>
@@ -10671,8 +10673,8 @@
         </p:nvSpPr>
         <p:spPr>
           <a:xfrm>
-            <a:off x="8074152" y="1892808"/>
-            <a:ext cx="2825496" cy="1353312"/>
+            <a:off x="8074152" y="1856232"/>
+            <a:ext cx="2825496" cy="1408176"/>
           </a:xfrm>
           <a:prstGeom prst="rect">
             <a:avLst/>
@@ -10690,7 +10692,7 @@
               <a:buNone/>
             </a:pPr>
             <a:r>
-              <a:rPr lang="en-US" sz="1320" dirty="0">
+              <a:rPr lang="en-US" sz="1220" dirty="0">
                 <a:solidFill>
                   <a:srgbClr val="17364A"/>
                 </a:solidFill>
@@ -10698,9 +10700,9 @@
                 <a:ea typeface="Aptos" pitchFamily="34" charset="-122"/>
                 <a:cs typeface="Aptos" pitchFamily="34" charset="-120"/>
               </a:rPr>
-              <a:t>Level: intermediate/practitioner Primary track: Analytics and Modeling Track Appears in tracks: analytics-modeling</a:t>
-            </a:r>
-            <a:endParaRPr lang="en-US" sz="1320" dirty="0"/>
+              <a:t>Level: intermediate/practitioner Primary track: Analytics and Modeling Track.</a:t>
+            </a:r>
+            <a:endParaRPr lang="en-US" sz="1220" dirty="0"/>
           </a:p>
         </p:txBody>
       </p:sp>
@@ -10739,8 +10741,8 @@
         </p:nvSpPr>
         <p:spPr>
           <a:xfrm>
-            <a:off x="8074152" y="3822192"/>
-            <a:ext cx="2825496" cy="256032"/>
+            <a:off x="8074152" y="3803904"/>
+            <a:ext cx="2825496" cy="228600"/>
           </a:xfrm>
           <a:prstGeom prst="rect">
             <a:avLst/>
@@ -10756,7 +10758,7 @@
               <a:buNone/>
             </a:pPr>
             <a:r>
-              <a:rPr lang="en-US" sz="1300" b="1" dirty="0">
+              <a:rPr lang="en-US" sz="1220" b="1" dirty="0">
                 <a:solidFill>
                   <a:srgbClr val="0068B7"/>
                 </a:solidFill>
@@ -10766,7 +10768,7 @@
               </a:rPr>
               <a:t>Learning sequence</a:t>
             </a:r>
-            <a:endParaRPr lang="en-US" sz="1300" dirty="0"/>
+            <a:endParaRPr lang="en-US" sz="1220" dirty="0"/>
           </a:p>
         </p:txBody>
       </p:sp>
@@ -10778,8 +10780,8 @@
         </p:nvSpPr>
         <p:spPr>
           <a:xfrm>
-            <a:off x="8092440" y="4187952"/>
-            <a:ext cx="2770632" cy="1033272"/>
+            <a:off x="8092440" y="4133088"/>
+            <a:ext cx="2770632" cy="1124712"/>
           </a:xfrm>
           <a:prstGeom prst="rect">
             <a:avLst/>
@@ -10797,7 +10799,7 @@
               <a:buNone/>
             </a:pPr>
             <a:r>
-              <a:rPr lang="en-US" sz="1220" dirty="0">
+              <a:rPr lang="en-US" sz="1140" dirty="0">
                 <a:solidFill>
                   <a:srgbClr val="17364A"/>
                 </a:solidFill>
@@ -10807,14 +10809,14 @@
               </a:rPr>
               <a:t>Read the module for shared vocabulary and context.</a:t>
             </a:r>
-            <a:endParaRPr lang="en-US" sz="1220" dirty="0"/>
-          </a:p>
-          <a:p>
-            <a:pPr indent="0" marL="0">
-              <a:buNone/>
-            </a:pPr>
-            <a:r>
-              <a:rPr lang="en-US" sz="1220" dirty="0">
+            <a:endParaRPr lang="en-US" sz="1140" dirty="0"/>
+          </a:p>
+          <a:p>
+            <a:pPr indent="0" marL="0">
+              <a:buNone/>
+            </a:pPr>
+            <a:r>
+              <a:rPr lang="en-US" sz="1140" dirty="0">
                 <a:solidFill>
                   <a:srgbClr val="17364A"/>
                 </a:solidFill>
@@ -10822,16 +10824,16 @@
                 <a:ea typeface="Aptos" pitchFamily="34" charset="-122"/>
                 <a:cs typeface="Aptos" pitchFamily="34" charset="-120"/>
               </a:rPr>
-              <a:t>Complete the practical exercise to apply the concept.</a:t>
-            </a:r>
-            <a:endParaRPr lang="en-US" sz="1220" dirty="0"/>
-          </a:p>
-          <a:p>
-            <a:pPr indent="0" marL="0">
-              <a:buNone/>
-            </a:pPr>
-            <a:r>
-              <a:rPr lang="en-US" sz="1220" dirty="0">
+              <a:t>Complete the practical exercise to apply the.</a:t>
+            </a:r>
+            <a:endParaRPr lang="en-US" sz="1140" dirty="0"/>
+          </a:p>
+          <a:p>
+            <a:pPr indent="0" marL="0">
+              <a:buNone/>
+            </a:pPr>
+            <a:r>
+              <a:rPr lang="en-US" sz="1140" dirty="0">
                 <a:solidFill>
                   <a:srgbClr val="17364A"/>
                 </a:solidFill>
@@ -10841,7 +10843,7 @@
               </a:rPr>
               <a:t>Use the notes and references for deeper review.</a:t>
             </a:r>
-            <a:endParaRPr lang="en-US" sz="1220" dirty="0"/>
+            <a:endParaRPr lang="en-US" sz="1140" dirty="0"/>
           </a:p>
         </p:txBody>
       </p:sp>
@@ -11132,8 +11134,8 @@
         </p:nvSpPr>
         <p:spPr>
           <a:xfrm>
-            <a:off x="868680" y="1508760"/>
-            <a:ext cx="6309360" cy="4160520"/>
+            <a:off x="822960" y="1463040"/>
+            <a:ext cx="6565392" cy="4343400"/>
           </a:xfrm>
           <a:prstGeom prst="rect">
             <a:avLst/>
@@ -11151,7 +11153,7 @@
               <a:buNone/>
             </a:pPr>
             <a:r>
-              <a:rPr lang="en-US" sz="2100" dirty="0">
+              <a:rPr lang="en-US" sz="1920" dirty="0">
                 <a:solidFill>
                   <a:srgbClr val="003A63"/>
                 </a:solidFill>
@@ -11161,14 +11163,14 @@
               </a:rPr>
               <a:t>• Advanced validation plan</a:t>
             </a:r>
-            <a:endParaRPr lang="en-US" sz="2100" dirty="0"/>
-          </a:p>
-          <a:p>
-            <a:pPr indent="0" marL="0">
-              <a:buNone/>
-            </a:pPr>
-            <a:r>
-              <a:rPr lang="en-US" sz="2100" dirty="0">
+            <a:endParaRPr lang="en-US" sz="1920" dirty="0"/>
+          </a:p>
+          <a:p>
+            <a:pPr indent="0" marL="0">
+              <a:buNone/>
+            </a:pPr>
+            <a:r>
+              <a:rPr lang="en-US" sz="1920" dirty="0">
                 <a:solidFill>
                   <a:srgbClr val="003A63"/>
                 </a:solidFill>
@@ -11178,14 +11180,14 @@
               </a:rPr>
               <a:t>• Metric and error-consequence table</a:t>
             </a:r>
-            <a:endParaRPr lang="en-US" sz="2100" dirty="0"/>
-          </a:p>
-          <a:p>
-            <a:pPr indent="0" marL="0">
-              <a:buNone/>
-            </a:pPr>
-            <a:r>
-              <a:rPr lang="en-US" sz="2100" dirty="0">
+            <a:endParaRPr lang="en-US" sz="1920" dirty="0"/>
+          </a:p>
+          <a:p>
+            <a:pPr indent="0" marL="0">
+              <a:buNone/>
+            </a:pPr>
+            <a:r>
+              <a:rPr lang="en-US" sz="1920" dirty="0">
                 <a:solidFill>
                   <a:srgbClr val="003A63"/>
                 </a:solidFill>
@@ -11195,7 +11197,7 @@
               </a:rPr>
               <a:t>• Subgroup performance review plan</a:t>
             </a:r>
-            <a:endParaRPr lang="en-US" sz="2100" dirty="0"/>
+            <a:endParaRPr lang="en-US" sz="1920" dirty="0"/>
           </a:p>
         </p:txBody>
       </p:sp>
@@ -11207,12 +11209,12 @@
         </p:nvSpPr>
         <p:spPr>
           <a:xfrm>
-            <a:off x="7635240" y="1325880"/>
-            <a:ext cx="3474720" cy="1207008"/>
+            <a:off x="7543800" y="1325880"/>
+            <a:ext cx="3611880" cy="1261872"/>
           </a:xfrm>
           <a:prstGeom prst="roundRect">
             <a:avLst>
-              <a:gd name="adj" fmla="val 9091"/>
+              <a:gd name="adj" fmla="val 8696"/>
             </a:avLst>
           </a:prstGeom>
           <a:solidFill>
@@ -11234,8 +11236,8 @@
         </p:nvSpPr>
         <p:spPr>
           <a:xfrm>
-            <a:off x="7799832" y="1472184"/>
-            <a:ext cx="3145536" cy="256032"/>
+            <a:off x="7708392" y="1453896"/>
+            <a:ext cx="3282696" cy="228600"/>
           </a:xfrm>
           <a:prstGeom prst="rect">
             <a:avLst/>
@@ -11251,7 +11253,7 @@
               <a:buNone/>
             </a:pPr>
             <a:r>
-              <a:rPr lang="en-US" sz="1300" b="1" dirty="0">
+              <a:rPr lang="en-US" sz="1220" b="1" dirty="0">
                 <a:solidFill>
                   <a:srgbClr val="0068B7"/>
                 </a:solidFill>
@@ -11261,7 +11263,7 @@
               </a:rPr>
               <a:t>Risk check</a:t>
             </a:r>
-            <a:endParaRPr lang="en-US" sz="1300" dirty="0"/>
+            <a:endParaRPr lang="en-US" sz="1220" dirty="0"/>
           </a:p>
         </p:txBody>
       </p:sp>
@@ -11273,8 +11275,8 @@
         </p:nvSpPr>
         <p:spPr>
           <a:xfrm>
-            <a:off x="7799832" y="1801368"/>
-            <a:ext cx="3145536" cy="640080"/>
+            <a:off x="7708392" y="1764792"/>
+            <a:ext cx="3282696" cy="749808"/>
           </a:xfrm>
           <a:prstGeom prst="rect">
             <a:avLst/>
@@ -11292,7 +11294,7 @@
               <a:buNone/>
             </a:pPr>
             <a:r>
-              <a:rPr lang="en-US" sz="1320" dirty="0">
+              <a:rPr lang="en-US" sz="1220" dirty="0">
                 <a:solidFill>
                   <a:srgbClr val="17364A"/>
                 </a:solidFill>
@@ -11302,7 +11304,7 @@
               </a:rPr>
               <a:t>Advanced validation plan</a:t>
             </a:r>
-            <a:endParaRPr lang="en-US" sz="1320" dirty="0"/>
+            <a:endParaRPr lang="en-US" sz="1220" dirty="0"/>
           </a:p>
         </p:txBody>
       </p:sp>
@@ -11314,12 +11316,12 @@
         </p:nvSpPr>
         <p:spPr>
           <a:xfrm>
-            <a:off x="7635240" y="2670048"/>
-            <a:ext cx="3474720" cy="1377086"/>
+            <a:off x="7543800" y="2724912"/>
+            <a:ext cx="3611880" cy="1527048"/>
           </a:xfrm>
           <a:prstGeom prst="roundRect">
             <a:avLst>
-              <a:gd name="adj" fmla="val 7968"/>
+              <a:gd name="adj" fmla="val 7186"/>
             </a:avLst>
           </a:prstGeom>
           <a:solidFill>
@@ -11341,8 +11343,8 @@
         </p:nvSpPr>
         <p:spPr>
           <a:xfrm>
-            <a:off x="7799832" y="2816352"/>
-            <a:ext cx="3145536" cy="256032"/>
+            <a:off x="7708392" y="2852928"/>
+            <a:ext cx="3282696" cy="228600"/>
           </a:xfrm>
           <a:prstGeom prst="rect">
             <a:avLst/>
@@ -11358,7 +11360,7 @@
               <a:buNone/>
             </a:pPr>
             <a:r>
-              <a:rPr lang="en-US" sz="1300" b="1" dirty="0">
+              <a:rPr lang="en-US" sz="1220" b="1" dirty="0">
                 <a:solidFill>
                   <a:srgbClr val="0068B7"/>
                 </a:solidFill>
@@ -11368,7 +11370,7 @@
               </a:rPr>
               <a:t>Concept checkpoints</a:t>
             </a:r>
-            <a:endParaRPr lang="en-US" sz="1300" dirty="0"/>
+            <a:endParaRPr lang="en-US" sz="1220" dirty="0"/>
           </a:p>
         </p:txBody>
       </p:sp>
@@ -11380,8 +11382,8 @@
         </p:nvSpPr>
         <p:spPr>
           <a:xfrm>
-            <a:off x="7818120" y="3182112"/>
-            <a:ext cx="3090672" cy="718718"/>
+            <a:off x="7726680" y="3182112"/>
+            <a:ext cx="3227832" cy="960120"/>
           </a:xfrm>
           <a:prstGeom prst="rect">
             <a:avLst/>
@@ -11399,7 +11401,7 @@
               <a:buNone/>
             </a:pPr>
             <a:r>
-              <a:rPr lang="en-US" sz="1220" dirty="0">
+              <a:rPr lang="en-US" sz="1140" dirty="0">
                 <a:solidFill>
                   <a:srgbClr val="17364A"/>
                 </a:solidFill>
@@ -11409,14 +11411,14 @@
               </a:rPr>
               <a:t>Advanced validation plan</a:t>
             </a:r>
-            <a:endParaRPr lang="en-US" sz="1220" dirty="0"/>
-          </a:p>
-          <a:p>
-            <a:pPr indent="0" marL="0">
-              <a:buNone/>
-            </a:pPr>
-            <a:r>
-              <a:rPr lang="en-US" sz="1220" dirty="0">
+            <a:endParaRPr lang="en-US" sz="1140" dirty="0"/>
+          </a:p>
+          <a:p>
+            <a:pPr indent="0" marL="0">
+              <a:buNone/>
+            </a:pPr>
+            <a:r>
+              <a:rPr lang="en-US" sz="1140" dirty="0">
                 <a:solidFill>
                   <a:srgbClr val="17364A"/>
                 </a:solidFill>
@@ -11426,14 +11428,14 @@
               </a:rPr>
               <a:t>Metric and error-consequence table</a:t>
             </a:r>
-            <a:endParaRPr lang="en-US" sz="1220" dirty="0"/>
-          </a:p>
-          <a:p>
-            <a:pPr indent="0" marL="0">
-              <a:buNone/>
-            </a:pPr>
-            <a:r>
-              <a:rPr lang="en-US" sz="1220" dirty="0">
+            <a:endParaRPr lang="en-US" sz="1140" dirty="0"/>
+          </a:p>
+          <a:p>
+            <a:pPr indent="0" marL="0">
+              <a:buNone/>
+            </a:pPr>
+            <a:r>
+              <a:rPr lang="en-US" sz="1140" dirty="0">
                 <a:solidFill>
                   <a:srgbClr val="17364A"/>
                 </a:solidFill>
@@ -11443,7 +11445,7 @@
               </a:rPr>
               <a:t>Subgroup performance review plan</a:t>
             </a:r>
-            <a:endParaRPr lang="en-US" sz="1220" dirty="0"/>
+            <a:endParaRPr lang="en-US" sz="1140" dirty="0"/>
           </a:p>
         </p:txBody>
       </p:sp>
@@ -11455,12 +11457,12 @@
         </p:nvSpPr>
         <p:spPr>
           <a:xfrm>
-            <a:off x="7635240" y="4184294"/>
-            <a:ext cx="3474720" cy="1466698"/>
+            <a:off x="7543800" y="4389120"/>
+            <a:ext cx="3611880" cy="1261872"/>
           </a:xfrm>
           <a:prstGeom prst="roundRect">
             <a:avLst>
-              <a:gd name="adj" fmla="val 7481"/>
+              <a:gd name="adj" fmla="val 8696"/>
             </a:avLst>
           </a:prstGeom>
           <a:solidFill>
@@ -11482,8 +11484,8 @@
         </p:nvSpPr>
         <p:spPr>
           <a:xfrm>
-            <a:off x="7799832" y="4330598"/>
-            <a:ext cx="3145536" cy="256032"/>
+            <a:off x="7708392" y="4517136"/>
+            <a:ext cx="3282696" cy="228600"/>
           </a:xfrm>
           <a:prstGeom prst="rect">
             <a:avLst/>
@@ -11499,7 +11501,7 @@
               <a:buNone/>
             </a:pPr>
             <a:r>
-              <a:rPr lang="en-US" sz="1300" b="1" dirty="0">
+              <a:rPr lang="en-US" sz="1220" b="1" dirty="0">
                 <a:solidFill>
                   <a:srgbClr val="0068B7"/>
                 </a:solidFill>
@@ -11509,7 +11511,7 @@
               </a:rPr>
               <a:t>Safeguard to plan</a:t>
             </a:r>
-            <a:endParaRPr lang="en-US" sz="1300" dirty="0"/>
+            <a:endParaRPr lang="en-US" sz="1220" dirty="0"/>
           </a:p>
         </p:txBody>
       </p:sp>
@@ -11521,8 +11523,8 @@
         </p:nvSpPr>
         <p:spPr>
           <a:xfrm>
-            <a:off x="7799832" y="4659782"/>
-            <a:ext cx="3145536" cy="899770"/>
+            <a:off x="7708392" y="4828032"/>
+            <a:ext cx="3282696" cy="749808"/>
           </a:xfrm>
           <a:prstGeom prst="rect">
             <a:avLst/>
@@ -11540,7 +11542,7 @@
               <a:buNone/>
             </a:pPr>
             <a:r>
-              <a:rPr lang="en-US" sz="1320" dirty="0">
+              <a:rPr lang="en-US" sz="1220" dirty="0">
                 <a:solidFill>
                   <a:srgbClr val="17364A"/>
                 </a:solidFill>
@@ -11548,9 +11550,9 @@
                 <a:ea typeface="Aptos" pitchFamily="34" charset="-122"/>
                 <a:cs typeface="Aptos" pitchFamily="34" charset="-120"/>
               </a:rPr>
-              <a:t>Use the assignment to test whether you can explain the concept, apply it to a realistic public health situation, and identify what would need review before the work moves forward.</a:t>
-            </a:r>
-            <a:endParaRPr lang="en-US" sz="1320" dirty="0"/>
+              <a:t>Use the assignment to test whether you can explain the concept, apply it to a.</a:t>
+            </a:r>
+            <a:endParaRPr lang="en-US" sz="1220" dirty="0"/>
           </a:p>
         </p:txBody>
       </p:sp>
@@ -11841,8 +11843,8 @@
         </p:nvSpPr>
         <p:spPr>
           <a:xfrm>
-            <a:off x="868680" y="1508760"/>
-            <a:ext cx="6309360" cy="4160520"/>
+            <a:off x="822960" y="1463040"/>
+            <a:ext cx="6565392" cy="4343400"/>
           </a:xfrm>
           <a:prstGeom prst="rect">
             <a:avLst/>
@@ -11860,7 +11862,7 @@
               <a:buNone/>
             </a:pPr>
             <a:r>
-              <a:rPr lang="en-US" sz="2100" dirty="0">
+              <a:rPr lang="en-US" sz="1920" dirty="0">
                 <a:solidFill>
                   <a:srgbClr val="003A63"/>
                 </a:solidFill>
@@ -11870,14 +11872,14 @@
               </a:rPr>
               <a:t>• 1. Why can overall accuracy be misleading?</a:t>
             </a:r>
-            <a:endParaRPr lang="en-US" sz="2100" dirty="0"/>
-          </a:p>
-          <a:p>
-            <a:pPr indent="0" marL="0">
-              <a:buNone/>
-            </a:pPr>
-            <a:r>
-              <a:rPr lang="en-US" sz="2100" dirty="0">
+            <a:endParaRPr lang="en-US" sz="1920" dirty="0"/>
+          </a:p>
+          <a:p>
+            <a:pPr indent="0" marL="0">
+              <a:buNone/>
+            </a:pPr>
+            <a:r>
+              <a:rPr lang="en-US" sz="1920" dirty="0">
                 <a:solidFill>
                   <a:srgbClr val="003A63"/>
                 </a:solidFill>
@@ -11887,14 +11889,14 @@
               </a:rPr>
               <a:t>• 2. What is workflow validation?</a:t>
             </a:r>
-            <a:endParaRPr lang="en-US" sz="2100" dirty="0"/>
-          </a:p>
-          <a:p>
-            <a:pPr indent="0" marL="0">
-              <a:buNone/>
-            </a:pPr>
-            <a:r>
-              <a:rPr lang="en-US" sz="2100" dirty="0">
+            <a:endParaRPr lang="en-US" sz="1920" dirty="0"/>
+          </a:p>
+          <a:p>
+            <a:pPr indent="0" marL="0">
+              <a:buNone/>
+            </a:pPr>
+            <a:r>
+              <a:rPr lang="en-US" sz="1920" dirty="0">
                 <a:solidFill>
                   <a:srgbClr val="003A63"/>
                 </a:solidFill>
@@ -11902,9 +11904,9 @@
                 <a:ea typeface="Aptos" pitchFamily="34" charset="-122"/>
                 <a:cs typeface="Aptos" pitchFamily="34" charset="-120"/>
               </a:rPr>
-              <a:t>• 3. Which metric is especially important when missed true events could cause harm?</a:t>
-            </a:r>
-            <a:endParaRPr lang="en-US" sz="2100" dirty="0"/>
+              <a:t>• 3. Which metric is especially important when missed true events could cause.</a:t>
+            </a:r>
+            <a:endParaRPr lang="en-US" sz="1920" dirty="0"/>
           </a:p>
         </p:txBody>
       </p:sp>
@@ -11916,12 +11918,12 @@
         </p:nvSpPr>
         <p:spPr>
           <a:xfrm>
-            <a:off x="7635240" y="1325880"/>
-            <a:ext cx="3474720" cy="1207008"/>
+            <a:off x="7543800" y="1325880"/>
+            <a:ext cx="3611880" cy="1261872"/>
           </a:xfrm>
           <a:prstGeom prst="roundRect">
             <a:avLst>
-              <a:gd name="adj" fmla="val 9091"/>
+              <a:gd name="adj" fmla="val 8696"/>
             </a:avLst>
           </a:prstGeom>
           <a:solidFill>
@@ -11943,8 +11945,8 @@
         </p:nvSpPr>
         <p:spPr>
           <a:xfrm>
-            <a:off x="7799832" y="1472184"/>
-            <a:ext cx="3145536" cy="256032"/>
+            <a:off x="7708392" y="1453896"/>
+            <a:ext cx="3282696" cy="228600"/>
           </a:xfrm>
           <a:prstGeom prst="rect">
             <a:avLst/>
@@ -11960,7 +11962,7 @@
               <a:buNone/>
             </a:pPr>
             <a:r>
-              <a:rPr lang="en-US" sz="1300" b="1" dirty="0">
+              <a:rPr lang="en-US" sz="1220" b="1" dirty="0">
                 <a:solidFill>
                   <a:srgbClr val="0068B7"/>
                 </a:solidFill>
@@ -11970,7 +11972,7 @@
               </a:rPr>
               <a:t>Risk check</a:t>
             </a:r>
-            <a:endParaRPr lang="en-US" sz="1300" dirty="0"/>
+            <a:endParaRPr lang="en-US" sz="1220" dirty="0"/>
           </a:p>
         </p:txBody>
       </p:sp>
@@ -11982,8 +11984,8 @@
         </p:nvSpPr>
         <p:spPr>
           <a:xfrm>
-            <a:off x="7799832" y="1801368"/>
-            <a:ext cx="3145536" cy="640080"/>
+            <a:off x="7708392" y="1764792"/>
+            <a:ext cx="3282696" cy="749808"/>
           </a:xfrm>
           <a:prstGeom prst="rect">
             <a:avLst/>
@@ -12001,7 +12003,7 @@
               <a:buNone/>
             </a:pPr>
             <a:r>
-              <a:rPr lang="en-US" sz="1320" dirty="0">
+              <a:rPr lang="en-US" sz="1220" dirty="0">
                 <a:solidFill>
                   <a:srgbClr val="17364A"/>
                 </a:solidFill>
@@ -12011,7 +12013,7 @@
               </a:rPr>
               <a:t>1. Why can overall accuracy be misleading?</a:t>
             </a:r>
-            <a:endParaRPr lang="en-US" sz="1320" dirty="0"/>
+            <a:endParaRPr lang="en-US" sz="1220" dirty="0"/>
           </a:p>
         </p:txBody>
       </p:sp>
@@ -12023,12 +12025,12 @@
         </p:nvSpPr>
         <p:spPr>
           <a:xfrm>
-            <a:off x="7635240" y="2670048"/>
-            <a:ext cx="3474720" cy="1377086"/>
+            <a:off x="7543800" y="2724912"/>
+            <a:ext cx="3611880" cy="1527048"/>
           </a:xfrm>
           <a:prstGeom prst="roundRect">
             <a:avLst>
-              <a:gd name="adj" fmla="val 7968"/>
+              <a:gd name="adj" fmla="val 7186"/>
             </a:avLst>
           </a:prstGeom>
           <a:solidFill>
@@ -12050,8 +12052,8 @@
         </p:nvSpPr>
         <p:spPr>
           <a:xfrm>
-            <a:off x="7799832" y="2816352"/>
-            <a:ext cx="3145536" cy="256032"/>
+            <a:off x="7708392" y="2852928"/>
+            <a:ext cx="3282696" cy="228600"/>
           </a:xfrm>
           <a:prstGeom prst="rect">
             <a:avLst/>
@@ -12067,7 +12069,7 @@
               <a:buNone/>
             </a:pPr>
             <a:r>
-              <a:rPr lang="en-US" sz="1300" b="1" dirty="0">
+              <a:rPr lang="en-US" sz="1220" b="1" dirty="0">
                 <a:solidFill>
                   <a:srgbClr val="0068B7"/>
                 </a:solidFill>
@@ -12077,7 +12079,7 @@
               </a:rPr>
               <a:t>Concept checkpoints</a:t>
             </a:r>
-            <a:endParaRPr lang="en-US" sz="1300" dirty="0"/>
+            <a:endParaRPr lang="en-US" sz="1220" dirty="0"/>
           </a:p>
         </p:txBody>
       </p:sp>
@@ -12089,8 +12091,8 @@
         </p:nvSpPr>
         <p:spPr>
           <a:xfrm>
-            <a:off x="7818120" y="3182112"/>
-            <a:ext cx="3090672" cy="718718"/>
+            <a:off x="7726680" y="3182112"/>
+            <a:ext cx="3227832" cy="960120"/>
           </a:xfrm>
           <a:prstGeom prst="rect">
             <a:avLst/>
@@ -12108,7 +12110,7 @@
               <a:buNone/>
             </a:pPr>
             <a:r>
-              <a:rPr lang="en-US" sz="1220" dirty="0">
+              <a:rPr lang="en-US" sz="1140" dirty="0">
                 <a:solidFill>
                   <a:srgbClr val="17364A"/>
                 </a:solidFill>
@@ -12118,14 +12120,14 @@
               </a:rPr>
               <a:t>1.</a:t>
             </a:r>
-            <a:endParaRPr lang="en-US" sz="1220" dirty="0"/>
-          </a:p>
-          <a:p>
-            <a:pPr indent="0" marL="0">
-              <a:buNone/>
-            </a:pPr>
-            <a:r>
-              <a:rPr lang="en-US" sz="1220" dirty="0">
+            <a:endParaRPr lang="en-US" sz="1140" dirty="0"/>
+          </a:p>
+          <a:p>
+            <a:pPr indent="0" marL="0">
+              <a:buNone/>
+            </a:pPr>
+            <a:r>
+              <a:rPr lang="en-US" sz="1140" dirty="0">
                 <a:solidFill>
                   <a:srgbClr val="17364A"/>
                 </a:solidFill>
@@ -12135,14 +12137,14 @@
               </a:rPr>
               <a:t>Why can overall accuracy be misleading?</a:t>
             </a:r>
-            <a:endParaRPr lang="en-US" sz="1220" dirty="0"/>
-          </a:p>
-          <a:p>
-            <a:pPr indent="0" marL="0">
-              <a:buNone/>
-            </a:pPr>
-            <a:r>
-              <a:rPr lang="en-US" sz="1220" dirty="0">
+            <a:endParaRPr lang="en-US" sz="1140" dirty="0"/>
+          </a:p>
+          <a:p>
+            <a:pPr indent="0" marL="0">
+              <a:buNone/>
+            </a:pPr>
+            <a:r>
+              <a:rPr lang="en-US" sz="1140" dirty="0">
                 <a:solidFill>
                   <a:srgbClr val="17364A"/>
                 </a:solidFill>
@@ -12152,7 +12154,7 @@
               </a:rPr>
               <a:t>2.</a:t>
             </a:r>
-            <a:endParaRPr lang="en-US" sz="1220" dirty="0"/>
+            <a:endParaRPr lang="en-US" sz="1140" dirty="0"/>
           </a:p>
         </p:txBody>
       </p:sp>
@@ -12164,12 +12166,12 @@
         </p:nvSpPr>
         <p:spPr>
           <a:xfrm>
-            <a:off x="7635240" y="4184294"/>
-            <a:ext cx="3474720" cy="1466698"/>
+            <a:off x="7543800" y="4389120"/>
+            <a:ext cx="3611880" cy="1261872"/>
           </a:xfrm>
           <a:prstGeom prst="roundRect">
             <a:avLst>
-              <a:gd name="adj" fmla="val 7481"/>
+              <a:gd name="adj" fmla="val 8696"/>
             </a:avLst>
           </a:prstGeom>
           <a:solidFill>
@@ -12191,8 +12193,8 @@
         </p:nvSpPr>
         <p:spPr>
           <a:xfrm>
-            <a:off x="7799832" y="4330598"/>
-            <a:ext cx="3145536" cy="256032"/>
+            <a:off x="7708392" y="4517136"/>
+            <a:ext cx="3282696" cy="228600"/>
           </a:xfrm>
           <a:prstGeom prst="rect">
             <a:avLst/>
@@ -12208,7 +12210,7 @@
               <a:buNone/>
             </a:pPr>
             <a:r>
-              <a:rPr lang="en-US" sz="1300" b="1" dirty="0">
+              <a:rPr lang="en-US" sz="1220" b="1" dirty="0">
                 <a:solidFill>
                   <a:srgbClr val="0068B7"/>
                 </a:solidFill>
@@ -12218,7 +12220,7 @@
               </a:rPr>
               <a:t>Safeguard to plan</a:t>
             </a:r>
-            <a:endParaRPr lang="en-US" sz="1300" dirty="0"/>
+            <a:endParaRPr lang="en-US" sz="1220" dirty="0"/>
           </a:p>
         </p:txBody>
       </p:sp>
@@ -12230,8 +12232,8 @@
         </p:nvSpPr>
         <p:spPr>
           <a:xfrm>
-            <a:off x="7799832" y="4659782"/>
-            <a:ext cx="3145536" cy="899770"/>
+            <a:off x="7708392" y="4828032"/>
+            <a:ext cx="3282696" cy="749808"/>
           </a:xfrm>
           <a:prstGeom prst="rect">
             <a:avLst/>
@@ -12249,7 +12251,7 @@
               <a:buNone/>
             </a:pPr>
             <a:r>
-              <a:rPr lang="en-US" sz="1320" dirty="0">
+              <a:rPr lang="en-US" sz="1220" dirty="0">
                 <a:solidFill>
                   <a:srgbClr val="17364A"/>
                 </a:solidFill>
@@ -12257,9 +12259,9 @@
                 <a:ea typeface="Aptos" pitchFamily="34" charset="-122"/>
                 <a:cs typeface="Aptos" pitchFamily="34" charset="-120"/>
               </a:rPr>
-              <a:t>Use the assignment to test whether you can explain the concept, apply it to a realistic public health situation, and identify what would need review before the work moves forward.</a:t>
-            </a:r>
-            <a:endParaRPr lang="en-US" sz="1320" dirty="0"/>
+              <a:t>Use the assignment to test whether you can explain the concept, apply it to a.</a:t>
+            </a:r>
+            <a:endParaRPr lang="en-US" sz="1220" dirty="0"/>
           </a:p>
         </p:txBody>
       </p:sp>
@@ -12550,8 +12552,8 @@
         </p:nvSpPr>
         <p:spPr>
           <a:xfrm>
-            <a:off x="868680" y="1508760"/>
-            <a:ext cx="6309360" cy="4160520"/>
+            <a:off x="822960" y="1463040"/>
+            <a:ext cx="6565392" cy="4343400"/>
           </a:xfrm>
           <a:prstGeom prst="rect">
             <a:avLst/>
@@ -12569,7 +12571,7 @@
               <a:buNone/>
             </a:pPr>
             <a:r>
-              <a:rPr lang="en-US" sz="2100" dirty="0">
+              <a:rPr lang="en-US" sz="1920" dirty="0">
                 <a:solidFill>
                   <a:srgbClr val="003A63"/>
                 </a:solidFill>
@@ -12579,14 +12581,14 @@
               </a:rPr>
               <a:t>• NIST Artificial Intelligence Risk Management Framework:.</a:t>
             </a:r>
-            <a:endParaRPr lang="en-US" sz="2100" dirty="0"/>
-          </a:p>
-          <a:p>
-            <a:pPr indent="0" marL="0">
-              <a:buNone/>
-            </a:pPr>
-            <a:r>
-              <a:rPr lang="en-US" sz="2100" dirty="0">
+            <a:endParaRPr lang="en-US" sz="1920" dirty="0"/>
+          </a:p>
+          <a:p>
+            <a:pPr indent="0" marL="0">
+              <a:buNone/>
+            </a:pPr>
+            <a:r>
+              <a:rPr lang="en-US" sz="1920" dirty="0">
                 <a:solidFill>
                   <a:srgbClr val="003A63"/>
                 </a:solidFill>
@@ -12596,14 +12598,14 @@
               </a:rPr>
               <a:t>• NIST AI RMF Generative AI Profile:.</a:t>
             </a:r>
-            <a:endParaRPr lang="en-US" sz="2100" dirty="0"/>
-          </a:p>
-          <a:p>
-            <a:pPr indent="0" marL="0">
-              <a:buNone/>
-            </a:pPr>
-            <a:r>
-              <a:rPr lang="en-US" sz="2100" dirty="0">
+            <a:endParaRPr lang="en-US" sz="1920" dirty="0"/>
+          </a:p>
+          <a:p>
+            <a:pPr indent="0" marL="0">
+              <a:buNone/>
+            </a:pPr>
+            <a:r>
+              <a:rPr lang="en-US" sz="1920" dirty="0">
                 <a:solidFill>
                   <a:srgbClr val="003A63"/>
                 </a:solidFill>
@@ -12613,7 +12615,7 @@
               </a:rPr>
               <a:t>• CDC Evaluation Framework: https://www.cdc.gov/evaluation/</a:t>
             </a:r>
-            <a:endParaRPr lang="en-US" sz="2100" dirty="0"/>
+            <a:endParaRPr lang="en-US" sz="1920" dirty="0"/>
           </a:p>
         </p:txBody>
       </p:sp>
@@ -12625,12 +12627,12 @@
         </p:nvSpPr>
         <p:spPr>
           <a:xfrm>
-            <a:off x="7635240" y="1325880"/>
-            <a:ext cx="3474720" cy="1207008"/>
+            <a:off x="7543800" y="1325880"/>
+            <a:ext cx="3611880" cy="1261872"/>
           </a:xfrm>
           <a:prstGeom prst="roundRect">
             <a:avLst>
-              <a:gd name="adj" fmla="val 9091"/>
+              <a:gd name="adj" fmla="val 8696"/>
             </a:avLst>
           </a:prstGeom>
           <a:solidFill>
@@ -12652,8 +12654,8 @@
         </p:nvSpPr>
         <p:spPr>
           <a:xfrm>
-            <a:off x="7799832" y="1472184"/>
-            <a:ext cx="3145536" cy="256032"/>
+            <a:off x="7708392" y="1453896"/>
+            <a:ext cx="3282696" cy="228600"/>
           </a:xfrm>
           <a:prstGeom prst="rect">
             <a:avLst/>
@@ -12669,7 +12671,7 @@
               <a:buNone/>
             </a:pPr>
             <a:r>
-              <a:rPr lang="en-US" sz="1300" b="1" dirty="0">
+              <a:rPr lang="en-US" sz="1220" b="1" dirty="0">
                 <a:solidFill>
                   <a:srgbClr val="0068B7"/>
                 </a:solidFill>
@@ -12679,7 +12681,7 @@
               </a:rPr>
               <a:t>Risk check</a:t>
             </a:r>
-            <a:endParaRPr lang="en-US" sz="1300" dirty="0"/>
+            <a:endParaRPr lang="en-US" sz="1220" dirty="0"/>
           </a:p>
         </p:txBody>
       </p:sp>
@@ -12691,8 +12693,8 @@
         </p:nvSpPr>
         <p:spPr>
           <a:xfrm>
-            <a:off x="7799832" y="1801368"/>
-            <a:ext cx="3145536" cy="640080"/>
+            <a:off x="7708392" y="1764792"/>
+            <a:ext cx="3282696" cy="749808"/>
           </a:xfrm>
           <a:prstGeom prst="rect">
             <a:avLst/>
@@ -12710,7 +12712,7 @@
               <a:buNone/>
             </a:pPr>
             <a:r>
-              <a:rPr lang="en-US" sz="1320" dirty="0">
+              <a:rPr lang="en-US" sz="1220" dirty="0">
                 <a:solidFill>
                   <a:srgbClr val="17364A"/>
                 </a:solidFill>
@@ -12720,7 +12722,7 @@
               </a:rPr>
               <a:t>NIST Artificial Intelligence Risk Management Framework:.</a:t>
             </a:r>
-            <a:endParaRPr lang="en-US" sz="1320" dirty="0"/>
+            <a:endParaRPr lang="en-US" sz="1220" dirty="0"/>
           </a:p>
         </p:txBody>
       </p:sp>
@@ -12732,12 +12734,12 @@
         </p:nvSpPr>
         <p:spPr>
           <a:xfrm>
-            <a:off x="7635240" y="2670048"/>
-            <a:ext cx="3474720" cy="1536192"/>
+            <a:off x="7543800" y="2724912"/>
+            <a:ext cx="3611880" cy="1527048"/>
           </a:xfrm>
           <a:prstGeom prst="roundRect">
             <a:avLst>
-              <a:gd name="adj" fmla="val 7143"/>
+              <a:gd name="adj" fmla="val 7186"/>
             </a:avLst>
           </a:prstGeom>
           <a:solidFill>
@@ -12759,8 +12761,8 @@
         </p:nvSpPr>
         <p:spPr>
           <a:xfrm>
-            <a:off x="7799832" y="2816352"/>
-            <a:ext cx="3145536" cy="256032"/>
+            <a:off x="7708392" y="2852928"/>
+            <a:ext cx="3282696" cy="228600"/>
           </a:xfrm>
           <a:prstGeom prst="rect">
             <a:avLst/>
@@ -12776,7 +12778,7 @@
               <a:buNone/>
             </a:pPr>
             <a:r>
-              <a:rPr lang="en-US" sz="1300" b="1" dirty="0">
+              <a:rPr lang="en-US" sz="1220" b="1" dirty="0">
                 <a:solidFill>
                   <a:srgbClr val="0068B7"/>
                 </a:solidFill>
@@ -12786,7 +12788,7 @@
               </a:rPr>
               <a:t>Concept checkpoints</a:t>
             </a:r>
-            <a:endParaRPr lang="en-US" sz="1300" dirty="0"/>
+            <a:endParaRPr lang="en-US" sz="1220" dirty="0"/>
           </a:p>
         </p:txBody>
       </p:sp>
@@ -12798,8 +12800,8 @@
         </p:nvSpPr>
         <p:spPr>
           <a:xfrm>
-            <a:off x="7818120" y="3182112"/>
-            <a:ext cx="3090672" cy="877824"/>
+            <a:off x="7726680" y="3182112"/>
+            <a:ext cx="3227832" cy="960120"/>
           </a:xfrm>
           <a:prstGeom prst="rect">
             <a:avLst/>
@@ -12817,7 +12819,7 @@
               <a:buNone/>
             </a:pPr>
             <a:r>
-              <a:rPr lang="en-US" sz="1220" dirty="0">
+              <a:rPr lang="en-US" sz="1140" dirty="0">
                 <a:solidFill>
                   <a:srgbClr val="17364A"/>
                 </a:solidFill>
@@ -12825,16 +12827,16 @@
                 <a:ea typeface="Aptos" pitchFamily="34" charset="-122"/>
                 <a:cs typeface="Aptos" pitchFamily="34" charset="-120"/>
               </a:rPr>
-              <a:t>NIST Artificial Intelligence Risk Management Framework:.</a:t>
-            </a:r>
-            <a:endParaRPr lang="en-US" sz="1220" dirty="0"/>
-          </a:p>
-          <a:p>
-            <a:pPr indent="0" marL="0">
-              <a:buNone/>
-            </a:pPr>
-            <a:r>
-              <a:rPr lang="en-US" sz="1220" dirty="0">
+              <a:t>NIST Artificial Intelligence Risk Management.</a:t>
+            </a:r>
+            <a:endParaRPr lang="en-US" sz="1140" dirty="0"/>
+          </a:p>
+          <a:p>
+            <a:pPr indent="0" marL="0">
+              <a:buNone/>
+            </a:pPr>
+            <a:r>
+              <a:rPr lang="en-US" sz="1140" dirty="0">
                 <a:solidFill>
                   <a:srgbClr val="17364A"/>
                 </a:solidFill>
@@ -12844,7 +12846,7 @@
               </a:rPr>
               <a:t>WHO Guidance on Large Multi-Modal Models:.</a:t>
             </a:r>
-            <a:endParaRPr lang="en-US" sz="1220" dirty="0"/>
+            <a:endParaRPr lang="en-US" sz="1140" dirty="0"/>
           </a:p>
         </p:txBody>
       </p:sp>
@@ -12856,12 +12858,12 @@
         </p:nvSpPr>
         <p:spPr>
           <a:xfrm>
-            <a:off x="7635240" y="4343400"/>
-            <a:ext cx="3474720" cy="1255471"/>
+            <a:off x="7543800" y="4389120"/>
+            <a:ext cx="3611880" cy="1261872"/>
           </a:xfrm>
           <a:prstGeom prst="roundRect">
             <a:avLst>
-              <a:gd name="adj" fmla="val 8740"/>
+              <a:gd name="adj" fmla="val 8696"/>
             </a:avLst>
           </a:prstGeom>
           <a:solidFill>
@@ -12883,8 +12885,8 @@
         </p:nvSpPr>
         <p:spPr>
           <a:xfrm>
-            <a:off x="7799832" y="4489704"/>
-            <a:ext cx="3145536" cy="256032"/>
+            <a:off x="7708392" y="4517136"/>
+            <a:ext cx="3282696" cy="228600"/>
           </a:xfrm>
           <a:prstGeom prst="rect">
             <a:avLst/>
@@ -12900,7 +12902,7 @@
               <a:buNone/>
             </a:pPr>
             <a:r>
-              <a:rPr lang="en-US" sz="1300" b="1" dirty="0">
+              <a:rPr lang="en-US" sz="1220" b="1" dirty="0">
                 <a:solidFill>
                   <a:srgbClr val="0068B7"/>
                 </a:solidFill>
@@ -12910,7 +12912,7 @@
               </a:rPr>
               <a:t>Safeguard to plan</a:t>
             </a:r>
-            <a:endParaRPr lang="en-US" sz="1300" dirty="0"/>
+            <a:endParaRPr lang="en-US" sz="1220" dirty="0"/>
           </a:p>
         </p:txBody>
       </p:sp>
@@ -12922,8 +12924,8 @@
         </p:nvSpPr>
         <p:spPr>
           <a:xfrm>
-            <a:off x="7799832" y="4818888"/>
-            <a:ext cx="3145536" cy="688543"/>
+            <a:off x="7708392" y="4828032"/>
+            <a:ext cx="3282696" cy="749808"/>
           </a:xfrm>
           <a:prstGeom prst="rect">
             <a:avLst/>
@@ -12941,7 +12943,7 @@
               <a:buNone/>
             </a:pPr>
             <a:r>
-              <a:rPr lang="en-US" sz="1320" dirty="0">
+              <a:rPr lang="en-US" sz="1220" dirty="0">
                 <a:solidFill>
                   <a:srgbClr val="17364A"/>
                 </a:solidFill>
@@ -12949,9 +12951,9 @@
                 <a:ea typeface="Aptos" pitchFamily="34" charset="-122"/>
                 <a:cs typeface="Aptos" pitchFamily="34" charset="-120"/>
               </a:rPr>
-              <a:t>Identify what could go wrong, who could be affected, what safeguards are needed, and what evidence should be reviewed before use.</a:t>
-            </a:r>
-            <a:endParaRPr lang="en-US" sz="1320" dirty="0"/>
+              <a:t>Identify what could go wrong, who could be affected, what safeguards are needed,.</a:t>
+            </a:r>
+            <a:endParaRPr lang="en-US" sz="1220" dirty="0"/>
           </a:p>
         </p:txBody>
       </p:sp>
@@ -13269,7 +13271,7 @@
                 <a:ea typeface="Aptos" pitchFamily="34" charset="-122"/>
                 <a:cs typeface="Aptos" pitchFamily="34" charset="-120"/>
               </a:rPr>
-              <a:t>• Play 13: Monitor and Evaluate AI Systems - This lesson informs Play 13 by helping learners.</a:t>
+              <a:t>• Play 13: Monitor and Evaluate AI Systems - This lesson informs Play 13 by.</a:t>
             </a:r>
             <a:endParaRPr lang="en-US" sz="1900" dirty="0"/>
           </a:p>
@@ -13286,7 +13288,7 @@
                 <a:ea typeface="Aptos" pitchFamily="34" charset="-122"/>
                 <a:cs typeface="Aptos" pitchFamily="34" charset="-120"/>
               </a:rPr>
-              <a:t>• Play 12: Execute Governance and Oversight - This lesson informs Play 12 by helping learners.</a:t>
+              <a:t>• Play 12: Execute Governance and Oversight - This lesson informs Play 12 by.</a:t>
             </a:r>
             <a:endParaRPr lang="en-US" sz="1900" dirty="0"/>
           </a:p>
@@ -13303,7 +13305,7 @@
                 <a:ea typeface="Aptos" pitchFamily="34" charset="-122"/>
                 <a:cs typeface="Aptos" pitchFamily="34" charset="-120"/>
               </a:rPr>
-              <a:t>• Play 11: Build and Deploy AI Solutions - This lesson informs Play 11 by helping learners.</a:t>
+              <a:t>• Play 11: Build and Deploy AI Solutions - This lesson informs Play 11 by.</a:t>
             </a:r>
             <a:endParaRPr lang="en-US" sz="1900" dirty="0"/>
           </a:p>
@@ -13320,7 +13322,7 @@
                 <a:ea typeface="Aptos" pitchFamily="34" charset="-122"/>
                 <a:cs typeface="Aptos" pitchFamily="34" charset="-120"/>
               </a:rPr>
-              <a:t>• Play 3: Establish AI Governance - This lesson informs Play 3 by helping learners connect the.</a:t>
+              <a:t>• Play 3: Establish AI Governance - This lesson informs Play 3 by helping.</a:t>
             </a:r>
             <a:endParaRPr lang="en-US" sz="1900" dirty="0"/>
           </a:p>
@@ -13361,8 +13363,8 @@
         </p:nvSpPr>
         <p:spPr>
           <a:xfrm>
-            <a:off x="8211312" y="1563624"/>
-            <a:ext cx="2734056" cy="256032"/>
+            <a:off x="8211312" y="1545336"/>
+            <a:ext cx="2734056" cy="228600"/>
           </a:xfrm>
           <a:prstGeom prst="rect">
             <a:avLst/>
@@ -13378,7 +13380,7 @@
               <a:buNone/>
             </a:pPr>
             <a:r>
-              <a:rPr lang="en-US" sz="1300" b="1" dirty="0">
+              <a:rPr lang="en-US" sz="1220" b="1" dirty="0">
                 <a:solidFill>
                   <a:srgbClr val="0068B7"/>
                 </a:solidFill>
@@ -13388,7 +13390,7 @@
               </a:rPr>
               <a:t>Apply the lesson</a:t>
             </a:r>
-            <a:endParaRPr lang="en-US" sz="1300" dirty="0"/>
+            <a:endParaRPr lang="en-US" sz="1220" dirty="0"/>
           </a:p>
         </p:txBody>
       </p:sp>
@@ -13400,8 +13402,8 @@
         </p:nvSpPr>
         <p:spPr>
           <a:xfrm>
-            <a:off x="8211312" y="1892808"/>
-            <a:ext cx="2734056" cy="1536192"/>
+            <a:off x="8211312" y="1856232"/>
+            <a:ext cx="2734056" cy="1591056"/>
           </a:xfrm>
           <a:prstGeom prst="rect">
             <a:avLst/>
@@ -13419,7 +13421,7 @@
               <a:buNone/>
             </a:pPr>
             <a:r>
-              <a:rPr lang="en-US" sz="1320" dirty="0">
+              <a:rPr lang="en-US" sz="1220" dirty="0">
                 <a:solidFill>
                   <a:srgbClr val="17364A"/>
                 </a:solidFill>
@@ -13427,9 +13429,9 @@
                 <a:ea typeface="Aptos" pitchFamily="34" charset="-122"/>
                 <a:cs typeface="Aptos" pitchFamily="34" charset="-120"/>
               </a:rPr>
-              <a:t>Use the related plays to identify decisions, participants, timing, approvals, and documentation needed for responsible implementation.</a:t>
-            </a:r>
-            <a:endParaRPr lang="en-US" sz="1320" dirty="0"/>
+              <a:t>Use the related plays to identify decisions, participants, timing, approvals,.</a:t>
+            </a:r>
+            <a:endParaRPr lang="en-US" sz="1220" dirty="0"/>
           </a:p>
         </p:txBody>
       </p:sp>
@@ -13468,8 +13470,8 @@
         </p:nvSpPr>
         <p:spPr>
           <a:xfrm>
-            <a:off x="8211312" y="3941064"/>
-            <a:ext cx="2734056" cy="256032"/>
+            <a:off x="8211312" y="3922776"/>
+            <a:ext cx="2734056" cy="228600"/>
           </a:xfrm>
           <a:prstGeom prst="rect">
             <a:avLst/>
@@ -13485,7 +13487,7 @@
               <a:buNone/>
             </a:pPr>
             <a:r>
-              <a:rPr lang="en-US" sz="1300" b="1" dirty="0">
+              <a:rPr lang="en-US" sz="1220" b="1" dirty="0">
                 <a:solidFill>
                   <a:srgbClr val="0068B7"/>
                 </a:solidFill>
@@ -13495,7 +13497,7 @@
               </a:rPr>
               <a:t>Use the play links to</a:t>
             </a:r>
-            <a:endParaRPr lang="en-US" sz="1300" dirty="0"/>
+            <a:endParaRPr lang="en-US" sz="1220" dirty="0"/>
           </a:p>
         </p:txBody>
       </p:sp>
@@ -13507,8 +13509,8 @@
         </p:nvSpPr>
         <p:spPr>
           <a:xfrm>
-            <a:off x="8229600" y="4306824"/>
-            <a:ext cx="2679192" cy="941832"/>
+            <a:off x="8229600" y="4251960"/>
+            <a:ext cx="2679192" cy="1033272"/>
           </a:xfrm>
           <a:prstGeom prst="rect">
             <a:avLst/>
@@ -13526,7 +13528,7 @@
               <a:buNone/>
             </a:pPr>
             <a:r>
-              <a:rPr lang="en-US" sz="1220" dirty="0">
+              <a:rPr lang="en-US" sz="1140" dirty="0">
                 <a:solidFill>
                   <a:srgbClr val="17364A"/>
                 </a:solidFill>
@@ -13536,14 +13538,14 @@
               </a:rPr>
               <a:t>Locate the decision point in the playbook sequence.</a:t>
             </a:r>
-            <a:endParaRPr lang="en-US" sz="1220" dirty="0"/>
-          </a:p>
-          <a:p>
-            <a:pPr indent="0" marL="0">
-              <a:buNone/>
-            </a:pPr>
-            <a:r>
-              <a:rPr lang="en-US" sz="1220" dirty="0">
+            <a:endParaRPr lang="en-US" sz="1140" dirty="0"/>
+          </a:p>
+          <a:p>
+            <a:pPr indent="0" marL="0">
+              <a:buNone/>
+            </a:pPr>
+            <a:r>
+              <a:rPr lang="en-US" sz="1140" dirty="0">
                 <a:solidFill>
                   <a:srgbClr val="17364A"/>
                 </a:solidFill>
@@ -13553,14 +13555,14 @@
               </a:rPr>
               <a:t>Identify who should participate in the work.</a:t>
             </a:r>
-            <a:endParaRPr lang="en-US" sz="1220" dirty="0"/>
-          </a:p>
-          <a:p>
-            <a:pPr indent="0" marL="0">
-              <a:buNone/>
-            </a:pPr>
-            <a:r>
-              <a:rPr lang="en-US" sz="1220" dirty="0">
+            <a:endParaRPr lang="en-US" sz="1140" dirty="0"/>
+          </a:p>
+          <a:p>
+            <a:pPr indent="0" marL="0">
+              <a:buNone/>
+            </a:pPr>
+            <a:r>
+              <a:rPr lang="en-US" sz="1140" dirty="0">
                 <a:solidFill>
                   <a:srgbClr val="17364A"/>
                 </a:solidFill>
@@ -13568,9 +13570,9 @@
                 <a:ea typeface="Aptos" pitchFamily="34" charset="-122"/>
                 <a:cs typeface="Aptos" pitchFamily="34" charset="-120"/>
               </a:rPr>
-              <a:t>Document the review, approval, or implementation step.</a:t>
-            </a:r>
-            <a:endParaRPr lang="en-US" sz="1220" dirty="0"/>
+              <a:t>Document the review, approval, or implementation.</a:t>
+            </a:r>
+            <a:endParaRPr lang="en-US" sz="1140" dirty="0"/>
           </a:p>
         </p:txBody>
       </p:sp>
@@ -13888,7 +13890,7 @@
                 <a:ea typeface="Aptos" pitchFamily="34" charset="-122"/>
                 <a:cs typeface="Aptos" pitchFamily="34" charset="-120"/>
               </a:rPr>
-              <a:t>• Tool 44: Performance Monitoring Dashboard (Dashboard) - Use this tool to complete or.</a:t>
+              <a:t>• Tool 44: Performance Monitoring Dashboard (Dashboard) - Use this tool to.</a:t>
             </a:r>
             <a:endParaRPr lang="en-US" sz="1850" dirty="0"/>
           </a:p>
@@ -13905,7 +13907,7 @@
                 <a:ea typeface="Aptos" pitchFamily="34" charset="-122"/>
                 <a:cs typeface="Aptos" pitchFamily="34" charset="-120"/>
               </a:rPr>
-              <a:t>• Tool 45: Continuous Improvement Log (Log) - Use Continuous Improvement Log to translate this.</a:t>
+              <a:t>• Tool 45: Continuous Improvement Log (Log) - Use Continuous Improvement Log.</a:t>
             </a:r>
             <a:endParaRPr lang="en-US" sz="1850" dirty="0"/>
           </a:p>
@@ -13922,7 +13924,7 @@
                 <a:ea typeface="Aptos" pitchFamily="34" charset="-122"/>
                 <a:cs typeface="Aptos" pitchFamily="34" charset="-120"/>
               </a:rPr>
-              <a:t>• Tool 48: AI Evaluation &amp; Outcomes Reporting (Template) - Use this tool to complete or.</a:t>
+              <a:t>• Tool 48: AI Evaluation &amp; Outcomes Reporting (Template) - Use this tool to.</a:t>
             </a:r>
             <a:endParaRPr lang="en-US" sz="1850" dirty="0"/>
           </a:p>
@@ -13939,7 +13941,7 @@
                 <a:ea typeface="Aptos" pitchFamily="34" charset="-122"/>
                 <a:cs typeface="Aptos" pitchFamily="34" charset="-120"/>
               </a:rPr>
-              <a:t>• Tool 13: AI Use Case Intake, Risk Review, and System Inventory Template (Template) - Use AI.</a:t>
+              <a:t>• Tool 13: AI Use Case Intake, Risk Review, and System Inventory Template.</a:t>
             </a:r>
             <a:endParaRPr lang="en-US" sz="1850" dirty="0"/>
           </a:p>
@@ -13980,8 +13982,8 @@
         </p:nvSpPr>
         <p:spPr>
           <a:xfrm>
-            <a:off x="8211312" y="1563624"/>
-            <a:ext cx="2734056" cy="256032"/>
+            <a:off x="8211312" y="1545336"/>
+            <a:ext cx="2734056" cy="228600"/>
           </a:xfrm>
           <a:prstGeom prst="rect">
             <a:avLst/>
@@ -13997,7 +13999,7 @@
               <a:buNone/>
             </a:pPr>
             <a:r>
-              <a:rPr lang="en-US" sz="1300" b="1" dirty="0">
+              <a:rPr lang="en-US" sz="1220" b="1" dirty="0">
                 <a:solidFill>
                   <a:srgbClr val="0068B7"/>
                 </a:solidFill>
@@ -14007,7 +14009,7 @@
               </a:rPr>
               <a:t>Use the tools</a:t>
             </a:r>
-            <a:endParaRPr lang="en-US" sz="1300" dirty="0"/>
+            <a:endParaRPr lang="en-US" sz="1220" dirty="0"/>
           </a:p>
         </p:txBody>
       </p:sp>
@@ -14019,8 +14021,8 @@
         </p:nvSpPr>
         <p:spPr>
           <a:xfrm>
-            <a:off x="8211312" y="1892808"/>
-            <a:ext cx="2734056" cy="1536192"/>
+            <a:off x="8211312" y="1856232"/>
+            <a:ext cx="2734056" cy="1591056"/>
           </a:xfrm>
           <a:prstGeom prst="rect">
             <a:avLst/>
@@ -14038,7 +14040,7 @@
               <a:buNone/>
             </a:pPr>
             <a:r>
-              <a:rPr lang="en-US" sz="1320" dirty="0">
+              <a:rPr lang="en-US" sz="1220" dirty="0">
                 <a:solidFill>
                   <a:srgbClr val="17364A"/>
                 </a:solidFill>
@@ -14046,9 +14048,9 @@
                 <a:ea typeface="Aptos" pitchFamily="34" charset="-122"/>
                 <a:cs typeface="Aptos" pitchFamily="34" charset="-120"/>
               </a:rPr>
-              <a:t>Use linked tools when your department needs a structured worksheet, template, checklist, review process, or documentation artifact.</a:t>
-            </a:r>
-            <a:endParaRPr lang="en-US" sz="1320" dirty="0"/>
+              <a:t>Use linked tools when your department needs a structured worksheet, template,.</a:t>
+            </a:r>
+            <a:endParaRPr lang="en-US" sz="1220" dirty="0"/>
           </a:p>
         </p:txBody>
       </p:sp>
@@ -14087,8 +14089,8 @@
         </p:nvSpPr>
         <p:spPr>
           <a:xfrm>
-            <a:off x="8211312" y="3941064"/>
-            <a:ext cx="2734056" cy="256032"/>
+            <a:off x="8211312" y="3922776"/>
+            <a:ext cx="2734056" cy="228600"/>
           </a:xfrm>
           <a:prstGeom prst="rect">
             <a:avLst/>
@@ -14104,7 +14106,7 @@
               <a:buNone/>
             </a:pPr>
             <a:r>
-              <a:rPr lang="en-US" sz="1300" b="1" dirty="0">
+              <a:rPr lang="en-US" sz="1220" b="1" dirty="0">
                 <a:solidFill>
                   <a:srgbClr val="0068B7"/>
                 </a:solidFill>
@@ -14114,7 +14116,7 @@
               </a:rPr>
               <a:t>Tool selection cues</a:t>
             </a:r>
-            <a:endParaRPr lang="en-US" sz="1300" dirty="0"/>
+            <a:endParaRPr lang="en-US" sz="1220" dirty="0"/>
           </a:p>
         </p:txBody>
       </p:sp>
@@ -14126,8 +14128,8 @@
         </p:nvSpPr>
         <p:spPr>
           <a:xfrm>
-            <a:off x="8229600" y="4306824"/>
-            <a:ext cx="2679192" cy="941832"/>
+            <a:off x="8229600" y="4251960"/>
+            <a:ext cx="2679192" cy="1033272"/>
           </a:xfrm>
           <a:prstGeom prst="rect">
             <a:avLst/>
@@ -14145,7 +14147,7 @@
               <a:buNone/>
             </a:pPr>
             <a:r>
-              <a:rPr lang="en-US" sz="1220" dirty="0">
+              <a:rPr lang="en-US" sz="1140" dirty="0">
                 <a:solidFill>
                   <a:srgbClr val="17364A"/>
                 </a:solidFill>
@@ -14155,14 +14157,14 @@
               </a:rPr>
               <a:t>Use a tool when no comparable local process exists.</a:t>
             </a:r>
-            <a:endParaRPr lang="en-US" sz="1220" dirty="0"/>
-          </a:p>
-          <a:p>
-            <a:pPr indent="0" marL="0">
-              <a:buNone/>
-            </a:pPr>
-            <a:r>
-              <a:rPr lang="en-US" sz="1220" dirty="0">
+            <a:endParaRPr lang="en-US" sz="1140" dirty="0"/>
+          </a:p>
+          <a:p>
+            <a:pPr indent="0" marL="0">
+              <a:buNone/>
+            </a:pPr>
+            <a:r>
+              <a:rPr lang="en-US" sz="1140" dirty="0">
                 <a:solidFill>
                   <a:srgbClr val="17364A"/>
                 </a:solidFill>
@@ -14170,16 +14172,16 @@
                 <a:ea typeface="Aptos" pitchFamily="34" charset="-122"/>
                 <a:cs typeface="Aptos" pitchFamily="34" charset="-120"/>
               </a:rPr>
-              <a:t>Adapt existing department templates when they already fit the.</a:t>
-            </a:r>
-            <a:endParaRPr lang="en-US" sz="1220" dirty="0"/>
-          </a:p>
-          <a:p>
-            <a:pPr indent="0" marL="0">
-              <a:buNone/>
-            </a:pPr>
-            <a:r>
-              <a:rPr lang="en-US" sz="1220" dirty="0">
+              <a:t>Adapt existing department templates when they.</a:t>
+            </a:r>
+            <a:endParaRPr lang="en-US" sz="1140" dirty="0"/>
+          </a:p>
+          <a:p>
+            <a:pPr indent="0" marL="0">
+              <a:buNone/>
+            </a:pPr>
+            <a:r>
+              <a:rPr lang="en-US" sz="1140" dirty="0">
                 <a:solidFill>
                   <a:srgbClr val="17364A"/>
                 </a:solidFill>
@@ -14187,9 +14189,9 @@
                 <a:ea typeface="Aptos" pitchFamily="34" charset="-122"/>
                 <a:cs typeface="Aptos" pitchFamily="34" charset="-120"/>
               </a:rPr>
-              <a:t>Save the completed artifact as evidence of the decision.</a:t>
-            </a:r>
-            <a:endParaRPr lang="en-US" sz="1220" dirty="0"/>
+              <a:t>Save the completed artifact as evidence of the.</a:t>
+            </a:r>
+            <a:endParaRPr lang="en-US" sz="1140" dirty="0"/>
           </a:p>
         </p:txBody>
       </p:sp>
@@ -14480,8 +14482,8 @@
         </p:nvSpPr>
         <p:spPr>
           <a:xfrm>
-            <a:off x="868680" y="1508760"/>
-            <a:ext cx="6309360" cy="4160520"/>
+            <a:off x="822960" y="1463040"/>
+            <a:ext cx="6565392" cy="4343400"/>
           </a:xfrm>
           <a:prstGeom prst="rect">
             <a:avLst/>
@@ -14499,7 +14501,7 @@
               <a:buNone/>
             </a:pPr>
             <a:r>
-              <a:rPr lang="en-US" sz="2100" dirty="0">
+              <a:rPr lang="en-US" sz="1920" dirty="0">
                 <a:solidFill>
                   <a:srgbClr val="003A63"/>
                 </a:solidFill>
@@ -14509,14 +14511,14 @@
               </a:rPr>
               <a:t>• Describe the purpose of advanced model validation in public health AI.</a:t>
             </a:r>
-            <a:endParaRPr lang="en-US" sz="2100" dirty="0"/>
-          </a:p>
-          <a:p>
-            <a:pPr indent="0" marL="0">
-              <a:buNone/>
-            </a:pPr>
-            <a:r>
-              <a:rPr lang="en-US" sz="2100" dirty="0">
+            <a:endParaRPr lang="en-US" sz="1920" dirty="0"/>
+          </a:p>
+          <a:p>
+            <a:pPr indent="0" marL="0">
+              <a:buNone/>
+            </a:pPr>
+            <a:r>
+              <a:rPr lang="en-US" sz="1920" dirty="0">
                 <a:solidFill>
                   <a:srgbClr val="003A63"/>
                 </a:solidFill>
@@ -14524,16 +14526,16 @@
                 <a:ea typeface="Aptos" pitchFamily="34" charset="-122"/>
                 <a:cs typeface="Aptos" pitchFamily="34" charset="-120"/>
               </a:rPr>
-              <a:t>• Interpret sensitivity, specificity, positive predictive value, negative predictive value,.</a:t>
-            </a:r>
-            <a:endParaRPr lang="en-US" sz="2100" dirty="0"/>
-          </a:p>
-          <a:p>
-            <a:pPr indent="0" marL="0">
-              <a:buNone/>
-            </a:pPr>
-            <a:r>
-              <a:rPr lang="en-US" sz="2100" dirty="0">
+              <a:t>• Interpret sensitivity, specificity, positive predictive value, negative.</a:t>
+            </a:r>
+            <a:endParaRPr lang="en-US" sz="1920" dirty="0"/>
+          </a:p>
+          <a:p>
+            <a:pPr indent="0" marL="0">
+              <a:buNone/>
+            </a:pPr>
+            <a:r>
+              <a:rPr lang="en-US" sz="1920" dirty="0">
                 <a:solidFill>
                   <a:srgbClr val="003A63"/>
                 </a:solidFill>
@@ -14543,7 +14545,7 @@
               </a:rPr>
               <a:t>• Distinguish internal validation, external validation, and workflow validation.</a:t>
             </a:r>
-            <a:endParaRPr lang="en-US" sz="2100" dirty="0"/>
+            <a:endParaRPr lang="en-US" sz="1920" dirty="0"/>
           </a:p>
         </p:txBody>
       </p:sp>
@@ -14555,12 +14557,12 @@
         </p:nvSpPr>
         <p:spPr>
           <a:xfrm>
-            <a:off x="7635240" y="1325880"/>
-            <a:ext cx="3474720" cy="1207008"/>
+            <a:off x="7543800" y="1325880"/>
+            <a:ext cx="3611880" cy="1261872"/>
           </a:xfrm>
           <a:prstGeom prst="roundRect">
             <a:avLst>
-              <a:gd name="adj" fmla="val 9091"/>
+              <a:gd name="adj" fmla="val 8696"/>
             </a:avLst>
           </a:prstGeom>
           <a:solidFill>
@@ -14582,8 +14584,8 @@
         </p:nvSpPr>
         <p:spPr>
           <a:xfrm>
-            <a:off x="7799832" y="1472184"/>
-            <a:ext cx="3145536" cy="256032"/>
+            <a:off x="7708392" y="1453896"/>
+            <a:ext cx="3282696" cy="228600"/>
           </a:xfrm>
           <a:prstGeom prst="rect">
             <a:avLst/>
@@ -14599,7 +14601,7 @@
               <a:buNone/>
             </a:pPr>
             <a:r>
-              <a:rPr lang="en-US" sz="1300" b="1" dirty="0">
+              <a:rPr lang="en-US" sz="1220" b="1" dirty="0">
                 <a:solidFill>
                   <a:srgbClr val="0068B7"/>
                 </a:solidFill>
@@ -14609,7 +14611,7 @@
               </a:rPr>
               <a:t>Risk check</a:t>
             </a:r>
-            <a:endParaRPr lang="en-US" sz="1300" dirty="0"/>
+            <a:endParaRPr lang="en-US" sz="1220" dirty="0"/>
           </a:p>
         </p:txBody>
       </p:sp>
@@ -14621,8 +14623,8 @@
         </p:nvSpPr>
         <p:spPr>
           <a:xfrm>
-            <a:off x="7799832" y="1801368"/>
-            <a:ext cx="3145536" cy="640080"/>
+            <a:off x="7708392" y="1764792"/>
+            <a:ext cx="3282696" cy="749808"/>
           </a:xfrm>
           <a:prstGeom prst="rect">
             <a:avLst/>
@@ -14640,7 +14642,7 @@
               <a:buNone/>
             </a:pPr>
             <a:r>
-              <a:rPr lang="en-US" sz="1320" dirty="0">
+              <a:rPr lang="en-US" sz="1220" dirty="0">
                 <a:solidFill>
                   <a:srgbClr val="17364A"/>
                 </a:solidFill>
@@ -14650,7 +14652,7 @@
               </a:rPr>
               <a:t>Describe the purpose of advanced model validation in public health AI.</a:t>
             </a:r>
-            <a:endParaRPr lang="en-US" sz="1320" dirty="0"/>
+            <a:endParaRPr lang="en-US" sz="1220" dirty="0"/>
           </a:p>
         </p:txBody>
       </p:sp>
@@ -14662,12 +14664,12 @@
         </p:nvSpPr>
         <p:spPr>
           <a:xfrm>
-            <a:off x="7635240" y="2670048"/>
-            <a:ext cx="3474720" cy="1377086"/>
+            <a:off x="7543800" y="2724912"/>
+            <a:ext cx="3611880" cy="1527048"/>
           </a:xfrm>
           <a:prstGeom prst="roundRect">
             <a:avLst>
-              <a:gd name="adj" fmla="val 7968"/>
+              <a:gd name="adj" fmla="val 7186"/>
             </a:avLst>
           </a:prstGeom>
           <a:solidFill>
@@ -14689,8 +14691,8 @@
         </p:nvSpPr>
         <p:spPr>
           <a:xfrm>
-            <a:off x="7799832" y="2816352"/>
-            <a:ext cx="3145536" cy="256032"/>
+            <a:off x="7708392" y="2852928"/>
+            <a:ext cx="3282696" cy="228600"/>
           </a:xfrm>
           <a:prstGeom prst="rect">
             <a:avLst/>
@@ -14706,7 +14708,7 @@
               <a:buNone/>
             </a:pPr>
             <a:r>
-              <a:rPr lang="en-US" sz="1300" b="1" dirty="0">
+              <a:rPr lang="en-US" sz="1220" b="1" dirty="0">
                 <a:solidFill>
                   <a:srgbClr val="0068B7"/>
                 </a:solidFill>
@@ -14716,7 +14718,7 @@
               </a:rPr>
               <a:t>Concept checkpoints</a:t>
             </a:r>
-            <a:endParaRPr lang="en-US" sz="1300" dirty="0"/>
+            <a:endParaRPr lang="en-US" sz="1220" dirty="0"/>
           </a:p>
         </p:txBody>
       </p:sp>
@@ -14728,8 +14730,8 @@
         </p:nvSpPr>
         <p:spPr>
           <a:xfrm>
-            <a:off x="7818120" y="3182112"/>
-            <a:ext cx="3090672" cy="718718"/>
+            <a:off x="7726680" y="3182112"/>
+            <a:ext cx="3227832" cy="960120"/>
           </a:xfrm>
           <a:prstGeom prst="rect">
             <a:avLst/>
@@ -14747,7 +14749,7 @@
               <a:buNone/>
             </a:pPr>
             <a:r>
-              <a:rPr lang="en-US" sz="1220" dirty="0">
+              <a:rPr lang="en-US" sz="1140" dirty="0">
                 <a:solidFill>
                   <a:srgbClr val="17364A"/>
                 </a:solidFill>
@@ -14755,16 +14757,16 @@
                 <a:ea typeface="Aptos" pitchFamily="34" charset="-122"/>
                 <a:cs typeface="Aptos" pitchFamily="34" charset="-120"/>
               </a:rPr>
-              <a:t>Interpret sensitivity, specificity, positive predictive value,.</a:t>
-            </a:r>
-            <a:endParaRPr lang="en-US" sz="1220" dirty="0"/>
-          </a:p>
-          <a:p>
-            <a:pPr indent="0" marL="0">
-              <a:buNone/>
-            </a:pPr>
-            <a:r>
-              <a:rPr lang="en-US" sz="1220" dirty="0">
+              <a:t>Interpret sensitivity, specificity, positive.</a:t>
+            </a:r>
+            <a:endParaRPr lang="en-US" sz="1140" dirty="0"/>
+          </a:p>
+          <a:p>
+            <a:pPr indent="0" marL="0">
+              <a:buNone/>
+            </a:pPr>
+            <a:r>
+              <a:rPr lang="en-US" sz="1140" dirty="0">
                 <a:solidFill>
                   <a:srgbClr val="17364A"/>
                 </a:solidFill>
@@ -14772,16 +14774,16 @@
                 <a:ea typeface="Aptos" pitchFamily="34" charset="-122"/>
                 <a:cs typeface="Aptos" pitchFamily="34" charset="-120"/>
               </a:rPr>
-              <a:t>Identify when model performance is insufficient for the intended.</a:t>
-            </a:r>
-            <a:endParaRPr lang="en-US" sz="1220" dirty="0"/>
-          </a:p>
-          <a:p>
-            <a:pPr indent="0" marL="0">
-              <a:buNone/>
-            </a:pPr>
-            <a:r>
-              <a:rPr lang="en-US" sz="1220" dirty="0">
+              <a:t>Identify when model performance is insufficient.</a:t>
+            </a:r>
+            <a:endParaRPr lang="en-US" sz="1140" dirty="0"/>
+          </a:p>
+          <a:p>
+            <a:pPr indent="0" marL="0">
+              <a:buNone/>
+            </a:pPr>
+            <a:r>
+              <a:rPr lang="en-US" sz="1140" dirty="0">
                 <a:solidFill>
                   <a:srgbClr val="17364A"/>
                 </a:solidFill>
@@ -14789,9 +14791,9 @@
                 <a:ea typeface="Aptos" pitchFamily="34" charset="-122"/>
                 <a:cs typeface="Aptos" pitchFamily="34" charset="-120"/>
               </a:rPr>
-              <a:t>Design monitoring for drift, degradation, error patterns, and.</a:t>
-            </a:r>
-            <a:endParaRPr lang="en-US" sz="1220" dirty="0"/>
+              <a:t>Design monitoring for drift, degradation, error.</a:t>
+            </a:r>
+            <a:endParaRPr lang="en-US" sz="1140" dirty="0"/>
           </a:p>
         </p:txBody>
       </p:sp>
@@ -14803,12 +14805,12 @@
         </p:nvSpPr>
         <p:spPr>
           <a:xfrm>
-            <a:off x="7635240" y="4184294"/>
-            <a:ext cx="3474720" cy="1466698"/>
+            <a:off x="7543800" y="4389120"/>
+            <a:ext cx="3611880" cy="1261872"/>
           </a:xfrm>
           <a:prstGeom prst="roundRect">
             <a:avLst>
-              <a:gd name="adj" fmla="val 7481"/>
+              <a:gd name="adj" fmla="val 8696"/>
             </a:avLst>
           </a:prstGeom>
           <a:solidFill>
@@ -14830,8 +14832,8 @@
         </p:nvSpPr>
         <p:spPr>
           <a:xfrm>
-            <a:off x="7799832" y="4330598"/>
-            <a:ext cx="3145536" cy="256032"/>
+            <a:off x="7708392" y="4517136"/>
+            <a:ext cx="3282696" cy="228600"/>
           </a:xfrm>
           <a:prstGeom prst="rect">
             <a:avLst/>
@@ -14847,7 +14849,7 @@
               <a:buNone/>
             </a:pPr>
             <a:r>
-              <a:rPr lang="en-US" sz="1300" b="1" dirty="0">
+              <a:rPr lang="en-US" sz="1220" b="1" dirty="0">
                 <a:solidFill>
                   <a:srgbClr val="0068B7"/>
                 </a:solidFill>
@@ -14857,7 +14859,7 @@
               </a:rPr>
               <a:t>Safeguard to plan</a:t>
             </a:r>
-            <a:endParaRPr lang="en-US" sz="1300" dirty="0"/>
+            <a:endParaRPr lang="en-US" sz="1220" dirty="0"/>
           </a:p>
         </p:txBody>
       </p:sp>
@@ -14869,8 +14871,8 @@
         </p:nvSpPr>
         <p:spPr>
           <a:xfrm>
-            <a:off x="7799832" y="4659782"/>
-            <a:ext cx="3145536" cy="899770"/>
+            <a:off x="7708392" y="4828032"/>
+            <a:ext cx="3282696" cy="749808"/>
           </a:xfrm>
           <a:prstGeom prst="rect">
             <a:avLst/>
@@ -14888,7 +14890,7 @@
               <a:buNone/>
             </a:pPr>
             <a:r>
-              <a:rPr lang="en-US" sz="1320" dirty="0">
+              <a:rPr lang="en-US" sz="1220" dirty="0">
                 <a:solidFill>
                   <a:srgbClr val="17364A"/>
                 </a:solidFill>
@@ -14896,9 +14898,9 @@
                 <a:ea typeface="Aptos" pitchFamily="34" charset="-122"/>
                 <a:cs typeface="Aptos" pitchFamily="34" charset="-120"/>
               </a:rPr>
-              <a:t>Use the assignment to test whether you can explain the concept, apply it to a realistic public health situation, and identify what would need review before the work moves forward.</a:t>
-            </a:r>
-            <a:endParaRPr lang="en-US" sz="1320" dirty="0"/>
+              <a:t>Use the assignment to test whether you can explain the concept, apply it to a.</a:t>
+            </a:r>
+            <a:endParaRPr lang="en-US" sz="1220" dirty="0"/>
           </a:p>
         </p:txBody>
       </p:sp>
@@ -15189,8 +15191,8 @@
         </p:nvSpPr>
         <p:spPr>
           <a:xfrm>
-            <a:off x="868680" y="1508760"/>
-            <a:ext cx="6309360" cy="4160520"/>
+            <a:off x="822960" y="1463040"/>
+            <a:ext cx="6565392" cy="4343400"/>
           </a:xfrm>
           <a:prstGeom prst="rect">
             <a:avLst/>
@@ -15208,7 +15210,7 @@
               <a:buNone/>
             </a:pPr>
             <a:r>
-              <a:rPr lang="en-US" sz="2100" dirty="0">
+              <a:rPr lang="en-US" sz="1920" dirty="0">
                 <a:solidFill>
                   <a:srgbClr val="003A63"/>
                 </a:solidFill>
@@ -15218,7 +15220,7 @@
               </a:rPr>
               <a:t>• Produce an advanced validation plan for an AI-supported workflow.</a:t>
             </a:r>
-            <a:endParaRPr lang="en-US" sz="2100" dirty="0"/>
+            <a:endParaRPr lang="en-US" sz="1920" dirty="0"/>
           </a:p>
         </p:txBody>
       </p:sp>
@@ -15230,12 +15232,12 @@
         </p:nvSpPr>
         <p:spPr>
           <a:xfrm>
-            <a:off x="7635240" y="1325880"/>
-            <a:ext cx="3474720" cy="1207008"/>
+            <a:off x="7543800" y="1325880"/>
+            <a:ext cx="3611880" cy="1261872"/>
           </a:xfrm>
           <a:prstGeom prst="roundRect">
             <a:avLst>
-              <a:gd name="adj" fmla="val 9091"/>
+              <a:gd name="adj" fmla="val 8696"/>
             </a:avLst>
           </a:prstGeom>
           <a:solidFill>
@@ -15257,8 +15259,8 @@
         </p:nvSpPr>
         <p:spPr>
           <a:xfrm>
-            <a:off x="7799832" y="1472184"/>
-            <a:ext cx="3145536" cy="256032"/>
+            <a:off x="7708392" y="1453896"/>
+            <a:ext cx="3282696" cy="228600"/>
           </a:xfrm>
           <a:prstGeom prst="rect">
             <a:avLst/>
@@ -15274,7 +15276,7 @@
               <a:buNone/>
             </a:pPr>
             <a:r>
-              <a:rPr lang="en-US" sz="1300" b="1" dirty="0">
+              <a:rPr lang="en-US" sz="1220" b="1" dirty="0">
                 <a:solidFill>
                   <a:srgbClr val="0068B7"/>
                 </a:solidFill>
@@ -15284,7 +15286,7 @@
               </a:rPr>
               <a:t>Risk check</a:t>
             </a:r>
-            <a:endParaRPr lang="en-US" sz="1300" dirty="0"/>
+            <a:endParaRPr lang="en-US" sz="1220" dirty="0"/>
           </a:p>
         </p:txBody>
       </p:sp>
@@ -15296,8 +15298,8 @@
         </p:nvSpPr>
         <p:spPr>
           <a:xfrm>
-            <a:off x="7799832" y="1801368"/>
-            <a:ext cx="3145536" cy="640080"/>
+            <a:off x="7708392" y="1764792"/>
+            <a:ext cx="3282696" cy="749808"/>
           </a:xfrm>
           <a:prstGeom prst="rect">
             <a:avLst/>
@@ -15315,7 +15317,7 @@
               <a:buNone/>
             </a:pPr>
             <a:r>
-              <a:rPr lang="en-US" sz="1320" dirty="0">
+              <a:rPr lang="en-US" sz="1220" dirty="0">
                 <a:solidFill>
                   <a:srgbClr val="17364A"/>
                 </a:solidFill>
@@ -15325,7 +15327,7 @@
               </a:rPr>
               <a:t>Produce an advanced validation plan for an AI-supported workflow.</a:t>
             </a:r>
-            <a:endParaRPr lang="en-US" sz="1320" dirty="0"/>
+            <a:endParaRPr lang="en-US" sz="1220" dirty="0"/>
           </a:p>
         </p:txBody>
       </p:sp>
@@ -15337,12 +15339,12 @@
         </p:nvSpPr>
         <p:spPr>
           <a:xfrm>
-            <a:off x="7635240" y="2670048"/>
-            <a:ext cx="3474720" cy="1377086"/>
+            <a:off x="7543800" y="2724912"/>
+            <a:ext cx="3611880" cy="1527048"/>
           </a:xfrm>
           <a:prstGeom prst="roundRect">
             <a:avLst>
-              <a:gd name="adj" fmla="val 7968"/>
+              <a:gd name="adj" fmla="val 7186"/>
             </a:avLst>
           </a:prstGeom>
           <a:solidFill>
@@ -15364,8 +15366,8 @@
         </p:nvSpPr>
         <p:spPr>
           <a:xfrm>
-            <a:off x="7799832" y="2816352"/>
-            <a:ext cx="3145536" cy="256032"/>
+            <a:off x="7708392" y="2852928"/>
+            <a:ext cx="3282696" cy="228600"/>
           </a:xfrm>
           <a:prstGeom prst="rect">
             <a:avLst/>
@@ -15381,7 +15383,7 @@
               <a:buNone/>
             </a:pPr>
             <a:r>
-              <a:rPr lang="en-US" sz="1300" b="1" dirty="0">
+              <a:rPr lang="en-US" sz="1220" b="1" dirty="0">
                 <a:solidFill>
                   <a:srgbClr val="0068B7"/>
                 </a:solidFill>
@@ -15391,7 +15393,7 @@
               </a:rPr>
               <a:t>Concept checkpoints</a:t>
             </a:r>
-            <a:endParaRPr lang="en-US" sz="1300" dirty="0"/>
+            <a:endParaRPr lang="en-US" sz="1220" dirty="0"/>
           </a:p>
         </p:txBody>
       </p:sp>
@@ -15403,8 +15405,8 @@
         </p:nvSpPr>
         <p:spPr>
           <a:xfrm>
-            <a:off x="7818120" y="3182112"/>
-            <a:ext cx="3090672" cy="718718"/>
+            <a:off x="7726680" y="3182112"/>
+            <a:ext cx="3227832" cy="960120"/>
           </a:xfrm>
           <a:prstGeom prst="rect">
             <a:avLst/>
@@ -15422,7 +15424,7 @@
               <a:buNone/>
             </a:pPr>
             <a:r>
-              <a:rPr lang="en-US" sz="1220" dirty="0">
+              <a:rPr lang="en-US" sz="1140" dirty="0">
                 <a:solidFill>
                   <a:srgbClr val="17364A"/>
                 </a:solidFill>
@@ -15430,9 +15432,9 @@
                 <a:ea typeface="Aptos" pitchFamily="34" charset="-122"/>
                 <a:cs typeface="Aptos" pitchFamily="34" charset="-120"/>
               </a:rPr>
-              <a:t>Produce an advanced validation plan for an AI-supported workflow.</a:t>
-            </a:r>
-            <a:endParaRPr lang="en-US" sz="1220" dirty="0"/>
+              <a:t>Produce an advanced validation plan for an.</a:t>
+            </a:r>
+            <a:endParaRPr lang="en-US" sz="1140" dirty="0"/>
           </a:p>
         </p:txBody>
       </p:sp>
@@ -15444,12 +15446,12 @@
         </p:nvSpPr>
         <p:spPr>
           <a:xfrm>
-            <a:off x="7635240" y="4184294"/>
-            <a:ext cx="3474720" cy="1466698"/>
+            <a:off x="7543800" y="4389120"/>
+            <a:ext cx="3611880" cy="1261872"/>
           </a:xfrm>
           <a:prstGeom prst="roundRect">
             <a:avLst>
-              <a:gd name="adj" fmla="val 7481"/>
+              <a:gd name="adj" fmla="val 8696"/>
             </a:avLst>
           </a:prstGeom>
           <a:solidFill>
@@ -15471,8 +15473,8 @@
         </p:nvSpPr>
         <p:spPr>
           <a:xfrm>
-            <a:off x="7799832" y="4330598"/>
-            <a:ext cx="3145536" cy="256032"/>
+            <a:off x="7708392" y="4517136"/>
+            <a:ext cx="3282696" cy="228600"/>
           </a:xfrm>
           <a:prstGeom prst="rect">
             <a:avLst/>
@@ -15488,7 +15490,7 @@
               <a:buNone/>
             </a:pPr>
             <a:r>
-              <a:rPr lang="en-US" sz="1300" b="1" dirty="0">
+              <a:rPr lang="en-US" sz="1220" b="1" dirty="0">
                 <a:solidFill>
                   <a:srgbClr val="0068B7"/>
                 </a:solidFill>
@@ -15498,7 +15500,7 @@
               </a:rPr>
               <a:t>Safeguard to plan</a:t>
             </a:r>
-            <a:endParaRPr lang="en-US" sz="1300" dirty="0"/>
+            <a:endParaRPr lang="en-US" sz="1220" dirty="0"/>
           </a:p>
         </p:txBody>
       </p:sp>
@@ -15510,8 +15512,8 @@
         </p:nvSpPr>
         <p:spPr>
           <a:xfrm>
-            <a:off x="7799832" y="4659782"/>
-            <a:ext cx="3145536" cy="899770"/>
+            <a:off x="7708392" y="4828032"/>
+            <a:ext cx="3282696" cy="749808"/>
           </a:xfrm>
           <a:prstGeom prst="rect">
             <a:avLst/>
@@ -15529,7 +15531,7 @@
               <a:buNone/>
             </a:pPr>
             <a:r>
-              <a:rPr lang="en-US" sz="1320" dirty="0">
+              <a:rPr lang="en-US" sz="1220" dirty="0">
                 <a:solidFill>
                   <a:srgbClr val="17364A"/>
                 </a:solidFill>
@@ -15537,9 +15539,9 @@
                 <a:ea typeface="Aptos" pitchFamily="34" charset="-122"/>
                 <a:cs typeface="Aptos" pitchFamily="34" charset="-120"/>
               </a:rPr>
-              <a:t>Use the assignment to test whether you can explain the concept, apply it to a realistic public health situation, and identify what would need review before the work moves forward.</a:t>
-            </a:r>
-            <a:endParaRPr lang="en-US" sz="1320" dirty="0"/>
+              <a:t>Use the assignment to test whether you can explain the concept, apply it to a.</a:t>
+            </a:r>
+            <a:endParaRPr lang="en-US" sz="1220" dirty="0"/>
           </a:p>
         </p:txBody>
       </p:sp>
@@ -15830,8 +15832,8 @@
         </p:nvSpPr>
         <p:spPr>
           <a:xfrm>
-            <a:off x="868680" y="1508760"/>
-            <a:ext cx="6309360" cy="4160520"/>
+            <a:off x="822960" y="1463040"/>
+            <a:ext cx="6565392" cy="4343400"/>
           </a:xfrm>
           <a:prstGeom prst="rect">
             <a:avLst/>
@@ -15849,7 +15851,7 @@
               <a:buNone/>
             </a:pPr>
             <a:r>
-              <a:rPr lang="en-US" sz="2100" dirty="0">
+              <a:rPr lang="en-US" sz="1920" dirty="0">
                 <a:solidFill>
                   <a:srgbClr val="003A63"/>
                 </a:solidFill>
@@ -15857,16 +15859,16 @@
                 <a:ea typeface="Aptos" pitchFamily="34" charset="-122"/>
                 <a:cs typeface="Aptos" pitchFamily="34" charset="-120"/>
               </a:rPr>
-              <a:t>• Model validation is the process of determining whether an AI tool performs adequately for its.</a:t>
-            </a:r>
-            <a:endParaRPr lang="en-US" sz="2100" dirty="0"/>
-          </a:p>
-          <a:p>
-            <a:pPr indent="0" marL="0">
-              <a:buNone/>
-            </a:pPr>
-            <a:r>
-              <a:rPr lang="en-US" sz="2100" dirty="0">
+              <a:t>• Model validation is the process of determining whether an AI tool performs.</a:t>
+            </a:r>
+            <a:endParaRPr lang="en-US" sz="1920" dirty="0"/>
+          </a:p>
+          <a:p>
+            <a:pPr indent="0" marL="0">
+              <a:buNone/>
+            </a:pPr>
+            <a:r>
+              <a:rPr lang="en-US" sz="1920" dirty="0">
                 <a:solidFill>
                   <a:srgbClr val="003A63"/>
                 </a:solidFill>
@@ -15876,14 +15878,14 @@
               </a:rPr>
               <a:t>• Basic validation asks whether the tool works at all.</a:t>
             </a:r>
-            <a:endParaRPr lang="en-US" sz="2100" dirty="0"/>
-          </a:p>
-          <a:p>
-            <a:pPr indent="0" marL="0">
-              <a:buNone/>
-            </a:pPr>
-            <a:r>
-              <a:rPr lang="en-US" sz="2100" dirty="0">
+            <a:endParaRPr lang="en-US" sz="1920" dirty="0"/>
+          </a:p>
+          <a:p>
+            <a:pPr indent="0" marL="0">
+              <a:buNone/>
+            </a:pPr>
+            <a:r>
+              <a:rPr lang="en-US" sz="1920" dirty="0">
                 <a:solidFill>
                   <a:srgbClr val="003A63"/>
                 </a:solidFill>
@@ -15891,9 +15893,9 @@
                 <a:ea typeface="Aptos" pitchFamily="34" charset="-122"/>
                 <a:cs typeface="Aptos" pitchFamily="34" charset="-120"/>
               </a:rPr>
-              <a:t>• Advanced validation asks whether it works well enough, for whom, under what conditions, with.</a:t>
-            </a:r>
-            <a:endParaRPr lang="en-US" sz="2100" dirty="0"/>
+              <a:t>• Advanced validation asks whether it works well enough, for whom, under what.</a:t>
+            </a:r>
+            <a:endParaRPr lang="en-US" sz="1920" dirty="0"/>
           </a:p>
         </p:txBody>
       </p:sp>
@@ -15905,12 +15907,12 @@
         </p:nvSpPr>
         <p:spPr>
           <a:xfrm>
-            <a:off x="7635240" y="1325880"/>
-            <a:ext cx="3474720" cy="1255471"/>
+            <a:off x="7543800" y="1325880"/>
+            <a:ext cx="3611880" cy="1261872"/>
           </a:xfrm>
           <a:prstGeom prst="roundRect">
             <a:avLst>
-              <a:gd name="adj" fmla="val 8740"/>
+              <a:gd name="adj" fmla="val 8696"/>
             </a:avLst>
           </a:prstGeom>
           <a:solidFill>
@@ -15932,8 +15934,8 @@
         </p:nvSpPr>
         <p:spPr>
           <a:xfrm>
-            <a:off x="7799832" y="1472184"/>
-            <a:ext cx="3145536" cy="256032"/>
+            <a:off x="7708392" y="1453896"/>
+            <a:ext cx="3282696" cy="228600"/>
           </a:xfrm>
           <a:prstGeom prst="rect">
             <a:avLst/>
@@ -15949,7 +15951,7 @@
               <a:buNone/>
             </a:pPr>
             <a:r>
-              <a:rPr lang="en-US" sz="1300" b="1" dirty="0">
+              <a:rPr lang="en-US" sz="1220" b="1" dirty="0">
                 <a:solidFill>
                   <a:srgbClr val="0068B7"/>
                 </a:solidFill>
@@ -15959,7 +15961,7 @@
               </a:rPr>
               <a:t>Risk check</a:t>
             </a:r>
-            <a:endParaRPr lang="en-US" sz="1300" dirty="0"/>
+            <a:endParaRPr lang="en-US" sz="1220" dirty="0"/>
           </a:p>
         </p:txBody>
       </p:sp>
@@ -15971,8 +15973,8 @@
         </p:nvSpPr>
         <p:spPr>
           <a:xfrm>
-            <a:off x="7799832" y="1801368"/>
-            <a:ext cx="3145536" cy="688543"/>
+            <a:off x="7708392" y="1764792"/>
+            <a:ext cx="3282696" cy="749808"/>
           </a:xfrm>
           <a:prstGeom prst="rect">
             <a:avLst/>
@@ -15990,7 +15992,7 @@
               <a:buNone/>
             </a:pPr>
             <a:r>
-              <a:rPr lang="en-US" sz="1320" dirty="0">
+              <a:rPr lang="en-US" sz="1220" dirty="0">
                 <a:solidFill>
                   <a:srgbClr val="17364A"/>
                 </a:solidFill>
@@ -15998,9 +16000,9 @@
                 <a:ea typeface="Aptos" pitchFamily="34" charset="-122"/>
                 <a:cs typeface="Aptos" pitchFamily="34" charset="-120"/>
               </a:rPr>
-              <a:t>Model validation is the process of determining whether an AI tool performs adequately for its intended.</a:t>
-            </a:r>
-            <a:endParaRPr lang="en-US" sz="1320" dirty="0"/>
+              <a:t>Model validation is the process of determining whether an AI tool performs.</a:t>
+            </a:r>
+            <a:endParaRPr lang="en-US" sz="1220" dirty="0"/>
           </a:p>
         </p:txBody>
       </p:sp>
@@ -16012,12 +16014,12 @@
         </p:nvSpPr>
         <p:spPr>
           <a:xfrm>
-            <a:off x="7635240" y="2718511"/>
-            <a:ext cx="3474720" cy="1536192"/>
+            <a:off x="7543800" y="2724912"/>
+            <a:ext cx="3611880" cy="1527048"/>
           </a:xfrm>
           <a:prstGeom prst="roundRect">
             <a:avLst>
-              <a:gd name="adj" fmla="val 7143"/>
+              <a:gd name="adj" fmla="val 7186"/>
             </a:avLst>
           </a:prstGeom>
           <a:solidFill>
@@ -16039,24 +16041,26 @@
         </p:nvSpPr>
         <p:spPr>
           <a:xfrm>
-            <a:off x="7799832" y="2846527"/>
-            <a:ext cx="3145536" cy="237744"/>
-          </a:xfrm>
-          <a:prstGeom prst="rect">
-            <a:avLst/>
-          </a:prstGeom>
-          <a:noFill/>
-          <a:ln/>
-        </p:spPr>
-        <p:txBody>
-          <a:bodyPr wrap="square" lIns="0" tIns="0" rIns="0" bIns="0" rtlCol="0" anchor="ctr"/>
-          <a:lstStyle/>
-          <a:p>
-            <a:pPr indent="0" marL="0">
-              <a:buNone/>
-            </a:pPr>
-            <a:r>
-              <a:rPr lang="en-US" sz="1250" b="1" dirty="0">
+            <a:off x="7708392" y="2852928"/>
+            <a:ext cx="3282696" cy="219456"/>
+          </a:xfrm>
+          <a:prstGeom prst="rect">
+            <a:avLst/>
+          </a:prstGeom>
+          <a:noFill/>
+          <a:ln/>
+        </p:spPr>
+        <p:txBody>
+          <a:bodyPr wrap="square" lIns="0" tIns="0" rIns="0" bIns="0" rtlCol="0" anchor="ctr">
+            <a:normAutofit/>
+          </a:bodyPr>
+          <a:lstStyle/>
+          <a:p>
+            <a:pPr indent="0" marL="0">
+              <a:buNone/>
+            </a:pPr>
+            <a:r>
+              <a:rPr lang="en-US" sz="1160" b="1" dirty="0">
                 <a:solidFill>
                   <a:srgbClr val="0068B7"/>
                 </a:solidFill>
@@ -16066,7 +16070,7 @@
               </a:rPr>
               <a:t>Risk control loop</a:t>
             </a:r>
-            <a:endParaRPr lang="en-US" sz="1250" dirty="0"/>
+            <a:endParaRPr lang="en-US" sz="1160" dirty="0"/>
           </a:p>
         </p:txBody>
       </p:sp>
@@ -16078,7 +16082,7 @@
         </p:nvSpPr>
         <p:spPr>
           <a:xfrm>
-            <a:off x="8763000" y="3399739"/>
+            <a:off x="8717280" y="3406140"/>
             <a:ext cx="164592" cy="0"/>
           </a:xfrm>
           <a:prstGeom prst="line">
@@ -16101,8 +16105,8 @@
         </p:nvSpPr>
         <p:spPr>
           <a:xfrm>
-            <a:off x="7872984" y="3248863"/>
-            <a:ext cx="890016" cy="301752"/>
+            <a:off x="7781544" y="3255264"/>
+            <a:ext cx="935736" cy="301752"/>
           </a:xfrm>
           <a:prstGeom prst="roundRect">
             <a:avLst>
@@ -16128,8 +16132,8 @@
         </p:nvSpPr>
         <p:spPr>
           <a:xfrm>
-            <a:off x="7909560" y="3322015"/>
-            <a:ext cx="816864" cy="146304"/>
+            <a:off x="7818120" y="3328416"/>
+            <a:ext cx="862584" cy="146304"/>
           </a:xfrm>
           <a:prstGeom prst="rect">
             <a:avLst/>
@@ -16169,7 +16173,7 @@
         </p:nvSpPr>
         <p:spPr>
           <a:xfrm>
-            <a:off x="9817608" y="3399739"/>
+            <a:off x="9817608" y="3406140"/>
             <a:ext cx="164592" cy="0"/>
           </a:xfrm>
           <a:prstGeom prst="line">
@@ -16192,8 +16196,8 @@
         </p:nvSpPr>
         <p:spPr>
           <a:xfrm>
-            <a:off x="8927592" y="3248863"/>
-            <a:ext cx="890016" cy="301752"/>
+            <a:off x="8881872" y="3255264"/>
+            <a:ext cx="935736" cy="301752"/>
           </a:xfrm>
           <a:prstGeom prst="roundRect">
             <a:avLst>
@@ -16219,8 +16223,8 @@
         </p:nvSpPr>
         <p:spPr>
           <a:xfrm>
-            <a:off x="8964168" y="3322015"/>
-            <a:ext cx="816864" cy="146304"/>
+            <a:off x="8918448" y="3328416"/>
+            <a:ext cx="862584" cy="146304"/>
           </a:xfrm>
           <a:prstGeom prst="rect">
             <a:avLst/>
@@ -16260,8 +16264,8 @@
         </p:nvSpPr>
         <p:spPr>
           <a:xfrm>
-            <a:off x="9982200" y="3248863"/>
-            <a:ext cx="890016" cy="301752"/>
+            <a:off x="9982200" y="3255264"/>
+            <a:ext cx="935736" cy="301752"/>
           </a:xfrm>
           <a:prstGeom prst="roundRect">
             <a:avLst>
@@ -16287,8 +16291,8 @@
         </p:nvSpPr>
         <p:spPr>
           <a:xfrm>
-            <a:off x="10018776" y="3322015"/>
-            <a:ext cx="816864" cy="146304"/>
+            <a:off x="10018776" y="3328416"/>
+            <a:ext cx="862584" cy="146304"/>
           </a:xfrm>
           <a:prstGeom prst="rect">
             <a:avLst/>
@@ -16328,8 +16332,8 @@
         </p:nvSpPr>
         <p:spPr>
           <a:xfrm>
-            <a:off x="7854696" y="3742639"/>
-            <a:ext cx="3035808" cy="365760"/>
+            <a:off x="7763256" y="3749040"/>
+            <a:ext cx="3172968" cy="356616"/>
           </a:xfrm>
           <a:prstGeom prst="rect">
             <a:avLst/>
@@ -16347,7 +16351,7 @@
               <a:buNone/>
             </a:pPr>
             <a:r>
-              <a:rPr lang="en-US" sz="1120" dirty="0">
+              <a:rPr lang="en-US" sz="1040" dirty="0">
                 <a:solidFill>
                   <a:srgbClr val="17364A"/>
                 </a:solidFill>
@@ -16355,9 +16359,9 @@
                 <a:ea typeface="Aptos" pitchFamily="34" charset="-122"/>
                 <a:cs typeface="Aptos" pitchFamily="34" charset="-120"/>
               </a:rPr>
-              <a:t>Responsible use depends on finding risks early, applying safeguards, and watching for drift or harm over time.</a:t>
-            </a:r>
-            <a:endParaRPr lang="en-US" sz="1120" dirty="0"/>
+              <a:t>Responsible use depends on finding risks early, applying safeguards,.</a:t>
+            </a:r>
+            <a:endParaRPr lang="en-US" sz="1040" dirty="0"/>
           </a:p>
         </p:txBody>
       </p:sp>
@@ -16369,12 +16373,12 @@
         </p:nvSpPr>
         <p:spPr>
           <a:xfrm>
-            <a:off x="7635240" y="4391863"/>
-            <a:ext cx="3474720" cy="1255471"/>
+            <a:off x="7543800" y="4389120"/>
+            <a:ext cx="3611880" cy="1261872"/>
           </a:xfrm>
           <a:prstGeom prst="roundRect">
             <a:avLst>
-              <a:gd name="adj" fmla="val 8740"/>
+              <a:gd name="adj" fmla="val 8696"/>
             </a:avLst>
           </a:prstGeom>
           <a:solidFill>
@@ -16396,8 +16400,8 @@
         </p:nvSpPr>
         <p:spPr>
           <a:xfrm>
-            <a:off x="7799832" y="4538167"/>
-            <a:ext cx="3145536" cy="256032"/>
+            <a:off x="7708392" y="4517136"/>
+            <a:ext cx="3282696" cy="228600"/>
           </a:xfrm>
           <a:prstGeom prst="rect">
             <a:avLst/>
@@ -16413,7 +16417,7 @@
               <a:buNone/>
             </a:pPr>
             <a:r>
-              <a:rPr lang="en-US" sz="1300" b="1" dirty="0">
+              <a:rPr lang="en-US" sz="1220" b="1" dirty="0">
                 <a:solidFill>
                   <a:srgbClr val="0068B7"/>
                 </a:solidFill>
@@ -16423,7 +16427,7 @@
               </a:rPr>
               <a:t>Safeguard to plan</a:t>
             </a:r>
-            <a:endParaRPr lang="en-US" sz="1300" dirty="0"/>
+            <a:endParaRPr lang="en-US" sz="1220" dirty="0"/>
           </a:p>
         </p:txBody>
       </p:sp>
@@ -16435,8 +16439,8 @@
         </p:nvSpPr>
         <p:spPr>
           <a:xfrm>
-            <a:off x="7799832" y="4867351"/>
-            <a:ext cx="3145536" cy="688543"/>
+            <a:off x="7708392" y="4828032"/>
+            <a:ext cx="3282696" cy="749808"/>
           </a:xfrm>
           <a:prstGeom prst="rect">
             <a:avLst/>
@@ -16454,7 +16458,7 @@
               <a:buNone/>
             </a:pPr>
             <a:r>
-              <a:rPr lang="en-US" sz="1320" dirty="0">
+              <a:rPr lang="en-US" sz="1220" dirty="0">
                 <a:solidFill>
                   <a:srgbClr val="17364A"/>
                 </a:solidFill>
@@ -16462,9 +16466,9 @@
                 <a:ea typeface="Aptos" pitchFamily="34" charset="-122"/>
                 <a:cs typeface="Aptos" pitchFamily="34" charset="-120"/>
               </a:rPr>
-              <a:t>Identify what could go wrong, who could be affected, what safeguards are needed, and what evidence should be reviewed before use.</a:t>
-            </a:r>
-            <a:endParaRPr lang="en-US" sz="1320" dirty="0"/>
+              <a:t>Identify what could go wrong, who could be affected, what safeguards are needed,.</a:t>
+            </a:r>
+            <a:endParaRPr lang="en-US" sz="1220" dirty="0"/>
           </a:p>
         </p:txBody>
       </p:sp>
@@ -16755,8 +16759,8 @@
         </p:nvSpPr>
         <p:spPr>
           <a:xfrm>
-            <a:off x="868680" y="1508760"/>
-            <a:ext cx="6309360" cy="4160520"/>
+            <a:off x="822960" y="1463040"/>
+            <a:ext cx="6565392" cy="4343400"/>
           </a:xfrm>
           <a:prstGeom prst="rect">
             <a:avLst/>
@@ -16774,7 +16778,7 @@
               <a:buNone/>
             </a:pPr>
             <a:r>
-              <a:rPr lang="en-US" sz="2100" dirty="0">
+              <a:rPr lang="en-US" sz="1920" dirty="0">
                 <a:solidFill>
                   <a:srgbClr val="003A63"/>
                 </a:solidFill>
@@ -16782,16 +16786,16 @@
                 <a:ea typeface="Aptos" pitchFamily="34" charset="-122"/>
                 <a:cs typeface="Aptos" pitchFamily="34" charset="-120"/>
               </a:rPr>
-              <a:t>• Validation matters because public health AI tools can appear credible even when they are not.</a:t>
-            </a:r>
-            <a:endParaRPr lang="en-US" sz="2100" dirty="0"/>
-          </a:p>
-          <a:p>
-            <a:pPr indent="0" marL="0">
-              <a:buNone/>
-            </a:pPr>
-            <a:r>
-              <a:rPr lang="en-US" sz="2100" dirty="0">
+              <a:t>• Validation matters because public health AI tools can appear credible even.</a:t>
+            </a:r>
+            <a:endParaRPr lang="en-US" sz="1920" dirty="0"/>
+          </a:p>
+          <a:p>
+            <a:pPr indent="0" marL="0">
+              <a:buNone/>
+            </a:pPr>
+            <a:r>
+              <a:rPr lang="en-US" sz="1920" dirty="0">
                 <a:solidFill>
                   <a:srgbClr val="003A63"/>
                 </a:solidFill>
@@ -16799,16 +16803,16 @@
                 <a:ea typeface="Aptos" pitchFamily="34" charset="-122"/>
                 <a:cs typeface="Aptos" pitchFamily="34" charset="-120"/>
               </a:rPr>
-              <a:t>• A polished dashboard, confident generated text, or high overall accuracy score does not prove.</a:t>
-            </a:r>
-            <a:endParaRPr lang="en-US" sz="2100" dirty="0"/>
-          </a:p>
-          <a:p>
-            <a:pPr indent="0" marL="0">
-              <a:buNone/>
-            </a:pPr>
-            <a:r>
-              <a:rPr lang="en-US" sz="2100" dirty="0">
+              <a:t>• A polished dashboard, confident generated text, or high overall accuracy.</a:t>
+            </a:r>
+            <a:endParaRPr lang="en-US" sz="1920" dirty="0"/>
+          </a:p>
+          <a:p>
+            <a:pPr indent="0" marL="0">
+              <a:buNone/>
+            </a:pPr>
+            <a:r>
+              <a:rPr lang="en-US" sz="1920" dirty="0">
                 <a:solidFill>
                   <a:srgbClr val="003A63"/>
                 </a:solidFill>
@@ -16816,9 +16820,9 @@
                 <a:ea typeface="Aptos" pitchFamily="34" charset="-122"/>
                 <a:cs typeface="Aptos" pitchFamily="34" charset="-120"/>
               </a:rPr>
-              <a:t>• Public health staff need to evaluate performance in relation to the specific task and the.</a:t>
-            </a:r>
-            <a:endParaRPr lang="en-US" sz="2100" dirty="0"/>
+              <a:t>• Public health staff need to evaluate performance in relation to the specific.</a:t>
+            </a:r>
+            <a:endParaRPr lang="en-US" sz="1920" dirty="0"/>
           </a:p>
         </p:txBody>
       </p:sp>
@@ -16830,12 +16834,12 @@
         </p:nvSpPr>
         <p:spPr>
           <a:xfrm>
-            <a:off x="7635240" y="1325880"/>
-            <a:ext cx="3474720" cy="1255471"/>
+            <a:off x="7543800" y="1325880"/>
+            <a:ext cx="3611880" cy="1261872"/>
           </a:xfrm>
           <a:prstGeom prst="roundRect">
             <a:avLst>
-              <a:gd name="adj" fmla="val 8740"/>
+              <a:gd name="adj" fmla="val 8696"/>
             </a:avLst>
           </a:prstGeom>
           <a:solidFill>
@@ -16857,8 +16861,8 @@
         </p:nvSpPr>
         <p:spPr>
           <a:xfrm>
-            <a:off x="7799832" y="1472184"/>
-            <a:ext cx="3145536" cy="256032"/>
+            <a:off x="7708392" y="1453896"/>
+            <a:ext cx="3282696" cy="228600"/>
           </a:xfrm>
           <a:prstGeom prst="rect">
             <a:avLst/>
@@ -16874,7 +16878,7 @@
               <a:buNone/>
             </a:pPr>
             <a:r>
-              <a:rPr lang="en-US" sz="1300" b="1" dirty="0">
+              <a:rPr lang="en-US" sz="1220" b="1" dirty="0">
                 <a:solidFill>
                   <a:srgbClr val="0068B7"/>
                 </a:solidFill>
@@ -16884,7 +16888,7 @@
               </a:rPr>
               <a:t>Risk check</a:t>
             </a:r>
-            <a:endParaRPr lang="en-US" sz="1300" dirty="0"/>
+            <a:endParaRPr lang="en-US" sz="1220" dirty="0"/>
           </a:p>
         </p:txBody>
       </p:sp>
@@ -16896,8 +16900,8 @@
         </p:nvSpPr>
         <p:spPr>
           <a:xfrm>
-            <a:off x="7799832" y="1801368"/>
-            <a:ext cx="3145536" cy="688543"/>
+            <a:off x="7708392" y="1764792"/>
+            <a:ext cx="3282696" cy="749808"/>
           </a:xfrm>
           <a:prstGeom prst="rect">
             <a:avLst/>
@@ -16915,7 +16919,7 @@
               <a:buNone/>
             </a:pPr>
             <a:r>
-              <a:rPr lang="en-US" sz="1320" dirty="0">
+              <a:rPr lang="en-US" sz="1220" dirty="0">
                 <a:solidFill>
                   <a:srgbClr val="17364A"/>
                 </a:solidFill>
@@ -16923,9 +16927,9 @@
                 <a:ea typeface="Aptos" pitchFamily="34" charset="-122"/>
                 <a:cs typeface="Aptos" pitchFamily="34" charset="-120"/>
               </a:rPr>
-              <a:t>Validation matters because public health AI tools can appear credible even when they are not fit for.</a:t>
-            </a:r>
-            <a:endParaRPr lang="en-US" sz="1320" dirty="0"/>
+              <a:t>Validation matters because public health AI tools can appear credible even when.</a:t>
+            </a:r>
+            <a:endParaRPr lang="en-US" sz="1220" dirty="0"/>
           </a:p>
         </p:txBody>
       </p:sp>
@@ -16937,12 +16941,12 @@
         </p:nvSpPr>
         <p:spPr>
           <a:xfrm>
-            <a:off x="7635240" y="2718511"/>
-            <a:ext cx="3474720" cy="1536192"/>
+            <a:off x="7543800" y="2724912"/>
+            <a:ext cx="3611880" cy="1527048"/>
           </a:xfrm>
           <a:prstGeom prst="roundRect">
             <a:avLst>
-              <a:gd name="adj" fmla="val 7143"/>
+              <a:gd name="adj" fmla="val 7186"/>
             </a:avLst>
           </a:prstGeom>
           <a:solidFill>
@@ -16964,24 +16968,26 @@
         </p:nvSpPr>
         <p:spPr>
           <a:xfrm>
-            <a:off x="7799832" y="2846527"/>
-            <a:ext cx="3145536" cy="237744"/>
-          </a:xfrm>
-          <a:prstGeom prst="rect">
-            <a:avLst/>
-          </a:prstGeom>
-          <a:noFill/>
-          <a:ln/>
-        </p:spPr>
-        <p:txBody>
-          <a:bodyPr wrap="square" lIns="0" tIns="0" rIns="0" bIns="0" rtlCol="0" anchor="ctr"/>
-          <a:lstStyle/>
-          <a:p>
-            <a:pPr indent="0" marL="0">
-              <a:buNone/>
-            </a:pPr>
-            <a:r>
-              <a:rPr lang="en-US" sz="1250" b="1" dirty="0">
+            <a:off x="7708392" y="2852928"/>
+            <a:ext cx="3282696" cy="219456"/>
+          </a:xfrm>
+          <a:prstGeom prst="rect">
+            <a:avLst/>
+          </a:prstGeom>
+          <a:noFill/>
+          <a:ln/>
+        </p:spPr>
+        <p:txBody>
+          <a:bodyPr wrap="square" lIns="0" tIns="0" rIns="0" bIns="0" rtlCol="0" anchor="ctr">
+            <a:normAutofit/>
+          </a:bodyPr>
+          <a:lstStyle/>
+          <a:p>
+            <a:pPr indent="0" marL="0">
+              <a:buNone/>
+            </a:pPr>
+            <a:r>
+              <a:rPr lang="en-US" sz="1160" b="1" dirty="0">
                 <a:solidFill>
                   <a:srgbClr val="0068B7"/>
                 </a:solidFill>
@@ -16991,7 +16997,7 @@
               </a:rPr>
               <a:t>Risk control loop</a:t>
             </a:r>
-            <a:endParaRPr lang="en-US" sz="1250" dirty="0"/>
+            <a:endParaRPr lang="en-US" sz="1160" dirty="0"/>
           </a:p>
         </p:txBody>
       </p:sp>
@@ -17003,7 +17009,7 @@
         </p:nvSpPr>
         <p:spPr>
           <a:xfrm>
-            <a:off x="8763000" y="3399739"/>
+            <a:off x="8717280" y="3406140"/>
             <a:ext cx="164592" cy="0"/>
           </a:xfrm>
           <a:prstGeom prst="line">
@@ -17026,8 +17032,8 @@
         </p:nvSpPr>
         <p:spPr>
           <a:xfrm>
-            <a:off x="7872984" y="3248863"/>
-            <a:ext cx="890016" cy="301752"/>
+            <a:off x="7781544" y="3255264"/>
+            <a:ext cx="935736" cy="301752"/>
           </a:xfrm>
           <a:prstGeom prst="roundRect">
             <a:avLst>
@@ -17053,8 +17059,8 @@
         </p:nvSpPr>
         <p:spPr>
           <a:xfrm>
-            <a:off x="7909560" y="3322015"/>
-            <a:ext cx="816864" cy="146304"/>
+            <a:off x="7818120" y="3328416"/>
+            <a:ext cx="862584" cy="146304"/>
           </a:xfrm>
           <a:prstGeom prst="rect">
             <a:avLst/>
@@ -17094,7 +17100,7 @@
         </p:nvSpPr>
         <p:spPr>
           <a:xfrm>
-            <a:off x="9817608" y="3399739"/>
+            <a:off x="9817608" y="3406140"/>
             <a:ext cx="164592" cy="0"/>
           </a:xfrm>
           <a:prstGeom prst="line">
@@ -17117,8 +17123,8 @@
         </p:nvSpPr>
         <p:spPr>
           <a:xfrm>
-            <a:off x="8927592" y="3248863"/>
-            <a:ext cx="890016" cy="301752"/>
+            <a:off x="8881872" y="3255264"/>
+            <a:ext cx="935736" cy="301752"/>
           </a:xfrm>
           <a:prstGeom prst="roundRect">
             <a:avLst>
@@ -17144,8 +17150,8 @@
         </p:nvSpPr>
         <p:spPr>
           <a:xfrm>
-            <a:off x="8964168" y="3322015"/>
-            <a:ext cx="816864" cy="146304"/>
+            <a:off x="8918448" y="3328416"/>
+            <a:ext cx="862584" cy="146304"/>
           </a:xfrm>
           <a:prstGeom prst="rect">
             <a:avLst/>
@@ -17185,8 +17191,8 @@
         </p:nvSpPr>
         <p:spPr>
           <a:xfrm>
-            <a:off x="9982200" y="3248863"/>
-            <a:ext cx="890016" cy="301752"/>
+            <a:off x="9982200" y="3255264"/>
+            <a:ext cx="935736" cy="301752"/>
           </a:xfrm>
           <a:prstGeom prst="roundRect">
             <a:avLst>
@@ -17212,8 +17218,8 @@
         </p:nvSpPr>
         <p:spPr>
           <a:xfrm>
-            <a:off x="10018776" y="3322015"/>
-            <a:ext cx="816864" cy="146304"/>
+            <a:off x="10018776" y="3328416"/>
+            <a:ext cx="862584" cy="146304"/>
           </a:xfrm>
           <a:prstGeom prst="rect">
             <a:avLst/>
@@ -17253,8 +17259,8 @@
         </p:nvSpPr>
         <p:spPr>
           <a:xfrm>
-            <a:off x="7854696" y="3742639"/>
-            <a:ext cx="3035808" cy="365760"/>
+            <a:off x="7763256" y="3749040"/>
+            <a:ext cx="3172968" cy="356616"/>
           </a:xfrm>
           <a:prstGeom prst="rect">
             <a:avLst/>
@@ -17272,7 +17278,7 @@
               <a:buNone/>
             </a:pPr>
             <a:r>
-              <a:rPr lang="en-US" sz="1120" dirty="0">
+              <a:rPr lang="en-US" sz="1040" dirty="0">
                 <a:solidFill>
                   <a:srgbClr val="17364A"/>
                 </a:solidFill>
@@ -17280,9 +17286,9 @@
                 <a:ea typeface="Aptos" pitchFamily="34" charset="-122"/>
                 <a:cs typeface="Aptos" pitchFamily="34" charset="-120"/>
               </a:rPr>
-              <a:t>Responsible use depends on finding risks early, applying safeguards, and watching for drift or harm over time.</a:t>
-            </a:r>
-            <a:endParaRPr lang="en-US" sz="1120" dirty="0"/>
+              <a:t>Responsible use depends on finding risks early, applying safeguards,.</a:t>
+            </a:r>
+            <a:endParaRPr lang="en-US" sz="1040" dirty="0"/>
           </a:p>
         </p:txBody>
       </p:sp>
@@ -17294,12 +17300,12 @@
         </p:nvSpPr>
         <p:spPr>
           <a:xfrm>
-            <a:off x="7635240" y="4391863"/>
-            <a:ext cx="3474720" cy="1255471"/>
+            <a:off x="7543800" y="4389120"/>
+            <a:ext cx="3611880" cy="1261872"/>
           </a:xfrm>
           <a:prstGeom prst="roundRect">
             <a:avLst>
-              <a:gd name="adj" fmla="val 8740"/>
+              <a:gd name="adj" fmla="val 8696"/>
             </a:avLst>
           </a:prstGeom>
           <a:solidFill>
@@ -17321,8 +17327,8 @@
         </p:nvSpPr>
         <p:spPr>
           <a:xfrm>
-            <a:off x="7799832" y="4538167"/>
-            <a:ext cx="3145536" cy="256032"/>
+            <a:off x="7708392" y="4517136"/>
+            <a:ext cx="3282696" cy="228600"/>
           </a:xfrm>
           <a:prstGeom prst="rect">
             <a:avLst/>
@@ -17338,7 +17344,7 @@
               <a:buNone/>
             </a:pPr>
             <a:r>
-              <a:rPr lang="en-US" sz="1300" b="1" dirty="0">
+              <a:rPr lang="en-US" sz="1220" b="1" dirty="0">
                 <a:solidFill>
                   <a:srgbClr val="0068B7"/>
                 </a:solidFill>
@@ -17348,7 +17354,7 @@
               </a:rPr>
               <a:t>Safeguard to plan</a:t>
             </a:r>
-            <a:endParaRPr lang="en-US" sz="1300" dirty="0"/>
+            <a:endParaRPr lang="en-US" sz="1220" dirty="0"/>
           </a:p>
         </p:txBody>
       </p:sp>
@@ -17360,8 +17366,8 @@
         </p:nvSpPr>
         <p:spPr>
           <a:xfrm>
-            <a:off x="7799832" y="4867351"/>
-            <a:ext cx="3145536" cy="688543"/>
+            <a:off x="7708392" y="4828032"/>
+            <a:ext cx="3282696" cy="749808"/>
           </a:xfrm>
           <a:prstGeom prst="rect">
             <a:avLst/>
@@ -17379,7 +17385,7 @@
               <a:buNone/>
             </a:pPr>
             <a:r>
-              <a:rPr lang="en-US" sz="1320" dirty="0">
+              <a:rPr lang="en-US" sz="1220" dirty="0">
                 <a:solidFill>
                   <a:srgbClr val="17364A"/>
                 </a:solidFill>
@@ -17387,9 +17393,9 @@
                 <a:ea typeface="Aptos" pitchFamily="34" charset="-122"/>
                 <a:cs typeface="Aptos" pitchFamily="34" charset="-120"/>
               </a:rPr>
-              <a:t>Identify what could go wrong, who could be affected, what safeguards are needed, and what evidence should be reviewed before use.</a:t>
-            </a:r>
-            <a:endParaRPr lang="en-US" sz="1320" dirty="0"/>
+              <a:t>Identify what could go wrong, who could be affected, what safeguards are needed,.</a:t>
+            </a:r>
+            <a:endParaRPr lang="en-US" sz="1220" dirty="0"/>
           </a:p>
         </p:txBody>
       </p:sp>
@@ -17680,8 +17686,8 @@
         </p:nvSpPr>
         <p:spPr>
           <a:xfrm>
-            <a:off x="868680" y="1508760"/>
-            <a:ext cx="6309360" cy="4160520"/>
+            <a:off x="822960" y="1463040"/>
+            <a:ext cx="6565392" cy="4343400"/>
           </a:xfrm>
           <a:prstGeom prst="rect">
             <a:avLst/>
@@ -17699,7 +17705,7 @@
               <a:buNone/>
             </a:pPr>
             <a:r>
-              <a:rPr lang="en-US" sz="2100" dirty="0">
+              <a:rPr lang="en-US" sz="1920" dirty="0">
                 <a:solidFill>
                   <a:srgbClr val="003A63"/>
                 </a:solidFill>
@@ -17707,16 +17713,16 @@
                 <a:ea typeface="Aptos" pitchFamily="34" charset="-122"/>
                 <a:cs typeface="Aptos" pitchFamily="34" charset="-120"/>
               </a:rPr>
-              <a:t>• A public health agency may test a model that identifies incoming case reports likely to require.</a:t>
-            </a:r>
-            <a:endParaRPr lang="en-US" sz="2100" dirty="0"/>
-          </a:p>
-          <a:p>
-            <a:pPr indent="0" marL="0">
-              <a:buNone/>
-            </a:pPr>
-            <a:r>
-              <a:rPr lang="en-US" sz="2100" dirty="0">
+              <a:t>• A public health agency may test a model that identifies incoming case.</a:t>
+            </a:r>
+            <a:endParaRPr lang="en-US" sz="1920" dirty="0"/>
+          </a:p>
+          <a:p>
+            <a:pPr indent="0" marL="0">
+              <a:buNone/>
+            </a:pPr>
+            <a:r>
+              <a:rPr lang="en-US" sz="1920" dirty="0">
                 <a:solidFill>
                   <a:srgbClr val="003A63"/>
                 </a:solidFill>
@@ -17726,14 +17732,14 @@
               </a:rPr>
               <a:t>• Overall accuracy may be high, but that number alone is not enough.</a:t>
             </a:r>
-            <a:endParaRPr lang="en-US" sz="2100" dirty="0"/>
-          </a:p>
-          <a:p>
-            <a:pPr indent="0" marL="0">
-              <a:buNone/>
-            </a:pPr>
-            <a:r>
-              <a:rPr lang="en-US" sz="2100" dirty="0">
+            <a:endParaRPr lang="en-US" sz="1920" dirty="0"/>
+          </a:p>
+          <a:p>
+            <a:pPr indent="0" marL="0">
+              <a:buNone/>
+            </a:pPr>
+            <a:r>
+              <a:rPr lang="en-US" sz="1920" dirty="0">
                 <a:solidFill>
                   <a:srgbClr val="003A63"/>
                 </a:solidFill>
@@ -17741,9 +17747,9 @@
                 <a:ea typeface="Aptos" pitchFamily="34" charset="-122"/>
                 <a:cs typeface="Aptos" pitchFamily="34" charset="-120"/>
               </a:rPr>
-              <a:t>• Staff need to know whether the model misses rare but severe conditions, whether it performs.</a:t>
-            </a:r>
-            <a:endParaRPr lang="en-US" sz="2100" dirty="0"/>
+              <a:t>• Staff need to know whether the model misses rare but severe conditions,.</a:t>
+            </a:r>
+            <a:endParaRPr lang="en-US" sz="1920" dirty="0"/>
           </a:p>
         </p:txBody>
       </p:sp>
@@ -17755,12 +17761,12 @@
         </p:nvSpPr>
         <p:spPr>
           <a:xfrm>
-            <a:off x="7635240" y="1325880"/>
-            <a:ext cx="3474720" cy="1255471"/>
+            <a:off x="7543800" y="1325880"/>
+            <a:ext cx="3611880" cy="1261872"/>
           </a:xfrm>
           <a:prstGeom prst="roundRect">
             <a:avLst>
-              <a:gd name="adj" fmla="val 8740"/>
+              <a:gd name="adj" fmla="val 8696"/>
             </a:avLst>
           </a:prstGeom>
           <a:solidFill>
@@ -17782,8 +17788,8 @@
         </p:nvSpPr>
         <p:spPr>
           <a:xfrm>
-            <a:off x="7799832" y="1472184"/>
-            <a:ext cx="3145536" cy="256032"/>
+            <a:off x="7708392" y="1453896"/>
+            <a:ext cx="3282696" cy="228600"/>
           </a:xfrm>
           <a:prstGeom prst="rect">
             <a:avLst/>
@@ -17799,7 +17805,7 @@
               <a:buNone/>
             </a:pPr>
             <a:r>
-              <a:rPr lang="en-US" sz="1300" b="1" dirty="0">
+              <a:rPr lang="en-US" sz="1220" b="1" dirty="0">
                 <a:solidFill>
                   <a:srgbClr val="0068B7"/>
                 </a:solidFill>
@@ -17809,7 +17815,7 @@
               </a:rPr>
               <a:t>Risk check</a:t>
             </a:r>
-            <a:endParaRPr lang="en-US" sz="1300" dirty="0"/>
+            <a:endParaRPr lang="en-US" sz="1220" dirty="0"/>
           </a:p>
         </p:txBody>
       </p:sp>
@@ -17821,8 +17827,8 @@
         </p:nvSpPr>
         <p:spPr>
           <a:xfrm>
-            <a:off x="7799832" y="1801368"/>
-            <a:ext cx="3145536" cy="688543"/>
+            <a:off x="7708392" y="1764792"/>
+            <a:ext cx="3282696" cy="749808"/>
           </a:xfrm>
           <a:prstGeom prst="rect">
             <a:avLst/>
@@ -17840,7 +17846,7 @@
               <a:buNone/>
             </a:pPr>
             <a:r>
-              <a:rPr lang="en-US" sz="1320" dirty="0">
+              <a:rPr lang="en-US" sz="1220" dirty="0">
                 <a:solidFill>
                   <a:srgbClr val="17364A"/>
                 </a:solidFill>
@@ -17848,9 +17854,9 @@
                 <a:ea typeface="Aptos" pitchFamily="34" charset="-122"/>
                 <a:cs typeface="Aptos" pitchFamily="34" charset="-120"/>
               </a:rPr>
-              <a:t>A public health agency may test a model that identifies incoming case reports likely to require.</a:t>
-            </a:r>
-            <a:endParaRPr lang="en-US" sz="1320" dirty="0"/>
+              <a:t>A public health agency may test a model that identifies incoming case reports.</a:t>
+            </a:r>
+            <a:endParaRPr lang="en-US" sz="1220" dirty="0"/>
           </a:p>
         </p:txBody>
       </p:sp>
@@ -17862,12 +17868,12 @@
         </p:nvSpPr>
         <p:spPr>
           <a:xfrm>
-            <a:off x="7635240" y="2718511"/>
-            <a:ext cx="3474720" cy="1536192"/>
+            <a:off x="7543800" y="2724912"/>
+            <a:ext cx="3611880" cy="1527048"/>
           </a:xfrm>
           <a:prstGeom prst="roundRect">
             <a:avLst>
-              <a:gd name="adj" fmla="val 7143"/>
+              <a:gd name="adj" fmla="val 7186"/>
             </a:avLst>
           </a:prstGeom>
           <a:solidFill>
@@ -17889,8 +17895,8 @@
         </p:nvSpPr>
         <p:spPr>
           <a:xfrm>
-            <a:off x="7799832" y="2864815"/>
-            <a:ext cx="3145536" cy="256032"/>
+            <a:off x="7708392" y="2852928"/>
+            <a:ext cx="3282696" cy="228600"/>
           </a:xfrm>
           <a:prstGeom prst="rect">
             <a:avLst/>
@@ -17906,7 +17912,7 @@
               <a:buNone/>
             </a:pPr>
             <a:r>
-              <a:rPr lang="en-US" sz="1300" b="1" dirty="0">
+              <a:rPr lang="en-US" sz="1220" b="1" dirty="0">
                 <a:solidFill>
                   <a:srgbClr val="0068B7"/>
                 </a:solidFill>
@@ -17916,7 +17922,7 @@
               </a:rPr>
               <a:t>Concept checkpoints</a:t>
             </a:r>
-            <a:endParaRPr lang="en-US" sz="1300" dirty="0"/>
+            <a:endParaRPr lang="en-US" sz="1220" dirty="0"/>
           </a:p>
         </p:txBody>
       </p:sp>
@@ -17928,8 +17934,8 @@
         </p:nvSpPr>
         <p:spPr>
           <a:xfrm>
-            <a:off x="7818120" y="3230575"/>
-            <a:ext cx="3090672" cy="877824"/>
+            <a:off x="7726680" y="3182112"/>
+            <a:ext cx="3227832" cy="960120"/>
           </a:xfrm>
           <a:prstGeom prst="rect">
             <a:avLst/>
@@ -17947,7 +17953,7 @@
               <a:buNone/>
             </a:pPr>
             <a:r>
-              <a:rPr lang="en-US" sz="1220" dirty="0">
+              <a:rPr lang="en-US" sz="1140" dirty="0">
                 <a:solidFill>
                   <a:srgbClr val="17364A"/>
                 </a:solidFill>
@@ -17955,16 +17961,16 @@
                 <a:ea typeface="Aptos" pitchFamily="34" charset="-122"/>
                 <a:cs typeface="Aptos" pitchFamily="34" charset="-120"/>
               </a:rPr>
-              <a:t>A public health agency may test a model that identifies incoming.</a:t>
-            </a:r>
-            <a:endParaRPr lang="en-US" sz="1220" dirty="0"/>
-          </a:p>
-          <a:p>
-            <a:pPr indent="0" marL="0">
-              <a:buNone/>
-            </a:pPr>
-            <a:r>
-              <a:rPr lang="en-US" sz="1220" dirty="0">
+              <a:t>A public health agency may test a model that.</a:t>
+            </a:r>
+            <a:endParaRPr lang="en-US" sz="1140" dirty="0"/>
+          </a:p>
+          <a:p>
+            <a:pPr indent="0" marL="0">
+              <a:buNone/>
+            </a:pPr>
+            <a:r>
+              <a:rPr lang="en-US" sz="1140" dirty="0">
                 <a:solidFill>
                   <a:srgbClr val="17364A"/>
                 </a:solidFill>
@@ -17972,16 +17978,16 @@
                 <a:ea typeface="Aptos" pitchFamily="34" charset="-122"/>
                 <a:cs typeface="Aptos" pitchFamily="34" charset="-120"/>
               </a:rPr>
-              <a:t>Staff need to know whether the model misses rare but severe.</a:t>
-            </a:r>
-            <a:endParaRPr lang="en-US" sz="1220" dirty="0"/>
-          </a:p>
-          <a:p>
-            <a:pPr indent="0" marL="0">
-              <a:buNone/>
-            </a:pPr>
-            <a:r>
-              <a:rPr lang="en-US" sz="1220" dirty="0">
+              <a:t>Staff need to know whether the model misses rare.</a:t>
+            </a:r>
+            <a:endParaRPr lang="en-US" sz="1140" dirty="0"/>
+          </a:p>
+          <a:p>
+            <a:pPr indent="0" marL="0">
+              <a:buNone/>
+            </a:pPr>
+            <a:r>
+              <a:rPr lang="en-US" sz="1140" dirty="0">
                 <a:solidFill>
                   <a:srgbClr val="17364A"/>
                 </a:solidFill>
@@ -17989,9 +17995,9 @@
                 <a:ea typeface="Aptos" pitchFamily="34" charset="-122"/>
                 <a:cs typeface="Aptos" pitchFamily="34" charset="-120"/>
               </a:rPr>
-              <a:t>The agency should validate the model on recent local data, review.</a:t>
-            </a:r>
-            <a:endParaRPr lang="en-US" sz="1220" dirty="0"/>
+              <a:t>The agency should validate the model on recent.</a:t>
+            </a:r>
+            <a:endParaRPr lang="en-US" sz="1140" dirty="0"/>
           </a:p>
         </p:txBody>
       </p:sp>
@@ -18003,12 +18009,12 @@
         </p:nvSpPr>
         <p:spPr>
           <a:xfrm>
-            <a:off x="7635240" y="4391863"/>
-            <a:ext cx="3474720" cy="1255471"/>
+            <a:off x="7543800" y="4389120"/>
+            <a:ext cx="3611880" cy="1261872"/>
           </a:xfrm>
           <a:prstGeom prst="roundRect">
             <a:avLst>
-              <a:gd name="adj" fmla="val 8740"/>
+              <a:gd name="adj" fmla="val 8696"/>
             </a:avLst>
           </a:prstGeom>
           <a:solidFill>
@@ -18030,8 +18036,8 @@
         </p:nvSpPr>
         <p:spPr>
           <a:xfrm>
-            <a:off x="7799832" y="4538167"/>
-            <a:ext cx="3145536" cy="256032"/>
+            <a:off x="7708392" y="4517136"/>
+            <a:ext cx="3282696" cy="228600"/>
           </a:xfrm>
           <a:prstGeom prst="rect">
             <a:avLst/>
@@ -18047,7 +18053,7 @@
               <a:buNone/>
             </a:pPr>
             <a:r>
-              <a:rPr lang="en-US" sz="1300" b="1" dirty="0">
+              <a:rPr lang="en-US" sz="1220" b="1" dirty="0">
                 <a:solidFill>
                   <a:srgbClr val="0068B7"/>
                 </a:solidFill>
@@ -18057,7 +18063,7 @@
               </a:rPr>
               <a:t>Safeguard to plan</a:t>
             </a:r>
-            <a:endParaRPr lang="en-US" sz="1300" dirty="0"/>
+            <a:endParaRPr lang="en-US" sz="1220" dirty="0"/>
           </a:p>
         </p:txBody>
       </p:sp>
@@ -18069,8 +18075,8 @@
         </p:nvSpPr>
         <p:spPr>
           <a:xfrm>
-            <a:off x="7799832" y="4867351"/>
-            <a:ext cx="3145536" cy="688543"/>
+            <a:off x="7708392" y="4828032"/>
+            <a:ext cx="3282696" cy="749808"/>
           </a:xfrm>
           <a:prstGeom prst="rect">
             <a:avLst/>
@@ -18088,7 +18094,7 @@
               <a:buNone/>
             </a:pPr>
             <a:r>
-              <a:rPr lang="en-US" sz="1320" dirty="0">
+              <a:rPr lang="en-US" sz="1220" dirty="0">
                 <a:solidFill>
                   <a:srgbClr val="17364A"/>
                 </a:solidFill>
@@ -18096,9 +18102,9 @@
                 <a:ea typeface="Aptos" pitchFamily="34" charset="-122"/>
                 <a:cs typeface="Aptos" pitchFamily="34" charset="-120"/>
               </a:rPr>
-              <a:t>Identify what could go wrong, who could be affected, what safeguards are needed, and what evidence should be reviewed before use.</a:t>
-            </a:r>
-            <a:endParaRPr lang="en-US" sz="1320" dirty="0"/>
+              <a:t>Identify what could go wrong, who could be affected, what safeguards are needed,.</a:t>
+            </a:r>
+            <a:endParaRPr lang="en-US" sz="1220" dirty="0"/>
           </a:p>
         </p:txBody>
       </p:sp>

--- a/downloads/presentations/modules/anl-300.pptx
+++ b/downloads/presentations/modules/anl-300.pptx
@@ -11870,7 +11870,7 @@
                 <a:ea typeface="Aptos" pitchFamily="34" charset="-122"/>
                 <a:cs typeface="Aptos" pitchFamily="34" charset="-120"/>
               </a:rPr>
-              <a:t>• 1. Why can overall accuracy be misleading?</a:t>
+              <a:t>1. Why can overall accuracy be misleading?</a:t>
             </a:r>
             <a:endParaRPr lang="en-US" sz="1920" dirty="0"/>
           </a:p>
@@ -11887,7 +11887,7 @@
                 <a:ea typeface="Aptos" pitchFamily="34" charset="-122"/>
                 <a:cs typeface="Aptos" pitchFamily="34" charset="-120"/>
               </a:rPr>
-              <a:t>• 2. What is workflow validation?</a:t>
+              <a:t>2. What is workflow validation?</a:t>
             </a:r>
             <a:endParaRPr lang="en-US" sz="1920" dirty="0"/>
           </a:p>
@@ -11904,7 +11904,7 @@
                 <a:ea typeface="Aptos" pitchFamily="34" charset="-122"/>
                 <a:cs typeface="Aptos" pitchFamily="34" charset="-120"/>
               </a:rPr>
-              <a:t>• 3. Which metric is especially important when missed true events could cause.</a:t>
+              <a:t>3. Which metric is especially important when missed true events could cause.</a:t>
             </a:r>
             <a:endParaRPr lang="en-US" sz="1920" dirty="0"/>
           </a:p>
@@ -12011,7 +12011,7 @@
                 <a:ea typeface="Aptos" pitchFamily="34" charset="-122"/>
                 <a:cs typeface="Aptos" pitchFamily="34" charset="-120"/>
               </a:rPr>
-              <a:t>1. Why can overall accuracy be misleading?</a:t>
+              <a:t>Why can overall accuracy be misleading?</a:t>
             </a:r>
             <a:endParaRPr lang="en-US" sz="1220" dirty="0"/>
           </a:p>
@@ -12118,41 +12118,7 @@
                 <a:ea typeface="Aptos" pitchFamily="34" charset="-122"/>
                 <a:cs typeface="Aptos" pitchFamily="34" charset="-120"/>
               </a:rPr>
-              <a:t>1.</a:t>
-            </a:r>
-            <a:endParaRPr lang="en-US" sz="1140" dirty="0"/>
-          </a:p>
-          <a:p>
-            <a:pPr indent="0" marL="0">
-              <a:buNone/>
-            </a:pPr>
-            <a:r>
-              <a:rPr lang="en-US" sz="1140" dirty="0">
-                <a:solidFill>
-                  <a:srgbClr val="17364A"/>
-                </a:solidFill>
-                <a:latin typeface="Aptos" pitchFamily="34" charset="0"/>
-                <a:ea typeface="Aptos" pitchFamily="34" charset="-122"/>
-                <a:cs typeface="Aptos" pitchFamily="34" charset="-120"/>
-              </a:rPr>
               <a:t>Why can overall accuracy be misleading?</a:t>
-            </a:r>
-            <a:endParaRPr lang="en-US" sz="1140" dirty="0"/>
-          </a:p>
-          <a:p>
-            <a:pPr indent="0" marL="0">
-              <a:buNone/>
-            </a:pPr>
-            <a:r>
-              <a:rPr lang="en-US" sz="1140" dirty="0">
-                <a:solidFill>
-                  <a:srgbClr val="17364A"/>
-                </a:solidFill>
-                <a:latin typeface="Aptos" pitchFamily="34" charset="0"/>
-                <a:ea typeface="Aptos" pitchFamily="34" charset="-122"/>
-                <a:cs typeface="Aptos" pitchFamily="34" charset="-120"/>
-              </a:rPr>
-              <a:t>2.</a:t>
             </a:r>
             <a:endParaRPr lang="en-US" sz="1140" dirty="0"/>
           </a:p>
